--- a/ExaminerB/.appCatalog/ExaminerB notes 1404.pptx
+++ b/ExaminerB/.appCatalog/ExaminerB notes 1404.pptx
@@ -280,7 +280,7 @@
             </a:pPr>
             <a:fld id="{BCC18F51-09EC-435C-A3BA-64A766E099C0}" type="datetimeFigureOut">
               <a:rPr lang="fa-IR"/>
-              <a:t>08/02/1448</a:t>
+              <a:t>16/04/1448</a:t>
             </a:fld>
             <a:endParaRPr/>
           </a:p>
@@ -459,7 +459,7 @@
             </a:pPr>
             <a:fld id="{BCC18F51-09EC-435C-A3BA-64A766E099C0}" type="datetimeFigureOut">
               <a:rPr lang="fa-IR"/>
-              <a:t>08/02/1448</a:t>
+              <a:t>16/04/1448</a:t>
             </a:fld>
             <a:endParaRPr/>
           </a:p>
@@ -648,7 +648,7 @@
             </a:pPr>
             <a:fld id="{BCC18F51-09EC-435C-A3BA-64A766E099C0}" type="datetimeFigureOut">
               <a:rPr lang="fa-IR"/>
-              <a:t>08/02/1448</a:t>
+              <a:t>16/04/1448</a:t>
             </a:fld>
             <a:endParaRPr/>
           </a:p>
@@ -827,7 +827,7 @@
             </a:pPr>
             <a:fld id="{BCC18F51-09EC-435C-A3BA-64A766E099C0}" type="datetimeFigureOut">
               <a:rPr lang="fa-IR"/>
-              <a:t>08/02/1448</a:t>
+              <a:t>16/04/1448</a:t>
             </a:fld>
             <a:endParaRPr/>
           </a:p>
@@ -1079,7 +1079,7 @@
             </a:pPr>
             <a:fld id="{BCC18F51-09EC-435C-A3BA-64A766E099C0}" type="datetimeFigureOut">
               <a:rPr lang="fa-IR"/>
-              <a:t>08/02/1448</a:t>
+              <a:t>16/04/1448</a:t>
             </a:fld>
             <a:endParaRPr/>
           </a:p>
@@ -1324,7 +1324,7 @@
             </a:pPr>
             <a:fld id="{BCC18F51-09EC-435C-A3BA-64A766E099C0}" type="datetimeFigureOut">
               <a:rPr lang="fa-IR"/>
-              <a:t>08/02/1448</a:t>
+              <a:t>16/04/1448</a:t>
             </a:fld>
             <a:endParaRPr/>
           </a:p>
@@ -1706,7 +1706,7 @@
             </a:pPr>
             <a:fld id="{BCC18F51-09EC-435C-A3BA-64A766E099C0}" type="datetimeFigureOut">
               <a:rPr lang="fa-IR"/>
-              <a:t>08/02/1448</a:t>
+              <a:t>16/04/1448</a:t>
             </a:fld>
             <a:endParaRPr/>
           </a:p>
@@ -1829,7 +1829,7 @@
             </a:pPr>
             <a:fld id="{BCC18F51-09EC-435C-A3BA-64A766E099C0}" type="datetimeFigureOut">
               <a:rPr lang="fa-IR"/>
-              <a:t>08/02/1448</a:t>
+              <a:t>16/04/1448</a:t>
             </a:fld>
             <a:endParaRPr/>
           </a:p>
@@ -1928,7 +1928,7 @@
             </a:pPr>
             <a:fld id="{BCC18F51-09EC-435C-A3BA-64A766E099C0}" type="datetimeFigureOut">
               <a:rPr lang="fa-IR"/>
-              <a:t>08/02/1448</a:t>
+              <a:t>16/04/1448</a:t>
             </a:fld>
             <a:endParaRPr/>
           </a:p>
@@ -2215,7 +2215,7 @@
             </a:pPr>
             <a:fld id="{BCC18F51-09EC-435C-A3BA-64A766E099C0}" type="datetimeFigureOut">
               <a:rPr lang="fa-IR"/>
-              <a:t>08/02/1448</a:t>
+              <a:t>16/04/1448</a:t>
             </a:fld>
             <a:endParaRPr/>
           </a:p>
@@ -2479,7 +2479,7 @@
             </a:pPr>
             <a:fld id="{BCC18F51-09EC-435C-A3BA-64A766E099C0}" type="datetimeFigureOut">
               <a:rPr lang="fa-IR"/>
-              <a:t>08/02/1448</a:t>
+              <a:t>16/04/1448</a:t>
             </a:fld>
             <a:endParaRPr/>
           </a:p>
@@ -2701,7 +2701,7 @@
             </a:pPr>
             <a:fld id="{BCC18F51-09EC-435C-A3BA-64A766E099C0}" type="datetimeFigureOut">
               <a:rPr lang="fa-IR"/>
-              <a:t>08/02/1448</a:t>
+              <a:t>16/04/1448</a:t>
             </a:fld>
             <a:endParaRPr/>
           </a:p>
@@ -6669,8 +6669,8 @@
         </p:nvSpPr>
         <p:spPr bwMode="auto">
           <a:xfrm>
-            <a:off x="2433261" y="5434973"/>
-            <a:ext cx="1182038" cy="900550"/>
+            <a:off x="2433261" y="5434972"/>
+            <a:ext cx="1182038" cy="1055015"/>
           </a:xfrm>
           <a:prstGeom prst="roundRect">
             <a:avLst>
@@ -6788,6 +6788,41 @@
                 <a:cs typeface="Segoe UI" panose="020B0502040204020203" pitchFamily="34" charset="0"/>
               </a:rPr>
               <a:t>UserId</a:t>
+            </a:r>
+          </a:p>
+          <a:p>
+            <a:pPr rtl="0">
+              <a:defRPr/>
+            </a:pPr>
+            <a:r>
+              <a:rPr lang="en-US" sz="853">
+                <a:solidFill>
+                  <a:schemeClr val="tx1"/>
+                </a:solidFill>
+                <a:latin typeface="Segoe UI" panose="020B0502040204020203" pitchFamily="34" charset="0"/>
+                <a:cs typeface="Segoe UI" panose="020B0502040204020203" pitchFamily="34" charset="0"/>
+              </a:rPr>
+              <a:t>Group</a:t>
+            </a:r>
+            <a:r>
+              <a:rPr lang="en-US" sz="853">
+                <a:solidFill>
+                  <a:srgbClr val="C00000"/>
+                </a:solidFill>
+                <a:latin typeface="Segoe UI" panose="020B0502040204020203" pitchFamily="34" charset="0"/>
+                <a:cs typeface="Segoe UI" panose="020B0502040204020203" pitchFamily="34" charset="0"/>
+              </a:rPr>
+              <a:t>Tags   </a:t>
+            </a:r>
+            <a:r>
+              <a:rPr lang="en-US" sz="600">
+                <a:solidFill>
+                  <a:srgbClr val="C00000"/>
+                </a:solidFill>
+                <a:latin typeface="Segoe UI" panose="020B0502040204020203" pitchFamily="34" charset="0"/>
+                <a:cs typeface="Segoe UI" panose="020B0502040204020203" pitchFamily="34" charset="0"/>
+              </a:rPr>
+              <a:t>1: act</a:t>
             </a:r>
           </a:p>
         </p:txBody>
@@ -8216,7 +8251,7 @@
         <p:spPr bwMode="auto">
           <a:xfrm>
             <a:off x="2931927" y="4398309"/>
-            <a:ext cx="1467637" cy="1268300"/>
+            <a:ext cx="1467637" cy="1292682"/>
           </a:xfrm>
           <a:prstGeom prst="roundRect">
             <a:avLst>
@@ -8365,7 +8400,7 @@
           <a:p>
             <a:pPr rtl="0"/>
             <a:r>
-              <a:rPr lang="en-US" sz="500">
+              <a:rPr lang="en-US" sz="600">
                 <a:solidFill>
                   <a:srgbClr val="C00000"/>
                 </a:solidFill>

--- a/ExaminerB/.appCatalog/ExaminerB notes 1404.pptx
+++ b/ExaminerB/.appCatalog/ExaminerB notes 1404.pptx
@@ -280,7 +280,7 @@
             </a:pPr>
             <a:fld id="{BCC18F51-09EC-435C-A3BA-64A766E099C0}" type="datetimeFigureOut">
               <a:rPr lang="fa-IR"/>
-              <a:t>16/04/1448</a:t>
+              <a:t>17/04/1448</a:t>
             </a:fld>
             <a:endParaRPr/>
           </a:p>
@@ -459,7 +459,7 @@
             </a:pPr>
             <a:fld id="{BCC18F51-09EC-435C-A3BA-64A766E099C0}" type="datetimeFigureOut">
               <a:rPr lang="fa-IR"/>
-              <a:t>16/04/1448</a:t>
+              <a:t>17/04/1448</a:t>
             </a:fld>
             <a:endParaRPr/>
           </a:p>
@@ -648,7 +648,7 @@
             </a:pPr>
             <a:fld id="{BCC18F51-09EC-435C-A3BA-64A766E099C0}" type="datetimeFigureOut">
               <a:rPr lang="fa-IR"/>
-              <a:t>16/04/1448</a:t>
+              <a:t>17/04/1448</a:t>
             </a:fld>
             <a:endParaRPr/>
           </a:p>
@@ -827,7 +827,7 @@
             </a:pPr>
             <a:fld id="{BCC18F51-09EC-435C-A3BA-64A766E099C0}" type="datetimeFigureOut">
               <a:rPr lang="fa-IR"/>
-              <a:t>16/04/1448</a:t>
+              <a:t>17/04/1448</a:t>
             </a:fld>
             <a:endParaRPr/>
           </a:p>
@@ -1079,7 +1079,7 @@
             </a:pPr>
             <a:fld id="{BCC18F51-09EC-435C-A3BA-64A766E099C0}" type="datetimeFigureOut">
               <a:rPr lang="fa-IR"/>
-              <a:t>16/04/1448</a:t>
+              <a:t>17/04/1448</a:t>
             </a:fld>
             <a:endParaRPr/>
           </a:p>
@@ -1324,7 +1324,7 @@
             </a:pPr>
             <a:fld id="{BCC18F51-09EC-435C-A3BA-64A766E099C0}" type="datetimeFigureOut">
               <a:rPr lang="fa-IR"/>
-              <a:t>16/04/1448</a:t>
+              <a:t>17/04/1448</a:t>
             </a:fld>
             <a:endParaRPr/>
           </a:p>
@@ -1706,7 +1706,7 @@
             </a:pPr>
             <a:fld id="{BCC18F51-09EC-435C-A3BA-64A766E099C0}" type="datetimeFigureOut">
               <a:rPr lang="fa-IR"/>
-              <a:t>16/04/1448</a:t>
+              <a:t>17/04/1448</a:t>
             </a:fld>
             <a:endParaRPr/>
           </a:p>
@@ -1829,7 +1829,7 @@
             </a:pPr>
             <a:fld id="{BCC18F51-09EC-435C-A3BA-64A766E099C0}" type="datetimeFigureOut">
               <a:rPr lang="fa-IR"/>
-              <a:t>16/04/1448</a:t>
+              <a:t>17/04/1448</a:t>
             </a:fld>
             <a:endParaRPr/>
           </a:p>
@@ -1928,7 +1928,7 @@
             </a:pPr>
             <a:fld id="{BCC18F51-09EC-435C-A3BA-64A766E099C0}" type="datetimeFigureOut">
               <a:rPr lang="fa-IR"/>
-              <a:t>16/04/1448</a:t>
+              <a:t>17/04/1448</a:t>
             </a:fld>
             <a:endParaRPr/>
           </a:p>
@@ -2215,7 +2215,7 @@
             </a:pPr>
             <a:fld id="{BCC18F51-09EC-435C-A3BA-64A766E099C0}" type="datetimeFigureOut">
               <a:rPr lang="fa-IR"/>
-              <a:t>16/04/1448</a:t>
+              <a:t>17/04/1448</a:t>
             </a:fld>
             <a:endParaRPr/>
           </a:p>
@@ -2479,7 +2479,7 @@
             </a:pPr>
             <a:fld id="{BCC18F51-09EC-435C-A3BA-64A766E099C0}" type="datetimeFigureOut">
               <a:rPr lang="fa-IR"/>
-              <a:t>16/04/1448</a:t>
+              <a:t>17/04/1448</a:t>
             </a:fld>
             <a:endParaRPr/>
           </a:p>
@@ -2701,7 +2701,7 @@
             </a:pPr>
             <a:fld id="{BCC18F51-09EC-435C-A3BA-64A766E099C0}" type="datetimeFigureOut">
               <a:rPr lang="fa-IR"/>
-              <a:t>16/04/1448</a:t>
+              <a:t>17/04/1448</a:t>
             </a:fld>
             <a:endParaRPr/>
           </a:p>
@@ -3333,10 +3333,7 @@
             </a:pathLst>
           </a:custGeom>
           <a:solidFill>
-            <a:schemeClr val="accent6">
-              <a:lumMod val="20000"/>
-              <a:lumOff val="80000"/>
-            </a:schemeClr>
+            <a:srgbClr val="EEF7E9"/>
           </a:solidFill>
           <a:ln w="28575">
             <a:noFill/>
@@ -5306,10 +5303,7 @@
             </a:pathLst>
           </a:custGeom>
           <a:solidFill>
-            <a:schemeClr val="accent1">
-              <a:lumMod val="20000"/>
-              <a:lumOff val="80000"/>
-            </a:schemeClr>
+            <a:srgbClr val="ECF3FA"/>
           </a:solidFill>
           <a:ln w="28575">
             <a:noFill/>
@@ -6047,10 +6041,7 @@
             </a:pathLst>
           </a:custGeom>
           <a:solidFill>
-            <a:schemeClr val="accent2">
-              <a:lumMod val="20000"/>
-              <a:lumOff val="80000"/>
-            </a:schemeClr>
+            <a:srgbClr val="FDF0E7"/>
           </a:solidFill>
           <a:ln w="28575">
             <a:noFill/>
@@ -6503,7 +6494,7 @@
         <p:spPr bwMode="auto">
           <a:xfrm>
             <a:off x="1641714" y="3131727"/>
-            <a:ext cx="1182039" cy="1199659"/>
+            <a:ext cx="1182039" cy="1404678"/>
           </a:xfrm>
           <a:prstGeom prst="roundRect">
             <a:avLst>
@@ -6652,6 +6643,48 @@
               </a:rPr>
               <a:t>MessageBody</a:t>
             </a:r>
+          </a:p>
+          <a:p>
+            <a:pPr rtl="0">
+              <a:defRPr/>
+            </a:pPr>
+            <a:r>
+              <a:rPr lang="en-US" sz="853">
+                <a:solidFill>
+                  <a:schemeClr val="tx1"/>
+                </a:solidFill>
+                <a:latin typeface="Segoe UI" panose="020B0502040204020203" pitchFamily="34" charset="0"/>
+                <a:cs typeface="Segoe UI" panose="020B0502040204020203" pitchFamily="34" charset="0"/>
+              </a:rPr>
+              <a:t>Message</a:t>
+            </a:r>
+            <a:r>
+              <a:rPr lang="en-US" sz="853">
+                <a:solidFill>
+                  <a:srgbClr val="C00000"/>
+                </a:solidFill>
+                <a:latin typeface="Segoe UI" panose="020B0502040204020203" pitchFamily="34" charset="0"/>
+                <a:cs typeface="Segoe UI" panose="020B0502040204020203" pitchFamily="34" charset="0"/>
+              </a:rPr>
+              <a:t>Tags   </a:t>
+            </a:r>
+            <a:r>
+              <a:rPr lang="en-US" sz="700">
+                <a:solidFill>
+                  <a:srgbClr val="C00000"/>
+                </a:solidFill>
+                <a:latin typeface="Segoe UI" panose="020B0502040204020203" pitchFamily="34" charset="0"/>
+                <a:cs typeface="Segoe UI" panose="020B0502040204020203" pitchFamily="34" charset="0"/>
+              </a:rPr>
+              <a:t>1: act</a:t>
+            </a:r>
+            <a:endParaRPr lang="en-US" sz="853">
+              <a:solidFill>
+                <a:srgbClr val="C00000"/>
+              </a:solidFill>
+              <a:latin typeface="Segoe UI" panose="020B0502040204020203" pitchFamily="34" charset="0"/>
+              <a:cs typeface="Segoe UI" panose="020B0502040204020203" pitchFamily="34" charset="0"/>
+            </a:endParaRPr>
           </a:p>
         </p:txBody>
       </p:sp>
@@ -8426,8 +8459,8 @@
         </p:nvSpPr>
         <p:spPr>
           <a:xfrm>
-            <a:off x="10063108" y="8393387"/>
-            <a:ext cx="1467068" cy="230832"/>
+            <a:off x="9576668" y="8352829"/>
+            <a:ext cx="1883849" cy="276999"/>
           </a:xfrm>
           <a:prstGeom prst="rect">
             <a:avLst/>
@@ -8442,7 +8475,7 @@
           <a:p>
             <a:pPr algn="l" rtl="0"/>
             <a:r>
-              <a:rPr lang="en-US" sz="900">
+              <a:rPr lang="en-US" sz="1200">
                 <a:solidFill>
                   <a:schemeClr val="accent5">
                     <a:lumMod val="75000"/>
@@ -8452,7 +8485,7 @@
               </a:rPr>
               <a:t>Majid SharifiTehrani</a:t>
             </a:r>
-            <a:endParaRPr lang="fa-IR" sz="900">
+            <a:endParaRPr lang="fa-IR" sz="1200">
               <a:solidFill>
                 <a:schemeClr val="accent5">
                   <a:lumMod val="75000"/>
@@ -11827,8 +11860,8 @@
         </p:blipFill>
         <p:spPr bwMode="auto">
           <a:xfrm>
-            <a:off x="10049013" y="7897994"/>
-            <a:ext cx="1414177" cy="525095"/>
+            <a:off x="9288636" y="23185"/>
+            <a:ext cx="2176215" cy="452230"/>
           </a:xfrm>
           <a:prstGeom prst="rect">
             <a:avLst/>

--- a/ExaminerB/.appCatalog/ExaminerB notes 1404.pptx
+++ b/ExaminerB/.appCatalog/ExaminerB notes 1404.pptx
@@ -280,7 +280,7 @@
             </a:pPr>
             <a:fld id="{BCC18F51-09EC-435C-A3BA-64A766E099C0}" type="datetimeFigureOut">
               <a:rPr lang="fa-IR"/>
-              <a:t>17/04/1448</a:t>
+              <a:t>01/05/1448</a:t>
             </a:fld>
             <a:endParaRPr/>
           </a:p>
@@ -459,7 +459,7 @@
             </a:pPr>
             <a:fld id="{BCC18F51-09EC-435C-A3BA-64A766E099C0}" type="datetimeFigureOut">
               <a:rPr lang="fa-IR"/>
-              <a:t>17/04/1448</a:t>
+              <a:t>01/05/1448</a:t>
             </a:fld>
             <a:endParaRPr/>
           </a:p>
@@ -648,7 +648,7 @@
             </a:pPr>
             <a:fld id="{BCC18F51-09EC-435C-A3BA-64A766E099C0}" type="datetimeFigureOut">
               <a:rPr lang="fa-IR"/>
-              <a:t>17/04/1448</a:t>
+              <a:t>01/05/1448</a:t>
             </a:fld>
             <a:endParaRPr/>
           </a:p>
@@ -827,7 +827,7 @@
             </a:pPr>
             <a:fld id="{BCC18F51-09EC-435C-A3BA-64A766E099C0}" type="datetimeFigureOut">
               <a:rPr lang="fa-IR"/>
-              <a:t>17/04/1448</a:t>
+              <a:t>01/05/1448</a:t>
             </a:fld>
             <a:endParaRPr/>
           </a:p>
@@ -1079,7 +1079,7 @@
             </a:pPr>
             <a:fld id="{BCC18F51-09EC-435C-A3BA-64A766E099C0}" type="datetimeFigureOut">
               <a:rPr lang="fa-IR"/>
-              <a:t>17/04/1448</a:t>
+              <a:t>01/05/1448</a:t>
             </a:fld>
             <a:endParaRPr/>
           </a:p>
@@ -1324,7 +1324,7 @@
             </a:pPr>
             <a:fld id="{BCC18F51-09EC-435C-A3BA-64A766E099C0}" type="datetimeFigureOut">
               <a:rPr lang="fa-IR"/>
-              <a:t>17/04/1448</a:t>
+              <a:t>01/05/1448</a:t>
             </a:fld>
             <a:endParaRPr/>
           </a:p>
@@ -1706,7 +1706,7 @@
             </a:pPr>
             <a:fld id="{BCC18F51-09EC-435C-A3BA-64A766E099C0}" type="datetimeFigureOut">
               <a:rPr lang="fa-IR"/>
-              <a:t>17/04/1448</a:t>
+              <a:t>01/05/1448</a:t>
             </a:fld>
             <a:endParaRPr/>
           </a:p>
@@ -1829,7 +1829,7 @@
             </a:pPr>
             <a:fld id="{BCC18F51-09EC-435C-A3BA-64A766E099C0}" type="datetimeFigureOut">
               <a:rPr lang="fa-IR"/>
-              <a:t>17/04/1448</a:t>
+              <a:t>01/05/1448</a:t>
             </a:fld>
             <a:endParaRPr/>
           </a:p>
@@ -1928,7 +1928,7 @@
             </a:pPr>
             <a:fld id="{BCC18F51-09EC-435C-A3BA-64A766E099C0}" type="datetimeFigureOut">
               <a:rPr lang="fa-IR"/>
-              <a:t>17/04/1448</a:t>
+              <a:t>01/05/1448</a:t>
             </a:fld>
             <a:endParaRPr/>
           </a:p>
@@ -2215,7 +2215,7 @@
             </a:pPr>
             <a:fld id="{BCC18F51-09EC-435C-A3BA-64A766E099C0}" type="datetimeFigureOut">
               <a:rPr lang="fa-IR"/>
-              <a:t>17/04/1448</a:t>
+              <a:t>01/05/1448</a:t>
             </a:fld>
             <a:endParaRPr/>
           </a:p>
@@ -2479,7 +2479,7 @@
             </a:pPr>
             <a:fld id="{BCC18F51-09EC-435C-A3BA-64A766E099C0}" type="datetimeFigureOut">
               <a:rPr lang="fa-IR"/>
-              <a:t>17/04/1448</a:t>
+              <a:t>01/05/1448</a:t>
             </a:fld>
             <a:endParaRPr/>
           </a:p>
@@ -2701,7 +2701,7 @@
             </a:pPr>
             <a:fld id="{BCC18F51-09EC-435C-A3BA-64A766E099C0}" type="datetimeFigureOut">
               <a:rPr lang="fa-IR"/>
-              <a:t>17/04/1448</a:t>
+              <a:t>01/05/1448</a:t>
             </a:fld>
             <a:endParaRPr/>
           </a:p>
@@ -4891,7 +4891,7 @@
         </p:nvSpPr>
         <p:spPr bwMode="auto">
           <a:xfrm rot="1935669">
-            <a:off x="4237895" y="4679288"/>
+            <a:off x="4231509" y="4679288"/>
             <a:ext cx="4870584" cy="4854020"/>
           </a:xfrm>
           <a:custGeom>
@@ -7081,7 +7081,7 @@
                 <a:latin typeface="Segoe UI" panose="020B0502040204020203" pitchFamily="34" charset="0"/>
                 <a:cs typeface="Segoe UI" panose="020B0502040204020203" pitchFamily="34" charset="0"/>
               </a:rPr>
-              <a:t>4: ReviewEx</a:t>
+              <a:t>4: -</a:t>
             </a:r>
           </a:p>
           <a:p>
@@ -7096,7 +7096,7 @@
                 <a:latin typeface="Segoe UI" panose="020B0502040204020203" pitchFamily="34" charset="0"/>
                 <a:cs typeface="Segoe UI" panose="020B0502040204020203" pitchFamily="34" charset="0"/>
               </a:rPr>
-              <a:t>8: GetStExTests</a:t>
+              <a:t>8: -</a:t>
             </a:r>
           </a:p>
           <a:p>
@@ -7111,7 +7111,7 @@
                 <a:latin typeface="Segoe UI" panose="020B0502040204020203" pitchFamily="34" charset="0"/>
                 <a:cs typeface="Segoe UI" panose="020B0502040204020203" pitchFamily="34" charset="0"/>
               </a:rPr>
-              <a:t>16: CorrectStExTests</a:t>
+              <a:t>16: ShowDueNotes</a:t>
             </a:r>
           </a:p>
           <a:p>
@@ -7126,7 +7126,7 @@
                 <a:latin typeface="Segoe UI" panose="020B0502040204020203" pitchFamily="34" charset="0"/>
                 <a:cs typeface="Segoe UI" panose="020B0502040204020203" pitchFamily="34" charset="0"/>
               </a:rPr>
-              <a:t>32: RevStExTests</a:t>
+              <a:t>32: DueNtDays=14 (def.=7)</a:t>
             </a:r>
           </a:p>
           <a:p>
@@ -7156,7 +7156,7 @@
                 <a:latin typeface="Segoe UI" panose="020B0502040204020203" pitchFamily="34" charset="0"/>
                 <a:cs typeface="Segoe UI" panose="020B0502040204020203" pitchFamily="34" charset="0"/>
               </a:rPr>
-              <a:t>128:</a:t>
+              <a:t>128: -</a:t>
             </a:r>
           </a:p>
           <a:p>
@@ -8706,7 +8706,7 @@
         </p:nvSpPr>
         <p:spPr bwMode="auto">
           <a:xfrm>
-            <a:off x="5289398" y="4422044"/>
+            <a:off x="5328196" y="4422044"/>
             <a:ext cx="1637820" cy="1663618"/>
           </a:xfrm>
           <a:prstGeom prst="roundRect">
@@ -11378,7 +11378,7 @@
                 <a:latin typeface="Segoe UI" panose="020B0502040204020203" pitchFamily="34" charset="0"/>
                 <a:cs typeface="Segoe UI" panose="020B0502040204020203" pitchFamily="34" charset="0"/>
               </a:rPr>
-              <a:t>32  : DueNotesDays=7 (default=3)</a:t>
+              <a:t>32  : DueNotesDays=14 (default=7)</a:t>
             </a:r>
           </a:p>
           <a:p>

--- a/ExaminerB/.appCatalog/ExaminerB notes 1404.pptx
+++ b/ExaminerB/.appCatalog/ExaminerB notes 1404.pptx
@@ -280,7 +280,7 @@
             </a:pPr>
             <a:fld id="{BCC18F51-09EC-435C-A3BA-64A766E099C0}" type="datetimeFigureOut">
               <a:rPr lang="fa-IR"/>
-              <a:t>01/05/1448</a:t>
+              <a:t>03/05/1448</a:t>
             </a:fld>
             <a:endParaRPr/>
           </a:p>
@@ -459,7 +459,7 @@
             </a:pPr>
             <a:fld id="{BCC18F51-09EC-435C-A3BA-64A766E099C0}" type="datetimeFigureOut">
               <a:rPr lang="fa-IR"/>
-              <a:t>01/05/1448</a:t>
+              <a:t>03/05/1448</a:t>
             </a:fld>
             <a:endParaRPr/>
           </a:p>
@@ -648,7 +648,7 @@
             </a:pPr>
             <a:fld id="{BCC18F51-09EC-435C-A3BA-64A766E099C0}" type="datetimeFigureOut">
               <a:rPr lang="fa-IR"/>
-              <a:t>01/05/1448</a:t>
+              <a:t>03/05/1448</a:t>
             </a:fld>
             <a:endParaRPr/>
           </a:p>
@@ -827,7 +827,7 @@
             </a:pPr>
             <a:fld id="{BCC18F51-09EC-435C-A3BA-64A766E099C0}" type="datetimeFigureOut">
               <a:rPr lang="fa-IR"/>
-              <a:t>01/05/1448</a:t>
+              <a:t>03/05/1448</a:t>
             </a:fld>
             <a:endParaRPr/>
           </a:p>
@@ -1079,7 +1079,7 @@
             </a:pPr>
             <a:fld id="{BCC18F51-09EC-435C-A3BA-64A766E099C0}" type="datetimeFigureOut">
               <a:rPr lang="fa-IR"/>
-              <a:t>01/05/1448</a:t>
+              <a:t>03/05/1448</a:t>
             </a:fld>
             <a:endParaRPr/>
           </a:p>
@@ -1324,7 +1324,7 @@
             </a:pPr>
             <a:fld id="{BCC18F51-09EC-435C-A3BA-64A766E099C0}" type="datetimeFigureOut">
               <a:rPr lang="fa-IR"/>
-              <a:t>01/05/1448</a:t>
+              <a:t>03/05/1448</a:t>
             </a:fld>
             <a:endParaRPr/>
           </a:p>
@@ -1706,7 +1706,7 @@
             </a:pPr>
             <a:fld id="{BCC18F51-09EC-435C-A3BA-64A766E099C0}" type="datetimeFigureOut">
               <a:rPr lang="fa-IR"/>
-              <a:t>01/05/1448</a:t>
+              <a:t>03/05/1448</a:t>
             </a:fld>
             <a:endParaRPr/>
           </a:p>
@@ -1829,7 +1829,7 @@
             </a:pPr>
             <a:fld id="{BCC18F51-09EC-435C-A3BA-64A766E099C0}" type="datetimeFigureOut">
               <a:rPr lang="fa-IR"/>
-              <a:t>01/05/1448</a:t>
+              <a:t>03/05/1448</a:t>
             </a:fld>
             <a:endParaRPr/>
           </a:p>
@@ -1928,7 +1928,7 @@
             </a:pPr>
             <a:fld id="{BCC18F51-09EC-435C-A3BA-64A766E099C0}" type="datetimeFigureOut">
               <a:rPr lang="fa-IR"/>
-              <a:t>01/05/1448</a:t>
+              <a:t>03/05/1448</a:t>
             </a:fld>
             <a:endParaRPr/>
           </a:p>
@@ -2215,7 +2215,7 @@
             </a:pPr>
             <a:fld id="{BCC18F51-09EC-435C-A3BA-64A766E099C0}" type="datetimeFigureOut">
               <a:rPr lang="fa-IR"/>
-              <a:t>01/05/1448</a:t>
+              <a:t>03/05/1448</a:t>
             </a:fld>
             <a:endParaRPr/>
           </a:p>
@@ -2479,7 +2479,7 @@
             </a:pPr>
             <a:fld id="{BCC18F51-09EC-435C-A3BA-64A766E099C0}" type="datetimeFigureOut">
               <a:rPr lang="fa-IR"/>
-              <a:t>01/05/1448</a:t>
+              <a:t>03/05/1448</a:t>
             </a:fld>
             <a:endParaRPr/>
           </a:p>
@@ -2701,7 +2701,7 @@
             </a:pPr>
             <a:fld id="{BCC18F51-09EC-435C-A3BA-64A766E099C0}" type="datetimeFigureOut">
               <a:rPr lang="fa-IR"/>
-              <a:t>01/05/1448</a:t>
+              <a:t>03/05/1448</a:t>
             </a:fld>
             <a:endParaRPr/>
           </a:p>
@@ -6494,7 +6494,7 @@
         <p:spPr bwMode="auto">
           <a:xfrm>
             <a:off x="1641714" y="3131727"/>
-            <a:ext cx="1182039" cy="1404678"/>
+            <a:ext cx="1182039" cy="1793270"/>
           </a:xfrm>
           <a:prstGeom prst="roundRect">
             <a:avLst>
@@ -6666,8 +6666,13 @@
                 <a:latin typeface="Segoe UI" panose="020B0502040204020203" pitchFamily="34" charset="0"/>
                 <a:cs typeface="Segoe UI" panose="020B0502040204020203" pitchFamily="34" charset="0"/>
               </a:rPr>
-              <a:t>Tags   </a:t>
-            </a:r>
+              <a:t>Tags </a:t>
+            </a:r>
+          </a:p>
+          <a:p>
+            <a:pPr rtl="0">
+              <a:defRPr/>
+            </a:pPr>
             <a:r>
               <a:rPr lang="en-US" sz="700">
                 <a:solidFill>
@@ -6678,13 +6683,71 @@
               </a:rPr>
               <a:t>1: act</a:t>
             </a:r>
-            <a:endParaRPr lang="en-US" sz="853">
-              <a:solidFill>
-                <a:srgbClr val="C00000"/>
-              </a:solidFill>
-              <a:latin typeface="Segoe UI" panose="020B0502040204020203" pitchFamily="34" charset="0"/>
-              <a:cs typeface="Segoe UI" panose="020B0502040204020203" pitchFamily="34" charset="0"/>
-            </a:endParaRPr>
+          </a:p>
+          <a:p>
+            <a:pPr rtl="0">
+              <a:defRPr/>
+            </a:pPr>
+            <a:r>
+              <a:rPr lang="en-US" sz="800">
+                <a:solidFill>
+                  <a:srgbClr val="C00000"/>
+                </a:solidFill>
+                <a:latin typeface="Segoe UI" panose="020B0502040204020203" pitchFamily="34" charset="0"/>
+                <a:cs typeface="Segoe UI" panose="020B0502040204020203" pitchFamily="34" charset="0"/>
+              </a:rPr>
+              <a:t>2: IsSelected</a:t>
+            </a:r>
+          </a:p>
+          <a:p>
+            <a:pPr marL="0" marR="0" lvl="0" indent="0" defTabSz="914400" rtl="0" eaLnBrk="1" fontAlgn="auto" latinLnBrk="0" hangingPunct="1">
+              <a:lnSpc>
+                <a:spcPct val="100000"/>
+              </a:lnSpc>
+              <a:spcBef>
+                <a:spcPts val="0"/>
+              </a:spcBef>
+              <a:spcAft>
+                <a:spcPts val="0"/>
+              </a:spcAft>
+              <a:buClrTx/>
+              <a:buSzTx/>
+              <a:buFontTx/>
+              <a:buNone/>
+              <a:tabLst/>
+              <a:defRPr/>
+            </a:pPr>
+            <a:r>
+              <a:rPr kumimoji="0" lang="en-US" sz="800" b="0" i="0" u="none" strike="noStrike" kern="0" cap="none" spc="0" normalizeH="0" baseline="0" noProof="0">
+                <a:ln>
+                  <a:noFill/>
+                </a:ln>
+                <a:solidFill>
+                  <a:srgbClr val="C00000"/>
+                </a:solidFill>
+                <a:effectLst/>
+                <a:uLnTx/>
+                <a:uFillTx/>
+                <a:latin typeface="Segoe UI" panose="020B0502040204020203" pitchFamily="34" charset="0"/>
+                <a:cs typeface="Segoe UI" panose="020B0502040204020203" pitchFamily="34" charset="0"/>
+              </a:rPr>
+              <a:t>4: -</a:t>
+            </a:r>
+          </a:p>
+          <a:p>
+            <a:pPr rtl="0">
+              <a:defRPr/>
+            </a:pPr>
+            <a:r>
+              <a:rPr lang="en-US" sz="800">
+                <a:solidFill>
+                  <a:srgbClr val="C00000"/>
+                </a:solidFill>
+                <a:latin typeface="Segoe UI" panose="020B0502040204020203" pitchFamily="34" charset="0"/>
+                <a:cs typeface="Segoe UI" panose="020B0502040204020203" pitchFamily="34" charset="0"/>
+              </a:rPr>
+              <a:t>8: -</a:t>
+            </a:r>
           </a:p>
         </p:txBody>
       </p:sp>

--- a/ExaminerB/.appCatalog/ExaminerB notes 1404.pptx
+++ b/ExaminerB/.appCatalog/ExaminerB notes 1404.pptx
@@ -12,20 +12,20 @@
     <p:sldId id="263" r:id="rId3"/>
     <p:sldId id="264" r:id="rId4"/>
   </p:sldIdLst>
-  <p:sldSz cx="11520488" cy="8640763"/>
-  <p:notesSz cx="6858000" cy="9144000"/>
+  <p:sldSz cx="9906000" cy="6858000" type="A4"/>
+  <p:notesSz cx="6645275" cy="9777413"/>
   <p:defaultTextStyle>
     <a:defPPr/>
   </p:defaultTextStyle>
   <p:extLst>
     <p:ext uri="{EFAFB233-063F-42B5-8137-9DF3F51BA10A}">
       <p15:sldGuideLst xmlns:p15="http://schemas.microsoft.com/office/powerpoint/2012/main">
-        <p15:guide id="1" orient="horz" pos="3292" userDrawn="1">
+        <p15:guide id="1" orient="horz" pos="2613" userDrawn="1">
           <p15:clr>
             <a:srgbClr val="A4A3A4"/>
           </p15:clr>
         </p15:guide>
-        <p15:guide id="2" pos="3293" userDrawn="1">
+        <p15:guide id="2" pos="2832" userDrawn="1">
           <p15:clr>
             <a:srgbClr val="A4A3A4"/>
           </p15:clr>
@@ -106,8 +106,8 @@
         </p:nvSpPr>
         <p:spPr bwMode="auto">
           <a:xfrm>
-            <a:off x="719954" y="4679705"/>
-            <a:ext cx="6119614" cy="5039682"/>
+            <a:off x="697622" y="5003872"/>
+            <a:ext cx="5929793" cy="369332"/>
           </a:xfrm>
           <a:prstGeom prst="rect">
             <a:avLst/>
@@ -173,15 +173,15 @@
         </p:nvSpPr>
         <p:spPr bwMode="auto">
           <a:xfrm>
-            <a:off x="1440109" y="1414293"/>
-            <a:ext cx="8640647" cy="3008626"/>
+            <a:off x="1238292" y="1122496"/>
+            <a:ext cx="7429742" cy="2387886"/>
           </a:xfrm>
         </p:spPr>
         <p:txBody>
           <a:bodyPr anchor="b"/>
           <a:lstStyle>
             <a:lvl1pPr algn="ctr">
-              <a:defRPr sz="954"/>
+              <a:defRPr sz="757"/>
             </a:lvl1pPr>
           </a:lstStyle>
           <a:p>
@@ -206,8 +206,8 @@
         </p:nvSpPr>
         <p:spPr bwMode="auto">
           <a:xfrm>
-            <a:off x="1440109" y="4538946"/>
-            <a:ext cx="8640647" cy="2086434"/>
+            <a:off x="1238292" y="3602470"/>
+            <a:ext cx="7429742" cy="1655961"/>
           </a:xfrm>
         </p:spPr>
         <p:txBody>
@@ -215,39 +215,39 @@
           <a:lstStyle>
             <a:lvl1pPr marL="0" indent="0" algn="ctr">
               <a:buNone/>
-              <a:defRPr sz="382"/>
+              <a:defRPr sz="303"/>
             </a:lvl1pPr>
-            <a:lvl2pPr marL="72683" indent="0" algn="ctr">
+            <a:lvl2pPr marL="57688" indent="0" algn="ctr">
               <a:buNone/>
-              <a:defRPr sz="318"/>
+              <a:defRPr sz="252"/>
             </a:lvl2pPr>
-            <a:lvl3pPr marL="145367" indent="0" algn="ctr">
+            <a:lvl3pPr marL="115378" indent="0" algn="ctr">
               <a:buNone/>
-              <a:defRPr sz="286"/>
+              <a:defRPr sz="227"/>
             </a:lvl3pPr>
-            <a:lvl4pPr marL="218049" indent="0" algn="ctr">
+            <a:lvl4pPr marL="173065" indent="0" algn="ctr">
               <a:buNone/>
-              <a:defRPr sz="254"/>
+              <a:defRPr sz="202"/>
             </a:lvl4pPr>
-            <a:lvl5pPr marL="290732" indent="0" algn="ctr">
+            <a:lvl5pPr marL="230754" indent="0" algn="ctr">
               <a:buNone/>
-              <a:defRPr sz="254"/>
+              <a:defRPr sz="202"/>
             </a:lvl5pPr>
-            <a:lvl6pPr marL="363416" indent="0" algn="ctr">
+            <a:lvl6pPr marL="288443" indent="0" algn="ctr">
               <a:buNone/>
-              <a:defRPr sz="254"/>
+              <a:defRPr sz="202"/>
             </a:lvl6pPr>
-            <a:lvl7pPr marL="436099" indent="0" algn="ctr">
+            <a:lvl7pPr marL="346132" indent="0" algn="ctr">
               <a:buNone/>
-              <a:defRPr sz="254"/>
+              <a:defRPr sz="202"/>
             </a:lvl7pPr>
-            <a:lvl8pPr marL="508782" indent="0" algn="ctr">
+            <a:lvl8pPr marL="403820" indent="0" algn="ctr">
               <a:buNone/>
-              <a:defRPr sz="254"/>
+              <a:defRPr sz="202"/>
             </a:lvl8pPr>
-            <a:lvl9pPr marL="581464" indent="0" algn="ctr">
+            <a:lvl9pPr marL="461508" indent="0" algn="ctr">
               <a:buNone/>
-              <a:defRPr sz="254"/>
+              <a:defRPr sz="202"/>
             </a:lvl9pPr>
           </a:lstStyle>
           <a:p>
@@ -280,7 +280,7 @@
             </a:pPr>
             <a:fld id="{BCC18F51-09EC-435C-A3BA-64A766E099C0}" type="datetimeFigureOut">
               <a:rPr lang="fa-IR"/>
-              <a:t>03/05/1448</a:t>
+              <a:t>10/05/1448</a:t>
             </a:fld>
             <a:endParaRPr/>
           </a:p>
@@ -459,7 +459,7 @@
             </a:pPr>
             <a:fld id="{BCC18F51-09EC-435C-A3BA-64A766E099C0}" type="datetimeFigureOut">
               <a:rPr lang="fa-IR"/>
-              <a:t>03/05/1448</a:t>
+              <a:t>10/05/1448</a:t>
             </a:fld>
             <a:endParaRPr/>
           </a:p>
@@ -550,8 +550,8 @@
         </p:nvSpPr>
         <p:spPr bwMode="auto">
           <a:xfrm>
-            <a:off x="8244622" y="460101"/>
-            <a:ext cx="2484183" cy="7323524"/>
+            <a:off x="7089216" y="365173"/>
+            <a:ext cx="2136048" cy="5812534"/>
           </a:xfrm>
         </p:spPr>
         <p:txBody>
@@ -579,8 +579,8 @@
         </p:nvSpPr>
         <p:spPr bwMode="auto">
           <a:xfrm>
-            <a:off x="792066" y="460101"/>
-            <a:ext cx="7308547" cy="7323524"/>
+            <a:off x="681066" y="365173"/>
+            <a:ext cx="6284323" cy="5812534"/>
           </a:xfrm>
         </p:spPr>
         <p:txBody>
@@ -648,7 +648,7 @@
             </a:pPr>
             <a:fld id="{BCC18F51-09EC-435C-A3BA-64A766E099C0}" type="datetimeFigureOut">
               <a:rPr lang="fa-IR"/>
-              <a:t>03/05/1448</a:t>
+              <a:t>10/05/1448</a:t>
             </a:fld>
             <a:endParaRPr/>
           </a:p>
@@ -827,7 +827,7 @@
             </a:pPr>
             <a:fld id="{BCC18F51-09EC-435C-A3BA-64A766E099C0}" type="datetimeFigureOut">
               <a:rPr lang="fa-IR"/>
-              <a:t>03/05/1448</a:t>
+              <a:t>10/05/1448</a:t>
             </a:fld>
             <a:endParaRPr/>
           </a:p>
@@ -918,15 +918,15 @@
         </p:nvSpPr>
         <p:spPr bwMode="auto">
           <a:xfrm>
-            <a:off x="786063" y="2154452"/>
-            <a:ext cx="9936745" cy="3594746"/>
+            <a:off x="675904" y="1709945"/>
+            <a:ext cx="8544204" cy="2853078"/>
           </a:xfrm>
         </p:spPr>
         <p:txBody>
           <a:bodyPr anchor="b"/>
           <a:lstStyle>
             <a:lvl1pPr>
-              <a:defRPr sz="954"/>
+              <a:defRPr sz="757"/>
             </a:lvl1pPr>
           </a:lstStyle>
           <a:p>
@@ -951,8 +951,8 @@
         </p:nvSpPr>
         <p:spPr bwMode="auto">
           <a:xfrm>
-            <a:off x="786063" y="5783207"/>
-            <a:ext cx="9936745" cy="1890392"/>
+            <a:off x="675904" y="4590015"/>
+            <a:ext cx="8544204" cy="1500366"/>
           </a:xfrm>
         </p:spPr>
         <p:txBody>
@@ -960,7 +960,7 @@
           <a:lstStyle>
             <a:lvl1pPr marL="0" indent="0">
               <a:buNone/>
-              <a:defRPr sz="382">
+              <a:defRPr sz="303">
                 <a:solidFill>
                   <a:schemeClr val="tx1">
                     <a:tint val="75000"/>
@@ -968,9 +968,9 @@
                 </a:solidFill>
               </a:defRPr>
             </a:lvl1pPr>
-            <a:lvl2pPr marL="72683" indent="0">
+            <a:lvl2pPr marL="57688" indent="0">
               <a:buNone/>
-              <a:defRPr sz="318">
+              <a:defRPr sz="252">
                 <a:solidFill>
                   <a:schemeClr val="tx1">
                     <a:tint val="75000"/>
@@ -978,9 +978,9 @@
                 </a:solidFill>
               </a:defRPr>
             </a:lvl2pPr>
-            <a:lvl3pPr marL="145367" indent="0">
+            <a:lvl3pPr marL="115378" indent="0">
               <a:buNone/>
-              <a:defRPr sz="286">
+              <a:defRPr sz="227">
                 <a:solidFill>
                   <a:schemeClr val="tx1">
                     <a:tint val="75000"/>
@@ -988,9 +988,9 @@
                 </a:solidFill>
               </a:defRPr>
             </a:lvl3pPr>
-            <a:lvl4pPr marL="218049" indent="0">
+            <a:lvl4pPr marL="173065" indent="0">
               <a:buNone/>
-              <a:defRPr sz="254">
+              <a:defRPr sz="202">
                 <a:solidFill>
                   <a:schemeClr val="tx1">
                     <a:tint val="75000"/>
@@ -998,9 +998,9 @@
                 </a:solidFill>
               </a:defRPr>
             </a:lvl4pPr>
-            <a:lvl5pPr marL="290732" indent="0">
+            <a:lvl5pPr marL="230754" indent="0">
               <a:buNone/>
-              <a:defRPr sz="254">
+              <a:defRPr sz="202">
                 <a:solidFill>
                   <a:schemeClr val="tx1">
                     <a:tint val="75000"/>
@@ -1008,9 +1008,9 @@
                 </a:solidFill>
               </a:defRPr>
             </a:lvl5pPr>
-            <a:lvl6pPr marL="363416" indent="0">
+            <a:lvl6pPr marL="288443" indent="0">
               <a:buNone/>
-              <a:defRPr sz="254">
+              <a:defRPr sz="202">
                 <a:solidFill>
                   <a:schemeClr val="tx1">
                     <a:tint val="75000"/>
@@ -1018,9 +1018,9 @@
                 </a:solidFill>
               </a:defRPr>
             </a:lvl6pPr>
-            <a:lvl7pPr marL="436099" indent="0">
+            <a:lvl7pPr marL="346132" indent="0">
               <a:buNone/>
-              <a:defRPr sz="254">
+              <a:defRPr sz="202">
                 <a:solidFill>
                   <a:schemeClr val="tx1">
                     <a:tint val="75000"/>
@@ -1028,9 +1028,9 @@
                 </a:solidFill>
               </a:defRPr>
             </a:lvl7pPr>
-            <a:lvl8pPr marL="508782" indent="0">
+            <a:lvl8pPr marL="403820" indent="0">
               <a:buNone/>
-              <a:defRPr sz="254">
+              <a:defRPr sz="202">
                 <a:solidFill>
                   <a:schemeClr val="tx1">
                     <a:tint val="75000"/>
@@ -1038,9 +1038,9 @@
                 </a:solidFill>
               </a:defRPr>
             </a:lvl8pPr>
-            <a:lvl9pPr marL="581464" indent="0">
+            <a:lvl9pPr marL="461508" indent="0">
               <a:buNone/>
-              <a:defRPr sz="254">
+              <a:defRPr sz="202">
                 <a:solidFill>
                   <a:schemeClr val="tx1">
                     <a:tint val="75000"/>
@@ -1079,7 +1079,7 @@
             </a:pPr>
             <a:fld id="{BCC18F51-09EC-435C-A3BA-64A766E099C0}" type="datetimeFigureOut">
               <a:rPr lang="fa-IR"/>
-              <a:t>03/05/1448</a:t>
+              <a:t>10/05/1448</a:t>
             </a:fld>
             <a:endParaRPr/>
           </a:p>
@@ -1194,8 +1194,8 @@
         </p:nvSpPr>
         <p:spPr bwMode="auto">
           <a:xfrm>
-            <a:off x="792064" y="2300487"/>
-            <a:ext cx="4896365" cy="5483141"/>
+            <a:off x="681064" y="1825851"/>
+            <a:ext cx="4210186" cy="4351859"/>
           </a:xfrm>
         </p:spPr>
         <p:txBody>
@@ -1255,8 +1255,8 @@
         </p:nvSpPr>
         <p:spPr bwMode="auto">
           <a:xfrm>
-            <a:off x="5832440" y="2300487"/>
-            <a:ext cx="4896365" cy="5483141"/>
+            <a:off x="5015079" y="1825851"/>
+            <a:ext cx="4210186" cy="4351859"/>
           </a:xfrm>
         </p:spPr>
         <p:txBody>
@@ -1324,7 +1324,7 @@
             </a:pPr>
             <a:fld id="{BCC18F51-09EC-435C-A3BA-64A766E099C0}" type="datetimeFigureOut">
               <a:rPr lang="fa-IR"/>
-              <a:t>03/05/1448</a:t>
+              <a:t>10/05/1448</a:t>
             </a:fld>
             <a:endParaRPr/>
           </a:p>
@@ -1415,8 +1415,8 @@
         </p:nvSpPr>
         <p:spPr bwMode="auto">
           <a:xfrm>
-            <a:off x="793563" y="460099"/>
-            <a:ext cx="9936745" cy="1670347"/>
+            <a:off x="682353" y="365172"/>
+            <a:ext cx="8544204" cy="1325721"/>
           </a:xfrm>
         </p:spPr>
         <p:txBody>
@@ -1444,8 +1444,8 @@
         </p:nvSpPr>
         <p:spPr bwMode="auto">
           <a:xfrm>
-            <a:off x="793567" y="2118442"/>
-            <a:ext cx="4873863" cy="1038215"/>
+            <a:off x="682356" y="1681365"/>
+            <a:ext cx="4190837" cy="824010"/>
           </a:xfrm>
         </p:spPr>
         <p:txBody>
@@ -1453,39 +1453,39 @@
           <a:lstStyle>
             <a:lvl1pPr marL="0" indent="0">
               <a:buNone/>
-              <a:defRPr sz="382" b="1"/>
+              <a:defRPr sz="303" b="1"/>
             </a:lvl1pPr>
-            <a:lvl2pPr marL="72683" indent="0">
+            <a:lvl2pPr marL="57688" indent="0">
               <a:buNone/>
-              <a:defRPr sz="318" b="1"/>
+              <a:defRPr sz="252" b="1"/>
             </a:lvl2pPr>
-            <a:lvl3pPr marL="145367" indent="0">
+            <a:lvl3pPr marL="115378" indent="0">
               <a:buNone/>
-              <a:defRPr sz="286" b="1"/>
+              <a:defRPr sz="227" b="1"/>
             </a:lvl3pPr>
-            <a:lvl4pPr marL="218049" indent="0">
+            <a:lvl4pPr marL="173065" indent="0">
               <a:buNone/>
-              <a:defRPr sz="254" b="1"/>
+              <a:defRPr sz="202" b="1"/>
             </a:lvl4pPr>
-            <a:lvl5pPr marL="290732" indent="0">
+            <a:lvl5pPr marL="230754" indent="0">
               <a:buNone/>
-              <a:defRPr sz="254" b="1"/>
+              <a:defRPr sz="202" b="1"/>
             </a:lvl5pPr>
-            <a:lvl6pPr marL="363416" indent="0">
+            <a:lvl6pPr marL="288443" indent="0">
               <a:buNone/>
-              <a:defRPr sz="254" b="1"/>
+              <a:defRPr sz="202" b="1"/>
             </a:lvl6pPr>
-            <a:lvl7pPr marL="436099" indent="0">
+            <a:lvl7pPr marL="346132" indent="0">
               <a:buNone/>
-              <a:defRPr sz="254" b="1"/>
+              <a:defRPr sz="202" b="1"/>
             </a:lvl7pPr>
-            <a:lvl8pPr marL="508782" indent="0">
+            <a:lvl8pPr marL="403820" indent="0">
               <a:buNone/>
-              <a:defRPr sz="254" b="1"/>
+              <a:defRPr sz="202" b="1"/>
             </a:lvl8pPr>
-            <a:lvl9pPr marL="581464" indent="0">
+            <a:lvl9pPr marL="461508" indent="0">
               <a:buNone/>
-              <a:defRPr sz="254" b="1"/>
+              <a:defRPr sz="202" b="1"/>
             </a:lvl9pPr>
           </a:lstStyle>
           <a:p>
@@ -1510,8 +1510,8 @@
         </p:nvSpPr>
         <p:spPr bwMode="auto">
           <a:xfrm>
-            <a:off x="793567" y="3156658"/>
-            <a:ext cx="4873863" cy="4642966"/>
+            <a:off x="682356" y="2505376"/>
+            <a:ext cx="4190837" cy="3685029"/>
           </a:xfrm>
         </p:spPr>
         <p:txBody>
@@ -1571,8 +1571,8 @@
         </p:nvSpPr>
         <p:spPr bwMode="auto">
           <a:xfrm>
-            <a:off x="5832438" y="2118442"/>
-            <a:ext cx="4897866" cy="1038215"/>
+            <a:off x="5015077" y="1681365"/>
+            <a:ext cx="4211476" cy="824010"/>
           </a:xfrm>
         </p:spPr>
         <p:txBody>
@@ -1580,39 +1580,39 @@
           <a:lstStyle>
             <a:lvl1pPr marL="0" indent="0">
               <a:buNone/>
-              <a:defRPr sz="382" b="1"/>
+              <a:defRPr sz="303" b="1"/>
             </a:lvl1pPr>
-            <a:lvl2pPr marL="72683" indent="0">
+            <a:lvl2pPr marL="57688" indent="0">
               <a:buNone/>
-              <a:defRPr sz="318" b="1"/>
+              <a:defRPr sz="252" b="1"/>
             </a:lvl2pPr>
-            <a:lvl3pPr marL="145367" indent="0">
+            <a:lvl3pPr marL="115378" indent="0">
               <a:buNone/>
-              <a:defRPr sz="286" b="1"/>
+              <a:defRPr sz="227" b="1"/>
             </a:lvl3pPr>
-            <a:lvl4pPr marL="218049" indent="0">
+            <a:lvl4pPr marL="173065" indent="0">
               <a:buNone/>
-              <a:defRPr sz="254" b="1"/>
+              <a:defRPr sz="202" b="1"/>
             </a:lvl4pPr>
-            <a:lvl5pPr marL="290732" indent="0">
+            <a:lvl5pPr marL="230754" indent="0">
               <a:buNone/>
-              <a:defRPr sz="254" b="1"/>
+              <a:defRPr sz="202" b="1"/>
             </a:lvl5pPr>
-            <a:lvl6pPr marL="363416" indent="0">
+            <a:lvl6pPr marL="288443" indent="0">
               <a:buNone/>
-              <a:defRPr sz="254" b="1"/>
+              <a:defRPr sz="202" b="1"/>
             </a:lvl6pPr>
-            <a:lvl7pPr marL="436099" indent="0">
+            <a:lvl7pPr marL="346132" indent="0">
               <a:buNone/>
-              <a:defRPr sz="254" b="1"/>
+              <a:defRPr sz="202" b="1"/>
             </a:lvl7pPr>
-            <a:lvl8pPr marL="508782" indent="0">
+            <a:lvl8pPr marL="403820" indent="0">
               <a:buNone/>
-              <a:defRPr sz="254" b="1"/>
+              <a:defRPr sz="202" b="1"/>
             </a:lvl8pPr>
-            <a:lvl9pPr marL="581464" indent="0">
+            <a:lvl9pPr marL="461508" indent="0">
               <a:buNone/>
-              <a:defRPr sz="254" b="1"/>
+              <a:defRPr sz="202" b="1"/>
             </a:lvl9pPr>
           </a:lstStyle>
           <a:p>
@@ -1637,8 +1637,8 @@
         </p:nvSpPr>
         <p:spPr bwMode="auto">
           <a:xfrm>
-            <a:off x="5832438" y="3156658"/>
-            <a:ext cx="4897866" cy="4642966"/>
+            <a:off x="5015077" y="2505376"/>
+            <a:ext cx="4211476" cy="3685029"/>
           </a:xfrm>
         </p:spPr>
         <p:txBody>
@@ -1706,7 +1706,7 @@
             </a:pPr>
             <a:fld id="{BCC18F51-09EC-435C-A3BA-64A766E099C0}" type="datetimeFigureOut">
               <a:rPr lang="fa-IR"/>
-              <a:t>03/05/1448</a:t>
+              <a:t>10/05/1448</a:t>
             </a:fld>
             <a:endParaRPr/>
           </a:p>
@@ -1829,7 +1829,7 @@
             </a:pPr>
             <a:fld id="{BCC18F51-09EC-435C-A3BA-64A766E099C0}" type="datetimeFigureOut">
               <a:rPr lang="fa-IR"/>
-              <a:t>03/05/1448</a:t>
+              <a:t>10/05/1448</a:t>
             </a:fld>
             <a:endParaRPr/>
           </a:p>
@@ -1928,7 +1928,7 @@
             </a:pPr>
             <a:fld id="{BCC18F51-09EC-435C-A3BA-64A766E099C0}" type="datetimeFigureOut">
               <a:rPr lang="fa-IR"/>
-              <a:t>03/05/1448</a:t>
+              <a:t>10/05/1448</a:t>
             </a:fld>
             <a:endParaRPr/>
           </a:p>
@@ -2019,15 +2019,15 @@
         </p:nvSpPr>
         <p:spPr bwMode="auto">
           <a:xfrm>
-            <a:off x="793561" y="576123"/>
-            <a:ext cx="3715778" cy="2016419"/>
+            <a:off x="682351" y="457258"/>
+            <a:ext cx="3195047" cy="1600391"/>
           </a:xfrm>
         </p:spPr>
         <p:txBody>
           <a:bodyPr anchor="b"/>
           <a:lstStyle>
             <a:lvl1pPr>
-              <a:defRPr sz="509"/>
+              <a:defRPr sz="404"/>
             </a:lvl1pPr>
           </a:lstStyle>
           <a:p>
@@ -2052,39 +2052,39 @@
         </p:nvSpPr>
         <p:spPr bwMode="auto">
           <a:xfrm>
-            <a:off x="4897870" y="1244259"/>
-            <a:ext cx="5832435" cy="6141277"/>
+            <a:off x="4211480" y="987544"/>
+            <a:ext cx="5015074" cy="4874208"/>
           </a:xfrm>
         </p:spPr>
         <p:txBody>
           <a:bodyPr/>
           <a:lstStyle>
             <a:lvl1pPr>
-              <a:defRPr sz="509"/>
+              <a:defRPr sz="404"/>
             </a:lvl1pPr>
             <a:lvl2pPr>
-              <a:defRPr sz="445"/>
+              <a:defRPr sz="353"/>
             </a:lvl2pPr>
             <a:lvl3pPr>
-              <a:defRPr sz="382"/>
+              <a:defRPr sz="303"/>
             </a:lvl3pPr>
             <a:lvl4pPr>
-              <a:defRPr sz="318"/>
+              <a:defRPr sz="252"/>
             </a:lvl4pPr>
             <a:lvl5pPr>
-              <a:defRPr sz="318"/>
+              <a:defRPr sz="252"/>
             </a:lvl5pPr>
             <a:lvl6pPr>
-              <a:defRPr sz="318"/>
+              <a:defRPr sz="252"/>
             </a:lvl6pPr>
             <a:lvl7pPr>
-              <a:defRPr sz="318"/>
+              <a:defRPr sz="252"/>
             </a:lvl7pPr>
             <a:lvl8pPr>
-              <a:defRPr sz="318"/>
+              <a:defRPr sz="252"/>
             </a:lvl8pPr>
             <a:lvl9pPr>
-              <a:defRPr sz="318"/>
+              <a:defRPr sz="252"/>
             </a:lvl9pPr>
           </a:lstStyle>
           <a:p>
@@ -2141,8 +2141,8 @@
         </p:nvSpPr>
         <p:spPr bwMode="auto">
           <a:xfrm>
-            <a:off x="793561" y="2592544"/>
-            <a:ext cx="3715778" cy="4802998"/>
+            <a:off x="682351" y="2057650"/>
+            <a:ext cx="3195047" cy="3812043"/>
           </a:xfrm>
         </p:spPr>
         <p:txBody>
@@ -2150,39 +2150,39 @@
           <a:lstStyle>
             <a:lvl1pPr marL="0" indent="0">
               <a:buNone/>
-              <a:defRPr sz="254"/>
+              <a:defRPr sz="202"/>
             </a:lvl1pPr>
-            <a:lvl2pPr marL="72683" indent="0">
+            <a:lvl2pPr marL="57688" indent="0">
               <a:buNone/>
-              <a:defRPr sz="223"/>
+              <a:defRPr sz="177"/>
             </a:lvl2pPr>
-            <a:lvl3pPr marL="145367" indent="0">
+            <a:lvl3pPr marL="115378" indent="0">
               <a:buNone/>
-              <a:defRPr sz="191"/>
+              <a:defRPr sz="152"/>
             </a:lvl3pPr>
-            <a:lvl4pPr marL="218049" indent="0">
+            <a:lvl4pPr marL="173065" indent="0">
               <a:buNone/>
-              <a:defRPr sz="159"/>
+              <a:defRPr sz="126"/>
             </a:lvl4pPr>
-            <a:lvl5pPr marL="290732" indent="0">
+            <a:lvl5pPr marL="230754" indent="0">
               <a:buNone/>
-              <a:defRPr sz="159"/>
+              <a:defRPr sz="126"/>
             </a:lvl5pPr>
-            <a:lvl6pPr marL="363416" indent="0">
+            <a:lvl6pPr marL="288443" indent="0">
               <a:buNone/>
-              <a:defRPr sz="159"/>
+              <a:defRPr sz="126"/>
             </a:lvl6pPr>
-            <a:lvl7pPr marL="436099" indent="0">
+            <a:lvl7pPr marL="346132" indent="0">
               <a:buNone/>
-              <a:defRPr sz="159"/>
+              <a:defRPr sz="126"/>
             </a:lvl7pPr>
-            <a:lvl8pPr marL="508782" indent="0">
+            <a:lvl8pPr marL="403820" indent="0">
               <a:buNone/>
-              <a:defRPr sz="159"/>
+              <a:defRPr sz="126"/>
             </a:lvl8pPr>
-            <a:lvl9pPr marL="581464" indent="0">
+            <a:lvl9pPr marL="461508" indent="0">
               <a:buNone/>
-              <a:defRPr sz="159"/>
+              <a:defRPr sz="126"/>
             </a:lvl9pPr>
           </a:lstStyle>
           <a:p>
@@ -2215,7 +2215,7 @@
             </a:pPr>
             <a:fld id="{BCC18F51-09EC-435C-A3BA-64A766E099C0}" type="datetimeFigureOut">
               <a:rPr lang="fa-IR"/>
-              <a:t>03/05/1448</a:t>
+              <a:t>10/05/1448</a:t>
             </a:fld>
             <a:endParaRPr/>
           </a:p>
@@ -2306,15 +2306,15 @@
         </p:nvSpPr>
         <p:spPr bwMode="auto">
           <a:xfrm>
-            <a:off x="793561" y="576123"/>
-            <a:ext cx="3715778" cy="2016419"/>
+            <a:off x="682351" y="457258"/>
+            <a:ext cx="3195047" cy="1600391"/>
           </a:xfrm>
         </p:spPr>
         <p:txBody>
           <a:bodyPr anchor="b"/>
           <a:lstStyle>
             <a:lvl1pPr>
-              <a:defRPr sz="509"/>
+              <a:defRPr sz="404"/>
             </a:lvl1pPr>
           </a:lstStyle>
           <a:p>
@@ -2339,8 +2339,8 @@
         </p:nvSpPr>
         <p:spPr bwMode="auto">
           <a:xfrm>
-            <a:off x="4897870" y="1244259"/>
-            <a:ext cx="5832435" cy="6141277"/>
+            <a:off x="4211480" y="987544"/>
+            <a:ext cx="5015074" cy="4874208"/>
           </a:xfrm>
         </p:spPr>
         <p:txBody>
@@ -2348,39 +2348,39 @@
           <a:lstStyle>
             <a:lvl1pPr marL="0" indent="0">
               <a:buNone/>
-              <a:defRPr sz="509"/>
+              <a:defRPr sz="404"/>
             </a:lvl1pPr>
-            <a:lvl2pPr marL="72683" indent="0">
+            <a:lvl2pPr marL="57688" indent="0">
               <a:buNone/>
-              <a:defRPr sz="445"/>
+              <a:defRPr sz="353"/>
             </a:lvl2pPr>
-            <a:lvl3pPr marL="145367" indent="0">
+            <a:lvl3pPr marL="115378" indent="0">
               <a:buNone/>
-              <a:defRPr sz="382"/>
+              <a:defRPr sz="303"/>
             </a:lvl3pPr>
-            <a:lvl4pPr marL="218049" indent="0">
+            <a:lvl4pPr marL="173065" indent="0">
               <a:buNone/>
-              <a:defRPr sz="318"/>
+              <a:defRPr sz="252"/>
             </a:lvl4pPr>
-            <a:lvl5pPr marL="290732" indent="0">
+            <a:lvl5pPr marL="230754" indent="0">
               <a:buNone/>
-              <a:defRPr sz="318"/>
+              <a:defRPr sz="252"/>
             </a:lvl5pPr>
-            <a:lvl6pPr marL="363416" indent="0">
+            <a:lvl6pPr marL="288443" indent="0">
               <a:buNone/>
-              <a:defRPr sz="318"/>
+              <a:defRPr sz="252"/>
             </a:lvl6pPr>
-            <a:lvl7pPr marL="436099" indent="0">
+            <a:lvl7pPr marL="346132" indent="0">
               <a:buNone/>
-              <a:defRPr sz="318"/>
+              <a:defRPr sz="252"/>
             </a:lvl7pPr>
-            <a:lvl8pPr marL="508782" indent="0">
+            <a:lvl8pPr marL="403820" indent="0">
               <a:buNone/>
-              <a:defRPr sz="318"/>
+              <a:defRPr sz="252"/>
             </a:lvl8pPr>
-            <a:lvl9pPr marL="581464" indent="0">
+            <a:lvl9pPr marL="461508" indent="0">
               <a:buNone/>
-              <a:defRPr sz="318"/>
+              <a:defRPr sz="252"/>
             </a:lvl9pPr>
           </a:lstStyle>
           <a:p>
@@ -2405,8 +2405,8 @@
         </p:nvSpPr>
         <p:spPr bwMode="auto">
           <a:xfrm>
-            <a:off x="793561" y="2592544"/>
-            <a:ext cx="3715778" cy="4802998"/>
+            <a:off x="682351" y="2057650"/>
+            <a:ext cx="3195047" cy="3812043"/>
           </a:xfrm>
         </p:spPr>
         <p:txBody>
@@ -2414,39 +2414,39 @@
           <a:lstStyle>
             <a:lvl1pPr marL="0" indent="0">
               <a:buNone/>
-              <a:defRPr sz="254"/>
+              <a:defRPr sz="202"/>
             </a:lvl1pPr>
-            <a:lvl2pPr marL="72683" indent="0">
+            <a:lvl2pPr marL="57688" indent="0">
               <a:buNone/>
-              <a:defRPr sz="223"/>
+              <a:defRPr sz="177"/>
             </a:lvl2pPr>
-            <a:lvl3pPr marL="145367" indent="0">
+            <a:lvl3pPr marL="115378" indent="0">
               <a:buNone/>
-              <a:defRPr sz="191"/>
+              <a:defRPr sz="152"/>
             </a:lvl3pPr>
-            <a:lvl4pPr marL="218049" indent="0">
+            <a:lvl4pPr marL="173065" indent="0">
               <a:buNone/>
-              <a:defRPr sz="159"/>
+              <a:defRPr sz="126"/>
             </a:lvl4pPr>
-            <a:lvl5pPr marL="290732" indent="0">
+            <a:lvl5pPr marL="230754" indent="0">
               <a:buNone/>
-              <a:defRPr sz="159"/>
+              <a:defRPr sz="126"/>
             </a:lvl5pPr>
-            <a:lvl6pPr marL="363416" indent="0">
+            <a:lvl6pPr marL="288443" indent="0">
               <a:buNone/>
-              <a:defRPr sz="159"/>
+              <a:defRPr sz="126"/>
             </a:lvl6pPr>
-            <a:lvl7pPr marL="436099" indent="0">
+            <a:lvl7pPr marL="346132" indent="0">
               <a:buNone/>
-              <a:defRPr sz="159"/>
+              <a:defRPr sz="126"/>
             </a:lvl7pPr>
-            <a:lvl8pPr marL="508782" indent="0">
+            <a:lvl8pPr marL="403820" indent="0">
               <a:buNone/>
-              <a:defRPr sz="159"/>
+              <a:defRPr sz="126"/>
             </a:lvl8pPr>
-            <a:lvl9pPr marL="581464" indent="0">
+            <a:lvl9pPr marL="461508" indent="0">
               <a:buNone/>
-              <a:defRPr sz="159"/>
+              <a:defRPr sz="126"/>
             </a:lvl9pPr>
           </a:lstStyle>
           <a:p>
@@ -2479,7 +2479,7 @@
             </a:pPr>
             <a:fld id="{BCC18F51-09EC-435C-A3BA-64A766E099C0}" type="datetimeFigureOut">
               <a:rPr lang="fa-IR"/>
-              <a:t>03/05/1448</a:t>
+              <a:t>10/05/1448</a:t>
             </a:fld>
             <a:endParaRPr/>
           </a:p>
@@ -2575,8 +2575,8 @@
         </p:nvSpPr>
         <p:spPr bwMode="auto">
           <a:xfrm>
-            <a:off x="792064" y="460099"/>
-            <a:ext cx="9936745" cy="1670347"/>
+            <a:off x="681064" y="365172"/>
+            <a:ext cx="8544204" cy="1325721"/>
           </a:xfrm>
           <a:prstGeom prst="rect">
             <a:avLst/>
@@ -2609,8 +2609,8 @@
         </p:nvSpPr>
         <p:spPr bwMode="auto">
           <a:xfrm>
-            <a:off x="792064" y="2300487"/>
-            <a:ext cx="9936745" cy="5483141"/>
+            <a:off x="681064" y="1825851"/>
+            <a:ext cx="8544204" cy="4351859"/>
           </a:xfrm>
           <a:prstGeom prst="rect">
             <a:avLst/>
@@ -2675,8 +2675,8 @@
         </p:nvSpPr>
         <p:spPr bwMode="auto">
           <a:xfrm>
-            <a:off x="792061" y="8009667"/>
-            <a:ext cx="2592194" cy="460096"/>
+            <a:off x="681061" y="6357112"/>
+            <a:ext cx="2228922" cy="365169"/>
           </a:xfrm>
           <a:prstGeom prst="rect">
             <a:avLst/>
@@ -2686,7 +2686,7 @@
           <a:bodyPr vert="horz" lIns="91440" tIns="45720" rIns="91440" bIns="45720" rtlCol="0" anchor="ctr"/>
           <a:lstStyle>
             <a:lvl1pPr algn="l">
-              <a:defRPr sz="191">
+              <a:defRPr sz="152">
                 <a:solidFill>
                   <a:schemeClr val="tx1">
                     <a:tint val="75000"/>
@@ -2701,7 +2701,7 @@
             </a:pPr>
             <a:fld id="{BCC18F51-09EC-435C-A3BA-64A766E099C0}" type="datetimeFigureOut">
               <a:rPr lang="fa-IR"/>
-              <a:t>03/05/1448</a:t>
+              <a:t>10/05/1448</a:t>
             </a:fld>
             <a:endParaRPr/>
           </a:p>
@@ -2719,8 +2719,8 @@
         </p:nvSpPr>
         <p:spPr bwMode="auto">
           <a:xfrm>
-            <a:off x="3816289" y="8009667"/>
-            <a:ext cx="3888292" cy="460096"/>
+            <a:off x="3281472" y="6357112"/>
+            <a:ext cx="3343384" cy="365169"/>
           </a:xfrm>
           <a:prstGeom prst="rect">
             <a:avLst/>
@@ -2730,7 +2730,7 @@
           <a:bodyPr vert="horz" lIns="91440" tIns="45720" rIns="91440" bIns="45720" rtlCol="0" anchor="ctr"/>
           <a:lstStyle>
             <a:lvl1pPr algn="ctr">
-              <a:defRPr sz="191">
+              <a:defRPr sz="152">
                 <a:solidFill>
                   <a:schemeClr val="tx1">
                     <a:tint val="75000"/>
@@ -2759,8 +2759,8 @@
         </p:nvSpPr>
         <p:spPr bwMode="auto">
           <a:xfrm>
-            <a:off x="8136609" y="8009667"/>
-            <a:ext cx="2592194" cy="460096"/>
+            <a:off x="6996340" y="6357112"/>
+            <a:ext cx="2228922" cy="365169"/>
           </a:xfrm>
           <a:prstGeom prst="rect">
             <a:avLst/>
@@ -2770,7 +2770,7 @@
           <a:bodyPr vert="horz" lIns="91440" tIns="45720" rIns="91440" bIns="45720" rtlCol="0" anchor="ctr"/>
           <a:lstStyle>
             <a:lvl1pPr algn="r">
-              <a:defRPr sz="191">
+              <a:defRPr sz="152">
                 <a:solidFill>
                   <a:schemeClr val="tx1">
                     <a:tint val="75000"/>
@@ -2809,7 +2809,7 @@
   </p:sldLayoutIdLst>
   <p:txStyles>
     <p:titleStyle>
-      <a:lvl1pPr algn="l" defTabSz="145367" rtl="0">
+      <a:lvl1pPr algn="l" defTabSz="115378" rtl="0">
         <a:lnSpc>
           <a:spcPct val="90000"/>
         </a:lnSpc>
@@ -2817,7 +2817,7 @@
           <a:spcPts val="0"/>
         </a:spcBef>
         <a:buNone/>
-        <a:defRPr sz="700">
+        <a:defRPr sz="556">
           <a:solidFill>
             <a:schemeClr val="tx1"/>
           </a:solidFill>
@@ -2828,16 +2828,16 @@
       </a:lvl1pPr>
     </p:titleStyle>
     <p:bodyStyle>
-      <a:lvl1pPr marL="36341" indent="-36341" algn="l" defTabSz="145367" rtl="0">
+      <a:lvl1pPr marL="28844" indent="-28844" algn="l" defTabSz="115378" rtl="0">
         <a:lnSpc>
           <a:spcPct val="90000"/>
         </a:lnSpc>
         <a:spcBef>
-          <a:spcPts val="159"/>
+          <a:spcPts val="126"/>
         </a:spcBef>
         <a:buFont typeface="Arial"/>
         <a:buChar char="•"/>
-        <a:defRPr sz="445">
+        <a:defRPr sz="353">
           <a:solidFill>
             <a:schemeClr val="tx1"/>
           </a:solidFill>
@@ -2846,16 +2846,16 @@
           <a:cs typeface="+mn-cs"/>
         </a:defRPr>
       </a:lvl1pPr>
-      <a:lvl2pPr marL="109024" indent="-36341" algn="l" defTabSz="145367" rtl="0">
+      <a:lvl2pPr marL="86532" indent="-28844" algn="l" defTabSz="115378" rtl="0">
         <a:lnSpc>
           <a:spcPct val="90000"/>
         </a:lnSpc>
         <a:spcBef>
-          <a:spcPts val="79"/>
+          <a:spcPts val="63"/>
         </a:spcBef>
         <a:buFont typeface="Arial"/>
         <a:buChar char="•"/>
-        <a:defRPr sz="382">
+        <a:defRPr sz="303">
           <a:solidFill>
             <a:schemeClr val="tx1"/>
           </a:solidFill>
@@ -2864,16 +2864,16 @@
           <a:cs typeface="+mn-cs"/>
         </a:defRPr>
       </a:lvl2pPr>
-      <a:lvl3pPr marL="181707" indent="-36341" algn="l" defTabSz="145367" rtl="0">
+      <a:lvl3pPr marL="144221" indent="-28844" algn="l" defTabSz="115378" rtl="0">
         <a:lnSpc>
           <a:spcPct val="90000"/>
         </a:lnSpc>
         <a:spcBef>
-          <a:spcPts val="79"/>
+          <a:spcPts val="63"/>
         </a:spcBef>
         <a:buFont typeface="Arial"/>
         <a:buChar char="•"/>
-        <a:defRPr sz="318">
+        <a:defRPr sz="252">
           <a:solidFill>
             <a:schemeClr val="tx1"/>
           </a:solidFill>
@@ -2882,16 +2882,16 @@
           <a:cs typeface="+mn-cs"/>
         </a:defRPr>
       </a:lvl3pPr>
-      <a:lvl4pPr marL="254390" indent="-36341" algn="l" defTabSz="145367" rtl="0">
+      <a:lvl4pPr marL="201909" indent="-28844" algn="l" defTabSz="115378" rtl="0">
         <a:lnSpc>
           <a:spcPct val="90000"/>
         </a:lnSpc>
         <a:spcBef>
-          <a:spcPts val="79"/>
+          <a:spcPts val="63"/>
         </a:spcBef>
         <a:buFont typeface="Arial"/>
         <a:buChar char="•"/>
-        <a:defRPr sz="286">
+        <a:defRPr sz="227">
           <a:solidFill>
             <a:schemeClr val="tx1"/>
           </a:solidFill>
@@ -2900,16 +2900,16 @@
           <a:cs typeface="+mn-cs"/>
         </a:defRPr>
       </a:lvl4pPr>
-      <a:lvl5pPr marL="327075" indent="-36341" algn="l" defTabSz="145367" rtl="0">
+      <a:lvl5pPr marL="259599" indent="-28844" algn="l" defTabSz="115378" rtl="0">
         <a:lnSpc>
           <a:spcPct val="90000"/>
         </a:lnSpc>
         <a:spcBef>
-          <a:spcPts val="79"/>
+          <a:spcPts val="63"/>
         </a:spcBef>
         <a:buFont typeface="Arial"/>
         <a:buChar char="•"/>
-        <a:defRPr sz="286">
+        <a:defRPr sz="227">
           <a:solidFill>
             <a:schemeClr val="tx1"/>
           </a:solidFill>
@@ -2918,16 +2918,16 @@
           <a:cs typeface="+mn-cs"/>
         </a:defRPr>
       </a:lvl5pPr>
-      <a:lvl6pPr marL="399758" indent="-36341" algn="l" defTabSz="145367" rtl="0">
+      <a:lvl6pPr marL="317288" indent="-28844" algn="l" defTabSz="115378" rtl="0">
         <a:lnSpc>
           <a:spcPct val="90000"/>
         </a:lnSpc>
         <a:spcBef>
-          <a:spcPts val="79"/>
+          <a:spcPts val="63"/>
         </a:spcBef>
         <a:buFont typeface="Arial"/>
         <a:buChar char="•"/>
-        <a:defRPr sz="286">
+        <a:defRPr sz="227">
           <a:solidFill>
             <a:schemeClr val="tx1"/>
           </a:solidFill>
@@ -2936,16 +2936,16 @@
           <a:cs typeface="+mn-cs"/>
         </a:defRPr>
       </a:lvl6pPr>
-      <a:lvl7pPr marL="472440" indent="-36341" algn="l" defTabSz="145367" rtl="0">
+      <a:lvl7pPr marL="374976" indent="-28844" algn="l" defTabSz="115378" rtl="0">
         <a:lnSpc>
           <a:spcPct val="90000"/>
         </a:lnSpc>
         <a:spcBef>
-          <a:spcPts val="79"/>
+          <a:spcPts val="63"/>
         </a:spcBef>
         <a:buFont typeface="Arial"/>
         <a:buChar char="•"/>
-        <a:defRPr sz="286">
+        <a:defRPr sz="227">
           <a:solidFill>
             <a:schemeClr val="tx1"/>
           </a:solidFill>
@@ -2954,16 +2954,16 @@
           <a:cs typeface="+mn-cs"/>
         </a:defRPr>
       </a:lvl7pPr>
-      <a:lvl8pPr marL="545123" indent="-36341" algn="l" defTabSz="145367" rtl="0">
+      <a:lvl8pPr marL="432664" indent="-28844" algn="l" defTabSz="115378" rtl="0">
         <a:lnSpc>
           <a:spcPct val="90000"/>
         </a:lnSpc>
         <a:spcBef>
-          <a:spcPts val="79"/>
+          <a:spcPts val="63"/>
         </a:spcBef>
         <a:buFont typeface="Arial"/>
         <a:buChar char="•"/>
-        <a:defRPr sz="286">
+        <a:defRPr sz="227">
           <a:solidFill>
             <a:schemeClr val="tx1"/>
           </a:solidFill>
@@ -2972,16 +2972,16 @@
           <a:cs typeface="+mn-cs"/>
         </a:defRPr>
       </a:lvl8pPr>
-      <a:lvl9pPr marL="617806" indent="-36341" algn="l" defTabSz="145367" rtl="0">
+      <a:lvl9pPr marL="490353" indent="-28844" algn="l" defTabSz="115378" rtl="0">
         <a:lnSpc>
           <a:spcPct val="90000"/>
         </a:lnSpc>
         <a:spcBef>
-          <a:spcPts val="79"/>
+          <a:spcPts val="63"/>
         </a:spcBef>
         <a:buFont typeface="Arial"/>
         <a:buChar char="•"/>
-        <a:defRPr sz="286">
+        <a:defRPr sz="227">
           <a:solidFill>
             <a:schemeClr val="tx1"/>
           </a:solidFill>
@@ -2995,8 +2995,8 @@
       <a:defPPr>
         <a:defRPr/>
       </a:defPPr>
-      <a:lvl1pPr marL="0" algn="l" defTabSz="145367" rtl="0">
-        <a:defRPr sz="286">
+      <a:lvl1pPr marL="0" algn="l" defTabSz="115378" rtl="0">
+        <a:defRPr sz="227">
           <a:solidFill>
             <a:schemeClr val="tx1"/>
           </a:solidFill>
@@ -3005,8 +3005,8 @@
           <a:cs typeface="+mn-cs"/>
         </a:defRPr>
       </a:lvl1pPr>
-      <a:lvl2pPr marL="72683" algn="l" defTabSz="145367" rtl="0">
-        <a:defRPr sz="286">
+      <a:lvl2pPr marL="57688" algn="l" defTabSz="115378" rtl="0">
+        <a:defRPr sz="227">
           <a:solidFill>
             <a:schemeClr val="tx1"/>
           </a:solidFill>
@@ -3015,8 +3015,8 @@
           <a:cs typeface="+mn-cs"/>
         </a:defRPr>
       </a:lvl2pPr>
-      <a:lvl3pPr marL="145367" algn="l" defTabSz="145367" rtl="0">
-        <a:defRPr sz="286">
+      <a:lvl3pPr marL="115378" algn="l" defTabSz="115378" rtl="0">
+        <a:defRPr sz="227">
           <a:solidFill>
             <a:schemeClr val="tx1"/>
           </a:solidFill>
@@ -3025,8 +3025,8 @@
           <a:cs typeface="+mn-cs"/>
         </a:defRPr>
       </a:lvl3pPr>
-      <a:lvl4pPr marL="218049" algn="l" defTabSz="145367" rtl="0">
-        <a:defRPr sz="286">
+      <a:lvl4pPr marL="173065" algn="l" defTabSz="115378" rtl="0">
+        <a:defRPr sz="227">
           <a:solidFill>
             <a:schemeClr val="tx1"/>
           </a:solidFill>
@@ -3035,8 +3035,8 @@
           <a:cs typeface="+mn-cs"/>
         </a:defRPr>
       </a:lvl4pPr>
-      <a:lvl5pPr marL="290732" algn="l" defTabSz="145367" rtl="0">
-        <a:defRPr sz="286">
+      <a:lvl5pPr marL="230754" algn="l" defTabSz="115378" rtl="0">
+        <a:defRPr sz="227">
           <a:solidFill>
             <a:schemeClr val="tx1"/>
           </a:solidFill>
@@ -3045,8 +3045,8 @@
           <a:cs typeface="+mn-cs"/>
         </a:defRPr>
       </a:lvl5pPr>
-      <a:lvl6pPr marL="363416" algn="l" defTabSz="145367" rtl="0">
-        <a:defRPr sz="286">
+      <a:lvl6pPr marL="288443" algn="l" defTabSz="115378" rtl="0">
+        <a:defRPr sz="227">
           <a:solidFill>
             <a:schemeClr val="tx1"/>
           </a:solidFill>
@@ -3055,8 +3055,8 @@
           <a:cs typeface="+mn-cs"/>
         </a:defRPr>
       </a:lvl6pPr>
-      <a:lvl7pPr marL="436099" algn="l" defTabSz="145367" rtl="0">
-        <a:defRPr sz="286">
+      <a:lvl7pPr marL="346132" algn="l" defTabSz="115378" rtl="0">
+        <a:defRPr sz="227">
           <a:solidFill>
             <a:schemeClr val="tx1"/>
           </a:solidFill>
@@ -3065,8 +3065,8 @@
           <a:cs typeface="+mn-cs"/>
         </a:defRPr>
       </a:lvl7pPr>
-      <a:lvl8pPr marL="508782" algn="l" defTabSz="145367" rtl="0">
-        <a:defRPr sz="286">
+      <a:lvl8pPr marL="403820" algn="l" defTabSz="115378" rtl="0">
+        <a:defRPr sz="227">
           <a:solidFill>
             <a:schemeClr val="tx1"/>
           </a:solidFill>
@@ -3075,8 +3075,8 @@
           <a:cs typeface="+mn-cs"/>
         </a:defRPr>
       </a:lvl8pPr>
-      <a:lvl9pPr marL="581464" algn="l" defTabSz="145367" rtl="0">
-        <a:defRPr sz="286">
+      <a:lvl9pPr marL="461508" algn="l" defTabSz="115378" rtl="0">
+        <a:defRPr sz="227">
           <a:solidFill>
             <a:schemeClr val="tx1"/>
           </a:solidFill>
@@ -3127,8 +3127,8 @@
         </p:nvSpPr>
         <p:spPr bwMode="auto">
           <a:xfrm rot="18907748">
-            <a:off x="6632976" y="420957"/>
-            <a:ext cx="5319787" cy="7091336"/>
+            <a:off x="5645670" y="334105"/>
+            <a:ext cx="4222208" cy="5628251"/>
           </a:xfrm>
           <a:custGeom>
             <a:avLst/>
@@ -3360,7 +3360,7 @@
           <a:lstStyle/>
           <a:p>
             <a:pPr algn="r" rtl="1"/>
-            <a:endParaRPr lang="en-US" sz="4400" b="1">
+            <a:endParaRPr lang="en-US" sz="3492" b="1">
               <a:solidFill>
                 <a:schemeClr val="bg1"/>
               </a:solidFill>
@@ -3387,8 +3387,8 @@
         </p:nvSpPr>
         <p:spPr bwMode="auto">
           <a:xfrm>
-            <a:off x="2334549" y="19079"/>
-            <a:ext cx="4116856" cy="6721957"/>
+            <a:off x="2234095" y="15143"/>
+            <a:ext cx="3267466" cy="5335083"/>
           </a:xfrm>
           <a:custGeom>
             <a:avLst/>
@@ -4864,7 +4864,7 @@
           <a:lstStyle/>
           <a:p>
             <a:pPr algn="r" rtl="1"/>
-            <a:endParaRPr lang="en-US" sz="4400" b="1">
+            <a:endParaRPr lang="en-US" sz="3492" b="1">
               <a:solidFill>
                 <a:schemeClr val="bg1"/>
               </a:solidFill>
@@ -4891,8 +4891,8 @@
         </p:nvSpPr>
         <p:spPr bwMode="auto">
           <a:xfrm rot="1935669">
-            <a:off x="4231509" y="4679288"/>
-            <a:ext cx="4870584" cy="4854020"/>
+            <a:off x="3739674" y="3713857"/>
+            <a:ext cx="3865685" cy="3852538"/>
           </a:xfrm>
           <a:custGeom>
             <a:avLst/>
@@ -5330,7 +5330,7 @@
           <a:lstStyle/>
           <a:p>
             <a:pPr algn="r" rtl="1"/>
-            <a:endParaRPr lang="en-US" sz="4400" b="1">
+            <a:endParaRPr lang="en-US" sz="3492" b="1">
               <a:solidFill>
                 <a:schemeClr val="bg1"/>
               </a:solidFill>
@@ -5357,8 +5357,8 @@
         </p:nvSpPr>
         <p:spPr bwMode="auto">
           <a:xfrm rot="9456563">
-            <a:off x="-1367282" y="52925"/>
-            <a:ext cx="5827645" cy="8318068"/>
+            <a:off x="-703974" y="42006"/>
+            <a:ext cx="4625285" cy="6601884"/>
           </a:xfrm>
           <a:custGeom>
             <a:avLst/>
@@ -6068,7 +6068,7 @@
           <a:lstStyle/>
           <a:p>
             <a:pPr algn="r" rtl="1"/>
-            <a:endParaRPr lang="en-US" sz="4400" b="1">
+            <a:endParaRPr lang="en-US" sz="3492" b="1">
               <a:solidFill>
                 <a:schemeClr val="bg1"/>
               </a:solidFill>
@@ -6095,8 +6095,8 @@
         </p:nvSpPr>
         <p:spPr bwMode="auto">
           <a:xfrm>
-            <a:off x="3877268" y="7156549"/>
-            <a:ext cx="1808459" cy="1190826"/>
+            <a:off x="3458520" y="5680010"/>
+            <a:ext cx="1435338" cy="945135"/>
           </a:xfrm>
           <a:prstGeom prst="roundRect">
             <a:avLst>
@@ -6136,7 +6136,7 @@
               <a:defRPr/>
             </a:pPr>
             <a:r>
-              <a:rPr lang="en-US" sz="1707" b="1">
+              <a:rPr lang="en-US" sz="1355" b="1">
                 <a:solidFill>
                   <a:schemeClr val="bg1"/>
                 </a:solidFill>
@@ -6148,7 +6148,7 @@
               </a:rPr>
               <a:t>EC</a:t>
             </a:r>
-            <a:endParaRPr lang="en-US" sz="1280" b="1">
+            <a:endParaRPr lang="en-US" sz="1016" b="1">
               <a:solidFill>
                 <a:schemeClr val="bg1"/>
               </a:solidFill>
@@ -6164,7 +6164,7 @@
               <a:defRPr/>
             </a:pPr>
             <a:r>
-              <a:rPr lang="en-US" sz="1280" b="1">
+              <a:rPr lang="en-US" sz="1016" b="1">
                 <a:solidFill>
                   <a:schemeClr val="tx1"/>
                 </a:solidFill>
@@ -6173,7 +6173,7 @@
               </a:rPr>
               <a:t>ExamCompositions</a:t>
             </a:r>
-            <a:endParaRPr sz="1280" b="1">
+            <a:endParaRPr sz="1016" b="1">
               <a:solidFill>
                 <a:schemeClr val="tx1"/>
               </a:solidFill>
@@ -6186,7 +6186,7 @@
               <a:defRPr/>
             </a:pPr>
             <a:r>
-              <a:rPr lang="en-US" sz="853" i="1">
+              <a:rPr lang="en-US" sz="677" i="1">
                 <a:solidFill>
                   <a:schemeClr val="accent5"/>
                 </a:solidFill>
@@ -6201,7 +6201,7 @@
               <a:defRPr/>
             </a:pPr>
             <a:r>
-              <a:rPr lang="en-US" sz="853">
+              <a:rPr lang="en-US" sz="677">
                 <a:solidFill>
                   <a:schemeClr val="tx1"/>
                 </a:solidFill>
@@ -6216,7 +6216,7 @@
               <a:defRPr/>
             </a:pPr>
             <a:r>
-              <a:rPr lang="en-US" sz="853">
+              <a:rPr lang="en-US" sz="677">
                 <a:solidFill>
                   <a:schemeClr val="tx1"/>
                 </a:solidFill>
@@ -6231,7 +6231,7 @@
               <a:defRPr/>
             </a:pPr>
             <a:r>
-              <a:rPr lang="en-US" sz="853">
+              <a:rPr lang="en-US" sz="677">
                 <a:solidFill>
                   <a:schemeClr val="tx1"/>
                 </a:solidFill>
@@ -6246,7 +6246,7 @@
               <a:defRPr/>
             </a:pPr>
             <a:r>
-              <a:rPr lang="en-US" sz="853">
+              <a:rPr lang="en-US" sz="677">
                 <a:solidFill>
                   <a:schemeClr val="tx1"/>
                 </a:solidFill>
@@ -6272,8 +6272,8 @@
         </p:nvSpPr>
         <p:spPr bwMode="auto">
           <a:xfrm>
-            <a:off x="4870016" y="5792663"/>
-            <a:ext cx="1560817" cy="1634612"/>
+            <a:off x="4246444" y="4597521"/>
+            <a:ext cx="1238789" cy="1297359"/>
           </a:xfrm>
           <a:prstGeom prst="roundRect">
             <a:avLst>
@@ -6312,7 +6312,7 @@
               <a:defRPr/>
             </a:pPr>
             <a:r>
-              <a:rPr lang="en-US" sz="1707" b="1">
+              <a:rPr lang="en-US" sz="1355" b="1">
                 <a:solidFill>
                   <a:schemeClr val="bg1"/>
                 </a:solidFill>
@@ -6330,7 +6330,7 @@
               <a:defRPr/>
             </a:pPr>
             <a:r>
-              <a:rPr lang="en-US" sz="1280" b="1">
+              <a:rPr lang="en-US" sz="1016" b="1">
                 <a:solidFill>
                   <a:schemeClr val="tx1"/>
                 </a:solidFill>
@@ -6339,7 +6339,7 @@
               </a:rPr>
               <a:t>Exams</a:t>
             </a:r>
-            <a:endParaRPr sz="1280">
+            <a:endParaRPr sz="1016">
               <a:solidFill>
                 <a:schemeClr val="tx1"/>
               </a:solidFill>
@@ -6352,7 +6352,7 @@
               <a:defRPr/>
             </a:pPr>
             <a:r>
-              <a:rPr lang="en-US" sz="853" i="1">
+              <a:rPr lang="en-US" sz="677" i="1">
                 <a:solidFill>
                   <a:schemeClr val="accent5"/>
                 </a:solidFill>
@@ -6367,7 +6367,7 @@
               <a:defRPr/>
             </a:pPr>
             <a:r>
-              <a:rPr lang="en-US" sz="853">
+              <a:rPr lang="en-US" sz="677">
                 <a:solidFill>
                   <a:schemeClr val="tx1"/>
                 </a:solidFill>
@@ -6382,7 +6382,7 @@
               <a:defRPr/>
             </a:pPr>
             <a:r>
-              <a:rPr lang="en-US" sz="853">
+              <a:rPr lang="en-US" sz="677">
                 <a:solidFill>
                   <a:schemeClr val="tx1"/>
                 </a:solidFill>
@@ -6397,7 +6397,7 @@
               <a:defRPr/>
             </a:pPr>
             <a:r>
-              <a:rPr lang="en-US" sz="853">
+              <a:rPr lang="en-US" sz="677">
                 <a:solidFill>
                   <a:schemeClr val="tx1"/>
                 </a:solidFill>
@@ -6412,7 +6412,7 @@
               <a:defRPr/>
             </a:pPr>
             <a:r>
-              <a:rPr lang="en-US" sz="853">
+              <a:rPr lang="en-US" sz="677">
                 <a:solidFill>
                   <a:schemeClr val="tx1"/>
                 </a:solidFill>
@@ -6427,7 +6427,7 @@
               <a:defRPr/>
             </a:pPr>
             <a:r>
-              <a:rPr lang="en-US" sz="853">
+              <a:rPr lang="en-US" sz="677">
                 <a:solidFill>
                   <a:schemeClr val="tx1"/>
                 </a:solidFill>
@@ -6442,7 +6442,7 @@
               <a:defRPr/>
             </a:pPr>
             <a:r>
-              <a:rPr lang="en-US" sz="853">
+              <a:rPr lang="en-US" sz="677">
                 <a:solidFill>
                   <a:schemeClr val="tx1"/>
                 </a:solidFill>
@@ -6452,7 +6452,7 @@
               <a:t>ExamTags</a:t>
             </a:r>
             <a:r>
-              <a:rPr lang="en-US" sz="853">
+              <a:rPr lang="en-US" sz="677">
                 <a:solidFill>
                   <a:srgbClr val="C00000"/>
                 </a:solidFill>
@@ -6467,7 +6467,7 @@
               <a:defRPr/>
             </a:pPr>
             <a:r>
-              <a:rPr lang="en-US" sz="500">
+              <a:rPr lang="en-US" sz="397">
                 <a:solidFill>
                   <a:srgbClr val="C00000"/>
                 </a:solidFill>
@@ -6493,8 +6493,8 @@
         </p:nvSpPr>
         <p:spPr bwMode="auto">
           <a:xfrm>
-            <a:off x="1641714" y="3131727"/>
-            <a:ext cx="1182039" cy="1793270"/>
+            <a:off x="1684206" y="2485589"/>
+            <a:ext cx="938161" cy="1423282"/>
           </a:xfrm>
           <a:prstGeom prst="roundRect">
             <a:avLst>
@@ -6534,7 +6534,7 @@
               <a:defRPr/>
             </a:pPr>
             <a:r>
-              <a:rPr lang="en-US" sz="1707" b="1">
+              <a:rPr lang="en-US" sz="1355" b="1">
                 <a:solidFill>
                   <a:schemeClr val="bg1"/>
                 </a:solidFill>
@@ -6552,7 +6552,7 @@
               <a:defRPr/>
             </a:pPr>
             <a:r>
-              <a:rPr lang="en-US" sz="1280" b="1">
+              <a:rPr lang="en-US" sz="1016" b="1">
                 <a:solidFill>
                   <a:schemeClr val="tx1"/>
                 </a:solidFill>
@@ -6561,7 +6561,7 @@
               </a:rPr>
               <a:t>Messages</a:t>
             </a:r>
-            <a:endParaRPr sz="1280">
+            <a:endParaRPr sz="1016">
               <a:solidFill>
                 <a:schemeClr val="tx1"/>
               </a:solidFill>
@@ -6574,7 +6574,7 @@
               <a:defRPr/>
             </a:pPr>
             <a:r>
-              <a:rPr lang="en-US" sz="853" i="1">
+              <a:rPr lang="en-US" sz="677" i="1">
                 <a:solidFill>
                   <a:schemeClr val="accent5"/>
                 </a:solidFill>
@@ -6589,7 +6589,7 @@
               <a:defRPr/>
             </a:pPr>
             <a:r>
-              <a:rPr lang="en-US" sz="853">
+              <a:rPr lang="en-US" sz="677">
                 <a:solidFill>
                   <a:schemeClr val="tx1"/>
                 </a:solidFill>
@@ -6604,7 +6604,7 @@
               <a:defRPr/>
             </a:pPr>
             <a:r>
-              <a:rPr lang="en-US" sz="853">
+              <a:rPr lang="en-US" sz="677">
                 <a:solidFill>
                   <a:schemeClr val="tx1"/>
                 </a:solidFill>
@@ -6619,7 +6619,7 @@
               <a:defRPr/>
             </a:pPr>
             <a:r>
-              <a:rPr lang="en-US" sz="853">
+              <a:rPr lang="en-US" sz="677">
                 <a:solidFill>
                   <a:schemeClr val="tx1"/>
                 </a:solidFill>
@@ -6634,7 +6634,7 @@
               <a:defRPr/>
             </a:pPr>
             <a:r>
-              <a:rPr lang="en-US" sz="853">
+              <a:rPr lang="en-US" sz="677">
                 <a:solidFill>
                   <a:schemeClr val="tx1"/>
                 </a:solidFill>
@@ -6649,7 +6649,7 @@
               <a:defRPr/>
             </a:pPr>
             <a:r>
-              <a:rPr lang="en-US" sz="853">
+              <a:rPr lang="en-US" sz="677">
                 <a:solidFill>
                   <a:schemeClr val="tx1"/>
                 </a:solidFill>
@@ -6659,7 +6659,7 @@
               <a:t>Message</a:t>
             </a:r>
             <a:r>
-              <a:rPr lang="en-US" sz="853">
+              <a:rPr lang="en-US" sz="677">
                 <a:solidFill>
                   <a:srgbClr val="C00000"/>
                 </a:solidFill>
@@ -6674,7 +6674,7 @@
               <a:defRPr/>
             </a:pPr>
             <a:r>
-              <a:rPr lang="en-US" sz="700">
+              <a:rPr lang="en-US" sz="556">
                 <a:solidFill>
                   <a:srgbClr val="C00000"/>
                 </a:solidFill>
@@ -6689,7 +6689,7 @@
               <a:defRPr/>
             </a:pPr>
             <a:r>
-              <a:rPr lang="en-US" sz="800">
+              <a:rPr lang="en-US" sz="635">
                 <a:solidFill>
                   <a:srgbClr val="C00000"/>
                 </a:solidFill>
@@ -6700,34 +6700,14 @@
             </a:r>
           </a:p>
           <a:p>
-            <a:pPr marL="0" marR="0" lvl="0" indent="0" defTabSz="914400" rtl="0" eaLnBrk="1" fontAlgn="auto" latinLnBrk="0" hangingPunct="1">
-              <a:lnSpc>
-                <a:spcPct val="100000"/>
-              </a:lnSpc>
-              <a:spcBef>
-                <a:spcPts val="0"/>
-              </a:spcBef>
-              <a:spcAft>
-                <a:spcPts val="0"/>
-              </a:spcAft>
-              <a:buClrTx/>
-              <a:buSzTx/>
-              <a:buFontTx/>
-              <a:buNone/>
-              <a:tabLst/>
-              <a:defRPr/>
-            </a:pPr>
-            <a:r>
-              <a:rPr kumimoji="0" lang="en-US" sz="800" b="0" i="0" u="none" strike="noStrike" kern="0" cap="none" spc="0" normalizeH="0" baseline="0" noProof="0">
-                <a:ln>
-                  <a:noFill/>
-                </a:ln>
+            <a:pPr defTabSz="725759" rtl="0">
+              <a:defRPr/>
+            </a:pPr>
+            <a:r>
+              <a:rPr lang="en-US" sz="635">
                 <a:solidFill>
                   <a:srgbClr val="C00000"/>
                 </a:solidFill>
-                <a:effectLst/>
-                <a:uLnTx/>
-                <a:uFillTx/>
                 <a:latin typeface="Segoe UI" panose="020B0502040204020203" pitchFamily="34" charset="0"/>
                 <a:cs typeface="Segoe UI" panose="020B0502040204020203" pitchFamily="34" charset="0"/>
               </a:rPr>
@@ -6739,7 +6719,7 @@
               <a:defRPr/>
             </a:pPr>
             <a:r>
-              <a:rPr lang="en-US" sz="800">
+              <a:rPr lang="en-US" sz="635">
                 <a:solidFill>
                   <a:srgbClr val="C00000"/>
                 </a:solidFill>
@@ -6765,8 +6745,8 @@
         </p:nvSpPr>
         <p:spPr bwMode="auto">
           <a:xfrm>
-            <a:off x="2433261" y="5434972"/>
-            <a:ext cx="1182038" cy="1055015"/>
+            <a:off x="2312440" y="4313629"/>
+            <a:ext cx="938160" cy="837344"/>
           </a:xfrm>
           <a:prstGeom prst="roundRect">
             <a:avLst>
@@ -6806,7 +6786,7 @@
               <a:defRPr/>
             </a:pPr>
             <a:r>
-              <a:rPr lang="en-US" sz="1707" b="1">
+              <a:rPr lang="en-US" sz="1355" b="1">
                 <a:solidFill>
                   <a:schemeClr val="bg1"/>
                 </a:solidFill>
@@ -6824,7 +6804,7 @@
               <a:defRPr/>
             </a:pPr>
             <a:r>
-              <a:rPr lang="en-US" sz="1280" b="1">
+              <a:rPr lang="en-US" sz="1016" b="1">
                 <a:solidFill>
                   <a:schemeClr val="tx1"/>
                 </a:solidFill>
@@ -6833,7 +6813,7 @@
               </a:rPr>
               <a:t>Groups</a:t>
             </a:r>
-            <a:endParaRPr sz="1280" b="1">
+            <a:endParaRPr sz="1016" b="1">
               <a:solidFill>
                 <a:schemeClr val="tx1"/>
               </a:solidFill>
@@ -6846,7 +6826,7 @@
               <a:defRPr/>
             </a:pPr>
             <a:r>
-              <a:rPr lang="en-US" sz="853" i="1">
+              <a:rPr lang="en-US" sz="677" i="1">
                 <a:solidFill>
                   <a:schemeClr val="accent5"/>
                 </a:solidFill>
@@ -6861,7 +6841,7 @@
               <a:defRPr/>
             </a:pPr>
             <a:r>
-              <a:rPr lang="en-US" sz="853">
+              <a:rPr lang="en-US" sz="677">
                 <a:solidFill>
                   <a:schemeClr val="tx1"/>
                 </a:solidFill>
@@ -6876,7 +6856,7 @@
               <a:defRPr/>
             </a:pPr>
             <a:r>
-              <a:rPr lang="en-US" sz="853">
+              <a:rPr lang="en-US" sz="677">
                 <a:solidFill>
                   <a:schemeClr val="tx1"/>
                 </a:solidFill>
@@ -6891,7 +6871,7 @@
               <a:defRPr/>
             </a:pPr>
             <a:r>
-              <a:rPr lang="en-US" sz="853">
+              <a:rPr lang="en-US" sz="677">
                 <a:solidFill>
                   <a:schemeClr val="tx1"/>
                 </a:solidFill>
@@ -6901,7 +6881,7 @@
               <a:t>Group</a:t>
             </a:r>
             <a:r>
-              <a:rPr lang="en-US" sz="853">
+              <a:rPr lang="en-US" sz="677">
                 <a:solidFill>
                   <a:srgbClr val="C00000"/>
                 </a:solidFill>
@@ -6911,7 +6891,7 @@
               <a:t>Tags   </a:t>
             </a:r>
             <a:r>
-              <a:rPr lang="en-US" sz="600">
+              <a:rPr lang="en-US" sz="476">
                 <a:solidFill>
                   <a:srgbClr val="C00000"/>
                 </a:solidFill>
@@ -6937,8 +6917,8 @@
         </p:nvSpPr>
         <p:spPr bwMode="auto">
           <a:xfrm>
-            <a:off x="4235094" y="2930674"/>
-            <a:ext cx="1855656" cy="2078683"/>
+            <a:off x="3742519" y="2326018"/>
+            <a:ext cx="1472797" cy="1649809"/>
           </a:xfrm>
           <a:prstGeom prst="roundRect">
             <a:avLst>
@@ -6973,11 +6953,11 @@
           <a:bodyPr rtlCol="1" anchor="ctr"/>
           <a:lstStyle/>
           <a:p>
-            <a:pPr marL="189651" algn="l" rtl="0">
-              <a:defRPr/>
-            </a:pPr>
-            <a:r>
-              <a:rPr lang="en-US" sz="1707" b="1">
+            <a:pPr marL="150526" algn="l" rtl="0">
+              <a:defRPr/>
+            </a:pPr>
+            <a:r>
+              <a:rPr lang="en-US" sz="1355" b="1">
                 <a:solidFill>
                   <a:schemeClr val="bg1"/>
                 </a:solidFill>
@@ -6991,11 +6971,11 @@
             </a:r>
           </a:p>
           <a:p>
-            <a:pPr marL="189651" rtl="0">
-              <a:defRPr/>
-            </a:pPr>
-            <a:r>
-              <a:rPr lang="en-US" sz="1280" b="1">
+            <a:pPr marL="150526" rtl="0">
+              <a:defRPr/>
+            </a:pPr>
+            <a:r>
+              <a:rPr lang="en-US" sz="1016" b="1">
                 <a:solidFill>
                   <a:schemeClr val="tx1"/>
                 </a:solidFill>
@@ -7004,7 +6984,7 @@
               </a:rPr>
               <a:t>Students</a:t>
             </a:r>
-            <a:endParaRPr sz="1280">
+            <a:endParaRPr sz="1016">
               <a:solidFill>
                 <a:schemeClr val="tx1"/>
               </a:solidFill>
@@ -7013,11 +6993,11 @@
             </a:endParaRPr>
           </a:p>
           <a:p>
-            <a:pPr marL="189651" rtl="0">
-              <a:defRPr/>
-            </a:pPr>
-            <a:r>
-              <a:rPr lang="en-US" sz="853" i="1">
+            <a:pPr marL="150526" rtl="0">
+              <a:defRPr/>
+            </a:pPr>
+            <a:r>
+              <a:rPr lang="en-US" sz="677" i="1">
                 <a:solidFill>
                   <a:schemeClr val="accent5"/>
                 </a:solidFill>
@@ -7028,11 +7008,11 @@
             </a:r>
           </a:p>
           <a:p>
-            <a:pPr marL="189651" rtl="0">
-              <a:defRPr/>
-            </a:pPr>
-            <a:r>
-              <a:rPr lang="en-US" sz="853">
+            <a:pPr marL="150526" rtl="0">
+              <a:defRPr/>
+            </a:pPr>
+            <a:r>
+              <a:rPr lang="en-US" sz="677">
                 <a:solidFill>
                   <a:schemeClr val="tx1"/>
                 </a:solidFill>
@@ -7043,11 +7023,11 @@
             </a:r>
           </a:p>
           <a:p>
-            <a:pPr marL="189651" rtl="0">
-              <a:defRPr/>
-            </a:pPr>
-            <a:r>
-              <a:rPr lang="en-US" sz="853">
+            <a:pPr marL="150526" rtl="0">
+              <a:defRPr/>
+            </a:pPr>
+            <a:r>
+              <a:rPr lang="en-US" sz="677">
                 <a:solidFill>
                   <a:schemeClr val="tx1"/>
                 </a:solidFill>
@@ -7058,11 +7038,11 @@
             </a:r>
           </a:p>
           <a:p>
-            <a:pPr marL="189651" rtl="0">
-              <a:defRPr/>
-            </a:pPr>
-            <a:r>
-              <a:rPr lang="en-US" sz="853">
+            <a:pPr marL="150526" rtl="0">
+              <a:defRPr/>
+            </a:pPr>
+            <a:r>
+              <a:rPr lang="en-US" sz="677">
                 <a:solidFill>
                   <a:schemeClr val="tx1"/>
                 </a:solidFill>
@@ -7073,11 +7053,11 @@
             </a:r>
           </a:p>
           <a:p>
-            <a:pPr marL="189651" rtl="0">
-              <a:defRPr/>
-            </a:pPr>
-            <a:r>
-              <a:rPr lang="en-US" sz="853">
+            <a:pPr marL="150526" rtl="0">
+              <a:defRPr/>
+            </a:pPr>
+            <a:r>
+              <a:rPr lang="en-US" sz="677">
                 <a:solidFill>
                   <a:schemeClr val="tx1"/>
                 </a:solidFill>
@@ -7088,11 +7068,11 @@
             </a:r>
           </a:p>
           <a:p>
-            <a:pPr marL="189651" rtl="0">
-              <a:defRPr/>
-            </a:pPr>
-            <a:r>
-              <a:rPr lang="en-US" sz="853">
+            <a:pPr marL="150526" rtl="0">
+              <a:defRPr/>
+            </a:pPr>
+            <a:r>
+              <a:rPr lang="en-US" sz="677">
                 <a:solidFill>
                   <a:schemeClr val="tx1"/>
                 </a:solidFill>
@@ -7103,11 +7083,11 @@
             </a:r>
           </a:p>
           <a:p>
-            <a:pPr marL="176213" rtl="0">
-              <a:defRPr/>
-            </a:pPr>
-            <a:r>
-              <a:rPr lang="en-US" sz="500">
+            <a:pPr marL="139860" rtl="0">
+              <a:defRPr/>
+            </a:pPr>
+            <a:r>
+              <a:rPr lang="en-US" sz="397">
                 <a:solidFill>
                   <a:srgbClr val="C00000"/>
                 </a:solidFill>
@@ -7118,11 +7098,11 @@
             </a:r>
           </a:p>
           <a:p>
-            <a:pPr marL="176213" rtl="0">
-              <a:defRPr/>
-            </a:pPr>
-            <a:r>
-              <a:rPr lang="en-US" sz="500">
+            <a:pPr marL="139860" rtl="0">
+              <a:defRPr/>
+            </a:pPr>
+            <a:r>
+              <a:rPr lang="en-US" sz="397">
                 <a:solidFill>
                   <a:srgbClr val="C00000"/>
                 </a:solidFill>
@@ -7133,11 +7113,11 @@
             </a:r>
           </a:p>
           <a:p>
-            <a:pPr marL="176213" rtl="0">
-              <a:defRPr/>
-            </a:pPr>
-            <a:r>
-              <a:rPr lang="en-US" sz="500">
+            <a:pPr marL="139860" rtl="0">
+              <a:defRPr/>
+            </a:pPr>
+            <a:r>
+              <a:rPr lang="en-US" sz="397">
                 <a:solidFill>
                   <a:srgbClr val="C00000"/>
                 </a:solidFill>
@@ -7148,11 +7128,11 @@
             </a:r>
           </a:p>
           <a:p>
-            <a:pPr marL="176213" rtl="0">
-              <a:defRPr/>
-            </a:pPr>
-            <a:r>
-              <a:rPr lang="en-US" sz="500">
+            <a:pPr marL="139860" rtl="0">
+              <a:defRPr/>
+            </a:pPr>
+            <a:r>
+              <a:rPr lang="en-US" sz="397">
                 <a:solidFill>
                   <a:srgbClr val="C00000"/>
                 </a:solidFill>
@@ -7163,11 +7143,11 @@
             </a:r>
           </a:p>
           <a:p>
-            <a:pPr marL="176213" rtl="0">
-              <a:defRPr/>
-            </a:pPr>
-            <a:r>
-              <a:rPr lang="en-US" sz="500">
+            <a:pPr marL="139860" rtl="0">
+              <a:defRPr/>
+            </a:pPr>
+            <a:r>
+              <a:rPr lang="en-US" sz="397">
                 <a:solidFill>
                   <a:srgbClr val="C00000"/>
                 </a:solidFill>
@@ -7178,11 +7158,11 @@
             </a:r>
           </a:p>
           <a:p>
-            <a:pPr marL="176213" rtl="0">
-              <a:defRPr/>
-            </a:pPr>
-            <a:r>
-              <a:rPr lang="en-US" sz="500">
+            <a:pPr marL="139860" rtl="0">
+              <a:defRPr/>
+            </a:pPr>
+            <a:r>
+              <a:rPr lang="en-US" sz="397">
                 <a:solidFill>
                   <a:srgbClr val="C00000"/>
                 </a:solidFill>
@@ -7193,11 +7173,11 @@
             </a:r>
           </a:p>
           <a:p>
-            <a:pPr marL="176213" rtl="0">
-              <a:defRPr/>
-            </a:pPr>
-            <a:r>
-              <a:rPr lang="en-US" sz="500">
+            <a:pPr marL="139860" rtl="0">
+              <a:defRPr/>
+            </a:pPr>
+            <a:r>
+              <a:rPr lang="en-US" sz="397">
                 <a:solidFill>
                   <a:srgbClr val="C00000"/>
                 </a:solidFill>
@@ -7208,11 +7188,11 @@
             </a:r>
           </a:p>
           <a:p>
-            <a:pPr marL="176213" rtl="0">
-              <a:defRPr/>
-            </a:pPr>
-            <a:r>
-              <a:rPr lang="en-US" sz="500">
+            <a:pPr marL="139860" rtl="0">
+              <a:defRPr/>
+            </a:pPr>
+            <a:r>
+              <a:rPr lang="en-US" sz="397">
                 <a:solidFill>
                   <a:srgbClr val="C00000"/>
                 </a:solidFill>
@@ -7223,11 +7203,11 @@
             </a:r>
           </a:p>
           <a:p>
-            <a:pPr marL="176213" rtl="0">
-              <a:defRPr/>
-            </a:pPr>
-            <a:r>
-              <a:rPr lang="en-US" sz="500">
+            <a:pPr marL="139860" rtl="0">
+              <a:defRPr/>
+            </a:pPr>
+            <a:r>
+              <a:rPr lang="en-US" sz="397">
                 <a:solidFill>
                   <a:srgbClr val="C00000"/>
                 </a:solidFill>
@@ -7238,10 +7218,10 @@
             </a:r>
           </a:p>
           <a:p>
-            <a:pPr marL="176213" rtl="0">
-              <a:defRPr/>
-            </a:pPr>
-            <a:endParaRPr lang="en-US" sz="500">
+            <a:pPr marL="139860" rtl="0">
+              <a:defRPr/>
+            </a:pPr>
+            <a:endParaRPr lang="en-US" sz="397">
               <a:solidFill>
                 <a:srgbClr val="C00000"/>
               </a:solidFill>
@@ -7265,8 +7245,8 @@
         </p:nvSpPr>
         <p:spPr bwMode="auto">
           <a:xfrm>
-            <a:off x="5612526" y="2562764"/>
-            <a:ext cx="1614208" cy="1528199"/>
+            <a:off x="4835759" y="2034015"/>
+            <a:ext cx="1281165" cy="1212901"/>
           </a:xfrm>
           <a:prstGeom prst="roundRect">
             <a:avLst>
@@ -7306,7 +7286,7 @@
               <a:defRPr/>
             </a:pPr>
             <a:r>
-              <a:rPr lang="en-US" sz="1707" b="1">
+              <a:rPr lang="en-US" sz="1355" b="1">
                 <a:solidFill>
                   <a:schemeClr val="bg1"/>
                 </a:solidFill>
@@ -7325,7 +7305,7 @@
               <a:defRPr/>
             </a:pPr>
             <a:r>
-              <a:rPr lang="en-US" sz="1280" b="1">
+              <a:rPr lang="en-US" sz="1016" b="1">
                 <a:solidFill>
                   <a:schemeClr val="tx1"/>
                 </a:solidFill>
@@ -7336,7 +7316,7 @@
               <a:t>StudentCourse</a:t>
             </a:r>
             <a:r>
-              <a:rPr lang="en-US" sz="1280" b="1">
+              <a:rPr lang="en-US" sz="1016" b="1">
                 <a:solidFill>
                   <a:schemeClr val="tx1"/>
                 </a:solidFill>
@@ -7345,7 +7325,7 @@
               </a:rPr>
               <a:t>s</a:t>
             </a:r>
-            <a:endParaRPr sz="1280" b="1">
+            <a:endParaRPr sz="1016" b="1">
               <a:solidFill>
                 <a:schemeClr val="tx1"/>
               </a:solidFill>
@@ -7358,7 +7338,7 @@
               <a:defRPr/>
             </a:pPr>
             <a:r>
-              <a:rPr lang="en-US" sz="853" i="1">
+              <a:rPr lang="en-US" sz="677" i="1">
                 <a:solidFill>
                   <a:schemeClr val="accent5"/>
                 </a:solidFill>
@@ -7373,7 +7353,7 @@
               <a:defRPr/>
             </a:pPr>
             <a:r>
-              <a:rPr lang="en-US" sz="853">
+              <a:rPr lang="en-US" sz="677">
                 <a:solidFill>
                   <a:schemeClr val="tx1"/>
                 </a:solidFill>
@@ -7388,7 +7368,7 @@
               <a:defRPr/>
             </a:pPr>
             <a:r>
-              <a:rPr lang="en-US" sz="853">
+              <a:rPr lang="en-US" sz="677">
                 <a:solidFill>
                   <a:schemeClr val="tx1"/>
                 </a:solidFill>
@@ -7403,7 +7383,7 @@
               <a:defRPr/>
             </a:pPr>
             <a:r>
-              <a:rPr lang="en-US" sz="853">
+              <a:rPr lang="en-US" sz="677">
                 <a:solidFill>
                   <a:schemeClr val="tx1"/>
                 </a:solidFill>
@@ -7418,7 +7398,7 @@
               <a:defRPr/>
             </a:pPr>
             <a:r>
-              <a:rPr lang="en-US" sz="853">
+              <a:rPr lang="en-US" sz="677">
                 <a:solidFill>
                   <a:schemeClr val="tx1"/>
                 </a:solidFill>
@@ -7433,7 +7413,7 @@
               <a:defRPr/>
             </a:pPr>
             <a:r>
-              <a:rPr lang="en-US" sz="853">
+              <a:rPr lang="en-US" sz="677">
                 <a:solidFill>
                   <a:schemeClr val="tx1"/>
                 </a:solidFill>
@@ -7448,7 +7428,7 @@
               <a:buNone/>
             </a:pPr>
             <a:r>
-              <a:rPr lang="en-US" sz="500" kern="100">
+              <a:rPr lang="en-US" sz="397" kern="100">
                 <a:solidFill>
                   <a:srgbClr val="C00000"/>
                 </a:solidFill>
@@ -7464,7 +7444,7 @@
               <a:buNone/>
             </a:pPr>
             <a:r>
-              <a:rPr lang="en-US" sz="500" kern="100">
+              <a:rPr lang="en-US" sz="397" kern="100">
                 <a:solidFill>
                   <a:srgbClr val="C00000"/>
                 </a:solidFill>
@@ -7480,7 +7460,7 @@
               <a:buNone/>
             </a:pPr>
             <a:r>
-              <a:rPr lang="en-US" sz="500" kern="100">
+              <a:rPr lang="en-US" sz="397" kern="100">
                 <a:solidFill>
                   <a:srgbClr val="C00000"/>
                 </a:solidFill>
@@ -7507,8 +7487,8 @@
         </p:nvSpPr>
         <p:spPr bwMode="auto">
           <a:xfrm>
-            <a:off x="2599790" y="2128356"/>
-            <a:ext cx="1757728" cy="1759977"/>
+            <a:off x="2444611" y="1689234"/>
+            <a:ext cx="1395073" cy="1396858"/>
           </a:xfrm>
           <a:prstGeom prst="roundRect">
             <a:avLst>
@@ -7546,7 +7526,7 @@
           <a:p>
             <a:pPr algn="l" rtl="0"/>
             <a:r>
-              <a:rPr lang="en-US" sz="1707" b="1">
+              <a:rPr lang="en-US" sz="1355" b="1">
                 <a:solidFill>
                   <a:schemeClr val="bg1"/>
                 </a:solidFill>
@@ -7562,7 +7542,7 @@
           <a:p>
             <a:pPr rtl="0"/>
             <a:r>
-              <a:rPr lang="en-US" sz="1280" b="1">
+              <a:rPr lang="en-US" sz="1016" b="1">
                 <a:solidFill>
                   <a:schemeClr val="tx1"/>
                 </a:solidFill>
@@ -7571,7 +7551,7 @@
               </a:rPr>
               <a:t>StudentMessages</a:t>
             </a:r>
-            <a:endParaRPr sz="1280" b="1">
+            <a:endParaRPr sz="1016" b="1">
               <a:solidFill>
                 <a:schemeClr val="tx1"/>
               </a:solidFill>
@@ -7582,7 +7562,7 @@
           <a:p>
             <a:pPr rtl="0"/>
             <a:r>
-              <a:rPr lang="en-US" sz="853" i="1">
+              <a:rPr lang="en-US" sz="677" i="1">
                 <a:solidFill>
                   <a:schemeClr val="accent5"/>
                 </a:solidFill>
@@ -7595,7 +7575,7 @@
           <a:p>
             <a:pPr rtl="0"/>
             <a:r>
-              <a:rPr lang="en-US" sz="853">
+              <a:rPr lang="en-US" sz="677">
                 <a:solidFill>
                   <a:schemeClr val="tx1"/>
                 </a:solidFill>
@@ -7608,7 +7588,7 @@
           <a:p>
             <a:pPr rtl="0"/>
             <a:r>
-              <a:rPr lang="en-US" sz="853">
+              <a:rPr lang="en-US" sz="677">
                 <a:solidFill>
                   <a:schemeClr val="tx1"/>
                 </a:solidFill>
@@ -7621,7 +7601,7 @@
           <a:p>
             <a:pPr rtl="0"/>
             <a:r>
-              <a:rPr lang="en-US" sz="853">
+              <a:rPr lang="en-US" sz="677">
                 <a:solidFill>
                   <a:schemeClr val="tx1"/>
                 </a:solidFill>
@@ -7634,7 +7614,7 @@
           <a:p>
             <a:pPr rtl="0"/>
             <a:r>
-              <a:rPr lang="en-US" sz="853">
+              <a:rPr lang="en-US" sz="677">
                 <a:solidFill>
                   <a:schemeClr val="tx1"/>
                 </a:solidFill>
@@ -7647,7 +7627,7 @@
           <a:p>
             <a:pPr rtl="0"/>
             <a:r>
-              <a:rPr lang="en-US" sz="853">
+              <a:rPr lang="en-US" sz="677">
                 <a:solidFill>
                   <a:schemeClr val="tx1"/>
                 </a:solidFill>
@@ -7662,7 +7642,7 @@
               <a:buNone/>
             </a:pPr>
             <a:r>
-              <a:rPr lang="en-US" sz="500" kern="100">
+              <a:rPr lang="en-US" sz="397" kern="100">
                 <a:solidFill>
                   <a:srgbClr val="C00000"/>
                 </a:solidFill>
@@ -7678,7 +7658,7 @@
               <a:buNone/>
             </a:pPr>
             <a:r>
-              <a:rPr lang="en-US" sz="500" kern="100">
+              <a:rPr lang="en-US" sz="397" kern="100">
                 <a:solidFill>
                   <a:srgbClr val="C00000"/>
                 </a:solidFill>
@@ -7694,7 +7674,7 @@
               <a:buNone/>
             </a:pPr>
             <a:r>
-              <a:rPr lang="en-US" sz="500" kern="100">
+              <a:rPr lang="en-US" sz="397" kern="100">
                 <a:solidFill>
                   <a:srgbClr val="C00000"/>
                 </a:solidFill>
@@ -7708,7 +7688,7 @@
           <a:p>
             <a:pPr rtl="0"/>
             <a:r>
-              <a:rPr lang="en-US" sz="500" kern="100">
+              <a:rPr lang="en-US" sz="397" kern="100">
                 <a:solidFill>
                   <a:srgbClr val="C00000"/>
                 </a:solidFill>
@@ -7724,7 +7704,7 @@
               <a:buNone/>
             </a:pPr>
             <a:r>
-              <a:rPr lang="en-US" sz="500" kern="100">
+              <a:rPr lang="en-US" sz="397" kern="100">
                 <a:solidFill>
                   <a:srgbClr val="C00000"/>
                 </a:solidFill>
@@ -7740,7 +7720,7 @@
               <a:buNone/>
             </a:pPr>
             <a:r>
-              <a:rPr lang="en-US" sz="500" kern="100">
+              <a:rPr lang="en-US" sz="397" kern="100">
                 <a:solidFill>
                   <a:srgbClr val="C00000"/>
                 </a:solidFill>
@@ -7767,8 +7747,8 @@
         </p:nvSpPr>
         <p:spPr bwMode="auto">
           <a:xfrm>
-            <a:off x="8424942" y="4090963"/>
-            <a:ext cx="1816421" cy="3387560"/>
+            <a:off x="7067918" y="3246916"/>
+            <a:ext cx="1441657" cy="2688638"/>
           </a:xfrm>
           <a:prstGeom prst="roundRect">
             <a:avLst>
@@ -7803,10 +7783,10 @@
           <a:bodyPr rtlCol="1" anchor="ctr"/>
           <a:lstStyle/>
           <a:p>
-            <a:pPr marL="625475" rtl="0">
-              <a:defRPr/>
-            </a:pPr>
-            <a:endParaRPr lang="en-US" sz="1707" b="1">
+            <a:pPr marL="496440" rtl="0">
+              <a:defRPr/>
+            </a:pPr>
+            <a:endParaRPr lang="en-US" sz="1355" b="1">
               <a:solidFill>
                 <a:schemeClr val="bg1"/>
               </a:solidFill>
@@ -7818,11 +7798,11 @@
             </a:endParaRPr>
           </a:p>
           <a:p>
-            <a:pPr marL="450850" rtl="0">
-              <a:defRPr/>
-            </a:pPr>
-            <a:r>
-              <a:rPr lang="en-US" sz="1707" b="1">
+            <a:pPr marL="357840" rtl="0">
+              <a:defRPr/>
+            </a:pPr>
+            <a:r>
+              <a:rPr lang="en-US" sz="1355" b="1">
                 <a:solidFill>
                   <a:schemeClr val="bg1"/>
                 </a:solidFill>
@@ -7836,11 +7816,11 @@
             </a:r>
           </a:p>
           <a:p>
-            <a:pPr marL="450850" rtl="0">
-              <a:defRPr/>
-            </a:pPr>
-            <a:r>
-              <a:rPr lang="en-US" sz="1280" b="1">
+            <a:pPr marL="357840" rtl="0">
+              <a:defRPr/>
+            </a:pPr>
+            <a:r>
+              <a:rPr lang="en-US" sz="1016" b="1">
                 <a:solidFill>
                   <a:schemeClr val="tx1"/>
                 </a:solidFill>
@@ -7849,7 +7829,7 @@
               </a:rPr>
               <a:t>Tests</a:t>
             </a:r>
-            <a:endParaRPr sz="1280" b="1">
+            <a:endParaRPr sz="1016" b="1">
               <a:solidFill>
                 <a:schemeClr val="tx1"/>
               </a:solidFill>
@@ -7858,11 +7838,11 @@
             </a:endParaRPr>
           </a:p>
           <a:p>
-            <a:pPr marL="450850" rtl="0">
-              <a:defRPr/>
-            </a:pPr>
-            <a:r>
-              <a:rPr lang="en-US" sz="853" i="1">
+            <a:pPr marL="357840" rtl="0">
+              <a:defRPr/>
+            </a:pPr>
+            <a:r>
+              <a:rPr lang="en-US" sz="677" i="1">
                 <a:solidFill>
                   <a:schemeClr val="accent5"/>
                 </a:solidFill>
@@ -7873,11 +7853,11 @@
             </a:r>
           </a:p>
           <a:p>
-            <a:pPr marL="450850" rtl="0">
-              <a:defRPr/>
-            </a:pPr>
-            <a:r>
-              <a:rPr lang="en-US" sz="853">
+            <a:pPr marL="357840" rtl="0">
+              <a:defRPr/>
+            </a:pPr>
+            <a:r>
+              <a:rPr lang="en-US" sz="677">
                 <a:solidFill>
                   <a:schemeClr val="tx1"/>
                 </a:solidFill>
@@ -7888,11 +7868,11 @@
             </a:r>
           </a:p>
           <a:p>
-            <a:pPr marL="450850" rtl="0">
-              <a:defRPr/>
-            </a:pPr>
-            <a:r>
-              <a:rPr lang="en-US" sz="853">
+            <a:pPr marL="357840" rtl="0">
+              <a:defRPr/>
+            </a:pPr>
+            <a:r>
+              <a:rPr lang="en-US" sz="677">
                 <a:solidFill>
                   <a:schemeClr val="tx1"/>
                 </a:solidFill>
@@ -7903,11 +7883,11 @@
             </a:r>
           </a:p>
           <a:p>
-            <a:pPr marL="450850" rtl="0">
-              <a:defRPr/>
-            </a:pPr>
-            <a:r>
-              <a:rPr lang="en-US" sz="853">
+            <a:pPr marL="357840" rtl="0">
+              <a:defRPr/>
+            </a:pPr>
+            <a:r>
+              <a:rPr lang="en-US" sz="677">
                 <a:solidFill>
                   <a:schemeClr val="tx1"/>
                 </a:solidFill>
@@ -7918,11 +7898,11 @@
             </a:r>
           </a:p>
           <a:p>
-            <a:pPr marL="450850" rtl="0">
-              <a:defRPr/>
-            </a:pPr>
-            <a:r>
-              <a:rPr lang="en-US" sz="853">
+            <a:pPr marL="357840" rtl="0">
+              <a:defRPr/>
+            </a:pPr>
+            <a:r>
+              <a:rPr lang="en-US" sz="677">
                 <a:solidFill>
                   <a:schemeClr val="tx1"/>
                 </a:solidFill>
@@ -7932,7 +7912,7 @@
               <a:t>TestType {</a:t>
             </a:r>
             <a:r>
-              <a:rPr lang="en-US" sz="853" b="1">
+              <a:rPr lang="en-US" sz="677" b="1">
                 <a:solidFill>
                   <a:schemeClr val="tx1"/>
                 </a:solidFill>
@@ -7942,7 +7922,7 @@
               <a:t>1</a:t>
             </a:r>
             <a:r>
-              <a:rPr lang="en-US" sz="853">
+              <a:rPr lang="en-US" sz="677">
                 <a:solidFill>
                   <a:schemeClr val="tx1"/>
                 </a:solidFill>
@@ -7953,11 +7933,11 @@
             </a:r>
           </a:p>
           <a:p>
-            <a:pPr marL="450850" rtl="0">
-              <a:defRPr/>
-            </a:pPr>
-            <a:r>
-              <a:rPr lang="en-US" sz="853">
+            <a:pPr marL="357840" rtl="0">
+              <a:defRPr/>
+            </a:pPr>
+            <a:r>
+              <a:rPr lang="en-US" sz="677">
                 <a:solidFill>
                   <a:schemeClr val="tx1"/>
                 </a:solidFill>
@@ -7968,9 +7948,9 @@
             </a:r>
           </a:p>
           <a:p>
-            <a:pPr marL="450850" rtl="0"/>
-            <a:r>
-              <a:rPr lang="en-US" sz="853">
+            <a:pPr marL="357840" rtl="0"/>
+            <a:r>
+              <a:rPr lang="en-US" sz="677">
                 <a:solidFill>
                   <a:schemeClr val="tx1"/>
                 </a:solidFill>
@@ -7981,9 +7961,9 @@
             </a:r>
           </a:p>
           <a:p>
-            <a:pPr marL="450850" rtl="0"/>
-            <a:r>
-              <a:rPr lang="en-US" sz="500" kern="100">
+            <a:pPr marL="357840" rtl="0"/>
+            <a:r>
+              <a:rPr lang="en-US" sz="397" kern="100">
                 <a:solidFill>
                   <a:srgbClr val="C00000"/>
                 </a:solidFill>
@@ -7995,9 +7975,9 @@
             </a:r>
           </a:p>
           <a:p>
-            <a:pPr marL="450850" rtl="0"/>
-            <a:r>
-              <a:rPr lang="en-US" sz="500" kern="100">
+            <a:pPr marL="357840" rtl="0"/>
+            <a:r>
+              <a:rPr lang="en-US" sz="397" kern="100">
                 <a:solidFill>
                   <a:srgbClr val="C00000"/>
                 </a:solidFill>
@@ -8009,8 +7989,8 @@
             </a:r>
           </a:p>
           <a:p>
-            <a:pPr marL="450850" rtl="0"/>
-            <a:endParaRPr lang="en-US" sz="500" kern="100">
+            <a:pPr marL="357840" rtl="0"/>
+            <a:endParaRPr lang="en-US" sz="397" kern="100">
               <a:solidFill>
                 <a:srgbClr val="C00000"/>
               </a:solidFill>
@@ -8020,8 +8000,8 @@
             </a:endParaRPr>
           </a:p>
           <a:p>
-            <a:pPr marL="450850" rtl="0"/>
-            <a:endParaRPr lang="en-US" sz="500" kern="100">
+            <a:pPr marL="357840" rtl="0"/>
+            <a:endParaRPr lang="en-US" sz="397" kern="100">
               <a:solidFill>
                 <a:srgbClr val="C00000"/>
               </a:solidFill>
@@ -8031,8 +8011,8 @@
             </a:endParaRPr>
           </a:p>
           <a:p>
-            <a:pPr marL="450850" rtl="0"/>
-            <a:endParaRPr lang="en-US" sz="500" kern="100">
+            <a:pPr marL="357840" rtl="0"/>
+            <a:endParaRPr lang="en-US" sz="397" kern="100">
               <a:solidFill>
                 <a:srgbClr val="C00000"/>
               </a:solidFill>
@@ -8042,8 +8022,8 @@
             </a:endParaRPr>
           </a:p>
           <a:p>
-            <a:pPr marL="450850" rtl="0"/>
-            <a:endParaRPr lang="en-US" sz="500" kern="100">
+            <a:pPr marL="357840" rtl="0"/>
+            <a:endParaRPr lang="en-US" sz="397" kern="100">
               <a:solidFill>
                 <a:srgbClr val="C00000"/>
               </a:solidFill>
@@ -8053,8 +8033,8 @@
             </a:endParaRPr>
           </a:p>
           <a:p>
-            <a:pPr marL="450850" rtl="0"/>
-            <a:endParaRPr lang="en-US" sz="500" kern="100">
+            <a:pPr marL="357840" rtl="0"/>
+            <a:endParaRPr lang="en-US" sz="397" kern="100">
               <a:solidFill>
                 <a:srgbClr val="C00000"/>
               </a:solidFill>
@@ -8064,8 +8044,8 @@
             </a:endParaRPr>
           </a:p>
           <a:p>
-            <a:pPr marL="450850" rtl="0"/>
-            <a:endParaRPr lang="en-US" sz="500" kern="100">
+            <a:pPr marL="357840" rtl="0"/>
+            <a:endParaRPr lang="en-US" sz="397" kern="100">
               <a:solidFill>
                 <a:srgbClr val="C00000"/>
               </a:solidFill>
@@ -8075,8 +8055,8 @@
             </a:endParaRPr>
           </a:p>
           <a:p>
-            <a:pPr marL="450850" rtl="0"/>
-            <a:endParaRPr lang="en-US" sz="500" kern="100">
+            <a:pPr marL="357840" rtl="0"/>
+            <a:endParaRPr lang="en-US" sz="397" kern="100">
               <a:solidFill>
                 <a:srgbClr val="C00000"/>
               </a:solidFill>
@@ -8086,8 +8066,8 @@
             </a:endParaRPr>
           </a:p>
           <a:p>
-            <a:pPr marL="450850" rtl="0"/>
-            <a:endParaRPr lang="en-US" sz="500" kern="100">
+            <a:pPr marL="357840" rtl="0"/>
+            <a:endParaRPr lang="en-US" sz="397" kern="100">
               <a:solidFill>
                 <a:srgbClr val="C00000"/>
               </a:solidFill>
@@ -8097,8 +8077,8 @@
             </a:endParaRPr>
           </a:p>
           <a:p>
-            <a:pPr marL="450850" rtl="0"/>
-            <a:endParaRPr lang="en-US" sz="500" kern="100">
+            <a:pPr marL="357840" rtl="0"/>
+            <a:endParaRPr lang="en-US" sz="397" kern="100">
               <a:solidFill>
                 <a:srgbClr val="C00000"/>
               </a:solidFill>
@@ -8108,8 +8088,8 @@
             </a:endParaRPr>
           </a:p>
           <a:p>
-            <a:pPr marL="450850" rtl="0"/>
-            <a:endParaRPr lang="en-US" sz="500" kern="100">
+            <a:pPr marL="357840" rtl="0"/>
+            <a:endParaRPr lang="en-US" sz="397" kern="100">
               <a:solidFill>
                 <a:srgbClr val="C00000"/>
               </a:solidFill>
@@ -8119,8 +8099,8 @@
             </a:endParaRPr>
           </a:p>
           <a:p>
-            <a:pPr marL="450850" rtl="0"/>
-            <a:endParaRPr lang="en-US" sz="500" kern="100">
+            <a:pPr marL="357840" rtl="0"/>
+            <a:endParaRPr lang="en-US" sz="397" kern="100">
               <a:solidFill>
                 <a:srgbClr val="C00000"/>
               </a:solidFill>
@@ -8130,8 +8110,8 @@
             </a:endParaRPr>
           </a:p>
           <a:p>
-            <a:pPr marL="625475" rtl="0"/>
-            <a:endParaRPr lang="en-US" sz="500" kern="100">
+            <a:pPr marL="496440" rtl="0"/>
+            <a:endParaRPr lang="en-US" sz="397" kern="100">
               <a:solidFill>
                 <a:srgbClr val="C00000"/>
               </a:solidFill>
@@ -8156,8 +8136,8 @@
         </p:nvSpPr>
         <p:spPr bwMode="auto">
           <a:xfrm>
-            <a:off x="9867313" y="5009357"/>
-            <a:ext cx="1261502" cy="1243452"/>
+            <a:off x="8212698" y="3975826"/>
+            <a:ext cx="1001229" cy="986903"/>
           </a:xfrm>
           <a:prstGeom prst="roundRect">
             <a:avLst>
@@ -8197,7 +8177,7 @@
               <a:defRPr/>
             </a:pPr>
             <a:r>
-              <a:rPr lang="en-US" sz="1707" b="1">
+              <a:rPr lang="en-US" sz="1355" b="1">
                 <a:solidFill>
                   <a:schemeClr val="bg1"/>
                 </a:solidFill>
@@ -8215,7 +8195,7 @@
               <a:defRPr/>
             </a:pPr>
             <a:r>
-              <a:rPr lang="en-US" sz="1280" b="1">
+              <a:rPr lang="en-US" sz="1016" b="1">
                 <a:solidFill>
                   <a:schemeClr val="tx1"/>
                 </a:solidFill>
@@ -8224,7 +8204,7 @@
               </a:rPr>
               <a:t>TestOptions</a:t>
             </a:r>
-            <a:endParaRPr sz="1280" b="1">
+            <a:endParaRPr sz="1016" b="1">
               <a:solidFill>
                 <a:schemeClr val="tx1"/>
               </a:solidFill>
@@ -8237,7 +8217,7 @@
               <a:defRPr/>
             </a:pPr>
             <a:r>
-              <a:rPr lang="en-US" sz="853" i="1">
+              <a:rPr lang="en-US" sz="677" i="1">
                 <a:solidFill>
                   <a:schemeClr val="accent5"/>
                 </a:solidFill>
@@ -8252,7 +8232,7 @@
               <a:defRPr/>
             </a:pPr>
             <a:r>
-              <a:rPr lang="en-US" sz="853">
+              <a:rPr lang="en-US" sz="677">
                 <a:solidFill>
                   <a:schemeClr val="tx1"/>
                 </a:solidFill>
@@ -8267,7 +8247,7 @@
               <a:defRPr/>
             </a:pPr>
             <a:r>
-              <a:rPr lang="en-US" sz="853">
+              <a:rPr lang="en-US" sz="677">
                 <a:solidFill>
                   <a:schemeClr val="tx1"/>
                 </a:solidFill>
@@ -8282,7 +8262,7 @@
               <a:defRPr/>
             </a:pPr>
             <a:r>
-              <a:rPr lang="en-US" sz="853">
+              <a:rPr lang="en-US" sz="677">
                 <a:solidFill>
                   <a:schemeClr val="tx1"/>
                 </a:solidFill>
@@ -8292,7 +8272,7 @@
               <a:t>TestOptionTags</a:t>
             </a:r>
             <a:r>
-              <a:rPr lang="en-US" sz="853">
+              <a:rPr lang="en-US" sz="677">
                 <a:solidFill>
                   <a:srgbClr val="C00000"/>
                 </a:solidFill>
@@ -8305,7 +8285,7 @@
           <a:p>
             <a:pPr rtl="0"/>
             <a:r>
-              <a:rPr lang="en-US" sz="500" kern="100">
+              <a:rPr lang="en-US" sz="397" kern="100">
                 <a:solidFill>
                   <a:srgbClr val="C00000"/>
                 </a:solidFill>
@@ -8319,7 +8299,7 @@
           <a:p>
             <a:pPr rtl="0"/>
             <a:r>
-              <a:rPr lang="en-US" sz="500" kern="100">
+              <a:rPr lang="en-US" sz="397" kern="100">
                 <a:solidFill>
                   <a:srgbClr val="C00000"/>
                 </a:solidFill>
@@ -8346,8 +8326,8 @@
         </p:nvSpPr>
         <p:spPr bwMode="auto">
           <a:xfrm>
-            <a:off x="2931927" y="4398309"/>
-            <a:ext cx="1467637" cy="1292682"/>
+            <a:off x="2708222" y="3490850"/>
+            <a:ext cx="1164834" cy="1025976"/>
           </a:xfrm>
           <a:prstGeom prst="roundRect">
             <a:avLst>
@@ -8385,7 +8365,7 @@
           <a:p>
             <a:pPr algn="l" rtl="0"/>
             <a:r>
-              <a:rPr lang="en-US" sz="1707" b="1">
+              <a:rPr lang="en-US" sz="1355" b="1">
                 <a:solidFill>
                   <a:schemeClr val="bg1"/>
                 </a:solidFill>
@@ -8401,7 +8381,7 @@
           <a:p>
             <a:pPr rtl="0"/>
             <a:r>
-              <a:rPr lang="en-US" sz="1280" b="1">
+              <a:rPr lang="en-US" sz="1016" b="1">
                 <a:solidFill>
                   <a:schemeClr val="tx1"/>
                 </a:solidFill>
@@ -8410,7 +8390,7 @@
               </a:rPr>
               <a:t>StudentGroups</a:t>
             </a:r>
-            <a:endParaRPr sz="1280" b="1">
+            <a:endParaRPr sz="1016" b="1">
               <a:solidFill>
                 <a:schemeClr val="tx1"/>
               </a:solidFill>
@@ -8421,7 +8401,7 @@
           <a:p>
             <a:pPr rtl="0"/>
             <a:r>
-              <a:rPr lang="en-US" sz="853" i="1">
+              <a:rPr lang="en-US" sz="677" i="1">
                 <a:solidFill>
                   <a:schemeClr val="accent5"/>
                 </a:solidFill>
@@ -8434,7 +8414,7 @@
           <a:p>
             <a:pPr rtl="0"/>
             <a:r>
-              <a:rPr lang="en-US" sz="853">
+              <a:rPr lang="en-US" sz="677">
                 <a:solidFill>
                   <a:schemeClr val="tx1"/>
                 </a:solidFill>
@@ -8447,7 +8427,7 @@
           <a:p>
             <a:pPr rtl="0"/>
             <a:r>
-              <a:rPr lang="en-US" sz="853">
+              <a:rPr lang="en-US" sz="677">
                 <a:solidFill>
                   <a:schemeClr val="tx1"/>
                 </a:solidFill>
@@ -8460,7 +8440,7 @@
           <a:p>
             <a:pPr rtl="0"/>
             <a:r>
-              <a:rPr lang="en-US" sz="853">
+              <a:rPr lang="en-US" sz="677">
                 <a:solidFill>
                   <a:schemeClr val="tx1"/>
                 </a:solidFill>
@@ -8473,7 +8453,7 @@
           <a:p>
             <a:pPr rtl="0"/>
             <a:r>
-              <a:rPr lang="en-US" sz="853">
+              <a:rPr lang="en-US" sz="677">
                 <a:solidFill>
                   <a:schemeClr val="tx1"/>
                 </a:solidFill>
@@ -8483,7 +8463,7 @@
               <a:t>StudentGroup</a:t>
             </a:r>
             <a:r>
-              <a:rPr lang="en-US" sz="853">
+              <a:rPr lang="en-US" sz="677">
                 <a:solidFill>
                   <a:srgbClr val="C00000"/>
                 </a:solidFill>
@@ -8496,7 +8476,7 @@
           <a:p>
             <a:pPr rtl="0"/>
             <a:r>
-              <a:rPr lang="en-US" sz="600">
+              <a:rPr lang="en-US" sz="476">
                 <a:solidFill>
                   <a:srgbClr val="C00000"/>
                 </a:solidFill>
@@ -8522,8 +8502,8 @@
         </p:nvSpPr>
         <p:spPr>
           <a:xfrm>
-            <a:off x="9576668" y="8352829"/>
-            <a:ext cx="1883849" cy="276999"/>
+            <a:off x="7982019" y="6629473"/>
+            <a:ext cx="1531188" cy="238848"/>
           </a:xfrm>
           <a:prstGeom prst="rect">
             <a:avLst/>
@@ -8538,7 +8518,7 @@
           <a:p>
             <a:pPr algn="l" rtl="0"/>
             <a:r>
-              <a:rPr lang="en-US" sz="1200">
+              <a:rPr lang="en-US" sz="952">
                 <a:solidFill>
                   <a:schemeClr val="accent5">
                     <a:lumMod val="75000"/>
@@ -8548,7 +8528,7 @@
               </a:rPr>
               <a:t>Majid SharifiTehrani</a:t>
             </a:r>
-            <a:endParaRPr lang="fa-IR" sz="1200">
+            <a:endParaRPr lang="fa-IR" sz="952">
               <a:solidFill>
                 <a:schemeClr val="accent5">
                   <a:lumMod val="75000"/>
@@ -8573,8 +8553,8 @@
         </p:nvSpPr>
         <p:spPr bwMode="auto">
           <a:xfrm>
-            <a:off x="6904870" y="1316632"/>
-            <a:ext cx="1764331" cy="1468239"/>
+            <a:off x="5861467" y="1044985"/>
+            <a:ext cx="1400314" cy="1165312"/>
           </a:xfrm>
           <a:prstGeom prst="roundRect">
             <a:avLst>
@@ -8613,7 +8593,7 @@
               <a:defRPr/>
             </a:pPr>
             <a:r>
-              <a:rPr lang="en-US" sz="1707" b="1">
+              <a:rPr lang="en-US" sz="1355" b="1">
                 <a:solidFill>
                   <a:schemeClr val="bg1"/>
                 </a:solidFill>
@@ -8631,7 +8611,7 @@
               <a:defRPr/>
             </a:pPr>
             <a:r>
-              <a:rPr lang="en-US" sz="1280" b="1">
+              <a:rPr lang="en-US" sz="1016" b="1">
                 <a:solidFill>
                   <a:schemeClr val="tx1"/>
                 </a:solidFill>
@@ -8640,7 +8620,7 @@
               </a:rPr>
               <a:t>Courses</a:t>
             </a:r>
-            <a:endParaRPr sz="1280" b="1">
+            <a:endParaRPr sz="1016" b="1">
               <a:solidFill>
                 <a:schemeClr val="tx1"/>
               </a:solidFill>
@@ -8653,7 +8633,7 @@
               <a:defRPr/>
             </a:pPr>
             <a:r>
-              <a:rPr lang="en-US" sz="853" i="1">
+              <a:rPr lang="en-US" sz="677" i="1">
                 <a:solidFill>
                   <a:schemeClr val="accent5"/>
                 </a:solidFill>
@@ -8668,7 +8648,7 @@
               <a:defRPr/>
             </a:pPr>
             <a:r>
-              <a:rPr lang="en-US" sz="853">
+              <a:rPr lang="en-US" sz="677">
                 <a:solidFill>
                   <a:schemeClr val="tx1"/>
                 </a:solidFill>
@@ -8684,7 +8664,7 @@
               <a:defRPr/>
             </a:pPr>
             <a:r>
-              <a:rPr lang="en-US" sz="853">
+              <a:rPr lang="en-US" sz="677">
                 <a:solidFill>
                   <a:schemeClr val="tx1"/>
                 </a:solidFill>
@@ -8700,7 +8680,7 @@
               <a:defRPr/>
             </a:pPr>
             <a:r>
-              <a:rPr lang="en-US" sz="853">
+              <a:rPr lang="en-US" sz="677">
                 <a:solidFill>
                   <a:schemeClr val="tx1"/>
                 </a:solidFill>
@@ -8716,7 +8696,7 @@
               <a:defRPr/>
             </a:pPr>
             <a:r>
-              <a:rPr lang="en-US" sz="853">
+              <a:rPr lang="en-US" sz="677">
                 <a:solidFill>
                   <a:schemeClr val="tx1"/>
                 </a:solidFill>
@@ -8731,7 +8711,7 @@
             <a:pPr rtl="0">
               <a:defRPr/>
             </a:pPr>
-            <a:endParaRPr lang="en-US" sz="853">
+            <a:endParaRPr lang="en-US" sz="677">
               <a:solidFill>
                 <a:schemeClr val="tx1"/>
               </a:solidFill>
@@ -8744,7 +8724,7 @@
             <a:pPr rtl="0">
               <a:defRPr/>
             </a:pPr>
-            <a:endParaRPr lang="en-US" sz="853">
+            <a:endParaRPr lang="en-US" sz="677">
               <a:solidFill>
                 <a:schemeClr val="tx1"/>
               </a:solidFill>
@@ -8769,8 +8749,8 @@
         </p:nvSpPr>
         <p:spPr bwMode="auto">
           <a:xfrm>
-            <a:off x="5328196" y="4422044"/>
-            <a:ext cx="1637820" cy="1663618"/>
+            <a:off x="4610092" y="3509688"/>
+            <a:ext cx="1299905" cy="1320380"/>
           </a:xfrm>
           <a:prstGeom prst="roundRect">
             <a:avLst>
@@ -8810,7 +8790,7 @@
               <a:defRPr/>
             </a:pPr>
             <a:r>
-              <a:rPr lang="en-US" sz="1707" b="1">
+              <a:rPr lang="en-US" sz="1355" b="1">
                 <a:solidFill>
                   <a:schemeClr val="bg1"/>
                 </a:solidFill>
@@ -8822,7 +8802,7 @@
               </a:rPr>
               <a:t>SE</a:t>
             </a:r>
-            <a:endParaRPr lang="en-US" sz="1280" b="1">
+            <a:endParaRPr lang="en-US" sz="1016" b="1">
               <a:solidFill>
                 <a:schemeClr val="bg1"/>
               </a:solidFill>
@@ -8838,7 +8818,7 @@
               <a:defRPr/>
             </a:pPr>
             <a:r>
-              <a:rPr lang="en-US" sz="1280" b="1">
+              <a:rPr lang="en-US" sz="1016" b="1">
                 <a:solidFill>
                   <a:schemeClr val="tx1"/>
                 </a:solidFill>
@@ -8848,7 +8828,7 @@
               <a:t>Student</a:t>
             </a:r>
             <a:r>
-              <a:rPr lang="en-US" sz="1280" b="1">
+              <a:rPr lang="en-US" sz="1016" b="1">
                 <a:solidFill>
                   <a:schemeClr val="tx1"/>
                 </a:solidFill>
@@ -8859,7 +8839,7 @@
               <a:t>Exam</a:t>
             </a:r>
             <a:r>
-              <a:rPr lang="en-US" sz="1280" b="1">
+              <a:rPr lang="en-US" sz="1016" b="1">
                 <a:solidFill>
                   <a:schemeClr val="tx1"/>
                 </a:solidFill>
@@ -8868,7 +8848,7 @@
               </a:rPr>
               <a:t>s</a:t>
             </a:r>
-            <a:endParaRPr sz="1280" b="1">
+            <a:endParaRPr sz="1016" b="1">
               <a:solidFill>
                 <a:schemeClr val="tx1"/>
               </a:solidFill>
@@ -8881,7 +8861,7 @@
               <a:defRPr/>
             </a:pPr>
             <a:r>
-              <a:rPr lang="en-US" sz="853" i="1">
+              <a:rPr lang="en-US" sz="677" i="1">
                 <a:solidFill>
                   <a:schemeClr val="accent5"/>
                 </a:solidFill>
@@ -8896,7 +8876,7 @@
               <a:defRPr/>
             </a:pPr>
             <a:r>
-              <a:rPr lang="en-US" sz="853">
+              <a:rPr lang="en-US" sz="677">
                 <a:solidFill>
                   <a:schemeClr val="tx1"/>
                 </a:solidFill>
@@ -8911,7 +8891,7 @@
               <a:defRPr/>
             </a:pPr>
             <a:r>
-              <a:rPr lang="en-US" sz="853">
+              <a:rPr lang="en-US" sz="677">
                 <a:solidFill>
                   <a:schemeClr val="tx1"/>
                 </a:solidFill>
@@ -8926,7 +8906,7 @@
               <a:defRPr/>
             </a:pPr>
             <a:r>
-              <a:rPr lang="en-US" sz="853">
+              <a:rPr lang="en-US" sz="677">
                 <a:solidFill>
                   <a:schemeClr val="tx1"/>
                 </a:solidFill>
@@ -8941,7 +8921,7 @@
               <a:defRPr/>
             </a:pPr>
             <a:r>
-              <a:rPr lang="en-US" sz="853">
+              <a:rPr lang="en-US" sz="677">
                 <a:solidFill>
                   <a:schemeClr val="tx1"/>
                 </a:solidFill>
@@ -8956,7 +8936,7 @@
               <a:defRPr/>
             </a:pPr>
             <a:r>
-              <a:rPr lang="en-US" sz="853">
+              <a:rPr lang="en-US" sz="677">
                 <a:solidFill>
                   <a:schemeClr val="tx1"/>
                 </a:solidFill>
@@ -8971,7 +8951,7 @@
               <a:defRPr/>
             </a:pPr>
             <a:r>
-              <a:rPr lang="en-US" sz="500">
+              <a:rPr lang="en-US" sz="397">
                 <a:solidFill>
                   <a:srgbClr val="C00000"/>
                 </a:solidFill>
@@ -8986,7 +8966,7 @@
               <a:defRPr/>
             </a:pPr>
             <a:r>
-              <a:rPr lang="en-US" sz="853">
+              <a:rPr lang="en-US" sz="677">
                 <a:solidFill>
                   <a:schemeClr val="tx1"/>
                 </a:solidFill>
@@ -8996,7 +8976,7 @@
               <a:t>StudentExamPoint </a:t>
             </a:r>
             <a:r>
-              <a:rPr lang="en-US" sz="853" i="1">
+              <a:rPr lang="en-US" sz="677" i="1">
                 <a:solidFill>
                   <a:srgbClr val="FF0000"/>
                 </a:solidFill>
@@ -9010,7 +8990,7 @@
             <a:pPr rtl="0">
               <a:defRPr/>
             </a:pPr>
-            <a:endParaRPr lang="en-US" sz="853" i="1">
+            <a:endParaRPr lang="en-US" sz="677" i="1">
               <a:solidFill>
                 <a:srgbClr val="FF0000"/>
               </a:solidFill>
@@ -9034,8 +9014,8 @@
         </p:nvSpPr>
         <p:spPr bwMode="auto">
           <a:xfrm>
-            <a:off x="6108307" y="7156549"/>
-            <a:ext cx="2656717" cy="1300022"/>
+            <a:off x="5229251" y="5680010"/>
+            <a:ext cx="2108583" cy="1031801"/>
           </a:xfrm>
           <a:prstGeom prst="roundRect">
             <a:avLst>
@@ -9075,7 +9055,7 @@
               <a:defRPr/>
             </a:pPr>
             <a:r>
-              <a:rPr lang="en-US" sz="1707" b="1">
+              <a:rPr lang="en-US" sz="1355" b="1">
                 <a:solidFill>
                   <a:schemeClr val="bg1"/>
                 </a:solidFill>
@@ -9088,7 +9068,7 @@
               <a:t>ET</a:t>
             </a:r>
             <a:br>
-              <a:rPr lang="en-US" sz="1280" b="1">
+              <a:rPr lang="en-US" sz="1016" b="1">
                 <a:solidFill>
                   <a:schemeClr val="tx1"/>
                 </a:solidFill>
@@ -9097,7 +9077,7 @@
               </a:rPr>
             </a:br>
             <a:r>
-              <a:rPr lang="en-US" sz="1280" b="1">
+              <a:rPr lang="en-US" sz="1016" b="1">
                 <a:solidFill>
                   <a:schemeClr val="tx1"/>
                 </a:solidFill>
@@ -9106,7 +9086,7 @@
               </a:rPr>
               <a:t>ExamTests</a:t>
             </a:r>
-            <a:endParaRPr sz="1280" b="1">
+            <a:endParaRPr sz="1016" b="1">
               <a:solidFill>
                 <a:schemeClr val="tx1"/>
               </a:solidFill>
@@ -9119,7 +9099,7 @@
               <a:defRPr/>
             </a:pPr>
             <a:r>
-              <a:rPr lang="en-US" sz="853" i="1">
+              <a:rPr lang="en-US" sz="677" i="1">
                 <a:solidFill>
                   <a:schemeClr val="accent5"/>
                 </a:solidFill>
@@ -9134,7 +9114,7 @@
               <a:defRPr/>
             </a:pPr>
             <a:r>
-              <a:rPr lang="en-US" sz="853">
+              <a:rPr lang="en-US" sz="677">
                 <a:solidFill>
                   <a:schemeClr val="tx1"/>
                 </a:solidFill>
@@ -9149,7 +9129,7 @@
               <a:defRPr/>
             </a:pPr>
             <a:r>
-              <a:rPr lang="en-US" sz="853">
+              <a:rPr lang="en-US" sz="677">
                 <a:solidFill>
                   <a:schemeClr val="tx1"/>
                 </a:solidFill>
@@ -9164,7 +9144,7 @@
               <a:defRPr/>
             </a:pPr>
             <a:r>
-              <a:rPr lang="en-US" sz="853">
+              <a:rPr lang="en-US" sz="677">
                 <a:solidFill>
                   <a:schemeClr val="tx1"/>
                 </a:solidFill>
@@ -9179,7 +9159,7 @@
               <a:defRPr/>
             </a:pPr>
             <a:r>
-              <a:rPr lang="en-US" sz="853">
+              <a:rPr lang="en-US" sz="677">
                 <a:solidFill>
                   <a:schemeClr val="tx1"/>
                 </a:solidFill>
@@ -9194,7 +9174,7 @@
               <a:defRPr/>
             </a:pPr>
             <a:r>
-              <a:rPr lang="en-US" sz="853">
+              <a:rPr lang="en-US" sz="677">
                 <a:solidFill>
                   <a:schemeClr val="tx1"/>
                 </a:solidFill>
@@ -9220,8 +9200,8 @@
         </p:nvSpPr>
         <p:spPr bwMode="auto">
           <a:xfrm>
-            <a:off x="7057976" y="3246024"/>
-            <a:ext cx="1864591" cy="1152285"/>
+            <a:off x="5982984" y="2576305"/>
+            <a:ext cx="1479889" cy="914546"/>
           </a:xfrm>
           <a:prstGeom prst="roundRect">
             <a:avLst>
@@ -9261,7 +9241,7 @@
               <a:defRPr/>
             </a:pPr>
             <a:r>
-              <a:rPr lang="en-US" sz="1707" b="1">
+              <a:rPr lang="en-US" sz="1355" b="1">
                 <a:solidFill>
                   <a:schemeClr val="bg1"/>
                 </a:solidFill>
@@ -9279,7 +9259,7 @@
               <a:defRPr/>
             </a:pPr>
             <a:r>
-              <a:rPr lang="en-US" sz="1280" b="1">
+              <a:rPr lang="en-US" sz="1016" b="1">
                 <a:solidFill>
                   <a:schemeClr val="tx1"/>
                 </a:solidFill>
@@ -9289,7 +9269,7 @@
               <a:t>StudentCourse</a:t>
             </a:r>
             <a:r>
-              <a:rPr lang="en-US" sz="1280" b="1">
+              <a:rPr lang="en-US" sz="1016" b="1">
                 <a:solidFill>
                   <a:schemeClr val="tx1"/>
                 </a:solidFill>
@@ -9300,7 +9280,7 @@
               <a:t>Test</a:t>
             </a:r>
             <a:r>
-              <a:rPr lang="en-US" sz="1280" b="1">
+              <a:rPr lang="en-US" sz="1016" b="1">
                 <a:solidFill>
                   <a:schemeClr val="tx1"/>
                 </a:solidFill>
@@ -9309,7 +9289,7 @@
               </a:rPr>
               <a:t>s</a:t>
             </a:r>
-            <a:endParaRPr sz="1280" b="1">
+            <a:endParaRPr sz="1016" b="1">
               <a:solidFill>
                 <a:schemeClr val="tx1"/>
               </a:solidFill>
@@ -9322,7 +9302,7 @@
               <a:defRPr/>
             </a:pPr>
             <a:r>
-              <a:rPr lang="en-US" sz="853">
+              <a:rPr lang="en-US" sz="677">
                 <a:solidFill>
                   <a:schemeClr val="tx1"/>
                 </a:solidFill>
@@ -9337,7 +9317,7 @@
               <a:defRPr/>
             </a:pPr>
             <a:r>
-              <a:rPr lang="en-US" sz="853">
+              <a:rPr lang="en-US" sz="677">
                 <a:solidFill>
                   <a:schemeClr val="tx1"/>
                 </a:solidFill>
@@ -9352,7 +9332,7 @@
               <a:defRPr/>
             </a:pPr>
             <a:r>
-              <a:rPr lang="en-US" sz="853">
+              <a:rPr lang="en-US" sz="677">
                 <a:solidFill>
                   <a:schemeClr val="tx1"/>
                 </a:solidFill>
@@ -9367,7 +9347,7 @@
               <a:defRPr/>
             </a:pPr>
             <a:r>
-              <a:rPr lang="en-US" sz="853">
+              <a:rPr lang="en-US" sz="677">
                 <a:solidFill>
                   <a:schemeClr val="tx1"/>
                 </a:solidFill>
@@ -9382,7 +9362,7 @@
               <a:defRPr/>
             </a:pPr>
             <a:r>
-              <a:rPr lang="en-US" sz="853">
+              <a:rPr lang="en-US" sz="677">
                 <a:solidFill>
                   <a:schemeClr val="tx1"/>
                 </a:solidFill>
@@ -9408,8 +9388,8 @@
         </p:nvSpPr>
         <p:spPr bwMode="auto">
           <a:xfrm>
-            <a:off x="6765737" y="4503438"/>
-            <a:ext cx="1855657" cy="2573059"/>
+            <a:off x="5751040" y="3574289"/>
+            <a:ext cx="1472798" cy="2042185"/>
           </a:xfrm>
           <a:prstGeom prst="roundRect">
             <a:avLst>
@@ -9445,11 +9425,11 @@
           <a:bodyPr rtlCol="1" anchor="ctr"/>
           <a:lstStyle/>
           <a:p>
-            <a:pPr marL="90488" rtl="0">
-              <a:defRPr/>
-            </a:pPr>
-            <a:r>
-              <a:rPr lang="en-US" sz="1707" b="1">
+            <a:pPr marL="71820" rtl="0">
+              <a:defRPr/>
+            </a:pPr>
+            <a:r>
+              <a:rPr lang="en-US" sz="1355" b="1">
                 <a:solidFill>
                   <a:schemeClr val="bg1"/>
                 </a:solidFill>
@@ -9461,7 +9441,7 @@
               </a:rPr>
               <a:t>SET</a:t>
             </a:r>
-            <a:endParaRPr lang="en-US" sz="1280" b="1">
+            <a:endParaRPr lang="en-US" sz="1016" b="1">
               <a:solidFill>
                 <a:schemeClr val="bg1"/>
               </a:solidFill>
@@ -9473,11 +9453,11 @@
             </a:endParaRPr>
           </a:p>
           <a:p>
-            <a:pPr marL="90488" rtl="0">
-              <a:defRPr/>
-            </a:pPr>
-            <a:r>
-              <a:rPr lang="en-US" sz="1280" b="1">
+            <a:pPr marL="71820" rtl="0">
+              <a:defRPr/>
+            </a:pPr>
+            <a:r>
+              <a:rPr lang="en-US" sz="1016" b="1">
                 <a:solidFill>
                   <a:schemeClr val="tx1"/>
                 </a:solidFill>
@@ -9486,7 +9466,7 @@
               </a:rPr>
               <a:t>StudentExamTests</a:t>
             </a:r>
-            <a:endParaRPr sz="1280" b="1">
+            <a:endParaRPr sz="1016" b="1">
               <a:solidFill>
                 <a:schemeClr val="tx1"/>
               </a:solidFill>
@@ -9495,11 +9475,11 @@
             </a:endParaRPr>
           </a:p>
           <a:p>
-            <a:pPr marL="90488" rtl="0">
-              <a:defRPr/>
-            </a:pPr>
-            <a:r>
-              <a:rPr lang="en-US" sz="853" i="1">
+            <a:pPr marL="71820" rtl="0">
+              <a:defRPr/>
+            </a:pPr>
+            <a:r>
+              <a:rPr lang="en-US" sz="677" i="1">
                 <a:solidFill>
                   <a:schemeClr val="accent5"/>
                 </a:solidFill>
@@ -9509,7 +9489,7 @@
               <a:t>StudentExamTestId </a:t>
             </a:r>
             <a:r>
-              <a:rPr lang="en-US" sz="853" i="1">
+              <a:rPr lang="en-US" sz="677" i="1">
                 <a:solidFill>
                   <a:srgbClr val="FF0000"/>
                 </a:solidFill>
@@ -9520,11 +9500,11 @@
             </a:r>
           </a:p>
           <a:p>
-            <a:pPr marL="90488" rtl="0">
-              <a:defRPr/>
-            </a:pPr>
-            <a:r>
-              <a:rPr lang="en-US" sz="853">
+            <a:pPr marL="71820" rtl="0">
+              <a:defRPr/>
+            </a:pPr>
+            <a:r>
+              <a:rPr lang="en-US" sz="677">
                 <a:solidFill>
                   <a:schemeClr val="tx1"/>
                 </a:solidFill>
@@ -9535,11 +9515,11 @@
             </a:r>
           </a:p>
           <a:p>
-            <a:pPr marL="90488" rtl="0">
-              <a:defRPr/>
-            </a:pPr>
-            <a:r>
-              <a:rPr lang="en-US" sz="853">
+            <a:pPr marL="71820" rtl="0">
+              <a:defRPr/>
+            </a:pPr>
+            <a:r>
+              <a:rPr lang="en-US" sz="677">
                 <a:solidFill>
                   <a:schemeClr val="tx1"/>
                 </a:solidFill>
@@ -9550,11 +9530,11 @@
             </a:r>
           </a:p>
           <a:p>
-            <a:pPr marL="90488" rtl="0">
-              <a:defRPr/>
-            </a:pPr>
-            <a:r>
-              <a:rPr lang="en-US" sz="853">
+            <a:pPr marL="71820" rtl="0">
+              <a:defRPr/>
+            </a:pPr>
+            <a:r>
+              <a:rPr lang="en-US" sz="677">
                 <a:solidFill>
                   <a:schemeClr val="tx1"/>
                 </a:solidFill>
@@ -9565,11 +9545,11 @@
             </a:r>
           </a:p>
           <a:p>
-            <a:pPr marL="90488" rtl="0">
-              <a:defRPr/>
-            </a:pPr>
-            <a:r>
-              <a:rPr lang="en-US" sz="853">
+            <a:pPr marL="71820" rtl="0">
+              <a:defRPr/>
+            </a:pPr>
+            <a:r>
+              <a:rPr lang="en-US" sz="677">
                 <a:solidFill>
                   <a:schemeClr val="tx1"/>
                 </a:solidFill>
@@ -9580,11 +9560,11 @@
             </a:r>
           </a:p>
           <a:p>
-            <a:pPr marL="90488" rtl="0">
-              <a:defRPr/>
-            </a:pPr>
-            <a:r>
-              <a:rPr lang="en-US" sz="853">
+            <a:pPr marL="71820" rtl="0">
+              <a:defRPr/>
+            </a:pPr>
+            <a:r>
+              <a:rPr lang="en-US" sz="677">
                 <a:solidFill>
                   <a:schemeClr val="tx1"/>
                 </a:solidFill>
@@ -9595,11 +9575,11 @@
             </a:r>
           </a:p>
           <a:p>
-            <a:pPr marL="90488" rtl="0">
-              <a:defRPr/>
-            </a:pPr>
-            <a:r>
-              <a:rPr lang="en-US" sz="853">
+            <a:pPr marL="71820" rtl="0">
+              <a:defRPr/>
+            </a:pPr>
+            <a:r>
+              <a:rPr lang="en-US" sz="677">
                 <a:solidFill>
                   <a:schemeClr val="tx1"/>
                 </a:solidFill>
@@ -9610,11 +9590,11 @@
             </a:r>
           </a:p>
           <a:p>
-            <a:pPr marL="90488" rtl="0">
-              <a:defRPr/>
-            </a:pPr>
-            <a:r>
-              <a:rPr lang="en-US" sz="853">
+            <a:pPr marL="71820" rtl="0">
+              <a:defRPr/>
+            </a:pPr>
+            <a:r>
+              <a:rPr lang="en-US" sz="677">
                 <a:solidFill>
                   <a:schemeClr val="tx1"/>
                 </a:solidFill>
@@ -9625,11 +9605,11 @@
             </a:r>
           </a:p>
           <a:p>
-            <a:pPr marL="90488" rtl="0">
-              <a:defRPr/>
-            </a:pPr>
-            <a:r>
-              <a:rPr lang="en-US" sz="853">
+            <a:pPr marL="71820" rtl="0">
+              <a:defRPr/>
+            </a:pPr>
+            <a:r>
+              <a:rPr lang="en-US" sz="677">
                 <a:solidFill>
                   <a:schemeClr val="tx1"/>
                 </a:solidFill>
@@ -9640,11 +9620,11 @@
             </a:r>
           </a:p>
           <a:p>
-            <a:pPr marL="90488" rtl="0">
-              <a:defRPr/>
-            </a:pPr>
-            <a:r>
-              <a:rPr lang="en-US" sz="853">
+            <a:pPr marL="71820" rtl="0">
+              <a:defRPr/>
+            </a:pPr>
+            <a:r>
+              <a:rPr lang="en-US" sz="677">
                 <a:solidFill>
                   <a:schemeClr val="tx1"/>
                 </a:solidFill>
@@ -9655,11 +9635,11 @@
             </a:r>
           </a:p>
           <a:p>
-            <a:pPr marL="90488" rtl="0">
-              <a:defRPr/>
-            </a:pPr>
-            <a:r>
-              <a:rPr lang="en-US" sz="853">
+            <a:pPr marL="71820" rtl="0">
+              <a:defRPr/>
+            </a:pPr>
+            <a:r>
+              <a:rPr lang="en-US" sz="677">
                 <a:solidFill>
                   <a:schemeClr val="tx1"/>
                 </a:solidFill>
@@ -9670,11 +9650,9 @@
             </a:r>
           </a:p>
           <a:p>
-            <a:pPr marL="90488" rtl="0">
-              <a:buNone/>
-            </a:pPr>
-            <a:r>
-              <a:rPr lang="en-US" sz="500" kern="100">
+            <a:pPr marL="71820" rtl="0"/>
+            <a:r>
+              <a:rPr lang="en-US" sz="397" kern="100">
                 <a:solidFill>
                   <a:srgbClr val="C00000"/>
                 </a:solidFill>
@@ -9686,11 +9664,9 @@
             </a:r>
           </a:p>
           <a:p>
-            <a:pPr marL="90488" rtl="0">
-              <a:buNone/>
-            </a:pPr>
-            <a:r>
-              <a:rPr lang="en-US" sz="500" kern="100">
+            <a:pPr marL="71820" rtl="0"/>
+            <a:r>
+              <a:rPr lang="en-US" sz="397" kern="100">
                 <a:solidFill>
                   <a:srgbClr val="C00000"/>
                 </a:solidFill>
@@ -9702,11 +9678,9 @@
             </a:r>
           </a:p>
           <a:p>
-            <a:pPr marL="90488" rtl="0">
-              <a:buNone/>
-            </a:pPr>
-            <a:r>
-              <a:rPr lang="en-US" sz="500" kern="100">
+            <a:pPr marL="71820" rtl="0"/>
+            <a:r>
+              <a:rPr lang="en-US" sz="397" kern="100">
                 <a:solidFill>
                   <a:srgbClr val="C00000"/>
                 </a:solidFill>
@@ -9718,11 +9692,9 @@
             </a:r>
           </a:p>
           <a:p>
-            <a:pPr marL="90488" rtl="0">
-              <a:buNone/>
-            </a:pPr>
-            <a:r>
-              <a:rPr lang="en-US" sz="500" kern="100">
+            <a:pPr marL="71820" rtl="0"/>
+            <a:r>
+              <a:rPr lang="en-US" sz="397" kern="100">
                 <a:solidFill>
                   <a:srgbClr val="C00000"/>
                 </a:solidFill>
@@ -9734,11 +9706,9 @@
             </a:r>
           </a:p>
           <a:p>
-            <a:pPr marL="90488" rtl="0">
-              <a:buNone/>
-            </a:pPr>
-            <a:r>
-              <a:rPr lang="en-US" sz="500" kern="100">
+            <a:pPr marL="71820" rtl="0"/>
+            <a:r>
+              <a:rPr lang="en-US" sz="397" kern="100">
                 <a:solidFill>
                   <a:srgbClr val="C00000"/>
                 </a:solidFill>
@@ -9750,11 +9720,9 @@
             </a:r>
           </a:p>
           <a:p>
-            <a:pPr marL="90488" rtl="0">
-              <a:buNone/>
-            </a:pPr>
-            <a:r>
-              <a:rPr lang="en-US" sz="500" kern="100">
+            <a:pPr marL="71820" rtl="0"/>
+            <a:r>
+              <a:rPr lang="en-US" sz="397" kern="100">
                 <a:solidFill>
                   <a:srgbClr val="C00000"/>
                 </a:solidFill>
@@ -9766,9 +9734,9 @@
             </a:r>
           </a:p>
           <a:p>
-            <a:pPr marL="90488" rtl="0"/>
-            <a:r>
-              <a:rPr lang="en-US" sz="500" kern="100">
+            <a:pPr marL="71820" rtl="0"/>
+            <a:r>
+              <a:rPr lang="en-US" sz="397" kern="100">
                 <a:solidFill>
                   <a:srgbClr val="C00000"/>
                 </a:solidFill>
@@ -9780,9 +9748,9 @@
             </a:r>
           </a:p>
           <a:p>
-            <a:pPr marL="90488" rtl="0"/>
-            <a:r>
-              <a:rPr lang="en-US" sz="500" kern="100">
+            <a:pPr marL="71820" rtl="0"/>
+            <a:r>
+              <a:rPr lang="en-US" sz="397" kern="100">
                 <a:solidFill>
                   <a:srgbClr val="C00000"/>
                 </a:solidFill>
@@ -9809,8 +9777,8 @@
         </p:nvSpPr>
         <p:spPr>
           <a:xfrm>
-            <a:off x="143620" y="3744317"/>
-            <a:ext cx="1105305" cy="1634612"/>
+            <a:off x="495199" y="2971789"/>
+            <a:ext cx="877258" cy="1297359"/>
           </a:xfrm>
           <a:prstGeom prst="roundRect">
             <a:avLst>
@@ -9849,7 +9817,7 @@
           <a:p>
             <a:pPr rtl="0"/>
             <a:r>
-              <a:rPr lang="en-US" sz="1707" b="1">
+              <a:rPr lang="en-US" sz="1355" b="1">
                 <a:solidFill>
                   <a:schemeClr val="bg1"/>
                 </a:solidFill>
@@ -9863,15 +9831,15 @@
           <a:p>
             <a:pPr rtl="0"/>
             <a:r>
-              <a:rPr lang="en-US" sz="1280" b="1"/>
+              <a:rPr lang="en-US" sz="1016" b="1"/>
               <a:t>Projects</a:t>
             </a:r>
-            <a:endParaRPr lang="en-US" sz="853" b="1" dirty="0"/>
+            <a:endParaRPr lang="en-US" sz="677" b="1" dirty="0"/>
           </a:p>
           <a:p>
             <a:pPr rtl="0"/>
             <a:r>
-              <a:rPr lang="en-US" sz="853" i="1">
+              <a:rPr lang="en-US" sz="677" i="1">
                 <a:solidFill>
                   <a:schemeClr val="accent5"/>
                 </a:solidFill>
@@ -9884,7 +9852,7 @@
           <a:p>
             <a:pPr rtl="0"/>
             <a:r>
-              <a:rPr lang="en-US" sz="853">
+              <a:rPr lang="en-US" sz="677">
                 <a:solidFill>
                   <a:schemeClr val="tx1"/>
                 </a:solidFill>
@@ -9895,7 +9863,7 @@
           <a:p>
             <a:pPr rtl="0"/>
             <a:r>
-              <a:rPr lang="en-US" sz="853">
+              <a:rPr lang="en-US" sz="677">
                 <a:solidFill>
                   <a:schemeClr val="tx1"/>
                 </a:solidFill>
@@ -9908,7 +9876,7 @@
               <a:buNone/>
             </a:pPr>
             <a:r>
-              <a:rPr lang="en-US" sz="600" kern="100">
+              <a:rPr lang="en-US" sz="476" kern="100">
                 <a:solidFill>
                   <a:schemeClr val="tx1"/>
                 </a:solidFill>
@@ -9924,7 +9892,7 @@
               <a:buNone/>
             </a:pPr>
             <a:r>
-              <a:rPr lang="en-US" sz="600" kern="100">
+              <a:rPr lang="en-US" sz="476" kern="100">
                 <a:solidFill>
                   <a:schemeClr val="tx1"/>
                 </a:solidFill>
@@ -9934,20 +9902,20 @@
               </a:rPr>
               <a:t> 2:Student</a:t>
             </a:r>
-            <a:endParaRPr lang="en-US" sz="853" dirty="0"/>
+            <a:endParaRPr lang="en-US" sz="677" dirty="0"/>
           </a:p>
           <a:p>
             <a:pPr rtl="0"/>
             <a:r>
-              <a:rPr lang="en-US" sz="853" dirty="0" err="1"/>
+              <a:rPr lang="en-US" sz="677" dirty="0" err="1"/>
               <a:t>ProjectName</a:t>
             </a:r>
-            <a:endParaRPr lang="en-US" sz="853" dirty="0"/>
+            <a:endParaRPr lang="en-US" sz="677" dirty="0"/>
           </a:p>
           <a:p>
             <a:pPr rtl="0"/>
             <a:r>
-              <a:rPr lang="en-US" sz="853">
+              <a:rPr lang="en-US" sz="677">
                 <a:solidFill>
                   <a:schemeClr val="tx1"/>
                 </a:solidFill>
@@ -9958,7 +9926,7 @@
           <a:p>
             <a:pPr rtl="0"/>
             <a:r>
-              <a:rPr lang="en-US" sz="500" kern="100">
+              <a:rPr lang="en-US" sz="397" kern="100">
                 <a:solidFill>
                   <a:srgbClr val="C00000"/>
                 </a:solidFill>
@@ -9971,7 +9939,7 @@
           </a:p>
           <a:p>
             <a:pPr rtl="0"/>
-            <a:endParaRPr lang="en-US" sz="900" kern="100">
+            <a:endParaRPr lang="en-US" sz="714" kern="100">
               <a:solidFill>
                 <a:srgbClr val="C00000"/>
               </a:solidFill>
@@ -9996,8 +9964,8 @@
         </p:nvSpPr>
         <p:spPr bwMode="auto">
           <a:xfrm>
-            <a:off x="1311283" y="6765485"/>
-            <a:ext cx="1105070" cy="787849"/>
+            <a:off x="1421949" y="5369630"/>
+            <a:ext cx="877072" cy="625300"/>
           </a:xfrm>
           <a:prstGeom prst="borderCallout2">
             <a:avLst>
@@ -10038,7 +10006,7 @@
               <a:buNone/>
             </a:pPr>
             <a:r>
-              <a:rPr lang="en-US" sz="500" kern="100">
+              <a:rPr lang="en-US" sz="397" kern="100">
                 <a:solidFill>
                   <a:schemeClr val="tx1"/>
                 </a:solidFill>
@@ -10054,7 +10022,7 @@
               <a:buNone/>
             </a:pPr>
             <a:r>
-              <a:rPr lang="en-US" sz="500" kern="100">
+              <a:rPr lang="en-US" sz="397" kern="100">
                 <a:solidFill>
                   <a:schemeClr val="tx1"/>
                 </a:solidFill>
@@ -10070,7 +10038,7 @@
               <a:buNone/>
             </a:pPr>
             <a:r>
-              <a:rPr lang="en-US" sz="500" kern="100">
+              <a:rPr lang="en-US" sz="397" kern="100">
                 <a:solidFill>
                   <a:schemeClr val="tx1"/>
                 </a:solidFill>
@@ -10086,7 +10054,7 @@
               <a:buNone/>
             </a:pPr>
             <a:r>
-              <a:rPr lang="en-US" sz="500" kern="100">
+              <a:rPr lang="en-US" sz="397" kern="100">
                 <a:solidFill>
                   <a:schemeClr val="tx1"/>
                 </a:solidFill>
@@ -10102,7 +10070,7 @@
               <a:buNone/>
             </a:pPr>
             <a:r>
-              <a:rPr lang="en-US" sz="500" kern="100">
+              <a:rPr lang="en-US" sz="397" kern="100">
                 <a:solidFill>
                   <a:schemeClr val="tx1"/>
                 </a:solidFill>
@@ -10118,7 +10086,7 @@
               <a:buNone/>
             </a:pPr>
             <a:r>
-              <a:rPr lang="en-US" sz="500" kern="100">
+              <a:rPr lang="en-US" sz="397" kern="100">
                 <a:solidFill>
                   <a:schemeClr val="tx1"/>
                 </a:solidFill>
@@ -10134,7 +10102,7 @@
               <a:buNone/>
             </a:pPr>
             <a:r>
-              <a:rPr lang="en-US" sz="500" kern="100">
+              <a:rPr lang="en-US" sz="397" kern="100">
                 <a:solidFill>
                   <a:schemeClr val="tx1"/>
                 </a:solidFill>
@@ -10150,7 +10118,7 @@
               <a:buNone/>
             </a:pPr>
             <a:r>
-              <a:rPr lang="en-US" sz="500" kern="100">
+              <a:rPr lang="en-US" sz="397" kern="100">
                 <a:solidFill>
                   <a:schemeClr val="tx1"/>
                 </a:solidFill>
@@ -10166,7 +10134,7 @@
               <a:buNone/>
             </a:pPr>
             <a:r>
-              <a:rPr lang="en-US" sz="500" kern="100">
+              <a:rPr lang="en-US" sz="397" kern="100">
                 <a:solidFill>
                   <a:schemeClr val="tx1"/>
                 </a:solidFill>
@@ -10182,7 +10150,7 @@
               <a:buNone/>
             </a:pPr>
             <a:r>
-              <a:rPr lang="en-US" sz="500" kern="100">
+              <a:rPr lang="en-US" sz="397" kern="100">
                 <a:solidFill>
                   <a:schemeClr val="tx1"/>
                 </a:solidFill>
@@ -10209,8 +10177,8 @@
         </p:nvSpPr>
         <p:spPr bwMode="auto">
           <a:xfrm>
-            <a:off x="180740" y="1926523"/>
-            <a:ext cx="1105305" cy="1712656"/>
+            <a:off x="524660" y="1529043"/>
+            <a:ext cx="877258" cy="1359301"/>
           </a:xfrm>
           <a:prstGeom prst="roundRect">
             <a:avLst>
@@ -10250,7 +10218,7 @@
               <a:defRPr/>
             </a:pPr>
             <a:r>
-              <a:rPr lang="en-US" sz="1707" b="1">
+              <a:rPr lang="en-US" sz="1355" b="1">
                 <a:solidFill>
                   <a:schemeClr val="bg1"/>
                 </a:solidFill>
@@ -10268,7 +10236,7 @@
               <a:defRPr/>
             </a:pPr>
             <a:r>
-              <a:rPr lang="en-US" sz="1280" b="1">
+              <a:rPr lang="en-US" sz="1016" b="1">
                 <a:solidFill>
                   <a:schemeClr val="tx1"/>
                 </a:solidFill>
@@ -10277,7 +10245,7 @@
               </a:rPr>
               <a:t>Chats</a:t>
             </a:r>
-            <a:endParaRPr sz="1280">
+            <a:endParaRPr sz="1016">
               <a:solidFill>
                 <a:schemeClr val="tx1"/>
               </a:solidFill>
@@ -10290,7 +10258,7 @@
               <a:defRPr/>
             </a:pPr>
             <a:r>
-              <a:rPr lang="en-US" sz="853" i="1">
+              <a:rPr lang="en-US" sz="677" i="1">
                 <a:solidFill>
                   <a:schemeClr val="accent5"/>
                 </a:solidFill>
@@ -10305,7 +10273,7 @@
               <a:defRPr/>
             </a:pPr>
             <a:r>
-              <a:rPr lang="en-US" sz="853">
+              <a:rPr lang="en-US" sz="677">
                 <a:solidFill>
                   <a:schemeClr val="tx1"/>
                 </a:solidFill>
@@ -10320,7 +10288,7 @@
               <a:defRPr/>
             </a:pPr>
             <a:r>
-              <a:rPr lang="en-US" sz="853">
+              <a:rPr lang="en-US" sz="677">
                 <a:solidFill>
                   <a:schemeClr val="tx1"/>
                 </a:solidFill>
@@ -10335,7 +10303,7 @@
               <a:defRPr/>
             </a:pPr>
             <a:r>
-              <a:rPr lang="en-US" sz="853">
+              <a:rPr lang="en-US" sz="677">
                 <a:solidFill>
                   <a:schemeClr val="tx1"/>
                 </a:solidFill>
@@ -10350,7 +10318,7 @@
               <a:defRPr/>
             </a:pPr>
             <a:r>
-              <a:rPr lang="en-US" sz="853">
+              <a:rPr lang="en-US" sz="677">
                 <a:solidFill>
                   <a:schemeClr val="tx1"/>
                 </a:solidFill>
@@ -10365,7 +10333,7 @@
               <a:defRPr/>
             </a:pPr>
             <a:r>
-              <a:rPr lang="en-US" sz="853">
+              <a:rPr lang="en-US" sz="677">
                 <a:solidFill>
                   <a:schemeClr val="tx1"/>
                 </a:solidFill>
@@ -10380,7 +10348,7 @@
               <a:defRPr/>
             </a:pPr>
             <a:r>
-              <a:rPr lang="en-US" sz="600" kern="100">
+              <a:rPr lang="en-US" sz="476" kern="100">
                 <a:solidFill>
                   <a:schemeClr val="tx1"/>
                 </a:solidFill>
@@ -10396,7 +10364,7 @@
               <a:defRPr/>
             </a:pPr>
             <a:r>
-              <a:rPr lang="en-US" sz="600" kern="100">
+              <a:rPr lang="en-US" sz="476" kern="100">
                 <a:solidFill>
                   <a:schemeClr val="tx1"/>
                 </a:solidFill>
@@ -10412,7 +10380,7 @@
               <a:defRPr/>
             </a:pPr>
             <a:r>
-              <a:rPr lang="en-US" sz="600" kern="100">
+              <a:rPr lang="en-US" sz="476" kern="100">
                 <a:solidFill>
                   <a:schemeClr val="tx1"/>
                 </a:solidFill>
@@ -10428,7 +10396,7 @@
               <a:defRPr/>
             </a:pPr>
             <a:r>
-              <a:rPr lang="en-US" sz="600" kern="100">
+              <a:rPr lang="en-US" sz="476" kern="100">
                 <a:solidFill>
                   <a:schemeClr val="tx1"/>
                 </a:solidFill>
@@ -10455,8 +10423,8 @@
         </p:nvSpPr>
         <p:spPr bwMode="auto">
           <a:xfrm>
-            <a:off x="143620" y="143917"/>
-            <a:ext cx="1467069" cy="1642462"/>
+            <a:off x="495199" y="114224"/>
+            <a:ext cx="1164383" cy="1303589"/>
           </a:xfrm>
           <a:prstGeom prst="roundRect">
             <a:avLst>
@@ -10495,7 +10463,7 @@
               <a:defRPr/>
             </a:pPr>
             <a:r>
-              <a:rPr lang="en-US" sz="1707" b="1">
+              <a:rPr lang="en-US" sz="1355" b="1">
                 <a:solidFill>
                   <a:schemeClr val="bg1"/>
                 </a:solidFill>
@@ -10513,7 +10481,7 @@
               <a:defRPr/>
             </a:pPr>
             <a:r>
-              <a:rPr lang="en-US" sz="1280" b="1">
+              <a:rPr lang="en-US" sz="1016" b="1">
                 <a:solidFill>
                   <a:schemeClr val="tx1"/>
                 </a:solidFill>
@@ -10522,7 +10490,7 @@
               </a:rPr>
               <a:t>ChatroomPosts</a:t>
             </a:r>
-            <a:endParaRPr sz="1280">
+            <a:endParaRPr sz="1016">
               <a:solidFill>
                 <a:schemeClr val="tx1"/>
               </a:solidFill>
@@ -10535,7 +10503,7 @@
               <a:defRPr/>
             </a:pPr>
             <a:r>
-              <a:rPr lang="en-US" sz="853" i="1">
+              <a:rPr lang="en-US" sz="677" i="1">
                 <a:solidFill>
                   <a:schemeClr val="accent5"/>
                 </a:solidFill>
@@ -10550,7 +10518,7 @@
               <a:defRPr/>
             </a:pPr>
             <a:r>
-              <a:rPr lang="en-US" sz="853">
+              <a:rPr lang="en-US" sz="677">
                 <a:solidFill>
                   <a:schemeClr val="tx1"/>
                 </a:solidFill>
@@ -10565,7 +10533,7 @@
               <a:defRPr/>
             </a:pPr>
             <a:r>
-              <a:rPr lang="en-US" sz="853">
+              <a:rPr lang="en-US" sz="677">
                 <a:solidFill>
                   <a:schemeClr val="tx1"/>
                 </a:solidFill>
@@ -10580,7 +10548,7 @@
               <a:defRPr/>
             </a:pPr>
             <a:r>
-              <a:rPr lang="en-US" sz="853">
+              <a:rPr lang="en-US" sz="677">
                 <a:solidFill>
                   <a:schemeClr val="tx1"/>
                 </a:solidFill>
@@ -10595,7 +10563,7 @@
               <a:defRPr/>
             </a:pPr>
             <a:r>
-              <a:rPr lang="en-US" sz="853">
+              <a:rPr lang="en-US" sz="677">
                 <a:solidFill>
                   <a:schemeClr val="tx1"/>
                 </a:solidFill>
@@ -10610,7 +10578,7 @@
               <a:defRPr/>
             </a:pPr>
             <a:r>
-              <a:rPr lang="en-US" sz="853">
+              <a:rPr lang="en-US" sz="677">
                 <a:solidFill>
                   <a:schemeClr val="tx1"/>
                 </a:solidFill>
@@ -10625,7 +10593,7 @@
               <a:defRPr/>
             </a:pPr>
             <a:r>
-              <a:rPr lang="en-US" sz="500">
+              <a:rPr lang="en-US" sz="397">
                 <a:solidFill>
                   <a:srgbClr val="C00000"/>
                 </a:solidFill>
@@ -10640,7 +10608,7 @@
               <a:defRPr/>
             </a:pPr>
             <a:r>
-              <a:rPr lang="en-US" sz="500">
+              <a:rPr lang="en-US" sz="397">
                 <a:solidFill>
                   <a:srgbClr val="C00000"/>
                 </a:solidFill>
@@ -10655,7 +10623,7 @@
               <a:defRPr/>
             </a:pPr>
             <a:r>
-              <a:rPr lang="en-US" sz="500">
+              <a:rPr lang="en-US" sz="397">
                 <a:solidFill>
                   <a:srgbClr val="C00000"/>
                 </a:solidFill>
@@ -10681,8 +10649,8 @@
         </p:nvSpPr>
         <p:spPr>
           <a:xfrm>
-            <a:off x="139591" y="6480621"/>
-            <a:ext cx="1105070" cy="1975950"/>
+            <a:off x="492000" y="5143539"/>
+            <a:ext cx="877072" cy="1568272"/>
           </a:xfrm>
           <a:prstGeom prst="roundRect">
             <a:avLst>
@@ -10721,7 +10689,7 @@
           <a:p>
             <a:pPr rtl="0"/>
             <a:r>
-              <a:rPr lang="en-US" sz="1707" b="1">
+              <a:rPr lang="en-US" sz="1355" b="1">
                 <a:solidFill>
                   <a:schemeClr val="bg1"/>
                 </a:solidFill>
@@ -10735,15 +10703,15 @@
           <a:p>
             <a:pPr rtl="0"/>
             <a:r>
-              <a:rPr lang="en-US" sz="1280" b="1"/>
+              <a:rPr lang="en-US" sz="1016" b="1"/>
               <a:t>Notes</a:t>
             </a:r>
-            <a:endParaRPr lang="en-US" sz="1280" b="1" dirty="0"/>
+            <a:endParaRPr lang="en-US" sz="1016" b="1" dirty="0"/>
           </a:p>
           <a:p>
             <a:pPr rtl="0"/>
             <a:r>
-              <a:rPr lang="en-US" sz="853" i="1">
+              <a:rPr lang="en-US" sz="677" i="1">
                 <a:solidFill>
                   <a:schemeClr val="accent5"/>
                 </a:solidFill>
@@ -10756,51 +10724,51 @@
           <a:p>
             <a:pPr rtl="0"/>
             <a:r>
-              <a:rPr lang="en-US" sz="853"/>
+              <a:rPr lang="en-US" sz="677"/>
               <a:t>ReferenceId</a:t>
             </a:r>
           </a:p>
           <a:p>
             <a:pPr rtl="0"/>
             <a:r>
-              <a:rPr lang="en-US" sz="853"/>
+              <a:rPr lang="en-US" sz="677"/>
               <a:t>ReferenceType</a:t>
             </a:r>
           </a:p>
           <a:p>
             <a:pPr rtl="0"/>
             <a:r>
-              <a:rPr lang="en-US" sz="853"/>
+              <a:rPr lang="en-US" sz="677"/>
               <a:t>NoteDateTime</a:t>
             </a:r>
           </a:p>
           <a:p>
             <a:pPr rtl="0"/>
             <a:r>
-              <a:rPr lang="en-US" sz="853"/>
+              <a:rPr lang="en-US" sz="677"/>
               <a:t>NoteDueDateTime</a:t>
             </a:r>
-            <a:endParaRPr lang="en-US" sz="853" dirty="0"/>
+            <a:endParaRPr lang="en-US" sz="677" dirty="0"/>
           </a:p>
           <a:p>
             <a:pPr rtl="0"/>
             <a:r>
-              <a:rPr lang="en-US" sz="853"/>
+              <a:rPr lang="en-US" sz="677"/>
               <a:t>NoteText</a:t>
             </a:r>
-            <a:endParaRPr lang="en-US" sz="853" dirty="0"/>
+            <a:endParaRPr lang="en-US" sz="677" dirty="0"/>
           </a:p>
           <a:p>
             <a:pPr rtl="0"/>
             <a:r>
-              <a:rPr lang="en-US" sz="853">
+              <a:rPr lang="en-US" sz="677">
                 <a:solidFill>
                   <a:schemeClr val="tx1"/>
                 </a:solidFill>
               </a:rPr>
               <a:t>CreatorId</a:t>
             </a:r>
-            <a:endParaRPr lang="fa-IR" sz="853">
+            <a:endParaRPr lang="fa-IR" sz="677">
               <a:solidFill>
                 <a:schemeClr val="tx1"/>
               </a:solidFill>
@@ -10809,7 +10777,7 @@
           <a:p>
             <a:pPr rtl="0"/>
             <a:r>
-              <a:rPr lang="en-US" sz="853">
+              <a:rPr lang="en-US" sz="677">
                 <a:solidFill>
                   <a:schemeClr val="tx1"/>
                 </a:solidFill>
@@ -10822,7 +10790,7 @@
               <a:buNone/>
             </a:pPr>
             <a:r>
-              <a:rPr lang="en-US" sz="500" kern="100">
+              <a:rPr lang="en-US" sz="397" kern="100">
                 <a:solidFill>
                   <a:srgbClr val="C00000"/>
                 </a:solidFill>
@@ -10836,7 +10804,7 @@
           <a:p>
             <a:pPr rtl="0"/>
             <a:r>
-              <a:rPr lang="en-US" sz="500" kern="100">
+              <a:rPr lang="en-US" sz="397" kern="100">
                 <a:solidFill>
                   <a:srgbClr val="C00000"/>
                 </a:solidFill>
@@ -10852,7 +10820,7 @@
               <a:buNone/>
             </a:pPr>
             <a:r>
-              <a:rPr lang="en-US" sz="500" kern="100">
+              <a:rPr lang="en-US" sz="397" kern="100">
                 <a:solidFill>
                   <a:srgbClr val="C00000"/>
                 </a:solidFill>
@@ -10868,7 +10836,7 @@
               <a:buNone/>
             </a:pPr>
             <a:r>
-              <a:rPr lang="en-US" sz="500" kern="100">
+              <a:rPr lang="en-US" sz="397" kern="100">
                 <a:solidFill>
                   <a:srgbClr val="C00000"/>
                 </a:solidFill>
@@ -10884,7 +10852,7 @@
               <a:buNone/>
             </a:pPr>
             <a:r>
-              <a:rPr lang="en-US" sz="500" kern="100">
+              <a:rPr lang="en-US" sz="397" kern="100">
                 <a:solidFill>
                   <a:srgbClr val="C00000"/>
                 </a:solidFill>
@@ -10911,8 +10879,8 @@
         </p:nvSpPr>
         <p:spPr>
           <a:xfrm>
-            <a:off x="1048111" y="7703030"/>
-            <a:ext cx="954729" cy="900550"/>
+            <a:off x="1213075" y="6113741"/>
+            <a:ext cx="757749" cy="714748"/>
           </a:xfrm>
           <a:prstGeom prst="roundRect">
             <a:avLst>
@@ -10951,7 +10919,7 @@
           <a:p>
             <a:pPr rtl="0"/>
             <a:r>
-              <a:rPr lang="en-US" sz="1707" b="1">
+              <a:rPr lang="en-US" sz="1355" b="1">
                 <a:solidFill>
                   <a:schemeClr val="bg1"/>
                 </a:solidFill>
@@ -10965,15 +10933,15 @@
           <a:p>
             <a:pPr rtl="0"/>
             <a:r>
-              <a:rPr lang="en-US" sz="1280" b="1"/>
+              <a:rPr lang="en-US" sz="1016" b="1"/>
               <a:t>NoteNet</a:t>
             </a:r>
-            <a:endParaRPr lang="en-US" sz="1280" b="1" dirty="0"/>
+            <a:endParaRPr lang="en-US" sz="1016" b="1" dirty="0"/>
           </a:p>
           <a:p>
             <a:pPr rtl="0"/>
             <a:r>
-              <a:rPr lang="en-US" sz="853" i="1">
+              <a:rPr lang="en-US" sz="677" i="1">
                 <a:solidFill>
                   <a:schemeClr val="accent5"/>
                 </a:solidFill>
@@ -10982,7 +10950,7 @@
               </a:rPr>
               <a:t>NoteNetId</a:t>
             </a:r>
-            <a:endParaRPr lang="en-US" sz="853" i="1" dirty="0">
+            <a:endParaRPr lang="en-US" sz="677" i="1" dirty="0">
               <a:solidFill>
                 <a:schemeClr val="accent5"/>
               </a:solidFill>
@@ -10993,17 +10961,17 @@
           <a:p>
             <a:pPr rtl="0"/>
             <a:r>
-              <a:rPr lang="en-US" sz="853"/>
+              <a:rPr lang="en-US" sz="677"/>
               <a:t>NoteAId</a:t>
             </a:r>
           </a:p>
           <a:p>
             <a:pPr rtl="0"/>
             <a:r>
-              <a:rPr lang="en-US" sz="853"/>
+              <a:rPr lang="en-US" sz="677"/>
               <a:t>NoteBId</a:t>
             </a:r>
-            <a:endParaRPr lang="en-US" sz="853" dirty="0"/>
+            <a:endParaRPr lang="en-US" sz="677" dirty="0"/>
           </a:p>
         </p:txBody>
       </p:sp>
@@ -11021,8 +10989,8 @@
         </p:nvSpPr>
         <p:spPr bwMode="auto">
           <a:xfrm>
-            <a:off x="1486841" y="464701"/>
-            <a:ext cx="1210830" cy="1196534"/>
+            <a:off x="1561285" y="368824"/>
+            <a:ext cx="961012" cy="949665"/>
           </a:xfrm>
           <a:prstGeom prst="roundRect">
             <a:avLst>
@@ -11061,7 +11029,7 @@
               <a:defRPr/>
             </a:pPr>
             <a:r>
-              <a:rPr lang="en-US" sz="1707" b="1">
+              <a:rPr lang="en-US" sz="1355" b="1">
                 <a:solidFill>
                   <a:schemeClr val="bg1"/>
                 </a:solidFill>
@@ -11079,7 +11047,7 @@
               <a:defRPr/>
             </a:pPr>
             <a:r>
-              <a:rPr lang="en-US" sz="1280" b="1">
+              <a:rPr lang="en-US" sz="1016" b="1">
                 <a:solidFill>
                   <a:schemeClr val="tx1"/>
                 </a:solidFill>
@@ -11088,7 +11056,7 @@
               </a:rPr>
               <a:t>Chatrooms</a:t>
             </a:r>
-            <a:endParaRPr sz="1280">
+            <a:endParaRPr sz="1016">
               <a:solidFill>
                 <a:schemeClr val="tx1"/>
               </a:solidFill>
@@ -11101,7 +11069,7 @@
               <a:defRPr/>
             </a:pPr>
             <a:r>
-              <a:rPr lang="en-US" sz="853" i="1">
+              <a:rPr lang="en-US" sz="677" i="1">
                 <a:solidFill>
                   <a:schemeClr val="accent5"/>
                 </a:solidFill>
@@ -11116,7 +11084,7 @@
               <a:defRPr/>
             </a:pPr>
             <a:r>
-              <a:rPr lang="en-US" sz="853">
+              <a:rPr lang="en-US" sz="677">
                 <a:solidFill>
                   <a:schemeClr val="tx1"/>
                 </a:solidFill>
@@ -11131,7 +11099,7 @@
               <a:defRPr/>
             </a:pPr>
             <a:r>
-              <a:rPr lang="en-US" sz="853">
+              <a:rPr lang="en-US" sz="677">
                 <a:solidFill>
                   <a:schemeClr val="tx1"/>
                 </a:solidFill>
@@ -11146,7 +11114,7 @@
               <a:defRPr/>
             </a:pPr>
             <a:r>
-              <a:rPr lang="en-US" sz="853">
+              <a:rPr lang="en-US" sz="677">
                 <a:solidFill>
                   <a:schemeClr val="tx1"/>
                 </a:solidFill>
@@ -11161,7 +11129,7 @@
               <a:defRPr/>
             </a:pPr>
             <a:r>
-              <a:rPr lang="en-US" sz="853">
+              <a:rPr lang="en-US" sz="677">
                 <a:solidFill>
                   <a:schemeClr val="tx1"/>
                 </a:solidFill>
@@ -11187,8 +11155,8 @@
         </p:nvSpPr>
         <p:spPr bwMode="auto">
           <a:xfrm>
-            <a:off x="3829694" y="90838"/>
-            <a:ext cx="1424410" cy="1936967"/>
+            <a:off x="3420761" y="72097"/>
+            <a:ext cx="1130526" cy="1537332"/>
           </a:xfrm>
           <a:prstGeom prst="roundRect">
             <a:avLst>
@@ -11227,7 +11195,7 @@
               <a:defRPr/>
             </a:pPr>
             <a:r>
-              <a:rPr lang="en-US" sz="1707" b="1">
+              <a:rPr lang="en-US" sz="1355" b="1">
                 <a:solidFill>
                   <a:schemeClr val="bg1"/>
                 </a:solidFill>
@@ -11245,7 +11213,7 @@
               <a:defRPr/>
             </a:pPr>
             <a:r>
-              <a:rPr lang="en-US" sz="1280" b="1">
+              <a:rPr lang="en-US" sz="1016" b="1">
                 <a:solidFill>
                   <a:schemeClr val="tx1"/>
                 </a:solidFill>
@@ -11254,7 +11222,7 @@
               </a:rPr>
               <a:t>usrs</a:t>
             </a:r>
-            <a:endParaRPr sz="1280">
+            <a:endParaRPr sz="1016">
               <a:solidFill>
                 <a:schemeClr val="tx1"/>
               </a:solidFill>
@@ -11267,7 +11235,7 @@
               <a:defRPr/>
             </a:pPr>
             <a:r>
-              <a:rPr lang="en-US" sz="853" i="1">
+              <a:rPr lang="en-US" sz="677" i="1">
                 <a:solidFill>
                   <a:schemeClr val="accent5"/>
                 </a:solidFill>
@@ -11282,7 +11250,7 @@
               <a:defRPr/>
             </a:pPr>
             <a:r>
-              <a:rPr lang="en-US" sz="853">
+              <a:rPr lang="en-US" sz="677">
                 <a:solidFill>
                   <a:schemeClr val="tx1"/>
                 </a:solidFill>
@@ -11291,7 +11259,7 @@
               </a:rPr>
               <a:t>DepartmentId</a:t>
             </a:r>
-            <a:endParaRPr lang="en-US" sz="853" i="1">
+            <a:endParaRPr lang="en-US" sz="677" i="1">
               <a:solidFill>
                 <a:schemeClr val="accent5"/>
               </a:solidFill>
@@ -11304,7 +11272,7 @@
               <a:defRPr/>
             </a:pPr>
             <a:r>
-              <a:rPr lang="en-US" sz="853">
+              <a:rPr lang="en-US" sz="677">
                 <a:solidFill>
                   <a:schemeClr val="tx1"/>
                 </a:solidFill>
@@ -11319,7 +11287,7 @@
               <a:defRPr/>
             </a:pPr>
             <a:r>
-              <a:rPr lang="en-US" sz="853">
+              <a:rPr lang="en-US" sz="677">
                 <a:solidFill>
                   <a:schemeClr val="tx1"/>
                 </a:solidFill>
@@ -11334,7 +11302,7 @@
               <a:defRPr/>
             </a:pPr>
             <a:r>
-              <a:rPr lang="en-US" sz="853">
+              <a:rPr lang="en-US" sz="677">
                 <a:solidFill>
                   <a:schemeClr val="tx1"/>
                 </a:solidFill>
@@ -11349,7 +11317,7 @@
               <a:defRPr/>
             </a:pPr>
             <a:r>
-              <a:rPr lang="en-US" sz="853">
+              <a:rPr lang="en-US" sz="677">
                 <a:solidFill>
                   <a:schemeClr val="tx1"/>
                 </a:solidFill>
@@ -11359,7 +11327,7 @@
               <a:t>UsrTags</a:t>
             </a:r>
             <a:r>
-              <a:rPr lang="en-US" sz="853">
+              <a:rPr lang="en-US" sz="677">
                 <a:solidFill>
                   <a:srgbClr val="C00000"/>
                 </a:solidFill>
@@ -11370,11 +11338,11 @@
             </a:r>
           </a:p>
           <a:p>
-            <a:pPr marL="90488" rtl="0">
-              <a:defRPr/>
-            </a:pPr>
-            <a:r>
-              <a:rPr lang="en-US" sz="500">
+            <a:pPr marL="71820" rtl="0">
+              <a:defRPr/>
+            </a:pPr>
+            <a:r>
+              <a:rPr lang="en-US" sz="397">
                 <a:solidFill>
                   <a:srgbClr val="C00000"/>
                 </a:solidFill>
@@ -11385,11 +11353,11 @@
             </a:r>
           </a:p>
           <a:p>
-            <a:pPr marL="90488" rtl="0">
-              <a:defRPr/>
-            </a:pPr>
-            <a:r>
-              <a:rPr lang="en-US" sz="500">
+            <a:pPr marL="71820" rtl="0">
+              <a:defRPr/>
+            </a:pPr>
+            <a:r>
+              <a:rPr lang="en-US" sz="397">
                 <a:solidFill>
                   <a:srgbClr val="C00000"/>
                 </a:solidFill>
@@ -11400,11 +11368,11 @@
             </a:r>
           </a:p>
           <a:p>
-            <a:pPr marL="90488" rtl="0">
-              <a:defRPr/>
-            </a:pPr>
-            <a:r>
-              <a:rPr lang="en-US" sz="500">
+            <a:pPr marL="71820" rtl="0">
+              <a:defRPr/>
+            </a:pPr>
+            <a:r>
+              <a:rPr lang="en-US" sz="397">
                 <a:solidFill>
                   <a:srgbClr val="C00000"/>
                 </a:solidFill>
@@ -11415,11 +11383,11 @@
             </a:r>
           </a:p>
           <a:p>
-            <a:pPr marL="90488" rtl="0">
-              <a:defRPr/>
-            </a:pPr>
-            <a:r>
-              <a:rPr lang="en-US" sz="500">
+            <a:pPr marL="71820" rtl="0">
+              <a:defRPr/>
+            </a:pPr>
+            <a:r>
+              <a:rPr lang="en-US" sz="397">
                 <a:solidFill>
                   <a:srgbClr val="C00000"/>
                 </a:solidFill>
@@ -11430,11 +11398,11 @@
             </a:r>
           </a:p>
           <a:p>
-            <a:pPr marL="90488" rtl="0">
-              <a:defRPr/>
-            </a:pPr>
-            <a:r>
-              <a:rPr lang="en-US" sz="500">
+            <a:pPr marL="71820" rtl="0">
+              <a:defRPr/>
+            </a:pPr>
+            <a:r>
+              <a:rPr lang="en-US" sz="397">
                 <a:solidFill>
                   <a:srgbClr val="C00000"/>
                 </a:solidFill>
@@ -11445,11 +11413,11 @@
             </a:r>
           </a:p>
           <a:p>
-            <a:pPr marL="90488" rtl="0">
-              <a:defRPr/>
-            </a:pPr>
-            <a:r>
-              <a:rPr lang="en-US" sz="500">
+            <a:pPr marL="71820" rtl="0">
+              <a:defRPr/>
+            </a:pPr>
+            <a:r>
+              <a:rPr lang="en-US" sz="397">
                 <a:solidFill>
                   <a:srgbClr val="C00000"/>
                 </a:solidFill>
@@ -11460,11 +11428,11 @@
             </a:r>
           </a:p>
           <a:p>
-            <a:pPr marL="90488" rtl="0">
-              <a:defRPr/>
-            </a:pPr>
-            <a:r>
-              <a:rPr lang="en-US" sz="500">
+            <a:pPr marL="71820" rtl="0">
+              <a:defRPr/>
+            </a:pPr>
+            <a:r>
+              <a:rPr lang="en-US" sz="397">
                 <a:solidFill>
                   <a:srgbClr val="C00000"/>
                 </a:solidFill>
@@ -11475,11 +11443,11 @@
             </a:r>
           </a:p>
           <a:p>
-            <a:pPr marL="90488" rtl="0">
-              <a:defRPr/>
-            </a:pPr>
-            <a:r>
-              <a:rPr lang="en-US" sz="500">
+            <a:pPr marL="71820" rtl="0">
+              <a:defRPr/>
+            </a:pPr>
+            <a:r>
+              <a:rPr lang="en-US" sz="397">
                 <a:solidFill>
                   <a:srgbClr val="C00000"/>
                 </a:solidFill>
@@ -11505,8 +11473,8 @@
         </p:nvSpPr>
         <p:spPr bwMode="auto">
           <a:xfrm>
-            <a:off x="4968156" y="215925"/>
-            <a:ext cx="1344323" cy="915820"/>
+            <a:off x="4324336" y="171376"/>
+            <a:ext cx="1066962" cy="726868"/>
           </a:xfrm>
           <a:prstGeom prst="roundRect">
             <a:avLst>
@@ -11545,7 +11513,7 @@
               <a:defRPr/>
             </a:pPr>
             <a:r>
-              <a:rPr lang="en-US" sz="1707" b="1">
+              <a:rPr lang="en-US" sz="1355" b="1">
                 <a:solidFill>
                   <a:schemeClr val="bg1"/>
                 </a:solidFill>
@@ -11563,7 +11531,7 @@
               <a:defRPr/>
             </a:pPr>
             <a:r>
-              <a:rPr lang="en-US" sz="1280" b="1">
+              <a:rPr lang="en-US" sz="1016" b="1">
                 <a:solidFill>
                   <a:schemeClr val="tx1"/>
                 </a:solidFill>
@@ -11572,7 +11540,7 @@
               </a:rPr>
               <a:t>Departments</a:t>
             </a:r>
-            <a:endParaRPr sz="1280">
+            <a:endParaRPr sz="1016">
               <a:solidFill>
                 <a:schemeClr val="tx1"/>
               </a:solidFill>
@@ -11585,7 +11553,7 @@
               <a:defRPr/>
             </a:pPr>
             <a:r>
-              <a:rPr lang="en-US" sz="853">
+              <a:rPr lang="en-US" sz="677">
                 <a:solidFill>
                   <a:schemeClr val="tx1"/>
                 </a:solidFill>
@@ -11600,7 +11568,7 @@
               <a:defRPr/>
             </a:pPr>
             <a:r>
-              <a:rPr lang="en-US" sz="853">
+              <a:rPr lang="en-US" sz="677">
                 <a:solidFill>
                   <a:schemeClr val="tx1"/>
                 </a:solidFill>
@@ -11615,7 +11583,7 @@
               <a:defRPr/>
             </a:pPr>
             <a:r>
-              <a:rPr lang="en-US" sz="853">
+              <a:rPr lang="en-US" sz="677">
                 <a:solidFill>
                   <a:schemeClr val="tx1"/>
                 </a:solidFill>
@@ -11641,8 +11609,8 @@
         </p:nvSpPr>
         <p:spPr>
           <a:xfrm>
-            <a:off x="260916" y="5218875"/>
-            <a:ext cx="1315682" cy="1059364"/>
+            <a:off x="588294" y="4142117"/>
+            <a:ext cx="1044230" cy="840796"/>
           </a:xfrm>
           <a:prstGeom prst="roundRect">
             <a:avLst>
@@ -11681,7 +11649,7 @@
           <a:p>
             <a:pPr rtl="0"/>
             <a:r>
-              <a:rPr lang="en-US" sz="1707" b="1">
+              <a:rPr lang="en-US" sz="1355" b="1">
                 <a:solidFill>
                   <a:schemeClr val="bg1"/>
                 </a:solidFill>
@@ -11695,15 +11663,15 @@
           <a:p>
             <a:pPr rtl="0"/>
             <a:r>
-              <a:rPr lang="en-US" sz="1280" b="1"/>
+              <a:rPr lang="en-US" sz="1016" b="1"/>
               <a:t>SuubProjects</a:t>
             </a:r>
-            <a:endParaRPr lang="en-US" sz="853" b="1" dirty="0"/>
+            <a:endParaRPr lang="en-US" sz="677" b="1" dirty="0"/>
           </a:p>
           <a:p>
             <a:pPr rtl="0"/>
             <a:r>
-              <a:rPr lang="en-US" sz="853" i="1">
+              <a:rPr lang="en-US" sz="677" i="1">
                 <a:solidFill>
                   <a:schemeClr val="accent5"/>
                 </a:solidFill>
@@ -11712,7 +11680,7 @@
               </a:rPr>
               <a:t>SubprojectId</a:t>
             </a:r>
-            <a:endParaRPr lang="en-US" sz="853" i="1" dirty="0">
+            <a:endParaRPr lang="en-US" sz="677" i="1" dirty="0">
               <a:solidFill>
                 <a:schemeClr val="accent5"/>
               </a:solidFill>
@@ -11723,14 +11691,14 @@
           <a:p>
             <a:pPr rtl="0"/>
             <a:r>
-              <a:rPr lang="en-US" sz="853">
+              <a:rPr lang="en-US" sz="677">
                 <a:solidFill>
                   <a:schemeClr val="tx1"/>
                 </a:solidFill>
               </a:rPr>
               <a:t>ProjectId</a:t>
             </a:r>
-            <a:endParaRPr lang="fa-IR" sz="853">
+            <a:endParaRPr lang="fa-IR" sz="677">
               <a:solidFill>
                 <a:schemeClr val="tx1"/>
               </a:solidFill>
@@ -11739,25 +11707,25 @@
           <a:p>
             <a:pPr rtl="0"/>
             <a:r>
-              <a:rPr lang="en-US" sz="853"/>
+              <a:rPr lang="en-US" sz="677"/>
               <a:t>SubprojectName</a:t>
             </a:r>
           </a:p>
           <a:p>
             <a:pPr rtl="0"/>
             <a:r>
-              <a:rPr lang="en-US" sz="853"/>
+              <a:rPr lang="en-US" sz="677"/>
               <a:t>Subproject</a:t>
             </a:r>
             <a:r>
-              <a:rPr lang="en-US" sz="853">
+              <a:rPr lang="en-US" sz="677">
                 <a:solidFill>
                   <a:srgbClr val="C00000"/>
                 </a:solidFill>
               </a:rPr>
               <a:t>Tags</a:t>
             </a:r>
-            <a:endParaRPr lang="en-US" sz="853" dirty="0">
+            <a:endParaRPr lang="en-US" sz="677" dirty="0">
               <a:solidFill>
                 <a:srgbClr val="C00000"/>
               </a:solidFill>
@@ -11779,8 +11747,8 @@
         </p:nvSpPr>
         <p:spPr bwMode="auto">
           <a:xfrm>
-            <a:off x="5112172" y="1296045"/>
-            <a:ext cx="1077711" cy="915820"/>
+            <a:off x="4438638" y="1028645"/>
+            <a:ext cx="855358" cy="726868"/>
           </a:xfrm>
           <a:prstGeom prst="roundRect">
             <a:avLst>
@@ -11819,7 +11787,7 @@
               <a:defRPr/>
             </a:pPr>
             <a:r>
-              <a:rPr lang="en-US" sz="1707" b="1">
+              <a:rPr lang="en-US" sz="1355" b="1">
                 <a:solidFill>
                   <a:schemeClr val="bg1"/>
                 </a:solidFill>
@@ -11837,7 +11805,7 @@
               <a:defRPr/>
             </a:pPr>
             <a:r>
-              <a:rPr lang="en-US" sz="1280" b="1">
+              <a:rPr lang="en-US" sz="1016" b="1">
                 <a:solidFill>
                   <a:schemeClr val="tx1"/>
                 </a:solidFill>
@@ -11846,7 +11814,7 @@
               </a:rPr>
               <a:t>usrsLogs</a:t>
             </a:r>
-            <a:endParaRPr sz="1280">
+            <a:endParaRPr sz="1016">
               <a:solidFill>
                 <a:schemeClr val="tx1"/>
               </a:solidFill>
@@ -11859,7 +11827,7 @@
               <a:defRPr/>
             </a:pPr>
             <a:r>
-              <a:rPr lang="en-US" sz="853">
+              <a:rPr lang="en-US" sz="677">
                 <a:solidFill>
                   <a:schemeClr val="tx1"/>
                 </a:solidFill>
@@ -11874,7 +11842,7 @@
               <a:defRPr/>
             </a:pPr>
             <a:r>
-              <a:rPr lang="en-US" sz="853">
+              <a:rPr lang="en-US" sz="677">
                 <a:solidFill>
                   <a:schemeClr val="tx1"/>
                 </a:solidFill>
@@ -11889,7 +11857,7 @@
               <a:defRPr/>
             </a:pPr>
             <a:r>
-              <a:rPr lang="en-US" sz="853">
+              <a:rPr lang="en-US" sz="677">
                 <a:solidFill>
                   <a:schemeClr val="tx1"/>
                 </a:solidFill>
@@ -11923,8 +11891,8 @@
         </p:blipFill>
         <p:spPr bwMode="auto">
           <a:xfrm>
-            <a:off x="9288636" y="23185"/>
-            <a:ext cx="2176215" cy="452230"/>
+            <a:off x="7753415" y="18402"/>
+            <a:ext cx="1727218" cy="358926"/>
           </a:xfrm>
           <a:prstGeom prst="rect">
             <a:avLst/>
@@ -11945,8 +11913,8 @@
         </p:nvSpPr>
         <p:spPr bwMode="auto">
           <a:xfrm>
-            <a:off x="8036893" y="575965"/>
-            <a:ext cx="1366069" cy="1179645"/>
+            <a:off x="6759931" y="457132"/>
+            <a:ext cx="1084222" cy="936261"/>
           </a:xfrm>
           <a:prstGeom prst="roundRect">
             <a:avLst>
@@ -11986,7 +11954,7 @@
               <a:defRPr/>
             </a:pPr>
             <a:r>
-              <a:rPr lang="en-US" sz="1707" b="1">
+              <a:rPr lang="en-US" sz="1355" b="1">
                 <a:solidFill>
                   <a:schemeClr val="bg1"/>
                 </a:solidFill>
@@ -12004,7 +11972,7 @@
               <a:defRPr/>
             </a:pPr>
             <a:r>
-              <a:rPr lang="en-US" sz="1280" b="1">
+              <a:rPr lang="en-US" sz="1016" b="1">
                 <a:solidFill>
                   <a:schemeClr val="tx1"/>
                 </a:solidFill>
@@ -12013,7 +11981,7 @@
               </a:rPr>
               <a:t>CourseTopics</a:t>
             </a:r>
-            <a:endParaRPr sz="1280">
+            <a:endParaRPr sz="1016">
               <a:solidFill>
                 <a:schemeClr val="tx1"/>
               </a:solidFill>
@@ -12026,7 +11994,7 @@
               <a:defRPr/>
             </a:pPr>
             <a:r>
-              <a:rPr lang="en-US" sz="853" i="1">
+              <a:rPr lang="en-US" sz="677" i="1">
                 <a:solidFill>
                   <a:schemeClr val="accent5"/>
                 </a:solidFill>
@@ -12041,7 +12009,7 @@
               <a:defRPr/>
             </a:pPr>
             <a:r>
-              <a:rPr lang="en-US" sz="853">
+              <a:rPr lang="en-US" sz="677">
                 <a:solidFill>
                   <a:schemeClr val="tx1"/>
                 </a:solidFill>
@@ -12056,7 +12024,7 @@
               <a:defRPr/>
             </a:pPr>
             <a:r>
-              <a:rPr lang="en-US" sz="853">
+              <a:rPr lang="en-US" sz="677">
                 <a:solidFill>
                   <a:schemeClr val="tx1"/>
                 </a:solidFill>
@@ -12070,7 +12038,7 @@
             <a:pPr rtl="0">
               <a:defRPr/>
             </a:pPr>
-            <a:endParaRPr lang="en-US" sz="853">
+            <a:endParaRPr lang="en-US" sz="677">
               <a:solidFill>
                 <a:schemeClr val="tx1"/>
               </a:solidFill>
@@ -12082,7 +12050,7 @@
             <a:pPr rtl="0">
               <a:defRPr/>
             </a:pPr>
-            <a:endParaRPr lang="en-US" sz="853">
+            <a:endParaRPr lang="en-US" sz="677">
               <a:solidFill>
                 <a:schemeClr val="tx1"/>
               </a:solidFill>
@@ -12106,8 +12074,8 @@
         </p:nvSpPr>
         <p:spPr bwMode="auto">
           <a:xfrm>
-            <a:off x="8450680" y="1920134"/>
-            <a:ext cx="1414020" cy="1152285"/>
+            <a:off x="7088345" y="1523972"/>
+            <a:ext cx="1122279" cy="914546"/>
           </a:xfrm>
           <a:prstGeom prst="roundRect">
             <a:avLst>
@@ -12147,7 +12115,7 @@
               <a:defRPr/>
             </a:pPr>
             <a:r>
-              <a:rPr lang="en-US" sz="1707" b="1">
+              <a:rPr lang="en-US" sz="1355" b="1">
                 <a:solidFill>
                   <a:schemeClr val="bg1"/>
                 </a:solidFill>
@@ -12165,7 +12133,7 @@
               <a:defRPr/>
             </a:pPr>
             <a:r>
-              <a:rPr lang="en-US" sz="1280" b="1">
+              <a:rPr lang="en-US" sz="1016" b="1">
                 <a:solidFill>
                   <a:schemeClr val="tx1"/>
                 </a:solidFill>
@@ -12174,7 +12142,7 @@
               </a:rPr>
               <a:t>CourseFolders</a:t>
             </a:r>
-            <a:endParaRPr sz="1280" b="1">
+            <a:endParaRPr sz="1016" b="1">
               <a:solidFill>
                 <a:schemeClr val="tx1"/>
               </a:solidFill>
@@ -12187,7 +12155,7 @@
               <a:defRPr/>
             </a:pPr>
             <a:r>
-              <a:rPr lang="en-US" sz="853" i="1">
+              <a:rPr lang="en-US" sz="677" i="1">
                 <a:solidFill>
                   <a:schemeClr val="accent5"/>
                 </a:solidFill>
@@ -12202,7 +12170,7 @@
               <a:defRPr/>
             </a:pPr>
             <a:r>
-              <a:rPr lang="en-US" sz="853">
+              <a:rPr lang="en-US" sz="677">
                 <a:solidFill>
                   <a:schemeClr val="tx1"/>
                 </a:solidFill>
@@ -12217,7 +12185,7 @@
               <a:defRPr/>
             </a:pPr>
             <a:r>
-              <a:rPr lang="en-US" sz="853">
+              <a:rPr lang="en-US" sz="677">
                 <a:solidFill>
                   <a:schemeClr val="tx1"/>
                 </a:solidFill>
@@ -12232,7 +12200,7 @@
               <a:defRPr/>
             </a:pPr>
             <a:r>
-              <a:rPr lang="en-US" sz="853">
+              <a:rPr lang="en-US" sz="677">
                 <a:solidFill>
                   <a:schemeClr val="tx1"/>
                 </a:solidFill>
@@ -12248,7 +12216,7 @@
               <a:defRPr/>
             </a:pPr>
             <a:r>
-              <a:rPr lang="en-US" sz="853">
+              <a:rPr lang="en-US" sz="677">
                 <a:solidFill>
                   <a:schemeClr val="tx1"/>
                 </a:solidFill>
@@ -12304,8 +12272,8 @@
         </p:nvGrpSpPr>
         <p:grpSpPr>
           <a:xfrm>
-            <a:off x="6264300" y="129342"/>
-            <a:ext cx="5128326" cy="1296144"/>
+            <a:off x="5334065" y="187422"/>
+            <a:ext cx="4070250" cy="1028724"/>
             <a:chOff x="1193312" y="2814092"/>
             <a:chExt cx="4807496" cy="1839044"/>
           </a:xfrm>
@@ -13151,8 +13119,8 @@
         </p:nvGrpSpPr>
         <p:grpSpPr>
           <a:xfrm>
-            <a:off x="159124" y="181431"/>
-            <a:ext cx="4120968" cy="1014077"/>
+            <a:off x="507503" y="143999"/>
+            <a:ext cx="3270730" cy="804853"/>
             <a:chOff x="3049665" y="977311"/>
             <a:chExt cx="4120968" cy="1014077"/>
           </a:xfrm>
@@ -13991,8 +13959,8 @@
         </p:nvGrpSpPr>
         <p:grpSpPr>
           <a:xfrm>
-            <a:off x="2476329" y="1234286"/>
-            <a:ext cx="3668362" cy="665661"/>
+            <a:off x="437913" y="1689865"/>
+            <a:ext cx="2911505" cy="528322"/>
             <a:chOff x="235732" y="4393940"/>
             <a:chExt cx="3668362" cy="665661"/>
           </a:xfrm>
@@ -14644,8 +14612,8 @@
         </p:nvSpPr>
         <p:spPr>
           <a:xfrm>
-            <a:off x="5473749" y="7194213"/>
-            <a:ext cx="5864920" cy="1446550"/>
+            <a:off x="331401" y="2407972"/>
+            <a:ext cx="7429911" cy="1167243"/>
           </a:xfrm>
           <a:prstGeom prst="rect">
             <a:avLst/>
@@ -14660,7 +14628,7 @@
           <a:p>
             <a:pPr algn="l" rtl="0"/>
             <a:r>
-              <a:rPr lang="en-US" sz="8800">
+              <a:rPr lang="en-US" sz="6985">
                 <a:solidFill>
                   <a:schemeClr val="tx1"/>
                 </a:solidFill>
@@ -14671,7 +14639,7 @@
               <a:t>E</a:t>
             </a:r>
             <a:r>
-              <a:rPr lang="en-US" sz="8800">
+              <a:rPr lang="en-US" sz="6985">
                 <a:solidFill>
                   <a:srgbClr val="C00000"/>
                 </a:solidFill>
@@ -14682,7 +14650,7 @@
               <a:t>x</a:t>
             </a:r>
             <a:r>
-              <a:rPr lang="en-US" sz="8800">
+              <a:rPr lang="en-US" sz="6985">
                 <a:solidFill>
                   <a:schemeClr val="tx1"/>
                 </a:solidFill>
@@ -14690,10 +14658,10 @@
                 <a:ea typeface="Dotum" panose="020B0600000101010101" pitchFamily="34" charset="-127"/>
                 <a:cs typeface="Biome Light" panose="020B0303030204020804" pitchFamily="34" charset="0"/>
               </a:rPr>
-              <a:t>aminerv - </a:t>
-            </a:r>
-            <a:r>
-              <a:rPr lang="en-US" sz="8800">
+              <a:t>aminer-Web / </a:t>
+            </a:r>
+            <a:r>
+              <a:rPr lang="en-US" sz="6985">
                 <a:solidFill>
                   <a:srgbClr val="C00000"/>
                 </a:solidFill>
@@ -14704,7 +14672,7 @@
               <a:t>S</a:t>
             </a:r>
             <a:r>
-              <a:rPr lang="en-US" sz="8800">
+              <a:rPr lang="en-US" sz="6985">
                 <a:solidFill>
                   <a:schemeClr val="tx1"/>
                 </a:solidFill>
@@ -14719,10 +14687,10 @@
       </p:sp>
       <p:sp>
         <p:nvSpPr>
-          <p:cNvPr id="4" name="TextBox 3">
+          <p:cNvPr id="3" name="TextBox 2">
             <a:extLst>
               <a:ext uri="{FF2B5EF4-FFF2-40B4-BE49-F238E27FC236}">
-                <a16:creationId xmlns:a16="http://schemas.microsoft.com/office/drawing/2014/main" id="{102F6D86-6AF3-4A0E-2F22-5EE0548A7A53}"/>
+                <a16:creationId xmlns:a16="http://schemas.microsoft.com/office/drawing/2014/main" id="{3CA75A42-F184-A7EC-28AC-465493B25BF0}"/>
               </a:ext>
             </a:extLst>
           </p:cNvPr>
@@ -14731,8 +14699,8 @@
         </p:nvSpPr>
         <p:spPr>
           <a:xfrm>
-            <a:off x="161822" y="2057444"/>
-            <a:ext cx="11361364" cy="3785652"/>
+            <a:off x="2792760" y="5805264"/>
+            <a:ext cx="6887117" cy="707886"/>
           </a:xfrm>
           <a:prstGeom prst="rect">
             <a:avLst/>
@@ -14747,7 +14715,94 @@
           <a:p>
             <a:pPr algn="l" rtl="0"/>
             <a:r>
-              <a:rPr lang="en-US" sz="8000">
+              <a:rPr lang="en-US" sz="4000" i="1">
+                <a:solidFill>
+                  <a:schemeClr val="tx1"/>
+                </a:solidFill>
+                <a:latin typeface="Walbaum Display Light" panose="020F0502020204030204" pitchFamily="18" charset="0"/>
+                <a:ea typeface="Dotum" panose="020B0600000101010101" pitchFamily="34" charset="-127"/>
+                <a:cs typeface="Mj_Ebrahim" pitchFamily="2" charset="-78"/>
+              </a:rPr>
+              <a:t>e</a:t>
+            </a:r>
+            <a:r>
+              <a:rPr lang="en-US" sz="4000" i="1">
+                <a:solidFill>
+                  <a:srgbClr val="C00000"/>
+                </a:solidFill>
+                <a:latin typeface="Walbaum Display Light" panose="020F0502020204030204" pitchFamily="18" charset="0"/>
+                <a:ea typeface="Dotum" panose="020B0600000101010101" pitchFamily="34" charset="-127"/>
+                <a:cs typeface="Mj_Ebrahim" pitchFamily="2" charset="-78"/>
+              </a:rPr>
+              <a:t>x</a:t>
+            </a:r>
+            <a:r>
+              <a:rPr lang="en-US" sz="4000" i="1">
+                <a:solidFill>
+                  <a:schemeClr val="tx1"/>
+                </a:solidFill>
+                <a:latin typeface="Walbaum Display Light" panose="020F0502020204030204" pitchFamily="18" charset="0"/>
+                <a:ea typeface="Dotum" panose="020B0600000101010101" pitchFamily="34" charset="-127"/>
+                <a:cs typeface="Mj_Ebrahim" pitchFamily="2" charset="-78"/>
+              </a:rPr>
+              <a:t>aminer - </a:t>
+            </a:r>
+            <a:r>
+              <a:rPr lang="en-US" sz="4000" i="1">
+                <a:solidFill>
+                  <a:srgbClr val="C00000"/>
+                </a:solidFill>
+                <a:latin typeface="Walbaum Display Light" panose="020F0502020204030204" pitchFamily="18" charset="0"/>
+                <a:ea typeface="Dotum" panose="020B0600000101010101" pitchFamily="34" charset="-127"/>
+                <a:cs typeface="Mj_Ebrahim" pitchFamily="2" charset="-78"/>
+              </a:rPr>
+              <a:t>s</a:t>
+            </a:r>
+            <a:r>
+              <a:rPr lang="en-US" sz="4000" i="1">
+                <a:solidFill>
+                  <a:schemeClr val="tx1"/>
+                </a:solidFill>
+                <a:latin typeface="Walbaum Display Light" panose="020F0502020204030204" pitchFamily="18" charset="0"/>
+                <a:ea typeface="Dotum" panose="020B0600000101010101" pitchFamily="34" charset="-127"/>
+                <a:cs typeface="Mj_Ebrahim" pitchFamily="2" charset="-78"/>
+              </a:rPr>
+              <a:t>tudent</a:t>
+            </a:r>
+          </a:p>
+        </p:txBody>
+      </p:sp>
+      <p:sp>
+        <p:nvSpPr>
+          <p:cNvPr id="4" name="TextBox 3">
+            <a:extLst>
+              <a:ext uri="{FF2B5EF4-FFF2-40B4-BE49-F238E27FC236}">
+                <a16:creationId xmlns:a16="http://schemas.microsoft.com/office/drawing/2014/main" id="{60C0A78B-D08A-A63A-0903-BD16CD9C23B0}"/>
+              </a:ext>
+            </a:extLst>
+          </p:cNvPr>
+          <p:cNvSpPr txBox="1"/>
+          <p:nvPr/>
+        </p:nvSpPr>
+        <p:spPr>
+          <a:xfrm>
+            <a:off x="437913" y="3796692"/>
+            <a:ext cx="7429911" cy="1167243"/>
+          </a:xfrm>
+          <a:prstGeom prst="rect">
+            <a:avLst/>
+          </a:prstGeom>
+          <a:noFill/>
+        </p:spPr>
+        <p:txBody>
+          <a:bodyPr wrap="square" rtlCol="0">
+            <a:spAutoFit/>
+          </a:bodyPr>
+          <a:lstStyle/>
+          <a:p>
+            <a:pPr algn="l" rtl="0"/>
+            <a:r>
+              <a:rPr lang="en-US" sz="6985">
                 <a:solidFill>
                   <a:schemeClr val="tx1"/>
                 </a:solidFill>
@@ -14755,10 +14810,10 @@
                 <a:ea typeface="Dotum" panose="020B0600000101010101" pitchFamily="34" charset="-127"/>
                 <a:cs typeface="Biome Light" panose="020B0303030204020804" pitchFamily="34" charset="0"/>
               </a:rPr>
-              <a:t>Al</a:t>
-            </a:r>
-            <a:r>
-              <a:rPr lang="en-US" sz="8000">
+              <a:t>E</a:t>
+            </a:r>
+            <a:r>
+              <a:rPr lang="en-US" sz="6985">
                 <a:solidFill>
                   <a:srgbClr val="C00000"/>
                 </a:solidFill>
@@ -14766,10 +14821,10 @@
                 <a:ea typeface="Dotum" panose="020B0600000101010101" pitchFamily="34" charset="-127"/>
                 <a:cs typeface="Biome Light" panose="020B0303030204020804" pitchFamily="34" charset="0"/>
               </a:rPr>
-              <a:t>a</a:t>
-            </a:r>
-            <a:r>
-              <a:rPr lang="en-US" sz="8000">
+              <a:t>x</a:t>
+            </a:r>
+            <a:r>
+              <a:rPr lang="en-US" sz="6985">
                 <a:solidFill>
                   <a:schemeClr val="tx1"/>
                 </a:solidFill>
@@ -14777,10 +14832,10 @@
                 <a:ea typeface="Dotum" panose="020B0600000101010101" pitchFamily="34" charset="-127"/>
                 <a:cs typeface="Biome Light" panose="020B0303030204020804" pitchFamily="34" charset="0"/>
               </a:rPr>
-              <a:t>mut – </a:t>
-            </a:r>
-            <a:r>
-              <a:rPr lang="en-US" sz="8000">
+              <a:t>aminer-Web / </a:t>
+            </a:r>
+            <a:r>
+              <a:rPr lang="en-US" sz="6985">
                 <a:solidFill>
                   <a:srgbClr val="C00000"/>
                 </a:solidFill>
@@ -14788,10 +14843,10 @@
                 <a:ea typeface="Dotum" panose="020B0600000101010101" pitchFamily="34" charset="-127"/>
                 <a:cs typeface="Biome Light" panose="020B0303030204020804" pitchFamily="34" charset="0"/>
               </a:rPr>
-              <a:t>e</a:t>
-            </a:r>
-            <a:r>
-              <a:rPr lang="en-US" sz="8000">
+              <a:t>T</a:t>
+            </a:r>
+            <a:r>
+              <a:rPr lang="en-US" sz="6985">
                 <a:solidFill>
                   <a:schemeClr val="tx1"/>
                 </a:solidFill>
@@ -14799,205 +14854,7 @@
                 <a:ea typeface="Dotum" panose="020B0600000101010101" pitchFamily="34" charset="-127"/>
                 <a:cs typeface="Biome Light" panose="020B0303030204020804" pitchFamily="34" charset="0"/>
               </a:rPr>
-              <a:t>Lib – </a:t>
-            </a:r>
-            <a:r>
-              <a:rPr lang="en-US" sz="8000">
-                <a:solidFill>
-                  <a:srgbClr val="C00000"/>
-                </a:solidFill>
-                <a:latin typeface="Rastanty Cortez" panose="020F0502020204030204" pitchFamily="2" charset="0"/>
-                <a:ea typeface="Dotum" panose="020B0600000101010101" pitchFamily="34" charset="-127"/>
-                <a:cs typeface="Biome Light" panose="020B0303030204020804" pitchFamily="34" charset="0"/>
-              </a:rPr>
-              <a:t>i</a:t>
-            </a:r>
-            <a:r>
-              <a:rPr lang="en-US" sz="8000">
-                <a:solidFill>
-                  <a:schemeClr val="tx1"/>
-                </a:solidFill>
-                <a:latin typeface="Rastanty Cortez" panose="020F0502020204030204" pitchFamily="2" charset="0"/>
-                <a:ea typeface="Dotum" panose="020B0600000101010101" pitchFamily="34" charset="-127"/>
-                <a:cs typeface="Biome Light" panose="020B0303030204020804" pitchFamily="34" charset="0"/>
-              </a:rPr>
-              <a:t>Herbs – S</a:t>
-            </a:r>
-            <a:r>
-              <a:rPr lang="en-US" sz="8000">
-                <a:solidFill>
-                  <a:srgbClr val="C00000"/>
-                </a:solidFill>
-                <a:latin typeface="Rastanty Cortez" panose="020F0502020204030204" pitchFamily="2" charset="0"/>
-                <a:ea typeface="Dotum" panose="020B0600000101010101" pitchFamily="34" charset="-127"/>
-                <a:cs typeface="Biome Light" panose="020B0303030204020804" pitchFamily="34" charset="0"/>
-              </a:rPr>
-              <a:t>u</a:t>
-            </a:r>
-            <a:r>
-              <a:rPr lang="en-US" sz="8000">
-                <a:solidFill>
-                  <a:schemeClr val="tx1"/>
-                </a:solidFill>
-                <a:latin typeface="Rastanty Cortez" panose="020F0502020204030204" pitchFamily="2" charset="0"/>
-                <a:ea typeface="Dotum" panose="020B0600000101010101" pitchFamily="34" charset="-127"/>
-                <a:cs typeface="Biome Light" panose="020B0303030204020804" pitchFamily="34" charset="0"/>
-              </a:rPr>
-              <a:t>Papers – IR</a:t>
-            </a:r>
-            <a:r>
-              <a:rPr lang="en-US" sz="8000">
-                <a:solidFill>
-                  <a:srgbClr val="C00000"/>
-                </a:solidFill>
-                <a:latin typeface="Rastanty Cortez" panose="020F0502020204030204" pitchFamily="2" charset="0"/>
-                <a:ea typeface="Dotum" panose="020B0600000101010101" pitchFamily="34" charset="-127"/>
-                <a:cs typeface="Biome Light" panose="020B0303030204020804" pitchFamily="34" charset="0"/>
-              </a:rPr>
-              <a:t>I</a:t>
-            </a:r>
-            <a:r>
-              <a:rPr lang="en-US" sz="8000">
-                <a:solidFill>
-                  <a:schemeClr val="tx1"/>
-                </a:solidFill>
-                <a:latin typeface="Rastanty Cortez" panose="020F0502020204030204" pitchFamily="2" charset="0"/>
-                <a:ea typeface="Dotum" panose="020B0600000101010101" pitchFamily="34" charset="-127"/>
-                <a:cs typeface="Biome Light" panose="020B0303030204020804" pitchFamily="34" charset="0"/>
-              </a:rPr>
-              <a:t>S – St</a:t>
-            </a:r>
-            <a:r>
-              <a:rPr lang="en-US" sz="8000">
-                <a:solidFill>
-                  <a:srgbClr val="C00000"/>
-                </a:solidFill>
-                <a:latin typeface="Rastanty Cortez" panose="020F0502020204030204" pitchFamily="2" charset="0"/>
-                <a:ea typeface="Dotum" panose="020B0600000101010101" pitchFamily="34" charset="-127"/>
-                <a:cs typeface="Biome Light" panose="020B0303030204020804" pitchFamily="34" charset="0"/>
-              </a:rPr>
-              <a:t>u</a:t>
-            </a:r>
-            <a:r>
-              <a:rPr lang="en-US" sz="8000">
-                <a:solidFill>
-                  <a:schemeClr val="tx1"/>
-                </a:solidFill>
-                <a:latin typeface="Rastanty Cortez" panose="020F0502020204030204" pitchFamily="2" charset="0"/>
-                <a:ea typeface="Dotum" panose="020B0600000101010101" pitchFamily="34" charset="-127"/>
-                <a:cs typeface="Biome Light" panose="020B0303030204020804" pitchFamily="34" charset="0"/>
-              </a:rPr>
-              <a:t>cturEasy - Ne</a:t>
-            </a:r>
-            <a:r>
-              <a:rPr lang="en-US" sz="8000">
-                <a:solidFill>
-                  <a:srgbClr val="C00000"/>
-                </a:solidFill>
-                <a:latin typeface="Rastanty Cortez" panose="020F0502020204030204" pitchFamily="2" charset="0"/>
-                <a:ea typeface="Dotum" panose="020B0600000101010101" pitchFamily="34" charset="-127"/>
-                <a:cs typeface="Biome Light" panose="020B0303030204020804" pitchFamily="34" charset="0"/>
-              </a:rPr>
-              <a:t>x</a:t>
-            </a:r>
-            <a:r>
-              <a:rPr lang="en-US" sz="8000">
-                <a:solidFill>
-                  <a:schemeClr val="tx1"/>
-                </a:solidFill>
-                <a:latin typeface="Rastanty Cortez" panose="020F0502020204030204" pitchFamily="2" charset="0"/>
-                <a:ea typeface="Dotum" panose="020B0600000101010101" pitchFamily="34" charset="-127"/>
-                <a:cs typeface="Biome Light" panose="020B0303030204020804" pitchFamily="34" charset="0"/>
-              </a:rPr>
-              <a:t>term – Re</a:t>
-            </a:r>
-            <a:r>
-              <a:rPr lang="en-US" sz="8000">
-                <a:solidFill>
-                  <a:srgbClr val="C00000"/>
-                </a:solidFill>
-                <a:latin typeface="Rastanty Cortez" panose="020F0502020204030204" pitchFamily="2" charset="0"/>
-                <a:ea typeface="Dotum" panose="020B0600000101010101" pitchFamily="34" charset="-127"/>
-                <a:cs typeface="Biome Light" panose="020B0303030204020804" pitchFamily="34" charset="0"/>
-              </a:rPr>
-              <a:t>s</a:t>
-            </a:r>
-            <a:r>
-              <a:rPr lang="en-US" sz="8000">
-                <a:solidFill>
-                  <a:schemeClr val="tx1"/>
-                </a:solidFill>
-                <a:latin typeface="Rastanty Cortez" panose="020F0502020204030204" pitchFamily="2" charset="0"/>
-                <a:ea typeface="Dotum" panose="020B0600000101010101" pitchFamily="34" charset="-127"/>
-                <a:cs typeface="Biome Light" panose="020B0303030204020804" pitchFamily="34" charset="0"/>
-              </a:rPr>
-              <a:t>ident – SKU</a:t>
-            </a:r>
-            <a:r>
-              <a:rPr lang="en-US" sz="8000">
-                <a:solidFill>
-                  <a:srgbClr val="C00000"/>
-                </a:solidFill>
-                <a:latin typeface="Rastanty Cortez" panose="020F0502020204030204" pitchFamily="2" charset="0"/>
-                <a:ea typeface="Dotum" panose="020B0600000101010101" pitchFamily="34" charset="-127"/>
-                <a:cs typeface="Biome Light" panose="020B0303030204020804" pitchFamily="34" charset="0"/>
-              </a:rPr>
-              <a:t>B</a:t>
-            </a:r>
-            <a:r>
-              <a:rPr lang="en-US" sz="8000">
-                <a:solidFill>
-                  <a:schemeClr val="tx1"/>
-                </a:solidFill>
-                <a:latin typeface="Rastanty Cortez" panose="020F0502020204030204" pitchFamily="2" charset="0"/>
-                <a:ea typeface="Dotum" panose="020B0600000101010101" pitchFamily="34" charset="-127"/>
-                <a:cs typeface="Biome Light" panose="020B0303030204020804" pitchFamily="34" charset="0"/>
-              </a:rPr>
-              <a:t>ioDigi – SI</a:t>
-            </a:r>
-            <a:r>
-              <a:rPr lang="en-US" sz="8000">
-                <a:solidFill>
-                  <a:srgbClr val="C00000"/>
-                </a:solidFill>
-                <a:latin typeface="Rastanty Cortez" panose="020F0502020204030204" pitchFamily="2" charset="0"/>
-                <a:ea typeface="Dotum" panose="020B0600000101010101" pitchFamily="34" charset="-127"/>
-                <a:cs typeface="Biome Light" panose="020B0303030204020804" pitchFamily="34" charset="0"/>
-              </a:rPr>
-              <a:t>K</a:t>
-            </a:r>
-            <a:r>
-              <a:rPr lang="en-US" sz="8000">
-                <a:solidFill>
-                  <a:schemeClr val="tx1"/>
-                </a:solidFill>
-                <a:latin typeface="Rastanty Cortez" panose="020F0502020204030204" pitchFamily="2" charset="0"/>
-                <a:ea typeface="Dotum" panose="020B0600000101010101" pitchFamily="34" charset="-127"/>
-                <a:cs typeface="Biome Light" panose="020B0303030204020804" pitchFamily="34" charset="0"/>
-              </a:rPr>
-              <a:t>AD - E</a:t>
-            </a:r>
-            <a:r>
-              <a:rPr lang="en-US" sz="8000">
-                <a:solidFill>
-                  <a:srgbClr val="C00000"/>
-                </a:solidFill>
-                <a:latin typeface="Rastanty Cortez" panose="020F0502020204030204" pitchFamily="2" charset="0"/>
-                <a:ea typeface="Dotum" panose="020B0600000101010101" pitchFamily="34" charset="-127"/>
-                <a:cs typeface="Biome Light" panose="020B0303030204020804" pitchFamily="34" charset="0"/>
-              </a:rPr>
-              <a:t>x</a:t>
-            </a:r>
-            <a:r>
-              <a:rPr lang="en-US" sz="8000">
-                <a:solidFill>
-                  <a:schemeClr val="tx1"/>
-                </a:solidFill>
-                <a:latin typeface="Rastanty Cortez" panose="020F0502020204030204" pitchFamily="2" charset="0"/>
-                <a:ea typeface="Dotum" panose="020B0600000101010101" pitchFamily="34" charset="-127"/>
-                <a:cs typeface="Biome Light" panose="020B0303030204020804" pitchFamily="34" charset="0"/>
-              </a:rPr>
-              <a:t>aminer</a:t>
+              <a:t>eacher</a:t>
             </a:r>
           </a:p>
         </p:txBody>
@@ -15046,8 +14903,8 @@
         </p:nvSpPr>
         <p:spPr>
           <a:xfrm>
-            <a:off x="256050" y="215925"/>
-            <a:ext cx="2592288" cy="3384376"/>
+            <a:off x="584432" y="171376"/>
+            <a:ext cx="2057447" cy="2686111"/>
           </a:xfrm>
           <a:prstGeom prst="rect">
             <a:avLst/>
@@ -15101,8 +14958,8 @@
         </p:nvSpPr>
         <p:spPr>
           <a:xfrm>
-            <a:off x="480458" y="368325"/>
-            <a:ext cx="2151856" cy="351656"/>
+            <a:off x="762540" y="292333"/>
+            <a:ext cx="1707885" cy="279102"/>
           </a:xfrm>
           <a:prstGeom prst="rect">
             <a:avLst/>
@@ -15162,8 +15019,8 @@
         </p:nvSpPr>
         <p:spPr>
           <a:xfrm>
-            <a:off x="480458" y="801150"/>
-            <a:ext cx="2151856" cy="351656"/>
+            <a:off x="762540" y="635857"/>
+            <a:ext cx="1707885" cy="279102"/>
           </a:xfrm>
           <a:prstGeom prst="rect">
             <a:avLst/>
@@ -15223,8 +15080,8 @@
         </p:nvSpPr>
         <p:spPr>
           <a:xfrm>
-            <a:off x="480458" y="1527027"/>
-            <a:ext cx="2151856" cy="351656"/>
+            <a:off x="762540" y="1211971"/>
+            <a:ext cx="1707885" cy="279102"/>
           </a:xfrm>
           <a:prstGeom prst="rect">
             <a:avLst/>
@@ -15284,8 +15141,8 @@
         </p:nvSpPr>
         <p:spPr>
           <a:xfrm>
-            <a:off x="480458" y="1956385"/>
-            <a:ext cx="2151856" cy="351656"/>
+            <a:off x="762540" y="1552744"/>
+            <a:ext cx="1707885" cy="279102"/>
           </a:xfrm>
           <a:prstGeom prst="rect">
             <a:avLst/>
@@ -15345,8 +15202,8 @@
         </p:nvSpPr>
         <p:spPr>
           <a:xfrm>
-            <a:off x="976130" y="2736205"/>
-            <a:ext cx="1152128" cy="261646"/>
+            <a:off x="1155945" y="2171671"/>
+            <a:ext cx="914421" cy="207663"/>
           </a:xfrm>
           <a:prstGeom prst="rect">
             <a:avLst/>
@@ -15382,14 +15239,14 @@
           <a:p>
             <a:pPr algn="ctr" rtl="0"/>
             <a:r>
-              <a:rPr lang="en-US" sz="1400">
+              <a:rPr lang="en-US" sz="1111">
                 <a:solidFill>
                   <a:sysClr val="windowText" lastClr="000000"/>
                 </a:solidFill>
               </a:rPr>
               <a:t>Login</a:t>
             </a:r>
-            <a:endParaRPr lang="fa-IR" sz="1400">
+            <a:endParaRPr lang="fa-IR" sz="1111">
               <a:solidFill>
                 <a:sysClr val="windowText" lastClr="000000"/>
               </a:solidFill>
@@ -15411,8 +15268,8 @@
         </p:nvGrpSpPr>
         <p:grpSpPr>
           <a:xfrm>
-            <a:off x="3095948" y="143917"/>
-            <a:ext cx="4176464" cy="8208912"/>
+            <a:off x="2838402" y="114224"/>
+            <a:ext cx="3314776" cy="6515249"/>
             <a:chOff x="3311972" y="143917"/>
             <a:chExt cx="4176464" cy="8208912"/>
           </a:xfrm>
@@ -15764,14 +15621,14 @@
             <a:p>
               <a:pPr algn="ctr" rtl="0"/>
               <a:r>
-                <a:rPr lang="en-US" sz="1400">
+                <a:rPr lang="en-US" sz="1111">
                   <a:solidFill>
                     <a:schemeClr val="accent1"/>
                   </a:solidFill>
                 </a:rPr>
                 <a:t>Entry outlook</a:t>
               </a:r>
-              <a:endParaRPr lang="fa-IR" sz="1600">
+              <a:endParaRPr lang="fa-IR" sz="1270">
                 <a:solidFill>
                   <a:schemeClr val="accent1"/>
                 </a:solidFill>
@@ -15850,7 +15707,7 @@
               <a:lstStyle/>
               <a:p>
                 <a:pPr algn="ctr"/>
-                <a:endParaRPr lang="fa-IR" sz="1200">
+                <a:endParaRPr lang="fa-IR" sz="952">
                   <a:solidFill>
                     <a:schemeClr val="tx1"/>
                   </a:solidFill>
@@ -15909,7 +15766,7 @@
               <a:lstStyle/>
               <a:p>
                 <a:pPr algn="ctr"/>
-                <a:endParaRPr lang="fa-IR" sz="1200">
+                <a:endParaRPr lang="fa-IR" sz="952">
                   <a:solidFill>
                     <a:schemeClr val="tx1"/>
                   </a:solidFill>
@@ -15968,7 +15825,7 @@
               <a:lstStyle/>
               <a:p>
                 <a:pPr algn="ctr"/>
-                <a:endParaRPr lang="fa-IR" sz="1200">
+                <a:endParaRPr lang="fa-IR" sz="952">
                   <a:solidFill>
                     <a:schemeClr val="tx1"/>
                   </a:solidFill>
@@ -16027,7 +15884,7 @@
               <a:lstStyle/>
               <a:p>
                 <a:pPr algn="ctr"/>
-                <a:endParaRPr lang="fa-IR" sz="1200">
+                <a:endParaRPr lang="fa-IR" sz="952">
                   <a:solidFill>
                     <a:schemeClr val="tx1"/>
                   </a:solidFill>
@@ -16086,7 +15943,7 @@
               <a:lstStyle/>
               <a:p>
                 <a:pPr algn="ctr"/>
-                <a:endParaRPr lang="fa-IR" sz="1200">
+                <a:endParaRPr lang="fa-IR" sz="952">
                   <a:solidFill>
                     <a:schemeClr val="tx1"/>
                   </a:solidFill>
@@ -16145,7 +16002,7 @@
               <a:lstStyle/>
               <a:p>
                 <a:pPr algn="ctr"/>
-                <a:endParaRPr lang="fa-IR" sz="1200">
+                <a:endParaRPr lang="fa-IR" sz="952">
                   <a:solidFill>
                     <a:schemeClr val="tx1"/>
                   </a:solidFill>
@@ -16204,7 +16061,7 @@
               <a:lstStyle/>
               <a:p>
                 <a:pPr algn="ctr"/>
-                <a:endParaRPr lang="fa-IR" sz="1200">
+                <a:endParaRPr lang="fa-IR" sz="952">
                   <a:solidFill>
                     <a:schemeClr val="tx1"/>
                   </a:solidFill>
@@ -16263,7 +16120,7 @@
               <a:lstStyle/>
               <a:p>
                 <a:pPr algn="ctr"/>
-                <a:endParaRPr lang="fa-IR" sz="1200">
+                <a:endParaRPr lang="fa-IR" sz="952">
                   <a:solidFill>
                     <a:schemeClr val="tx1"/>
                   </a:solidFill>
@@ -16323,7 +16180,7 @@
               <a:p>
                 <a:pPr algn="ctr"/>
                 <a:r>
-                  <a:rPr lang="fa-IR" sz="1200">
+                  <a:rPr lang="fa-IR" sz="952">
                     <a:solidFill>
                       <a:schemeClr val="tx1"/>
                     </a:solidFill>
@@ -16384,7 +16241,7 @@
               <a:lstStyle/>
               <a:p>
                 <a:pPr algn="ctr"/>
-                <a:endParaRPr lang="fa-IR" sz="1200">
+                <a:endParaRPr lang="fa-IR" sz="952">
                   <a:solidFill>
                     <a:schemeClr val="tx1"/>
                   </a:solidFill>
@@ -16443,7 +16300,7 @@
               <a:lstStyle/>
               <a:p>
                 <a:pPr algn="ctr"/>
-                <a:endParaRPr lang="fa-IR" sz="1200">
+                <a:endParaRPr lang="fa-IR" sz="952">
                   <a:solidFill>
                     <a:schemeClr val="tx1"/>
                   </a:solidFill>
@@ -16502,7 +16359,7 @@
               <a:lstStyle/>
               <a:p>
                 <a:pPr algn="ctr"/>
-                <a:endParaRPr lang="fa-IR" sz="1200">
+                <a:endParaRPr lang="fa-IR" sz="952">
                   <a:solidFill>
                     <a:schemeClr val="tx1"/>
                   </a:solidFill>
@@ -16561,7 +16418,7 @@
               <a:lstStyle/>
               <a:p>
                 <a:pPr algn="ctr"/>
-                <a:endParaRPr lang="fa-IR" sz="1200">
+                <a:endParaRPr lang="fa-IR" sz="952">
                   <a:solidFill>
                     <a:schemeClr val="tx1"/>
                   </a:solidFill>
@@ -16620,7 +16477,7 @@
               <a:lstStyle/>
               <a:p>
                 <a:pPr algn="ctr"/>
-                <a:endParaRPr lang="fa-IR" sz="1200">
+                <a:endParaRPr lang="fa-IR" sz="952">
                   <a:solidFill>
                     <a:schemeClr val="tx1"/>
                   </a:solidFill>
@@ -16679,7 +16536,7 @@
               <a:lstStyle/>
               <a:p>
                 <a:pPr algn="ctr"/>
-                <a:endParaRPr lang="fa-IR" sz="1200">
+                <a:endParaRPr lang="fa-IR" sz="952">
                   <a:solidFill>
                     <a:schemeClr val="tx1"/>
                   </a:solidFill>
@@ -16738,7 +16595,7 @@
               <a:lstStyle/>
               <a:p>
                 <a:pPr algn="ctr"/>
-                <a:endParaRPr lang="fa-IR" sz="1200">
+                <a:endParaRPr lang="fa-IR" sz="952">
                   <a:solidFill>
                     <a:schemeClr val="tx1"/>
                   </a:solidFill>
@@ -16797,7 +16654,7 @@
               <a:lstStyle/>
               <a:p>
                 <a:pPr algn="ctr"/>
-                <a:endParaRPr lang="fa-IR" sz="1200">
+                <a:endParaRPr lang="fa-IR" sz="952">
                   <a:solidFill>
                     <a:schemeClr val="tx1"/>
                   </a:solidFill>
@@ -16857,7 +16714,7 @@
               <a:p>
                 <a:pPr algn="ctr"/>
                 <a:r>
-                  <a:rPr lang="fa-IR" sz="1200">
+                  <a:rPr lang="fa-IR" sz="952">
                     <a:solidFill>
                       <a:schemeClr val="tx1"/>
                     </a:solidFill>
@@ -16918,7 +16775,7 @@
               <a:lstStyle/>
               <a:p>
                 <a:pPr algn="ctr"/>
-                <a:endParaRPr lang="fa-IR" sz="1200">
+                <a:endParaRPr lang="fa-IR" sz="952">
                   <a:solidFill>
                     <a:schemeClr val="tx1"/>
                   </a:solidFill>
@@ -16977,7 +16834,7 @@
               <a:lstStyle/>
               <a:p>
                 <a:pPr algn="ctr"/>
-                <a:endParaRPr lang="fa-IR" sz="1200">
+                <a:endParaRPr lang="fa-IR" sz="952">
                   <a:solidFill>
                     <a:schemeClr val="tx1"/>
                   </a:solidFill>
@@ -17036,7 +16893,7 @@
               <a:lstStyle/>
               <a:p>
                 <a:pPr algn="ctr"/>
-                <a:endParaRPr lang="fa-IR" sz="1200">
+                <a:endParaRPr lang="fa-IR" sz="952">
                   <a:solidFill>
                     <a:schemeClr val="tx1"/>
                   </a:solidFill>
@@ -17095,7 +16952,7 @@
               <a:lstStyle/>
               <a:p>
                 <a:pPr algn="ctr"/>
-                <a:endParaRPr lang="fa-IR" sz="1200">
+                <a:endParaRPr lang="fa-IR" sz="952">
                   <a:solidFill>
                     <a:schemeClr val="tx1"/>
                   </a:solidFill>
@@ -17154,7 +17011,7 @@
               <a:lstStyle/>
               <a:p>
                 <a:pPr algn="ctr"/>
-                <a:endParaRPr lang="fa-IR" sz="1200">
+                <a:endParaRPr lang="fa-IR" sz="952">
                   <a:solidFill>
                     <a:schemeClr val="tx1"/>
                   </a:solidFill>
@@ -17213,7 +17070,7 @@
               <a:lstStyle/>
               <a:p>
                 <a:pPr algn="ctr"/>
-                <a:endParaRPr lang="fa-IR" sz="1200">
+                <a:endParaRPr lang="fa-IR" sz="952">
                   <a:solidFill>
                     <a:schemeClr val="tx1"/>
                   </a:solidFill>
@@ -17272,7 +17129,7 @@
               <a:lstStyle/>
               <a:p>
                 <a:pPr algn="ctr"/>
-                <a:endParaRPr lang="fa-IR" sz="1200">
+                <a:endParaRPr lang="fa-IR" sz="952">
                   <a:solidFill>
                     <a:schemeClr val="tx1"/>
                   </a:solidFill>
@@ -17331,7 +17188,7 @@
               <a:lstStyle/>
               <a:p>
                 <a:pPr algn="ctr"/>
-                <a:endParaRPr lang="fa-IR" sz="1200">
+                <a:endParaRPr lang="fa-IR" sz="952">
                   <a:solidFill>
                     <a:schemeClr val="tx1"/>
                   </a:solidFill>
@@ -17391,7 +17248,7 @@
               <a:p>
                 <a:pPr algn="ctr"/>
                 <a:r>
-                  <a:rPr lang="fa-IR" sz="1200">
+                  <a:rPr lang="fa-IR" sz="952">
                     <a:solidFill>
                       <a:schemeClr val="tx1"/>
                     </a:solidFill>
@@ -17452,7 +17309,7 @@
               <a:lstStyle/>
               <a:p>
                 <a:pPr algn="ctr"/>
-                <a:endParaRPr lang="fa-IR" sz="1200">
+                <a:endParaRPr lang="fa-IR" sz="952">
                   <a:solidFill>
                     <a:schemeClr val="tx1"/>
                   </a:solidFill>
@@ -17511,7 +17368,7 @@
               <a:lstStyle/>
               <a:p>
                 <a:pPr algn="ctr"/>
-                <a:endParaRPr lang="fa-IR" sz="1200">
+                <a:endParaRPr lang="fa-IR" sz="952">
                   <a:solidFill>
                     <a:schemeClr val="tx1"/>
                   </a:solidFill>
@@ -17570,7 +17427,7 @@
               <a:lstStyle/>
               <a:p>
                 <a:pPr algn="ctr"/>
-                <a:endParaRPr lang="fa-IR" sz="1200">
+                <a:endParaRPr lang="fa-IR" sz="952">
                   <a:solidFill>
                     <a:schemeClr val="tx1"/>
                   </a:solidFill>
@@ -17629,7 +17486,7 @@
               <a:lstStyle/>
               <a:p>
                 <a:pPr algn="ctr"/>
-                <a:endParaRPr lang="fa-IR" sz="1200">
+                <a:endParaRPr lang="fa-IR" sz="952">
                   <a:solidFill>
                     <a:schemeClr val="tx1"/>
                   </a:solidFill>
@@ -17688,7 +17545,7 @@
               <a:lstStyle/>
               <a:p>
                 <a:pPr algn="ctr"/>
-                <a:endParaRPr lang="fa-IR" sz="1200">
+                <a:endParaRPr lang="fa-IR" sz="952">
                   <a:solidFill>
                     <a:schemeClr val="tx1"/>
                   </a:solidFill>
@@ -17747,7 +17604,7 @@
               <a:lstStyle/>
               <a:p>
                 <a:pPr algn="ctr"/>
-                <a:endParaRPr lang="fa-IR" sz="1200">
+                <a:endParaRPr lang="fa-IR" sz="952">
                   <a:solidFill>
                     <a:schemeClr val="tx1"/>
                   </a:solidFill>
@@ -17806,7 +17663,7 @@
               <a:lstStyle/>
               <a:p>
                 <a:pPr algn="ctr"/>
-                <a:endParaRPr lang="fa-IR" sz="1200">
+                <a:endParaRPr lang="fa-IR" sz="952">
                   <a:solidFill>
                     <a:schemeClr val="tx1"/>
                   </a:solidFill>
@@ -17865,7 +17722,7 @@
               <a:lstStyle/>
               <a:p>
                 <a:pPr algn="ctr"/>
-                <a:endParaRPr lang="fa-IR" sz="1200">
+                <a:endParaRPr lang="fa-IR" sz="952">
                   <a:solidFill>
                     <a:schemeClr val="tx1"/>
                   </a:solidFill>
@@ -17925,7 +17782,7 @@
               <a:p>
                 <a:pPr algn="ctr"/>
                 <a:r>
-                  <a:rPr lang="fa-IR" sz="1200">
+                  <a:rPr lang="fa-IR" sz="952">
                     <a:solidFill>
                       <a:schemeClr val="tx1"/>
                     </a:solidFill>
@@ -17986,7 +17843,7 @@
               <a:lstStyle/>
               <a:p>
                 <a:pPr algn="ctr"/>
-                <a:endParaRPr lang="fa-IR" sz="1200">
+                <a:endParaRPr lang="fa-IR" sz="952">
                   <a:solidFill>
                     <a:schemeClr val="tx1"/>
                   </a:solidFill>
@@ -18045,7 +17902,7 @@
               <a:lstStyle/>
               <a:p>
                 <a:pPr algn="ctr"/>
-                <a:endParaRPr lang="fa-IR" sz="1200">
+                <a:endParaRPr lang="fa-IR" sz="952">
                   <a:solidFill>
                     <a:schemeClr val="tx1"/>
                   </a:solidFill>
@@ -18104,7 +17961,7 @@
               <a:lstStyle/>
               <a:p>
                 <a:pPr algn="ctr"/>
-                <a:endParaRPr lang="fa-IR" sz="1200">
+                <a:endParaRPr lang="fa-IR" sz="952">
                   <a:solidFill>
                     <a:schemeClr val="tx1"/>
                   </a:solidFill>
@@ -18163,7 +18020,7 @@
               <a:lstStyle/>
               <a:p>
                 <a:pPr algn="ctr"/>
-                <a:endParaRPr lang="fa-IR" sz="1200">
+                <a:endParaRPr lang="fa-IR" sz="952">
                   <a:solidFill>
                     <a:schemeClr val="tx1"/>
                   </a:solidFill>
@@ -18222,7 +18079,7 @@
               <a:lstStyle/>
               <a:p>
                 <a:pPr algn="ctr"/>
-                <a:endParaRPr lang="fa-IR" sz="1200">
+                <a:endParaRPr lang="fa-IR" sz="952">
                   <a:solidFill>
                     <a:schemeClr val="tx1"/>
                   </a:solidFill>
@@ -18281,7 +18138,7 @@
               <a:lstStyle/>
               <a:p>
                 <a:pPr algn="ctr"/>
-                <a:endParaRPr lang="fa-IR" sz="1200">
+                <a:endParaRPr lang="fa-IR" sz="952">
                   <a:solidFill>
                     <a:schemeClr val="tx1"/>
                   </a:solidFill>
@@ -18340,7 +18197,7 @@
               <a:lstStyle/>
               <a:p>
                 <a:pPr algn="ctr"/>
-                <a:endParaRPr lang="fa-IR" sz="1200">
+                <a:endParaRPr lang="fa-IR" sz="952">
                   <a:solidFill>
                     <a:schemeClr val="tx1"/>
                   </a:solidFill>
@@ -18399,7 +18256,7 @@
               <a:lstStyle/>
               <a:p>
                 <a:pPr algn="ctr"/>
-                <a:endParaRPr lang="fa-IR" sz="1200">
+                <a:endParaRPr lang="fa-IR" sz="952">
                   <a:solidFill>
                     <a:schemeClr val="tx1"/>
                   </a:solidFill>
@@ -18459,7 +18316,7 @@
               <a:p>
                 <a:pPr algn="ctr"/>
                 <a:r>
-                  <a:rPr lang="fa-IR" sz="1200">
+                  <a:rPr lang="fa-IR" sz="952">
                     <a:solidFill>
                       <a:schemeClr val="tx1"/>
                     </a:solidFill>
@@ -18545,7 +18402,7 @@
               <a:lstStyle/>
               <a:p>
                 <a:pPr algn="ctr"/>
-                <a:endParaRPr lang="fa-IR" sz="1200">
+                <a:endParaRPr lang="fa-IR" sz="952">
                   <a:solidFill>
                     <a:schemeClr val="tx1"/>
                   </a:solidFill>
@@ -18608,7 +18465,7 @@
               <a:lstStyle/>
               <a:p>
                 <a:pPr algn="ctr"/>
-                <a:endParaRPr lang="fa-IR" sz="1200">
+                <a:endParaRPr lang="fa-IR" sz="952">
                   <a:solidFill>
                     <a:schemeClr val="tx1"/>
                   </a:solidFill>
@@ -18671,7 +18528,7 @@
               <a:lstStyle/>
               <a:p>
                 <a:pPr algn="ctr"/>
-                <a:endParaRPr lang="fa-IR" sz="1200">
+                <a:endParaRPr lang="fa-IR" sz="952">
                   <a:solidFill>
                     <a:schemeClr val="tx1"/>
                   </a:solidFill>
@@ -18734,7 +18591,7 @@
               <a:lstStyle/>
               <a:p>
                 <a:pPr algn="ctr"/>
-                <a:endParaRPr lang="fa-IR" sz="1200">
+                <a:endParaRPr lang="fa-IR" sz="952">
                   <a:solidFill>
                     <a:schemeClr val="tx1"/>
                   </a:solidFill>
@@ -18797,7 +18654,7 @@
               <a:lstStyle/>
               <a:p>
                 <a:pPr algn="ctr"/>
-                <a:endParaRPr lang="fa-IR" sz="1200">
+                <a:endParaRPr lang="fa-IR" sz="952">
                   <a:solidFill>
                     <a:schemeClr val="tx1"/>
                   </a:solidFill>
@@ -18860,7 +18717,7 @@
               <a:lstStyle/>
               <a:p>
                 <a:pPr algn="ctr"/>
-                <a:endParaRPr lang="fa-IR" sz="1200">
+                <a:endParaRPr lang="fa-IR" sz="952">
                   <a:solidFill>
                     <a:schemeClr val="tx1"/>
                   </a:solidFill>
@@ -18923,7 +18780,7 @@
               <a:lstStyle/>
               <a:p>
                 <a:pPr algn="ctr"/>
-                <a:endParaRPr lang="fa-IR" sz="1200">
+                <a:endParaRPr lang="fa-IR" sz="952">
                   <a:solidFill>
                     <a:schemeClr val="tx1"/>
                   </a:solidFill>
@@ -18986,7 +18843,7 @@
               <a:lstStyle/>
               <a:p>
                 <a:pPr algn="ctr"/>
-                <a:endParaRPr lang="fa-IR" sz="1200">
+                <a:endParaRPr lang="fa-IR" sz="952">
                   <a:solidFill>
                     <a:schemeClr val="tx1"/>
                   </a:solidFill>
@@ -19050,7 +18907,7 @@
               <a:p>
                 <a:pPr algn="ctr"/>
                 <a:r>
-                  <a:rPr lang="fa-IR" sz="1200">
+                  <a:rPr lang="fa-IR" sz="952">
                     <a:solidFill>
                       <a:schemeClr val="tx1"/>
                     </a:solidFill>
@@ -19115,7 +18972,7 @@
               <a:lstStyle/>
               <a:p>
                 <a:pPr algn="ctr"/>
-                <a:endParaRPr lang="fa-IR" sz="1200">
+                <a:endParaRPr lang="fa-IR" sz="952">
                   <a:solidFill>
                     <a:schemeClr val="tx1"/>
                   </a:solidFill>
@@ -19178,7 +19035,7 @@
               <a:lstStyle/>
               <a:p>
                 <a:pPr algn="ctr"/>
-                <a:endParaRPr lang="fa-IR" sz="1200">
+                <a:endParaRPr lang="fa-IR" sz="952">
                   <a:solidFill>
                     <a:schemeClr val="tx1"/>
                   </a:solidFill>
@@ -19241,7 +19098,7 @@
               <a:lstStyle/>
               <a:p>
                 <a:pPr algn="ctr"/>
-                <a:endParaRPr lang="fa-IR" sz="1200">
+                <a:endParaRPr lang="fa-IR" sz="952">
                   <a:solidFill>
                     <a:schemeClr val="tx1"/>
                   </a:solidFill>
@@ -19304,7 +19161,7 @@
               <a:lstStyle/>
               <a:p>
                 <a:pPr algn="ctr"/>
-                <a:endParaRPr lang="fa-IR" sz="1200">
+                <a:endParaRPr lang="fa-IR" sz="952">
                   <a:solidFill>
                     <a:schemeClr val="tx1"/>
                   </a:solidFill>
@@ -19367,7 +19224,7 @@
               <a:lstStyle/>
               <a:p>
                 <a:pPr algn="ctr"/>
-                <a:endParaRPr lang="fa-IR" sz="1200">
+                <a:endParaRPr lang="fa-IR" sz="952">
                   <a:solidFill>
                     <a:schemeClr val="tx1"/>
                   </a:solidFill>
@@ -19430,7 +19287,7 @@
               <a:lstStyle/>
               <a:p>
                 <a:pPr algn="ctr"/>
-                <a:endParaRPr lang="fa-IR" sz="1200">
+                <a:endParaRPr lang="fa-IR" sz="952">
                   <a:solidFill>
                     <a:schemeClr val="tx1"/>
                   </a:solidFill>
@@ -19493,7 +19350,7 @@
               <a:lstStyle/>
               <a:p>
                 <a:pPr algn="ctr"/>
-                <a:endParaRPr lang="fa-IR" sz="1200">
+                <a:endParaRPr lang="fa-IR" sz="952">
                   <a:solidFill>
                     <a:schemeClr val="tx1"/>
                   </a:solidFill>
@@ -19556,7 +19413,7 @@
               <a:lstStyle/>
               <a:p>
                 <a:pPr algn="ctr"/>
-                <a:endParaRPr lang="fa-IR" sz="1200">
+                <a:endParaRPr lang="fa-IR" sz="952">
                   <a:solidFill>
                     <a:schemeClr val="tx1"/>
                   </a:solidFill>
@@ -19620,7 +19477,7 @@
               <a:p>
                 <a:pPr algn="ctr"/>
                 <a:r>
-                  <a:rPr lang="fa-IR" sz="1200">
+                  <a:rPr lang="fa-IR" sz="952">
                     <a:solidFill>
                       <a:schemeClr val="tx1"/>
                     </a:solidFill>
@@ -19685,7 +19542,7 @@
               <a:lstStyle/>
               <a:p>
                 <a:pPr algn="ctr"/>
-                <a:endParaRPr lang="fa-IR" sz="1200">
+                <a:endParaRPr lang="fa-IR" sz="952">
                   <a:solidFill>
                     <a:schemeClr val="tx1"/>
                   </a:solidFill>
@@ -19748,7 +19605,7 @@
               <a:lstStyle/>
               <a:p>
                 <a:pPr algn="ctr"/>
-                <a:endParaRPr lang="fa-IR" sz="1200">
+                <a:endParaRPr lang="fa-IR" sz="952">
                   <a:solidFill>
                     <a:schemeClr val="tx1"/>
                   </a:solidFill>
@@ -19811,7 +19668,7 @@
               <a:lstStyle/>
               <a:p>
                 <a:pPr algn="ctr"/>
-                <a:endParaRPr lang="fa-IR" sz="1200">
+                <a:endParaRPr lang="fa-IR" sz="952">
                   <a:solidFill>
                     <a:schemeClr val="tx1"/>
                   </a:solidFill>
@@ -19874,7 +19731,7 @@
               <a:lstStyle/>
               <a:p>
                 <a:pPr algn="ctr"/>
-                <a:endParaRPr lang="fa-IR" sz="1200">
+                <a:endParaRPr lang="fa-IR" sz="952">
                   <a:solidFill>
                     <a:schemeClr val="tx1"/>
                   </a:solidFill>
@@ -19937,7 +19794,7 @@
               <a:lstStyle/>
               <a:p>
                 <a:pPr algn="ctr"/>
-                <a:endParaRPr lang="fa-IR" sz="1200">
+                <a:endParaRPr lang="fa-IR" sz="952">
                   <a:solidFill>
                     <a:schemeClr val="tx1"/>
                   </a:solidFill>
@@ -20000,7 +19857,7 @@
               <a:lstStyle/>
               <a:p>
                 <a:pPr algn="ctr"/>
-                <a:endParaRPr lang="fa-IR" sz="1200">
+                <a:endParaRPr lang="fa-IR" sz="952">
                   <a:solidFill>
                     <a:schemeClr val="tx1"/>
                   </a:solidFill>
@@ -20063,7 +19920,7 @@
               <a:lstStyle/>
               <a:p>
                 <a:pPr algn="ctr"/>
-                <a:endParaRPr lang="fa-IR" sz="1200">
+                <a:endParaRPr lang="fa-IR" sz="952">
                   <a:solidFill>
                     <a:schemeClr val="tx1"/>
                   </a:solidFill>
@@ -20126,7 +19983,7 @@
               <a:lstStyle/>
               <a:p>
                 <a:pPr algn="ctr"/>
-                <a:endParaRPr lang="fa-IR" sz="1200">
+                <a:endParaRPr lang="fa-IR" sz="952">
                   <a:solidFill>
                     <a:schemeClr val="tx1"/>
                   </a:solidFill>
@@ -20190,7 +20047,7 @@
               <a:p>
                 <a:pPr algn="ctr"/>
                 <a:r>
-                  <a:rPr lang="fa-IR" sz="1200">
+                  <a:rPr lang="fa-IR" sz="952">
                     <a:solidFill>
                       <a:schemeClr val="tx1"/>
                     </a:solidFill>
@@ -20255,7 +20112,7 @@
               <a:lstStyle/>
               <a:p>
                 <a:pPr algn="ctr"/>
-                <a:endParaRPr lang="fa-IR" sz="1200">
+                <a:endParaRPr lang="fa-IR" sz="952">
                   <a:solidFill>
                     <a:schemeClr val="tx1"/>
                   </a:solidFill>
@@ -20318,7 +20175,7 @@
               <a:lstStyle/>
               <a:p>
                 <a:pPr algn="ctr"/>
-                <a:endParaRPr lang="fa-IR" sz="1200">
+                <a:endParaRPr lang="fa-IR" sz="952">
                   <a:solidFill>
                     <a:schemeClr val="tx1"/>
                   </a:solidFill>
@@ -20381,7 +20238,7 @@
               <a:lstStyle/>
               <a:p>
                 <a:pPr algn="ctr"/>
-                <a:endParaRPr lang="fa-IR" sz="1200">
+                <a:endParaRPr lang="fa-IR" sz="952">
                   <a:solidFill>
                     <a:schemeClr val="tx1"/>
                   </a:solidFill>
@@ -20444,7 +20301,7 @@
               <a:lstStyle/>
               <a:p>
                 <a:pPr algn="ctr"/>
-                <a:endParaRPr lang="fa-IR" sz="1200">
+                <a:endParaRPr lang="fa-IR" sz="952">
                   <a:solidFill>
                     <a:schemeClr val="tx1"/>
                   </a:solidFill>
@@ -20507,7 +20364,7 @@
               <a:lstStyle/>
               <a:p>
                 <a:pPr algn="ctr"/>
-                <a:endParaRPr lang="fa-IR" sz="1200">
+                <a:endParaRPr lang="fa-IR" sz="952">
                   <a:solidFill>
                     <a:schemeClr val="tx1"/>
                   </a:solidFill>
@@ -20570,7 +20427,7 @@
               <a:lstStyle/>
               <a:p>
                 <a:pPr algn="ctr"/>
-                <a:endParaRPr lang="fa-IR" sz="1200">
+                <a:endParaRPr lang="fa-IR" sz="952">
                   <a:solidFill>
                     <a:schemeClr val="tx1"/>
                   </a:solidFill>
@@ -20633,7 +20490,7 @@
               <a:lstStyle/>
               <a:p>
                 <a:pPr algn="ctr"/>
-                <a:endParaRPr lang="fa-IR" sz="1200">
+                <a:endParaRPr lang="fa-IR" sz="952">
                   <a:solidFill>
                     <a:schemeClr val="tx1"/>
                   </a:solidFill>
@@ -20696,7 +20553,7 @@
               <a:lstStyle/>
               <a:p>
                 <a:pPr algn="ctr"/>
-                <a:endParaRPr lang="fa-IR" sz="1200">
+                <a:endParaRPr lang="fa-IR" sz="952">
                   <a:solidFill>
                     <a:schemeClr val="tx1"/>
                   </a:solidFill>
@@ -20760,7 +20617,7 @@
               <a:p>
                 <a:pPr algn="ctr"/>
                 <a:r>
-                  <a:rPr lang="fa-IR" sz="1200">
+                  <a:rPr lang="fa-IR" sz="952">
                     <a:solidFill>
                       <a:schemeClr val="tx1"/>
                     </a:solidFill>
@@ -20825,7 +20682,7 @@
               <a:lstStyle/>
               <a:p>
                 <a:pPr algn="ctr"/>
-                <a:endParaRPr lang="fa-IR" sz="1200">
+                <a:endParaRPr lang="fa-IR" sz="952">
                   <a:solidFill>
                     <a:schemeClr val="tx1"/>
                   </a:solidFill>
@@ -20888,7 +20745,7 @@
               <a:lstStyle/>
               <a:p>
                 <a:pPr algn="ctr"/>
-                <a:endParaRPr lang="fa-IR" sz="1200">
+                <a:endParaRPr lang="fa-IR" sz="952">
                   <a:solidFill>
                     <a:schemeClr val="tx1"/>
                   </a:solidFill>
@@ -20951,7 +20808,7 @@
               <a:lstStyle/>
               <a:p>
                 <a:pPr algn="ctr"/>
-                <a:endParaRPr lang="fa-IR" sz="1200">
+                <a:endParaRPr lang="fa-IR" sz="952">
                   <a:solidFill>
                     <a:schemeClr val="tx1"/>
                   </a:solidFill>
@@ -21014,7 +20871,7 @@
               <a:lstStyle/>
               <a:p>
                 <a:pPr algn="ctr"/>
-                <a:endParaRPr lang="fa-IR" sz="1200">
+                <a:endParaRPr lang="fa-IR" sz="952">
                   <a:solidFill>
                     <a:schemeClr val="tx1"/>
                   </a:solidFill>
@@ -21077,7 +20934,7 @@
               <a:lstStyle/>
               <a:p>
                 <a:pPr algn="ctr"/>
-                <a:endParaRPr lang="fa-IR" sz="1200">
+                <a:endParaRPr lang="fa-IR" sz="952">
                   <a:solidFill>
                     <a:schemeClr val="tx1"/>
                   </a:solidFill>
@@ -21140,7 +20997,7 @@
               <a:lstStyle/>
               <a:p>
                 <a:pPr algn="ctr"/>
-                <a:endParaRPr lang="fa-IR" sz="1200">
+                <a:endParaRPr lang="fa-IR" sz="952">
                   <a:solidFill>
                     <a:schemeClr val="tx1"/>
                   </a:solidFill>
@@ -21203,7 +21060,7 @@
               <a:lstStyle/>
               <a:p>
                 <a:pPr algn="ctr"/>
-                <a:endParaRPr lang="fa-IR" sz="1200">
+                <a:endParaRPr lang="fa-IR" sz="952">
                   <a:solidFill>
                     <a:schemeClr val="tx1"/>
                   </a:solidFill>
@@ -21266,7 +21123,7 @@
               <a:lstStyle/>
               <a:p>
                 <a:pPr algn="ctr"/>
-                <a:endParaRPr lang="fa-IR" sz="1200">
+                <a:endParaRPr lang="fa-IR" sz="952">
                   <a:solidFill>
                     <a:schemeClr val="tx1"/>
                   </a:solidFill>
@@ -21330,7 +21187,7 @@
               <a:p>
                 <a:pPr algn="ctr"/>
                 <a:r>
-                  <a:rPr lang="fa-IR" sz="1200">
+                  <a:rPr lang="fa-IR" sz="952">
                     <a:solidFill>
                       <a:schemeClr val="tx1"/>
                     </a:solidFill>
@@ -21417,7 +21274,7 @@
               <a:p>
                 <a:pPr algn="ctr"/>
                 <a:r>
-                  <a:rPr lang="fa-IR" sz="1100">
+                  <a:rPr lang="fa-IR" sz="873">
                     <a:solidFill>
                       <a:schemeClr val="tx1"/>
                     </a:solidFill>
@@ -21483,7 +21340,7 @@
               <a:p>
                 <a:pPr algn="ctr"/>
                 <a:r>
-                  <a:rPr lang="fa-IR" sz="1100">
+                  <a:rPr lang="fa-IR" sz="873">
                     <a:solidFill>
                       <a:schemeClr val="tx1"/>
                     </a:solidFill>
@@ -21548,7 +21405,7 @@
               <a:lstStyle/>
               <a:p>
                 <a:pPr algn="ctr"/>
-                <a:endParaRPr lang="fa-IR" sz="1100">
+                <a:endParaRPr lang="fa-IR" sz="873">
                   <a:solidFill>
                     <a:schemeClr val="tx1"/>
                   </a:solidFill>
@@ -21611,7 +21468,7 @@
               <a:lstStyle/>
               <a:p>
                 <a:pPr algn="ctr"/>
-                <a:endParaRPr lang="fa-IR" sz="1100">
+                <a:endParaRPr lang="fa-IR" sz="873">
                   <a:solidFill>
                     <a:schemeClr val="tx1"/>
                   </a:solidFill>
@@ -21674,7 +21531,7 @@
               <a:lstStyle/>
               <a:p>
                 <a:pPr algn="ctr"/>
-                <a:endParaRPr lang="fa-IR" sz="1100">
+                <a:endParaRPr lang="fa-IR" sz="873">
                   <a:solidFill>
                     <a:schemeClr val="tx1"/>
                   </a:solidFill>
@@ -21737,7 +21594,7 @@
               <a:lstStyle/>
               <a:p>
                 <a:pPr algn="ctr"/>
-                <a:endParaRPr lang="fa-IR" sz="1100">
+                <a:endParaRPr lang="fa-IR" sz="873">
                   <a:solidFill>
                     <a:schemeClr val="tx1"/>
                   </a:solidFill>
@@ -21800,7 +21657,7 @@
               <a:lstStyle/>
               <a:p>
                 <a:pPr algn="ctr"/>
-                <a:endParaRPr lang="fa-IR" sz="1100">
+                <a:endParaRPr lang="fa-IR" sz="873">
                   <a:solidFill>
                     <a:schemeClr val="tx1"/>
                   </a:solidFill>
@@ -21863,7 +21720,7 @@
               <a:lstStyle/>
               <a:p>
                 <a:pPr algn="ctr"/>
-                <a:endParaRPr lang="fa-IR" sz="1100">
+                <a:endParaRPr lang="fa-IR" sz="873">
                   <a:solidFill>
                     <a:schemeClr val="tx1"/>
                   </a:solidFill>
@@ -21926,7 +21783,7 @@
               <a:lstStyle/>
               <a:p>
                 <a:pPr algn="ctr"/>
-                <a:endParaRPr lang="fa-IR" sz="1100">
+                <a:endParaRPr lang="fa-IR" sz="873">
                   <a:solidFill>
                     <a:schemeClr val="tx1"/>
                   </a:solidFill>
@@ -21989,7 +21846,7 @@
               <a:lstStyle/>
               <a:p>
                 <a:pPr algn="ctr"/>
-                <a:endParaRPr lang="fa-IR" sz="1100">
+                <a:endParaRPr lang="fa-IR" sz="873">
                   <a:solidFill>
                     <a:schemeClr val="tx1"/>
                   </a:solidFill>
@@ -22053,7 +21910,7 @@
               <a:p>
                 <a:pPr algn="ctr"/>
                 <a:r>
-                  <a:rPr lang="fa-IR" sz="1100">
+                  <a:rPr lang="fa-IR" sz="873">
                     <a:solidFill>
                       <a:schemeClr val="tx1"/>
                     </a:solidFill>
@@ -22118,7 +21975,7 @@
               <a:lstStyle/>
               <a:p>
                 <a:pPr algn="ctr"/>
-                <a:endParaRPr lang="fa-IR" sz="1100">
+                <a:endParaRPr lang="fa-IR" sz="873">
                   <a:solidFill>
                     <a:schemeClr val="tx1"/>
                   </a:solidFill>
@@ -22181,7 +22038,7 @@
               <a:lstStyle/>
               <a:p>
                 <a:pPr algn="ctr"/>
-                <a:endParaRPr lang="fa-IR" sz="1100">
+                <a:endParaRPr lang="fa-IR" sz="873">
                   <a:solidFill>
                     <a:schemeClr val="tx1"/>
                   </a:solidFill>
@@ -22244,7 +22101,7 @@
               <a:lstStyle/>
               <a:p>
                 <a:pPr algn="ctr"/>
-                <a:endParaRPr lang="fa-IR" sz="1100">
+                <a:endParaRPr lang="fa-IR" sz="873">
                   <a:solidFill>
                     <a:schemeClr val="tx1"/>
                   </a:solidFill>
@@ -22307,7 +22164,7 @@
               <a:lstStyle/>
               <a:p>
                 <a:pPr algn="ctr"/>
-                <a:endParaRPr lang="fa-IR" sz="1100">
+                <a:endParaRPr lang="fa-IR" sz="873">
                   <a:solidFill>
                     <a:schemeClr val="tx1"/>
                   </a:solidFill>
@@ -22371,7 +22228,7 @@
               <a:p>
                 <a:pPr algn="ctr"/>
                 <a:r>
-                  <a:rPr lang="fa-IR" sz="1100">
+                  <a:rPr lang="fa-IR" sz="873">
                     <a:solidFill>
                       <a:schemeClr val="tx1"/>
                     </a:solidFill>
@@ -22436,7 +22293,7 @@
               <a:lstStyle/>
               <a:p>
                 <a:pPr algn="ctr"/>
-                <a:endParaRPr lang="fa-IR" sz="1100">
+                <a:endParaRPr lang="fa-IR" sz="873">
                   <a:solidFill>
                     <a:schemeClr val="tx1"/>
                   </a:solidFill>
@@ -22499,7 +22356,7 @@
               <a:lstStyle/>
               <a:p>
                 <a:pPr algn="ctr"/>
-                <a:endParaRPr lang="fa-IR" sz="1100">
+                <a:endParaRPr lang="fa-IR" sz="873">
                   <a:solidFill>
                     <a:schemeClr val="tx1"/>
                   </a:solidFill>
@@ -22562,7 +22419,7 @@
               <a:lstStyle/>
               <a:p>
                 <a:pPr algn="ctr"/>
-                <a:endParaRPr lang="fa-IR" sz="1100">
+                <a:endParaRPr lang="fa-IR" sz="873">
                   <a:solidFill>
                     <a:schemeClr val="tx1"/>
                   </a:solidFill>
@@ -22625,7 +22482,7 @@
               <a:lstStyle/>
               <a:p>
                 <a:pPr algn="ctr"/>
-                <a:endParaRPr lang="fa-IR" sz="1100">
+                <a:endParaRPr lang="fa-IR" sz="873">
                   <a:solidFill>
                     <a:schemeClr val="tx1"/>
                   </a:solidFill>
@@ -22689,7 +22546,7 @@
               <a:p>
                 <a:pPr algn="ctr"/>
                 <a:r>
-                  <a:rPr lang="fa-IR" sz="1100">
+                  <a:rPr lang="fa-IR" sz="873">
                     <a:solidFill>
                       <a:schemeClr val="tx1"/>
                     </a:solidFill>
@@ -22754,7 +22611,7 @@
               <a:lstStyle/>
               <a:p>
                 <a:pPr algn="ctr"/>
-                <a:endParaRPr lang="fa-IR" sz="1100">
+                <a:endParaRPr lang="fa-IR" sz="873">
                   <a:solidFill>
                     <a:schemeClr val="tx1"/>
                   </a:solidFill>
@@ -22817,7 +22674,7 @@
               <a:lstStyle/>
               <a:p>
                 <a:pPr algn="ctr"/>
-                <a:endParaRPr lang="fa-IR" sz="1100">
+                <a:endParaRPr lang="fa-IR" sz="873">
                   <a:solidFill>
                     <a:schemeClr val="tx1"/>
                   </a:solidFill>
@@ -22880,7 +22737,7 @@
               <a:lstStyle/>
               <a:p>
                 <a:pPr algn="ctr"/>
-                <a:endParaRPr lang="fa-IR" sz="1100">
+                <a:endParaRPr lang="fa-IR" sz="873">
                   <a:solidFill>
                     <a:schemeClr val="tx1"/>
                   </a:solidFill>
@@ -22943,7 +22800,7 @@
               <a:lstStyle/>
               <a:p>
                 <a:pPr algn="ctr"/>
-                <a:endParaRPr lang="fa-IR" sz="1100">
+                <a:endParaRPr lang="fa-IR" sz="873">
                   <a:solidFill>
                     <a:schemeClr val="tx1"/>
                   </a:solidFill>
@@ -23006,7 +22863,7 @@
               <a:lstStyle/>
               <a:p>
                 <a:pPr algn="ctr"/>
-                <a:endParaRPr lang="fa-IR" sz="1100">
+                <a:endParaRPr lang="fa-IR" sz="873">
                   <a:solidFill>
                     <a:schemeClr val="tx1"/>
                   </a:solidFill>
@@ -23069,7 +22926,7 @@
               <a:lstStyle/>
               <a:p>
                 <a:pPr algn="ctr"/>
-                <a:endParaRPr lang="fa-IR" sz="1100">
+                <a:endParaRPr lang="fa-IR" sz="873">
                   <a:solidFill>
                     <a:schemeClr val="tx1"/>
                   </a:solidFill>
@@ -23132,7 +22989,7 @@
               <a:lstStyle/>
               <a:p>
                 <a:pPr algn="ctr"/>
-                <a:endParaRPr lang="fa-IR" sz="1100">
+                <a:endParaRPr lang="fa-IR" sz="873">
                   <a:solidFill>
                     <a:schemeClr val="tx1"/>
                   </a:solidFill>
@@ -23195,7 +23052,7 @@
               <a:lstStyle/>
               <a:p>
                 <a:pPr algn="ctr"/>
-                <a:endParaRPr lang="fa-IR" sz="1100">
+                <a:endParaRPr lang="fa-IR" sz="873">
                   <a:solidFill>
                     <a:schemeClr val="tx1"/>
                   </a:solidFill>
@@ -23258,7 +23115,7 @@
               <a:lstStyle/>
               <a:p>
                 <a:pPr algn="ctr"/>
-                <a:endParaRPr lang="fa-IR" sz="1100">
+                <a:endParaRPr lang="fa-IR" sz="873">
                   <a:solidFill>
                     <a:schemeClr val="tx1"/>
                   </a:solidFill>
@@ -23321,7 +23178,7 @@
               <a:lstStyle/>
               <a:p>
                 <a:pPr algn="ctr"/>
-                <a:endParaRPr lang="fa-IR" sz="1100">
+                <a:endParaRPr lang="fa-IR" sz="873">
                   <a:solidFill>
                     <a:schemeClr val="tx1"/>
                   </a:solidFill>
@@ -23384,7 +23241,7 @@
               <a:lstStyle/>
               <a:p>
                 <a:pPr algn="ctr"/>
-                <a:endParaRPr lang="fa-IR" sz="1100">
+                <a:endParaRPr lang="fa-IR" sz="873">
                   <a:solidFill>
                     <a:schemeClr val="tx1"/>
                   </a:solidFill>
@@ -23447,7 +23304,7 @@
               <a:lstStyle/>
               <a:p>
                 <a:pPr algn="ctr"/>
-                <a:endParaRPr lang="fa-IR" sz="1100">
+                <a:endParaRPr lang="fa-IR" sz="873">
                   <a:solidFill>
                     <a:schemeClr val="tx1"/>
                   </a:solidFill>
@@ -23510,7 +23367,7 @@
               <a:lstStyle/>
               <a:p>
                 <a:pPr algn="ctr"/>
-                <a:endParaRPr lang="fa-IR" sz="1100">
+                <a:endParaRPr lang="fa-IR" sz="873">
                   <a:solidFill>
                     <a:schemeClr val="tx1"/>
                   </a:solidFill>
@@ -23573,7 +23430,7 @@
               <a:lstStyle/>
               <a:p>
                 <a:pPr algn="ctr"/>
-                <a:endParaRPr lang="fa-IR" sz="1100">
+                <a:endParaRPr lang="fa-IR" sz="873">
                   <a:solidFill>
                     <a:schemeClr val="tx1"/>
                   </a:solidFill>
@@ -23636,7 +23493,7 @@
               <a:lstStyle/>
               <a:p>
                 <a:pPr algn="ctr"/>
-                <a:endParaRPr lang="fa-IR" sz="1100">
+                <a:endParaRPr lang="fa-IR" sz="873">
                   <a:solidFill>
                     <a:schemeClr val="tx1"/>
                   </a:solidFill>
@@ -23699,7 +23556,7 @@
               <a:lstStyle/>
               <a:p>
                 <a:pPr algn="ctr"/>
-                <a:endParaRPr lang="fa-IR" sz="1100">
+                <a:endParaRPr lang="fa-IR" sz="873">
                   <a:solidFill>
                     <a:schemeClr val="tx1"/>
                   </a:solidFill>
@@ -23762,7 +23619,7 @@
               <a:lstStyle/>
               <a:p>
                 <a:pPr algn="ctr"/>
-                <a:endParaRPr lang="fa-IR" sz="1100">
+                <a:endParaRPr lang="fa-IR" sz="873">
                   <a:solidFill>
                     <a:schemeClr val="tx1"/>
                   </a:solidFill>
@@ -23825,7 +23682,7 @@
               <a:lstStyle/>
               <a:p>
                 <a:pPr algn="ctr"/>
-                <a:endParaRPr lang="fa-IR" sz="1100">
+                <a:endParaRPr lang="fa-IR" sz="873">
                   <a:solidFill>
                     <a:schemeClr val="tx1"/>
                   </a:solidFill>
@@ -23888,7 +23745,7 @@
               <a:lstStyle/>
               <a:p>
                 <a:pPr algn="ctr"/>
-                <a:endParaRPr lang="fa-IR" sz="1100">
+                <a:endParaRPr lang="fa-IR" sz="873">
                   <a:solidFill>
                     <a:schemeClr val="tx1"/>
                   </a:solidFill>
@@ -23951,7 +23808,7 @@
               <a:lstStyle/>
               <a:p>
                 <a:pPr algn="ctr"/>
-                <a:endParaRPr lang="fa-IR" sz="1100">
+                <a:endParaRPr lang="fa-IR" sz="873">
                   <a:solidFill>
                     <a:schemeClr val="tx1"/>
                   </a:solidFill>
@@ -24014,7 +23871,7 @@
               <a:lstStyle/>
               <a:p>
                 <a:pPr algn="ctr"/>
-                <a:endParaRPr lang="fa-IR" sz="1100">
+                <a:endParaRPr lang="fa-IR" sz="873">
                   <a:solidFill>
                     <a:schemeClr val="tx1"/>
                   </a:solidFill>
@@ -24077,7 +23934,7 @@
               <a:lstStyle/>
               <a:p>
                 <a:pPr algn="ctr"/>
-                <a:endParaRPr lang="fa-IR" sz="1100">
+                <a:endParaRPr lang="fa-IR" sz="873">
                   <a:solidFill>
                     <a:schemeClr val="tx1"/>
                   </a:solidFill>
@@ -24140,7 +23997,7 @@
               <a:lstStyle/>
               <a:p>
                 <a:pPr algn="ctr"/>
-                <a:endParaRPr lang="fa-IR" sz="1100">
+                <a:endParaRPr lang="fa-IR" sz="873">
                   <a:solidFill>
                     <a:schemeClr val="tx1"/>
                   </a:solidFill>
@@ -24203,7 +24060,7 @@
               <a:lstStyle/>
               <a:p>
                 <a:pPr algn="ctr"/>
-                <a:endParaRPr lang="fa-IR" sz="1100">
+                <a:endParaRPr lang="fa-IR" sz="873">
                   <a:solidFill>
                     <a:schemeClr val="tx1"/>
                   </a:solidFill>
@@ -24266,7 +24123,7 @@
               <a:lstStyle/>
               <a:p>
                 <a:pPr algn="ctr"/>
-                <a:endParaRPr lang="fa-IR" sz="1100">
+                <a:endParaRPr lang="fa-IR" sz="873">
                   <a:solidFill>
                     <a:schemeClr val="tx1"/>
                   </a:solidFill>
@@ -24329,7 +24186,7 @@
               <a:lstStyle/>
               <a:p>
                 <a:pPr algn="ctr"/>
-                <a:endParaRPr lang="fa-IR" sz="1100">
+                <a:endParaRPr lang="fa-IR" sz="873">
                   <a:solidFill>
                     <a:schemeClr val="tx1"/>
                   </a:solidFill>
@@ -24392,7 +24249,7 @@
               <a:lstStyle/>
               <a:p>
                 <a:pPr algn="ctr"/>
-                <a:endParaRPr lang="fa-IR" sz="1100">
+                <a:endParaRPr lang="fa-IR" sz="873">
                   <a:solidFill>
                     <a:schemeClr val="tx1"/>
                   </a:solidFill>
@@ -24455,7 +24312,7 @@
               <a:lstStyle/>
               <a:p>
                 <a:pPr algn="ctr"/>
-                <a:endParaRPr lang="fa-IR" sz="1100">
+                <a:endParaRPr lang="fa-IR" sz="873">
                   <a:solidFill>
                     <a:schemeClr val="tx1"/>
                   </a:solidFill>
@@ -24518,7 +24375,7 @@
               <a:lstStyle/>
               <a:p>
                 <a:pPr algn="ctr"/>
-                <a:endParaRPr lang="fa-IR" sz="1100">
+                <a:endParaRPr lang="fa-IR" sz="873">
                   <a:solidFill>
                     <a:schemeClr val="tx1"/>
                   </a:solidFill>
@@ -24581,7 +24438,7 @@
               <a:lstStyle/>
               <a:p>
                 <a:pPr algn="ctr"/>
-                <a:endParaRPr lang="fa-IR" sz="1100">
+                <a:endParaRPr lang="fa-IR" sz="873">
                   <a:solidFill>
                     <a:schemeClr val="tx1"/>
                   </a:solidFill>
@@ -24644,7 +24501,7 @@
               <a:lstStyle/>
               <a:p>
                 <a:pPr algn="ctr"/>
-                <a:endParaRPr lang="fa-IR" sz="1100">
+                <a:endParaRPr lang="fa-IR" sz="873">
                   <a:solidFill>
                     <a:schemeClr val="tx1"/>
                   </a:solidFill>
@@ -24707,7 +24564,7 @@
               <a:lstStyle/>
               <a:p>
                 <a:pPr algn="ctr"/>
-                <a:endParaRPr lang="fa-IR" sz="1100">
+                <a:endParaRPr lang="fa-IR" sz="873">
                   <a:solidFill>
                     <a:schemeClr val="tx1"/>
                   </a:solidFill>
@@ -24770,7 +24627,7 @@
               <a:lstStyle/>
               <a:p>
                 <a:pPr algn="ctr"/>
-                <a:endParaRPr lang="fa-IR" sz="1100">
+                <a:endParaRPr lang="fa-IR" sz="873">
                   <a:solidFill>
                     <a:schemeClr val="tx1"/>
                   </a:solidFill>
@@ -24833,7 +24690,7 @@
               <a:lstStyle/>
               <a:p>
                 <a:pPr algn="ctr"/>
-                <a:endParaRPr lang="fa-IR" sz="1100">
+                <a:endParaRPr lang="fa-IR" sz="873">
                   <a:solidFill>
                     <a:schemeClr val="tx1"/>
                   </a:solidFill>
@@ -24896,7 +24753,7 @@
               <a:lstStyle/>
               <a:p>
                 <a:pPr algn="ctr"/>
-                <a:endParaRPr lang="fa-IR" sz="1100">
+                <a:endParaRPr lang="fa-IR" sz="873">
                   <a:solidFill>
                     <a:schemeClr val="tx1"/>
                   </a:solidFill>
@@ -24959,7 +24816,7 @@
               <a:lstStyle/>
               <a:p>
                 <a:pPr algn="ctr"/>
-                <a:endParaRPr lang="fa-IR" sz="1100">
+                <a:endParaRPr lang="fa-IR" sz="873">
                   <a:solidFill>
                     <a:schemeClr val="tx1"/>
                   </a:solidFill>
@@ -25022,7 +24879,7 @@
               <a:lstStyle/>
               <a:p>
                 <a:pPr algn="ctr"/>
-                <a:endParaRPr lang="fa-IR" sz="1100">
+                <a:endParaRPr lang="fa-IR" sz="873">
                   <a:solidFill>
                     <a:schemeClr val="tx1"/>
                   </a:solidFill>
@@ -25085,7 +24942,7 @@
               <a:lstStyle/>
               <a:p>
                 <a:pPr algn="ctr"/>
-                <a:endParaRPr lang="fa-IR" sz="1100">
+                <a:endParaRPr lang="fa-IR" sz="873">
                   <a:solidFill>
                     <a:schemeClr val="tx1"/>
                   </a:solidFill>
@@ -25148,7 +25005,7 @@
               <a:lstStyle/>
               <a:p>
                 <a:pPr algn="ctr"/>
-                <a:endParaRPr lang="fa-IR" sz="1100">
+                <a:endParaRPr lang="fa-IR" sz="873">
                   <a:solidFill>
                     <a:schemeClr val="tx1"/>
                   </a:solidFill>
@@ -25345,7 +25202,7 @@
             <a:p>
               <a:pPr algn="ctr" rtl="0"/>
               <a:r>
-                <a:rPr lang="en-US" sz="1200">
+                <a:rPr lang="en-US" sz="952">
                   <a:solidFill>
                     <a:schemeClr val="accent6">
                       <a:lumMod val="75000"/>
@@ -25354,7 +25211,7 @@
                 </a:rPr>
                 <a:t>Weekly</a:t>
               </a:r>
-              <a:endParaRPr lang="fa-IR" sz="1400">
+              <a:endParaRPr lang="fa-IR" sz="1111">
                 <a:solidFill>
                   <a:schemeClr val="accent6">
                     <a:lumMod val="75000"/>
@@ -25379,8 +25236,8 @@
         </p:nvSpPr>
         <p:spPr>
           <a:xfrm rot="10800000">
-            <a:off x="2392715" y="458280"/>
-            <a:ext cx="204989" cy="171745"/>
+            <a:off x="2280260" y="363728"/>
+            <a:ext cx="162696" cy="136311"/>
           </a:xfrm>
           <a:prstGeom prst="triangle">
             <a:avLst/>
@@ -25425,8 +25282,8 @@
         </p:nvSpPr>
         <p:spPr>
           <a:xfrm rot="10800000">
-            <a:off x="2392714" y="918373"/>
-            <a:ext cx="204989" cy="171745"/>
+            <a:off x="2280259" y="728895"/>
+            <a:ext cx="162696" cy="136311"/>
           </a:xfrm>
           <a:prstGeom prst="triangle">
             <a:avLst/>

--- a/ExaminerB/.appCatalog/ExaminerB notes 1404.pptx
+++ b/ExaminerB/.appCatalog/ExaminerB notes 1404.pptx
@@ -5,13 +5,12 @@
     <p:sldMasterId id="2147483648" r:id="rId1"/>
   </p:sldMasterIdLst>
   <p:notesMasterIdLst>
-    <p:notesMasterId r:id="rId6"/>
+    <p:notesMasterId r:id="rId5"/>
   </p:notesMasterIdLst>
   <p:sldIdLst>
     <p:sldId id="262" r:id="rId2"/>
-    <p:sldId id="265" r:id="rId3"/>
-    <p:sldId id="263" r:id="rId4"/>
-    <p:sldId id="264" r:id="rId5"/>
+    <p:sldId id="263" r:id="rId3"/>
+    <p:sldId id="264" r:id="rId4"/>
   </p:sldIdLst>
   <p:sldSz cx="9906000" cy="6858000" type="A4"/>
   <p:notesSz cx="6645275" cy="9777413"/>
@@ -145,85 +144,6 @@
 </p:notes>
 </file>
 
-<file path=ppt/notesSlides/notesSlide2.xml><?xml version="1.0" encoding="utf-8"?>
-<p:notes xmlns:a="http://schemas.openxmlformats.org/drawingml/2006/main" xmlns:r="http://schemas.openxmlformats.org/officeDocument/2006/relationships" xmlns:p="http://schemas.openxmlformats.org/presentationml/2006/main">
-  <p:cSld>
-    <p:spTree>
-      <p:nvGrpSpPr>
-        <p:cNvPr id="1" name="">
-          <a:extLst>
-            <a:ext uri="{FF2B5EF4-FFF2-40B4-BE49-F238E27FC236}">
-              <a16:creationId xmlns:a16="http://schemas.microsoft.com/office/drawing/2014/main" id="{08F5134A-C461-1E16-35CE-CE4D0CB8F98E}"/>
-            </a:ext>
-          </a:extLst>
-        </p:cNvPr>
-        <p:cNvGrpSpPr/>
-        <p:nvPr/>
-      </p:nvGrpSpPr>
-      <p:grpSpPr bwMode="auto">
-        <a:xfrm>
-          <a:off x="0" y="0"/>
-          <a:ext cx="0" cy="0"/>
-          <a:chOff x="0" y="0"/>
-          <a:chExt cx="0" cy="0"/>
-        </a:xfrm>
-      </p:grpSpPr>
-      <p:sp>
-        <p:nvSpPr>
-          <p:cNvPr id="1591169306" name="Notes Placeholder 1591169305">
-            <a:extLst>
-              <a:ext uri="{FF2B5EF4-FFF2-40B4-BE49-F238E27FC236}">
-                <a16:creationId xmlns:a16="http://schemas.microsoft.com/office/drawing/2014/main" id="{4CFB28EC-0511-48A2-17A8-D702197370E4}"/>
-              </a:ext>
-            </a:extLst>
-          </p:cNvPr>
-          <p:cNvSpPr txBox="1">
-            <a:spLocks noGrp="1"/>
-          </p:cNvSpPr>
-          <p:nvPr>
-            <p:ph type="body" idx="4294967295"/>
-          </p:nvPr>
-        </p:nvSpPr>
-        <p:spPr bwMode="auto">
-          <a:xfrm>
-            <a:off x="697622" y="5003872"/>
-            <a:ext cx="5929793" cy="369332"/>
-          </a:xfrm>
-          <a:prstGeom prst="rect">
-            <a:avLst/>
-          </a:prstGeom>
-          <a:noFill/>
-          <a:ln>
-            <a:noFill/>
-          </a:ln>
-          <a:effectLst/>
-        </p:spPr>
-        <p:txBody>
-          <a:bodyPr anchor="t">
-            <a:spAutoFit/>
-          </a:bodyPr>
-          <a:lstStyle/>
-          <a:p>
-            <a:pPr>
-              <a:defRPr/>
-            </a:pPr>
-            <a:endParaRPr/>
-          </a:p>
-        </p:txBody>
-      </p:sp>
-    </p:spTree>
-    <p:extLst>
-      <p:ext uri="{BB962C8B-B14F-4D97-AF65-F5344CB8AC3E}">
-        <p14:creationId xmlns:p14="http://schemas.microsoft.com/office/powerpoint/2010/main" val="2474206105"/>
-      </p:ext>
-    </p:extLst>
-  </p:cSld>
-  <p:clrMapOvr>
-    <a:masterClrMapping/>
-  </p:clrMapOvr>
-</p:notes>
-</file>
-
 <file path=ppt/slideLayouts/slideLayout1.xml><?xml version="1.0" encoding="utf-8"?>
 <p:sldLayout xmlns:a="http://schemas.openxmlformats.org/drawingml/2006/main" xmlns:r="http://schemas.openxmlformats.org/officeDocument/2006/relationships" xmlns:p="http://schemas.openxmlformats.org/presentationml/2006/main" showMasterPhAnim="0" type="title" preserve="1" userDrawn="1">
   <p:cSld name="Title Slide">
@@ -360,7 +280,7 @@
             </a:pPr>
             <a:fld id="{BCC18F51-09EC-435C-A3BA-64A766E099C0}" type="datetimeFigureOut">
               <a:rPr lang="fa-IR"/>
-              <a:t>14/05/1448</a:t>
+              <a:t>16/05/1448</a:t>
             </a:fld>
             <a:endParaRPr/>
           </a:p>
@@ -539,7 +459,7 @@
             </a:pPr>
             <a:fld id="{BCC18F51-09EC-435C-A3BA-64A766E099C0}" type="datetimeFigureOut">
               <a:rPr lang="fa-IR"/>
-              <a:t>14/05/1448</a:t>
+              <a:t>16/05/1448</a:t>
             </a:fld>
             <a:endParaRPr/>
           </a:p>
@@ -728,7 +648,7 @@
             </a:pPr>
             <a:fld id="{BCC18F51-09EC-435C-A3BA-64A766E099C0}" type="datetimeFigureOut">
               <a:rPr lang="fa-IR"/>
-              <a:t>14/05/1448</a:t>
+              <a:t>16/05/1448</a:t>
             </a:fld>
             <a:endParaRPr/>
           </a:p>
@@ -907,7 +827,7 @@
             </a:pPr>
             <a:fld id="{BCC18F51-09EC-435C-A3BA-64A766E099C0}" type="datetimeFigureOut">
               <a:rPr lang="fa-IR"/>
-              <a:t>14/05/1448</a:t>
+              <a:t>16/05/1448</a:t>
             </a:fld>
             <a:endParaRPr/>
           </a:p>
@@ -1159,7 +1079,7 @@
             </a:pPr>
             <a:fld id="{BCC18F51-09EC-435C-A3BA-64A766E099C0}" type="datetimeFigureOut">
               <a:rPr lang="fa-IR"/>
-              <a:t>14/05/1448</a:t>
+              <a:t>16/05/1448</a:t>
             </a:fld>
             <a:endParaRPr/>
           </a:p>
@@ -1404,7 +1324,7 @@
             </a:pPr>
             <a:fld id="{BCC18F51-09EC-435C-A3BA-64A766E099C0}" type="datetimeFigureOut">
               <a:rPr lang="fa-IR"/>
-              <a:t>14/05/1448</a:t>
+              <a:t>16/05/1448</a:t>
             </a:fld>
             <a:endParaRPr/>
           </a:p>
@@ -1786,7 +1706,7 @@
             </a:pPr>
             <a:fld id="{BCC18F51-09EC-435C-A3BA-64A766E099C0}" type="datetimeFigureOut">
               <a:rPr lang="fa-IR"/>
-              <a:t>14/05/1448</a:t>
+              <a:t>16/05/1448</a:t>
             </a:fld>
             <a:endParaRPr/>
           </a:p>
@@ -1909,7 +1829,7 @@
             </a:pPr>
             <a:fld id="{BCC18F51-09EC-435C-A3BA-64A766E099C0}" type="datetimeFigureOut">
               <a:rPr lang="fa-IR"/>
-              <a:t>14/05/1448</a:t>
+              <a:t>16/05/1448</a:t>
             </a:fld>
             <a:endParaRPr/>
           </a:p>
@@ -2008,7 +1928,7 @@
             </a:pPr>
             <a:fld id="{BCC18F51-09EC-435C-A3BA-64A766E099C0}" type="datetimeFigureOut">
               <a:rPr lang="fa-IR"/>
-              <a:t>14/05/1448</a:t>
+              <a:t>16/05/1448</a:t>
             </a:fld>
             <a:endParaRPr/>
           </a:p>
@@ -2295,7 +2215,7 @@
             </a:pPr>
             <a:fld id="{BCC18F51-09EC-435C-A3BA-64A766E099C0}" type="datetimeFigureOut">
               <a:rPr lang="fa-IR"/>
-              <a:t>14/05/1448</a:t>
+              <a:t>16/05/1448</a:t>
             </a:fld>
             <a:endParaRPr/>
           </a:p>
@@ -2559,7 +2479,7 @@
             </a:pPr>
             <a:fld id="{BCC18F51-09EC-435C-A3BA-64A766E099C0}" type="datetimeFigureOut">
               <a:rPr lang="fa-IR"/>
-              <a:t>14/05/1448</a:t>
+              <a:t>16/05/1448</a:t>
             </a:fld>
             <a:endParaRPr/>
           </a:p>
@@ -2781,7 +2701,7 @@
             </a:pPr>
             <a:fld id="{BCC18F51-09EC-435C-A3BA-64A766E099C0}" type="datetimeFigureOut">
               <a:rPr lang="fa-IR"/>
-              <a:t>14/05/1448</a:t>
+              <a:t>16/05/1448</a:t>
             </a:fld>
             <a:endParaRPr/>
           </a:p>
@@ -8824,9157 +8744,6 @@
 </file>
 
 <file path=ppt/slides/slide2.xml><?xml version="1.0" encoding="utf-8"?>
-<p:sld xmlns:a="http://schemas.openxmlformats.org/drawingml/2006/main" xmlns:r="http://schemas.openxmlformats.org/officeDocument/2006/relationships" xmlns:p="http://schemas.openxmlformats.org/presentationml/2006/main" showMasterPhAnim="0">
-  <p:cSld>
-    <p:spTree>
-      <p:nvGrpSpPr>
-        <p:cNvPr id="1" name="">
-          <a:extLst>
-            <a:ext uri="{FF2B5EF4-FFF2-40B4-BE49-F238E27FC236}">
-              <a16:creationId xmlns:a16="http://schemas.microsoft.com/office/drawing/2014/main" id="{84AC1D6B-CCF5-20D9-5BA6-ED3BE151D1EF}"/>
-            </a:ext>
-          </a:extLst>
-        </p:cNvPr>
-        <p:cNvGrpSpPr/>
-        <p:nvPr/>
-      </p:nvGrpSpPr>
-      <p:grpSpPr bwMode="auto">
-        <a:xfrm>
-          <a:off x="0" y="0"/>
-          <a:ext cx="0" cy="0"/>
-          <a:chOff x="0" y="0"/>
-          <a:chExt cx="0" cy="0"/>
-        </a:xfrm>
-      </p:grpSpPr>
-      <p:sp>
-        <p:nvSpPr>
-          <p:cNvPr id="36" name="Oval 29">
-            <a:extLst>
-              <a:ext uri="{FF2B5EF4-FFF2-40B4-BE49-F238E27FC236}">
-                <a16:creationId xmlns:a16="http://schemas.microsoft.com/office/drawing/2014/main" id="{2B58DEA2-254C-5F88-AFBF-56D907759B6F}"/>
-              </a:ext>
-            </a:extLst>
-          </p:cNvPr>
-          <p:cNvSpPr/>
-          <p:nvPr/>
-        </p:nvSpPr>
-        <p:spPr bwMode="auto">
-          <a:xfrm rot="18907748">
-            <a:off x="5805517" y="-380101"/>
-            <a:ext cx="5196564" cy="6927078"/>
-          </a:xfrm>
-          <a:custGeom>
-            <a:avLst/>
-            <a:gdLst>
-              <a:gd name="csX0" fmla="*/ 0 w 5678600"/>
-              <a:gd name="csY0" fmla="*/ 3658973 h 7317945"/>
-              <a:gd name="csX1" fmla="*/ 2839300 w 5678600"/>
-              <a:gd name="csY1" fmla="*/ 0 h 7317945"/>
-              <a:gd name="csX2" fmla="*/ 5678600 w 5678600"/>
-              <a:gd name="csY2" fmla="*/ 3658973 h 7317945"/>
-              <a:gd name="csX3" fmla="*/ 2839300 w 5678600"/>
-              <a:gd name="csY3" fmla="*/ 7317946 h 7317945"/>
-              <a:gd name="csX4" fmla="*/ 0 w 5678600"/>
-              <a:gd name="csY4" fmla="*/ 3658973 h 7317945"/>
-              <a:gd name="csX0" fmla="*/ 0 w 5127434"/>
-              <a:gd name="csY0" fmla="*/ 3659351 h 7318665"/>
-              <a:gd name="csX1" fmla="*/ 2839300 w 5127434"/>
-              <a:gd name="csY1" fmla="*/ 378 h 7318665"/>
-              <a:gd name="csX2" fmla="*/ 5127434 w 5127434"/>
-              <a:gd name="csY2" fmla="*/ 3492962 h 7318665"/>
-              <a:gd name="csX3" fmla="*/ 2839300 w 5127434"/>
-              <a:gd name="csY3" fmla="*/ 7318324 h 7318665"/>
-              <a:gd name="csX4" fmla="*/ 0 w 5127434"/>
-              <a:gd name="csY4" fmla="*/ 3659351 h 7318665"/>
-              <a:gd name="csX0" fmla="*/ 0 w 5637665"/>
-              <a:gd name="csY0" fmla="*/ 3659309 h 7318623"/>
-              <a:gd name="csX1" fmla="*/ 2839300 w 5637665"/>
-              <a:gd name="csY1" fmla="*/ 336 h 7318623"/>
-              <a:gd name="csX2" fmla="*/ 5127434 w 5637665"/>
-              <a:gd name="csY2" fmla="*/ 3492920 h 7318623"/>
-              <a:gd name="csX3" fmla="*/ 2839300 w 5637665"/>
-              <a:gd name="csY3" fmla="*/ 7318282 h 7318623"/>
-              <a:gd name="csX4" fmla="*/ 0 w 5637665"/>
-              <a:gd name="csY4" fmla="*/ 3659309 h 7318623"/>
-              <a:gd name="csX0" fmla="*/ 0 w 5637665"/>
-              <a:gd name="csY0" fmla="*/ 3659309 h 7318623"/>
-              <a:gd name="csX1" fmla="*/ 2839300 w 5637665"/>
-              <a:gd name="csY1" fmla="*/ 336 h 7318623"/>
-              <a:gd name="csX2" fmla="*/ 5127434 w 5637665"/>
-              <a:gd name="csY2" fmla="*/ 3492920 h 7318623"/>
-              <a:gd name="csX3" fmla="*/ 2839300 w 5637665"/>
-              <a:gd name="csY3" fmla="*/ 7318282 h 7318623"/>
-              <a:gd name="csX4" fmla="*/ 0 w 5637665"/>
-              <a:gd name="csY4" fmla="*/ 3659309 h 7318623"/>
-              <a:gd name="csX0" fmla="*/ 0 w 5556500"/>
-              <a:gd name="csY0" fmla="*/ 3659563 h 7318877"/>
-              <a:gd name="csX1" fmla="*/ 2839300 w 5556500"/>
-              <a:gd name="csY1" fmla="*/ 590 h 7318877"/>
-              <a:gd name="csX2" fmla="*/ 5127434 w 5556500"/>
-              <a:gd name="csY2" fmla="*/ 3493174 h 7318877"/>
-              <a:gd name="csX3" fmla="*/ 2839300 w 5556500"/>
-              <a:gd name="csY3" fmla="*/ 7318536 h 7318877"/>
-              <a:gd name="csX4" fmla="*/ 0 w 5556500"/>
-              <a:gd name="csY4" fmla="*/ 3659563 h 7318877"/>
-              <a:gd name="csX0" fmla="*/ 43 w 5563315"/>
-              <a:gd name="csY0" fmla="*/ 3308805 h 6968004"/>
-              <a:gd name="csX1" fmla="*/ 2903994 w 5563315"/>
-              <a:gd name="csY1" fmla="*/ 913 h 6968004"/>
-              <a:gd name="csX2" fmla="*/ 5127477 w 5563315"/>
-              <a:gd name="csY2" fmla="*/ 3142416 h 6968004"/>
-              <a:gd name="csX3" fmla="*/ 2839343 w 5563315"/>
-              <a:gd name="csY3" fmla="*/ 6967778 h 6968004"/>
-              <a:gd name="csX4" fmla="*/ 43 w 5563315"/>
-              <a:gd name="csY4" fmla="*/ 3308805 h 6968004"/>
-              <a:gd name="csX0" fmla="*/ 60 w 4894157"/>
-              <a:gd name="csY0" fmla="*/ 1630203 h 7043433"/>
-              <a:gd name="csX1" fmla="*/ 2245373 w 4894157"/>
-              <a:gd name="csY1" fmla="*/ 55990 h 7043433"/>
-              <a:gd name="csX2" fmla="*/ 4468856 w 4894157"/>
-              <a:gd name="csY2" fmla="*/ 3197493 h 7043433"/>
-              <a:gd name="csX3" fmla="*/ 2180722 w 4894157"/>
-              <a:gd name="csY3" fmla="*/ 7022855 h 7043433"/>
-              <a:gd name="csX4" fmla="*/ 60 w 4894157"/>
-              <a:gd name="csY4" fmla="*/ 1630203 h 7043433"/>
-              <a:gd name="csX0" fmla="*/ 120413 w 5014510"/>
-              <a:gd name="csY0" fmla="*/ 1631920 h 7230796"/>
-              <a:gd name="csX1" fmla="*/ 2365726 w 5014510"/>
-              <a:gd name="csY1" fmla="*/ 57707 h 7230796"/>
-              <a:gd name="csX2" fmla="*/ 4589209 w 5014510"/>
-              <a:gd name="csY2" fmla="*/ 3199210 h 7230796"/>
-              <a:gd name="csX3" fmla="*/ 760880 w 5014510"/>
-              <a:gd name="csY3" fmla="*/ 7211640 h 7230796"/>
-              <a:gd name="csX4" fmla="*/ 120413 w 5014510"/>
-              <a:gd name="csY4" fmla="*/ 1631920 h 7230796"/>
-              <a:gd name="csX0" fmla="*/ 346956 w 5241053"/>
-              <a:gd name="csY0" fmla="*/ 1631920 h 7259305"/>
-              <a:gd name="csX1" fmla="*/ 2592269 w 5241053"/>
-              <a:gd name="csY1" fmla="*/ 57707 h 7259305"/>
-              <a:gd name="csX2" fmla="*/ 4815752 w 5241053"/>
-              <a:gd name="csY2" fmla="*/ 3199210 h 7259305"/>
-              <a:gd name="csX3" fmla="*/ 987423 w 5241053"/>
-              <a:gd name="csY3" fmla="*/ 7211640 h 7259305"/>
-              <a:gd name="csX4" fmla="*/ 346956 w 5241053"/>
-              <a:gd name="csY4" fmla="*/ 1631920 h 7259305"/>
-              <a:gd name="csX0" fmla="*/ 349977 w 5248987"/>
-              <a:gd name="csY0" fmla="*/ 1677593 h 7304978"/>
-              <a:gd name="csX1" fmla="*/ 2643077 w 5248987"/>
-              <a:gd name="csY1" fmla="*/ 55378 h 7304978"/>
-              <a:gd name="csX2" fmla="*/ 4818773 w 5248987"/>
-              <a:gd name="csY2" fmla="*/ 3244883 h 7304978"/>
-              <a:gd name="csX3" fmla="*/ 990444 w 5248987"/>
-              <a:gd name="csY3" fmla="*/ 7257313 h 7304978"/>
-              <a:gd name="csX4" fmla="*/ 349977 w 5248987"/>
-              <a:gd name="csY4" fmla="*/ 1677593 h 7304978"/>
-              <a:gd name="csX0" fmla="*/ 349977 w 5236960"/>
-              <a:gd name="csY0" fmla="*/ 1627449 h 7254834"/>
-              <a:gd name="csX1" fmla="*/ 2643077 w 5236960"/>
-              <a:gd name="csY1" fmla="*/ 5234 h 7254834"/>
-              <a:gd name="csX2" fmla="*/ 4818773 w 5236960"/>
-              <a:gd name="csY2" fmla="*/ 3194739 h 7254834"/>
-              <a:gd name="csX3" fmla="*/ 990444 w 5236960"/>
-              <a:gd name="csY3" fmla="*/ 7207169 h 7254834"/>
-              <a:gd name="csX4" fmla="*/ 349977 w 5236960"/>
-              <a:gd name="csY4" fmla="*/ 1627449 h 7254834"/>
-              <a:gd name="csX0" fmla="*/ 119626 w 5043533"/>
-              <a:gd name="csY0" fmla="*/ 1463253 h 7315371"/>
-              <a:gd name="csX1" fmla="*/ 2437231 w 5043533"/>
-              <a:gd name="csY1" fmla="*/ 88439 h 7315371"/>
-              <a:gd name="csX2" fmla="*/ 4612927 w 5043533"/>
-              <a:gd name="csY2" fmla="*/ 3277944 h 7315371"/>
-              <a:gd name="csX3" fmla="*/ 784598 w 5043533"/>
-              <a:gd name="csY3" fmla="*/ 7290374 h 7315371"/>
-              <a:gd name="csX4" fmla="*/ 119626 w 5043533"/>
-              <a:gd name="csY4" fmla="*/ 1463253 h 7315371"/>
-              <a:gd name="csX0" fmla="*/ 105918 w 5029825"/>
-              <a:gd name="csY0" fmla="*/ 1443927 h 7296045"/>
-              <a:gd name="csX1" fmla="*/ 2423523 w 5029825"/>
-              <a:gd name="csY1" fmla="*/ 69113 h 7296045"/>
-              <a:gd name="csX2" fmla="*/ 4599219 w 5029825"/>
-              <a:gd name="csY2" fmla="*/ 3258618 h 7296045"/>
-              <a:gd name="csX3" fmla="*/ 770890 w 5029825"/>
-              <a:gd name="csY3" fmla="*/ 7271048 h 7296045"/>
-              <a:gd name="csX4" fmla="*/ 105918 w 5029825"/>
-              <a:gd name="csY4" fmla="*/ 1443927 h 7296045"/>
-              <a:gd name="csX0" fmla="*/ 183921 w 5107828"/>
-              <a:gd name="csY0" fmla="*/ 1443927 h 7398576"/>
-              <a:gd name="csX1" fmla="*/ 2501526 w 5107828"/>
-              <a:gd name="csY1" fmla="*/ 69113 h 7398576"/>
-              <a:gd name="csX2" fmla="*/ 4677222 w 5107828"/>
-              <a:gd name="csY2" fmla="*/ 3258618 h 7398576"/>
-              <a:gd name="csX3" fmla="*/ 848893 w 5107828"/>
-              <a:gd name="csY3" fmla="*/ 7271048 h 7398576"/>
-              <a:gd name="csX4" fmla="*/ 183921 w 5107828"/>
-              <a:gd name="csY4" fmla="*/ 1443927 h 7398576"/>
-              <a:gd name="csX0" fmla="*/ 395880 w 5319787"/>
-              <a:gd name="csY0" fmla="*/ 1458340 h 7091336"/>
-              <a:gd name="csX1" fmla="*/ 2713485 w 5319787"/>
-              <a:gd name="csY1" fmla="*/ 83526 h 7091336"/>
-              <a:gd name="csX2" fmla="*/ 4889181 w 5319787"/>
-              <a:gd name="csY2" fmla="*/ 3273031 h 7091336"/>
-              <a:gd name="csX3" fmla="*/ 676940 w 5319787"/>
-              <a:gd name="csY3" fmla="*/ 6951063 h 7091336"/>
-              <a:gd name="csX4" fmla="*/ 395880 w 5319787"/>
-              <a:gd name="csY4" fmla="*/ 1458340 h 7091336"/>
-            </a:gdLst>
-            <a:ahLst/>
-            <a:cxnLst>
-              <a:cxn ang="0">
-                <a:pos x="csX0" y="csY0"/>
-              </a:cxn>
-              <a:cxn ang="0">
-                <a:pos x="csX1" y="csY1"/>
-              </a:cxn>
-              <a:cxn ang="0">
-                <a:pos x="csX2" y="csY2"/>
-              </a:cxn>
-              <a:cxn ang="0">
-                <a:pos x="csX3" y="csY3"/>
-              </a:cxn>
-              <a:cxn ang="0">
-                <a:pos x="csX4" y="csY4"/>
-              </a:cxn>
-            </a:cxnLst>
-            <a:rect l="l" t="t" r="r" b="b"/>
-            <a:pathLst>
-              <a:path w="5319787" h="7091336">
-                <a:moveTo>
-                  <a:pt x="395880" y="1458340"/>
-                </a:moveTo>
-                <a:cubicBezTo>
-                  <a:pt x="735304" y="313751"/>
-                  <a:pt x="1964602" y="-218922"/>
-                  <a:pt x="2713485" y="83526"/>
-                </a:cubicBezTo>
-                <a:cubicBezTo>
-                  <a:pt x="3462368" y="385974"/>
-                  <a:pt x="6412583" y="698013"/>
-                  <a:pt x="4889181" y="3273031"/>
-                </a:cubicBezTo>
-                <a:cubicBezTo>
-                  <a:pt x="3667384" y="5081053"/>
-                  <a:pt x="1762164" y="7731701"/>
-                  <a:pt x="676940" y="6951063"/>
-                </a:cubicBezTo>
-                <a:cubicBezTo>
-                  <a:pt x="-408284" y="6170425"/>
-                  <a:pt x="56456" y="2602929"/>
-                  <a:pt x="395880" y="1458340"/>
-                </a:cubicBezTo>
-                <a:close/>
-              </a:path>
-            </a:pathLst>
-          </a:custGeom>
-          <a:solidFill>
-            <a:srgbClr val="EEF7E9"/>
-          </a:solidFill>
-          <a:ln w="28575">
-            <a:noFill/>
-            <a:prstDash val="solid"/>
-          </a:ln>
-          <a:effectLst/>
-        </p:spPr>
-        <p:style>
-          <a:lnRef idx="0">
-            <a:schemeClr val="accent4"/>
-          </a:lnRef>
-          <a:fillRef idx="3">
-            <a:schemeClr val="accent4"/>
-          </a:fillRef>
-          <a:effectRef idx="3">
-            <a:schemeClr val="accent4"/>
-          </a:effectRef>
-          <a:fontRef idx="minor">
-            <a:schemeClr val="lt1"/>
-          </a:fontRef>
-        </p:style>
-        <p:txBody>
-          <a:bodyPr rtlCol="1" anchor="ctr"/>
-          <a:lstStyle/>
-          <a:p>
-            <a:pPr algn="r" rtl="1"/>
-            <a:endParaRPr lang="en-US" sz="4298" b="1">
-              <a:solidFill>
-                <a:schemeClr val="bg1"/>
-              </a:solidFill>
-              <a:highlight>
-                <a:srgbClr val="800080"/>
-              </a:highlight>
-              <a:latin typeface="Segoe UI" panose="020B0502040204020203" pitchFamily="34" charset="0"/>
-              <a:cs typeface="Segoe UI" panose="020B0502040204020203" pitchFamily="34" charset="0"/>
-            </a:endParaRPr>
-          </a:p>
-        </p:txBody>
-      </p:sp>
-      <p:sp>
-        <p:nvSpPr>
-          <p:cNvPr id="32" name="Oval 31">
-            <a:extLst>
-              <a:ext uri="{FF2B5EF4-FFF2-40B4-BE49-F238E27FC236}">
-                <a16:creationId xmlns:a16="http://schemas.microsoft.com/office/drawing/2014/main" id="{22B6572D-D25C-68D2-4E3D-87D9C8D71991}"/>
-              </a:ext>
-            </a:extLst>
-          </p:cNvPr>
-          <p:cNvSpPr/>
-          <p:nvPr/>
-        </p:nvSpPr>
-        <p:spPr bwMode="auto">
-          <a:xfrm>
-            <a:off x="1606656" y="-772670"/>
-            <a:ext cx="4021497" cy="6566256"/>
-          </a:xfrm>
-          <a:custGeom>
-            <a:avLst/>
-            <a:gdLst>
-              <a:gd name="csX0" fmla="*/ 0 w 2888469"/>
-              <a:gd name="csY0" fmla="*/ 2952627 h 5905253"/>
-              <a:gd name="csX1" fmla="*/ 1444235 w 2888469"/>
-              <a:gd name="csY1" fmla="*/ 0 h 5905253"/>
-              <a:gd name="csX2" fmla="*/ 2888470 w 2888469"/>
-              <a:gd name="csY2" fmla="*/ 2952627 h 5905253"/>
-              <a:gd name="csX3" fmla="*/ 1444235 w 2888469"/>
-              <a:gd name="csY3" fmla="*/ 5905254 h 5905253"/>
-              <a:gd name="csX4" fmla="*/ 0 w 2888469"/>
-              <a:gd name="csY4" fmla="*/ 2952627 h 5905253"/>
-              <a:gd name="csX0" fmla="*/ 0 w 3712559"/>
-              <a:gd name="csY0" fmla="*/ 2549514 h 5910917"/>
-              <a:gd name="csX1" fmla="*/ 2268324 w 3712559"/>
-              <a:gd name="csY1" fmla="*/ 3287 h 5910917"/>
-              <a:gd name="csX2" fmla="*/ 3712559 w 3712559"/>
-              <a:gd name="csY2" fmla="*/ 2955914 h 5910917"/>
-              <a:gd name="csX3" fmla="*/ 2268324 w 3712559"/>
-              <a:gd name="csY3" fmla="*/ 5908541 h 5910917"/>
-              <a:gd name="csX4" fmla="*/ 0 w 3712559"/>
-              <a:gd name="csY4" fmla="*/ 2549514 h 5910917"/>
-              <a:gd name="csX0" fmla="*/ 3960 w 3716519"/>
-              <a:gd name="csY0" fmla="*/ 2221291 h 5582694"/>
-              <a:gd name="csX1" fmla="*/ 1775573 w 3716519"/>
-              <a:gd name="csY1" fmla="*/ 2441 h 5582694"/>
-              <a:gd name="csX2" fmla="*/ 3716519 w 3716519"/>
-              <a:gd name="csY2" fmla="*/ 2627691 h 5582694"/>
-              <a:gd name="csX3" fmla="*/ 2272284 w 3716519"/>
-              <a:gd name="csY3" fmla="*/ 5580318 h 5582694"/>
-              <a:gd name="csX4" fmla="*/ 3960 w 3716519"/>
-              <a:gd name="csY4" fmla="*/ 2221291 h 5582694"/>
-              <a:gd name="csX0" fmla="*/ 23609 w 3736168"/>
-              <a:gd name="csY0" fmla="*/ 2222937 h 5584340"/>
-              <a:gd name="csX1" fmla="*/ 1795222 w 3736168"/>
-              <a:gd name="csY1" fmla="*/ 4087 h 5584340"/>
-              <a:gd name="csX2" fmla="*/ 3736168 w 3736168"/>
-              <a:gd name="csY2" fmla="*/ 2629337 h 5584340"/>
-              <a:gd name="csX3" fmla="*/ 2291933 w 3736168"/>
-              <a:gd name="csY3" fmla="*/ 5581964 h 5584340"/>
-              <a:gd name="csX4" fmla="*/ 23609 w 3736168"/>
-              <a:gd name="csY4" fmla="*/ 2222937 h 5584340"/>
-              <a:gd name="csX0" fmla="*/ 3950 w 3693932"/>
-              <a:gd name="csY0" fmla="*/ 2256570 h 5619122"/>
-              <a:gd name="csX1" fmla="*/ 1775563 w 3693932"/>
-              <a:gd name="csY1" fmla="*/ 37720 h 5619122"/>
-              <a:gd name="csX2" fmla="*/ 3693932 w 3693932"/>
-              <a:gd name="csY2" fmla="*/ 1590526 h 5619122"/>
-              <a:gd name="csX3" fmla="*/ 2272274 w 3693932"/>
-              <a:gd name="csY3" fmla="*/ 5615597 h 5619122"/>
-              <a:gd name="csX4" fmla="*/ 3950 w 3693932"/>
-              <a:gd name="csY4" fmla="*/ 2256570 h 5619122"/>
-              <a:gd name="csX0" fmla="*/ 3950 w 3693932"/>
-              <a:gd name="csY0" fmla="*/ 2256570 h 5619122"/>
-              <a:gd name="csX1" fmla="*/ 1775563 w 3693932"/>
-              <a:gd name="csY1" fmla="*/ 37720 h 5619122"/>
-              <a:gd name="csX2" fmla="*/ 3693932 w 3693932"/>
-              <a:gd name="csY2" fmla="*/ 1590526 h 5619122"/>
-              <a:gd name="csX3" fmla="*/ 2272274 w 3693932"/>
-              <a:gd name="csY3" fmla="*/ 5615597 h 5619122"/>
-              <a:gd name="csX4" fmla="*/ 3950 w 3693932"/>
-              <a:gd name="csY4" fmla="*/ 2256570 h 5619122"/>
-              <a:gd name="csX0" fmla="*/ 826914 w 4516896"/>
-              <a:gd name="csY0" fmla="*/ 2256570 h 6779981"/>
-              <a:gd name="csX1" fmla="*/ 2598527 w 4516896"/>
-              <a:gd name="csY1" fmla="*/ 37720 h 6779981"/>
-              <a:gd name="csX2" fmla="*/ 4516896 w 4516896"/>
-              <a:gd name="csY2" fmla="*/ 1590526 h 6779981"/>
-              <a:gd name="csX3" fmla="*/ 3095238 w 4516896"/>
-              <a:gd name="csY3" fmla="*/ 5615597 h 6779981"/>
-              <a:gd name="csX4" fmla="*/ 110535 w 4516896"/>
-              <a:gd name="csY4" fmla="*/ 6577156 h 6779981"/>
-              <a:gd name="csX5" fmla="*/ 826914 w 4516896"/>
-              <a:gd name="csY5" fmla="*/ 2256570 h 6779981"/>
-              <a:gd name="csX0" fmla="*/ 822638 w 4512620"/>
-              <a:gd name="csY0" fmla="*/ 2256570 h 6697946"/>
-              <a:gd name="csX1" fmla="*/ 2594251 w 4512620"/>
-              <a:gd name="csY1" fmla="*/ 37720 h 6697946"/>
-              <a:gd name="csX2" fmla="*/ 4512620 w 4512620"/>
-              <a:gd name="csY2" fmla="*/ 1590526 h 6697946"/>
-              <a:gd name="csX3" fmla="*/ 3090962 w 4512620"/>
-              <a:gd name="csY3" fmla="*/ 5615597 h 6697946"/>
-              <a:gd name="csX4" fmla="*/ 106259 w 4512620"/>
-              <a:gd name="csY4" fmla="*/ 6577156 h 6697946"/>
-              <a:gd name="csX5" fmla="*/ 851326 w 4512620"/>
-              <a:gd name="csY5" fmla="*/ 3754933 h 6697946"/>
-              <a:gd name="csX6" fmla="*/ 822638 w 4512620"/>
-              <a:gd name="csY6" fmla="*/ 2256570 h 6697946"/>
-              <a:gd name="csX0" fmla="*/ 822638 w 4512620"/>
-              <a:gd name="csY0" fmla="*/ 2256570 h 6697946"/>
-              <a:gd name="csX1" fmla="*/ 2594251 w 4512620"/>
-              <a:gd name="csY1" fmla="*/ 37720 h 6697946"/>
-              <a:gd name="csX2" fmla="*/ 4512620 w 4512620"/>
-              <a:gd name="csY2" fmla="*/ 1590526 h 6697946"/>
-              <a:gd name="csX3" fmla="*/ 3090962 w 4512620"/>
-              <a:gd name="csY3" fmla="*/ 5615597 h 6697946"/>
-              <a:gd name="csX4" fmla="*/ 106259 w 4512620"/>
-              <a:gd name="csY4" fmla="*/ 6577156 h 6697946"/>
-              <a:gd name="csX5" fmla="*/ 851326 w 4512620"/>
-              <a:gd name="csY5" fmla="*/ 3754933 h 6697946"/>
-              <a:gd name="csX6" fmla="*/ 822638 w 4512620"/>
-              <a:gd name="csY6" fmla="*/ 2256570 h 6697946"/>
-              <a:gd name="csX0" fmla="*/ 1364505 w 4512620"/>
-              <a:gd name="csY0" fmla="*/ 1228595 h 6663393"/>
-              <a:gd name="csX1" fmla="*/ 2594251 w 4512620"/>
-              <a:gd name="csY1" fmla="*/ 3167 h 6663393"/>
-              <a:gd name="csX2" fmla="*/ 4512620 w 4512620"/>
-              <a:gd name="csY2" fmla="*/ 1555973 h 6663393"/>
-              <a:gd name="csX3" fmla="*/ 3090962 w 4512620"/>
-              <a:gd name="csY3" fmla="*/ 5581044 h 6663393"/>
-              <a:gd name="csX4" fmla="*/ 106259 w 4512620"/>
-              <a:gd name="csY4" fmla="*/ 6542603 h 6663393"/>
-              <a:gd name="csX5" fmla="*/ 851326 w 4512620"/>
-              <a:gd name="csY5" fmla="*/ 3720380 h 6663393"/>
-              <a:gd name="csX6" fmla="*/ 1364505 w 4512620"/>
-              <a:gd name="csY6" fmla="*/ 1228595 h 6663393"/>
-              <a:gd name="csX0" fmla="*/ 1364505 w 4512620"/>
-              <a:gd name="csY0" fmla="*/ 1228804 h 6663602"/>
-              <a:gd name="csX1" fmla="*/ 2594251 w 4512620"/>
-              <a:gd name="csY1" fmla="*/ 3376 h 6663602"/>
-              <a:gd name="csX2" fmla="*/ 4512620 w 4512620"/>
-              <a:gd name="csY2" fmla="*/ 1556182 h 6663602"/>
-              <a:gd name="csX3" fmla="*/ 3090962 w 4512620"/>
-              <a:gd name="csY3" fmla="*/ 5581253 h 6663602"/>
-              <a:gd name="csX4" fmla="*/ 106259 w 4512620"/>
-              <a:gd name="csY4" fmla="*/ 6542812 h 6663602"/>
-              <a:gd name="csX5" fmla="*/ 851326 w 4512620"/>
-              <a:gd name="csY5" fmla="*/ 3720589 h 6663602"/>
-              <a:gd name="csX6" fmla="*/ 1364505 w 4512620"/>
-              <a:gd name="csY6" fmla="*/ 1228804 h 6663602"/>
-              <a:gd name="csX0" fmla="*/ 1251616 w 4512620"/>
-              <a:gd name="csY0" fmla="*/ 1086996 h 6668550"/>
-              <a:gd name="csX1" fmla="*/ 2594251 w 4512620"/>
-              <a:gd name="csY1" fmla="*/ 8324 h 6668550"/>
-              <a:gd name="csX2" fmla="*/ 4512620 w 4512620"/>
-              <a:gd name="csY2" fmla="*/ 1561130 h 6668550"/>
-              <a:gd name="csX3" fmla="*/ 3090962 w 4512620"/>
-              <a:gd name="csY3" fmla="*/ 5586201 h 6668550"/>
-              <a:gd name="csX4" fmla="*/ 106259 w 4512620"/>
-              <a:gd name="csY4" fmla="*/ 6547760 h 6668550"/>
-              <a:gd name="csX5" fmla="*/ 851326 w 4512620"/>
-              <a:gd name="csY5" fmla="*/ 3725537 h 6668550"/>
-              <a:gd name="csX6" fmla="*/ 1251616 w 4512620"/>
-              <a:gd name="csY6" fmla="*/ 1086996 h 6668550"/>
-              <a:gd name="csX0" fmla="*/ 1251616 w 4512620"/>
-              <a:gd name="csY0" fmla="*/ 1087496 h 6669050"/>
-              <a:gd name="csX1" fmla="*/ 2594251 w 4512620"/>
-              <a:gd name="csY1" fmla="*/ 8824 h 6669050"/>
-              <a:gd name="csX2" fmla="*/ 4512620 w 4512620"/>
-              <a:gd name="csY2" fmla="*/ 1561630 h 6669050"/>
-              <a:gd name="csX3" fmla="*/ 3090962 w 4512620"/>
-              <a:gd name="csY3" fmla="*/ 5586701 h 6669050"/>
-              <a:gd name="csX4" fmla="*/ 106259 w 4512620"/>
-              <a:gd name="csY4" fmla="*/ 6548260 h 6669050"/>
-              <a:gd name="csX5" fmla="*/ 851326 w 4512620"/>
-              <a:gd name="csY5" fmla="*/ 3726037 h 6669050"/>
-              <a:gd name="csX6" fmla="*/ 1251616 w 4512620"/>
-              <a:gd name="csY6" fmla="*/ 1087496 h 6669050"/>
-              <a:gd name="csX0" fmla="*/ 1208967 w 4469971"/>
-              <a:gd name="csY0" fmla="*/ 1086454 h 6668008"/>
-              <a:gd name="csX1" fmla="*/ 2551602 w 4469971"/>
-              <a:gd name="csY1" fmla="*/ 7782 h 6668008"/>
-              <a:gd name="csX2" fmla="*/ 4469971 w 4469971"/>
-              <a:gd name="csY2" fmla="*/ 1560588 h 6668008"/>
-              <a:gd name="csX3" fmla="*/ 3048313 w 4469971"/>
-              <a:gd name="csY3" fmla="*/ 5585659 h 6668008"/>
-              <a:gd name="csX4" fmla="*/ 63610 w 4469971"/>
-              <a:gd name="csY4" fmla="*/ 6547218 h 6668008"/>
-              <a:gd name="csX5" fmla="*/ 1734365 w 4469971"/>
-              <a:gd name="csY5" fmla="*/ 3747573 h 6668008"/>
-              <a:gd name="csX6" fmla="*/ 1208967 w 4469971"/>
-              <a:gd name="csY6" fmla="*/ 1086454 h 6668008"/>
-              <a:gd name="csX0" fmla="*/ 1262979 w 4523983"/>
-              <a:gd name="csY0" fmla="*/ 1086454 h 6668008"/>
-              <a:gd name="csX1" fmla="*/ 2605614 w 4523983"/>
-              <a:gd name="csY1" fmla="*/ 7782 h 6668008"/>
-              <a:gd name="csX2" fmla="*/ 4523983 w 4523983"/>
-              <a:gd name="csY2" fmla="*/ 1560588 h 6668008"/>
-              <a:gd name="csX3" fmla="*/ 3102325 w 4523983"/>
-              <a:gd name="csY3" fmla="*/ 5585659 h 6668008"/>
-              <a:gd name="csX4" fmla="*/ 117622 w 4523983"/>
-              <a:gd name="csY4" fmla="*/ 6547218 h 6668008"/>
-              <a:gd name="csX5" fmla="*/ 1788377 w 4523983"/>
-              <a:gd name="csY5" fmla="*/ 3747573 h 6668008"/>
-              <a:gd name="csX6" fmla="*/ 1262979 w 4523983"/>
-              <a:gd name="csY6" fmla="*/ 1086454 h 6668008"/>
-              <a:gd name="csX0" fmla="*/ 1330713 w 4523983"/>
-              <a:gd name="csY0" fmla="*/ 824813 h 6688589"/>
-              <a:gd name="csX1" fmla="*/ 2605614 w 4523983"/>
-              <a:gd name="csY1" fmla="*/ 28363 h 6688589"/>
-              <a:gd name="csX2" fmla="*/ 4523983 w 4523983"/>
-              <a:gd name="csY2" fmla="*/ 1581169 h 6688589"/>
-              <a:gd name="csX3" fmla="*/ 3102325 w 4523983"/>
-              <a:gd name="csY3" fmla="*/ 5606240 h 6688589"/>
-              <a:gd name="csX4" fmla="*/ 117622 w 4523983"/>
-              <a:gd name="csY4" fmla="*/ 6567799 h 6688589"/>
-              <a:gd name="csX5" fmla="*/ 1788377 w 4523983"/>
-              <a:gd name="csY5" fmla="*/ 3768154 h 6688589"/>
-              <a:gd name="csX6" fmla="*/ 1330713 w 4523983"/>
-              <a:gd name="csY6" fmla="*/ 824813 h 6688589"/>
-              <a:gd name="csX0" fmla="*/ 1330713 w 4523983"/>
-              <a:gd name="csY0" fmla="*/ 824813 h 6688589"/>
-              <a:gd name="csX1" fmla="*/ 2605614 w 4523983"/>
-              <a:gd name="csY1" fmla="*/ 28363 h 6688589"/>
-              <a:gd name="csX2" fmla="*/ 4523983 w 4523983"/>
-              <a:gd name="csY2" fmla="*/ 1581169 h 6688589"/>
-              <a:gd name="csX3" fmla="*/ 3102325 w 4523983"/>
-              <a:gd name="csY3" fmla="*/ 5606240 h 6688589"/>
-              <a:gd name="csX4" fmla="*/ 117622 w 4523983"/>
-              <a:gd name="csY4" fmla="*/ 6567799 h 6688589"/>
-              <a:gd name="csX5" fmla="*/ 1788377 w 4523983"/>
-              <a:gd name="csY5" fmla="*/ 3768154 h 6688589"/>
-              <a:gd name="csX6" fmla="*/ 1330713 w 4523983"/>
-              <a:gd name="csY6" fmla="*/ 824813 h 6688589"/>
-              <a:gd name="csX0" fmla="*/ 1330713 w 4523983"/>
-              <a:gd name="csY0" fmla="*/ 977840 h 6841616"/>
-              <a:gd name="csX1" fmla="*/ 2605614 w 4523983"/>
-              <a:gd name="csY1" fmla="*/ 181390 h 6841616"/>
-              <a:gd name="csX2" fmla="*/ 4523983 w 4523983"/>
-              <a:gd name="csY2" fmla="*/ 1734196 h 6841616"/>
-              <a:gd name="csX3" fmla="*/ 3102325 w 4523983"/>
-              <a:gd name="csY3" fmla="*/ 5759267 h 6841616"/>
-              <a:gd name="csX4" fmla="*/ 117622 w 4523983"/>
-              <a:gd name="csY4" fmla="*/ 6720826 h 6841616"/>
-              <a:gd name="csX5" fmla="*/ 1788377 w 4523983"/>
-              <a:gd name="csY5" fmla="*/ 3921181 h 6841616"/>
-              <a:gd name="csX6" fmla="*/ 1330713 w 4523983"/>
-              <a:gd name="csY6" fmla="*/ 977840 h 6841616"/>
-              <a:gd name="csX0" fmla="*/ 1330713 w 4523983"/>
-              <a:gd name="csY0" fmla="*/ 842023 h 6705799"/>
-              <a:gd name="csX1" fmla="*/ 2605614 w 4523983"/>
-              <a:gd name="csY1" fmla="*/ 45573 h 6705799"/>
-              <a:gd name="csX2" fmla="*/ 4523983 w 4523983"/>
-              <a:gd name="csY2" fmla="*/ 1598379 h 6705799"/>
-              <a:gd name="csX3" fmla="*/ 3102325 w 4523983"/>
-              <a:gd name="csY3" fmla="*/ 5623450 h 6705799"/>
-              <a:gd name="csX4" fmla="*/ 117622 w 4523983"/>
-              <a:gd name="csY4" fmla="*/ 6585009 h 6705799"/>
-              <a:gd name="csX5" fmla="*/ 1788377 w 4523983"/>
-              <a:gd name="csY5" fmla="*/ 3785364 h 6705799"/>
-              <a:gd name="csX6" fmla="*/ 1330713 w 4523983"/>
-              <a:gd name="csY6" fmla="*/ 842023 h 6705799"/>
-              <a:gd name="csX0" fmla="*/ 1330713 w 4523983"/>
-              <a:gd name="csY0" fmla="*/ 739993 h 6603769"/>
-              <a:gd name="csX1" fmla="*/ 2718503 w 4523983"/>
-              <a:gd name="csY1" fmla="*/ 33854 h 6603769"/>
-              <a:gd name="csX2" fmla="*/ 4523983 w 4523983"/>
-              <a:gd name="csY2" fmla="*/ 1496349 h 6603769"/>
-              <a:gd name="csX3" fmla="*/ 3102325 w 4523983"/>
-              <a:gd name="csY3" fmla="*/ 5521420 h 6603769"/>
-              <a:gd name="csX4" fmla="*/ 117622 w 4523983"/>
-              <a:gd name="csY4" fmla="*/ 6482979 h 6603769"/>
-              <a:gd name="csX5" fmla="*/ 1788377 w 4523983"/>
-              <a:gd name="csY5" fmla="*/ 3683334 h 6603769"/>
-              <a:gd name="csX6" fmla="*/ 1330713 w 4523983"/>
-              <a:gd name="csY6" fmla="*/ 739993 h 6603769"/>
-              <a:gd name="csX0" fmla="*/ 1330713 w 4523983"/>
-              <a:gd name="csY0" fmla="*/ 718603 h 6582379"/>
-              <a:gd name="csX1" fmla="*/ 2718503 w 4523983"/>
-              <a:gd name="csY1" fmla="*/ 12464 h 6582379"/>
-              <a:gd name="csX2" fmla="*/ 4523983 w 4523983"/>
-              <a:gd name="csY2" fmla="*/ 1474959 h 6582379"/>
-              <a:gd name="csX3" fmla="*/ 3102325 w 4523983"/>
-              <a:gd name="csY3" fmla="*/ 5500030 h 6582379"/>
-              <a:gd name="csX4" fmla="*/ 117622 w 4523983"/>
-              <a:gd name="csY4" fmla="*/ 6461589 h 6582379"/>
-              <a:gd name="csX5" fmla="*/ 1788377 w 4523983"/>
-              <a:gd name="csY5" fmla="*/ 3661944 h 6582379"/>
-              <a:gd name="csX6" fmla="*/ 1330713 w 4523983"/>
-              <a:gd name="csY6" fmla="*/ 718603 h 6582379"/>
-              <a:gd name="csX0" fmla="*/ 1330713 w 4523983"/>
-              <a:gd name="csY0" fmla="*/ 711483 h 6575259"/>
-              <a:gd name="csX1" fmla="*/ 2718503 w 4523983"/>
-              <a:gd name="csY1" fmla="*/ 5344 h 6575259"/>
-              <a:gd name="csX2" fmla="*/ 4523983 w 4523983"/>
-              <a:gd name="csY2" fmla="*/ 1467839 h 6575259"/>
-              <a:gd name="csX3" fmla="*/ 3102325 w 4523983"/>
-              <a:gd name="csY3" fmla="*/ 5492910 h 6575259"/>
-              <a:gd name="csX4" fmla="*/ 117622 w 4523983"/>
-              <a:gd name="csY4" fmla="*/ 6454469 h 6575259"/>
-              <a:gd name="csX5" fmla="*/ 1788377 w 4523983"/>
-              <a:gd name="csY5" fmla="*/ 3654824 h 6575259"/>
-              <a:gd name="csX6" fmla="*/ 1330713 w 4523983"/>
-              <a:gd name="csY6" fmla="*/ 711483 h 6575259"/>
-              <a:gd name="csX0" fmla="*/ 1330713 w 4523983"/>
-              <a:gd name="csY0" fmla="*/ 711483 h 6575259"/>
-              <a:gd name="csX1" fmla="*/ 2718503 w 4523983"/>
-              <a:gd name="csY1" fmla="*/ 5344 h 6575259"/>
-              <a:gd name="csX2" fmla="*/ 4523983 w 4523983"/>
-              <a:gd name="csY2" fmla="*/ 1467839 h 6575259"/>
-              <a:gd name="csX3" fmla="*/ 3102325 w 4523983"/>
-              <a:gd name="csY3" fmla="*/ 5492910 h 6575259"/>
-              <a:gd name="csX4" fmla="*/ 117622 w 4523983"/>
-              <a:gd name="csY4" fmla="*/ 6454469 h 6575259"/>
-              <a:gd name="csX5" fmla="*/ 1788377 w 4523983"/>
-              <a:gd name="csY5" fmla="*/ 3654824 h 6575259"/>
-              <a:gd name="csX6" fmla="*/ 1330713 w 4523983"/>
-              <a:gd name="csY6" fmla="*/ 711483 h 6575259"/>
-              <a:gd name="csX0" fmla="*/ 1330713 w 4523983"/>
-              <a:gd name="csY0" fmla="*/ 711483 h 6573787"/>
-              <a:gd name="csX1" fmla="*/ 2718503 w 4523983"/>
-              <a:gd name="csY1" fmla="*/ 5344 h 6573787"/>
-              <a:gd name="csX2" fmla="*/ 4523983 w 4523983"/>
-              <a:gd name="csY2" fmla="*/ 1467839 h 6573787"/>
-              <a:gd name="csX3" fmla="*/ 2989437 w 4523983"/>
-              <a:gd name="csY3" fmla="*/ 5481621 h 6573787"/>
-              <a:gd name="csX4" fmla="*/ 117622 w 4523983"/>
-              <a:gd name="csY4" fmla="*/ 6454469 h 6573787"/>
-              <a:gd name="csX5" fmla="*/ 1788377 w 4523983"/>
-              <a:gd name="csY5" fmla="*/ 3654824 h 6573787"/>
-              <a:gd name="csX6" fmla="*/ 1330713 w 4523983"/>
-              <a:gd name="csY6" fmla="*/ 711483 h 6573787"/>
-              <a:gd name="csX0" fmla="*/ 1330713 w 4523983"/>
-              <a:gd name="csY0" fmla="*/ 711483 h 6562714"/>
-              <a:gd name="csX1" fmla="*/ 2718503 w 4523983"/>
-              <a:gd name="csY1" fmla="*/ 5344 h 6562714"/>
-              <a:gd name="csX2" fmla="*/ 4523983 w 4523983"/>
-              <a:gd name="csY2" fmla="*/ 1467839 h 6562714"/>
-              <a:gd name="csX3" fmla="*/ 2989437 w 4523983"/>
-              <a:gd name="csY3" fmla="*/ 5481621 h 6562714"/>
-              <a:gd name="csX4" fmla="*/ 117622 w 4523983"/>
-              <a:gd name="csY4" fmla="*/ 6454469 h 6562714"/>
-              <a:gd name="csX5" fmla="*/ 1788377 w 4523983"/>
-              <a:gd name="csY5" fmla="*/ 3654824 h 6562714"/>
-              <a:gd name="csX6" fmla="*/ 1330713 w 4523983"/>
-              <a:gd name="csY6" fmla="*/ 711483 h 6562714"/>
-              <a:gd name="csX0" fmla="*/ 1327142 w 4520412"/>
-              <a:gd name="csY0" fmla="*/ 711483 h 6562714"/>
-              <a:gd name="csX1" fmla="*/ 2714932 w 4520412"/>
-              <a:gd name="csY1" fmla="*/ 5344 h 6562714"/>
-              <a:gd name="csX2" fmla="*/ 4520412 w 4520412"/>
-              <a:gd name="csY2" fmla="*/ 1467839 h 6562714"/>
-              <a:gd name="csX3" fmla="*/ 2985866 w 4520412"/>
-              <a:gd name="csY3" fmla="*/ 5481621 h 6562714"/>
-              <a:gd name="csX4" fmla="*/ 114051 w 4520412"/>
-              <a:gd name="csY4" fmla="*/ 6454469 h 6562714"/>
-              <a:gd name="csX5" fmla="*/ 1784806 w 4520412"/>
-              <a:gd name="csY5" fmla="*/ 3654824 h 6562714"/>
-              <a:gd name="csX6" fmla="*/ 1327142 w 4520412"/>
-              <a:gd name="csY6" fmla="*/ 711483 h 6562714"/>
-              <a:gd name="csX0" fmla="*/ 1327142 w 4520412"/>
-              <a:gd name="csY0" fmla="*/ 711483 h 6562714"/>
-              <a:gd name="csX1" fmla="*/ 2714932 w 4520412"/>
-              <a:gd name="csY1" fmla="*/ 5344 h 6562714"/>
-              <a:gd name="csX2" fmla="*/ 4520412 w 4520412"/>
-              <a:gd name="csY2" fmla="*/ 1467839 h 6562714"/>
-              <a:gd name="csX3" fmla="*/ 2985866 w 4520412"/>
-              <a:gd name="csY3" fmla="*/ 5481621 h 6562714"/>
-              <a:gd name="csX4" fmla="*/ 114051 w 4520412"/>
-              <a:gd name="csY4" fmla="*/ 6454469 h 6562714"/>
-              <a:gd name="csX5" fmla="*/ 1784806 w 4520412"/>
-              <a:gd name="csY5" fmla="*/ 3654824 h 6562714"/>
-              <a:gd name="csX6" fmla="*/ 1327142 w 4520412"/>
-              <a:gd name="csY6" fmla="*/ 711483 h 6562714"/>
-              <a:gd name="csX0" fmla="*/ 1331984 w 4525254"/>
-              <a:gd name="csY0" fmla="*/ 711037 h 6562268"/>
-              <a:gd name="csX1" fmla="*/ 2719774 w 4525254"/>
-              <a:gd name="csY1" fmla="*/ 4898 h 6562268"/>
-              <a:gd name="csX2" fmla="*/ 4525254 w 4525254"/>
-              <a:gd name="csY2" fmla="*/ 1467393 h 6562268"/>
-              <a:gd name="csX3" fmla="*/ 2990708 w 4525254"/>
-              <a:gd name="csY3" fmla="*/ 5481175 h 6562268"/>
-              <a:gd name="csX4" fmla="*/ 118893 w 4525254"/>
-              <a:gd name="csY4" fmla="*/ 6454023 h 6562268"/>
-              <a:gd name="csX5" fmla="*/ 1733203 w 4525254"/>
-              <a:gd name="csY5" fmla="*/ 3541489 h 6562268"/>
-              <a:gd name="csX6" fmla="*/ 1331984 w 4525254"/>
-              <a:gd name="csY6" fmla="*/ 711037 h 6562268"/>
-              <a:gd name="csX0" fmla="*/ 1324874 w 4518144"/>
-              <a:gd name="csY0" fmla="*/ 711037 h 6562268"/>
-              <a:gd name="csX1" fmla="*/ 2712664 w 4518144"/>
-              <a:gd name="csY1" fmla="*/ 4898 h 6562268"/>
-              <a:gd name="csX2" fmla="*/ 4518144 w 4518144"/>
-              <a:gd name="csY2" fmla="*/ 1467393 h 6562268"/>
-              <a:gd name="csX3" fmla="*/ 2983598 w 4518144"/>
-              <a:gd name="csY3" fmla="*/ 5481175 h 6562268"/>
-              <a:gd name="csX4" fmla="*/ 111783 w 4518144"/>
-              <a:gd name="csY4" fmla="*/ 6454023 h 6562268"/>
-              <a:gd name="csX5" fmla="*/ 1726093 w 4518144"/>
-              <a:gd name="csY5" fmla="*/ 3541489 h 6562268"/>
-              <a:gd name="csX6" fmla="*/ 1324874 w 4518144"/>
-              <a:gd name="csY6" fmla="*/ 711037 h 6562268"/>
-              <a:gd name="csX0" fmla="*/ 1413614 w 4606884"/>
-              <a:gd name="csY0" fmla="*/ 711037 h 6562268"/>
-              <a:gd name="csX1" fmla="*/ 2801404 w 4606884"/>
-              <a:gd name="csY1" fmla="*/ 4898 h 6562268"/>
-              <a:gd name="csX2" fmla="*/ 4606884 w 4606884"/>
-              <a:gd name="csY2" fmla="*/ 1467393 h 6562268"/>
-              <a:gd name="csX3" fmla="*/ 3072338 w 4606884"/>
-              <a:gd name="csY3" fmla="*/ 5481175 h 6562268"/>
-              <a:gd name="csX4" fmla="*/ 200523 w 4606884"/>
-              <a:gd name="csY4" fmla="*/ 6454023 h 6562268"/>
-              <a:gd name="csX5" fmla="*/ 1814833 w 4606884"/>
-              <a:gd name="csY5" fmla="*/ 3541489 h 6562268"/>
-              <a:gd name="csX6" fmla="*/ 1413614 w 4606884"/>
-              <a:gd name="csY6" fmla="*/ 711037 h 6562268"/>
-              <a:gd name="csX0" fmla="*/ 1413614 w 4606884"/>
-              <a:gd name="csY0" fmla="*/ 711037 h 6630146"/>
-              <a:gd name="csX1" fmla="*/ 2801404 w 4606884"/>
-              <a:gd name="csY1" fmla="*/ 4898 h 6630146"/>
-              <a:gd name="csX2" fmla="*/ 4606884 w 4606884"/>
-              <a:gd name="csY2" fmla="*/ 1467393 h 6630146"/>
-              <a:gd name="csX3" fmla="*/ 3072338 w 4606884"/>
-              <a:gd name="csY3" fmla="*/ 5481175 h 6630146"/>
-              <a:gd name="csX4" fmla="*/ 200523 w 4606884"/>
-              <a:gd name="csY4" fmla="*/ 6454023 h 6630146"/>
-              <a:gd name="csX5" fmla="*/ 1814833 w 4606884"/>
-              <a:gd name="csY5" fmla="*/ 3541489 h 6630146"/>
-              <a:gd name="csX6" fmla="*/ 1413614 w 4606884"/>
-              <a:gd name="csY6" fmla="*/ 711037 h 6630146"/>
-              <a:gd name="csX0" fmla="*/ 1413614 w 4606884"/>
-              <a:gd name="csY0" fmla="*/ 714544 h 6633653"/>
-              <a:gd name="csX1" fmla="*/ 2801404 w 4606884"/>
-              <a:gd name="csY1" fmla="*/ 8405 h 6633653"/>
-              <a:gd name="csX2" fmla="*/ 4606884 w 4606884"/>
-              <a:gd name="csY2" fmla="*/ 1470900 h 6633653"/>
-              <a:gd name="csX3" fmla="*/ 3072338 w 4606884"/>
-              <a:gd name="csY3" fmla="*/ 5484682 h 6633653"/>
-              <a:gd name="csX4" fmla="*/ 200523 w 4606884"/>
-              <a:gd name="csY4" fmla="*/ 6457530 h 6633653"/>
-              <a:gd name="csX5" fmla="*/ 1814833 w 4606884"/>
-              <a:gd name="csY5" fmla="*/ 3544996 h 6633653"/>
-              <a:gd name="csX6" fmla="*/ 1413614 w 4606884"/>
-              <a:gd name="csY6" fmla="*/ 714544 h 6633653"/>
-              <a:gd name="csX0" fmla="*/ 1413614 w 4606884"/>
-              <a:gd name="csY0" fmla="*/ 721519 h 6640628"/>
-              <a:gd name="csX1" fmla="*/ 2801404 w 4606884"/>
-              <a:gd name="csY1" fmla="*/ 15380 h 6640628"/>
-              <a:gd name="csX2" fmla="*/ 4606884 w 4606884"/>
-              <a:gd name="csY2" fmla="*/ 1477875 h 6640628"/>
-              <a:gd name="csX3" fmla="*/ 3072338 w 4606884"/>
-              <a:gd name="csY3" fmla="*/ 5491657 h 6640628"/>
-              <a:gd name="csX4" fmla="*/ 200523 w 4606884"/>
-              <a:gd name="csY4" fmla="*/ 6464505 h 6640628"/>
-              <a:gd name="csX5" fmla="*/ 1814833 w 4606884"/>
-              <a:gd name="csY5" fmla="*/ 3551971 h 6640628"/>
-              <a:gd name="csX6" fmla="*/ 1413614 w 4606884"/>
-              <a:gd name="csY6" fmla="*/ 721519 h 6640628"/>
-              <a:gd name="csX0" fmla="*/ 1481347 w 4606884"/>
-              <a:gd name="csY0" fmla="*/ 685139 h 6705848"/>
-              <a:gd name="csX1" fmla="*/ 2801404 w 4606884"/>
-              <a:gd name="csY1" fmla="*/ 80600 h 6705848"/>
-              <a:gd name="csX2" fmla="*/ 4606884 w 4606884"/>
-              <a:gd name="csY2" fmla="*/ 1543095 h 6705848"/>
-              <a:gd name="csX3" fmla="*/ 3072338 w 4606884"/>
-              <a:gd name="csY3" fmla="*/ 5556877 h 6705848"/>
-              <a:gd name="csX4" fmla="*/ 200523 w 4606884"/>
-              <a:gd name="csY4" fmla="*/ 6529725 h 6705848"/>
-              <a:gd name="csX5" fmla="*/ 1814833 w 4606884"/>
-              <a:gd name="csY5" fmla="*/ 3617191 h 6705848"/>
-              <a:gd name="csX6" fmla="*/ 1481347 w 4606884"/>
-              <a:gd name="csY6" fmla="*/ 685139 h 6705848"/>
-              <a:gd name="csX0" fmla="*/ 1481347 w 4606884"/>
-              <a:gd name="csY0" fmla="*/ 623980 h 6644689"/>
-              <a:gd name="csX1" fmla="*/ 3061048 w 4606884"/>
-              <a:gd name="csY1" fmla="*/ 53307 h 6644689"/>
-              <a:gd name="csX2" fmla="*/ 4606884 w 4606884"/>
-              <a:gd name="csY2" fmla="*/ 1481936 h 6644689"/>
-              <a:gd name="csX3" fmla="*/ 3072338 w 4606884"/>
-              <a:gd name="csY3" fmla="*/ 5495718 h 6644689"/>
-              <a:gd name="csX4" fmla="*/ 200523 w 4606884"/>
-              <a:gd name="csY4" fmla="*/ 6468566 h 6644689"/>
-              <a:gd name="csX5" fmla="*/ 1814833 w 4606884"/>
-              <a:gd name="csY5" fmla="*/ 3556032 h 6644689"/>
-              <a:gd name="csX6" fmla="*/ 1481347 w 4606884"/>
-              <a:gd name="csY6" fmla="*/ 623980 h 6644689"/>
-              <a:gd name="csX0" fmla="*/ 1481347 w 4606884"/>
-              <a:gd name="csY0" fmla="*/ 591938 h 6612647"/>
-              <a:gd name="csX1" fmla="*/ 3061048 w 4606884"/>
-              <a:gd name="csY1" fmla="*/ 21265 h 6612647"/>
-              <a:gd name="csX2" fmla="*/ 4606884 w 4606884"/>
-              <a:gd name="csY2" fmla="*/ 1449894 h 6612647"/>
-              <a:gd name="csX3" fmla="*/ 3072338 w 4606884"/>
-              <a:gd name="csY3" fmla="*/ 5463676 h 6612647"/>
-              <a:gd name="csX4" fmla="*/ 200523 w 4606884"/>
-              <a:gd name="csY4" fmla="*/ 6436524 h 6612647"/>
-              <a:gd name="csX5" fmla="*/ 1814833 w 4606884"/>
-              <a:gd name="csY5" fmla="*/ 3523990 h 6612647"/>
-              <a:gd name="csX6" fmla="*/ 1481347 w 4606884"/>
-              <a:gd name="csY6" fmla="*/ 591938 h 6612647"/>
-              <a:gd name="csX0" fmla="*/ 1391036 w 4606884"/>
-              <a:gd name="csY0" fmla="*/ 572824 h 6661267"/>
-              <a:gd name="csX1" fmla="*/ 3061048 w 4606884"/>
-              <a:gd name="csY1" fmla="*/ 69885 h 6661267"/>
-              <a:gd name="csX2" fmla="*/ 4606884 w 4606884"/>
-              <a:gd name="csY2" fmla="*/ 1498514 h 6661267"/>
-              <a:gd name="csX3" fmla="*/ 3072338 w 4606884"/>
-              <a:gd name="csY3" fmla="*/ 5512296 h 6661267"/>
-              <a:gd name="csX4" fmla="*/ 200523 w 4606884"/>
-              <a:gd name="csY4" fmla="*/ 6485144 h 6661267"/>
-              <a:gd name="csX5" fmla="*/ 1814833 w 4606884"/>
-              <a:gd name="csY5" fmla="*/ 3572610 h 6661267"/>
-              <a:gd name="csX6" fmla="*/ 1391036 w 4606884"/>
-              <a:gd name="csY6" fmla="*/ 572824 h 6661267"/>
-              <a:gd name="csX0" fmla="*/ 1384424 w 4600272"/>
-              <a:gd name="csY0" fmla="*/ 572824 h 6661267"/>
-              <a:gd name="csX1" fmla="*/ 3054436 w 4600272"/>
-              <a:gd name="csY1" fmla="*/ 69885 h 6661267"/>
-              <a:gd name="csX2" fmla="*/ 4600272 w 4600272"/>
-              <a:gd name="csY2" fmla="*/ 1498514 h 6661267"/>
-              <a:gd name="csX3" fmla="*/ 3065726 w 4600272"/>
-              <a:gd name="csY3" fmla="*/ 5512296 h 6661267"/>
-              <a:gd name="csX4" fmla="*/ 193911 w 4600272"/>
-              <a:gd name="csY4" fmla="*/ 6485144 h 6661267"/>
-              <a:gd name="csX5" fmla="*/ 1808221 w 4600272"/>
-              <a:gd name="csY5" fmla="*/ 3572610 h 6661267"/>
-              <a:gd name="csX6" fmla="*/ 1384424 w 4600272"/>
-              <a:gd name="csY6" fmla="*/ 572824 h 6661267"/>
-              <a:gd name="csX0" fmla="*/ 1399338 w 4615186"/>
-              <a:gd name="csY0" fmla="*/ 565951 h 6654394"/>
-              <a:gd name="csX1" fmla="*/ 3069350 w 4615186"/>
-              <a:gd name="csY1" fmla="*/ 63012 h 6654394"/>
-              <a:gd name="csX2" fmla="*/ 4615186 w 4615186"/>
-              <a:gd name="csY2" fmla="*/ 1491641 h 6654394"/>
-              <a:gd name="csX3" fmla="*/ 3080640 w 4615186"/>
-              <a:gd name="csY3" fmla="*/ 5505423 h 6654394"/>
-              <a:gd name="csX4" fmla="*/ 208825 w 4615186"/>
-              <a:gd name="csY4" fmla="*/ 6478271 h 6654394"/>
-              <a:gd name="csX5" fmla="*/ 1687669 w 4615186"/>
-              <a:gd name="csY5" fmla="*/ 3317381 h 6654394"/>
-              <a:gd name="csX6" fmla="*/ 1399338 w 4615186"/>
-              <a:gd name="csY6" fmla="*/ 565951 h 6654394"/>
-              <a:gd name="csX0" fmla="*/ 1382281 w 4598129"/>
-              <a:gd name="csY0" fmla="*/ 565951 h 6654394"/>
-              <a:gd name="csX1" fmla="*/ 3052293 w 4598129"/>
-              <a:gd name="csY1" fmla="*/ 63012 h 6654394"/>
-              <a:gd name="csX2" fmla="*/ 4598129 w 4598129"/>
-              <a:gd name="csY2" fmla="*/ 1491641 h 6654394"/>
-              <a:gd name="csX3" fmla="*/ 3063583 w 4598129"/>
-              <a:gd name="csY3" fmla="*/ 5505423 h 6654394"/>
-              <a:gd name="csX4" fmla="*/ 191768 w 4598129"/>
-              <a:gd name="csY4" fmla="*/ 6478271 h 6654394"/>
-              <a:gd name="csX5" fmla="*/ 1670612 w 4598129"/>
-              <a:gd name="csY5" fmla="*/ 3317381 h 6654394"/>
-              <a:gd name="csX6" fmla="*/ 1382281 w 4598129"/>
-              <a:gd name="csY6" fmla="*/ 565951 h 6654394"/>
-              <a:gd name="csX0" fmla="*/ 1382281 w 4598129"/>
-              <a:gd name="csY0" fmla="*/ 573492 h 6661935"/>
-              <a:gd name="csX1" fmla="*/ 3052293 w 4598129"/>
-              <a:gd name="csY1" fmla="*/ 70553 h 6661935"/>
-              <a:gd name="csX2" fmla="*/ 4598129 w 4598129"/>
-              <a:gd name="csY2" fmla="*/ 1499182 h 6661935"/>
-              <a:gd name="csX3" fmla="*/ 3063583 w 4598129"/>
-              <a:gd name="csY3" fmla="*/ 5512964 h 6661935"/>
-              <a:gd name="csX4" fmla="*/ 191768 w 4598129"/>
-              <a:gd name="csY4" fmla="*/ 6485812 h 6661935"/>
-              <a:gd name="csX5" fmla="*/ 1670612 w 4598129"/>
-              <a:gd name="csY5" fmla="*/ 3324922 h 6661935"/>
-              <a:gd name="csX6" fmla="*/ 1382281 w 4598129"/>
-              <a:gd name="csY6" fmla="*/ 573492 h 6661935"/>
-              <a:gd name="csX0" fmla="*/ 1416148 w 4598129"/>
-              <a:gd name="csY0" fmla="*/ 688391 h 6630078"/>
-              <a:gd name="csX1" fmla="*/ 3052293 w 4598129"/>
-              <a:gd name="csY1" fmla="*/ 38696 h 6630078"/>
-              <a:gd name="csX2" fmla="*/ 4598129 w 4598129"/>
-              <a:gd name="csY2" fmla="*/ 1467325 h 6630078"/>
-              <a:gd name="csX3" fmla="*/ 3063583 w 4598129"/>
-              <a:gd name="csY3" fmla="*/ 5481107 h 6630078"/>
-              <a:gd name="csX4" fmla="*/ 191768 w 4598129"/>
-              <a:gd name="csY4" fmla="*/ 6453955 h 6630078"/>
-              <a:gd name="csX5" fmla="*/ 1670612 w 4598129"/>
-              <a:gd name="csY5" fmla="*/ 3293065 h 6630078"/>
-              <a:gd name="csX6" fmla="*/ 1416148 w 4598129"/>
-              <a:gd name="csY6" fmla="*/ 688391 h 6630078"/>
-              <a:gd name="csX0" fmla="*/ 1416148 w 4598129"/>
-              <a:gd name="csY0" fmla="*/ 687355 h 6629042"/>
-              <a:gd name="csX1" fmla="*/ 3052293 w 4598129"/>
-              <a:gd name="csY1" fmla="*/ 37660 h 6629042"/>
-              <a:gd name="csX2" fmla="*/ 4598129 w 4598129"/>
-              <a:gd name="csY2" fmla="*/ 1466289 h 6629042"/>
-              <a:gd name="csX3" fmla="*/ 3063583 w 4598129"/>
-              <a:gd name="csY3" fmla="*/ 5480071 h 6629042"/>
-              <a:gd name="csX4" fmla="*/ 191768 w 4598129"/>
-              <a:gd name="csY4" fmla="*/ 6452919 h 6629042"/>
-              <a:gd name="csX5" fmla="*/ 1670612 w 4598129"/>
-              <a:gd name="csY5" fmla="*/ 3292029 h 6629042"/>
-              <a:gd name="csX6" fmla="*/ 1416148 w 4598129"/>
-              <a:gd name="csY6" fmla="*/ 687355 h 6629042"/>
-              <a:gd name="csX0" fmla="*/ 1416148 w 4598129"/>
-              <a:gd name="csY0" fmla="*/ 690596 h 6632283"/>
-              <a:gd name="csX1" fmla="*/ 3052293 w 4598129"/>
-              <a:gd name="csY1" fmla="*/ 40901 h 6632283"/>
-              <a:gd name="csX2" fmla="*/ 4598129 w 4598129"/>
-              <a:gd name="csY2" fmla="*/ 1469530 h 6632283"/>
-              <a:gd name="csX3" fmla="*/ 3063583 w 4598129"/>
-              <a:gd name="csY3" fmla="*/ 5483312 h 6632283"/>
-              <a:gd name="csX4" fmla="*/ 191768 w 4598129"/>
-              <a:gd name="csY4" fmla="*/ 6456160 h 6632283"/>
-              <a:gd name="csX5" fmla="*/ 1670612 w 4598129"/>
-              <a:gd name="csY5" fmla="*/ 3295270 h 6632283"/>
-              <a:gd name="csX6" fmla="*/ 1416148 w 4598129"/>
-              <a:gd name="csY6" fmla="*/ 690596 h 6632283"/>
-              <a:gd name="csX0" fmla="*/ 1416148 w 4598129"/>
-              <a:gd name="csY0" fmla="*/ 684492 h 6626179"/>
-              <a:gd name="csX1" fmla="*/ 3108737 w 4598129"/>
-              <a:gd name="csY1" fmla="*/ 34797 h 6626179"/>
-              <a:gd name="csX2" fmla="*/ 4598129 w 4598129"/>
-              <a:gd name="csY2" fmla="*/ 1463426 h 6626179"/>
-              <a:gd name="csX3" fmla="*/ 3063583 w 4598129"/>
-              <a:gd name="csY3" fmla="*/ 5477208 h 6626179"/>
-              <a:gd name="csX4" fmla="*/ 191768 w 4598129"/>
-              <a:gd name="csY4" fmla="*/ 6450056 h 6626179"/>
-              <a:gd name="csX5" fmla="*/ 1670612 w 4598129"/>
-              <a:gd name="csY5" fmla="*/ 3289166 h 6626179"/>
-              <a:gd name="csX6" fmla="*/ 1416148 w 4598129"/>
-              <a:gd name="csY6" fmla="*/ 684492 h 6626179"/>
-              <a:gd name="csX0" fmla="*/ 1416148 w 4598129"/>
-              <a:gd name="csY0" fmla="*/ 658667 h 6600354"/>
-              <a:gd name="csX1" fmla="*/ 3108737 w 4598129"/>
-              <a:gd name="csY1" fmla="*/ 8972 h 6600354"/>
-              <a:gd name="csX2" fmla="*/ 4598129 w 4598129"/>
-              <a:gd name="csY2" fmla="*/ 1437601 h 6600354"/>
-              <a:gd name="csX3" fmla="*/ 3063583 w 4598129"/>
-              <a:gd name="csY3" fmla="*/ 5451383 h 6600354"/>
-              <a:gd name="csX4" fmla="*/ 191768 w 4598129"/>
-              <a:gd name="csY4" fmla="*/ 6424231 h 6600354"/>
-              <a:gd name="csX5" fmla="*/ 1670612 w 4598129"/>
-              <a:gd name="csY5" fmla="*/ 3263341 h 6600354"/>
-              <a:gd name="csX6" fmla="*/ 1416148 w 4598129"/>
-              <a:gd name="csY6" fmla="*/ 658667 h 6600354"/>
-              <a:gd name="csX0" fmla="*/ 1416148 w 4598129"/>
-              <a:gd name="csY0" fmla="*/ 591947 h 6646523"/>
-              <a:gd name="csX1" fmla="*/ 3108737 w 4598129"/>
-              <a:gd name="csY1" fmla="*/ 55141 h 6646523"/>
-              <a:gd name="csX2" fmla="*/ 4598129 w 4598129"/>
-              <a:gd name="csY2" fmla="*/ 1483770 h 6646523"/>
-              <a:gd name="csX3" fmla="*/ 3063583 w 4598129"/>
-              <a:gd name="csY3" fmla="*/ 5497552 h 6646523"/>
-              <a:gd name="csX4" fmla="*/ 191768 w 4598129"/>
-              <a:gd name="csY4" fmla="*/ 6470400 h 6646523"/>
-              <a:gd name="csX5" fmla="*/ 1670612 w 4598129"/>
-              <a:gd name="csY5" fmla="*/ 3309510 h 6646523"/>
-              <a:gd name="csX6" fmla="*/ 1416148 w 4598129"/>
-              <a:gd name="csY6" fmla="*/ 591947 h 6646523"/>
-              <a:gd name="csX0" fmla="*/ 1416148 w 4598129"/>
-              <a:gd name="csY0" fmla="*/ 591947 h 6646523"/>
-              <a:gd name="csX1" fmla="*/ 3108737 w 4598129"/>
-              <a:gd name="csY1" fmla="*/ 55141 h 6646523"/>
-              <a:gd name="csX2" fmla="*/ 4598129 w 4598129"/>
-              <a:gd name="csY2" fmla="*/ 1483770 h 6646523"/>
-              <a:gd name="csX3" fmla="*/ 3063583 w 4598129"/>
-              <a:gd name="csY3" fmla="*/ 5497552 h 6646523"/>
-              <a:gd name="csX4" fmla="*/ 191768 w 4598129"/>
-              <a:gd name="csY4" fmla="*/ 6470400 h 6646523"/>
-              <a:gd name="csX5" fmla="*/ 1670612 w 4598129"/>
-              <a:gd name="csY5" fmla="*/ 3309510 h 6646523"/>
-              <a:gd name="csX6" fmla="*/ 1416148 w 4598129"/>
-              <a:gd name="csY6" fmla="*/ 591947 h 6646523"/>
-              <a:gd name="csX0" fmla="*/ 1416148 w 4598129"/>
-              <a:gd name="csY0" fmla="*/ 534007 h 6588583"/>
-              <a:gd name="csX1" fmla="*/ 3266782 w 4598129"/>
-              <a:gd name="csY1" fmla="*/ 64934 h 6588583"/>
-              <a:gd name="csX2" fmla="*/ 4598129 w 4598129"/>
-              <a:gd name="csY2" fmla="*/ 1425830 h 6588583"/>
-              <a:gd name="csX3" fmla="*/ 3063583 w 4598129"/>
-              <a:gd name="csY3" fmla="*/ 5439612 h 6588583"/>
-              <a:gd name="csX4" fmla="*/ 191768 w 4598129"/>
-              <a:gd name="csY4" fmla="*/ 6412460 h 6588583"/>
-              <a:gd name="csX5" fmla="*/ 1670612 w 4598129"/>
-              <a:gd name="csY5" fmla="*/ 3251570 h 6588583"/>
-              <a:gd name="csX6" fmla="*/ 1416148 w 4598129"/>
-              <a:gd name="csY6" fmla="*/ 534007 h 6588583"/>
-              <a:gd name="csX0" fmla="*/ 1416148 w 4598129"/>
-              <a:gd name="csY0" fmla="*/ 534007 h 6588583"/>
-              <a:gd name="csX1" fmla="*/ 3266782 w 4598129"/>
-              <a:gd name="csY1" fmla="*/ 64934 h 6588583"/>
-              <a:gd name="csX2" fmla="*/ 4598129 w 4598129"/>
-              <a:gd name="csY2" fmla="*/ 1425830 h 6588583"/>
-              <a:gd name="csX3" fmla="*/ 3063583 w 4598129"/>
-              <a:gd name="csY3" fmla="*/ 5439612 h 6588583"/>
-              <a:gd name="csX4" fmla="*/ 191768 w 4598129"/>
-              <a:gd name="csY4" fmla="*/ 6412460 h 6588583"/>
-              <a:gd name="csX5" fmla="*/ 1670612 w 4598129"/>
-              <a:gd name="csY5" fmla="*/ 3251570 h 6588583"/>
-              <a:gd name="csX6" fmla="*/ 1416148 w 4598129"/>
-              <a:gd name="csY6" fmla="*/ 534007 h 6588583"/>
-              <a:gd name="csX0" fmla="*/ 1416148 w 4598129"/>
-              <a:gd name="csY0" fmla="*/ 601833 h 6656409"/>
-              <a:gd name="csX1" fmla="*/ 3368382 w 4598129"/>
-              <a:gd name="csY1" fmla="*/ 53738 h 6656409"/>
-              <a:gd name="csX2" fmla="*/ 4598129 w 4598129"/>
-              <a:gd name="csY2" fmla="*/ 1493656 h 6656409"/>
-              <a:gd name="csX3" fmla="*/ 3063583 w 4598129"/>
-              <a:gd name="csY3" fmla="*/ 5507438 h 6656409"/>
-              <a:gd name="csX4" fmla="*/ 191768 w 4598129"/>
-              <a:gd name="csY4" fmla="*/ 6480286 h 6656409"/>
-              <a:gd name="csX5" fmla="*/ 1670612 w 4598129"/>
-              <a:gd name="csY5" fmla="*/ 3319396 h 6656409"/>
-              <a:gd name="csX6" fmla="*/ 1416148 w 4598129"/>
-              <a:gd name="csY6" fmla="*/ 601833 h 6656409"/>
-              <a:gd name="csX0" fmla="*/ 1416148 w 4598129"/>
-              <a:gd name="csY0" fmla="*/ 578877 h 6633453"/>
-              <a:gd name="csX1" fmla="*/ 3368382 w 4598129"/>
-              <a:gd name="csY1" fmla="*/ 30782 h 6633453"/>
-              <a:gd name="csX2" fmla="*/ 4598129 w 4598129"/>
-              <a:gd name="csY2" fmla="*/ 1470700 h 6633453"/>
-              <a:gd name="csX3" fmla="*/ 3063583 w 4598129"/>
-              <a:gd name="csY3" fmla="*/ 5484482 h 6633453"/>
-              <a:gd name="csX4" fmla="*/ 191768 w 4598129"/>
-              <a:gd name="csY4" fmla="*/ 6457330 h 6633453"/>
-              <a:gd name="csX5" fmla="*/ 1670612 w 4598129"/>
-              <a:gd name="csY5" fmla="*/ 3296440 h 6633453"/>
-              <a:gd name="csX6" fmla="*/ 1416148 w 4598129"/>
-              <a:gd name="csY6" fmla="*/ 578877 h 6633453"/>
-              <a:gd name="csX0" fmla="*/ 1416148 w 4598129"/>
-              <a:gd name="csY0" fmla="*/ 558677 h 6613253"/>
-              <a:gd name="csX1" fmla="*/ 3390960 w 4598129"/>
-              <a:gd name="csY1" fmla="*/ 33160 h 6613253"/>
-              <a:gd name="csX2" fmla="*/ 4598129 w 4598129"/>
-              <a:gd name="csY2" fmla="*/ 1450500 h 6613253"/>
-              <a:gd name="csX3" fmla="*/ 3063583 w 4598129"/>
-              <a:gd name="csY3" fmla="*/ 5464282 h 6613253"/>
-              <a:gd name="csX4" fmla="*/ 191768 w 4598129"/>
-              <a:gd name="csY4" fmla="*/ 6437130 h 6613253"/>
-              <a:gd name="csX5" fmla="*/ 1670612 w 4598129"/>
-              <a:gd name="csY5" fmla="*/ 3276240 h 6613253"/>
-              <a:gd name="csX6" fmla="*/ 1416148 w 4598129"/>
-              <a:gd name="csY6" fmla="*/ 558677 h 6613253"/>
-              <a:gd name="csX0" fmla="*/ 1438726 w 4598129"/>
-              <a:gd name="csY0" fmla="*/ 515668 h 6660556"/>
-              <a:gd name="csX1" fmla="*/ 3390960 w 4598129"/>
-              <a:gd name="csY1" fmla="*/ 80463 h 6660556"/>
-              <a:gd name="csX2" fmla="*/ 4598129 w 4598129"/>
-              <a:gd name="csY2" fmla="*/ 1497803 h 6660556"/>
-              <a:gd name="csX3" fmla="*/ 3063583 w 4598129"/>
-              <a:gd name="csY3" fmla="*/ 5511585 h 6660556"/>
-              <a:gd name="csX4" fmla="*/ 191768 w 4598129"/>
-              <a:gd name="csY4" fmla="*/ 6484433 h 6660556"/>
-              <a:gd name="csX5" fmla="*/ 1670612 w 4598129"/>
-              <a:gd name="csY5" fmla="*/ 3323543 h 6660556"/>
-              <a:gd name="csX6" fmla="*/ 1438726 w 4598129"/>
-              <a:gd name="csY6" fmla="*/ 515668 h 6660556"/>
-              <a:gd name="csX0" fmla="*/ 1438726 w 4598129"/>
-              <a:gd name="csY0" fmla="*/ 494822 h 6639710"/>
-              <a:gd name="csX1" fmla="*/ 3390960 w 4598129"/>
-              <a:gd name="csY1" fmla="*/ 59617 h 6639710"/>
-              <a:gd name="csX2" fmla="*/ 4598129 w 4598129"/>
-              <a:gd name="csY2" fmla="*/ 1476957 h 6639710"/>
-              <a:gd name="csX3" fmla="*/ 3063583 w 4598129"/>
-              <a:gd name="csY3" fmla="*/ 5490739 h 6639710"/>
-              <a:gd name="csX4" fmla="*/ 191768 w 4598129"/>
-              <a:gd name="csY4" fmla="*/ 6463587 h 6639710"/>
-              <a:gd name="csX5" fmla="*/ 1670612 w 4598129"/>
-              <a:gd name="csY5" fmla="*/ 3302697 h 6639710"/>
-              <a:gd name="csX6" fmla="*/ 1438726 w 4598129"/>
-              <a:gd name="csY6" fmla="*/ 494822 h 6639710"/>
-              <a:gd name="csX0" fmla="*/ 1393570 w 4598129"/>
-              <a:gd name="csY0" fmla="*/ 468927 h 6647682"/>
-              <a:gd name="csX1" fmla="*/ 3390960 w 4598129"/>
-              <a:gd name="csY1" fmla="*/ 67589 h 6647682"/>
-              <a:gd name="csX2" fmla="*/ 4598129 w 4598129"/>
-              <a:gd name="csY2" fmla="*/ 1484929 h 6647682"/>
-              <a:gd name="csX3" fmla="*/ 3063583 w 4598129"/>
-              <a:gd name="csY3" fmla="*/ 5498711 h 6647682"/>
-              <a:gd name="csX4" fmla="*/ 191768 w 4598129"/>
-              <a:gd name="csY4" fmla="*/ 6471559 h 6647682"/>
-              <a:gd name="csX5" fmla="*/ 1670612 w 4598129"/>
-              <a:gd name="csY5" fmla="*/ 3310669 h 6647682"/>
-              <a:gd name="csX6" fmla="*/ 1393570 w 4598129"/>
-              <a:gd name="csY6" fmla="*/ 468927 h 6647682"/>
-              <a:gd name="csX0" fmla="*/ 1393570 w 4598129"/>
-              <a:gd name="csY0" fmla="*/ 492668 h 6671423"/>
-              <a:gd name="csX1" fmla="*/ 3424827 w 4598129"/>
-              <a:gd name="csY1" fmla="*/ 91330 h 6671423"/>
-              <a:gd name="csX2" fmla="*/ 4598129 w 4598129"/>
-              <a:gd name="csY2" fmla="*/ 1508670 h 6671423"/>
-              <a:gd name="csX3" fmla="*/ 3063583 w 4598129"/>
-              <a:gd name="csY3" fmla="*/ 5522452 h 6671423"/>
-              <a:gd name="csX4" fmla="*/ 191768 w 4598129"/>
-              <a:gd name="csY4" fmla="*/ 6495300 h 6671423"/>
-              <a:gd name="csX5" fmla="*/ 1670612 w 4598129"/>
-              <a:gd name="csY5" fmla="*/ 3334410 h 6671423"/>
-              <a:gd name="csX6" fmla="*/ 1393570 w 4598129"/>
-              <a:gd name="csY6" fmla="*/ 492668 h 6671423"/>
-              <a:gd name="csX0" fmla="*/ 1393570 w 4598129"/>
-              <a:gd name="csY0" fmla="*/ 467585 h 6646340"/>
-              <a:gd name="csX1" fmla="*/ 3424827 w 4598129"/>
-              <a:gd name="csY1" fmla="*/ 66247 h 6646340"/>
-              <a:gd name="csX2" fmla="*/ 4598129 w 4598129"/>
-              <a:gd name="csY2" fmla="*/ 1483587 h 6646340"/>
-              <a:gd name="csX3" fmla="*/ 3063583 w 4598129"/>
-              <a:gd name="csY3" fmla="*/ 5497369 h 6646340"/>
-              <a:gd name="csX4" fmla="*/ 191768 w 4598129"/>
-              <a:gd name="csY4" fmla="*/ 6470217 h 6646340"/>
-              <a:gd name="csX5" fmla="*/ 1670612 w 4598129"/>
-              <a:gd name="csY5" fmla="*/ 3309327 h 6646340"/>
-              <a:gd name="csX6" fmla="*/ 1393570 w 4598129"/>
-              <a:gd name="csY6" fmla="*/ 467585 h 6646340"/>
-              <a:gd name="csX0" fmla="*/ 1393570 w 4598129"/>
-              <a:gd name="csY0" fmla="*/ 467585 h 6646340"/>
-              <a:gd name="csX1" fmla="*/ 3424827 w 4598129"/>
-              <a:gd name="csY1" fmla="*/ 66247 h 6646340"/>
-              <a:gd name="csX2" fmla="*/ 4598129 w 4598129"/>
-              <a:gd name="csY2" fmla="*/ 1483587 h 6646340"/>
-              <a:gd name="csX3" fmla="*/ 3063583 w 4598129"/>
-              <a:gd name="csY3" fmla="*/ 5497369 h 6646340"/>
-              <a:gd name="csX4" fmla="*/ 191768 w 4598129"/>
-              <a:gd name="csY4" fmla="*/ 6470217 h 6646340"/>
-              <a:gd name="csX5" fmla="*/ 1670612 w 4598129"/>
-              <a:gd name="csY5" fmla="*/ 3309327 h 6646340"/>
-              <a:gd name="csX6" fmla="*/ 1393570 w 4598129"/>
-              <a:gd name="csY6" fmla="*/ 467585 h 6646340"/>
-              <a:gd name="csX0" fmla="*/ 1393570 w 4598129"/>
-              <a:gd name="csY0" fmla="*/ 467585 h 6646340"/>
-              <a:gd name="csX1" fmla="*/ 3797360 w 4598129"/>
-              <a:gd name="csY1" fmla="*/ 66247 h 6646340"/>
-              <a:gd name="csX2" fmla="*/ 4598129 w 4598129"/>
-              <a:gd name="csY2" fmla="*/ 1483587 h 6646340"/>
-              <a:gd name="csX3" fmla="*/ 3063583 w 4598129"/>
-              <a:gd name="csY3" fmla="*/ 5497369 h 6646340"/>
-              <a:gd name="csX4" fmla="*/ 191768 w 4598129"/>
-              <a:gd name="csY4" fmla="*/ 6470217 h 6646340"/>
-              <a:gd name="csX5" fmla="*/ 1670612 w 4598129"/>
-              <a:gd name="csY5" fmla="*/ 3309327 h 6646340"/>
-              <a:gd name="csX6" fmla="*/ 1393570 w 4598129"/>
-              <a:gd name="csY6" fmla="*/ 467585 h 6646340"/>
-              <a:gd name="csX0" fmla="*/ 1393570 w 4598129"/>
-              <a:gd name="csY0" fmla="*/ 487651 h 6666406"/>
-              <a:gd name="csX1" fmla="*/ 3797360 w 4598129"/>
-              <a:gd name="csY1" fmla="*/ 86313 h 6666406"/>
-              <a:gd name="csX2" fmla="*/ 4598129 w 4598129"/>
-              <a:gd name="csY2" fmla="*/ 1503653 h 6666406"/>
-              <a:gd name="csX3" fmla="*/ 3063583 w 4598129"/>
-              <a:gd name="csY3" fmla="*/ 5517435 h 6666406"/>
-              <a:gd name="csX4" fmla="*/ 191768 w 4598129"/>
-              <a:gd name="csY4" fmla="*/ 6490283 h 6666406"/>
-              <a:gd name="csX5" fmla="*/ 1670612 w 4598129"/>
-              <a:gd name="csY5" fmla="*/ 3329393 h 6666406"/>
-              <a:gd name="csX6" fmla="*/ 1393570 w 4598129"/>
-              <a:gd name="csY6" fmla="*/ 487651 h 6666406"/>
-              <a:gd name="csX0" fmla="*/ 1393570 w 4598129"/>
-              <a:gd name="csY0" fmla="*/ 547856 h 6726611"/>
-              <a:gd name="csX1" fmla="*/ 3797360 w 4598129"/>
-              <a:gd name="csY1" fmla="*/ 146518 h 6726611"/>
-              <a:gd name="csX2" fmla="*/ 4598129 w 4598129"/>
-              <a:gd name="csY2" fmla="*/ 1563858 h 6726611"/>
-              <a:gd name="csX3" fmla="*/ 3063583 w 4598129"/>
-              <a:gd name="csY3" fmla="*/ 5577640 h 6726611"/>
-              <a:gd name="csX4" fmla="*/ 191768 w 4598129"/>
-              <a:gd name="csY4" fmla="*/ 6550488 h 6726611"/>
-              <a:gd name="csX5" fmla="*/ 1670612 w 4598129"/>
-              <a:gd name="csY5" fmla="*/ 3389598 h 6726611"/>
-              <a:gd name="csX6" fmla="*/ 1393570 w 4598129"/>
-              <a:gd name="csY6" fmla="*/ 547856 h 6726611"/>
-              <a:gd name="csX0" fmla="*/ 1393570 w 4599402"/>
-              <a:gd name="csY0" fmla="*/ 547856 h 6726611"/>
-              <a:gd name="csX1" fmla="*/ 3797360 w 4599402"/>
-              <a:gd name="csY1" fmla="*/ 146518 h 6726611"/>
-              <a:gd name="csX2" fmla="*/ 4598129 w 4599402"/>
-              <a:gd name="csY2" fmla="*/ 1563858 h 6726611"/>
-              <a:gd name="csX3" fmla="*/ 3063583 w 4599402"/>
-              <a:gd name="csY3" fmla="*/ 5577640 h 6726611"/>
-              <a:gd name="csX4" fmla="*/ 191768 w 4599402"/>
-              <a:gd name="csY4" fmla="*/ 6550488 h 6726611"/>
-              <a:gd name="csX5" fmla="*/ 1670612 w 4599402"/>
-              <a:gd name="csY5" fmla="*/ 3389598 h 6726611"/>
-              <a:gd name="csX6" fmla="*/ 1393570 w 4599402"/>
-              <a:gd name="csY6" fmla="*/ 547856 h 6726611"/>
-              <a:gd name="csX0" fmla="*/ 1393570 w 4603890"/>
-              <a:gd name="csY0" fmla="*/ 488366 h 6667121"/>
-              <a:gd name="csX1" fmla="*/ 4057005 w 4603890"/>
-              <a:gd name="csY1" fmla="*/ 166050 h 6667121"/>
-              <a:gd name="csX2" fmla="*/ 4598129 w 4603890"/>
-              <a:gd name="csY2" fmla="*/ 1504368 h 6667121"/>
-              <a:gd name="csX3" fmla="*/ 3063583 w 4603890"/>
-              <a:gd name="csY3" fmla="*/ 5518150 h 6667121"/>
-              <a:gd name="csX4" fmla="*/ 191768 w 4603890"/>
-              <a:gd name="csY4" fmla="*/ 6490998 h 6667121"/>
-              <a:gd name="csX5" fmla="*/ 1670612 w 4603890"/>
-              <a:gd name="csY5" fmla="*/ 3330108 h 6667121"/>
-              <a:gd name="csX6" fmla="*/ 1393570 w 4603890"/>
-              <a:gd name="csY6" fmla="*/ 488366 h 6667121"/>
-              <a:gd name="csX0" fmla="*/ 1393570 w 4615934"/>
-              <a:gd name="csY0" fmla="*/ 458638 h 6637393"/>
-              <a:gd name="csX1" fmla="*/ 4057005 w 4615934"/>
-              <a:gd name="csY1" fmla="*/ 136322 h 6637393"/>
-              <a:gd name="csX2" fmla="*/ 4598129 w 4615934"/>
-              <a:gd name="csY2" fmla="*/ 1474640 h 6637393"/>
-              <a:gd name="csX3" fmla="*/ 3063583 w 4615934"/>
-              <a:gd name="csY3" fmla="*/ 5488422 h 6637393"/>
-              <a:gd name="csX4" fmla="*/ 191768 w 4615934"/>
-              <a:gd name="csY4" fmla="*/ 6461270 h 6637393"/>
-              <a:gd name="csX5" fmla="*/ 1670612 w 4615934"/>
-              <a:gd name="csY5" fmla="*/ 3300380 h 6637393"/>
-              <a:gd name="csX6" fmla="*/ 1393570 w 4615934"/>
-              <a:gd name="csY6" fmla="*/ 458638 h 6637393"/>
-              <a:gd name="csX0" fmla="*/ 1630636 w 4601822"/>
-              <a:gd name="csY0" fmla="*/ 321391 h 6737213"/>
-              <a:gd name="csX1" fmla="*/ 4057005 w 4601822"/>
-              <a:gd name="csY1" fmla="*/ 236142 h 6737213"/>
-              <a:gd name="csX2" fmla="*/ 4598129 w 4601822"/>
-              <a:gd name="csY2" fmla="*/ 1574460 h 6737213"/>
-              <a:gd name="csX3" fmla="*/ 3063583 w 4601822"/>
-              <a:gd name="csY3" fmla="*/ 5588242 h 6737213"/>
-              <a:gd name="csX4" fmla="*/ 191768 w 4601822"/>
-              <a:gd name="csY4" fmla="*/ 6561090 h 6737213"/>
-              <a:gd name="csX5" fmla="*/ 1670612 w 4601822"/>
-              <a:gd name="csY5" fmla="*/ 3400200 h 6737213"/>
-              <a:gd name="csX6" fmla="*/ 1630636 w 4601822"/>
-              <a:gd name="csY6" fmla="*/ 321391 h 6737213"/>
-              <a:gd name="csX0" fmla="*/ 1499940 w 4471126"/>
-              <a:gd name="csY0" fmla="*/ 321391 h 6859664"/>
-              <a:gd name="csX1" fmla="*/ 3926309 w 4471126"/>
-              <a:gd name="csY1" fmla="*/ 236142 h 6859664"/>
-              <a:gd name="csX2" fmla="*/ 4467433 w 4471126"/>
-              <a:gd name="csY2" fmla="*/ 1574460 h 6859664"/>
-              <a:gd name="csX3" fmla="*/ 2932887 w 4471126"/>
-              <a:gd name="csY3" fmla="*/ 5588242 h 6859664"/>
-              <a:gd name="csX4" fmla="*/ 207827 w 4471126"/>
-              <a:gd name="csY4" fmla="*/ 6685268 h 6859664"/>
-              <a:gd name="csX5" fmla="*/ 1539916 w 4471126"/>
-              <a:gd name="csY5" fmla="*/ 3400200 h 6859664"/>
-              <a:gd name="csX6" fmla="*/ 1499940 w 4471126"/>
-              <a:gd name="csY6" fmla="*/ 321391 h 6859664"/>
-              <a:gd name="csX0" fmla="*/ 1453694 w 4424880"/>
-              <a:gd name="csY0" fmla="*/ 330618 h 6868891"/>
-              <a:gd name="csX1" fmla="*/ 3880063 w 4424880"/>
-              <a:gd name="csY1" fmla="*/ 245369 h 6868891"/>
-              <a:gd name="csX2" fmla="*/ 4421187 w 4424880"/>
-              <a:gd name="csY2" fmla="*/ 1583687 h 6868891"/>
-              <a:gd name="csX3" fmla="*/ 2886641 w 4424880"/>
-              <a:gd name="csY3" fmla="*/ 5597469 h 6868891"/>
-              <a:gd name="csX4" fmla="*/ 161581 w 4424880"/>
-              <a:gd name="csY4" fmla="*/ 6694495 h 6868891"/>
-              <a:gd name="csX5" fmla="*/ 1990381 w 4424880"/>
-              <a:gd name="csY5" fmla="*/ 3544894 h 6868891"/>
-              <a:gd name="csX6" fmla="*/ 1453694 w 4424880"/>
-              <a:gd name="csY6" fmla="*/ 330618 h 6868891"/>
-              <a:gd name="csX0" fmla="*/ 1482302 w 4453488"/>
-              <a:gd name="csY0" fmla="*/ 330618 h 6868891"/>
-              <a:gd name="csX1" fmla="*/ 3908671 w 4453488"/>
-              <a:gd name="csY1" fmla="*/ 245369 h 6868891"/>
-              <a:gd name="csX2" fmla="*/ 4449795 w 4453488"/>
-              <a:gd name="csY2" fmla="*/ 1583687 h 6868891"/>
-              <a:gd name="csX3" fmla="*/ 2915249 w 4453488"/>
-              <a:gd name="csY3" fmla="*/ 5597469 h 6868891"/>
-              <a:gd name="csX4" fmla="*/ 190189 w 4453488"/>
-              <a:gd name="csY4" fmla="*/ 6694495 h 6868891"/>
-              <a:gd name="csX5" fmla="*/ 2018989 w 4453488"/>
-              <a:gd name="csY5" fmla="*/ 3544894 h 6868891"/>
-              <a:gd name="csX6" fmla="*/ 1482302 w 4453488"/>
-              <a:gd name="csY6" fmla="*/ 330618 h 6868891"/>
-              <a:gd name="csX0" fmla="*/ 1482302 w 4453488"/>
-              <a:gd name="csY0" fmla="*/ 330618 h 6868891"/>
-              <a:gd name="csX1" fmla="*/ 3908671 w 4453488"/>
-              <a:gd name="csY1" fmla="*/ 245369 h 6868891"/>
-              <a:gd name="csX2" fmla="*/ 4449795 w 4453488"/>
-              <a:gd name="csY2" fmla="*/ 1583687 h 6868891"/>
-              <a:gd name="csX3" fmla="*/ 2915249 w 4453488"/>
-              <a:gd name="csY3" fmla="*/ 5597469 h 6868891"/>
-              <a:gd name="csX4" fmla="*/ 190189 w 4453488"/>
-              <a:gd name="csY4" fmla="*/ 6694495 h 6868891"/>
-              <a:gd name="csX5" fmla="*/ 2018989 w 4453488"/>
-              <a:gd name="csY5" fmla="*/ 3544894 h 6868891"/>
-              <a:gd name="csX6" fmla="*/ 1482302 w 4453488"/>
-              <a:gd name="csY6" fmla="*/ 330618 h 6868891"/>
-              <a:gd name="csX0" fmla="*/ 1459724 w 4453599"/>
-              <a:gd name="csY0" fmla="*/ 433979 h 6746474"/>
-              <a:gd name="csX1" fmla="*/ 3908671 w 4453599"/>
-              <a:gd name="csY1" fmla="*/ 122952 h 6746474"/>
-              <a:gd name="csX2" fmla="*/ 4449795 w 4453599"/>
-              <a:gd name="csY2" fmla="*/ 1461270 h 6746474"/>
-              <a:gd name="csX3" fmla="*/ 2915249 w 4453599"/>
-              <a:gd name="csY3" fmla="*/ 5475052 h 6746474"/>
-              <a:gd name="csX4" fmla="*/ 190189 w 4453599"/>
-              <a:gd name="csY4" fmla="*/ 6572078 h 6746474"/>
-              <a:gd name="csX5" fmla="*/ 2018989 w 4453599"/>
-              <a:gd name="csY5" fmla="*/ 3422477 h 6746474"/>
-              <a:gd name="csX6" fmla="*/ 1459724 w 4453599"/>
-              <a:gd name="csY6" fmla="*/ 433979 h 6746474"/>
-              <a:gd name="csX0" fmla="*/ 1459724 w 4453599"/>
-              <a:gd name="csY0" fmla="*/ 368091 h 6680586"/>
-              <a:gd name="csX1" fmla="*/ 3908671 w 4453599"/>
-              <a:gd name="csY1" fmla="*/ 57064 h 6680586"/>
-              <a:gd name="csX2" fmla="*/ 4449795 w 4453599"/>
-              <a:gd name="csY2" fmla="*/ 1395382 h 6680586"/>
-              <a:gd name="csX3" fmla="*/ 2915249 w 4453599"/>
-              <a:gd name="csY3" fmla="*/ 5409164 h 6680586"/>
-              <a:gd name="csX4" fmla="*/ 190189 w 4453599"/>
-              <a:gd name="csY4" fmla="*/ 6506190 h 6680586"/>
-              <a:gd name="csX5" fmla="*/ 2018989 w 4453599"/>
-              <a:gd name="csY5" fmla="*/ 3356589 h 6680586"/>
-              <a:gd name="csX6" fmla="*/ 1544854 w 4453599"/>
-              <a:gd name="csY6" fmla="*/ 1471347 h 6680586"/>
-              <a:gd name="csX7" fmla="*/ 1459724 w 4453599"/>
-              <a:gd name="csY7" fmla="*/ 368091 h 6680586"/>
-              <a:gd name="csX0" fmla="*/ 1459724 w 4453599"/>
-              <a:gd name="csY0" fmla="*/ 368091 h 6680586"/>
-              <a:gd name="csX1" fmla="*/ 3908671 w 4453599"/>
-              <a:gd name="csY1" fmla="*/ 57064 h 6680586"/>
-              <a:gd name="csX2" fmla="*/ 4449795 w 4453599"/>
-              <a:gd name="csY2" fmla="*/ 1395382 h 6680586"/>
-              <a:gd name="csX3" fmla="*/ 2915249 w 4453599"/>
-              <a:gd name="csY3" fmla="*/ 5409164 h 6680586"/>
-              <a:gd name="csX4" fmla="*/ 190189 w 4453599"/>
-              <a:gd name="csY4" fmla="*/ 6506190 h 6680586"/>
-              <a:gd name="csX5" fmla="*/ 2018989 w 4453599"/>
-              <a:gd name="csY5" fmla="*/ 3356589 h 6680586"/>
-              <a:gd name="csX6" fmla="*/ 1544854 w 4453599"/>
-              <a:gd name="csY6" fmla="*/ 1471347 h 6680586"/>
-              <a:gd name="csX7" fmla="*/ 1459724 w 4453599"/>
-              <a:gd name="csY7" fmla="*/ 368091 h 6680586"/>
-              <a:gd name="csX0" fmla="*/ 1459724 w 4453599"/>
-              <a:gd name="csY0" fmla="*/ 368091 h 6680586"/>
-              <a:gd name="csX1" fmla="*/ 3908671 w 4453599"/>
-              <a:gd name="csY1" fmla="*/ 57064 h 6680586"/>
-              <a:gd name="csX2" fmla="*/ 4449795 w 4453599"/>
-              <a:gd name="csY2" fmla="*/ 1395382 h 6680586"/>
-              <a:gd name="csX3" fmla="*/ 2915249 w 4453599"/>
-              <a:gd name="csY3" fmla="*/ 5409164 h 6680586"/>
-              <a:gd name="csX4" fmla="*/ 190189 w 4453599"/>
-              <a:gd name="csY4" fmla="*/ 6506190 h 6680586"/>
-              <a:gd name="csX5" fmla="*/ 2018989 w 4453599"/>
-              <a:gd name="csY5" fmla="*/ 3356589 h 6680586"/>
-              <a:gd name="csX6" fmla="*/ 1544854 w 4453599"/>
-              <a:gd name="csY6" fmla="*/ 1471347 h 6680586"/>
-              <a:gd name="csX7" fmla="*/ 1459724 w 4453599"/>
-              <a:gd name="csY7" fmla="*/ 368091 h 6680586"/>
-              <a:gd name="csX0" fmla="*/ 1459724 w 4453599"/>
-              <a:gd name="csY0" fmla="*/ 383247 h 6695742"/>
-              <a:gd name="csX1" fmla="*/ 3908671 w 4453599"/>
-              <a:gd name="csY1" fmla="*/ 72220 h 6695742"/>
-              <a:gd name="csX2" fmla="*/ 4449795 w 4453599"/>
-              <a:gd name="csY2" fmla="*/ 1410538 h 6695742"/>
-              <a:gd name="csX3" fmla="*/ 2915249 w 4453599"/>
-              <a:gd name="csY3" fmla="*/ 5424320 h 6695742"/>
-              <a:gd name="csX4" fmla="*/ 190189 w 4453599"/>
-              <a:gd name="csY4" fmla="*/ 6521346 h 6695742"/>
-              <a:gd name="csX5" fmla="*/ 2018989 w 4453599"/>
-              <a:gd name="csY5" fmla="*/ 3371745 h 6695742"/>
-              <a:gd name="csX6" fmla="*/ 1544854 w 4453599"/>
-              <a:gd name="csY6" fmla="*/ 1486503 h 6695742"/>
-              <a:gd name="csX7" fmla="*/ 1459724 w 4453599"/>
-              <a:gd name="csY7" fmla="*/ 383247 h 6695742"/>
-              <a:gd name="csX0" fmla="*/ 1459724 w 4160496"/>
-              <a:gd name="csY0" fmla="*/ 403883 h 6710874"/>
-              <a:gd name="csX1" fmla="*/ 3908671 w 4160496"/>
-              <a:gd name="csY1" fmla="*/ 92856 h 6710874"/>
-              <a:gd name="csX2" fmla="*/ 4065972 w 4160496"/>
-              <a:gd name="csY2" fmla="*/ 1713396 h 6710874"/>
-              <a:gd name="csX3" fmla="*/ 2915249 w 4160496"/>
-              <a:gd name="csY3" fmla="*/ 5444956 h 6710874"/>
-              <a:gd name="csX4" fmla="*/ 190189 w 4160496"/>
-              <a:gd name="csY4" fmla="*/ 6541982 h 6710874"/>
-              <a:gd name="csX5" fmla="*/ 2018989 w 4160496"/>
-              <a:gd name="csY5" fmla="*/ 3392381 h 6710874"/>
-              <a:gd name="csX6" fmla="*/ 1544854 w 4160496"/>
-              <a:gd name="csY6" fmla="*/ 1507139 h 6710874"/>
-              <a:gd name="csX7" fmla="*/ 1459724 w 4160496"/>
-              <a:gd name="csY7" fmla="*/ 403883 h 6710874"/>
-              <a:gd name="csX0" fmla="*/ 1459724 w 4133482"/>
-              <a:gd name="csY0" fmla="*/ 518594 h 6825585"/>
-              <a:gd name="csX1" fmla="*/ 3908671 w 4133482"/>
-              <a:gd name="csY1" fmla="*/ 207567 h 6825585"/>
-              <a:gd name="csX2" fmla="*/ 4065972 w 4133482"/>
-              <a:gd name="csY2" fmla="*/ 1828107 h 6825585"/>
-              <a:gd name="csX3" fmla="*/ 2915249 w 4133482"/>
-              <a:gd name="csY3" fmla="*/ 5559667 h 6825585"/>
-              <a:gd name="csX4" fmla="*/ 190189 w 4133482"/>
-              <a:gd name="csY4" fmla="*/ 6656693 h 6825585"/>
-              <a:gd name="csX5" fmla="*/ 2018989 w 4133482"/>
-              <a:gd name="csY5" fmla="*/ 3507092 h 6825585"/>
-              <a:gd name="csX6" fmla="*/ 1544854 w 4133482"/>
-              <a:gd name="csY6" fmla="*/ 1621850 h 6825585"/>
-              <a:gd name="csX7" fmla="*/ 1459724 w 4133482"/>
-              <a:gd name="csY7" fmla="*/ 518594 h 6825585"/>
-              <a:gd name="csX0" fmla="*/ 1459724 w 4210480"/>
-              <a:gd name="csY0" fmla="*/ 407707 h 6714698"/>
-              <a:gd name="csX1" fmla="*/ 4032849 w 4210480"/>
-              <a:gd name="csY1" fmla="*/ 209569 h 6714698"/>
-              <a:gd name="csX2" fmla="*/ 4065972 w 4210480"/>
-              <a:gd name="csY2" fmla="*/ 1717220 h 6714698"/>
-              <a:gd name="csX3" fmla="*/ 2915249 w 4210480"/>
-              <a:gd name="csY3" fmla="*/ 5448780 h 6714698"/>
-              <a:gd name="csX4" fmla="*/ 190189 w 4210480"/>
-              <a:gd name="csY4" fmla="*/ 6545806 h 6714698"/>
-              <a:gd name="csX5" fmla="*/ 2018989 w 4210480"/>
-              <a:gd name="csY5" fmla="*/ 3396205 h 6714698"/>
-              <a:gd name="csX6" fmla="*/ 1544854 w 4210480"/>
-              <a:gd name="csY6" fmla="*/ 1510963 h 6714698"/>
-              <a:gd name="csX7" fmla="*/ 1459724 w 4210480"/>
-              <a:gd name="csY7" fmla="*/ 407707 h 6714698"/>
-              <a:gd name="csX0" fmla="*/ 1459724 w 4150964"/>
-              <a:gd name="csY0" fmla="*/ 442784 h 6749775"/>
-              <a:gd name="csX1" fmla="*/ 4032849 w 4150964"/>
-              <a:gd name="csY1" fmla="*/ 244646 h 6749775"/>
-              <a:gd name="csX2" fmla="*/ 4065972 w 4150964"/>
-              <a:gd name="csY2" fmla="*/ 1752297 h 6749775"/>
-              <a:gd name="csX3" fmla="*/ 2915249 w 4150964"/>
-              <a:gd name="csY3" fmla="*/ 5483857 h 6749775"/>
-              <a:gd name="csX4" fmla="*/ 190189 w 4150964"/>
-              <a:gd name="csY4" fmla="*/ 6580883 h 6749775"/>
-              <a:gd name="csX5" fmla="*/ 2018989 w 4150964"/>
-              <a:gd name="csY5" fmla="*/ 3431282 h 6749775"/>
-              <a:gd name="csX6" fmla="*/ 1544854 w 4150964"/>
-              <a:gd name="csY6" fmla="*/ 1546040 h 6749775"/>
-              <a:gd name="csX7" fmla="*/ 1459724 w 4150964"/>
-              <a:gd name="csY7" fmla="*/ 442784 h 6749775"/>
-              <a:gd name="csX0" fmla="*/ 1459724 w 4262613"/>
-              <a:gd name="csY0" fmla="*/ 296778 h 6602702"/>
-              <a:gd name="csX1" fmla="*/ 4032849 w 4262613"/>
-              <a:gd name="csY1" fmla="*/ 98640 h 6602702"/>
-              <a:gd name="csX2" fmla="*/ 4122417 w 4262613"/>
-              <a:gd name="csY2" fmla="*/ 1662736 h 6602702"/>
-              <a:gd name="csX3" fmla="*/ 2915249 w 4262613"/>
-              <a:gd name="csY3" fmla="*/ 5337851 h 6602702"/>
-              <a:gd name="csX4" fmla="*/ 190189 w 4262613"/>
-              <a:gd name="csY4" fmla="*/ 6434877 h 6602702"/>
-              <a:gd name="csX5" fmla="*/ 2018989 w 4262613"/>
-              <a:gd name="csY5" fmla="*/ 3285276 h 6602702"/>
-              <a:gd name="csX6" fmla="*/ 1544854 w 4262613"/>
-              <a:gd name="csY6" fmla="*/ 1400034 h 6602702"/>
-              <a:gd name="csX7" fmla="*/ 1459724 w 4262613"/>
-              <a:gd name="csY7" fmla="*/ 296778 h 6602702"/>
-              <a:gd name="csX0" fmla="*/ 1459724 w 4262613"/>
-              <a:gd name="csY0" fmla="*/ 296778 h 6602702"/>
-              <a:gd name="csX1" fmla="*/ 4032849 w 4262613"/>
-              <a:gd name="csY1" fmla="*/ 98640 h 6602702"/>
-              <a:gd name="csX2" fmla="*/ 4122417 w 4262613"/>
-              <a:gd name="csY2" fmla="*/ 1662736 h 6602702"/>
-              <a:gd name="csX3" fmla="*/ 2915249 w 4262613"/>
-              <a:gd name="csY3" fmla="*/ 5337851 h 6602702"/>
-              <a:gd name="csX4" fmla="*/ 190189 w 4262613"/>
-              <a:gd name="csY4" fmla="*/ 6434877 h 6602702"/>
-              <a:gd name="csX5" fmla="*/ 2018989 w 4262613"/>
-              <a:gd name="csY5" fmla="*/ 3285276 h 6602702"/>
-              <a:gd name="csX6" fmla="*/ 1544854 w 4262613"/>
-              <a:gd name="csY6" fmla="*/ 1400034 h 6602702"/>
-              <a:gd name="csX7" fmla="*/ 1459724 w 4262613"/>
-              <a:gd name="csY7" fmla="*/ 296778 h 6602702"/>
-              <a:gd name="csX0" fmla="*/ 1459724 w 4262613"/>
-              <a:gd name="csY0" fmla="*/ 296778 h 6613004"/>
-              <a:gd name="csX1" fmla="*/ 4032849 w 4262613"/>
-              <a:gd name="csY1" fmla="*/ 98640 h 6613004"/>
-              <a:gd name="csX2" fmla="*/ 4122417 w 4262613"/>
-              <a:gd name="csY2" fmla="*/ 1662736 h 6613004"/>
-              <a:gd name="csX3" fmla="*/ 2441116 w 4262613"/>
-              <a:gd name="csY3" fmla="*/ 5416873 h 6613004"/>
-              <a:gd name="csX4" fmla="*/ 190189 w 4262613"/>
-              <a:gd name="csY4" fmla="*/ 6434877 h 6613004"/>
-              <a:gd name="csX5" fmla="*/ 2018989 w 4262613"/>
-              <a:gd name="csY5" fmla="*/ 3285276 h 6613004"/>
-              <a:gd name="csX6" fmla="*/ 1544854 w 4262613"/>
-              <a:gd name="csY6" fmla="*/ 1400034 h 6613004"/>
-              <a:gd name="csX7" fmla="*/ 1459724 w 4262613"/>
-              <a:gd name="csY7" fmla="*/ 296778 h 6613004"/>
-              <a:gd name="csX0" fmla="*/ 1507371 w 4310260"/>
-              <a:gd name="csY0" fmla="*/ 296778 h 6613004"/>
-              <a:gd name="csX1" fmla="*/ 4080496 w 4310260"/>
-              <a:gd name="csY1" fmla="*/ 98640 h 6613004"/>
-              <a:gd name="csX2" fmla="*/ 4170064 w 4310260"/>
-              <a:gd name="csY2" fmla="*/ 1662736 h 6613004"/>
-              <a:gd name="csX3" fmla="*/ 2488763 w 4310260"/>
-              <a:gd name="csY3" fmla="*/ 5416873 h 6613004"/>
-              <a:gd name="csX4" fmla="*/ 237836 w 4310260"/>
-              <a:gd name="csY4" fmla="*/ 6434877 h 6613004"/>
-              <a:gd name="csX5" fmla="*/ 1671525 w 4310260"/>
-              <a:gd name="csY5" fmla="*/ 3612654 h 6613004"/>
-              <a:gd name="csX6" fmla="*/ 1592501 w 4310260"/>
-              <a:gd name="csY6" fmla="*/ 1400034 h 6613004"/>
-              <a:gd name="csX7" fmla="*/ 1507371 w 4310260"/>
-              <a:gd name="csY7" fmla="*/ 296778 h 6613004"/>
-              <a:gd name="csX0" fmla="*/ 1486388 w 4289277"/>
-              <a:gd name="csY0" fmla="*/ 296778 h 6613004"/>
-              <a:gd name="csX1" fmla="*/ 4059513 w 4289277"/>
-              <a:gd name="csY1" fmla="*/ 98640 h 6613004"/>
-              <a:gd name="csX2" fmla="*/ 4149081 w 4289277"/>
-              <a:gd name="csY2" fmla="*/ 1662736 h 6613004"/>
-              <a:gd name="csX3" fmla="*/ 2467780 w 4289277"/>
-              <a:gd name="csY3" fmla="*/ 5416873 h 6613004"/>
-              <a:gd name="csX4" fmla="*/ 216853 w 4289277"/>
-              <a:gd name="csY4" fmla="*/ 6434877 h 6613004"/>
-              <a:gd name="csX5" fmla="*/ 1650542 w 4289277"/>
-              <a:gd name="csY5" fmla="*/ 3612654 h 6613004"/>
-              <a:gd name="csX6" fmla="*/ 1571518 w 4289277"/>
-              <a:gd name="csY6" fmla="*/ 1400034 h 6613004"/>
-              <a:gd name="csX7" fmla="*/ 1486388 w 4289277"/>
-              <a:gd name="csY7" fmla="*/ 296778 h 6613004"/>
-              <a:gd name="csX0" fmla="*/ 1486388 w 4190291"/>
-              <a:gd name="csY0" fmla="*/ 271841 h 6588067"/>
-              <a:gd name="csX1" fmla="*/ 4059513 w 4190291"/>
-              <a:gd name="csY1" fmla="*/ 73703 h 6588067"/>
-              <a:gd name="csX2" fmla="*/ 4149081 w 4190291"/>
-              <a:gd name="csY2" fmla="*/ 1637799 h 6588067"/>
-              <a:gd name="csX3" fmla="*/ 2467780 w 4190291"/>
-              <a:gd name="csY3" fmla="*/ 5391936 h 6588067"/>
-              <a:gd name="csX4" fmla="*/ 216853 w 4190291"/>
-              <a:gd name="csY4" fmla="*/ 6409940 h 6588067"/>
-              <a:gd name="csX5" fmla="*/ 1650542 w 4190291"/>
-              <a:gd name="csY5" fmla="*/ 3587717 h 6588067"/>
-              <a:gd name="csX6" fmla="*/ 1571518 w 4190291"/>
-              <a:gd name="csY6" fmla="*/ 1375097 h 6588067"/>
-              <a:gd name="csX7" fmla="*/ 1486388 w 4190291"/>
-              <a:gd name="csY7" fmla="*/ 271841 h 6588067"/>
-              <a:gd name="csX0" fmla="*/ 1486388 w 4231052"/>
-              <a:gd name="csY0" fmla="*/ 271841 h 6588067"/>
-              <a:gd name="csX1" fmla="*/ 4059513 w 4231052"/>
-              <a:gd name="csY1" fmla="*/ 73703 h 6588067"/>
-              <a:gd name="csX2" fmla="*/ 4149081 w 4231052"/>
-              <a:gd name="csY2" fmla="*/ 1637799 h 6588067"/>
-              <a:gd name="csX3" fmla="*/ 2467780 w 4231052"/>
-              <a:gd name="csY3" fmla="*/ 5391936 h 6588067"/>
-              <a:gd name="csX4" fmla="*/ 216853 w 4231052"/>
-              <a:gd name="csY4" fmla="*/ 6409940 h 6588067"/>
-              <a:gd name="csX5" fmla="*/ 1650542 w 4231052"/>
-              <a:gd name="csY5" fmla="*/ 3587717 h 6588067"/>
-              <a:gd name="csX6" fmla="*/ 1571518 w 4231052"/>
-              <a:gd name="csY6" fmla="*/ 1375097 h 6588067"/>
-              <a:gd name="csX7" fmla="*/ 1486388 w 4231052"/>
-              <a:gd name="csY7" fmla="*/ 271841 h 6588067"/>
-              <a:gd name="csX0" fmla="*/ 1486388 w 4231052"/>
-              <a:gd name="csY0" fmla="*/ 271841 h 6588067"/>
-              <a:gd name="csX1" fmla="*/ 4059513 w 4231052"/>
-              <a:gd name="csY1" fmla="*/ 73703 h 6588067"/>
-              <a:gd name="csX2" fmla="*/ 4149081 w 4231052"/>
-              <a:gd name="csY2" fmla="*/ 1637799 h 6588067"/>
-              <a:gd name="csX3" fmla="*/ 2467780 w 4231052"/>
-              <a:gd name="csY3" fmla="*/ 5391936 h 6588067"/>
-              <a:gd name="csX4" fmla="*/ 216853 w 4231052"/>
-              <a:gd name="csY4" fmla="*/ 6409940 h 6588067"/>
-              <a:gd name="csX5" fmla="*/ 1650542 w 4231052"/>
-              <a:gd name="csY5" fmla="*/ 3587717 h 6588067"/>
-              <a:gd name="csX6" fmla="*/ 1571518 w 4231052"/>
-              <a:gd name="csY6" fmla="*/ 1375097 h 6588067"/>
-              <a:gd name="csX7" fmla="*/ 1486388 w 4231052"/>
-              <a:gd name="csY7" fmla="*/ 271841 h 6588067"/>
-              <a:gd name="csX0" fmla="*/ 1486388 w 4231052"/>
-              <a:gd name="csY0" fmla="*/ 271841 h 6588067"/>
-              <a:gd name="csX1" fmla="*/ 4059513 w 4231052"/>
-              <a:gd name="csY1" fmla="*/ 73703 h 6588067"/>
-              <a:gd name="csX2" fmla="*/ 4149081 w 4231052"/>
-              <a:gd name="csY2" fmla="*/ 1637799 h 6588067"/>
-              <a:gd name="csX3" fmla="*/ 2467780 w 4231052"/>
-              <a:gd name="csY3" fmla="*/ 5391936 h 6588067"/>
-              <a:gd name="csX4" fmla="*/ 216853 w 4231052"/>
-              <a:gd name="csY4" fmla="*/ 6409940 h 6588067"/>
-              <a:gd name="csX5" fmla="*/ 1650542 w 4231052"/>
-              <a:gd name="csY5" fmla="*/ 3587717 h 6588067"/>
-              <a:gd name="csX6" fmla="*/ 1571518 w 4231052"/>
-              <a:gd name="csY6" fmla="*/ 1375097 h 6588067"/>
-              <a:gd name="csX7" fmla="*/ 1486388 w 4231052"/>
-              <a:gd name="csY7" fmla="*/ 271841 h 6588067"/>
-              <a:gd name="csX0" fmla="*/ 1486388 w 4299528"/>
-              <a:gd name="csY0" fmla="*/ 282638 h 6602932"/>
-              <a:gd name="csX1" fmla="*/ 4059513 w 4299528"/>
-              <a:gd name="csY1" fmla="*/ 84500 h 6602932"/>
-              <a:gd name="csX2" fmla="*/ 4103925 w 4299528"/>
-              <a:gd name="csY2" fmla="*/ 1456685 h 6602932"/>
-              <a:gd name="csX3" fmla="*/ 2467780 w 4299528"/>
-              <a:gd name="csY3" fmla="*/ 5402733 h 6602932"/>
-              <a:gd name="csX4" fmla="*/ 216853 w 4299528"/>
-              <a:gd name="csY4" fmla="*/ 6420737 h 6602932"/>
-              <a:gd name="csX5" fmla="*/ 1650542 w 4299528"/>
-              <a:gd name="csY5" fmla="*/ 3598514 h 6602932"/>
-              <a:gd name="csX6" fmla="*/ 1571518 w 4299528"/>
-              <a:gd name="csY6" fmla="*/ 1385894 h 6602932"/>
-              <a:gd name="csX7" fmla="*/ 1486388 w 4299528"/>
-              <a:gd name="csY7" fmla="*/ 282638 h 6602932"/>
-              <a:gd name="csX0" fmla="*/ 1486388 w 4192078"/>
-              <a:gd name="csY0" fmla="*/ 291844 h 6612138"/>
-              <a:gd name="csX1" fmla="*/ 3845024 w 4192078"/>
-              <a:gd name="csY1" fmla="*/ 82417 h 6612138"/>
-              <a:gd name="csX2" fmla="*/ 4103925 w 4192078"/>
-              <a:gd name="csY2" fmla="*/ 1465891 h 6612138"/>
-              <a:gd name="csX3" fmla="*/ 2467780 w 4192078"/>
-              <a:gd name="csY3" fmla="*/ 5411939 h 6612138"/>
-              <a:gd name="csX4" fmla="*/ 216853 w 4192078"/>
-              <a:gd name="csY4" fmla="*/ 6429943 h 6612138"/>
-              <a:gd name="csX5" fmla="*/ 1650542 w 4192078"/>
-              <a:gd name="csY5" fmla="*/ 3607720 h 6612138"/>
-              <a:gd name="csX6" fmla="*/ 1571518 w 4192078"/>
-              <a:gd name="csY6" fmla="*/ 1395100 h 6612138"/>
-              <a:gd name="csX7" fmla="*/ 1486388 w 4192078"/>
-              <a:gd name="csY7" fmla="*/ 291844 h 6612138"/>
-              <a:gd name="csX0" fmla="*/ 1644433 w 4184699"/>
-              <a:gd name="csY0" fmla="*/ 171346 h 6694840"/>
-              <a:gd name="csX1" fmla="*/ 3845024 w 4184699"/>
-              <a:gd name="csY1" fmla="*/ 165119 h 6694840"/>
-              <a:gd name="csX2" fmla="*/ 4103925 w 4184699"/>
-              <a:gd name="csY2" fmla="*/ 1548593 h 6694840"/>
-              <a:gd name="csX3" fmla="*/ 2467780 w 4184699"/>
-              <a:gd name="csY3" fmla="*/ 5494641 h 6694840"/>
-              <a:gd name="csX4" fmla="*/ 216853 w 4184699"/>
-              <a:gd name="csY4" fmla="*/ 6512645 h 6694840"/>
-              <a:gd name="csX5" fmla="*/ 1650542 w 4184699"/>
-              <a:gd name="csY5" fmla="*/ 3690422 h 6694840"/>
-              <a:gd name="csX6" fmla="*/ 1571518 w 4184699"/>
-              <a:gd name="csY6" fmla="*/ 1477802 h 6694840"/>
-              <a:gd name="csX7" fmla="*/ 1644433 w 4184699"/>
-              <a:gd name="csY7" fmla="*/ 171346 h 6694840"/>
-              <a:gd name="csX0" fmla="*/ 1644433 w 4184699"/>
-              <a:gd name="csY0" fmla="*/ 198463 h 6721957"/>
-              <a:gd name="csX1" fmla="*/ 3845024 w 4184699"/>
-              <a:gd name="csY1" fmla="*/ 192236 h 6721957"/>
-              <a:gd name="csX2" fmla="*/ 4103925 w 4184699"/>
-              <a:gd name="csY2" fmla="*/ 1575710 h 6721957"/>
-              <a:gd name="csX3" fmla="*/ 2467780 w 4184699"/>
-              <a:gd name="csY3" fmla="*/ 5521758 h 6721957"/>
-              <a:gd name="csX4" fmla="*/ 216853 w 4184699"/>
-              <a:gd name="csY4" fmla="*/ 6539762 h 6721957"/>
-              <a:gd name="csX5" fmla="*/ 1650542 w 4184699"/>
-              <a:gd name="csY5" fmla="*/ 3717539 h 6721957"/>
-              <a:gd name="csX6" fmla="*/ 1797296 w 4184699"/>
-              <a:gd name="csY6" fmla="*/ 1933897 h 6721957"/>
-              <a:gd name="csX7" fmla="*/ 1644433 w 4184699"/>
-              <a:gd name="csY7" fmla="*/ 198463 h 6721957"/>
-              <a:gd name="csX0" fmla="*/ 1632274 w 4172540"/>
-              <a:gd name="csY0" fmla="*/ 198463 h 6721957"/>
-              <a:gd name="csX1" fmla="*/ 3832865 w 4172540"/>
-              <a:gd name="csY1" fmla="*/ 192236 h 6721957"/>
-              <a:gd name="csX2" fmla="*/ 4091766 w 4172540"/>
-              <a:gd name="csY2" fmla="*/ 1575710 h 6721957"/>
-              <a:gd name="csX3" fmla="*/ 2455621 w 4172540"/>
-              <a:gd name="csY3" fmla="*/ 5521758 h 6721957"/>
-              <a:gd name="csX4" fmla="*/ 204694 w 4172540"/>
-              <a:gd name="csY4" fmla="*/ 6539762 h 6721957"/>
-              <a:gd name="csX5" fmla="*/ 1739983 w 4172540"/>
-              <a:gd name="csY5" fmla="*/ 3570784 h 6721957"/>
-              <a:gd name="csX6" fmla="*/ 1785137 w 4172540"/>
-              <a:gd name="csY6" fmla="*/ 1933897 h 6721957"/>
-              <a:gd name="csX7" fmla="*/ 1632274 w 4172540"/>
-              <a:gd name="csY7" fmla="*/ 198463 h 6721957"/>
-              <a:gd name="csX0" fmla="*/ 1582183 w 4122449"/>
-              <a:gd name="csY0" fmla="*/ 198463 h 6721957"/>
-              <a:gd name="csX1" fmla="*/ 3782774 w 4122449"/>
-              <a:gd name="csY1" fmla="*/ 192236 h 6721957"/>
-              <a:gd name="csX2" fmla="*/ 4041675 w 4122449"/>
-              <a:gd name="csY2" fmla="*/ 1575710 h 6721957"/>
-              <a:gd name="csX3" fmla="*/ 2405530 w 4122449"/>
-              <a:gd name="csY3" fmla="*/ 5521758 h 6721957"/>
-              <a:gd name="csX4" fmla="*/ 154603 w 4122449"/>
-              <a:gd name="csY4" fmla="*/ 6539762 h 6721957"/>
-              <a:gd name="csX5" fmla="*/ 1689892 w 4122449"/>
-              <a:gd name="csY5" fmla="*/ 3570784 h 6721957"/>
-              <a:gd name="csX6" fmla="*/ 1735046 w 4122449"/>
-              <a:gd name="csY6" fmla="*/ 1933897 h 6721957"/>
-              <a:gd name="csX7" fmla="*/ 1582183 w 4122449"/>
-              <a:gd name="csY7" fmla="*/ 198463 h 6721957"/>
-              <a:gd name="csX0" fmla="*/ 1582183 w 4122449"/>
-              <a:gd name="csY0" fmla="*/ 198463 h 6721957"/>
-              <a:gd name="csX1" fmla="*/ 3782774 w 4122449"/>
-              <a:gd name="csY1" fmla="*/ 192236 h 6721957"/>
-              <a:gd name="csX2" fmla="*/ 4041675 w 4122449"/>
-              <a:gd name="csY2" fmla="*/ 1575710 h 6721957"/>
-              <a:gd name="csX3" fmla="*/ 2405530 w 4122449"/>
-              <a:gd name="csY3" fmla="*/ 5521758 h 6721957"/>
-              <a:gd name="csX4" fmla="*/ 154603 w 4122449"/>
-              <a:gd name="csY4" fmla="*/ 6539762 h 6721957"/>
-              <a:gd name="csX5" fmla="*/ 1689892 w 4122449"/>
-              <a:gd name="csY5" fmla="*/ 3570784 h 6721957"/>
-              <a:gd name="csX6" fmla="*/ 1735046 w 4122449"/>
-              <a:gd name="csY6" fmla="*/ 1933897 h 6721957"/>
-              <a:gd name="csX7" fmla="*/ 1582183 w 4122449"/>
-              <a:gd name="csY7" fmla="*/ 198463 h 6721957"/>
-              <a:gd name="csX0" fmla="*/ 1576590 w 4116856"/>
-              <a:gd name="csY0" fmla="*/ 198463 h 6721957"/>
-              <a:gd name="csX1" fmla="*/ 3777181 w 4116856"/>
-              <a:gd name="csY1" fmla="*/ 192236 h 6721957"/>
-              <a:gd name="csX2" fmla="*/ 4036082 w 4116856"/>
-              <a:gd name="csY2" fmla="*/ 1575710 h 6721957"/>
-              <a:gd name="csX3" fmla="*/ 2399937 w 4116856"/>
-              <a:gd name="csY3" fmla="*/ 5521758 h 6721957"/>
-              <a:gd name="csX4" fmla="*/ 149010 w 4116856"/>
-              <a:gd name="csY4" fmla="*/ 6539762 h 6721957"/>
-              <a:gd name="csX5" fmla="*/ 1684299 w 4116856"/>
-              <a:gd name="csY5" fmla="*/ 3570784 h 6721957"/>
-              <a:gd name="csX6" fmla="*/ 1729453 w 4116856"/>
-              <a:gd name="csY6" fmla="*/ 1933897 h 6721957"/>
-              <a:gd name="csX7" fmla="*/ 1576590 w 4116856"/>
-              <a:gd name="csY7" fmla="*/ 198463 h 6721957"/>
-            </a:gdLst>
-            <a:ahLst/>
-            <a:cxnLst>
-              <a:cxn ang="0">
-                <a:pos x="csX0" y="csY0"/>
-              </a:cxn>
-              <a:cxn ang="0">
-                <a:pos x="csX1" y="csY1"/>
-              </a:cxn>
-              <a:cxn ang="0">
-                <a:pos x="csX2" y="csY2"/>
-              </a:cxn>
-              <a:cxn ang="0">
-                <a:pos x="csX3" y="csY3"/>
-              </a:cxn>
-              <a:cxn ang="0">
-                <a:pos x="csX4" y="csY4"/>
-              </a:cxn>
-              <a:cxn ang="0">
-                <a:pos x="csX5" y="csY5"/>
-              </a:cxn>
-              <a:cxn ang="0">
-                <a:pos x="csX6" y="csY6"/>
-              </a:cxn>
-              <a:cxn ang="0">
-                <a:pos x="csX7" y="csY7"/>
-              </a:cxn>
-            </a:cxnLst>
-            <a:rect l="l" t="t" r="r" b="b"/>
-            <a:pathLst>
-              <a:path w="4116856" h="6721957">
-                <a:moveTo>
-                  <a:pt x="1576590" y="198463"/>
-                </a:moveTo>
-                <a:cubicBezTo>
-                  <a:pt x="1917878" y="-91814"/>
-                  <a:pt x="3367266" y="-37305"/>
-                  <a:pt x="3777181" y="192236"/>
-                </a:cubicBezTo>
-                <a:cubicBezTo>
-                  <a:pt x="4187096" y="421777"/>
-                  <a:pt x="4160259" y="938442"/>
-                  <a:pt x="4036082" y="1575710"/>
-                </a:cubicBezTo>
-                <a:cubicBezTo>
-                  <a:pt x="3731283" y="2201688"/>
-                  <a:pt x="3047782" y="4694416"/>
-                  <a:pt x="2399937" y="5521758"/>
-                </a:cubicBezTo>
-                <a:cubicBezTo>
-                  <a:pt x="1752092" y="6349100"/>
-                  <a:pt x="939971" y="7071887"/>
-                  <a:pt x="149010" y="6539762"/>
-                </a:cubicBezTo>
-                <a:cubicBezTo>
-                  <a:pt x="-529062" y="5872170"/>
-                  <a:pt x="1305259" y="4076394"/>
-                  <a:pt x="1684299" y="3570784"/>
-                </a:cubicBezTo>
-                <a:cubicBezTo>
-                  <a:pt x="2101987" y="2944250"/>
-                  <a:pt x="1980708" y="2431980"/>
-                  <a:pt x="1729453" y="1933897"/>
-                </a:cubicBezTo>
-                <a:cubicBezTo>
-                  <a:pt x="1500775" y="1435814"/>
-                  <a:pt x="1235302" y="488740"/>
-                  <a:pt x="1576590" y="198463"/>
-                </a:cubicBezTo>
-                <a:close/>
-              </a:path>
-            </a:pathLst>
-          </a:custGeom>
-          <a:solidFill>
-            <a:schemeClr val="bg1">
-              <a:lumMod val="95000"/>
-            </a:schemeClr>
-          </a:solidFill>
-          <a:ln w="28575">
-            <a:noFill/>
-            <a:prstDash val="solid"/>
-          </a:ln>
-          <a:effectLst/>
-        </p:spPr>
-        <p:style>
-          <a:lnRef idx="0">
-            <a:schemeClr val="accent4"/>
-          </a:lnRef>
-          <a:fillRef idx="3">
-            <a:schemeClr val="accent4"/>
-          </a:fillRef>
-          <a:effectRef idx="3">
-            <a:schemeClr val="accent4"/>
-          </a:effectRef>
-          <a:fontRef idx="minor">
-            <a:schemeClr val="lt1"/>
-          </a:fontRef>
-        </p:style>
-        <p:txBody>
-          <a:bodyPr rtlCol="1" anchor="ctr"/>
-          <a:lstStyle/>
-          <a:p>
-            <a:pPr algn="r" rtl="1"/>
-            <a:endParaRPr lang="en-US" sz="4298" b="1">
-              <a:solidFill>
-                <a:schemeClr val="bg1"/>
-              </a:solidFill>
-              <a:highlight>
-                <a:srgbClr val="800080"/>
-              </a:highlight>
-              <a:latin typeface="Segoe UI" panose="020B0502040204020203" pitchFamily="34" charset="0"/>
-              <a:cs typeface="Segoe UI" panose="020B0502040204020203" pitchFamily="34" charset="0"/>
-            </a:endParaRPr>
-          </a:p>
-        </p:txBody>
-      </p:sp>
-      <p:sp>
-        <p:nvSpPr>
-          <p:cNvPr id="34" name="Oval 33">
-            <a:extLst>
-              <a:ext uri="{FF2B5EF4-FFF2-40B4-BE49-F238E27FC236}">
-                <a16:creationId xmlns:a16="http://schemas.microsoft.com/office/drawing/2014/main" id="{25FD1127-673E-383A-AE7A-A74A71CACA03}"/>
-              </a:ext>
-            </a:extLst>
-          </p:cNvPr>
-          <p:cNvSpPr/>
-          <p:nvPr/>
-        </p:nvSpPr>
-        <p:spPr bwMode="auto">
-          <a:xfrm rot="1935669">
-            <a:off x="3459676" y="3779594"/>
-            <a:ext cx="4757766" cy="4741585"/>
-          </a:xfrm>
-          <a:custGeom>
-            <a:avLst/>
-            <a:gdLst>
-              <a:gd name="csX0" fmla="*/ 0 w 4818094"/>
-              <a:gd name="csY0" fmla="*/ 2593800 h 5187600"/>
-              <a:gd name="csX1" fmla="*/ 2409047 w 4818094"/>
-              <a:gd name="csY1" fmla="*/ 0 h 5187600"/>
-              <a:gd name="csX2" fmla="*/ 4818094 w 4818094"/>
-              <a:gd name="csY2" fmla="*/ 2593800 h 5187600"/>
-              <a:gd name="csX3" fmla="*/ 2409047 w 4818094"/>
-              <a:gd name="csY3" fmla="*/ 5187600 h 5187600"/>
-              <a:gd name="csX4" fmla="*/ 0 w 4818094"/>
-              <a:gd name="csY4" fmla="*/ 2593800 h 5187600"/>
-              <a:gd name="csX0" fmla="*/ 0 w 5187760"/>
-              <a:gd name="csY0" fmla="*/ 2594828 h 5189910"/>
-              <a:gd name="csX1" fmla="*/ 2409047 w 5187760"/>
-              <a:gd name="csY1" fmla="*/ 1028 h 5189910"/>
-              <a:gd name="csX2" fmla="*/ 5187760 w 5187760"/>
-              <a:gd name="csY2" fmla="*/ 2842077 h 5189910"/>
-              <a:gd name="csX3" fmla="*/ 2409047 w 5187760"/>
-              <a:gd name="csY3" fmla="*/ 5188628 h 5189910"/>
-              <a:gd name="csX4" fmla="*/ 0 w 5187760"/>
-              <a:gd name="csY4" fmla="*/ 2594828 h 5189910"/>
-              <a:gd name="csX0" fmla="*/ 42041 w 5229801"/>
-              <a:gd name="csY0" fmla="*/ 2594508 h 5203334"/>
-              <a:gd name="csX1" fmla="*/ 2451088 w 5229801"/>
-              <a:gd name="csY1" fmla="*/ 708 h 5203334"/>
-              <a:gd name="csX2" fmla="*/ 5229801 w 5229801"/>
-              <a:gd name="csY2" fmla="*/ 2841757 h 5203334"/>
-              <a:gd name="csX3" fmla="*/ 1244945 w 5229801"/>
-              <a:gd name="csY3" fmla="*/ 5202069 h 5203334"/>
-              <a:gd name="csX4" fmla="*/ 42041 w 5229801"/>
-              <a:gd name="csY4" fmla="*/ 2594508 h 5203334"/>
-              <a:gd name="csX0" fmla="*/ 74467 w 4841053"/>
-              <a:gd name="csY0" fmla="*/ 1799631 h 5238998"/>
-              <a:gd name="csX1" fmla="*/ 2062340 w 4841053"/>
-              <a:gd name="csY1" fmla="*/ 19027 h 5238998"/>
-              <a:gd name="csX2" fmla="*/ 4841053 w 4841053"/>
-              <a:gd name="csY2" fmla="*/ 2860076 h 5238998"/>
-              <a:gd name="csX3" fmla="*/ 856197 w 4841053"/>
-              <a:gd name="csY3" fmla="*/ 5220388 h 5238998"/>
-              <a:gd name="csX4" fmla="*/ 74467 w 4841053"/>
-              <a:gd name="csY4" fmla="*/ 1799631 h 5238998"/>
-              <a:gd name="csX0" fmla="*/ 109724 w 4876310"/>
-              <a:gd name="csY0" fmla="*/ 1799261 h 5087365"/>
-              <a:gd name="csX1" fmla="*/ 2097597 w 4876310"/>
-              <a:gd name="csY1" fmla="*/ 18657 h 5087365"/>
-              <a:gd name="csX2" fmla="*/ 4876310 w 4876310"/>
-              <a:gd name="csY2" fmla="*/ 2859706 h 5087365"/>
-              <a:gd name="csX3" fmla="*/ 754352 w 4876310"/>
-              <a:gd name="csY3" fmla="*/ 5066265 h 5087365"/>
-              <a:gd name="csX4" fmla="*/ 109724 w 4876310"/>
-              <a:gd name="csY4" fmla="*/ 1799261 h 5087365"/>
-              <a:gd name="csX0" fmla="*/ 133227 w 4899813"/>
-              <a:gd name="csY0" fmla="*/ 1799261 h 5263847"/>
-              <a:gd name="csX1" fmla="*/ 2121100 w 4899813"/>
-              <a:gd name="csY1" fmla="*/ 18657 h 5263847"/>
-              <a:gd name="csX2" fmla="*/ 4899813 w 4899813"/>
-              <a:gd name="csY2" fmla="*/ 2859706 h 5263847"/>
-              <a:gd name="csX3" fmla="*/ 777855 w 4899813"/>
-              <a:gd name="csY3" fmla="*/ 5066265 h 5263847"/>
-              <a:gd name="csX4" fmla="*/ 133227 w 4899813"/>
-              <a:gd name="csY4" fmla="*/ 1799261 h 5263847"/>
-              <a:gd name="csX0" fmla="*/ 116725 w 5089331"/>
-              <a:gd name="csY0" fmla="*/ 1792871 h 5071472"/>
-              <a:gd name="csX1" fmla="*/ 2104598 w 5089331"/>
-              <a:gd name="csY1" fmla="*/ 12267 h 5071472"/>
-              <a:gd name="csX2" fmla="*/ 5089331 w 5089331"/>
-              <a:gd name="csY2" fmla="*/ 2629823 h 5071472"/>
-              <a:gd name="csX3" fmla="*/ 761353 w 5089331"/>
-              <a:gd name="csY3" fmla="*/ 5059875 h 5071472"/>
-              <a:gd name="csX4" fmla="*/ 116725 w 5089331"/>
-              <a:gd name="csY4" fmla="*/ 1792871 h 5071472"/>
-              <a:gd name="csX0" fmla="*/ 116725 w 5089331"/>
-              <a:gd name="csY0" fmla="*/ 1792871 h 5069573"/>
-              <a:gd name="csX1" fmla="*/ 2104598 w 5089331"/>
-              <a:gd name="csY1" fmla="*/ 12267 h 5069573"/>
-              <a:gd name="csX2" fmla="*/ 5089331 w 5089331"/>
-              <a:gd name="csY2" fmla="*/ 2629823 h 5069573"/>
-              <a:gd name="csX3" fmla="*/ 761353 w 5089331"/>
-              <a:gd name="csY3" fmla="*/ 5059875 h 5069573"/>
-              <a:gd name="csX4" fmla="*/ 116725 w 5089331"/>
-              <a:gd name="csY4" fmla="*/ 1792871 h 5069573"/>
-              <a:gd name="csX0" fmla="*/ 84154 w 5056760"/>
-              <a:gd name="csY0" fmla="*/ 1790420 h 5062474"/>
-              <a:gd name="csX1" fmla="*/ 2072027 w 5056760"/>
-              <a:gd name="csY1" fmla="*/ 9816 h 5062474"/>
-              <a:gd name="csX2" fmla="*/ 5056760 w 5056760"/>
-              <a:gd name="csY2" fmla="*/ 2627372 h 5062474"/>
-              <a:gd name="csX3" fmla="*/ 728782 w 5056760"/>
-              <a:gd name="csY3" fmla="*/ 5057424 h 5062474"/>
-              <a:gd name="csX4" fmla="*/ 404231 w 5056760"/>
-              <a:gd name="csY4" fmla="*/ 3222753 h 5062474"/>
-              <a:gd name="csX5" fmla="*/ 84154 w 5056760"/>
-              <a:gd name="csY5" fmla="*/ 1790420 h 5062474"/>
-              <a:gd name="csX0" fmla="*/ 79747 w 5052353"/>
-              <a:gd name="csY0" fmla="*/ 1790420 h 5062474"/>
-              <a:gd name="csX1" fmla="*/ 2067620 w 5052353"/>
-              <a:gd name="csY1" fmla="*/ 9816 h 5062474"/>
-              <a:gd name="csX2" fmla="*/ 5052353 w 5052353"/>
-              <a:gd name="csY2" fmla="*/ 2627372 h 5062474"/>
-              <a:gd name="csX3" fmla="*/ 724375 w 5052353"/>
-              <a:gd name="csY3" fmla="*/ 5057424 h 5062474"/>
-              <a:gd name="csX4" fmla="*/ 399824 w 5052353"/>
-              <a:gd name="csY4" fmla="*/ 3222753 h 5062474"/>
-              <a:gd name="csX5" fmla="*/ 79747 w 5052353"/>
-              <a:gd name="csY5" fmla="*/ 1790420 h 5062474"/>
-              <a:gd name="csX0" fmla="*/ 751 w 4973357"/>
-              <a:gd name="csY0" fmla="*/ 1791382 h 5063436"/>
-              <a:gd name="csX1" fmla="*/ 1988624 w 4973357"/>
-              <a:gd name="csY1" fmla="*/ 10778 h 5063436"/>
-              <a:gd name="csX2" fmla="*/ 4973357 w 4973357"/>
-              <a:gd name="csY2" fmla="*/ 2628334 h 5063436"/>
-              <a:gd name="csX3" fmla="*/ 645379 w 4973357"/>
-              <a:gd name="csY3" fmla="*/ 5058386 h 5063436"/>
-              <a:gd name="csX4" fmla="*/ 320828 w 4973357"/>
-              <a:gd name="csY4" fmla="*/ 3223715 h 5063436"/>
-              <a:gd name="csX5" fmla="*/ 751 w 4973357"/>
-              <a:gd name="csY5" fmla="*/ 1791382 h 5063436"/>
-              <a:gd name="csX0" fmla="*/ 755 w 4966384"/>
-              <a:gd name="csY0" fmla="*/ 2008354 h 5057866"/>
-              <a:gd name="csX1" fmla="*/ 1981651 w 4966384"/>
-              <a:gd name="csY1" fmla="*/ 5208 h 5057866"/>
-              <a:gd name="csX2" fmla="*/ 4966384 w 4966384"/>
-              <a:gd name="csY2" fmla="*/ 2622764 h 5057866"/>
-              <a:gd name="csX3" fmla="*/ 638406 w 4966384"/>
-              <a:gd name="csY3" fmla="*/ 5052816 h 5057866"/>
-              <a:gd name="csX4" fmla="*/ 313855 w 4966384"/>
-              <a:gd name="csY4" fmla="*/ 3218145 h 5057866"/>
-              <a:gd name="csX5" fmla="*/ 755 w 4966384"/>
-              <a:gd name="csY5" fmla="*/ 2008354 h 5057866"/>
-              <a:gd name="csX0" fmla="*/ 4502 w 4970131"/>
-              <a:gd name="csY0" fmla="*/ 2008285 h 5057797"/>
-              <a:gd name="csX1" fmla="*/ 1985398 w 4970131"/>
-              <a:gd name="csY1" fmla="*/ 5139 h 5057797"/>
-              <a:gd name="csX2" fmla="*/ 4970131 w 4970131"/>
-              <a:gd name="csY2" fmla="*/ 2622695 h 5057797"/>
-              <a:gd name="csX3" fmla="*/ 642153 w 4970131"/>
-              <a:gd name="csY3" fmla="*/ 5052747 h 5057797"/>
-              <a:gd name="csX4" fmla="*/ 317602 w 4970131"/>
-              <a:gd name="csY4" fmla="*/ 3218076 h 5057797"/>
-              <a:gd name="csX5" fmla="*/ 4502 w 4970131"/>
-              <a:gd name="csY5" fmla="*/ 2008285 h 5057797"/>
-              <a:gd name="csX0" fmla="*/ 4853 w 4856467"/>
-              <a:gd name="csY0" fmla="*/ 2081855 h 5056489"/>
-              <a:gd name="csX1" fmla="*/ 1871734 w 4856467"/>
-              <a:gd name="csY1" fmla="*/ 3831 h 5056489"/>
-              <a:gd name="csX2" fmla="*/ 4856467 w 4856467"/>
-              <a:gd name="csY2" fmla="*/ 2621387 h 5056489"/>
-              <a:gd name="csX3" fmla="*/ 528489 w 4856467"/>
-              <a:gd name="csY3" fmla="*/ 5051439 h 5056489"/>
-              <a:gd name="csX4" fmla="*/ 203938 w 4856467"/>
-              <a:gd name="csY4" fmla="*/ 3216768 h 5056489"/>
-              <a:gd name="csX5" fmla="*/ 4853 w 4856467"/>
-              <a:gd name="csY5" fmla="*/ 2081855 h 5056489"/>
-              <a:gd name="csX0" fmla="*/ 42894 w 4894508"/>
-              <a:gd name="csY0" fmla="*/ 1888260 h 4862894"/>
-              <a:gd name="csX1" fmla="*/ 1137616 w 4894508"/>
-              <a:gd name="csY1" fmla="*/ 3948 h 4862894"/>
-              <a:gd name="csX2" fmla="*/ 4894508 w 4894508"/>
-              <a:gd name="csY2" fmla="*/ 2427792 h 4862894"/>
-              <a:gd name="csX3" fmla="*/ 566530 w 4894508"/>
-              <a:gd name="csY3" fmla="*/ 4857844 h 4862894"/>
-              <a:gd name="csX4" fmla="*/ 241979 w 4894508"/>
-              <a:gd name="csY4" fmla="*/ 3023173 h 4862894"/>
-              <a:gd name="csX5" fmla="*/ 42894 w 4894508"/>
-              <a:gd name="csY5" fmla="*/ 1888260 h 4862894"/>
-              <a:gd name="csX0" fmla="*/ 42894 w 4894508"/>
-              <a:gd name="csY0" fmla="*/ 1983654 h 4958288"/>
-              <a:gd name="csX1" fmla="*/ 1137616 w 4894508"/>
-              <a:gd name="csY1" fmla="*/ 99342 h 4958288"/>
-              <a:gd name="csX2" fmla="*/ 4894508 w 4894508"/>
-              <a:gd name="csY2" fmla="*/ 2523186 h 4958288"/>
-              <a:gd name="csX3" fmla="*/ 566530 w 4894508"/>
-              <a:gd name="csY3" fmla="*/ 4953238 h 4958288"/>
-              <a:gd name="csX4" fmla="*/ 241979 w 4894508"/>
-              <a:gd name="csY4" fmla="*/ 3118567 h 4958288"/>
-              <a:gd name="csX5" fmla="*/ 42894 w 4894508"/>
-              <a:gd name="csY5" fmla="*/ 1983654 h 4958288"/>
-              <a:gd name="csX0" fmla="*/ 35178 w 4973722"/>
-              <a:gd name="csY0" fmla="*/ 1981804 h 4861515"/>
-              <a:gd name="csX1" fmla="*/ 1216830 w 4973722"/>
-              <a:gd name="csY1" fmla="*/ 2569 h 4861515"/>
-              <a:gd name="csX2" fmla="*/ 4973722 w 4973722"/>
-              <a:gd name="csY2" fmla="*/ 2426413 h 4861515"/>
-              <a:gd name="csX3" fmla="*/ 645744 w 4973722"/>
-              <a:gd name="csY3" fmla="*/ 4856465 h 4861515"/>
-              <a:gd name="csX4" fmla="*/ 321193 w 4973722"/>
-              <a:gd name="csY4" fmla="*/ 3021794 h 4861515"/>
-              <a:gd name="csX5" fmla="*/ 35178 w 4973722"/>
-              <a:gd name="csY5" fmla="*/ 1981804 h 4861515"/>
-              <a:gd name="csX0" fmla="*/ 1802 w 4940346"/>
-              <a:gd name="csY0" fmla="*/ 1981685 h 4861396"/>
-              <a:gd name="csX1" fmla="*/ 1183454 w 4940346"/>
-              <a:gd name="csY1" fmla="*/ 2450 h 4861396"/>
-              <a:gd name="csX2" fmla="*/ 4940346 w 4940346"/>
-              <a:gd name="csY2" fmla="*/ 2426294 h 4861396"/>
-              <a:gd name="csX3" fmla="*/ 612368 w 4940346"/>
-              <a:gd name="csY3" fmla="*/ 4856346 h 4861396"/>
-              <a:gd name="csX4" fmla="*/ 287817 w 4940346"/>
-              <a:gd name="csY4" fmla="*/ 3021675 h 4861396"/>
-              <a:gd name="csX5" fmla="*/ 1802 w 4940346"/>
-              <a:gd name="csY5" fmla="*/ 1981685 h 4861396"/>
-              <a:gd name="csX0" fmla="*/ 24863 w 4747430"/>
-              <a:gd name="csY0" fmla="*/ 2111059 h 4860104"/>
-              <a:gd name="csX1" fmla="*/ 990538 w 4747430"/>
-              <a:gd name="csY1" fmla="*/ 1158 h 4860104"/>
-              <a:gd name="csX2" fmla="*/ 4747430 w 4747430"/>
-              <a:gd name="csY2" fmla="*/ 2425002 h 4860104"/>
-              <a:gd name="csX3" fmla="*/ 419452 w 4747430"/>
-              <a:gd name="csY3" fmla="*/ 4855054 h 4860104"/>
-              <a:gd name="csX4" fmla="*/ 94901 w 4747430"/>
-              <a:gd name="csY4" fmla="*/ 3020383 h 4860104"/>
-              <a:gd name="csX5" fmla="*/ 24863 w 4747430"/>
-              <a:gd name="csY5" fmla="*/ 2111059 h 4860104"/>
-              <a:gd name="csX0" fmla="*/ 43013 w 5023801"/>
-              <a:gd name="csY0" fmla="*/ 2110689 h 4860667"/>
-              <a:gd name="csX1" fmla="*/ 1008688 w 5023801"/>
-              <a:gd name="csY1" fmla="*/ 788 h 4860667"/>
-              <a:gd name="csX2" fmla="*/ 5023801 w 5023801"/>
-              <a:gd name="csY2" fmla="*/ 2368434 h 4860667"/>
-              <a:gd name="csX3" fmla="*/ 437602 w 5023801"/>
-              <a:gd name="csY3" fmla="*/ 4854684 h 4860667"/>
-              <a:gd name="csX4" fmla="*/ 113051 w 5023801"/>
-              <a:gd name="csY4" fmla="*/ 3020013 h 4860667"/>
-              <a:gd name="csX5" fmla="*/ 43013 w 5023801"/>
-              <a:gd name="csY5" fmla="*/ 2110689 h 4860667"/>
-              <a:gd name="csX0" fmla="*/ 8874 w 4989662"/>
-              <a:gd name="csY0" fmla="*/ 2110689 h 4865235"/>
-              <a:gd name="csX1" fmla="*/ 974549 w 4989662"/>
-              <a:gd name="csY1" fmla="*/ 788 h 4865235"/>
-              <a:gd name="csX2" fmla="*/ 4989662 w 4989662"/>
-              <a:gd name="csY2" fmla="*/ 2368434 h 4865235"/>
-              <a:gd name="csX3" fmla="*/ 403463 w 4989662"/>
-              <a:gd name="csY3" fmla="*/ 4854684 h 4865235"/>
-              <a:gd name="csX4" fmla="*/ 78912 w 4989662"/>
-              <a:gd name="csY4" fmla="*/ 3020013 h 4865235"/>
-              <a:gd name="csX5" fmla="*/ 8874 w 4989662"/>
-              <a:gd name="csY5" fmla="*/ 2110689 h 4865235"/>
-              <a:gd name="csX0" fmla="*/ 65222 w 5046010"/>
-              <a:gd name="csY0" fmla="*/ 2110748 h 4869039"/>
-              <a:gd name="csX1" fmla="*/ 1030897 w 5046010"/>
-              <a:gd name="csY1" fmla="*/ 847 h 4869039"/>
-              <a:gd name="csX2" fmla="*/ 5046010 w 5046010"/>
-              <a:gd name="csY2" fmla="*/ 2368493 h 4869039"/>
-              <a:gd name="csX3" fmla="*/ 459811 w 5046010"/>
-              <a:gd name="csY3" fmla="*/ 4854743 h 4869039"/>
-              <a:gd name="csX4" fmla="*/ 128155 w 5046010"/>
-              <a:gd name="csY4" fmla="*/ 3304902 h 4869039"/>
-              <a:gd name="csX5" fmla="*/ 65222 w 5046010"/>
-              <a:gd name="csY5" fmla="*/ 2110748 h 4869039"/>
-              <a:gd name="csX0" fmla="*/ 86577 w 5067365"/>
-              <a:gd name="csY0" fmla="*/ 2110748 h 4869459"/>
-              <a:gd name="csX1" fmla="*/ 1052252 w 5067365"/>
-              <a:gd name="csY1" fmla="*/ 847 h 4869459"/>
-              <a:gd name="csX2" fmla="*/ 5067365 w 5067365"/>
-              <a:gd name="csY2" fmla="*/ 2368493 h 4869459"/>
-              <a:gd name="csX3" fmla="*/ 481166 w 5067365"/>
-              <a:gd name="csY3" fmla="*/ 4854743 h 4869459"/>
-              <a:gd name="csX4" fmla="*/ 149510 w 5067365"/>
-              <a:gd name="csY4" fmla="*/ 3304902 h 4869459"/>
-              <a:gd name="csX5" fmla="*/ 86577 w 5067365"/>
-              <a:gd name="csY5" fmla="*/ 2110748 h 4869459"/>
-              <a:gd name="csX0" fmla="*/ 86577 w 5067365"/>
-              <a:gd name="csY0" fmla="*/ 2110748 h 4869459"/>
-              <a:gd name="csX1" fmla="*/ 1052252 w 5067365"/>
-              <a:gd name="csY1" fmla="*/ 847 h 4869459"/>
-              <a:gd name="csX2" fmla="*/ 5067365 w 5067365"/>
-              <a:gd name="csY2" fmla="*/ 2368493 h 4869459"/>
-              <a:gd name="csX3" fmla="*/ 481166 w 5067365"/>
-              <a:gd name="csY3" fmla="*/ 4854743 h 4869459"/>
-              <a:gd name="csX4" fmla="*/ 149510 w 5067365"/>
-              <a:gd name="csY4" fmla="*/ 3304902 h 4869459"/>
-              <a:gd name="csX5" fmla="*/ 86577 w 5067365"/>
-              <a:gd name="csY5" fmla="*/ 2110748 h 4869459"/>
-              <a:gd name="csX0" fmla="*/ 171393 w 5152181"/>
-              <a:gd name="csY0" fmla="*/ 2110758 h 4874910"/>
-              <a:gd name="csX1" fmla="*/ 1137068 w 5152181"/>
-              <a:gd name="csY1" fmla="*/ 857 h 4874910"/>
-              <a:gd name="csX2" fmla="*/ 5152181 w 5152181"/>
-              <a:gd name="csY2" fmla="*/ 2368503 h 4874910"/>
-              <a:gd name="csX3" fmla="*/ 565982 w 5152181"/>
-              <a:gd name="csY3" fmla="*/ 4854753 h 4874910"/>
-              <a:gd name="csX4" fmla="*/ 84093 w 5152181"/>
-              <a:gd name="csY4" fmla="*/ 3426443 h 4874910"/>
-              <a:gd name="csX5" fmla="*/ 171393 w 5152181"/>
-              <a:gd name="csY5" fmla="*/ 2110758 h 4874910"/>
-              <a:gd name="csX0" fmla="*/ 171060 w 5151848"/>
-              <a:gd name="csY0" fmla="*/ 2110758 h 4874910"/>
-              <a:gd name="csX1" fmla="*/ 1136735 w 5151848"/>
-              <a:gd name="csY1" fmla="*/ 857 h 4874910"/>
-              <a:gd name="csX2" fmla="*/ 5151848 w 5151848"/>
-              <a:gd name="csY2" fmla="*/ 2368503 h 4874910"/>
-              <a:gd name="csX3" fmla="*/ 565649 w 5151848"/>
-              <a:gd name="csY3" fmla="*/ 4854753 h 4874910"/>
-              <a:gd name="csX4" fmla="*/ 83760 w 5151848"/>
-              <a:gd name="csY4" fmla="*/ 3426443 h 4874910"/>
-              <a:gd name="csX5" fmla="*/ 171060 w 5151848"/>
-              <a:gd name="csY5" fmla="*/ 2110758 h 4874910"/>
-              <a:gd name="csX0" fmla="*/ 150001 w 5130789"/>
-              <a:gd name="csY0" fmla="*/ 2110906 h 4854901"/>
-              <a:gd name="csX1" fmla="*/ 1115676 w 5130789"/>
-              <a:gd name="csY1" fmla="*/ 1005 h 4854901"/>
-              <a:gd name="csX2" fmla="*/ 5130789 w 5130789"/>
-              <a:gd name="csY2" fmla="*/ 2368651 h 4854901"/>
-              <a:gd name="csX3" fmla="*/ 544590 w 5130789"/>
-              <a:gd name="csY3" fmla="*/ 4854901 h 4854901"/>
-              <a:gd name="csX4" fmla="*/ 150001 w 5130789"/>
-              <a:gd name="csY4" fmla="*/ 2110906 h 4854901"/>
-              <a:gd name="csX0" fmla="*/ 141325 w 5143299"/>
-              <a:gd name="csY0" fmla="*/ 2457192 h 4854172"/>
-              <a:gd name="csX1" fmla="*/ 1128186 w 5143299"/>
-              <a:gd name="csY1" fmla="*/ 173 h 4854172"/>
-              <a:gd name="csX2" fmla="*/ 5143299 w 5143299"/>
-              <a:gd name="csY2" fmla="*/ 2367819 h 4854172"/>
-              <a:gd name="csX3" fmla="*/ 557100 w 5143299"/>
-              <a:gd name="csY3" fmla="*/ 4854069 h 4854172"/>
-              <a:gd name="csX4" fmla="*/ 141325 w 5143299"/>
-              <a:gd name="csY4" fmla="*/ 2457192 h 4854172"/>
-              <a:gd name="csX0" fmla="*/ 120587 w 4762853"/>
-              <a:gd name="csY0" fmla="*/ 2457023 h 4853905"/>
-              <a:gd name="csX1" fmla="*/ 1107448 w 4762853"/>
-              <a:gd name="csY1" fmla="*/ 4 h 4853905"/>
-              <a:gd name="csX2" fmla="*/ 4762853 w 4762853"/>
-              <a:gd name="csY2" fmla="*/ 2474560 h 4853905"/>
-              <a:gd name="csX3" fmla="*/ 536362 w 4762853"/>
-              <a:gd name="csY3" fmla="*/ 4853900 h 4853905"/>
-              <a:gd name="csX4" fmla="*/ 120587 w 4762853"/>
-              <a:gd name="csY4" fmla="*/ 2457023 h 4853905"/>
-              <a:gd name="csX0" fmla="*/ 134579 w 5021524"/>
-              <a:gd name="csY0" fmla="*/ 2457357 h 4854429"/>
-              <a:gd name="csX1" fmla="*/ 1121440 w 5021524"/>
-              <a:gd name="csY1" fmla="*/ 338 h 4854429"/>
-              <a:gd name="csX2" fmla="*/ 5021524 w 5021524"/>
-              <a:gd name="csY2" fmla="*/ 2333796 h 4854429"/>
-              <a:gd name="csX3" fmla="*/ 550354 w 5021524"/>
-              <a:gd name="csY3" fmla="*/ 4854234 h 4854429"/>
-              <a:gd name="csX4" fmla="*/ 134579 w 5021524"/>
-              <a:gd name="csY4" fmla="*/ 2457357 h 4854429"/>
-              <a:gd name="csX0" fmla="*/ 126356 w 4870584"/>
-              <a:gd name="csY0" fmla="*/ 2457087 h 4854059"/>
-              <a:gd name="csX1" fmla="*/ 1113217 w 4870584"/>
-              <a:gd name="csY1" fmla="*/ 68 h 4854059"/>
-              <a:gd name="csX2" fmla="*/ 4870584 w 4870584"/>
-              <a:gd name="csY2" fmla="*/ 2530410 h 4854059"/>
-              <a:gd name="csX3" fmla="*/ 542131 w 4870584"/>
-              <a:gd name="csY3" fmla="*/ 4853964 h 4854059"/>
-              <a:gd name="csX4" fmla="*/ 126356 w 4870584"/>
-              <a:gd name="csY4" fmla="*/ 2457087 h 4854059"/>
-              <a:gd name="csX0" fmla="*/ 126356 w 4870584"/>
-              <a:gd name="csY0" fmla="*/ 2457087 h 4854020"/>
-              <a:gd name="csX1" fmla="*/ 1113217 w 4870584"/>
-              <a:gd name="csY1" fmla="*/ 68 h 4854020"/>
-              <a:gd name="csX2" fmla="*/ 4870584 w 4870584"/>
-              <a:gd name="csY2" fmla="*/ 2530410 h 4854020"/>
-              <a:gd name="csX3" fmla="*/ 542131 w 4870584"/>
-              <a:gd name="csY3" fmla="*/ 4853964 h 4854020"/>
-              <a:gd name="csX4" fmla="*/ 126356 w 4870584"/>
-              <a:gd name="csY4" fmla="*/ 2457087 h 4854020"/>
-            </a:gdLst>
-            <a:ahLst/>
-            <a:cxnLst>
-              <a:cxn ang="0">
-                <a:pos x="csX0" y="csY0"/>
-              </a:cxn>
-              <a:cxn ang="0">
-                <a:pos x="csX1" y="csY1"/>
-              </a:cxn>
-              <a:cxn ang="0">
-                <a:pos x="csX2" y="csY2"/>
-              </a:cxn>
-              <a:cxn ang="0">
-                <a:pos x="csX3" y="csY3"/>
-              </a:cxn>
-              <a:cxn ang="0">
-                <a:pos x="csX4" y="csY4"/>
-              </a:cxn>
-            </a:cxnLst>
-            <a:rect l="l" t="t" r="r" b="b"/>
-            <a:pathLst>
-              <a:path w="4870584" h="4854020">
-                <a:moveTo>
-                  <a:pt x="126356" y="2457087"/>
-                </a:moveTo>
-                <a:cubicBezTo>
-                  <a:pt x="221537" y="1648104"/>
-                  <a:pt x="322512" y="-12153"/>
-                  <a:pt x="1113217" y="68"/>
-                </a:cubicBezTo>
-                <a:cubicBezTo>
-                  <a:pt x="1903922" y="12289"/>
-                  <a:pt x="4870584" y="1097894"/>
-                  <a:pt x="4870584" y="2530410"/>
-                </a:cubicBezTo>
-                <a:cubicBezTo>
-                  <a:pt x="4865830" y="2897944"/>
-                  <a:pt x="1332836" y="4866185"/>
-                  <a:pt x="542131" y="4853964"/>
-                </a:cubicBezTo>
-                <a:cubicBezTo>
-                  <a:pt x="-248574" y="4841744"/>
-                  <a:pt x="31175" y="3266070"/>
-                  <a:pt x="126356" y="2457087"/>
-                </a:cubicBezTo>
-                <a:close/>
-              </a:path>
-            </a:pathLst>
-          </a:custGeom>
-          <a:solidFill>
-            <a:srgbClr val="ECF3FA"/>
-          </a:solidFill>
-          <a:ln w="28575">
-            <a:noFill/>
-            <a:prstDash val="solid"/>
-          </a:ln>
-          <a:effectLst/>
-        </p:spPr>
-        <p:style>
-          <a:lnRef idx="0">
-            <a:schemeClr val="accent4"/>
-          </a:lnRef>
-          <a:fillRef idx="3">
-            <a:schemeClr val="accent4"/>
-          </a:fillRef>
-          <a:effectRef idx="3">
-            <a:schemeClr val="accent4"/>
-          </a:effectRef>
-          <a:fontRef idx="minor">
-            <a:schemeClr val="lt1"/>
-          </a:fontRef>
-        </p:style>
-        <p:txBody>
-          <a:bodyPr rtlCol="1" anchor="ctr"/>
-          <a:lstStyle/>
-          <a:p>
-            <a:pPr algn="r" rtl="1"/>
-            <a:endParaRPr lang="en-US" sz="4298" b="1">
-              <a:solidFill>
-                <a:schemeClr val="bg1"/>
-              </a:solidFill>
-              <a:highlight>
-                <a:srgbClr val="800080"/>
-              </a:highlight>
-              <a:latin typeface="Segoe UI" panose="020B0502040204020203" pitchFamily="34" charset="0"/>
-              <a:cs typeface="Segoe UI" panose="020B0502040204020203" pitchFamily="34" charset="0"/>
-            </a:endParaRPr>
-          </a:p>
-        </p:txBody>
-      </p:sp>
-      <p:sp>
-        <p:nvSpPr>
-          <p:cNvPr id="30" name="Oval 29">
-            <a:extLst>
-              <a:ext uri="{FF2B5EF4-FFF2-40B4-BE49-F238E27FC236}">
-                <a16:creationId xmlns:a16="http://schemas.microsoft.com/office/drawing/2014/main" id="{EBCBEE45-FA38-6D2F-CD19-B9C6645A15D6}"/>
-              </a:ext>
-            </a:extLst>
-          </p:cNvPr>
-          <p:cNvSpPr/>
-          <p:nvPr/>
-        </p:nvSpPr>
-        <p:spPr bwMode="auto">
-          <a:xfrm rot="9456563">
-            <a:off x="-2009429" y="-739608"/>
-            <a:ext cx="5692658" cy="8125396"/>
-          </a:xfrm>
-          <a:custGeom>
-            <a:avLst/>
-            <a:gdLst>
-              <a:gd name="csX0" fmla="*/ 0 w 5678600"/>
-              <a:gd name="csY0" fmla="*/ 3658973 h 7317945"/>
-              <a:gd name="csX1" fmla="*/ 2839300 w 5678600"/>
-              <a:gd name="csY1" fmla="*/ 0 h 7317945"/>
-              <a:gd name="csX2" fmla="*/ 5678600 w 5678600"/>
-              <a:gd name="csY2" fmla="*/ 3658973 h 7317945"/>
-              <a:gd name="csX3" fmla="*/ 2839300 w 5678600"/>
-              <a:gd name="csY3" fmla="*/ 7317946 h 7317945"/>
-              <a:gd name="csX4" fmla="*/ 0 w 5678600"/>
-              <a:gd name="csY4" fmla="*/ 3658973 h 7317945"/>
-              <a:gd name="csX0" fmla="*/ 0 w 5127434"/>
-              <a:gd name="csY0" fmla="*/ 3659351 h 7318665"/>
-              <a:gd name="csX1" fmla="*/ 2839300 w 5127434"/>
-              <a:gd name="csY1" fmla="*/ 378 h 7318665"/>
-              <a:gd name="csX2" fmla="*/ 5127434 w 5127434"/>
-              <a:gd name="csY2" fmla="*/ 3492962 h 7318665"/>
-              <a:gd name="csX3" fmla="*/ 2839300 w 5127434"/>
-              <a:gd name="csY3" fmla="*/ 7318324 h 7318665"/>
-              <a:gd name="csX4" fmla="*/ 0 w 5127434"/>
-              <a:gd name="csY4" fmla="*/ 3659351 h 7318665"/>
-              <a:gd name="csX0" fmla="*/ 0 w 5637665"/>
-              <a:gd name="csY0" fmla="*/ 3659309 h 7318623"/>
-              <a:gd name="csX1" fmla="*/ 2839300 w 5637665"/>
-              <a:gd name="csY1" fmla="*/ 336 h 7318623"/>
-              <a:gd name="csX2" fmla="*/ 5127434 w 5637665"/>
-              <a:gd name="csY2" fmla="*/ 3492920 h 7318623"/>
-              <a:gd name="csX3" fmla="*/ 2839300 w 5637665"/>
-              <a:gd name="csY3" fmla="*/ 7318282 h 7318623"/>
-              <a:gd name="csX4" fmla="*/ 0 w 5637665"/>
-              <a:gd name="csY4" fmla="*/ 3659309 h 7318623"/>
-              <a:gd name="csX0" fmla="*/ 0 w 5637665"/>
-              <a:gd name="csY0" fmla="*/ 3659309 h 7318623"/>
-              <a:gd name="csX1" fmla="*/ 2839300 w 5637665"/>
-              <a:gd name="csY1" fmla="*/ 336 h 7318623"/>
-              <a:gd name="csX2" fmla="*/ 5127434 w 5637665"/>
-              <a:gd name="csY2" fmla="*/ 3492920 h 7318623"/>
-              <a:gd name="csX3" fmla="*/ 2839300 w 5637665"/>
-              <a:gd name="csY3" fmla="*/ 7318282 h 7318623"/>
-              <a:gd name="csX4" fmla="*/ 0 w 5637665"/>
-              <a:gd name="csY4" fmla="*/ 3659309 h 7318623"/>
-              <a:gd name="csX0" fmla="*/ 0 w 5556500"/>
-              <a:gd name="csY0" fmla="*/ 3659563 h 7318877"/>
-              <a:gd name="csX1" fmla="*/ 2839300 w 5556500"/>
-              <a:gd name="csY1" fmla="*/ 590 h 7318877"/>
-              <a:gd name="csX2" fmla="*/ 5127434 w 5556500"/>
-              <a:gd name="csY2" fmla="*/ 3493174 h 7318877"/>
-              <a:gd name="csX3" fmla="*/ 2839300 w 5556500"/>
-              <a:gd name="csY3" fmla="*/ 7318536 h 7318877"/>
-              <a:gd name="csX4" fmla="*/ 0 w 5556500"/>
-              <a:gd name="csY4" fmla="*/ 3659563 h 7318877"/>
-              <a:gd name="csX0" fmla="*/ 43 w 5563315"/>
-              <a:gd name="csY0" fmla="*/ 3308805 h 6968004"/>
-              <a:gd name="csX1" fmla="*/ 2903994 w 5563315"/>
-              <a:gd name="csY1" fmla="*/ 913 h 6968004"/>
-              <a:gd name="csX2" fmla="*/ 5127477 w 5563315"/>
-              <a:gd name="csY2" fmla="*/ 3142416 h 6968004"/>
-              <a:gd name="csX3" fmla="*/ 2839343 w 5563315"/>
-              <a:gd name="csY3" fmla="*/ 6967778 h 6968004"/>
-              <a:gd name="csX4" fmla="*/ 43 w 5563315"/>
-              <a:gd name="csY4" fmla="*/ 3308805 h 6968004"/>
-              <a:gd name="csX0" fmla="*/ 60 w 4894157"/>
-              <a:gd name="csY0" fmla="*/ 1630203 h 7043433"/>
-              <a:gd name="csX1" fmla="*/ 2245373 w 4894157"/>
-              <a:gd name="csY1" fmla="*/ 55990 h 7043433"/>
-              <a:gd name="csX2" fmla="*/ 4468856 w 4894157"/>
-              <a:gd name="csY2" fmla="*/ 3197493 h 7043433"/>
-              <a:gd name="csX3" fmla="*/ 2180722 w 4894157"/>
-              <a:gd name="csY3" fmla="*/ 7022855 h 7043433"/>
-              <a:gd name="csX4" fmla="*/ 60 w 4894157"/>
-              <a:gd name="csY4" fmla="*/ 1630203 h 7043433"/>
-              <a:gd name="csX0" fmla="*/ 120413 w 5014510"/>
-              <a:gd name="csY0" fmla="*/ 1631920 h 7230796"/>
-              <a:gd name="csX1" fmla="*/ 2365726 w 5014510"/>
-              <a:gd name="csY1" fmla="*/ 57707 h 7230796"/>
-              <a:gd name="csX2" fmla="*/ 4589209 w 5014510"/>
-              <a:gd name="csY2" fmla="*/ 3199210 h 7230796"/>
-              <a:gd name="csX3" fmla="*/ 760880 w 5014510"/>
-              <a:gd name="csY3" fmla="*/ 7211640 h 7230796"/>
-              <a:gd name="csX4" fmla="*/ 120413 w 5014510"/>
-              <a:gd name="csY4" fmla="*/ 1631920 h 7230796"/>
-              <a:gd name="csX0" fmla="*/ 346956 w 5241053"/>
-              <a:gd name="csY0" fmla="*/ 1631920 h 7259305"/>
-              <a:gd name="csX1" fmla="*/ 2592269 w 5241053"/>
-              <a:gd name="csY1" fmla="*/ 57707 h 7259305"/>
-              <a:gd name="csX2" fmla="*/ 4815752 w 5241053"/>
-              <a:gd name="csY2" fmla="*/ 3199210 h 7259305"/>
-              <a:gd name="csX3" fmla="*/ 987423 w 5241053"/>
-              <a:gd name="csY3" fmla="*/ 7211640 h 7259305"/>
-              <a:gd name="csX4" fmla="*/ 346956 w 5241053"/>
-              <a:gd name="csY4" fmla="*/ 1631920 h 7259305"/>
-              <a:gd name="csX0" fmla="*/ 414639 w 5449346"/>
-              <a:gd name="csY0" fmla="*/ 2902198 h 8529583"/>
-              <a:gd name="csX1" fmla="*/ 3708963 w 5449346"/>
-              <a:gd name="csY1" fmla="*/ 26423 h 8529583"/>
-              <a:gd name="csX2" fmla="*/ 4883435 w 5449346"/>
-              <a:gd name="csY2" fmla="*/ 4469488 h 8529583"/>
-              <a:gd name="csX3" fmla="*/ 1055106 w 5449346"/>
-              <a:gd name="csY3" fmla="*/ 8481918 h 8529583"/>
-              <a:gd name="csX4" fmla="*/ 414639 w 5449346"/>
-              <a:gd name="csY4" fmla="*/ 2902198 h 8529583"/>
-              <a:gd name="csX0" fmla="*/ 183453 w 4839523"/>
-              <a:gd name="csY0" fmla="*/ 2878424 h 8459374"/>
-              <a:gd name="csX1" fmla="*/ 3477777 w 4839523"/>
-              <a:gd name="csY1" fmla="*/ 2649 h 8459374"/>
-              <a:gd name="csX2" fmla="*/ 4196225 w 4839523"/>
-              <a:gd name="csY2" fmla="*/ 3329929 h 8459374"/>
-              <a:gd name="csX3" fmla="*/ 823920 w 4839523"/>
-              <a:gd name="csY3" fmla="*/ 8458144 h 8459374"/>
-              <a:gd name="csX4" fmla="*/ 183453 w 4839523"/>
-              <a:gd name="csY4" fmla="*/ 2878424 h 8459374"/>
-              <a:gd name="csX0" fmla="*/ 183453 w 4839523"/>
-              <a:gd name="csY0" fmla="*/ 2878424 h 8459459"/>
-              <a:gd name="csX1" fmla="*/ 3477777 w 4839523"/>
-              <a:gd name="csY1" fmla="*/ 2649 h 8459459"/>
-              <a:gd name="csX2" fmla="*/ 4196225 w 4839523"/>
-              <a:gd name="csY2" fmla="*/ 3329929 h 8459459"/>
-              <a:gd name="csX3" fmla="*/ 823920 w 4839523"/>
-              <a:gd name="csY3" fmla="*/ 8458144 h 8459459"/>
-              <a:gd name="csX4" fmla="*/ 183453 w 4839523"/>
-              <a:gd name="csY4" fmla="*/ 2878424 h 8459459"/>
-              <a:gd name="csX0" fmla="*/ 50689 w 4706759"/>
-              <a:gd name="csY0" fmla="*/ 2878472 h 8635821"/>
-              <a:gd name="csX1" fmla="*/ 3345013 w 4706759"/>
-              <a:gd name="csY1" fmla="*/ 2697 h 8635821"/>
-              <a:gd name="csX2" fmla="*/ 4063461 w 4706759"/>
-              <a:gd name="csY2" fmla="*/ 3329977 h 8635821"/>
-              <a:gd name="csX3" fmla="*/ 1534192 w 4706759"/>
-              <a:gd name="csY3" fmla="*/ 8634574 h 8635821"/>
-              <a:gd name="csX4" fmla="*/ 50689 w 4706759"/>
-              <a:gd name="csY4" fmla="*/ 2878472 h 8635821"/>
-              <a:gd name="csX0" fmla="*/ 347528 w 5003598"/>
-              <a:gd name="csY0" fmla="*/ 2878472 h 8712612"/>
-              <a:gd name="csX1" fmla="*/ 3641852 w 5003598"/>
-              <a:gd name="csY1" fmla="*/ 2697 h 8712612"/>
-              <a:gd name="csX2" fmla="*/ 4360300 w 5003598"/>
-              <a:gd name="csY2" fmla="*/ 3329977 h 8712612"/>
-              <a:gd name="csX3" fmla="*/ 1831031 w 5003598"/>
-              <a:gd name="csY3" fmla="*/ 8634574 h 8712612"/>
-              <a:gd name="csX4" fmla="*/ 347528 w 5003598"/>
-              <a:gd name="csY4" fmla="*/ 2878472 h 8712612"/>
-              <a:gd name="csX0" fmla="*/ 755949 w 5412019"/>
-              <a:gd name="csY0" fmla="*/ 2878371 h 8343041"/>
-              <a:gd name="csX1" fmla="*/ 4050273 w 5412019"/>
-              <a:gd name="csY1" fmla="*/ 2596 h 8343041"/>
-              <a:gd name="csX2" fmla="*/ 4768721 w 5412019"/>
-              <a:gd name="csY2" fmla="*/ 3329876 h 8343041"/>
-              <a:gd name="csX3" fmla="*/ 1503293 w 5412019"/>
-              <a:gd name="csY3" fmla="*/ 8257937 h 8343041"/>
-              <a:gd name="csX4" fmla="*/ 755949 w 5412019"/>
-              <a:gd name="csY4" fmla="*/ 2878371 h 8343041"/>
-              <a:gd name="csX0" fmla="*/ 755949 w 5180572"/>
-              <a:gd name="csY0" fmla="*/ 2878371 h 8343041"/>
-              <a:gd name="csX1" fmla="*/ 4050273 w 5180572"/>
-              <a:gd name="csY1" fmla="*/ 2596 h 8343041"/>
-              <a:gd name="csX2" fmla="*/ 4768721 w 5180572"/>
-              <a:gd name="csY2" fmla="*/ 3329876 h 8343041"/>
-              <a:gd name="csX3" fmla="*/ 1503293 w 5180572"/>
-              <a:gd name="csY3" fmla="*/ 8257937 h 8343041"/>
-              <a:gd name="csX4" fmla="*/ 755949 w 5180572"/>
-              <a:gd name="csY4" fmla="*/ 2878371 h 8343041"/>
-              <a:gd name="csX0" fmla="*/ 755949 w 5180572"/>
-              <a:gd name="csY0" fmla="*/ 2878371 h 8337890"/>
-              <a:gd name="csX1" fmla="*/ 4050273 w 5180572"/>
-              <a:gd name="csY1" fmla="*/ 2596 h 8337890"/>
-              <a:gd name="csX2" fmla="*/ 4768721 w 5180572"/>
-              <a:gd name="csY2" fmla="*/ 3329876 h 8337890"/>
-              <a:gd name="csX3" fmla="*/ 1503293 w 5180572"/>
-              <a:gd name="csY3" fmla="*/ 8257937 h 8337890"/>
-              <a:gd name="csX4" fmla="*/ 755949 w 5180572"/>
-              <a:gd name="csY4" fmla="*/ 2878371 h 8337890"/>
-              <a:gd name="csX0" fmla="*/ 755949 w 5601609"/>
-              <a:gd name="csY0" fmla="*/ 2962031 h 8421550"/>
-              <a:gd name="csX1" fmla="*/ 4050273 w 5601609"/>
-              <a:gd name="csY1" fmla="*/ 86256 h 8421550"/>
-              <a:gd name="csX2" fmla="*/ 5577491 w 5601609"/>
-              <a:gd name="csY2" fmla="*/ 989920 h 8421550"/>
-              <a:gd name="csX3" fmla="*/ 4768721 w 5601609"/>
-              <a:gd name="csY3" fmla="*/ 3413536 h 8421550"/>
-              <a:gd name="csX4" fmla="*/ 1503293 w 5601609"/>
-              <a:gd name="csY4" fmla="*/ 8341597 h 8421550"/>
-              <a:gd name="csX5" fmla="*/ 755949 w 5601609"/>
-              <a:gd name="csY5" fmla="*/ 2962031 h 8421550"/>
-              <a:gd name="csX0" fmla="*/ 755949 w 5601609"/>
-              <a:gd name="csY0" fmla="*/ 2954571 h 8414090"/>
-              <a:gd name="csX1" fmla="*/ 4050273 w 5601609"/>
-              <a:gd name="csY1" fmla="*/ 78796 h 8414090"/>
-              <a:gd name="csX2" fmla="*/ 5577491 w 5601609"/>
-              <a:gd name="csY2" fmla="*/ 982460 h 8414090"/>
-              <a:gd name="csX3" fmla="*/ 4768721 w 5601609"/>
-              <a:gd name="csY3" fmla="*/ 3406076 h 8414090"/>
-              <a:gd name="csX4" fmla="*/ 1503293 w 5601609"/>
-              <a:gd name="csY4" fmla="*/ 8334137 h 8414090"/>
-              <a:gd name="csX5" fmla="*/ 755949 w 5601609"/>
-              <a:gd name="csY5" fmla="*/ 2954571 h 8414090"/>
-              <a:gd name="csX0" fmla="*/ 746220 w 5591880"/>
-              <a:gd name="csY0" fmla="*/ 2863760 h 8323279"/>
-              <a:gd name="csX1" fmla="*/ 3865525 w 5591880"/>
-              <a:gd name="csY1" fmla="*/ 86813 h 8323279"/>
-              <a:gd name="csX2" fmla="*/ 5567762 w 5591880"/>
-              <a:gd name="csY2" fmla="*/ 891649 h 8323279"/>
-              <a:gd name="csX3" fmla="*/ 4758992 w 5591880"/>
-              <a:gd name="csY3" fmla="*/ 3315265 h 8323279"/>
-              <a:gd name="csX4" fmla="*/ 1493564 w 5591880"/>
-              <a:gd name="csY4" fmla="*/ 8243326 h 8323279"/>
-              <a:gd name="csX5" fmla="*/ 746220 w 5591880"/>
-              <a:gd name="csY5" fmla="*/ 2863760 h 8323279"/>
-              <a:gd name="csX0" fmla="*/ 746220 w 5591880"/>
-              <a:gd name="csY0" fmla="*/ 2777767 h 8237286"/>
-              <a:gd name="csX1" fmla="*/ 3865525 w 5591880"/>
-              <a:gd name="csY1" fmla="*/ 820 h 8237286"/>
-              <a:gd name="csX2" fmla="*/ 5567762 w 5591880"/>
-              <a:gd name="csY2" fmla="*/ 805656 h 8237286"/>
-              <a:gd name="csX3" fmla="*/ 4758992 w 5591880"/>
-              <a:gd name="csY3" fmla="*/ 3229272 h 8237286"/>
-              <a:gd name="csX4" fmla="*/ 1493564 w 5591880"/>
-              <a:gd name="csY4" fmla="*/ 8157333 h 8237286"/>
-              <a:gd name="csX5" fmla="*/ 746220 w 5591880"/>
-              <a:gd name="csY5" fmla="*/ 2777767 h 8237286"/>
-              <a:gd name="csX0" fmla="*/ 679331 w 5524991"/>
-              <a:gd name="csY0" fmla="*/ 2851449 h 8310968"/>
-              <a:gd name="csX1" fmla="*/ 2562394 w 5524991"/>
-              <a:gd name="csY1" fmla="*/ 2647832 h 8310968"/>
-              <a:gd name="csX2" fmla="*/ 3798636 w 5524991"/>
-              <a:gd name="csY2" fmla="*/ 74502 h 8310968"/>
-              <a:gd name="csX3" fmla="*/ 5500873 w 5524991"/>
-              <a:gd name="csY3" fmla="*/ 879338 h 8310968"/>
-              <a:gd name="csX4" fmla="*/ 4692103 w 5524991"/>
-              <a:gd name="csY4" fmla="*/ 3302954 h 8310968"/>
-              <a:gd name="csX5" fmla="*/ 1426675 w 5524991"/>
-              <a:gd name="csY5" fmla="*/ 8231015 h 8310968"/>
-              <a:gd name="csX6" fmla="*/ 679331 w 5524991"/>
-              <a:gd name="csY6" fmla="*/ 2851449 h 8310968"/>
-              <a:gd name="csX0" fmla="*/ 250758 w 4418662"/>
-              <a:gd name="csY0" fmla="*/ 3606835 h 8231523"/>
-              <a:gd name="csX1" fmla="*/ 1456065 w 4418662"/>
-              <a:gd name="csY1" fmla="*/ 2647832 h 8231523"/>
-              <a:gd name="csX2" fmla="*/ 2692307 w 4418662"/>
-              <a:gd name="csY2" fmla="*/ 74502 h 8231523"/>
-              <a:gd name="csX3" fmla="*/ 4394544 w 4418662"/>
-              <a:gd name="csY3" fmla="*/ 879338 h 8231523"/>
-              <a:gd name="csX4" fmla="*/ 3585774 w 4418662"/>
-              <a:gd name="csY4" fmla="*/ 3302954 h 8231523"/>
-              <a:gd name="csX5" fmla="*/ 320346 w 4418662"/>
-              <a:gd name="csY5" fmla="*/ 8231015 h 8231523"/>
-              <a:gd name="csX6" fmla="*/ 250758 w 4418662"/>
-              <a:gd name="csY6" fmla="*/ 3606835 h 8231523"/>
-              <a:gd name="csX0" fmla="*/ 508860 w 4676764"/>
-              <a:gd name="csY0" fmla="*/ 3606835 h 8231501"/>
-              <a:gd name="csX1" fmla="*/ 1714167 w 4676764"/>
-              <a:gd name="csY1" fmla="*/ 2647832 h 8231501"/>
-              <a:gd name="csX2" fmla="*/ 2950409 w 4676764"/>
-              <a:gd name="csY2" fmla="*/ 74502 h 8231501"/>
-              <a:gd name="csX3" fmla="*/ 4652646 w 4676764"/>
-              <a:gd name="csY3" fmla="*/ 879338 h 8231501"/>
-              <a:gd name="csX4" fmla="*/ 3843876 w 4676764"/>
-              <a:gd name="csY4" fmla="*/ 3302954 h 8231501"/>
-              <a:gd name="csX5" fmla="*/ 578448 w 4676764"/>
-              <a:gd name="csY5" fmla="*/ 8231015 h 8231501"/>
-              <a:gd name="csX6" fmla="*/ 508860 w 4676764"/>
-              <a:gd name="csY6" fmla="*/ 3606835 h 8231501"/>
-              <a:gd name="csX0" fmla="*/ 248083 w 4415987"/>
-              <a:gd name="csY0" fmla="*/ 3610697 h 8235384"/>
-              <a:gd name="csX1" fmla="*/ 1402413 w 4415987"/>
-              <a:gd name="csY1" fmla="*/ 2716158 h 8235384"/>
-              <a:gd name="csX2" fmla="*/ 2689632 w 4415987"/>
-              <a:gd name="csY2" fmla="*/ 78364 h 8235384"/>
-              <a:gd name="csX3" fmla="*/ 4391869 w 4415987"/>
-              <a:gd name="csY3" fmla="*/ 883200 h 8235384"/>
-              <a:gd name="csX4" fmla="*/ 3583099 w 4415987"/>
-              <a:gd name="csY4" fmla="*/ 3306816 h 8235384"/>
-              <a:gd name="csX5" fmla="*/ 317671 w 4415987"/>
-              <a:gd name="csY5" fmla="*/ 8234877 h 8235384"/>
-              <a:gd name="csX6" fmla="*/ 248083 w 4415987"/>
-              <a:gd name="csY6" fmla="*/ 3610697 h 8235384"/>
-              <a:gd name="csX0" fmla="*/ 248083 w 4415987"/>
-              <a:gd name="csY0" fmla="*/ 3610697 h 8235384"/>
-              <a:gd name="csX1" fmla="*/ 1402413 w 4415987"/>
-              <a:gd name="csY1" fmla="*/ 2716158 h 8235384"/>
-              <a:gd name="csX2" fmla="*/ 2689632 w 4415987"/>
-              <a:gd name="csY2" fmla="*/ 78364 h 8235384"/>
-              <a:gd name="csX3" fmla="*/ 4391869 w 4415987"/>
-              <a:gd name="csY3" fmla="*/ 883200 h 8235384"/>
-              <a:gd name="csX4" fmla="*/ 3583099 w 4415987"/>
-              <a:gd name="csY4" fmla="*/ 3306816 h 8235384"/>
-              <a:gd name="csX5" fmla="*/ 317671 w 4415987"/>
-              <a:gd name="csY5" fmla="*/ 8234877 h 8235384"/>
-              <a:gd name="csX6" fmla="*/ 248083 w 4415987"/>
-              <a:gd name="csY6" fmla="*/ 3610697 h 8235384"/>
-              <a:gd name="csX0" fmla="*/ 85435 w 4710329"/>
-              <a:gd name="csY0" fmla="*/ 4423597 h 8242968"/>
-              <a:gd name="csX1" fmla="*/ 1696755 w 4710329"/>
-              <a:gd name="csY1" fmla="*/ 2716158 h 8242968"/>
-              <a:gd name="csX2" fmla="*/ 2983974 w 4710329"/>
-              <a:gd name="csY2" fmla="*/ 78364 h 8242968"/>
-              <a:gd name="csX3" fmla="*/ 4686211 w 4710329"/>
-              <a:gd name="csY3" fmla="*/ 883200 h 8242968"/>
-              <a:gd name="csX4" fmla="*/ 3877441 w 4710329"/>
-              <a:gd name="csY4" fmla="*/ 3306816 h 8242968"/>
-              <a:gd name="csX5" fmla="*/ 612013 w 4710329"/>
-              <a:gd name="csY5" fmla="*/ 8234877 h 8242968"/>
-              <a:gd name="csX6" fmla="*/ 85435 w 4710329"/>
-              <a:gd name="csY6" fmla="*/ 4423597 h 8242968"/>
-              <a:gd name="csX0" fmla="*/ 243944 w 4868838"/>
-              <a:gd name="csY0" fmla="*/ 4423597 h 8242846"/>
-              <a:gd name="csX1" fmla="*/ 1855264 w 4868838"/>
-              <a:gd name="csY1" fmla="*/ 2716158 h 8242846"/>
-              <a:gd name="csX2" fmla="*/ 3142483 w 4868838"/>
-              <a:gd name="csY2" fmla="*/ 78364 h 8242846"/>
-              <a:gd name="csX3" fmla="*/ 4844720 w 4868838"/>
-              <a:gd name="csY3" fmla="*/ 883200 h 8242846"/>
-              <a:gd name="csX4" fmla="*/ 4035950 w 4868838"/>
-              <a:gd name="csY4" fmla="*/ 3306816 h 8242846"/>
-              <a:gd name="csX5" fmla="*/ 770522 w 4868838"/>
-              <a:gd name="csY5" fmla="*/ 8234877 h 8242846"/>
-              <a:gd name="csX6" fmla="*/ 243944 w 4868838"/>
-              <a:gd name="csY6" fmla="*/ 4423597 h 8242846"/>
-              <a:gd name="csX0" fmla="*/ 1033724 w 5658618"/>
-              <a:gd name="csY0" fmla="*/ 4423597 h 8297012"/>
-              <a:gd name="csX1" fmla="*/ 2645044 w 5658618"/>
-              <a:gd name="csY1" fmla="*/ 2716158 h 8297012"/>
-              <a:gd name="csX2" fmla="*/ 3932263 w 5658618"/>
-              <a:gd name="csY2" fmla="*/ 78364 h 8297012"/>
-              <a:gd name="csX3" fmla="*/ 5634500 w 5658618"/>
-              <a:gd name="csY3" fmla="*/ 883200 h 8297012"/>
-              <a:gd name="csX4" fmla="*/ 4825730 w 5658618"/>
-              <a:gd name="csY4" fmla="*/ 3306816 h 8297012"/>
-              <a:gd name="csX5" fmla="*/ 1560302 w 5658618"/>
-              <a:gd name="csY5" fmla="*/ 8234877 h 8297012"/>
-              <a:gd name="csX6" fmla="*/ 7783 w 5658618"/>
-              <a:gd name="csY6" fmla="*/ 5976200 h 8297012"/>
-              <a:gd name="csX7" fmla="*/ 1033724 w 5658618"/>
-              <a:gd name="csY7" fmla="*/ 4423597 h 8297012"/>
-              <a:gd name="csX0" fmla="*/ 1033724 w 5658618"/>
-              <a:gd name="csY0" fmla="*/ 4423597 h 8392010"/>
-              <a:gd name="csX1" fmla="*/ 2645044 w 5658618"/>
-              <a:gd name="csY1" fmla="*/ 2716158 h 8392010"/>
-              <a:gd name="csX2" fmla="*/ 3932263 w 5658618"/>
-              <a:gd name="csY2" fmla="*/ 78364 h 8392010"/>
-              <a:gd name="csX3" fmla="*/ 5634500 w 5658618"/>
-              <a:gd name="csY3" fmla="*/ 883200 h 8392010"/>
-              <a:gd name="csX4" fmla="*/ 4825730 w 5658618"/>
-              <a:gd name="csY4" fmla="*/ 3306816 h 8392010"/>
-              <a:gd name="csX5" fmla="*/ 3076421 w 5658618"/>
-              <a:gd name="csY5" fmla="*/ 7655532 h 8392010"/>
-              <a:gd name="csX6" fmla="*/ 1560302 w 5658618"/>
-              <a:gd name="csY6" fmla="*/ 8234877 h 8392010"/>
-              <a:gd name="csX7" fmla="*/ 7783 w 5658618"/>
-              <a:gd name="csY7" fmla="*/ 5976200 h 8392010"/>
-              <a:gd name="csX8" fmla="*/ 1033724 w 5658618"/>
-              <a:gd name="csY8" fmla="*/ 4423597 h 8392010"/>
-              <a:gd name="csX0" fmla="*/ 1033724 w 5658618"/>
-              <a:gd name="csY0" fmla="*/ 4423597 h 8417076"/>
-              <a:gd name="csX1" fmla="*/ 2645044 w 5658618"/>
-              <a:gd name="csY1" fmla="*/ 2716158 h 8417076"/>
-              <a:gd name="csX2" fmla="*/ 3932263 w 5658618"/>
-              <a:gd name="csY2" fmla="*/ 78364 h 8417076"/>
-              <a:gd name="csX3" fmla="*/ 5634500 w 5658618"/>
-              <a:gd name="csY3" fmla="*/ 883200 h 8417076"/>
-              <a:gd name="csX4" fmla="*/ 4825730 w 5658618"/>
-              <a:gd name="csY4" fmla="*/ 3306816 h 8417076"/>
-              <a:gd name="csX5" fmla="*/ 3076421 w 5658618"/>
-              <a:gd name="csY5" fmla="*/ 7655532 h 8417076"/>
-              <a:gd name="csX6" fmla="*/ 1643805 w 5658618"/>
-              <a:gd name="csY6" fmla="*/ 8269278 h 8417076"/>
-              <a:gd name="csX7" fmla="*/ 7783 w 5658618"/>
-              <a:gd name="csY7" fmla="*/ 5976200 h 8417076"/>
-              <a:gd name="csX8" fmla="*/ 1033724 w 5658618"/>
-              <a:gd name="csY8" fmla="*/ 4423597 h 8417076"/>
-              <a:gd name="csX0" fmla="*/ 1036919 w 5661813"/>
-              <a:gd name="csY0" fmla="*/ 4423597 h 8314732"/>
-              <a:gd name="csX1" fmla="*/ 2648239 w 5661813"/>
-              <a:gd name="csY1" fmla="*/ 2716158 h 8314732"/>
-              <a:gd name="csX2" fmla="*/ 3935458 w 5661813"/>
-              <a:gd name="csY2" fmla="*/ 78364 h 8314732"/>
-              <a:gd name="csX3" fmla="*/ 5637695 w 5661813"/>
-              <a:gd name="csY3" fmla="*/ 883200 h 8314732"/>
-              <a:gd name="csX4" fmla="*/ 4828925 w 5661813"/>
-              <a:gd name="csY4" fmla="*/ 3306816 h 8314732"/>
-              <a:gd name="csX5" fmla="*/ 3079616 w 5661813"/>
-              <a:gd name="csY5" fmla="*/ 7655532 h 8314732"/>
-              <a:gd name="csX6" fmla="*/ 1647000 w 5661813"/>
-              <a:gd name="csY6" fmla="*/ 8269278 h 8314732"/>
-              <a:gd name="csX7" fmla="*/ 430726 w 5661813"/>
-              <a:gd name="csY7" fmla="*/ 7357855 h 8314732"/>
-              <a:gd name="csX8" fmla="*/ 10978 w 5661813"/>
-              <a:gd name="csY8" fmla="*/ 5976200 h 8314732"/>
-              <a:gd name="csX9" fmla="*/ 1036919 w 5661813"/>
-              <a:gd name="csY9" fmla="*/ 4423597 h 8314732"/>
-              <a:gd name="csX0" fmla="*/ 1036919 w 5713201"/>
-              <a:gd name="csY0" fmla="*/ 4423597 h 8314732"/>
-              <a:gd name="csX1" fmla="*/ 2648239 w 5713201"/>
-              <a:gd name="csY1" fmla="*/ 2716158 h 8314732"/>
-              <a:gd name="csX2" fmla="*/ 3935458 w 5713201"/>
-              <a:gd name="csY2" fmla="*/ 78364 h 8314732"/>
-              <a:gd name="csX3" fmla="*/ 5637695 w 5713201"/>
-              <a:gd name="csY3" fmla="*/ 883200 h 8314732"/>
-              <a:gd name="csX4" fmla="*/ 4828925 w 5713201"/>
-              <a:gd name="csY4" fmla="*/ 3306816 h 8314732"/>
-              <a:gd name="csX5" fmla="*/ 3079616 w 5713201"/>
-              <a:gd name="csY5" fmla="*/ 7655532 h 8314732"/>
-              <a:gd name="csX6" fmla="*/ 1647000 w 5713201"/>
-              <a:gd name="csY6" fmla="*/ 8269278 h 8314732"/>
-              <a:gd name="csX7" fmla="*/ 430726 w 5713201"/>
-              <a:gd name="csY7" fmla="*/ 7357855 h 8314732"/>
-              <a:gd name="csX8" fmla="*/ 10978 w 5713201"/>
-              <a:gd name="csY8" fmla="*/ 5976200 h 8314732"/>
-              <a:gd name="csX9" fmla="*/ 1036919 w 5713201"/>
-              <a:gd name="csY9" fmla="*/ 4423597 h 8314732"/>
-              <a:gd name="csX0" fmla="*/ 1036919 w 5713201"/>
-              <a:gd name="csY0" fmla="*/ 4423790 h 8314925"/>
-              <a:gd name="csX1" fmla="*/ 2648239 w 5713201"/>
-              <a:gd name="csY1" fmla="*/ 2716351 h 8314925"/>
-              <a:gd name="csX2" fmla="*/ 3935458 w 5713201"/>
-              <a:gd name="csY2" fmla="*/ 78557 h 8314925"/>
-              <a:gd name="csX3" fmla="*/ 5637695 w 5713201"/>
-              <a:gd name="csY3" fmla="*/ 883393 h 8314925"/>
-              <a:gd name="csX4" fmla="*/ 4828925 w 5713201"/>
-              <a:gd name="csY4" fmla="*/ 3307009 h 8314925"/>
-              <a:gd name="csX5" fmla="*/ 3079616 w 5713201"/>
-              <a:gd name="csY5" fmla="*/ 7655725 h 8314925"/>
-              <a:gd name="csX6" fmla="*/ 1647000 w 5713201"/>
-              <a:gd name="csY6" fmla="*/ 8269471 h 8314925"/>
-              <a:gd name="csX7" fmla="*/ 430726 w 5713201"/>
-              <a:gd name="csY7" fmla="*/ 7358048 h 8314925"/>
-              <a:gd name="csX8" fmla="*/ 10978 w 5713201"/>
-              <a:gd name="csY8" fmla="*/ 5976393 h 8314925"/>
-              <a:gd name="csX9" fmla="*/ 1036919 w 5713201"/>
-              <a:gd name="csY9" fmla="*/ 4423790 h 8314925"/>
-              <a:gd name="csX0" fmla="*/ 1036919 w 5713201"/>
-              <a:gd name="csY0" fmla="*/ 4391860 h 8282995"/>
-              <a:gd name="csX1" fmla="*/ 2648239 w 5713201"/>
-              <a:gd name="csY1" fmla="*/ 2684421 h 8282995"/>
-              <a:gd name="csX2" fmla="*/ 3872206 w 5713201"/>
-              <a:gd name="csY2" fmla="*/ 81616 h 8282995"/>
-              <a:gd name="csX3" fmla="*/ 5637695 w 5713201"/>
-              <a:gd name="csY3" fmla="*/ 851463 h 8282995"/>
-              <a:gd name="csX4" fmla="*/ 4828925 w 5713201"/>
-              <a:gd name="csY4" fmla="*/ 3275079 h 8282995"/>
-              <a:gd name="csX5" fmla="*/ 3079616 w 5713201"/>
-              <a:gd name="csY5" fmla="*/ 7623795 h 8282995"/>
-              <a:gd name="csX6" fmla="*/ 1647000 w 5713201"/>
-              <a:gd name="csY6" fmla="*/ 8237541 h 8282995"/>
-              <a:gd name="csX7" fmla="*/ 430726 w 5713201"/>
-              <a:gd name="csY7" fmla="*/ 7326118 h 8282995"/>
-              <a:gd name="csX8" fmla="*/ 10978 w 5713201"/>
-              <a:gd name="csY8" fmla="*/ 5944463 h 8282995"/>
-              <a:gd name="csX9" fmla="*/ 1036919 w 5713201"/>
-              <a:gd name="csY9" fmla="*/ 4391860 h 8282995"/>
-              <a:gd name="csX0" fmla="*/ 1036919 w 5713201"/>
-              <a:gd name="csY0" fmla="*/ 4339825 h 8230960"/>
-              <a:gd name="csX1" fmla="*/ 2648239 w 5713201"/>
-              <a:gd name="csY1" fmla="*/ 2632386 h 8230960"/>
-              <a:gd name="csX2" fmla="*/ 3872206 w 5713201"/>
-              <a:gd name="csY2" fmla="*/ 29581 h 8230960"/>
-              <a:gd name="csX3" fmla="*/ 5637695 w 5713201"/>
-              <a:gd name="csY3" fmla="*/ 799428 h 8230960"/>
-              <a:gd name="csX4" fmla="*/ 4828925 w 5713201"/>
-              <a:gd name="csY4" fmla="*/ 3223044 h 8230960"/>
-              <a:gd name="csX5" fmla="*/ 3079616 w 5713201"/>
-              <a:gd name="csY5" fmla="*/ 7571760 h 8230960"/>
-              <a:gd name="csX6" fmla="*/ 1647000 w 5713201"/>
-              <a:gd name="csY6" fmla="*/ 8185506 h 8230960"/>
-              <a:gd name="csX7" fmla="*/ 430726 w 5713201"/>
-              <a:gd name="csY7" fmla="*/ 7274083 h 8230960"/>
-              <a:gd name="csX8" fmla="*/ 10978 w 5713201"/>
-              <a:gd name="csY8" fmla="*/ 5892428 h 8230960"/>
-              <a:gd name="csX9" fmla="*/ 1036919 w 5713201"/>
-              <a:gd name="csY9" fmla="*/ 4339825 h 8230960"/>
-              <a:gd name="csX0" fmla="*/ 1036919 w 5714556"/>
-              <a:gd name="csY0" fmla="*/ 4339825 h 8230960"/>
-              <a:gd name="csX1" fmla="*/ 2648239 w 5714556"/>
-              <a:gd name="csY1" fmla="*/ 2632386 h 8230960"/>
-              <a:gd name="csX2" fmla="*/ 3872206 w 5714556"/>
-              <a:gd name="csY2" fmla="*/ 29581 h 8230960"/>
-              <a:gd name="csX3" fmla="*/ 5637695 w 5714556"/>
-              <a:gd name="csY3" fmla="*/ 799428 h 8230960"/>
-              <a:gd name="csX4" fmla="*/ 4842450 w 5714556"/>
-              <a:gd name="csY4" fmla="*/ 3130941 h 8230960"/>
-              <a:gd name="csX5" fmla="*/ 3079616 w 5714556"/>
-              <a:gd name="csY5" fmla="*/ 7571760 h 8230960"/>
-              <a:gd name="csX6" fmla="*/ 1647000 w 5714556"/>
-              <a:gd name="csY6" fmla="*/ 8185506 h 8230960"/>
-              <a:gd name="csX7" fmla="*/ 430726 w 5714556"/>
-              <a:gd name="csY7" fmla="*/ 7274083 h 8230960"/>
-              <a:gd name="csX8" fmla="*/ 10978 w 5714556"/>
-              <a:gd name="csY8" fmla="*/ 5892428 h 8230960"/>
-              <a:gd name="csX9" fmla="*/ 1036919 w 5714556"/>
-              <a:gd name="csY9" fmla="*/ 4339825 h 8230960"/>
-              <a:gd name="csX0" fmla="*/ 1036919 w 5714556"/>
-              <a:gd name="csY0" fmla="*/ 4339825 h 8300703"/>
-              <a:gd name="csX1" fmla="*/ 2648239 w 5714556"/>
-              <a:gd name="csY1" fmla="*/ 2632386 h 8300703"/>
-              <a:gd name="csX2" fmla="*/ 3872206 w 5714556"/>
-              <a:gd name="csY2" fmla="*/ 29581 h 8300703"/>
-              <a:gd name="csX3" fmla="*/ 5637695 w 5714556"/>
-              <a:gd name="csY3" fmla="*/ 799428 h 8300703"/>
-              <a:gd name="csX4" fmla="*/ 4842450 w 5714556"/>
-              <a:gd name="csY4" fmla="*/ 3130941 h 8300703"/>
-              <a:gd name="csX5" fmla="*/ 3035989 w 5714556"/>
-              <a:gd name="csY5" fmla="*/ 7736927 h 8300703"/>
-              <a:gd name="csX6" fmla="*/ 1647000 w 5714556"/>
-              <a:gd name="csY6" fmla="*/ 8185506 h 8300703"/>
-              <a:gd name="csX7" fmla="*/ 430726 w 5714556"/>
-              <a:gd name="csY7" fmla="*/ 7274083 h 8300703"/>
-              <a:gd name="csX8" fmla="*/ 10978 w 5714556"/>
-              <a:gd name="csY8" fmla="*/ 5892428 h 8300703"/>
-              <a:gd name="csX9" fmla="*/ 1036919 w 5714556"/>
-              <a:gd name="csY9" fmla="*/ 4339825 h 8300703"/>
-              <a:gd name="csX0" fmla="*/ 1036919 w 5714556"/>
-              <a:gd name="csY0" fmla="*/ 4339825 h 8315686"/>
-              <a:gd name="csX1" fmla="*/ 2648239 w 5714556"/>
-              <a:gd name="csY1" fmla="*/ 2632386 h 8315686"/>
-              <a:gd name="csX2" fmla="*/ 3872206 w 5714556"/>
-              <a:gd name="csY2" fmla="*/ 29581 h 8315686"/>
-              <a:gd name="csX3" fmla="*/ 5637695 w 5714556"/>
-              <a:gd name="csY3" fmla="*/ 799428 h 8315686"/>
-              <a:gd name="csX4" fmla="*/ 4842450 w 5714556"/>
-              <a:gd name="csY4" fmla="*/ 3130941 h 8315686"/>
-              <a:gd name="csX5" fmla="*/ 3035989 w 5714556"/>
-              <a:gd name="csY5" fmla="*/ 7736927 h 8315686"/>
-              <a:gd name="csX6" fmla="*/ 1709626 w 5714556"/>
-              <a:gd name="csY6" fmla="*/ 8211307 h 8315686"/>
-              <a:gd name="csX7" fmla="*/ 430726 w 5714556"/>
-              <a:gd name="csY7" fmla="*/ 7274083 h 8315686"/>
-              <a:gd name="csX8" fmla="*/ 10978 w 5714556"/>
-              <a:gd name="csY8" fmla="*/ 5892428 h 8315686"/>
-              <a:gd name="csX9" fmla="*/ 1036919 w 5714556"/>
-              <a:gd name="csY9" fmla="*/ 4339825 h 8315686"/>
-              <a:gd name="csX0" fmla="*/ 1041511 w 5719148"/>
-              <a:gd name="csY0" fmla="*/ 4339825 h 8318068"/>
-              <a:gd name="csX1" fmla="*/ 2652831 w 5719148"/>
-              <a:gd name="csY1" fmla="*/ 2632386 h 8318068"/>
-              <a:gd name="csX2" fmla="*/ 3876798 w 5719148"/>
-              <a:gd name="csY2" fmla="*/ 29581 h 8318068"/>
-              <a:gd name="csX3" fmla="*/ 5642287 w 5719148"/>
-              <a:gd name="csY3" fmla="*/ 799428 h 8318068"/>
-              <a:gd name="csX4" fmla="*/ 4847042 w 5719148"/>
-              <a:gd name="csY4" fmla="*/ 3130941 h 8318068"/>
-              <a:gd name="csX5" fmla="*/ 3040581 w 5719148"/>
-              <a:gd name="csY5" fmla="*/ 7736927 h 8318068"/>
-              <a:gd name="csX6" fmla="*/ 1714218 w 5719148"/>
-              <a:gd name="csY6" fmla="*/ 8211307 h 8318068"/>
-              <a:gd name="csX7" fmla="*/ 351816 w 5719148"/>
-              <a:gd name="csY7" fmla="*/ 7239682 h 8318068"/>
-              <a:gd name="csX8" fmla="*/ 15570 w 5719148"/>
-              <a:gd name="csY8" fmla="*/ 5892428 h 8318068"/>
-              <a:gd name="csX9" fmla="*/ 1041511 w 5719148"/>
-              <a:gd name="csY9" fmla="*/ 4339825 h 8318068"/>
-              <a:gd name="csX0" fmla="*/ 1150008 w 5827645"/>
-              <a:gd name="csY0" fmla="*/ 4339825 h 8318068"/>
-              <a:gd name="csX1" fmla="*/ 2761328 w 5827645"/>
-              <a:gd name="csY1" fmla="*/ 2632386 h 8318068"/>
-              <a:gd name="csX2" fmla="*/ 3985295 w 5827645"/>
-              <a:gd name="csY2" fmla="*/ 29581 h 8318068"/>
-              <a:gd name="csX3" fmla="*/ 5750784 w 5827645"/>
-              <a:gd name="csY3" fmla="*/ 799428 h 8318068"/>
-              <a:gd name="csX4" fmla="*/ 4955539 w 5827645"/>
-              <a:gd name="csY4" fmla="*/ 3130941 h 8318068"/>
-              <a:gd name="csX5" fmla="*/ 3149078 w 5827645"/>
-              <a:gd name="csY5" fmla="*/ 7736927 h 8318068"/>
-              <a:gd name="csX6" fmla="*/ 1822715 w 5827645"/>
-              <a:gd name="csY6" fmla="*/ 8211307 h 8318068"/>
-              <a:gd name="csX7" fmla="*/ 460313 w 5827645"/>
-              <a:gd name="csY7" fmla="*/ 7239682 h 8318068"/>
-              <a:gd name="csX8" fmla="*/ 9876 w 5827645"/>
-              <a:gd name="csY8" fmla="*/ 5784338 h 8318068"/>
-              <a:gd name="csX9" fmla="*/ 1150008 w 5827645"/>
-              <a:gd name="csY9" fmla="*/ 4339825 h 8318068"/>
-              <a:gd name="csX0" fmla="*/ 959078 w 5827645"/>
-              <a:gd name="csY0" fmla="*/ 4151281 h 8318068"/>
-              <a:gd name="csX1" fmla="*/ 2761328 w 5827645"/>
-              <a:gd name="csY1" fmla="*/ 2632386 h 8318068"/>
-              <a:gd name="csX2" fmla="*/ 3985295 w 5827645"/>
-              <a:gd name="csY2" fmla="*/ 29581 h 8318068"/>
-              <a:gd name="csX3" fmla="*/ 5750784 w 5827645"/>
-              <a:gd name="csY3" fmla="*/ 799428 h 8318068"/>
-              <a:gd name="csX4" fmla="*/ 4955539 w 5827645"/>
-              <a:gd name="csY4" fmla="*/ 3130941 h 8318068"/>
-              <a:gd name="csX5" fmla="*/ 3149078 w 5827645"/>
-              <a:gd name="csY5" fmla="*/ 7736927 h 8318068"/>
-              <a:gd name="csX6" fmla="*/ 1822715 w 5827645"/>
-              <a:gd name="csY6" fmla="*/ 8211307 h 8318068"/>
-              <a:gd name="csX7" fmla="*/ 460313 w 5827645"/>
-              <a:gd name="csY7" fmla="*/ 7239682 h 8318068"/>
-              <a:gd name="csX8" fmla="*/ 9876 w 5827645"/>
-              <a:gd name="csY8" fmla="*/ 5784338 h 8318068"/>
-              <a:gd name="csX9" fmla="*/ 959078 w 5827645"/>
-              <a:gd name="csY9" fmla="*/ 4151281 h 8318068"/>
-            </a:gdLst>
-            <a:ahLst/>
-            <a:cxnLst>
-              <a:cxn ang="0">
-                <a:pos x="csX0" y="csY0"/>
-              </a:cxn>
-              <a:cxn ang="0">
-                <a:pos x="csX1" y="csY1"/>
-              </a:cxn>
-              <a:cxn ang="0">
-                <a:pos x="csX2" y="csY2"/>
-              </a:cxn>
-              <a:cxn ang="0">
-                <a:pos x="csX3" y="csY3"/>
-              </a:cxn>
-              <a:cxn ang="0">
-                <a:pos x="csX4" y="csY4"/>
-              </a:cxn>
-              <a:cxn ang="0">
-                <a:pos x="csX5" y="csY5"/>
-              </a:cxn>
-              <a:cxn ang="0">
-                <a:pos x="csX6" y="csY6"/>
-              </a:cxn>
-              <a:cxn ang="0">
-                <a:pos x="csX7" y="csY7"/>
-              </a:cxn>
-              <a:cxn ang="0">
-                <a:pos x="csX8" y="csY8"/>
-              </a:cxn>
-              <a:cxn ang="0">
-                <a:pos x="csX9" y="csY9"/>
-              </a:cxn>
-            </a:cxnLst>
-            <a:rect l="l" t="t" r="r" b="b"/>
-            <a:pathLst>
-              <a:path w="5827645" h="8318068">
-                <a:moveTo>
-                  <a:pt x="959078" y="4151281"/>
-                </a:moveTo>
-                <a:cubicBezTo>
-                  <a:pt x="1417653" y="3625956"/>
-                  <a:pt x="1953373" y="3586998"/>
-                  <a:pt x="2761328" y="2632386"/>
-                </a:cubicBezTo>
-                <a:cubicBezTo>
-                  <a:pt x="3281212" y="2169562"/>
-                  <a:pt x="3293659" y="182144"/>
-                  <a:pt x="3985295" y="29581"/>
-                </a:cubicBezTo>
-                <a:cubicBezTo>
-                  <a:pt x="4676931" y="-122982"/>
-                  <a:pt x="5273657" y="341831"/>
-                  <a:pt x="5750784" y="799428"/>
-                </a:cubicBezTo>
-                <a:cubicBezTo>
-                  <a:pt x="6017903" y="1292599"/>
-                  <a:pt x="5549121" y="1890807"/>
-                  <a:pt x="4955539" y="3130941"/>
-                </a:cubicBezTo>
-                <a:cubicBezTo>
-                  <a:pt x="4448772" y="4163450"/>
-                  <a:pt x="3693316" y="6915584"/>
-                  <a:pt x="3149078" y="7736927"/>
-                </a:cubicBezTo>
-                <a:cubicBezTo>
-                  <a:pt x="2604840" y="8558270"/>
-                  <a:pt x="2270843" y="8294181"/>
-                  <a:pt x="1822715" y="8211307"/>
-                </a:cubicBezTo>
-                <a:cubicBezTo>
-                  <a:pt x="1374587" y="8128433"/>
-                  <a:pt x="732983" y="7621862"/>
-                  <a:pt x="460313" y="7239682"/>
-                </a:cubicBezTo>
-                <a:cubicBezTo>
-                  <a:pt x="187643" y="6857502"/>
-                  <a:pt x="-52161" y="6252818"/>
-                  <a:pt x="9876" y="5784338"/>
-                </a:cubicBezTo>
-                <a:cubicBezTo>
-                  <a:pt x="-77887" y="5149125"/>
-                  <a:pt x="500503" y="4676606"/>
-                  <a:pt x="959078" y="4151281"/>
-                </a:cubicBezTo>
-                <a:close/>
-              </a:path>
-            </a:pathLst>
-          </a:custGeom>
-          <a:solidFill>
-            <a:srgbClr val="FDF0E7"/>
-          </a:solidFill>
-          <a:ln w="28575">
-            <a:noFill/>
-            <a:prstDash val="solid"/>
-          </a:ln>
-          <a:effectLst/>
-        </p:spPr>
-        <p:style>
-          <a:lnRef idx="0">
-            <a:schemeClr val="accent4"/>
-          </a:lnRef>
-          <a:fillRef idx="3">
-            <a:schemeClr val="accent4"/>
-          </a:fillRef>
-          <a:effectRef idx="3">
-            <a:schemeClr val="accent4"/>
-          </a:effectRef>
-          <a:fontRef idx="minor">
-            <a:schemeClr val="lt1"/>
-          </a:fontRef>
-        </p:style>
-        <p:txBody>
-          <a:bodyPr rtlCol="1" anchor="ctr"/>
-          <a:lstStyle/>
-          <a:p>
-            <a:pPr algn="r" rtl="1"/>
-            <a:endParaRPr lang="en-US" sz="4298" b="1">
-              <a:solidFill>
-                <a:schemeClr val="bg1"/>
-              </a:solidFill>
-              <a:highlight>
-                <a:srgbClr val="800080"/>
-              </a:highlight>
-              <a:latin typeface="Segoe UI" panose="020B0502040204020203" pitchFamily="34" charset="0"/>
-              <a:cs typeface="Segoe UI" panose="020B0502040204020203" pitchFamily="34" charset="0"/>
-            </a:endParaRPr>
-          </a:p>
-        </p:txBody>
-      </p:sp>
-      <p:sp>
-        <p:nvSpPr>
-          <p:cNvPr id="9" name="Rectangle: Rounded Corners 19">
-            <a:extLst>
-              <a:ext uri="{FF2B5EF4-FFF2-40B4-BE49-F238E27FC236}">
-                <a16:creationId xmlns:a16="http://schemas.microsoft.com/office/drawing/2014/main" id="{9AD1EC29-49EA-C209-2DFA-0CCF4702B04E}"/>
-              </a:ext>
-            </a:extLst>
-          </p:cNvPr>
-          <p:cNvSpPr/>
-          <p:nvPr/>
-        </p:nvSpPr>
-        <p:spPr bwMode="auto">
-          <a:xfrm>
-            <a:off x="3113640" y="6199476"/>
-            <a:ext cx="1766570" cy="1163243"/>
-          </a:xfrm>
-          <a:prstGeom prst="roundRect">
-            <a:avLst>
-              <a:gd name="adj" fmla="val 8737"/>
-            </a:avLst>
-          </a:prstGeom>
-          <a:solidFill>
-            <a:schemeClr val="bg1"/>
-          </a:solidFill>
-          <a:ln>
-            <a:solidFill>
-              <a:schemeClr val="accent5"/>
-            </a:solidFill>
-            <a:prstDash val="lgDash"/>
-          </a:ln>
-          <a:effectLst/>
-        </p:spPr>
-        <p:style>
-          <a:lnRef idx="0">
-            <a:schemeClr val="accent4"/>
-          </a:lnRef>
-          <a:fillRef idx="3">
-            <a:schemeClr val="accent4"/>
-          </a:fillRef>
-          <a:effectRef idx="3">
-            <a:schemeClr val="accent4"/>
-          </a:effectRef>
-          <a:fontRef idx="minor">
-            <a:schemeClr val="lt1"/>
-          </a:fontRef>
-        </p:style>
-        <p:txBody>
-          <a:bodyPr rtlCol="1" anchor="ctr"/>
-          <a:lstStyle/>
-          <a:p>
-            <a:pPr rtl="0">
-              <a:defRPr/>
-            </a:pPr>
-            <a:r>
-              <a:rPr lang="en-US" sz="1668" b="1">
-                <a:solidFill>
-                  <a:schemeClr val="bg1"/>
-                </a:solidFill>
-                <a:highlight>
-                  <a:srgbClr val="0000FF"/>
-                </a:highlight>
-                <a:latin typeface="Segoe UI" panose="020B0502040204020203" pitchFamily="34" charset="0"/>
-                <a:cs typeface="Segoe UI" panose="020B0502040204020203" pitchFamily="34" charset="0"/>
-              </a:rPr>
-              <a:t>EC</a:t>
-            </a:r>
-            <a:endParaRPr lang="en-US" sz="1250" b="1">
-              <a:solidFill>
-                <a:schemeClr val="bg1"/>
-              </a:solidFill>
-              <a:highlight>
-                <a:srgbClr val="0000FF"/>
-              </a:highlight>
-              <a:latin typeface="Segoe UI" panose="020B0502040204020203" pitchFamily="34" charset="0"/>
-              <a:cs typeface="Segoe UI" panose="020B0502040204020203" pitchFamily="34" charset="0"/>
-            </a:endParaRPr>
-          </a:p>
-          <a:p>
-            <a:pPr rtl="0">
-              <a:defRPr/>
-            </a:pPr>
-            <a:r>
-              <a:rPr lang="en-US" sz="1250" b="1">
-                <a:solidFill>
-                  <a:schemeClr val="tx1"/>
-                </a:solidFill>
-                <a:latin typeface="Segoe UI" panose="020B0502040204020203" pitchFamily="34" charset="0"/>
-                <a:cs typeface="Segoe UI" panose="020B0502040204020203" pitchFamily="34" charset="0"/>
-              </a:rPr>
-              <a:t>ExamCompositions</a:t>
-            </a:r>
-            <a:endParaRPr sz="1250" b="1">
-              <a:solidFill>
-                <a:schemeClr val="tx1"/>
-              </a:solidFill>
-              <a:latin typeface="Segoe UI" panose="020B0502040204020203" pitchFamily="34" charset="0"/>
-              <a:cs typeface="Segoe UI" panose="020B0502040204020203" pitchFamily="34" charset="0"/>
-            </a:endParaRPr>
-          </a:p>
-          <a:p>
-            <a:pPr rtl="0">
-              <a:defRPr/>
-            </a:pPr>
-            <a:r>
-              <a:rPr lang="en-US" sz="833" i="1">
-                <a:solidFill>
-                  <a:schemeClr val="accent5"/>
-                </a:solidFill>
-                <a:latin typeface="Segoe UI" panose="020B0502040204020203" pitchFamily="34" charset="0"/>
-                <a:cs typeface="Segoe UI" panose="020B0502040204020203" pitchFamily="34" charset="0"/>
-              </a:rPr>
-              <a:t>ExamCompositionId</a:t>
-            </a:r>
-          </a:p>
-          <a:p>
-            <a:pPr rtl="0">
-              <a:defRPr/>
-            </a:pPr>
-            <a:r>
-              <a:rPr lang="en-US" sz="833">
-                <a:solidFill>
-                  <a:schemeClr val="tx1"/>
-                </a:solidFill>
-                <a:latin typeface="Segoe UI" panose="020B0502040204020203" pitchFamily="34" charset="0"/>
-                <a:cs typeface="Segoe UI" panose="020B0502040204020203" pitchFamily="34" charset="0"/>
-              </a:rPr>
-              <a:t>ExamId</a:t>
-            </a:r>
-          </a:p>
-          <a:p>
-            <a:pPr rtl="0">
-              <a:defRPr/>
-            </a:pPr>
-            <a:r>
-              <a:rPr lang="en-US" sz="833">
-                <a:solidFill>
-                  <a:schemeClr val="tx1"/>
-                </a:solidFill>
-                <a:latin typeface="Segoe UI" panose="020B0502040204020203" pitchFamily="34" charset="0"/>
-                <a:cs typeface="Segoe UI" panose="020B0502040204020203" pitchFamily="34" charset="0"/>
-              </a:rPr>
-              <a:t>TopicId</a:t>
-            </a:r>
-          </a:p>
-          <a:p>
-            <a:pPr rtl="0">
-              <a:defRPr/>
-            </a:pPr>
-            <a:r>
-              <a:rPr lang="en-US" sz="833">
-                <a:solidFill>
-                  <a:schemeClr val="tx1"/>
-                </a:solidFill>
-                <a:latin typeface="Segoe UI" panose="020B0502040204020203" pitchFamily="34" charset="0"/>
-                <a:cs typeface="Segoe UI" panose="020B0502040204020203" pitchFamily="34" charset="0"/>
-              </a:rPr>
-              <a:t>TopicNTests</a:t>
-            </a:r>
-          </a:p>
-          <a:p>
-            <a:pPr rtl="0">
-              <a:defRPr/>
-            </a:pPr>
-            <a:r>
-              <a:rPr lang="en-US" sz="833">
-                <a:solidFill>
-                  <a:schemeClr val="tx1"/>
-                </a:solidFill>
-                <a:latin typeface="Segoe UI" panose="020B0502040204020203" pitchFamily="34" charset="0"/>
-                <a:cs typeface="Segoe UI" panose="020B0502040204020203" pitchFamily="34" charset="0"/>
-              </a:rPr>
-              <a:t>TestsLevel</a:t>
-            </a:r>
-          </a:p>
-        </p:txBody>
-      </p:sp>
-      <p:sp>
-        <p:nvSpPr>
-          <p:cNvPr id="5" name="Rectangle: Rounded Corners 15">
-            <a:extLst>
-              <a:ext uri="{FF2B5EF4-FFF2-40B4-BE49-F238E27FC236}">
-                <a16:creationId xmlns:a16="http://schemas.microsoft.com/office/drawing/2014/main" id="{2DA340F4-12AC-51AB-5C31-F1AA2AB644B6}"/>
-              </a:ext>
-            </a:extLst>
-          </p:cNvPr>
-          <p:cNvSpPr/>
-          <p:nvPr/>
-        </p:nvSpPr>
-        <p:spPr bwMode="auto">
-          <a:xfrm>
-            <a:off x="4083394" y="4867180"/>
-            <a:ext cx="1524663" cy="1596750"/>
-          </a:xfrm>
-          <a:prstGeom prst="roundRect">
-            <a:avLst>
-              <a:gd name="adj" fmla="val 5608"/>
-            </a:avLst>
-          </a:prstGeom>
-          <a:solidFill>
-            <a:schemeClr val="bg1"/>
-          </a:solidFill>
-          <a:ln w="28575">
-            <a:solidFill>
-              <a:schemeClr val="accent5"/>
-            </a:solidFill>
-          </a:ln>
-          <a:effectLst/>
-        </p:spPr>
-        <p:style>
-          <a:lnRef idx="0">
-            <a:schemeClr val="accent4"/>
-          </a:lnRef>
-          <a:fillRef idx="3">
-            <a:schemeClr val="accent4"/>
-          </a:fillRef>
-          <a:effectRef idx="3">
-            <a:schemeClr val="accent4"/>
-          </a:effectRef>
-          <a:fontRef idx="minor">
-            <a:schemeClr val="lt1"/>
-          </a:fontRef>
-        </p:style>
-        <p:txBody>
-          <a:bodyPr rtlCol="1" anchor="ctr"/>
-          <a:lstStyle/>
-          <a:p>
-            <a:pPr rtl="0">
-              <a:defRPr/>
-            </a:pPr>
-            <a:r>
-              <a:rPr lang="en-US" sz="1668" b="1">
-                <a:solidFill>
-                  <a:schemeClr val="bg1"/>
-                </a:solidFill>
-                <a:highlight>
-                  <a:srgbClr val="0000FF"/>
-                </a:highlight>
-                <a:latin typeface="Segoe UI" panose="020B0502040204020203" pitchFamily="34" charset="0"/>
-                <a:cs typeface="Segoe UI" panose="020B0502040204020203" pitchFamily="34" charset="0"/>
-              </a:rPr>
-              <a:t>E</a:t>
-            </a:r>
-          </a:p>
-          <a:p>
-            <a:pPr rtl="0">
-              <a:defRPr/>
-            </a:pPr>
-            <a:r>
-              <a:rPr lang="en-US" sz="1250" b="1">
-                <a:solidFill>
-                  <a:schemeClr val="tx1"/>
-                </a:solidFill>
-                <a:latin typeface="Segoe UI" panose="020B0502040204020203" pitchFamily="34" charset="0"/>
-                <a:cs typeface="Segoe UI" panose="020B0502040204020203" pitchFamily="34" charset="0"/>
-              </a:rPr>
-              <a:t>Exams</a:t>
-            </a:r>
-            <a:endParaRPr sz="1250">
-              <a:solidFill>
-                <a:schemeClr val="tx1"/>
-              </a:solidFill>
-              <a:latin typeface="Segoe UI" panose="020B0502040204020203" pitchFamily="34" charset="0"/>
-              <a:cs typeface="Segoe UI" panose="020B0502040204020203" pitchFamily="34" charset="0"/>
-            </a:endParaRPr>
-          </a:p>
-          <a:p>
-            <a:pPr rtl="0">
-              <a:defRPr/>
-            </a:pPr>
-            <a:r>
-              <a:rPr lang="en-US" sz="833" i="1">
-                <a:solidFill>
-                  <a:schemeClr val="accent5"/>
-                </a:solidFill>
-                <a:latin typeface="Segoe UI" panose="020B0502040204020203" pitchFamily="34" charset="0"/>
-                <a:cs typeface="Segoe UI" panose="020B0502040204020203" pitchFamily="34" charset="0"/>
-              </a:rPr>
-              <a:t>ExamId</a:t>
-            </a:r>
-          </a:p>
-          <a:p>
-            <a:pPr rtl="0">
-              <a:defRPr/>
-            </a:pPr>
-            <a:r>
-              <a:rPr lang="en-US" sz="833">
-                <a:solidFill>
-                  <a:schemeClr val="tx1"/>
-                </a:solidFill>
-                <a:latin typeface="Segoe UI" panose="020B0502040204020203" pitchFamily="34" charset="0"/>
-                <a:cs typeface="Segoe UI" panose="020B0502040204020203" pitchFamily="34" charset="0"/>
-              </a:rPr>
-              <a:t>CourseId</a:t>
-            </a:r>
-          </a:p>
-          <a:p>
-            <a:pPr rtl="0">
-              <a:defRPr/>
-            </a:pPr>
-            <a:r>
-              <a:rPr lang="en-US" sz="833">
-                <a:solidFill>
-                  <a:schemeClr val="tx1"/>
-                </a:solidFill>
-                <a:latin typeface="Segoe UI" panose="020B0502040204020203" pitchFamily="34" charset="0"/>
-                <a:cs typeface="Segoe UI" panose="020B0502040204020203" pitchFamily="34" charset="0"/>
-              </a:rPr>
-              <a:t>ExamTitle</a:t>
-            </a:r>
-          </a:p>
-          <a:p>
-            <a:pPr rtl="0">
-              <a:defRPr/>
-            </a:pPr>
-            <a:r>
-              <a:rPr lang="en-US" sz="833">
-                <a:solidFill>
-                  <a:schemeClr val="tx1"/>
-                </a:solidFill>
-                <a:latin typeface="Segoe UI" panose="020B0502040204020203" pitchFamily="34" charset="0"/>
-                <a:cs typeface="Segoe UI" panose="020B0502040204020203" pitchFamily="34" charset="0"/>
-              </a:rPr>
-              <a:t>ExamDateTime</a:t>
-            </a:r>
-          </a:p>
-          <a:p>
-            <a:pPr rtl="0">
-              <a:defRPr/>
-            </a:pPr>
-            <a:r>
-              <a:rPr lang="en-US" sz="833">
-                <a:solidFill>
-                  <a:schemeClr val="tx1"/>
-                </a:solidFill>
-                <a:latin typeface="Segoe UI" panose="020B0502040204020203" pitchFamily="34" charset="0"/>
-                <a:cs typeface="Segoe UI" panose="020B0502040204020203" pitchFamily="34" charset="0"/>
-              </a:rPr>
-              <a:t>ExamDuration</a:t>
-            </a:r>
-          </a:p>
-          <a:p>
-            <a:pPr rtl="0">
-              <a:defRPr/>
-            </a:pPr>
-            <a:r>
-              <a:rPr lang="en-US" sz="833">
-                <a:solidFill>
-                  <a:schemeClr val="tx1"/>
-                </a:solidFill>
-                <a:latin typeface="Segoe UI" panose="020B0502040204020203" pitchFamily="34" charset="0"/>
-                <a:cs typeface="Segoe UI" panose="020B0502040204020203" pitchFamily="34" charset="0"/>
-              </a:rPr>
-              <a:t>ExamNTests</a:t>
-            </a:r>
-          </a:p>
-          <a:p>
-            <a:pPr rtl="0">
-              <a:defRPr/>
-            </a:pPr>
-            <a:r>
-              <a:rPr lang="en-US" sz="833">
-                <a:solidFill>
-                  <a:schemeClr val="tx1"/>
-                </a:solidFill>
-                <a:latin typeface="Segoe UI" panose="020B0502040204020203" pitchFamily="34" charset="0"/>
-                <a:cs typeface="Segoe UI" panose="020B0502040204020203" pitchFamily="34" charset="0"/>
-              </a:rPr>
-              <a:t>ExamTags</a:t>
-            </a:r>
-            <a:r>
-              <a:rPr lang="en-US" sz="833">
-                <a:solidFill>
-                  <a:srgbClr val="C00000"/>
-                </a:solidFill>
-                <a:latin typeface="Segoe UI" panose="020B0502040204020203" pitchFamily="34" charset="0"/>
-                <a:cs typeface="Segoe UI" panose="020B0502040204020203" pitchFamily="34" charset="0"/>
-              </a:rPr>
-              <a:t> </a:t>
-            </a:r>
-          </a:p>
-          <a:p>
-            <a:pPr rtl="0">
-              <a:defRPr/>
-            </a:pPr>
-            <a:r>
-              <a:rPr lang="en-US" sz="489">
-                <a:solidFill>
-                  <a:srgbClr val="C00000"/>
-                </a:solidFill>
-                <a:latin typeface="Segoe UI" panose="020B0502040204020203" pitchFamily="34" charset="0"/>
-                <a:cs typeface="Segoe UI" panose="020B0502040204020203" pitchFamily="34" charset="0"/>
-              </a:rPr>
-              <a:t>1:act 2:training</a:t>
-            </a:r>
-          </a:p>
-        </p:txBody>
-      </p:sp>
-      <p:sp>
-        <p:nvSpPr>
-          <p:cNvPr id="97" name="Rectangle: Rounded Corners 45">
-            <a:extLst>
-              <a:ext uri="{FF2B5EF4-FFF2-40B4-BE49-F238E27FC236}">
-                <a16:creationId xmlns:a16="http://schemas.microsoft.com/office/drawing/2014/main" id="{D70CA13D-0F4B-89AC-F368-8BB5417AA37F}"/>
-              </a:ext>
-            </a:extLst>
-          </p:cNvPr>
-          <p:cNvSpPr/>
-          <p:nvPr/>
-        </p:nvSpPr>
-        <p:spPr bwMode="auto">
-          <a:xfrm>
-            <a:off x="929869" y="2267879"/>
-            <a:ext cx="1154660" cy="1751732"/>
-          </a:xfrm>
-          <a:prstGeom prst="roundRect">
-            <a:avLst>
-              <a:gd name="adj" fmla="val 8076"/>
-            </a:avLst>
-          </a:prstGeom>
-          <a:solidFill>
-            <a:schemeClr val="bg1"/>
-          </a:solidFill>
-          <a:ln w="28575">
-            <a:solidFill>
-              <a:schemeClr val="tx1"/>
-            </a:solidFill>
-            <a:prstDash val="solid"/>
-          </a:ln>
-          <a:effectLst/>
-        </p:spPr>
-        <p:style>
-          <a:lnRef idx="0">
-            <a:schemeClr val="accent4"/>
-          </a:lnRef>
-          <a:fillRef idx="3">
-            <a:schemeClr val="accent4"/>
-          </a:fillRef>
-          <a:effectRef idx="3">
-            <a:schemeClr val="accent4"/>
-          </a:effectRef>
-          <a:fontRef idx="minor">
-            <a:schemeClr val="lt1"/>
-          </a:fontRef>
-        </p:style>
-        <p:txBody>
-          <a:bodyPr rtlCol="1" anchor="ctr"/>
-          <a:lstStyle/>
-          <a:p>
-            <a:pPr algn="l" rtl="0">
-              <a:defRPr/>
-            </a:pPr>
-            <a:r>
-              <a:rPr lang="en-US" sz="1668" b="1">
-                <a:solidFill>
-                  <a:schemeClr val="bg1"/>
-                </a:solidFill>
-                <a:highlight>
-                  <a:srgbClr val="800080"/>
-                </a:highlight>
-                <a:latin typeface="Segoe UI" panose="020B0502040204020203" pitchFamily="34" charset="0"/>
-                <a:cs typeface="Segoe UI" panose="020B0502040204020203" pitchFamily="34" charset="0"/>
-              </a:rPr>
-              <a:t>M</a:t>
-            </a:r>
-          </a:p>
-          <a:p>
-            <a:pPr rtl="0">
-              <a:defRPr/>
-            </a:pPr>
-            <a:r>
-              <a:rPr lang="en-US" sz="1250" b="1">
-                <a:solidFill>
-                  <a:schemeClr val="tx1"/>
-                </a:solidFill>
-                <a:latin typeface="Segoe UI" panose="020B0502040204020203" pitchFamily="34" charset="0"/>
-                <a:cs typeface="Segoe UI" panose="020B0502040204020203" pitchFamily="34" charset="0"/>
-              </a:rPr>
-              <a:t>Messages</a:t>
-            </a:r>
-            <a:endParaRPr sz="1250">
-              <a:solidFill>
-                <a:schemeClr val="tx1"/>
-              </a:solidFill>
-              <a:latin typeface="Segoe UI" panose="020B0502040204020203" pitchFamily="34" charset="0"/>
-              <a:cs typeface="Segoe UI" panose="020B0502040204020203" pitchFamily="34" charset="0"/>
-            </a:endParaRPr>
-          </a:p>
-          <a:p>
-            <a:pPr rtl="0">
-              <a:defRPr/>
-            </a:pPr>
-            <a:r>
-              <a:rPr lang="en-US" sz="833" i="1">
-                <a:solidFill>
-                  <a:schemeClr val="accent5"/>
-                </a:solidFill>
-                <a:latin typeface="Segoe UI" panose="020B0502040204020203" pitchFamily="34" charset="0"/>
-                <a:cs typeface="Segoe UI" panose="020B0502040204020203" pitchFamily="34" charset="0"/>
-              </a:rPr>
-              <a:t>MessageId</a:t>
-            </a:r>
-          </a:p>
-          <a:p>
-            <a:pPr rtl="0">
-              <a:defRPr/>
-            </a:pPr>
-            <a:r>
-              <a:rPr lang="en-US" sz="833">
-                <a:solidFill>
-                  <a:schemeClr val="tx1"/>
-                </a:solidFill>
-                <a:latin typeface="Segoe UI" panose="020B0502040204020203" pitchFamily="34" charset="0"/>
-                <a:cs typeface="Segoe UI" panose="020B0502040204020203" pitchFamily="34" charset="0"/>
-              </a:rPr>
-              <a:t>UserId</a:t>
-            </a:r>
-          </a:p>
-          <a:p>
-            <a:pPr rtl="0">
-              <a:defRPr/>
-            </a:pPr>
-            <a:r>
-              <a:rPr lang="en-US" sz="833">
-                <a:solidFill>
-                  <a:schemeClr val="tx1"/>
-                </a:solidFill>
-                <a:latin typeface="Segoe UI" panose="020B0502040204020203" pitchFamily="34" charset="0"/>
-                <a:cs typeface="Segoe UI" panose="020B0502040204020203" pitchFamily="34" charset="0"/>
-              </a:rPr>
-              <a:t>DateTimeCreated</a:t>
-            </a:r>
-          </a:p>
-          <a:p>
-            <a:pPr rtl="0">
-              <a:defRPr/>
-            </a:pPr>
-            <a:r>
-              <a:rPr lang="en-US" sz="833">
-                <a:solidFill>
-                  <a:schemeClr val="tx1"/>
-                </a:solidFill>
-                <a:latin typeface="Segoe UI" panose="020B0502040204020203" pitchFamily="34" charset="0"/>
-                <a:cs typeface="Segoe UI" panose="020B0502040204020203" pitchFamily="34" charset="0"/>
-              </a:rPr>
-              <a:t>MessageTitle</a:t>
-            </a:r>
-          </a:p>
-          <a:p>
-            <a:pPr rtl="0">
-              <a:defRPr/>
-            </a:pPr>
-            <a:r>
-              <a:rPr lang="en-US" sz="833">
-                <a:solidFill>
-                  <a:schemeClr val="tx1"/>
-                </a:solidFill>
-                <a:latin typeface="Segoe UI" panose="020B0502040204020203" pitchFamily="34" charset="0"/>
-                <a:cs typeface="Segoe UI" panose="020B0502040204020203" pitchFamily="34" charset="0"/>
-              </a:rPr>
-              <a:t>MessageBody</a:t>
-            </a:r>
-          </a:p>
-          <a:p>
-            <a:pPr rtl="0">
-              <a:defRPr/>
-            </a:pPr>
-            <a:r>
-              <a:rPr lang="en-US" sz="833">
-                <a:solidFill>
-                  <a:schemeClr val="tx1"/>
-                </a:solidFill>
-                <a:latin typeface="Segoe UI" panose="020B0502040204020203" pitchFamily="34" charset="0"/>
-                <a:cs typeface="Segoe UI" panose="020B0502040204020203" pitchFamily="34" charset="0"/>
-              </a:rPr>
-              <a:t>Message</a:t>
-            </a:r>
-            <a:r>
-              <a:rPr lang="en-US" sz="833">
-                <a:solidFill>
-                  <a:srgbClr val="C00000"/>
-                </a:solidFill>
-                <a:latin typeface="Segoe UI" panose="020B0502040204020203" pitchFamily="34" charset="0"/>
-                <a:cs typeface="Segoe UI" panose="020B0502040204020203" pitchFamily="34" charset="0"/>
-              </a:rPr>
-              <a:t>Tags </a:t>
-            </a:r>
-          </a:p>
-          <a:p>
-            <a:pPr rtl="0">
-              <a:defRPr/>
-            </a:pPr>
-            <a:r>
-              <a:rPr lang="en-US" sz="684">
-                <a:solidFill>
-                  <a:srgbClr val="C00000"/>
-                </a:solidFill>
-                <a:latin typeface="Segoe UI" panose="020B0502040204020203" pitchFamily="34" charset="0"/>
-                <a:cs typeface="Segoe UI" panose="020B0502040204020203" pitchFamily="34" charset="0"/>
-              </a:rPr>
-              <a:t>1: act</a:t>
-            </a:r>
-          </a:p>
-          <a:p>
-            <a:pPr rtl="0">
-              <a:defRPr/>
-            </a:pPr>
-            <a:r>
-              <a:rPr lang="en-US" sz="782">
-                <a:solidFill>
-                  <a:srgbClr val="C00000"/>
-                </a:solidFill>
-                <a:latin typeface="Segoe UI" panose="020B0502040204020203" pitchFamily="34" charset="0"/>
-                <a:cs typeface="Segoe UI" panose="020B0502040204020203" pitchFamily="34" charset="0"/>
-              </a:rPr>
-              <a:t>2: IsSelected</a:t>
-            </a:r>
-          </a:p>
-          <a:p>
-            <a:pPr defTabSz="893264" rtl="0">
-              <a:defRPr/>
-            </a:pPr>
-            <a:r>
-              <a:rPr lang="en-US" sz="782">
-                <a:solidFill>
-                  <a:srgbClr val="C00000"/>
-                </a:solidFill>
-                <a:latin typeface="Segoe UI" panose="020B0502040204020203" pitchFamily="34" charset="0"/>
-                <a:cs typeface="Segoe UI" panose="020B0502040204020203" pitchFamily="34" charset="0"/>
-              </a:rPr>
-              <a:t>4: -</a:t>
-            </a:r>
-          </a:p>
-          <a:p>
-            <a:pPr rtl="0">
-              <a:defRPr/>
-            </a:pPr>
-            <a:r>
-              <a:rPr lang="en-US" sz="782">
-                <a:solidFill>
-                  <a:srgbClr val="C00000"/>
-                </a:solidFill>
-                <a:latin typeface="Segoe UI" panose="020B0502040204020203" pitchFamily="34" charset="0"/>
-                <a:cs typeface="Segoe UI" panose="020B0502040204020203" pitchFamily="34" charset="0"/>
-              </a:rPr>
-              <a:t>8: -</a:t>
-            </a:r>
-          </a:p>
-        </p:txBody>
-      </p:sp>
-      <p:sp>
-        <p:nvSpPr>
-          <p:cNvPr id="11" name="Rectangle: Rounded Corners 44">
-            <a:extLst>
-              <a:ext uri="{FF2B5EF4-FFF2-40B4-BE49-F238E27FC236}">
-                <a16:creationId xmlns:a16="http://schemas.microsoft.com/office/drawing/2014/main" id="{07025A39-485E-A742-D1EF-96BBA88D434F}"/>
-              </a:ext>
-            </a:extLst>
-          </p:cNvPr>
-          <p:cNvSpPr/>
-          <p:nvPr/>
-        </p:nvSpPr>
-        <p:spPr bwMode="auto">
-          <a:xfrm>
-            <a:off x="1703080" y="4517775"/>
-            <a:ext cx="1154658" cy="1030577"/>
-          </a:xfrm>
-          <a:prstGeom prst="roundRect">
-            <a:avLst>
-              <a:gd name="adj" fmla="val 9941"/>
-            </a:avLst>
-          </a:prstGeom>
-          <a:solidFill>
-            <a:schemeClr val="bg1"/>
-          </a:solidFill>
-          <a:ln w="28575">
-            <a:solidFill>
-              <a:schemeClr val="tx1"/>
-            </a:solidFill>
-            <a:prstDash val="solid"/>
-          </a:ln>
-          <a:effectLst/>
-        </p:spPr>
-        <p:style>
-          <a:lnRef idx="0">
-            <a:schemeClr val="accent4"/>
-          </a:lnRef>
-          <a:fillRef idx="3">
-            <a:schemeClr val="accent4"/>
-          </a:fillRef>
-          <a:effectRef idx="3">
-            <a:schemeClr val="accent4"/>
-          </a:effectRef>
-          <a:fontRef idx="minor">
-            <a:schemeClr val="lt1"/>
-          </a:fontRef>
-        </p:style>
-        <p:txBody>
-          <a:bodyPr rtlCol="1" anchor="ctr"/>
-          <a:lstStyle/>
-          <a:p>
-            <a:pPr algn="l" rtl="0">
-              <a:defRPr/>
-            </a:pPr>
-            <a:r>
-              <a:rPr lang="en-US" sz="1668" b="1">
-                <a:solidFill>
-                  <a:schemeClr val="bg1"/>
-                </a:solidFill>
-                <a:highlight>
-                  <a:srgbClr val="000000"/>
-                </a:highlight>
-                <a:latin typeface="Segoe UI" panose="020B0502040204020203" pitchFamily="34" charset="0"/>
-                <a:cs typeface="Segoe UI" panose="020B0502040204020203" pitchFamily="34" charset="0"/>
-              </a:rPr>
-              <a:t>G</a:t>
-            </a:r>
-          </a:p>
-          <a:p>
-            <a:pPr rtl="0">
-              <a:defRPr/>
-            </a:pPr>
-            <a:r>
-              <a:rPr lang="en-US" sz="1250" b="1">
-                <a:solidFill>
-                  <a:schemeClr val="tx1"/>
-                </a:solidFill>
-                <a:latin typeface="Segoe UI" panose="020B0502040204020203" pitchFamily="34" charset="0"/>
-                <a:cs typeface="Segoe UI" panose="020B0502040204020203" pitchFamily="34" charset="0"/>
-              </a:rPr>
-              <a:t>Groups</a:t>
-            </a:r>
-            <a:endParaRPr sz="1250" b="1">
-              <a:solidFill>
-                <a:schemeClr val="tx1"/>
-              </a:solidFill>
-              <a:latin typeface="Segoe UI" panose="020B0502040204020203" pitchFamily="34" charset="0"/>
-              <a:cs typeface="Segoe UI" panose="020B0502040204020203" pitchFamily="34" charset="0"/>
-            </a:endParaRPr>
-          </a:p>
-          <a:p>
-            <a:pPr rtl="0">
-              <a:defRPr/>
-            </a:pPr>
-            <a:r>
-              <a:rPr lang="en-US" sz="833" i="1">
-                <a:solidFill>
-                  <a:schemeClr val="accent5"/>
-                </a:solidFill>
-                <a:latin typeface="Segoe UI" panose="020B0502040204020203" pitchFamily="34" charset="0"/>
-                <a:cs typeface="Segoe UI" panose="020B0502040204020203" pitchFamily="34" charset="0"/>
-              </a:rPr>
-              <a:t>GroupId</a:t>
-            </a:r>
-          </a:p>
-          <a:p>
-            <a:pPr rtl="0">
-              <a:defRPr/>
-            </a:pPr>
-            <a:r>
-              <a:rPr lang="en-US" sz="833">
-                <a:solidFill>
-                  <a:schemeClr val="tx1"/>
-                </a:solidFill>
-                <a:latin typeface="Segoe UI" panose="020B0502040204020203" pitchFamily="34" charset="0"/>
-                <a:cs typeface="Segoe UI" panose="020B0502040204020203" pitchFamily="34" charset="0"/>
-              </a:rPr>
-              <a:t>GroupName</a:t>
-            </a:r>
-          </a:p>
-          <a:p>
-            <a:pPr rtl="0">
-              <a:defRPr/>
-            </a:pPr>
-            <a:r>
-              <a:rPr lang="en-US" sz="833">
-                <a:solidFill>
-                  <a:schemeClr val="tx1"/>
-                </a:solidFill>
-                <a:latin typeface="Segoe UI" panose="020B0502040204020203" pitchFamily="34" charset="0"/>
-                <a:cs typeface="Segoe UI" panose="020B0502040204020203" pitchFamily="34" charset="0"/>
-              </a:rPr>
-              <a:t>UserId</a:t>
-            </a:r>
-          </a:p>
-          <a:p>
-            <a:pPr rtl="0">
-              <a:defRPr/>
-            </a:pPr>
-            <a:r>
-              <a:rPr lang="en-US" sz="833">
-                <a:solidFill>
-                  <a:schemeClr val="tx1"/>
-                </a:solidFill>
-                <a:latin typeface="Segoe UI" panose="020B0502040204020203" pitchFamily="34" charset="0"/>
-                <a:cs typeface="Segoe UI" panose="020B0502040204020203" pitchFamily="34" charset="0"/>
-              </a:rPr>
-              <a:t>Group</a:t>
-            </a:r>
-            <a:r>
-              <a:rPr lang="en-US" sz="833">
-                <a:solidFill>
-                  <a:srgbClr val="C00000"/>
-                </a:solidFill>
-                <a:latin typeface="Segoe UI" panose="020B0502040204020203" pitchFamily="34" charset="0"/>
-                <a:cs typeface="Segoe UI" panose="020B0502040204020203" pitchFamily="34" charset="0"/>
-              </a:rPr>
-              <a:t>Tags   </a:t>
-            </a:r>
-            <a:r>
-              <a:rPr lang="en-US" sz="586">
-                <a:solidFill>
-                  <a:srgbClr val="C00000"/>
-                </a:solidFill>
-                <a:latin typeface="Segoe UI" panose="020B0502040204020203" pitchFamily="34" charset="0"/>
-                <a:cs typeface="Segoe UI" panose="020B0502040204020203" pitchFamily="34" charset="0"/>
-              </a:rPr>
-              <a:t>1: act</a:t>
-            </a:r>
-          </a:p>
-        </p:txBody>
-      </p:sp>
-      <p:sp>
-        <p:nvSpPr>
-          <p:cNvPr id="12" name="Rectangle: Rounded Corners 45">
-            <a:extLst>
-              <a:ext uri="{FF2B5EF4-FFF2-40B4-BE49-F238E27FC236}">
-                <a16:creationId xmlns:a16="http://schemas.microsoft.com/office/drawing/2014/main" id="{859AE92D-3EDE-21EF-6F26-E6419F751676}"/>
-              </a:ext>
-            </a:extLst>
-          </p:cNvPr>
-          <p:cNvSpPr/>
-          <p:nvPr/>
-        </p:nvSpPr>
-        <p:spPr bwMode="auto">
-          <a:xfrm>
-            <a:off x="3463179" y="2071484"/>
-            <a:ext cx="1812673" cy="2030534"/>
-          </a:xfrm>
-          <a:prstGeom prst="roundRect">
-            <a:avLst>
-              <a:gd name="adj" fmla="val 3991"/>
-            </a:avLst>
-          </a:prstGeom>
-          <a:solidFill>
-            <a:schemeClr val="bg1"/>
-          </a:solidFill>
-          <a:ln w="28575">
-            <a:solidFill>
-              <a:schemeClr val="tx1"/>
-            </a:solidFill>
-          </a:ln>
-          <a:effectLst/>
-        </p:spPr>
-        <p:style>
-          <a:lnRef idx="0">
-            <a:schemeClr val="accent4"/>
-          </a:lnRef>
-          <a:fillRef idx="3">
-            <a:schemeClr val="accent4"/>
-          </a:fillRef>
-          <a:effectRef idx="3">
-            <a:schemeClr val="accent4"/>
-          </a:effectRef>
-          <a:fontRef idx="minor">
-            <a:schemeClr val="lt1"/>
-          </a:fontRef>
-        </p:style>
-        <p:txBody>
-          <a:bodyPr rtlCol="1" anchor="ctr"/>
-          <a:lstStyle/>
-          <a:p>
-            <a:pPr marL="185267" algn="l" rtl="0">
-              <a:defRPr/>
-            </a:pPr>
-            <a:r>
-              <a:rPr lang="en-US" sz="1668" b="1">
-                <a:solidFill>
-                  <a:schemeClr val="bg1"/>
-                </a:solidFill>
-                <a:highlight>
-                  <a:srgbClr val="000000"/>
-                </a:highlight>
-                <a:latin typeface="Segoe UI" panose="020B0502040204020203" pitchFamily="34" charset="0"/>
-                <a:cs typeface="Segoe UI" panose="020B0502040204020203" pitchFamily="34" charset="0"/>
-              </a:rPr>
-              <a:t>S</a:t>
-            </a:r>
-          </a:p>
-          <a:p>
-            <a:pPr marL="185267" rtl="0">
-              <a:defRPr/>
-            </a:pPr>
-            <a:r>
-              <a:rPr lang="en-US" sz="1250" b="1">
-                <a:solidFill>
-                  <a:schemeClr val="tx1"/>
-                </a:solidFill>
-                <a:latin typeface="Segoe UI" panose="020B0502040204020203" pitchFamily="34" charset="0"/>
-                <a:cs typeface="Segoe UI" panose="020B0502040204020203" pitchFamily="34" charset="0"/>
-              </a:rPr>
-              <a:t>Students</a:t>
-            </a:r>
-            <a:endParaRPr sz="1250">
-              <a:solidFill>
-                <a:schemeClr val="tx1"/>
-              </a:solidFill>
-              <a:latin typeface="Segoe UI" panose="020B0502040204020203" pitchFamily="34" charset="0"/>
-              <a:cs typeface="Segoe UI" panose="020B0502040204020203" pitchFamily="34" charset="0"/>
-            </a:endParaRPr>
-          </a:p>
-          <a:p>
-            <a:pPr marL="185267" rtl="0">
-              <a:defRPr/>
-            </a:pPr>
-            <a:r>
-              <a:rPr lang="en-US" sz="833" i="1">
-                <a:solidFill>
-                  <a:schemeClr val="accent5"/>
-                </a:solidFill>
-                <a:latin typeface="Segoe UI" panose="020B0502040204020203" pitchFamily="34" charset="0"/>
-                <a:cs typeface="Segoe UI" panose="020B0502040204020203" pitchFamily="34" charset="0"/>
-              </a:rPr>
-              <a:t>StudentId</a:t>
-            </a:r>
-          </a:p>
-          <a:p>
-            <a:pPr marL="185267" rtl="0">
-              <a:defRPr/>
-            </a:pPr>
-            <a:r>
-              <a:rPr lang="en-US" sz="833">
-                <a:solidFill>
-                  <a:schemeClr val="tx1"/>
-                </a:solidFill>
-                <a:latin typeface="Segoe UI" panose="020B0502040204020203" pitchFamily="34" charset="0"/>
-                <a:cs typeface="Segoe UI" panose="020B0502040204020203" pitchFamily="34" charset="0"/>
-              </a:rPr>
-              <a:t>DepartmentId</a:t>
-            </a:r>
-          </a:p>
-          <a:p>
-            <a:pPr marL="185267" rtl="0">
-              <a:defRPr/>
-            </a:pPr>
-            <a:r>
-              <a:rPr lang="en-US" sz="833">
-                <a:solidFill>
-                  <a:schemeClr val="tx1"/>
-                </a:solidFill>
-                <a:latin typeface="Segoe UI" panose="020B0502040204020203" pitchFamily="34" charset="0"/>
-                <a:cs typeface="Segoe UI" panose="020B0502040204020203" pitchFamily="34" charset="0"/>
-              </a:rPr>
-              <a:t>StudentName</a:t>
-            </a:r>
-          </a:p>
-          <a:p>
-            <a:pPr marL="185267" rtl="0">
-              <a:defRPr/>
-            </a:pPr>
-            <a:r>
-              <a:rPr lang="en-US" sz="833">
-                <a:solidFill>
-                  <a:schemeClr val="tx1"/>
-                </a:solidFill>
-                <a:latin typeface="Segoe UI" panose="020B0502040204020203" pitchFamily="34" charset="0"/>
-                <a:cs typeface="Segoe UI" panose="020B0502040204020203" pitchFamily="34" charset="0"/>
-              </a:rPr>
-              <a:t>StudentPass</a:t>
-            </a:r>
-          </a:p>
-          <a:p>
-            <a:pPr marL="185267" rtl="0">
-              <a:defRPr/>
-            </a:pPr>
-            <a:r>
-              <a:rPr lang="en-US" sz="833">
-                <a:solidFill>
-                  <a:schemeClr val="tx1"/>
-                </a:solidFill>
-                <a:latin typeface="Segoe UI" panose="020B0502040204020203" pitchFamily="34" charset="0"/>
-                <a:cs typeface="Segoe UI" panose="020B0502040204020203" pitchFamily="34" charset="0"/>
-              </a:rPr>
-              <a:t>StudentNickname</a:t>
-            </a:r>
-          </a:p>
-          <a:p>
-            <a:pPr marL="185267" rtl="0">
-              <a:defRPr/>
-            </a:pPr>
-            <a:r>
-              <a:rPr lang="en-US" sz="833">
-                <a:solidFill>
-                  <a:schemeClr val="tx1"/>
-                </a:solidFill>
-                <a:latin typeface="Segoe UI" panose="020B0502040204020203" pitchFamily="34" charset="0"/>
-                <a:cs typeface="Segoe UI" panose="020B0502040204020203" pitchFamily="34" charset="0"/>
-              </a:rPr>
-              <a:t>StudentTags</a:t>
-            </a:r>
-          </a:p>
-          <a:p>
-            <a:pPr marL="172140" rtl="0">
-              <a:defRPr/>
-            </a:pPr>
-            <a:r>
-              <a:rPr lang="en-US" sz="489">
-                <a:solidFill>
-                  <a:srgbClr val="C00000"/>
-                </a:solidFill>
-                <a:latin typeface="Segoe UI" panose="020B0502040204020203" pitchFamily="34" charset="0"/>
-                <a:cs typeface="Segoe UI" panose="020B0502040204020203" pitchFamily="34" charset="0"/>
-              </a:rPr>
-              <a:t>1: IsActive</a:t>
-            </a:r>
-          </a:p>
-          <a:p>
-            <a:pPr marL="172140" rtl="0">
-              <a:defRPr/>
-            </a:pPr>
-            <a:r>
-              <a:rPr lang="en-US" sz="489">
-                <a:solidFill>
-                  <a:srgbClr val="C00000"/>
-                </a:solidFill>
-                <a:latin typeface="Segoe UI" panose="020B0502040204020203" pitchFamily="34" charset="0"/>
-                <a:cs typeface="Segoe UI" panose="020B0502040204020203" pitchFamily="34" charset="0"/>
-              </a:rPr>
-              <a:t>2: ChangePass</a:t>
-            </a:r>
-          </a:p>
-          <a:p>
-            <a:pPr marL="172140" rtl="0">
-              <a:defRPr/>
-            </a:pPr>
-            <a:r>
-              <a:rPr lang="en-US" sz="489">
-                <a:solidFill>
-                  <a:srgbClr val="C00000"/>
-                </a:solidFill>
-                <a:latin typeface="Segoe UI" panose="020B0502040204020203" pitchFamily="34" charset="0"/>
-                <a:cs typeface="Segoe UI" panose="020B0502040204020203" pitchFamily="34" charset="0"/>
-              </a:rPr>
-              <a:t>4: -</a:t>
-            </a:r>
-          </a:p>
-          <a:p>
-            <a:pPr marL="172140" rtl="0">
-              <a:defRPr/>
-            </a:pPr>
-            <a:r>
-              <a:rPr lang="en-US" sz="489">
-                <a:solidFill>
-                  <a:srgbClr val="C00000"/>
-                </a:solidFill>
-                <a:latin typeface="Segoe UI" panose="020B0502040204020203" pitchFamily="34" charset="0"/>
-                <a:cs typeface="Segoe UI" panose="020B0502040204020203" pitchFamily="34" charset="0"/>
-              </a:rPr>
-              <a:t>8: -</a:t>
-            </a:r>
-          </a:p>
-          <a:p>
-            <a:pPr marL="172140" rtl="0">
-              <a:defRPr/>
-            </a:pPr>
-            <a:r>
-              <a:rPr lang="en-US" sz="489">
-                <a:solidFill>
-                  <a:srgbClr val="C00000"/>
-                </a:solidFill>
-                <a:latin typeface="Segoe UI" panose="020B0502040204020203" pitchFamily="34" charset="0"/>
-                <a:cs typeface="Segoe UI" panose="020B0502040204020203" pitchFamily="34" charset="0"/>
-              </a:rPr>
-              <a:t>16: ShowDueNotes</a:t>
-            </a:r>
-          </a:p>
-          <a:p>
-            <a:pPr marL="172140" rtl="0">
-              <a:defRPr/>
-            </a:pPr>
-            <a:r>
-              <a:rPr lang="en-US" sz="489">
-                <a:solidFill>
-                  <a:srgbClr val="C00000"/>
-                </a:solidFill>
-                <a:latin typeface="Segoe UI" panose="020B0502040204020203" pitchFamily="34" charset="0"/>
-                <a:cs typeface="Segoe UI" panose="020B0502040204020203" pitchFamily="34" charset="0"/>
-              </a:rPr>
-              <a:t>32: DueNtDays=14 (def.=7)</a:t>
-            </a:r>
-          </a:p>
-          <a:p>
-            <a:pPr marL="172140" rtl="0">
-              <a:defRPr/>
-            </a:pPr>
-            <a:r>
-              <a:rPr lang="en-US" sz="489">
-                <a:solidFill>
-                  <a:srgbClr val="C00000"/>
-                </a:solidFill>
-                <a:latin typeface="Segoe UI" panose="020B0502040204020203" pitchFamily="34" charset="0"/>
-                <a:cs typeface="Segoe UI" panose="020B0502040204020203" pitchFamily="34" charset="0"/>
-              </a:rPr>
-              <a:t>64: IsSelected</a:t>
-            </a:r>
-          </a:p>
-          <a:p>
-            <a:pPr marL="172140" rtl="0">
-              <a:defRPr/>
-            </a:pPr>
-            <a:r>
-              <a:rPr lang="en-US" sz="489">
-                <a:solidFill>
-                  <a:srgbClr val="C00000"/>
-                </a:solidFill>
-                <a:latin typeface="Segoe UI" panose="020B0502040204020203" pitchFamily="34" charset="0"/>
-                <a:cs typeface="Segoe UI" panose="020B0502040204020203" pitchFamily="34" charset="0"/>
-              </a:rPr>
-              <a:t>128: -</a:t>
-            </a:r>
-          </a:p>
-          <a:p>
-            <a:pPr marL="172140" rtl="0">
-              <a:defRPr/>
-            </a:pPr>
-            <a:r>
-              <a:rPr lang="en-US" sz="489">
-                <a:solidFill>
-                  <a:srgbClr val="C00000"/>
-                </a:solidFill>
-                <a:latin typeface="Segoe UI" panose="020B0502040204020203" pitchFamily="34" charset="0"/>
-                <a:cs typeface="Segoe UI" panose="020B0502040204020203" pitchFamily="34" charset="0"/>
-              </a:rPr>
-              <a:t>256: CalendarFa</a:t>
-            </a:r>
-          </a:p>
-          <a:p>
-            <a:pPr marL="172140" rtl="0">
-              <a:defRPr/>
-            </a:pPr>
-            <a:endParaRPr lang="en-US" sz="489">
-              <a:solidFill>
-                <a:srgbClr val="C00000"/>
-              </a:solidFill>
-              <a:latin typeface="Segoe UI" panose="020B0502040204020203" pitchFamily="34" charset="0"/>
-              <a:cs typeface="Segoe UI" panose="020B0502040204020203" pitchFamily="34" charset="0"/>
-            </a:endParaRPr>
-          </a:p>
-        </p:txBody>
-      </p:sp>
-      <p:sp>
-        <p:nvSpPr>
-          <p:cNvPr id="71" name="Rectangle: Rounded Corners 1">
-            <a:extLst>
-              <a:ext uri="{FF2B5EF4-FFF2-40B4-BE49-F238E27FC236}">
-                <a16:creationId xmlns:a16="http://schemas.microsoft.com/office/drawing/2014/main" id="{F415B1EF-32FD-AADE-6D26-3CC89D566EEA}"/>
-              </a:ext>
-            </a:extLst>
-          </p:cNvPr>
-          <p:cNvSpPr/>
-          <p:nvPr/>
-        </p:nvSpPr>
-        <p:spPr bwMode="auto">
-          <a:xfrm>
-            <a:off x="4808704" y="1712097"/>
-            <a:ext cx="1576818" cy="1492801"/>
-          </a:xfrm>
-          <a:prstGeom prst="roundRect">
-            <a:avLst>
-              <a:gd name="adj" fmla="val 8076"/>
-            </a:avLst>
-          </a:prstGeom>
-          <a:solidFill>
-            <a:schemeClr val="bg1"/>
-          </a:solidFill>
-          <a:ln>
-            <a:solidFill>
-              <a:schemeClr val="accent6"/>
-            </a:solidFill>
-            <a:prstDash val="lgDash"/>
-          </a:ln>
-          <a:effectLst/>
-        </p:spPr>
-        <p:style>
-          <a:lnRef idx="0">
-            <a:schemeClr val="accent4"/>
-          </a:lnRef>
-          <a:fillRef idx="3">
-            <a:schemeClr val="accent4"/>
-          </a:fillRef>
-          <a:effectRef idx="3">
-            <a:schemeClr val="accent4"/>
-          </a:effectRef>
-          <a:fontRef idx="minor">
-            <a:schemeClr val="lt1"/>
-          </a:fontRef>
-        </p:style>
-        <p:txBody>
-          <a:bodyPr rtlCol="1" anchor="ctr"/>
-          <a:lstStyle/>
-          <a:p>
-            <a:pPr algn="l" rtl="0">
-              <a:defRPr/>
-            </a:pPr>
-            <a:r>
-              <a:rPr lang="en-US" sz="1668" b="1">
-                <a:solidFill>
-                  <a:schemeClr val="bg1"/>
-                </a:solidFill>
-                <a:highlight>
-                  <a:srgbClr val="008080"/>
-                </a:highlight>
-                <a:latin typeface="Segoe UI" panose="020B0502040204020203" pitchFamily="34" charset="0"/>
-                <a:ea typeface="Arial"/>
-                <a:cs typeface="Segoe UI" panose="020B0502040204020203" pitchFamily="34" charset="0"/>
-              </a:rPr>
-              <a:t>SC</a:t>
-            </a:r>
-          </a:p>
-          <a:p>
-            <a:pPr rtl="0">
-              <a:defRPr/>
-            </a:pPr>
-            <a:r>
-              <a:rPr lang="en-US" sz="1250" b="1">
-                <a:solidFill>
-                  <a:schemeClr val="tx1"/>
-                </a:solidFill>
-                <a:latin typeface="Segoe UI" panose="020B0502040204020203" pitchFamily="34" charset="0"/>
-                <a:ea typeface="Arial"/>
-                <a:cs typeface="Segoe UI" panose="020B0502040204020203" pitchFamily="34" charset="0"/>
-              </a:rPr>
-              <a:t>StudentCourse</a:t>
-            </a:r>
-            <a:r>
-              <a:rPr lang="en-US" sz="1250" b="1">
-                <a:solidFill>
-                  <a:schemeClr val="tx1"/>
-                </a:solidFill>
-                <a:latin typeface="Segoe UI" panose="020B0502040204020203" pitchFamily="34" charset="0"/>
-                <a:cs typeface="Segoe UI" panose="020B0502040204020203" pitchFamily="34" charset="0"/>
-              </a:rPr>
-              <a:t>s</a:t>
-            </a:r>
-            <a:endParaRPr sz="1250" b="1">
-              <a:solidFill>
-                <a:schemeClr val="tx1"/>
-              </a:solidFill>
-              <a:latin typeface="Segoe UI" panose="020B0502040204020203" pitchFamily="34" charset="0"/>
-              <a:cs typeface="Segoe UI" panose="020B0502040204020203" pitchFamily="34" charset="0"/>
-            </a:endParaRPr>
-          </a:p>
-          <a:p>
-            <a:pPr rtl="0">
-              <a:defRPr/>
-            </a:pPr>
-            <a:r>
-              <a:rPr lang="en-US" sz="833" i="1">
-                <a:solidFill>
-                  <a:schemeClr val="accent5"/>
-                </a:solidFill>
-                <a:latin typeface="Segoe UI" panose="020B0502040204020203" pitchFamily="34" charset="0"/>
-                <a:cs typeface="Segoe UI" panose="020B0502040204020203" pitchFamily="34" charset="0"/>
-              </a:rPr>
-              <a:t>StudentCourseId</a:t>
-            </a:r>
-          </a:p>
-          <a:p>
-            <a:pPr rtl="0">
-              <a:defRPr/>
-            </a:pPr>
-            <a:r>
-              <a:rPr lang="en-US" sz="833">
-                <a:solidFill>
-                  <a:schemeClr val="tx1"/>
-                </a:solidFill>
-                <a:latin typeface="Segoe UI" panose="020B0502040204020203" pitchFamily="34" charset="0"/>
-                <a:cs typeface="Segoe UI" panose="020B0502040204020203" pitchFamily="34" charset="0"/>
-              </a:rPr>
-              <a:t>StudentId</a:t>
-            </a:r>
-          </a:p>
-          <a:p>
-            <a:pPr rtl="0">
-              <a:defRPr/>
-            </a:pPr>
-            <a:r>
-              <a:rPr lang="en-US" sz="833">
-                <a:solidFill>
-                  <a:schemeClr val="tx1"/>
-                </a:solidFill>
-                <a:latin typeface="Segoe UI" panose="020B0502040204020203" pitchFamily="34" charset="0"/>
-                <a:cs typeface="Segoe UI" panose="020B0502040204020203" pitchFamily="34" charset="0"/>
-              </a:rPr>
-              <a:t>CourseId</a:t>
-            </a:r>
-          </a:p>
-          <a:p>
-            <a:pPr rtl="0">
-              <a:defRPr/>
-            </a:pPr>
-            <a:r>
-              <a:rPr lang="en-US" sz="833">
-                <a:solidFill>
-                  <a:schemeClr val="tx1"/>
-                </a:solidFill>
-                <a:latin typeface="Segoe UI" panose="020B0502040204020203" pitchFamily="34" charset="0"/>
-                <a:cs typeface="Segoe UI" panose="020B0502040204020203" pitchFamily="34" charset="0"/>
-              </a:rPr>
-              <a:t>NumberOfTests</a:t>
-            </a:r>
-          </a:p>
-          <a:p>
-            <a:pPr rtl="0">
-              <a:defRPr/>
-            </a:pPr>
-            <a:r>
-              <a:rPr lang="en-US" sz="833">
-                <a:solidFill>
-                  <a:schemeClr val="tx1"/>
-                </a:solidFill>
-                <a:latin typeface="Segoe UI" panose="020B0502040204020203" pitchFamily="34" charset="0"/>
-                <a:cs typeface="Segoe UI" panose="020B0502040204020203" pitchFamily="34" charset="0"/>
-              </a:rPr>
-              <a:t>CorrectAnswers</a:t>
-            </a:r>
-          </a:p>
-          <a:p>
-            <a:pPr rtl="0">
-              <a:defRPr/>
-            </a:pPr>
-            <a:r>
-              <a:rPr lang="en-US" sz="833">
-                <a:solidFill>
-                  <a:schemeClr val="tx1"/>
-                </a:solidFill>
-                <a:latin typeface="Segoe UI" panose="020B0502040204020203" pitchFamily="34" charset="0"/>
-                <a:cs typeface="Segoe UI" panose="020B0502040204020203" pitchFamily="34" charset="0"/>
-              </a:rPr>
-              <a:t>StudentCourseTags</a:t>
-            </a:r>
-          </a:p>
-          <a:p>
-            <a:pPr rtl="0">
-              <a:buNone/>
-            </a:pPr>
-            <a:r>
-              <a:rPr lang="en-US" sz="489" kern="100">
-                <a:solidFill>
-                  <a:srgbClr val="C00000"/>
-                </a:solidFill>
-                <a:latin typeface="Segoe UI" panose="020B0502040204020203" pitchFamily="34" charset="0"/>
-                <a:ea typeface="Calibri" panose="020F0502020204030204" pitchFamily="34" charset="0"/>
-                <a:cs typeface="Segoe UI" panose="020B0502040204020203" pitchFamily="34" charset="0"/>
-              </a:rPr>
-              <a:t>1: act</a:t>
-            </a:r>
-          </a:p>
-          <a:p>
-            <a:pPr rtl="0">
-              <a:buNone/>
-            </a:pPr>
-            <a:r>
-              <a:rPr lang="en-US" sz="489" kern="100">
-                <a:solidFill>
-                  <a:srgbClr val="C00000"/>
-                </a:solidFill>
-                <a:latin typeface="Segoe UI" panose="020B0502040204020203" pitchFamily="34" charset="0"/>
-                <a:ea typeface="Calibri" panose="020F0502020204030204" pitchFamily="34" charset="0"/>
-                <a:cs typeface="Segoe UI" panose="020B0502040204020203" pitchFamily="34" charset="0"/>
-              </a:rPr>
-              <a:t>2: retry</a:t>
-            </a:r>
-          </a:p>
-          <a:p>
-            <a:pPr rtl="0">
-              <a:buNone/>
-            </a:pPr>
-            <a:r>
-              <a:rPr lang="en-US" sz="489" kern="100">
-                <a:solidFill>
-                  <a:srgbClr val="C00000"/>
-                </a:solidFill>
-                <a:latin typeface="Segoe UI" panose="020B0502040204020203" pitchFamily="34" charset="0"/>
-                <a:ea typeface="Calibri" panose="020F0502020204030204" pitchFamily="34" charset="0"/>
-                <a:cs typeface="Segoe UI" panose="020B0502040204020203" pitchFamily="34" charset="0"/>
-              </a:rPr>
-              <a:t>4: rev</a:t>
-            </a:r>
-          </a:p>
-        </p:txBody>
-      </p:sp>
-      <p:sp>
-        <p:nvSpPr>
-          <p:cNvPr id="26" name="Rectangle: Rounded Corners 45">
-            <a:extLst>
-              <a:ext uri="{FF2B5EF4-FFF2-40B4-BE49-F238E27FC236}">
-                <a16:creationId xmlns:a16="http://schemas.microsoft.com/office/drawing/2014/main" id="{ADC16C53-C33A-A417-E5DC-DB2D36D33F1C}"/>
-              </a:ext>
-            </a:extLst>
-          </p:cNvPr>
-          <p:cNvSpPr/>
-          <p:nvPr/>
-        </p:nvSpPr>
-        <p:spPr bwMode="auto">
-          <a:xfrm>
-            <a:off x="1865754" y="1287749"/>
-            <a:ext cx="1717013" cy="1719210"/>
-          </a:xfrm>
-          <a:prstGeom prst="roundRect">
-            <a:avLst>
-              <a:gd name="adj" fmla="val 8076"/>
-            </a:avLst>
-          </a:prstGeom>
-          <a:solidFill>
-            <a:schemeClr val="bg1"/>
-          </a:solidFill>
-          <a:ln>
-            <a:solidFill>
-              <a:schemeClr val="tx1"/>
-            </a:solidFill>
-            <a:prstDash val="lgDash"/>
-          </a:ln>
-          <a:effectLst/>
-        </p:spPr>
-        <p:style>
-          <a:lnRef idx="0">
-            <a:schemeClr val="accent4"/>
-          </a:lnRef>
-          <a:fillRef idx="3">
-            <a:schemeClr val="accent4"/>
-          </a:fillRef>
-          <a:effectRef idx="3">
-            <a:schemeClr val="accent4"/>
-          </a:effectRef>
-          <a:fontRef idx="minor">
-            <a:schemeClr val="lt1"/>
-          </a:fontRef>
-        </p:style>
-        <p:txBody>
-          <a:bodyPr rtlCol="1" anchor="ctr"/>
-          <a:lstStyle/>
-          <a:p>
-            <a:pPr algn="l" rtl="0"/>
-            <a:r>
-              <a:rPr lang="en-US" sz="1668" b="1">
-                <a:solidFill>
-                  <a:schemeClr val="bg1"/>
-                </a:solidFill>
-                <a:highlight>
-                  <a:srgbClr val="800080"/>
-                </a:highlight>
-                <a:latin typeface="Segoe UI" panose="020B0502040204020203" pitchFamily="34" charset="0"/>
-                <a:cs typeface="Segoe UI" panose="020B0502040204020203" pitchFamily="34" charset="0"/>
-              </a:rPr>
-              <a:t>SM</a:t>
-            </a:r>
-          </a:p>
-          <a:p>
-            <a:pPr rtl="0"/>
-            <a:r>
-              <a:rPr lang="en-US" sz="1250" b="1">
-                <a:solidFill>
-                  <a:schemeClr val="tx1"/>
-                </a:solidFill>
-                <a:latin typeface="Segoe UI" panose="020B0502040204020203" pitchFamily="34" charset="0"/>
-                <a:cs typeface="Segoe UI" panose="020B0502040204020203" pitchFamily="34" charset="0"/>
-              </a:rPr>
-              <a:t>StudentMessages</a:t>
-            </a:r>
-            <a:endParaRPr sz="1250" b="1">
-              <a:solidFill>
-                <a:schemeClr val="tx1"/>
-              </a:solidFill>
-              <a:latin typeface="Segoe UI" panose="020B0502040204020203" pitchFamily="34" charset="0"/>
-              <a:cs typeface="Segoe UI" panose="020B0502040204020203" pitchFamily="34" charset="0"/>
-            </a:endParaRPr>
-          </a:p>
-          <a:p>
-            <a:pPr rtl="0"/>
-            <a:r>
-              <a:rPr lang="en-US" sz="833" i="1">
-                <a:solidFill>
-                  <a:schemeClr val="accent5"/>
-                </a:solidFill>
-                <a:latin typeface="Segoe UI" panose="020B0502040204020203" pitchFamily="34" charset="0"/>
-                <a:cs typeface="Segoe UI" panose="020B0502040204020203" pitchFamily="34" charset="0"/>
-              </a:rPr>
-              <a:t>StudentMessageId</a:t>
-            </a:r>
-          </a:p>
-          <a:p>
-            <a:pPr rtl="0"/>
-            <a:r>
-              <a:rPr lang="en-US" sz="833">
-                <a:solidFill>
-                  <a:schemeClr val="tx1"/>
-                </a:solidFill>
-                <a:latin typeface="Segoe UI" panose="020B0502040204020203" pitchFamily="34" charset="0"/>
-                <a:cs typeface="Segoe UI" panose="020B0502040204020203" pitchFamily="34" charset="0"/>
-              </a:rPr>
-              <a:t>StudentId</a:t>
-            </a:r>
-          </a:p>
-          <a:p>
-            <a:pPr rtl="0"/>
-            <a:r>
-              <a:rPr lang="en-US" sz="833">
-                <a:solidFill>
-                  <a:schemeClr val="tx1"/>
-                </a:solidFill>
-                <a:latin typeface="Segoe UI" panose="020B0502040204020203" pitchFamily="34" charset="0"/>
-                <a:cs typeface="Segoe UI" panose="020B0502040204020203" pitchFamily="34" charset="0"/>
-              </a:rPr>
-              <a:t>MessageId</a:t>
-            </a:r>
-          </a:p>
-          <a:p>
-            <a:pPr rtl="0"/>
-            <a:r>
-              <a:rPr lang="en-US" sz="833">
-                <a:solidFill>
-                  <a:schemeClr val="tx1"/>
-                </a:solidFill>
-                <a:latin typeface="Segoe UI" panose="020B0502040204020203" pitchFamily="34" charset="0"/>
-                <a:cs typeface="Segoe UI" panose="020B0502040204020203" pitchFamily="34" charset="0"/>
-              </a:rPr>
-              <a:t>DateTimeSent</a:t>
-            </a:r>
-          </a:p>
-          <a:p>
-            <a:pPr rtl="0"/>
-            <a:r>
-              <a:rPr lang="en-US" sz="833">
-                <a:solidFill>
-                  <a:schemeClr val="tx1"/>
-                </a:solidFill>
-                <a:latin typeface="Segoe UI" panose="020B0502040204020203" pitchFamily="34" charset="0"/>
-                <a:cs typeface="Segoe UI" panose="020B0502040204020203" pitchFamily="34" charset="0"/>
-              </a:rPr>
-              <a:t>DateTimeRead</a:t>
-            </a:r>
-          </a:p>
-          <a:p>
-            <a:pPr rtl="0"/>
-            <a:r>
-              <a:rPr lang="en-US" sz="833">
-                <a:solidFill>
-                  <a:schemeClr val="tx1"/>
-                </a:solidFill>
-                <a:latin typeface="Segoe UI" panose="020B0502040204020203" pitchFamily="34" charset="0"/>
-                <a:cs typeface="Segoe UI" panose="020B0502040204020203" pitchFamily="34" charset="0"/>
-              </a:rPr>
-              <a:t>StudentMessageTags</a:t>
-            </a:r>
-          </a:p>
-          <a:p>
-            <a:pPr rtl="0">
-              <a:buNone/>
-            </a:pPr>
-            <a:r>
-              <a:rPr lang="en-US" sz="489" kern="100">
-                <a:solidFill>
-                  <a:srgbClr val="C00000"/>
-                </a:solidFill>
-                <a:latin typeface="Consolas" panose="020B0609020204030204" pitchFamily="49" charset="0"/>
-                <a:ea typeface="Calibri" panose="020F0502020204030204" pitchFamily="34" charset="0"/>
-                <a:cs typeface="Calibri Light" panose="020F0302020204030204" pitchFamily="34" charset="0"/>
-              </a:rPr>
-              <a:t>1  read</a:t>
-            </a:r>
-          </a:p>
-          <a:p>
-            <a:pPr rtl="0">
-              <a:buNone/>
-            </a:pPr>
-            <a:r>
-              <a:rPr lang="en-US" sz="489" kern="100">
-                <a:solidFill>
-                  <a:srgbClr val="C00000"/>
-                </a:solidFill>
-                <a:latin typeface="Consolas" panose="020B0609020204030204" pitchFamily="49" charset="0"/>
-                <a:ea typeface="Calibri" panose="020F0502020204030204" pitchFamily="34" charset="0"/>
-                <a:cs typeface="Calibri Light" panose="020F0302020204030204" pitchFamily="34" charset="0"/>
-              </a:rPr>
-              <a:t>2  bookmarked</a:t>
-            </a:r>
-          </a:p>
-          <a:p>
-            <a:pPr rtl="0">
-              <a:buNone/>
-            </a:pPr>
-            <a:r>
-              <a:rPr lang="en-US" sz="489" kern="100">
-                <a:solidFill>
-                  <a:srgbClr val="C00000"/>
-                </a:solidFill>
-                <a:latin typeface="Consolas" panose="020B0609020204030204" pitchFamily="49" charset="0"/>
-                <a:ea typeface="Calibri" panose="020F0502020204030204" pitchFamily="34" charset="0"/>
-                <a:cs typeface="Calibri Light" panose="020F0302020204030204" pitchFamily="34" charset="0"/>
-              </a:rPr>
-              <a:t>4  deleted</a:t>
-            </a:r>
-          </a:p>
-          <a:p>
-            <a:pPr rtl="0"/>
-            <a:r>
-              <a:rPr lang="en-US" sz="489" kern="100">
-                <a:solidFill>
-                  <a:srgbClr val="C00000"/>
-                </a:solidFill>
-                <a:latin typeface="Consolas" panose="020B0609020204030204" pitchFamily="49" charset="0"/>
-                <a:ea typeface="Calibri" panose="020F0502020204030204" pitchFamily="34" charset="0"/>
-                <a:cs typeface="Calibri Light" panose="020F0302020204030204" pitchFamily="34" charset="0"/>
-              </a:rPr>
-              <a:t>8  Feedback</a:t>
-            </a:r>
-          </a:p>
-          <a:p>
-            <a:pPr rtl="0">
-              <a:buNone/>
-            </a:pPr>
-            <a:r>
-              <a:rPr lang="en-US" sz="489" kern="100">
-                <a:solidFill>
-                  <a:srgbClr val="C00000"/>
-                </a:solidFill>
-                <a:latin typeface="Consolas" panose="020B0609020204030204" pitchFamily="49" charset="0"/>
-                <a:ea typeface="Calibri" panose="020F0502020204030204" pitchFamily="34" charset="0"/>
-                <a:cs typeface="Calibri Light" panose="020F0302020204030204" pitchFamily="34" charset="0"/>
-              </a:rPr>
-              <a:t>16 ans:Yes</a:t>
-            </a:r>
-          </a:p>
-          <a:p>
-            <a:pPr rtl="0">
-              <a:buNone/>
-            </a:pPr>
-            <a:r>
-              <a:rPr lang="en-US" sz="489" kern="100">
-                <a:solidFill>
-                  <a:srgbClr val="C00000"/>
-                </a:solidFill>
-                <a:latin typeface="Consolas" panose="020B0609020204030204" pitchFamily="49" charset="0"/>
-                <a:ea typeface="Calibri" panose="020F0502020204030204" pitchFamily="34" charset="0"/>
-                <a:cs typeface="Calibri Light" panose="020F0302020204030204" pitchFamily="34" charset="0"/>
-              </a:rPr>
-              <a:t>32 ans:No</a:t>
-            </a:r>
-          </a:p>
-        </p:txBody>
-      </p:sp>
-      <p:sp>
-        <p:nvSpPr>
-          <p:cNvPr id="6" name="Rectangle: Rounded Corners 8">
-            <a:extLst>
-              <a:ext uri="{FF2B5EF4-FFF2-40B4-BE49-F238E27FC236}">
-                <a16:creationId xmlns:a16="http://schemas.microsoft.com/office/drawing/2014/main" id="{4B0D7B49-FB19-1F94-3A4A-B5D71A0ED844}"/>
-              </a:ext>
-            </a:extLst>
-          </p:cNvPr>
-          <p:cNvSpPr/>
-          <p:nvPr/>
-        </p:nvSpPr>
-        <p:spPr bwMode="auto">
-          <a:xfrm>
-            <a:off x="7555978" y="3204898"/>
-            <a:ext cx="1774347" cy="3309093"/>
-          </a:xfrm>
-          <a:prstGeom prst="roundRect">
-            <a:avLst>
-              <a:gd name="adj" fmla="val 6530"/>
-            </a:avLst>
-          </a:prstGeom>
-          <a:solidFill>
-            <a:schemeClr val="bg1"/>
-          </a:solidFill>
-          <a:ln w="28575">
-            <a:solidFill>
-              <a:schemeClr val="accent6"/>
-            </a:solidFill>
-          </a:ln>
-          <a:effectLst/>
-        </p:spPr>
-        <p:style>
-          <a:lnRef idx="0">
-            <a:schemeClr val="accent4"/>
-          </a:lnRef>
-          <a:fillRef idx="3">
-            <a:schemeClr val="accent4"/>
-          </a:fillRef>
-          <a:effectRef idx="3">
-            <a:schemeClr val="accent4"/>
-          </a:effectRef>
-          <a:fontRef idx="minor">
-            <a:schemeClr val="lt1"/>
-          </a:fontRef>
-        </p:style>
-        <p:txBody>
-          <a:bodyPr rtlCol="1" anchor="ctr"/>
-          <a:lstStyle/>
-          <a:p>
-            <a:pPr marL="611018" rtl="0">
-              <a:defRPr/>
-            </a:pPr>
-            <a:endParaRPr lang="en-US" sz="1668" b="1">
-              <a:solidFill>
-                <a:schemeClr val="bg1"/>
-              </a:solidFill>
-              <a:highlight>
-                <a:srgbClr val="000000"/>
-              </a:highlight>
-              <a:latin typeface="Segoe UI" panose="020B0502040204020203" pitchFamily="34" charset="0"/>
-              <a:cs typeface="Segoe UI" panose="020B0502040204020203" pitchFamily="34" charset="0"/>
-            </a:endParaRPr>
-          </a:p>
-          <a:p>
-            <a:pPr marL="440429" rtl="0">
-              <a:defRPr/>
-            </a:pPr>
-            <a:r>
-              <a:rPr lang="en-US" sz="1668" b="1">
-                <a:solidFill>
-                  <a:schemeClr val="bg1"/>
-                </a:solidFill>
-                <a:highlight>
-                  <a:srgbClr val="008080"/>
-                </a:highlight>
-                <a:latin typeface="Segoe UI" panose="020B0502040204020203" pitchFamily="34" charset="0"/>
-                <a:cs typeface="Segoe UI" panose="020B0502040204020203" pitchFamily="34" charset="0"/>
-              </a:rPr>
-              <a:t>T</a:t>
-            </a:r>
-          </a:p>
-          <a:p>
-            <a:pPr marL="440429" rtl="0">
-              <a:defRPr/>
-            </a:pPr>
-            <a:r>
-              <a:rPr lang="en-US" sz="1250" b="1">
-                <a:solidFill>
-                  <a:schemeClr val="tx1"/>
-                </a:solidFill>
-                <a:latin typeface="Segoe UI" panose="020B0502040204020203" pitchFamily="34" charset="0"/>
-                <a:cs typeface="Segoe UI" panose="020B0502040204020203" pitchFamily="34" charset="0"/>
-              </a:rPr>
-              <a:t>Tests</a:t>
-            </a:r>
-            <a:endParaRPr sz="1250" b="1">
-              <a:solidFill>
-                <a:schemeClr val="tx1"/>
-              </a:solidFill>
-              <a:latin typeface="Segoe UI" panose="020B0502040204020203" pitchFamily="34" charset="0"/>
-              <a:cs typeface="Segoe UI" panose="020B0502040204020203" pitchFamily="34" charset="0"/>
-            </a:endParaRPr>
-          </a:p>
-          <a:p>
-            <a:pPr marL="440429" rtl="0">
-              <a:defRPr/>
-            </a:pPr>
-            <a:r>
-              <a:rPr lang="en-US" sz="833" i="1">
-                <a:solidFill>
-                  <a:schemeClr val="accent5"/>
-                </a:solidFill>
-                <a:latin typeface="Segoe UI" panose="020B0502040204020203" pitchFamily="34" charset="0"/>
-                <a:cs typeface="Segoe UI" panose="020B0502040204020203" pitchFamily="34" charset="0"/>
-              </a:rPr>
-              <a:t>TestId</a:t>
-            </a:r>
-          </a:p>
-          <a:p>
-            <a:pPr marL="440429" rtl="0">
-              <a:defRPr/>
-            </a:pPr>
-            <a:r>
-              <a:rPr lang="en-US" sz="833">
-                <a:solidFill>
-                  <a:schemeClr val="tx1"/>
-                </a:solidFill>
-                <a:latin typeface="Segoe UI" panose="020B0502040204020203" pitchFamily="34" charset="0"/>
-                <a:cs typeface="Segoe UI" panose="020B0502040204020203" pitchFamily="34" charset="0"/>
-              </a:rPr>
-              <a:t>CourseId</a:t>
-            </a:r>
-          </a:p>
-          <a:p>
-            <a:pPr marL="440429" rtl="0">
-              <a:defRPr/>
-            </a:pPr>
-            <a:r>
-              <a:rPr lang="en-US" sz="833">
-                <a:solidFill>
-                  <a:schemeClr val="tx1"/>
-                </a:solidFill>
-                <a:latin typeface="Segoe UI" panose="020B0502040204020203" pitchFamily="34" charset="0"/>
-                <a:cs typeface="Segoe UI" panose="020B0502040204020203" pitchFamily="34" charset="0"/>
-              </a:rPr>
-              <a:t>TopicId</a:t>
-            </a:r>
-          </a:p>
-          <a:p>
-            <a:pPr marL="440429" rtl="0">
-              <a:defRPr/>
-            </a:pPr>
-            <a:r>
-              <a:rPr lang="en-US" sz="833">
-                <a:solidFill>
-                  <a:schemeClr val="tx1"/>
-                </a:solidFill>
-                <a:latin typeface="Segoe UI" panose="020B0502040204020203" pitchFamily="34" charset="0"/>
-                <a:cs typeface="Segoe UI" panose="020B0502040204020203" pitchFamily="34" charset="0"/>
-              </a:rPr>
-              <a:t>TestTitle</a:t>
-            </a:r>
-          </a:p>
-          <a:p>
-            <a:pPr marL="440429" rtl="0">
-              <a:defRPr/>
-            </a:pPr>
-            <a:r>
-              <a:rPr lang="en-US" sz="833">
-                <a:solidFill>
-                  <a:schemeClr val="tx1"/>
-                </a:solidFill>
-                <a:latin typeface="Segoe UI" panose="020B0502040204020203" pitchFamily="34" charset="0"/>
-                <a:cs typeface="Segoe UI" panose="020B0502040204020203" pitchFamily="34" charset="0"/>
-              </a:rPr>
-              <a:t>TestType {</a:t>
-            </a:r>
-            <a:r>
-              <a:rPr lang="en-US" sz="833" b="1">
-                <a:solidFill>
-                  <a:schemeClr val="tx1"/>
-                </a:solidFill>
-                <a:latin typeface="Segoe UI" panose="020B0502040204020203" pitchFamily="34" charset="0"/>
-                <a:cs typeface="Segoe UI" panose="020B0502040204020203" pitchFamily="34" charset="0"/>
-              </a:rPr>
-              <a:t>1</a:t>
-            </a:r>
-            <a:r>
-              <a:rPr lang="en-US" sz="833">
-                <a:solidFill>
-                  <a:schemeClr val="tx1"/>
-                </a:solidFill>
-                <a:latin typeface="Segoe UI" panose="020B0502040204020203" pitchFamily="34" charset="0"/>
-                <a:cs typeface="Segoe UI" panose="020B0502040204020203" pitchFamily="34" charset="0"/>
-              </a:rPr>
-              <a:t>, 2:5}</a:t>
-            </a:r>
-          </a:p>
-          <a:p>
-            <a:pPr marL="440429" rtl="0">
-              <a:defRPr/>
-            </a:pPr>
-            <a:r>
-              <a:rPr lang="en-US" sz="833">
-                <a:solidFill>
-                  <a:schemeClr val="tx1"/>
-                </a:solidFill>
-                <a:latin typeface="Segoe UI" panose="020B0502040204020203" pitchFamily="34" charset="0"/>
-                <a:cs typeface="Segoe UI" panose="020B0502040204020203" pitchFamily="34" charset="0"/>
-              </a:rPr>
-              <a:t>TestLevel</a:t>
-            </a:r>
-          </a:p>
-          <a:p>
-            <a:pPr marL="440429" rtl="0"/>
-            <a:r>
-              <a:rPr lang="en-US" sz="833">
-                <a:solidFill>
-                  <a:schemeClr val="tx1"/>
-                </a:solidFill>
-                <a:latin typeface="Segoe UI" panose="020B0502040204020203" pitchFamily="34" charset="0"/>
-                <a:cs typeface="Segoe UI" panose="020B0502040204020203" pitchFamily="34" charset="0"/>
-              </a:rPr>
-              <a:t>TestTags</a:t>
-            </a:r>
-          </a:p>
-          <a:p>
-            <a:pPr marL="440429" rtl="0"/>
-            <a:r>
-              <a:rPr lang="en-US" sz="489" kern="100">
-                <a:solidFill>
-                  <a:srgbClr val="C00000"/>
-                </a:solidFill>
-                <a:latin typeface="Consolas" panose="020B0609020204030204" pitchFamily="49" charset="0"/>
-                <a:ea typeface="Calibri" panose="020F0502020204030204" pitchFamily="34" charset="0"/>
-                <a:cs typeface="Calibri Light" panose="020F0302020204030204" pitchFamily="34" charset="0"/>
-              </a:rPr>
-              <a:t> testRtl</a:t>
-            </a:r>
-          </a:p>
-          <a:p>
-            <a:pPr marL="440429" rtl="0"/>
-            <a:r>
-              <a:rPr lang="en-US" sz="489" kern="100">
-                <a:solidFill>
-                  <a:srgbClr val="C00000"/>
-                </a:solidFill>
-                <a:latin typeface="Consolas" panose="020B0609020204030204" pitchFamily="49" charset="0"/>
-                <a:ea typeface="Calibri" panose="020F0502020204030204" pitchFamily="34" charset="0"/>
-                <a:cs typeface="Calibri Light" panose="020F0302020204030204" pitchFamily="34" charset="0"/>
-              </a:rPr>
-              <a:t> optRtl</a:t>
-            </a:r>
-          </a:p>
-          <a:p>
-            <a:pPr marL="440429" rtl="0"/>
-            <a:endParaRPr lang="en-US" sz="489" kern="100">
-              <a:solidFill>
-                <a:srgbClr val="C00000"/>
-              </a:solidFill>
-              <a:latin typeface="Consolas" panose="020B0609020204030204" pitchFamily="49" charset="0"/>
-              <a:ea typeface="Calibri" panose="020F0502020204030204" pitchFamily="34" charset="0"/>
-              <a:cs typeface="Calibri Light" panose="020F0302020204030204" pitchFamily="34" charset="0"/>
-            </a:endParaRPr>
-          </a:p>
-          <a:p>
-            <a:pPr marL="440429" rtl="0"/>
-            <a:endParaRPr lang="en-US" sz="489" kern="100">
-              <a:solidFill>
-                <a:srgbClr val="C00000"/>
-              </a:solidFill>
-              <a:latin typeface="Consolas" panose="020B0609020204030204" pitchFamily="49" charset="0"/>
-              <a:ea typeface="Calibri" panose="020F0502020204030204" pitchFamily="34" charset="0"/>
-              <a:cs typeface="Calibri Light" panose="020F0302020204030204" pitchFamily="34" charset="0"/>
-            </a:endParaRPr>
-          </a:p>
-          <a:p>
-            <a:pPr marL="440429" rtl="0"/>
-            <a:endParaRPr lang="en-US" sz="489" kern="100">
-              <a:solidFill>
-                <a:srgbClr val="C00000"/>
-              </a:solidFill>
-              <a:latin typeface="Consolas" panose="020B0609020204030204" pitchFamily="49" charset="0"/>
-              <a:ea typeface="Calibri" panose="020F0502020204030204" pitchFamily="34" charset="0"/>
-              <a:cs typeface="Calibri Light" panose="020F0302020204030204" pitchFamily="34" charset="0"/>
-            </a:endParaRPr>
-          </a:p>
-          <a:p>
-            <a:pPr marL="440429" rtl="0"/>
-            <a:endParaRPr lang="en-US" sz="489" kern="100">
-              <a:solidFill>
-                <a:srgbClr val="C00000"/>
-              </a:solidFill>
-              <a:latin typeface="Consolas" panose="020B0609020204030204" pitchFamily="49" charset="0"/>
-              <a:ea typeface="Calibri" panose="020F0502020204030204" pitchFamily="34" charset="0"/>
-              <a:cs typeface="Calibri Light" panose="020F0302020204030204" pitchFamily="34" charset="0"/>
-            </a:endParaRPr>
-          </a:p>
-          <a:p>
-            <a:pPr marL="440429" rtl="0"/>
-            <a:endParaRPr lang="en-US" sz="489" kern="100">
-              <a:solidFill>
-                <a:srgbClr val="C00000"/>
-              </a:solidFill>
-              <a:latin typeface="Consolas" panose="020B0609020204030204" pitchFamily="49" charset="0"/>
-              <a:ea typeface="Calibri" panose="020F0502020204030204" pitchFamily="34" charset="0"/>
-              <a:cs typeface="Calibri Light" panose="020F0302020204030204" pitchFamily="34" charset="0"/>
-            </a:endParaRPr>
-          </a:p>
-          <a:p>
-            <a:pPr marL="440429" rtl="0"/>
-            <a:endParaRPr lang="en-US" sz="489" kern="100">
-              <a:solidFill>
-                <a:srgbClr val="C00000"/>
-              </a:solidFill>
-              <a:latin typeface="Consolas" panose="020B0609020204030204" pitchFamily="49" charset="0"/>
-              <a:ea typeface="Calibri" panose="020F0502020204030204" pitchFamily="34" charset="0"/>
-              <a:cs typeface="Calibri Light" panose="020F0302020204030204" pitchFamily="34" charset="0"/>
-            </a:endParaRPr>
-          </a:p>
-          <a:p>
-            <a:pPr marL="440429" rtl="0"/>
-            <a:endParaRPr lang="en-US" sz="489" kern="100">
-              <a:solidFill>
-                <a:srgbClr val="C00000"/>
-              </a:solidFill>
-              <a:latin typeface="Consolas" panose="020B0609020204030204" pitchFamily="49" charset="0"/>
-              <a:ea typeface="Calibri" panose="020F0502020204030204" pitchFamily="34" charset="0"/>
-              <a:cs typeface="Calibri Light" panose="020F0302020204030204" pitchFamily="34" charset="0"/>
-            </a:endParaRPr>
-          </a:p>
-          <a:p>
-            <a:pPr marL="440429" rtl="0"/>
-            <a:endParaRPr lang="en-US" sz="489" kern="100">
-              <a:solidFill>
-                <a:srgbClr val="C00000"/>
-              </a:solidFill>
-              <a:latin typeface="Consolas" panose="020B0609020204030204" pitchFamily="49" charset="0"/>
-              <a:ea typeface="Calibri" panose="020F0502020204030204" pitchFamily="34" charset="0"/>
-              <a:cs typeface="Calibri Light" panose="020F0302020204030204" pitchFamily="34" charset="0"/>
-            </a:endParaRPr>
-          </a:p>
-          <a:p>
-            <a:pPr marL="440429" rtl="0"/>
-            <a:endParaRPr lang="en-US" sz="489" kern="100">
-              <a:solidFill>
-                <a:srgbClr val="C00000"/>
-              </a:solidFill>
-              <a:latin typeface="Consolas" panose="020B0609020204030204" pitchFamily="49" charset="0"/>
-              <a:ea typeface="Calibri" panose="020F0502020204030204" pitchFamily="34" charset="0"/>
-              <a:cs typeface="Calibri Light" panose="020F0302020204030204" pitchFamily="34" charset="0"/>
-            </a:endParaRPr>
-          </a:p>
-          <a:p>
-            <a:pPr marL="440429" rtl="0"/>
-            <a:endParaRPr lang="en-US" sz="489" kern="100">
-              <a:solidFill>
-                <a:srgbClr val="C00000"/>
-              </a:solidFill>
-              <a:latin typeface="Consolas" panose="020B0609020204030204" pitchFamily="49" charset="0"/>
-              <a:ea typeface="Calibri" panose="020F0502020204030204" pitchFamily="34" charset="0"/>
-              <a:cs typeface="Calibri Light" panose="020F0302020204030204" pitchFamily="34" charset="0"/>
-            </a:endParaRPr>
-          </a:p>
-          <a:p>
-            <a:pPr marL="440429" rtl="0"/>
-            <a:endParaRPr lang="en-US" sz="489" kern="100">
-              <a:solidFill>
-                <a:srgbClr val="C00000"/>
-              </a:solidFill>
-              <a:latin typeface="Consolas" panose="020B0609020204030204" pitchFamily="49" charset="0"/>
-              <a:ea typeface="Calibri" panose="020F0502020204030204" pitchFamily="34" charset="0"/>
-              <a:cs typeface="Calibri Light" panose="020F0302020204030204" pitchFamily="34" charset="0"/>
-            </a:endParaRPr>
-          </a:p>
-          <a:p>
-            <a:pPr marL="611018" rtl="0"/>
-            <a:endParaRPr lang="en-US" sz="489" kern="100">
-              <a:solidFill>
-                <a:srgbClr val="C00000"/>
-              </a:solidFill>
-              <a:latin typeface="Consolas" panose="020B0609020204030204" pitchFamily="49" charset="0"/>
-              <a:ea typeface="Calibri" panose="020F0502020204030204" pitchFamily="34" charset="0"/>
-              <a:cs typeface="Calibri Light" panose="020F0302020204030204" pitchFamily="34" charset="0"/>
-            </a:endParaRPr>
-          </a:p>
-        </p:txBody>
-      </p:sp>
-      <p:sp>
-        <p:nvSpPr>
-          <p:cNvPr id="7" name="Rectangle: Rounded Corners 17">
-            <a:extLst>
-              <a:ext uri="{FF2B5EF4-FFF2-40B4-BE49-F238E27FC236}">
-                <a16:creationId xmlns:a16="http://schemas.microsoft.com/office/drawing/2014/main" id="{FB10D805-B82F-C692-4FFC-CA89614BCC1F}"/>
-              </a:ext>
-            </a:extLst>
-          </p:cNvPr>
-          <p:cNvSpPr/>
-          <p:nvPr/>
-        </p:nvSpPr>
-        <p:spPr bwMode="auto">
-          <a:xfrm>
-            <a:off x="8964937" y="4102017"/>
-            <a:ext cx="1232282" cy="1214650"/>
-          </a:xfrm>
-          <a:prstGeom prst="roundRect">
-            <a:avLst>
-              <a:gd name="adj" fmla="val 8085"/>
-            </a:avLst>
-          </a:prstGeom>
-          <a:solidFill>
-            <a:schemeClr val="bg1"/>
-          </a:solidFill>
-          <a:ln>
-            <a:solidFill>
-              <a:schemeClr val="accent6"/>
-            </a:solidFill>
-            <a:prstDash val="lgDash"/>
-          </a:ln>
-          <a:effectLst/>
-        </p:spPr>
-        <p:style>
-          <a:lnRef idx="0">
-            <a:schemeClr val="accent4"/>
-          </a:lnRef>
-          <a:fillRef idx="3">
-            <a:schemeClr val="accent4"/>
-          </a:fillRef>
-          <a:effectRef idx="3">
-            <a:schemeClr val="accent4"/>
-          </a:effectRef>
-          <a:fontRef idx="minor">
-            <a:schemeClr val="lt1"/>
-          </a:fontRef>
-        </p:style>
-        <p:txBody>
-          <a:bodyPr rtlCol="1" anchor="ctr"/>
-          <a:lstStyle/>
-          <a:p>
-            <a:pPr rtl="0">
-              <a:defRPr/>
-            </a:pPr>
-            <a:r>
-              <a:rPr lang="en-US" sz="1668" b="1">
-                <a:solidFill>
-                  <a:schemeClr val="bg1"/>
-                </a:solidFill>
-                <a:highlight>
-                  <a:srgbClr val="008080"/>
-                </a:highlight>
-                <a:latin typeface="Segoe UI" panose="020B0502040204020203" pitchFamily="34" charset="0"/>
-                <a:cs typeface="Segoe UI" panose="020B0502040204020203" pitchFamily="34" charset="0"/>
-              </a:rPr>
-              <a:t>TO</a:t>
-            </a:r>
-          </a:p>
-          <a:p>
-            <a:pPr rtl="0">
-              <a:defRPr/>
-            </a:pPr>
-            <a:r>
-              <a:rPr lang="en-US" sz="1250" b="1">
-                <a:solidFill>
-                  <a:schemeClr val="tx1"/>
-                </a:solidFill>
-                <a:latin typeface="Segoe UI" panose="020B0502040204020203" pitchFamily="34" charset="0"/>
-                <a:cs typeface="Segoe UI" panose="020B0502040204020203" pitchFamily="34" charset="0"/>
-              </a:rPr>
-              <a:t>TestOptions</a:t>
-            </a:r>
-            <a:endParaRPr sz="1250" b="1">
-              <a:solidFill>
-                <a:schemeClr val="tx1"/>
-              </a:solidFill>
-              <a:latin typeface="Segoe UI" panose="020B0502040204020203" pitchFamily="34" charset="0"/>
-              <a:cs typeface="Segoe UI" panose="020B0502040204020203" pitchFamily="34" charset="0"/>
-            </a:endParaRPr>
-          </a:p>
-          <a:p>
-            <a:pPr rtl="0">
-              <a:defRPr/>
-            </a:pPr>
-            <a:r>
-              <a:rPr lang="en-US" sz="833" i="1">
-                <a:solidFill>
-                  <a:schemeClr val="accent5"/>
-                </a:solidFill>
-                <a:latin typeface="Segoe UI" panose="020B0502040204020203" pitchFamily="34" charset="0"/>
-                <a:cs typeface="Segoe UI" panose="020B0502040204020203" pitchFamily="34" charset="0"/>
-              </a:rPr>
-              <a:t>TestOptionId</a:t>
-            </a:r>
-          </a:p>
-          <a:p>
-            <a:pPr rtl="0">
-              <a:defRPr/>
-            </a:pPr>
-            <a:r>
-              <a:rPr lang="en-US" sz="833">
-                <a:solidFill>
-                  <a:schemeClr val="tx1"/>
-                </a:solidFill>
-                <a:latin typeface="Segoe UI" panose="020B0502040204020203" pitchFamily="34" charset="0"/>
-                <a:cs typeface="Segoe UI" panose="020B0502040204020203" pitchFamily="34" charset="0"/>
-              </a:rPr>
-              <a:t>TestId</a:t>
-            </a:r>
-          </a:p>
-          <a:p>
-            <a:pPr rtl="0">
-              <a:defRPr/>
-            </a:pPr>
-            <a:r>
-              <a:rPr lang="en-US" sz="833">
-                <a:solidFill>
-                  <a:schemeClr val="tx1"/>
-                </a:solidFill>
-                <a:latin typeface="Segoe UI" panose="020B0502040204020203" pitchFamily="34" charset="0"/>
-                <a:cs typeface="Segoe UI" panose="020B0502040204020203" pitchFamily="34" charset="0"/>
-              </a:rPr>
-              <a:t>TestOptionTitle</a:t>
-            </a:r>
-          </a:p>
-          <a:p>
-            <a:pPr rtl="0">
-              <a:defRPr/>
-            </a:pPr>
-            <a:r>
-              <a:rPr lang="en-US" sz="833">
-                <a:solidFill>
-                  <a:schemeClr val="tx1"/>
-                </a:solidFill>
-                <a:latin typeface="Segoe UI" panose="020B0502040204020203" pitchFamily="34" charset="0"/>
-                <a:cs typeface="Segoe UI" panose="020B0502040204020203" pitchFamily="34" charset="0"/>
-              </a:rPr>
-              <a:t>TestOptionTags</a:t>
-            </a:r>
-            <a:r>
-              <a:rPr lang="en-US" sz="833">
-                <a:solidFill>
-                  <a:srgbClr val="C00000"/>
-                </a:solidFill>
-                <a:latin typeface="Segoe UI" panose="020B0502040204020203" pitchFamily="34" charset="0"/>
-                <a:cs typeface="Segoe UI" panose="020B0502040204020203" pitchFamily="34" charset="0"/>
-              </a:rPr>
-              <a:t> </a:t>
-            </a:r>
-          </a:p>
-          <a:p>
-            <a:pPr rtl="0"/>
-            <a:r>
-              <a:rPr lang="en-US" sz="489" kern="100">
-                <a:solidFill>
-                  <a:srgbClr val="C00000"/>
-                </a:solidFill>
-                <a:latin typeface="Consolas" panose="020B0609020204030204" pitchFamily="49" charset="0"/>
-                <a:ea typeface="Calibri" panose="020F0502020204030204" pitchFamily="34" charset="0"/>
-                <a:cs typeface="Calibri Light" panose="020F0302020204030204" pitchFamily="34" charset="0"/>
-              </a:rPr>
-              <a:t>1: forceLast</a:t>
-            </a:r>
-          </a:p>
-          <a:p>
-            <a:pPr rtl="0"/>
-            <a:r>
-              <a:rPr lang="en-US" sz="489" kern="100">
-                <a:solidFill>
-                  <a:srgbClr val="C00000"/>
-                </a:solidFill>
-                <a:latin typeface="Consolas" panose="020B0609020204030204" pitchFamily="49" charset="0"/>
-                <a:ea typeface="Calibri" panose="020F0502020204030204" pitchFamily="34" charset="0"/>
-                <a:cs typeface="Calibri Light" panose="020F0302020204030204" pitchFamily="34" charset="0"/>
-              </a:rPr>
-              <a:t>2: isAns</a:t>
-            </a:r>
-          </a:p>
-        </p:txBody>
-      </p:sp>
-      <p:sp>
-        <p:nvSpPr>
-          <p:cNvPr id="27" name="Rectangle: Rounded Corners 45">
-            <a:extLst>
-              <a:ext uri="{FF2B5EF4-FFF2-40B4-BE49-F238E27FC236}">
-                <a16:creationId xmlns:a16="http://schemas.microsoft.com/office/drawing/2014/main" id="{2184A255-13A8-E326-F926-8BDAD8155AAA}"/>
-              </a:ext>
-            </a:extLst>
-          </p:cNvPr>
-          <p:cNvSpPr/>
-          <p:nvPr/>
-        </p:nvSpPr>
-        <p:spPr bwMode="auto">
-          <a:xfrm>
-            <a:off x="2190196" y="3505123"/>
-            <a:ext cx="1433642" cy="1262740"/>
-          </a:xfrm>
-          <a:prstGeom prst="roundRect">
-            <a:avLst>
-              <a:gd name="adj" fmla="val 8076"/>
-            </a:avLst>
-          </a:prstGeom>
-          <a:solidFill>
-            <a:schemeClr val="bg1"/>
-          </a:solidFill>
-          <a:ln>
-            <a:solidFill>
-              <a:schemeClr val="tx1"/>
-            </a:solidFill>
-            <a:prstDash val="lgDash"/>
-          </a:ln>
-          <a:effectLst/>
-        </p:spPr>
-        <p:style>
-          <a:lnRef idx="0">
-            <a:schemeClr val="accent4"/>
-          </a:lnRef>
-          <a:fillRef idx="3">
-            <a:schemeClr val="accent4"/>
-          </a:fillRef>
-          <a:effectRef idx="3">
-            <a:schemeClr val="accent4"/>
-          </a:effectRef>
-          <a:fontRef idx="minor">
-            <a:schemeClr val="lt1"/>
-          </a:fontRef>
-        </p:style>
-        <p:txBody>
-          <a:bodyPr rtlCol="1" anchor="ctr"/>
-          <a:lstStyle/>
-          <a:p>
-            <a:pPr algn="l" rtl="0"/>
-            <a:r>
-              <a:rPr lang="en-US" sz="1668" b="1">
-                <a:solidFill>
-                  <a:schemeClr val="bg1"/>
-                </a:solidFill>
-                <a:highlight>
-                  <a:srgbClr val="000000"/>
-                </a:highlight>
-                <a:latin typeface="Segoe UI" panose="020B0502040204020203" pitchFamily="34" charset="0"/>
-                <a:cs typeface="Segoe UI" panose="020B0502040204020203" pitchFamily="34" charset="0"/>
-              </a:rPr>
-              <a:t>SG</a:t>
-            </a:r>
-          </a:p>
-          <a:p>
-            <a:pPr rtl="0"/>
-            <a:r>
-              <a:rPr lang="en-US" sz="1250" b="1">
-                <a:solidFill>
-                  <a:schemeClr val="tx1"/>
-                </a:solidFill>
-                <a:latin typeface="Segoe UI" panose="020B0502040204020203" pitchFamily="34" charset="0"/>
-                <a:cs typeface="Segoe UI" panose="020B0502040204020203" pitchFamily="34" charset="0"/>
-              </a:rPr>
-              <a:t>StudentGroups</a:t>
-            </a:r>
-            <a:endParaRPr sz="1250" b="1">
-              <a:solidFill>
-                <a:schemeClr val="tx1"/>
-              </a:solidFill>
-              <a:latin typeface="Segoe UI" panose="020B0502040204020203" pitchFamily="34" charset="0"/>
-              <a:cs typeface="Segoe UI" panose="020B0502040204020203" pitchFamily="34" charset="0"/>
-            </a:endParaRPr>
-          </a:p>
-          <a:p>
-            <a:pPr rtl="0"/>
-            <a:r>
-              <a:rPr lang="en-US" sz="833" i="1">
-                <a:solidFill>
-                  <a:schemeClr val="accent5"/>
-                </a:solidFill>
-                <a:latin typeface="Segoe UI" panose="020B0502040204020203" pitchFamily="34" charset="0"/>
-                <a:cs typeface="Segoe UI" panose="020B0502040204020203" pitchFamily="34" charset="0"/>
-              </a:rPr>
-              <a:t>StudentGroupId</a:t>
-            </a:r>
-          </a:p>
-          <a:p>
-            <a:pPr rtl="0"/>
-            <a:r>
-              <a:rPr lang="en-US" sz="833">
-                <a:solidFill>
-                  <a:schemeClr val="tx1"/>
-                </a:solidFill>
-                <a:latin typeface="Segoe UI" panose="020B0502040204020203" pitchFamily="34" charset="0"/>
-                <a:cs typeface="Segoe UI" panose="020B0502040204020203" pitchFamily="34" charset="0"/>
-              </a:rPr>
-              <a:t>StudentId</a:t>
-            </a:r>
-          </a:p>
-          <a:p>
-            <a:pPr rtl="0"/>
-            <a:r>
-              <a:rPr lang="en-US" sz="833">
-                <a:solidFill>
-                  <a:schemeClr val="tx1"/>
-                </a:solidFill>
-                <a:latin typeface="Segoe UI" panose="020B0502040204020203" pitchFamily="34" charset="0"/>
-                <a:cs typeface="Segoe UI" panose="020B0502040204020203" pitchFamily="34" charset="0"/>
-              </a:rPr>
-              <a:t>GroupId</a:t>
-            </a:r>
-          </a:p>
-          <a:p>
-            <a:pPr rtl="0"/>
-            <a:r>
-              <a:rPr lang="en-US" sz="833">
-                <a:solidFill>
-                  <a:schemeClr val="tx1"/>
-                </a:solidFill>
-                <a:latin typeface="Segoe UI" panose="020B0502040204020203" pitchFamily="34" charset="0"/>
-                <a:cs typeface="Segoe UI" panose="020B0502040204020203" pitchFamily="34" charset="0"/>
-              </a:rPr>
-              <a:t>DateTimeJoined</a:t>
-            </a:r>
-          </a:p>
-          <a:p>
-            <a:pPr rtl="0"/>
-            <a:r>
-              <a:rPr lang="en-US" sz="833">
-                <a:solidFill>
-                  <a:schemeClr val="tx1"/>
-                </a:solidFill>
-                <a:latin typeface="Segoe UI" panose="020B0502040204020203" pitchFamily="34" charset="0"/>
-                <a:cs typeface="Segoe UI" panose="020B0502040204020203" pitchFamily="34" charset="0"/>
-              </a:rPr>
-              <a:t>StudentGroup</a:t>
-            </a:r>
-            <a:r>
-              <a:rPr lang="en-US" sz="833">
-                <a:solidFill>
-                  <a:srgbClr val="C00000"/>
-                </a:solidFill>
-                <a:latin typeface="Segoe UI" panose="020B0502040204020203" pitchFamily="34" charset="0"/>
-                <a:cs typeface="Segoe UI" panose="020B0502040204020203" pitchFamily="34" charset="0"/>
-              </a:rPr>
-              <a:t>Tags</a:t>
-            </a:r>
-          </a:p>
-          <a:p>
-            <a:pPr rtl="0"/>
-            <a:r>
-              <a:rPr lang="en-US" sz="586">
-                <a:solidFill>
-                  <a:srgbClr val="C00000"/>
-                </a:solidFill>
-                <a:latin typeface="Segoe UI" panose="020B0502040204020203" pitchFamily="34" charset="0"/>
-                <a:cs typeface="Segoe UI" panose="020B0502040204020203" pitchFamily="34" charset="0"/>
-              </a:rPr>
-              <a:t>1: act</a:t>
-            </a:r>
-          </a:p>
-        </p:txBody>
-      </p:sp>
-      <p:sp>
-        <p:nvSpPr>
-          <p:cNvPr id="80" name="TextBox 79">
-            <a:extLst>
-              <a:ext uri="{FF2B5EF4-FFF2-40B4-BE49-F238E27FC236}">
-                <a16:creationId xmlns:a16="http://schemas.microsoft.com/office/drawing/2014/main" id="{42088EA8-B3E6-88E0-98FB-CDD5B26F4413}"/>
-              </a:ext>
-            </a:extLst>
-          </p:cNvPr>
-          <p:cNvSpPr txBox="1"/>
-          <p:nvPr/>
-        </p:nvSpPr>
-        <p:spPr>
-          <a:xfrm>
-            <a:off x="8681025" y="7368045"/>
-            <a:ext cx="1851789" cy="272703"/>
-          </a:xfrm>
-          <a:prstGeom prst="rect">
-            <a:avLst/>
-          </a:prstGeom>
-          <a:noFill/>
-        </p:spPr>
-        <p:txBody>
-          <a:bodyPr wrap="none" rtlCol="1">
-            <a:spAutoFit/>
-          </a:bodyPr>
-          <a:lstStyle/>
-          <a:p>
-            <a:pPr algn="l" rtl="0"/>
-            <a:r>
-              <a:rPr lang="en-US" sz="1172">
-                <a:solidFill>
-                  <a:schemeClr val="accent5">
-                    <a:lumMod val="75000"/>
-                  </a:schemeClr>
-                </a:solidFill>
-                <a:latin typeface="Consolas" panose="020B0609020204030204" pitchFamily="49" charset="0"/>
-              </a:rPr>
-              <a:t>Majid SharifiTehrani</a:t>
-            </a:r>
-            <a:endParaRPr lang="fa-IR" sz="1172">
-              <a:solidFill>
-                <a:schemeClr val="accent5">
-                  <a:lumMod val="75000"/>
-                </a:schemeClr>
-              </a:solidFill>
-              <a:latin typeface="Consolas" panose="020B0609020204030204" pitchFamily="49" charset="0"/>
-            </a:endParaRPr>
-          </a:p>
-        </p:txBody>
-      </p:sp>
-      <p:sp>
-        <p:nvSpPr>
-          <p:cNvPr id="4" name="Rectangle: Rounded Corners 14">
-            <a:extLst>
-              <a:ext uri="{FF2B5EF4-FFF2-40B4-BE49-F238E27FC236}">
-                <a16:creationId xmlns:a16="http://schemas.microsoft.com/office/drawing/2014/main" id="{E44FFE03-17C2-D9F5-54D7-9F9A666E7DEC}"/>
-              </a:ext>
-            </a:extLst>
-          </p:cNvPr>
-          <p:cNvSpPr/>
-          <p:nvPr/>
-        </p:nvSpPr>
-        <p:spPr bwMode="auto">
-          <a:xfrm>
-            <a:off x="6071114" y="494828"/>
-            <a:ext cx="1723463" cy="1434230"/>
-          </a:xfrm>
-          <a:prstGeom prst="roundRect">
-            <a:avLst>
-              <a:gd name="adj" fmla="val 8023"/>
-            </a:avLst>
-          </a:prstGeom>
-          <a:solidFill>
-            <a:schemeClr val="bg1"/>
-          </a:solidFill>
-          <a:ln w="28575">
-            <a:solidFill>
-              <a:schemeClr val="accent6"/>
-            </a:solidFill>
-          </a:ln>
-          <a:effectLst/>
-        </p:spPr>
-        <p:style>
-          <a:lnRef idx="0">
-            <a:schemeClr val="accent4"/>
-          </a:lnRef>
-          <a:fillRef idx="3">
-            <a:schemeClr val="accent4"/>
-          </a:fillRef>
-          <a:effectRef idx="3">
-            <a:schemeClr val="accent4"/>
-          </a:effectRef>
-          <a:fontRef idx="minor">
-            <a:schemeClr val="lt1"/>
-          </a:fontRef>
-        </p:style>
-        <p:txBody>
-          <a:bodyPr rtlCol="1" anchor="ctr"/>
-          <a:lstStyle/>
-          <a:p>
-            <a:pPr algn="l" rtl="0">
-              <a:defRPr/>
-            </a:pPr>
-            <a:r>
-              <a:rPr lang="en-US" sz="1668" b="1">
-                <a:solidFill>
-                  <a:schemeClr val="bg1"/>
-                </a:solidFill>
-                <a:highlight>
-                  <a:srgbClr val="008080"/>
-                </a:highlight>
-                <a:latin typeface="Segoe UI" panose="020B0502040204020203" pitchFamily="34" charset="0"/>
-                <a:cs typeface="Segoe UI" panose="020B0502040204020203" pitchFamily="34" charset="0"/>
-              </a:rPr>
-              <a:t>C</a:t>
-            </a:r>
-          </a:p>
-          <a:p>
-            <a:pPr rtl="0">
-              <a:defRPr/>
-            </a:pPr>
-            <a:r>
-              <a:rPr lang="en-US" sz="1250" b="1">
-                <a:solidFill>
-                  <a:schemeClr val="tx1"/>
-                </a:solidFill>
-                <a:latin typeface="Segoe UI" panose="020B0502040204020203" pitchFamily="34" charset="0"/>
-                <a:cs typeface="Segoe UI" panose="020B0502040204020203" pitchFamily="34" charset="0"/>
-              </a:rPr>
-              <a:t>Courses</a:t>
-            </a:r>
-            <a:endParaRPr sz="1250" b="1">
-              <a:solidFill>
-                <a:schemeClr val="tx1"/>
-              </a:solidFill>
-              <a:latin typeface="Segoe UI" panose="020B0502040204020203" pitchFamily="34" charset="0"/>
-              <a:cs typeface="Segoe UI" panose="020B0502040204020203" pitchFamily="34" charset="0"/>
-            </a:endParaRPr>
-          </a:p>
-          <a:p>
-            <a:pPr rtl="0">
-              <a:defRPr/>
-            </a:pPr>
-            <a:r>
-              <a:rPr lang="en-US" sz="833" i="1">
-                <a:solidFill>
-                  <a:schemeClr val="accent5"/>
-                </a:solidFill>
-                <a:latin typeface="Segoe UI" panose="020B0502040204020203" pitchFamily="34" charset="0"/>
-                <a:cs typeface="Segoe UI" panose="020B0502040204020203" pitchFamily="34" charset="0"/>
-              </a:rPr>
-              <a:t>CourseId</a:t>
-            </a:r>
-          </a:p>
-          <a:p>
-            <a:pPr rtl="0">
-              <a:defRPr/>
-            </a:pPr>
-            <a:r>
-              <a:rPr lang="en-US" sz="833">
-                <a:solidFill>
-                  <a:schemeClr val="tx1"/>
-                </a:solidFill>
-                <a:latin typeface="Segoe UI" panose="020B0502040204020203" pitchFamily="34" charset="0"/>
-                <a:ea typeface="Arial"/>
-                <a:cs typeface="Segoe UI" panose="020B0502040204020203" pitchFamily="34" charset="0"/>
-              </a:rPr>
-              <a:t>UserId</a:t>
-            </a:r>
-          </a:p>
-          <a:p>
-            <a:pPr rtl="0">
-              <a:defRPr/>
-            </a:pPr>
-            <a:r>
-              <a:rPr lang="en-US" sz="833">
-                <a:solidFill>
-                  <a:schemeClr val="tx1"/>
-                </a:solidFill>
-                <a:latin typeface="Segoe UI" panose="020B0502040204020203" pitchFamily="34" charset="0"/>
-                <a:ea typeface="Arial"/>
-                <a:cs typeface="Segoe UI" panose="020B0502040204020203" pitchFamily="34" charset="0"/>
-              </a:rPr>
-              <a:t>CourseName</a:t>
-            </a:r>
-          </a:p>
-          <a:p>
-            <a:pPr rtl="0">
-              <a:defRPr/>
-            </a:pPr>
-            <a:r>
-              <a:rPr lang="en-US" sz="833">
-                <a:solidFill>
-                  <a:schemeClr val="tx1"/>
-                </a:solidFill>
-                <a:latin typeface="Segoe UI" panose="020B0502040204020203" pitchFamily="34" charset="0"/>
-                <a:ea typeface="Arial"/>
-                <a:cs typeface="Segoe UI" panose="020B0502040204020203" pitchFamily="34" charset="0"/>
-              </a:rPr>
-              <a:t>CourseUnits</a:t>
-            </a:r>
-          </a:p>
-          <a:p>
-            <a:pPr rtl="0">
-              <a:defRPr/>
-            </a:pPr>
-            <a:r>
-              <a:rPr lang="en-US" sz="833">
-                <a:solidFill>
-                  <a:schemeClr val="tx1"/>
-                </a:solidFill>
-                <a:latin typeface="Segoe UI" panose="020B0502040204020203" pitchFamily="34" charset="0"/>
-                <a:ea typeface="Arial"/>
-                <a:cs typeface="Segoe UI" panose="020B0502040204020203" pitchFamily="34" charset="0"/>
-              </a:rPr>
-              <a:t>CourseRtl</a:t>
-            </a:r>
-          </a:p>
-          <a:p>
-            <a:pPr rtl="0">
-              <a:defRPr/>
-            </a:pPr>
-            <a:endParaRPr lang="en-US" sz="833">
-              <a:solidFill>
-                <a:schemeClr val="tx1"/>
-              </a:solidFill>
-              <a:latin typeface="Segoe UI" panose="020B0502040204020203" pitchFamily="34" charset="0"/>
-              <a:ea typeface="Arial"/>
-              <a:cs typeface="Segoe UI" panose="020B0502040204020203" pitchFamily="34" charset="0"/>
-            </a:endParaRPr>
-          </a:p>
-          <a:p>
-            <a:pPr rtl="0">
-              <a:defRPr/>
-            </a:pPr>
-            <a:endParaRPr lang="en-US" sz="833">
-              <a:solidFill>
-                <a:schemeClr val="tx1"/>
-              </a:solidFill>
-              <a:latin typeface="Segoe UI" panose="020B0502040204020203" pitchFamily="34" charset="0"/>
-              <a:ea typeface="Arial"/>
-              <a:cs typeface="Segoe UI" panose="020B0502040204020203" pitchFamily="34" charset="0"/>
-            </a:endParaRPr>
-          </a:p>
-        </p:txBody>
-      </p:sp>
-      <p:sp>
-        <p:nvSpPr>
-          <p:cNvPr id="14" name="Rectangle: Rounded Corners 1">
-            <a:extLst>
-              <a:ext uri="{FF2B5EF4-FFF2-40B4-BE49-F238E27FC236}">
-                <a16:creationId xmlns:a16="http://schemas.microsoft.com/office/drawing/2014/main" id="{7E60B190-F85B-4668-82D3-8A94C8A14501}"/>
-              </a:ext>
-            </a:extLst>
-          </p:cNvPr>
-          <p:cNvSpPr/>
-          <p:nvPr/>
-        </p:nvSpPr>
-        <p:spPr bwMode="auto">
-          <a:xfrm>
-            <a:off x="4530961" y="3528309"/>
-            <a:ext cx="1599883" cy="1625083"/>
-          </a:xfrm>
-          <a:prstGeom prst="roundRect">
-            <a:avLst>
-              <a:gd name="adj" fmla="val 8076"/>
-            </a:avLst>
-          </a:prstGeom>
-          <a:solidFill>
-            <a:schemeClr val="bg1"/>
-          </a:solidFill>
-          <a:ln>
-            <a:solidFill>
-              <a:schemeClr val="accent5"/>
-            </a:solidFill>
-            <a:prstDash val="lgDash"/>
-          </a:ln>
-          <a:effectLst/>
-        </p:spPr>
-        <p:style>
-          <a:lnRef idx="0">
-            <a:schemeClr val="accent4"/>
-          </a:lnRef>
-          <a:fillRef idx="3">
-            <a:schemeClr val="accent4"/>
-          </a:fillRef>
-          <a:effectRef idx="3">
-            <a:schemeClr val="accent4"/>
-          </a:effectRef>
-          <a:fontRef idx="minor">
-            <a:schemeClr val="lt1"/>
-          </a:fontRef>
-        </p:style>
-        <p:txBody>
-          <a:bodyPr rtlCol="1" anchor="ctr"/>
-          <a:lstStyle/>
-          <a:p>
-            <a:pPr rtl="0">
-              <a:defRPr/>
-            </a:pPr>
-            <a:r>
-              <a:rPr lang="en-US" sz="1668" b="1">
-                <a:solidFill>
-                  <a:schemeClr val="bg1"/>
-                </a:solidFill>
-                <a:highlight>
-                  <a:srgbClr val="0000FF"/>
-                </a:highlight>
-                <a:latin typeface="Segoe UI" panose="020B0502040204020203" pitchFamily="34" charset="0"/>
-                <a:cs typeface="Segoe UI" panose="020B0502040204020203" pitchFamily="34" charset="0"/>
-              </a:rPr>
-              <a:t>SE</a:t>
-            </a:r>
-            <a:endParaRPr lang="en-US" sz="1250" b="1">
-              <a:solidFill>
-                <a:schemeClr val="bg1"/>
-              </a:solidFill>
-              <a:highlight>
-                <a:srgbClr val="0000FF"/>
-              </a:highlight>
-              <a:latin typeface="Segoe UI" panose="020B0502040204020203" pitchFamily="34" charset="0"/>
-              <a:cs typeface="Segoe UI" panose="020B0502040204020203" pitchFamily="34" charset="0"/>
-            </a:endParaRPr>
-          </a:p>
-          <a:p>
-            <a:pPr rtl="0">
-              <a:defRPr/>
-            </a:pPr>
-            <a:r>
-              <a:rPr lang="en-US" sz="1250" b="1">
-                <a:solidFill>
-                  <a:schemeClr val="tx1"/>
-                </a:solidFill>
-                <a:latin typeface="Segoe UI" panose="020B0502040204020203" pitchFamily="34" charset="0"/>
-                <a:cs typeface="Segoe UI" panose="020B0502040204020203" pitchFamily="34" charset="0"/>
-              </a:rPr>
-              <a:t>Student</a:t>
-            </a:r>
-            <a:r>
-              <a:rPr lang="en-US" sz="1250" b="1">
-                <a:solidFill>
-                  <a:schemeClr val="tx1"/>
-                </a:solidFill>
-                <a:latin typeface="Segoe UI" panose="020B0502040204020203" pitchFamily="34" charset="0"/>
-                <a:ea typeface="Arial"/>
-                <a:cs typeface="Segoe UI" panose="020B0502040204020203" pitchFamily="34" charset="0"/>
-              </a:rPr>
-              <a:t>Exam</a:t>
-            </a:r>
-            <a:r>
-              <a:rPr lang="en-US" sz="1250" b="1">
-                <a:solidFill>
-                  <a:schemeClr val="tx1"/>
-                </a:solidFill>
-                <a:latin typeface="Segoe UI" panose="020B0502040204020203" pitchFamily="34" charset="0"/>
-                <a:cs typeface="Segoe UI" panose="020B0502040204020203" pitchFamily="34" charset="0"/>
-              </a:rPr>
-              <a:t>s</a:t>
-            </a:r>
-            <a:endParaRPr sz="1250" b="1">
-              <a:solidFill>
-                <a:schemeClr val="tx1"/>
-              </a:solidFill>
-              <a:latin typeface="Segoe UI" panose="020B0502040204020203" pitchFamily="34" charset="0"/>
-              <a:cs typeface="Segoe UI" panose="020B0502040204020203" pitchFamily="34" charset="0"/>
-            </a:endParaRPr>
-          </a:p>
-          <a:p>
-            <a:pPr rtl="0">
-              <a:defRPr/>
-            </a:pPr>
-            <a:r>
-              <a:rPr lang="en-US" sz="833" i="1">
-                <a:solidFill>
-                  <a:schemeClr val="accent5"/>
-                </a:solidFill>
-                <a:latin typeface="Segoe UI" panose="020B0502040204020203" pitchFamily="34" charset="0"/>
-                <a:cs typeface="Segoe UI" panose="020B0502040204020203" pitchFamily="34" charset="0"/>
-              </a:rPr>
-              <a:t>StudentExamId</a:t>
-            </a:r>
-          </a:p>
-          <a:p>
-            <a:pPr rtl="0">
-              <a:defRPr/>
-            </a:pPr>
-            <a:r>
-              <a:rPr lang="en-US" sz="833">
-                <a:solidFill>
-                  <a:schemeClr val="tx1"/>
-                </a:solidFill>
-                <a:latin typeface="Segoe UI" panose="020B0502040204020203" pitchFamily="34" charset="0"/>
-                <a:cs typeface="Segoe UI" panose="020B0502040204020203" pitchFamily="34" charset="0"/>
-              </a:rPr>
-              <a:t>StudentId</a:t>
-            </a:r>
-          </a:p>
-          <a:p>
-            <a:pPr rtl="0">
-              <a:defRPr/>
-            </a:pPr>
-            <a:r>
-              <a:rPr lang="en-US" sz="833">
-                <a:solidFill>
-                  <a:schemeClr val="tx1"/>
-                </a:solidFill>
-                <a:latin typeface="Segoe UI" panose="020B0502040204020203" pitchFamily="34" charset="0"/>
-                <a:cs typeface="Segoe UI" panose="020B0502040204020203" pitchFamily="34" charset="0"/>
-              </a:rPr>
-              <a:t>ExamId</a:t>
-            </a:r>
-          </a:p>
-          <a:p>
-            <a:pPr rtl="0">
-              <a:defRPr/>
-            </a:pPr>
-            <a:r>
-              <a:rPr lang="en-US" sz="833">
-                <a:solidFill>
-                  <a:schemeClr val="tx1"/>
-                </a:solidFill>
-                <a:latin typeface="Segoe UI" panose="020B0502040204020203" pitchFamily="34" charset="0"/>
-                <a:cs typeface="Segoe UI" panose="020B0502040204020203" pitchFamily="34" charset="0"/>
-              </a:rPr>
-              <a:t>DateTimeStart</a:t>
-            </a:r>
-          </a:p>
-          <a:p>
-            <a:pPr rtl="0">
-              <a:defRPr/>
-            </a:pPr>
-            <a:r>
-              <a:rPr lang="en-US" sz="833">
-                <a:solidFill>
-                  <a:schemeClr val="tx1"/>
-                </a:solidFill>
-                <a:latin typeface="Segoe UI" panose="020B0502040204020203" pitchFamily="34" charset="0"/>
-                <a:cs typeface="Segoe UI" panose="020B0502040204020203" pitchFamily="34" charset="0"/>
-              </a:rPr>
-              <a:t>DateTimeFinish</a:t>
-            </a:r>
-          </a:p>
-          <a:p>
-            <a:pPr rtl="0">
-              <a:defRPr/>
-            </a:pPr>
-            <a:r>
-              <a:rPr lang="en-US" sz="833">
-                <a:solidFill>
-                  <a:schemeClr val="tx1"/>
-                </a:solidFill>
-                <a:latin typeface="Segoe UI" panose="020B0502040204020203" pitchFamily="34" charset="0"/>
-                <a:cs typeface="Segoe UI" panose="020B0502040204020203" pitchFamily="34" charset="0"/>
-              </a:rPr>
-              <a:t>StudentExamTags</a:t>
-            </a:r>
-          </a:p>
-          <a:p>
-            <a:pPr rtl="0">
-              <a:defRPr/>
-            </a:pPr>
-            <a:r>
-              <a:rPr lang="en-US" sz="489">
-                <a:solidFill>
-                  <a:srgbClr val="C00000"/>
-                </a:solidFill>
-                <a:latin typeface="Segoe UI" panose="020B0502040204020203" pitchFamily="34" charset="0"/>
-                <a:cs typeface="Segoe UI" panose="020B0502040204020203" pitchFamily="34" charset="0"/>
-              </a:rPr>
-              <a:t>1:act 2:strt, 4:fin, 8:rev</a:t>
-            </a:r>
-          </a:p>
-          <a:p>
-            <a:pPr rtl="0">
-              <a:defRPr/>
-            </a:pPr>
-            <a:r>
-              <a:rPr lang="en-US" sz="833">
-                <a:solidFill>
-                  <a:schemeClr val="tx1"/>
-                </a:solidFill>
-                <a:latin typeface="Segoe UI" panose="020B0502040204020203" pitchFamily="34" charset="0"/>
-                <a:cs typeface="Segoe UI" panose="020B0502040204020203" pitchFamily="34" charset="0"/>
-              </a:rPr>
-              <a:t>StudentExamPoint </a:t>
-            </a:r>
-            <a:r>
-              <a:rPr lang="en-US" sz="833" i="1">
-                <a:solidFill>
-                  <a:srgbClr val="FF0000"/>
-                </a:solidFill>
-                <a:latin typeface="Segoe UI" panose="020B0502040204020203" pitchFamily="34" charset="0"/>
-                <a:cs typeface="Segoe UI" panose="020B0502040204020203" pitchFamily="34" charset="0"/>
-              </a:rPr>
-              <a:t>double</a:t>
-            </a:r>
-          </a:p>
-          <a:p>
-            <a:pPr rtl="0">
-              <a:defRPr/>
-            </a:pPr>
-            <a:endParaRPr lang="en-US" sz="833" i="1">
-              <a:solidFill>
-                <a:srgbClr val="FF0000"/>
-              </a:solidFill>
-              <a:latin typeface="Segoe UI" panose="020B0502040204020203" pitchFamily="34" charset="0"/>
-              <a:cs typeface="Segoe UI" panose="020B0502040204020203" pitchFamily="34" charset="0"/>
-            </a:endParaRPr>
-          </a:p>
-        </p:txBody>
-      </p:sp>
-      <p:sp>
-        <p:nvSpPr>
-          <p:cNvPr id="10" name="Rectangle: Rounded Corners 21">
-            <a:extLst>
-              <a:ext uri="{FF2B5EF4-FFF2-40B4-BE49-F238E27FC236}">
-                <a16:creationId xmlns:a16="http://schemas.microsoft.com/office/drawing/2014/main" id="{3BF58AC7-D611-1BEF-10D3-219F3380C1E3}"/>
-              </a:ext>
-            </a:extLst>
-          </p:cNvPr>
-          <p:cNvSpPr/>
-          <p:nvPr/>
-        </p:nvSpPr>
-        <p:spPr bwMode="auto">
-          <a:xfrm>
-            <a:off x="5293003" y="6199475"/>
-            <a:ext cx="2595179" cy="1269909"/>
-          </a:xfrm>
-          <a:prstGeom prst="roundRect">
-            <a:avLst>
-              <a:gd name="adj" fmla="val 5633"/>
-            </a:avLst>
-          </a:prstGeom>
-          <a:solidFill>
-            <a:schemeClr val="bg1"/>
-          </a:solidFill>
-          <a:ln>
-            <a:solidFill>
-              <a:schemeClr val="accent5"/>
-            </a:solidFill>
-            <a:prstDash val="lgDash"/>
-          </a:ln>
-          <a:effectLst/>
-        </p:spPr>
-        <p:style>
-          <a:lnRef idx="0">
-            <a:schemeClr val="accent4"/>
-          </a:lnRef>
-          <a:fillRef idx="3">
-            <a:schemeClr val="accent4"/>
-          </a:fillRef>
-          <a:effectRef idx="3">
-            <a:schemeClr val="accent4"/>
-          </a:effectRef>
-          <a:fontRef idx="minor">
-            <a:schemeClr val="lt1"/>
-          </a:fontRef>
-        </p:style>
-        <p:txBody>
-          <a:bodyPr rtlCol="1" anchor="ctr"/>
-          <a:lstStyle/>
-          <a:p>
-            <a:pPr rtl="0">
-              <a:defRPr/>
-            </a:pPr>
-            <a:r>
-              <a:rPr lang="en-US" sz="1668" b="1">
-                <a:solidFill>
-                  <a:schemeClr val="bg1"/>
-                </a:solidFill>
-                <a:highlight>
-                  <a:srgbClr val="0000FF"/>
-                </a:highlight>
-                <a:latin typeface="Segoe UI" panose="020B0502040204020203" pitchFamily="34" charset="0"/>
-                <a:cs typeface="Segoe UI" panose="020B0502040204020203" pitchFamily="34" charset="0"/>
-              </a:rPr>
-              <a:t>ET</a:t>
-            </a:r>
-            <a:br>
-              <a:rPr lang="en-US" sz="1250" b="1">
-                <a:solidFill>
-                  <a:schemeClr val="tx1"/>
-                </a:solidFill>
-                <a:latin typeface="Segoe UI" panose="020B0502040204020203" pitchFamily="34" charset="0"/>
-                <a:cs typeface="Segoe UI" panose="020B0502040204020203" pitchFamily="34" charset="0"/>
-              </a:rPr>
-            </a:br>
-            <a:r>
-              <a:rPr lang="en-US" sz="1250" b="1">
-                <a:solidFill>
-                  <a:schemeClr val="tx1"/>
-                </a:solidFill>
-                <a:latin typeface="Segoe UI" panose="020B0502040204020203" pitchFamily="34" charset="0"/>
-                <a:cs typeface="Segoe UI" panose="020B0502040204020203" pitchFamily="34" charset="0"/>
-              </a:rPr>
-              <a:t>ExamTests</a:t>
-            </a:r>
-            <a:endParaRPr sz="1250" b="1">
-              <a:solidFill>
-                <a:schemeClr val="tx1"/>
-              </a:solidFill>
-              <a:latin typeface="Segoe UI" panose="020B0502040204020203" pitchFamily="34" charset="0"/>
-              <a:cs typeface="Segoe UI" panose="020B0502040204020203" pitchFamily="34" charset="0"/>
-            </a:endParaRPr>
-          </a:p>
-          <a:p>
-            <a:pPr rtl="0">
-              <a:defRPr/>
-            </a:pPr>
-            <a:r>
-              <a:rPr lang="en-US" sz="833" i="1">
-                <a:solidFill>
-                  <a:schemeClr val="accent5"/>
-                </a:solidFill>
-                <a:latin typeface="Segoe UI" panose="020B0502040204020203" pitchFamily="34" charset="0"/>
-                <a:cs typeface="Segoe UI" panose="020B0502040204020203" pitchFamily="34" charset="0"/>
-              </a:rPr>
-              <a:t>ExamTestId</a:t>
-            </a:r>
-          </a:p>
-          <a:p>
-            <a:pPr rtl="0">
-              <a:defRPr/>
-            </a:pPr>
-            <a:r>
-              <a:rPr lang="en-US" sz="833">
-                <a:solidFill>
-                  <a:schemeClr val="tx1"/>
-                </a:solidFill>
-                <a:latin typeface="Segoe UI" panose="020B0502040204020203" pitchFamily="34" charset="0"/>
-                <a:cs typeface="Segoe UI" panose="020B0502040204020203" pitchFamily="34" charset="0"/>
-              </a:rPr>
-              <a:t>ExamId</a:t>
-            </a:r>
-          </a:p>
-          <a:p>
-            <a:pPr rtl="0">
-              <a:defRPr/>
-            </a:pPr>
-            <a:r>
-              <a:rPr lang="en-US" sz="833">
-                <a:solidFill>
-                  <a:schemeClr val="tx1"/>
-                </a:solidFill>
-                <a:latin typeface="Segoe UI" panose="020B0502040204020203" pitchFamily="34" charset="0"/>
-                <a:cs typeface="Segoe UI" panose="020B0502040204020203" pitchFamily="34" charset="0"/>
-              </a:rPr>
-              <a:t>TestId</a:t>
-            </a:r>
-          </a:p>
-          <a:p>
-            <a:pPr rtl="0">
-              <a:defRPr/>
-            </a:pPr>
-            <a:r>
-              <a:rPr lang="en-US" sz="833">
-                <a:solidFill>
-                  <a:schemeClr val="tx1"/>
-                </a:solidFill>
-                <a:latin typeface="Segoe UI" panose="020B0502040204020203" pitchFamily="34" charset="0"/>
-                <a:cs typeface="Segoe UI" panose="020B0502040204020203" pitchFamily="34" charset="0"/>
-              </a:rPr>
-              <a:t>PercentCorrect</a:t>
-            </a:r>
-          </a:p>
-          <a:p>
-            <a:pPr rtl="0">
-              <a:defRPr/>
-            </a:pPr>
-            <a:r>
-              <a:rPr lang="en-US" sz="833">
-                <a:solidFill>
-                  <a:schemeClr val="tx1"/>
-                </a:solidFill>
-                <a:latin typeface="Segoe UI" panose="020B0502040204020203" pitchFamily="34" charset="0"/>
-                <a:cs typeface="Segoe UI" panose="020B0502040204020203" pitchFamily="34" charset="0"/>
-              </a:rPr>
-              <a:t>PercentIncorrect</a:t>
-            </a:r>
-          </a:p>
-          <a:p>
-            <a:pPr rtl="0">
-              <a:defRPr/>
-            </a:pPr>
-            <a:r>
-              <a:rPr lang="en-US" sz="833">
-                <a:solidFill>
-                  <a:schemeClr val="tx1"/>
-                </a:solidFill>
-                <a:latin typeface="Segoe UI" panose="020B0502040204020203" pitchFamily="34" charset="0"/>
-                <a:cs typeface="Segoe UI" panose="020B0502040204020203" pitchFamily="34" charset="0"/>
-              </a:rPr>
-              <a:t>PercentHelped</a:t>
-            </a:r>
-          </a:p>
-        </p:txBody>
-      </p:sp>
-      <p:sp>
-        <p:nvSpPr>
-          <p:cNvPr id="56" name="Rectangle: Rounded Corners 1">
-            <a:extLst>
-              <a:ext uri="{FF2B5EF4-FFF2-40B4-BE49-F238E27FC236}">
-                <a16:creationId xmlns:a16="http://schemas.microsoft.com/office/drawing/2014/main" id="{A430A438-2C0D-B2CC-BDD5-054B228A29A1}"/>
-              </a:ext>
-            </a:extLst>
-          </p:cNvPr>
-          <p:cNvSpPr/>
-          <p:nvPr/>
-        </p:nvSpPr>
-        <p:spPr bwMode="auto">
-          <a:xfrm>
-            <a:off x="6220673" y="2379530"/>
-            <a:ext cx="1821402" cy="1125595"/>
-          </a:xfrm>
-          <a:prstGeom prst="roundRect">
-            <a:avLst>
-              <a:gd name="adj" fmla="val 8076"/>
-            </a:avLst>
-          </a:prstGeom>
-          <a:solidFill>
-            <a:schemeClr val="bg1"/>
-          </a:solidFill>
-          <a:ln>
-            <a:solidFill>
-              <a:schemeClr val="accent6"/>
-            </a:solidFill>
-            <a:prstDash val="lgDash"/>
-          </a:ln>
-          <a:effectLst/>
-        </p:spPr>
-        <p:style>
-          <a:lnRef idx="0">
-            <a:schemeClr val="accent4"/>
-          </a:lnRef>
-          <a:fillRef idx="3">
-            <a:schemeClr val="accent4"/>
-          </a:fillRef>
-          <a:effectRef idx="3">
-            <a:schemeClr val="accent4"/>
-          </a:effectRef>
-          <a:fontRef idx="minor">
-            <a:schemeClr val="lt1"/>
-          </a:fontRef>
-        </p:style>
-        <p:txBody>
-          <a:bodyPr rtlCol="1" anchor="ctr"/>
-          <a:lstStyle/>
-          <a:p>
-            <a:pPr rtl="0">
-              <a:defRPr/>
-            </a:pPr>
-            <a:r>
-              <a:rPr lang="en-US" sz="1668" b="1">
-                <a:solidFill>
-                  <a:schemeClr val="bg1"/>
-                </a:solidFill>
-                <a:highlight>
-                  <a:srgbClr val="008080"/>
-                </a:highlight>
-                <a:latin typeface="Segoe UI" panose="020B0502040204020203" pitchFamily="34" charset="0"/>
-                <a:cs typeface="Segoe UI" panose="020B0502040204020203" pitchFamily="34" charset="0"/>
-              </a:rPr>
-              <a:t>SCT</a:t>
-            </a:r>
-          </a:p>
-          <a:p>
-            <a:pPr rtl="0">
-              <a:defRPr/>
-            </a:pPr>
-            <a:r>
-              <a:rPr lang="en-US" sz="1250" b="1">
-                <a:solidFill>
-                  <a:schemeClr val="tx1"/>
-                </a:solidFill>
-                <a:latin typeface="Segoe UI" panose="020B0502040204020203" pitchFamily="34" charset="0"/>
-                <a:cs typeface="Segoe UI" panose="020B0502040204020203" pitchFamily="34" charset="0"/>
-              </a:rPr>
-              <a:t>StudentCourse</a:t>
-            </a:r>
-            <a:r>
-              <a:rPr lang="en-US" sz="1250" b="1">
-                <a:solidFill>
-                  <a:schemeClr val="tx1"/>
-                </a:solidFill>
-                <a:latin typeface="Segoe UI" panose="020B0502040204020203" pitchFamily="34" charset="0"/>
-                <a:ea typeface="Arial"/>
-                <a:cs typeface="Segoe UI" panose="020B0502040204020203" pitchFamily="34" charset="0"/>
-              </a:rPr>
-              <a:t>Test</a:t>
-            </a:r>
-            <a:r>
-              <a:rPr lang="en-US" sz="1250" b="1">
-                <a:solidFill>
-                  <a:schemeClr val="tx1"/>
-                </a:solidFill>
-                <a:latin typeface="Segoe UI" panose="020B0502040204020203" pitchFamily="34" charset="0"/>
-                <a:cs typeface="Segoe UI" panose="020B0502040204020203" pitchFamily="34" charset="0"/>
-              </a:rPr>
-              <a:t>s</a:t>
-            </a:r>
-            <a:endParaRPr sz="1250" b="1">
-              <a:solidFill>
-                <a:schemeClr val="tx1"/>
-              </a:solidFill>
-              <a:latin typeface="Segoe UI" panose="020B0502040204020203" pitchFamily="34" charset="0"/>
-              <a:cs typeface="Segoe UI" panose="020B0502040204020203" pitchFamily="34" charset="0"/>
-            </a:endParaRPr>
-          </a:p>
-          <a:p>
-            <a:pPr rtl="0">
-              <a:defRPr/>
-            </a:pPr>
-            <a:r>
-              <a:rPr lang="en-US" sz="833">
-                <a:solidFill>
-                  <a:schemeClr val="tx1"/>
-                </a:solidFill>
-                <a:latin typeface="Segoe UI" panose="020B0502040204020203" pitchFamily="34" charset="0"/>
-                <a:cs typeface="Segoe UI" panose="020B0502040204020203" pitchFamily="34" charset="0"/>
-              </a:rPr>
-              <a:t>StudentCourseId</a:t>
-            </a:r>
-          </a:p>
-          <a:p>
-            <a:pPr rtl="0">
-              <a:defRPr/>
-            </a:pPr>
-            <a:r>
-              <a:rPr lang="en-US" sz="833">
-                <a:solidFill>
-                  <a:schemeClr val="tx1"/>
-                </a:solidFill>
-                <a:latin typeface="Segoe UI" panose="020B0502040204020203" pitchFamily="34" charset="0"/>
-                <a:cs typeface="Segoe UI" panose="020B0502040204020203" pitchFamily="34" charset="0"/>
-              </a:rPr>
-              <a:t>TestId</a:t>
-            </a:r>
-          </a:p>
-          <a:p>
-            <a:pPr rtl="0">
-              <a:defRPr/>
-            </a:pPr>
-            <a:r>
-              <a:rPr lang="en-US" sz="833">
-                <a:solidFill>
-                  <a:schemeClr val="tx1"/>
-                </a:solidFill>
-                <a:latin typeface="Segoe UI" panose="020B0502040204020203" pitchFamily="34" charset="0"/>
-                <a:cs typeface="Segoe UI" panose="020B0502040204020203" pitchFamily="34" charset="0"/>
-              </a:rPr>
-              <a:t>TestKey</a:t>
-            </a:r>
-          </a:p>
-          <a:p>
-            <a:pPr rtl="0">
-              <a:defRPr/>
-            </a:pPr>
-            <a:r>
-              <a:rPr lang="en-US" sz="833">
-                <a:solidFill>
-                  <a:schemeClr val="tx1"/>
-                </a:solidFill>
-                <a:latin typeface="Segoe UI" panose="020B0502040204020203" pitchFamily="34" charset="0"/>
-                <a:cs typeface="Segoe UI" panose="020B0502040204020203" pitchFamily="34" charset="0"/>
-              </a:rPr>
-              <a:t>UserAns</a:t>
-            </a:r>
-          </a:p>
-          <a:p>
-            <a:pPr rtl="0">
-              <a:defRPr/>
-            </a:pPr>
-            <a:r>
-              <a:rPr lang="en-US" sz="833">
-                <a:solidFill>
-                  <a:schemeClr val="tx1"/>
-                </a:solidFill>
-                <a:latin typeface="Segoe UI" panose="020B0502040204020203" pitchFamily="34" charset="0"/>
-                <a:cs typeface="Segoe UI" panose="020B0502040204020203" pitchFamily="34" charset="0"/>
-              </a:rPr>
-              <a:t>DateTime</a:t>
-            </a:r>
-          </a:p>
-        </p:txBody>
-      </p:sp>
-      <p:sp>
-        <p:nvSpPr>
-          <p:cNvPr id="13" name="Rectangle: Rounded Corners 46">
-            <a:extLst>
-              <a:ext uri="{FF2B5EF4-FFF2-40B4-BE49-F238E27FC236}">
-                <a16:creationId xmlns:a16="http://schemas.microsoft.com/office/drawing/2014/main" id="{BE52AC44-430C-86F3-11B6-7CC8F63D44BC}"/>
-              </a:ext>
-            </a:extLst>
-          </p:cNvPr>
-          <p:cNvSpPr/>
-          <p:nvPr/>
-        </p:nvSpPr>
-        <p:spPr bwMode="auto">
-          <a:xfrm>
-            <a:off x="5935203" y="3607818"/>
-            <a:ext cx="1812674" cy="2513458"/>
-          </a:xfrm>
-          <a:prstGeom prst="roundRect">
-            <a:avLst>
-              <a:gd name="adj" fmla="val 6890"/>
-            </a:avLst>
-          </a:prstGeom>
-          <a:solidFill>
-            <a:schemeClr val="bg1"/>
-          </a:solidFill>
-          <a:ln>
-            <a:solidFill>
-              <a:schemeClr val="accent5"/>
-            </a:solidFill>
-            <a:prstDash val="lgDash"/>
-          </a:ln>
-          <a:effectLst/>
-        </p:spPr>
-        <p:style>
-          <a:lnRef idx="0">
-            <a:schemeClr val="accent4"/>
-          </a:lnRef>
-          <a:fillRef idx="3">
-            <a:schemeClr val="accent4"/>
-          </a:fillRef>
-          <a:effectRef idx="3">
-            <a:schemeClr val="accent4"/>
-          </a:effectRef>
-          <a:fontRef idx="minor">
-            <a:schemeClr val="lt1"/>
-          </a:fontRef>
-        </p:style>
-        <p:txBody>
-          <a:bodyPr rtlCol="1" anchor="ctr"/>
-          <a:lstStyle/>
-          <a:p>
-            <a:pPr marL="88396" rtl="0">
-              <a:defRPr/>
-            </a:pPr>
-            <a:r>
-              <a:rPr lang="en-US" sz="1668" b="1">
-                <a:solidFill>
-                  <a:schemeClr val="bg1"/>
-                </a:solidFill>
-                <a:highlight>
-                  <a:srgbClr val="0000FF"/>
-                </a:highlight>
-                <a:latin typeface="Segoe UI" panose="020B0502040204020203" pitchFamily="34" charset="0"/>
-                <a:cs typeface="Segoe UI" panose="020B0502040204020203" pitchFamily="34" charset="0"/>
-              </a:rPr>
-              <a:t>SET</a:t>
-            </a:r>
-            <a:endParaRPr lang="en-US" sz="1250" b="1">
-              <a:solidFill>
-                <a:schemeClr val="bg1"/>
-              </a:solidFill>
-              <a:highlight>
-                <a:srgbClr val="0000FF"/>
-              </a:highlight>
-              <a:latin typeface="Segoe UI" panose="020B0502040204020203" pitchFamily="34" charset="0"/>
-              <a:cs typeface="Segoe UI" panose="020B0502040204020203" pitchFamily="34" charset="0"/>
-            </a:endParaRPr>
-          </a:p>
-          <a:p>
-            <a:pPr marL="88396" rtl="0">
-              <a:defRPr/>
-            </a:pPr>
-            <a:r>
-              <a:rPr lang="en-US" sz="1250" b="1">
-                <a:solidFill>
-                  <a:schemeClr val="tx1"/>
-                </a:solidFill>
-                <a:latin typeface="Segoe UI" panose="020B0502040204020203" pitchFamily="34" charset="0"/>
-                <a:cs typeface="Segoe UI" panose="020B0502040204020203" pitchFamily="34" charset="0"/>
-              </a:rPr>
-              <a:t>StudentExamTests</a:t>
-            </a:r>
-            <a:endParaRPr sz="1250" b="1">
-              <a:solidFill>
-                <a:schemeClr val="tx1"/>
-              </a:solidFill>
-              <a:latin typeface="Segoe UI" panose="020B0502040204020203" pitchFamily="34" charset="0"/>
-              <a:cs typeface="Segoe UI" panose="020B0502040204020203" pitchFamily="34" charset="0"/>
-            </a:endParaRPr>
-          </a:p>
-          <a:p>
-            <a:pPr marL="88396" rtl="0">
-              <a:defRPr/>
-            </a:pPr>
-            <a:r>
-              <a:rPr lang="en-US" sz="833" i="1">
-                <a:solidFill>
-                  <a:schemeClr val="accent5"/>
-                </a:solidFill>
-                <a:latin typeface="Segoe UI" panose="020B0502040204020203" pitchFamily="34" charset="0"/>
-                <a:cs typeface="Segoe UI" panose="020B0502040204020203" pitchFamily="34" charset="0"/>
-              </a:rPr>
-              <a:t>StudentExamTestId </a:t>
-            </a:r>
-            <a:r>
-              <a:rPr lang="en-US" sz="833" i="1">
-                <a:solidFill>
-                  <a:srgbClr val="FF0000"/>
-                </a:solidFill>
-                <a:latin typeface="Segoe UI" panose="020B0502040204020203" pitchFamily="34" charset="0"/>
-                <a:cs typeface="Segoe UI" panose="020B0502040204020203" pitchFamily="34" charset="0"/>
-              </a:rPr>
-              <a:t>long</a:t>
-            </a:r>
-          </a:p>
-          <a:p>
-            <a:pPr marL="88396" rtl="0">
-              <a:defRPr/>
-            </a:pPr>
-            <a:r>
-              <a:rPr lang="en-US" sz="833">
-                <a:solidFill>
-                  <a:schemeClr val="tx1"/>
-                </a:solidFill>
-                <a:latin typeface="Segoe UI" panose="020B0502040204020203" pitchFamily="34" charset="0"/>
-                <a:cs typeface="Segoe UI" panose="020B0502040204020203" pitchFamily="34" charset="0"/>
-              </a:rPr>
-              <a:t>StudentExamId</a:t>
-            </a:r>
-          </a:p>
-          <a:p>
-            <a:pPr marL="88396" rtl="0">
-              <a:defRPr/>
-            </a:pPr>
-            <a:r>
-              <a:rPr lang="en-US" sz="833">
-                <a:solidFill>
-                  <a:schemeClr val="tx1"/>
-                </a:solidFill>
-                <a:latin typeface="Segoe UI" panose="020B0502040204020203" pitchFamily="34" charset="0"/>
-                <a:cs typeface="Segoe UI" panose="020B0502040204020203" pitchFamily="34" charset="0"/>
-              </a:rPr>
-              <a:t>TestId</a:t>
-            </a:r>
-          </a:p>
-          <a:p>
-            <a:pPr marL="88396" rtl="0">
-              <a:defRPr/>
-            </a:pPr>
-            <a:r>
-              <a:rPr lang="en-US" sz="833">
-                <a:solidFill>
-                  <a:schemeClr val="tx1"/>
-                </a:solidFill>
-                <a:latin typeface="Segoe UI" panose="020B0502040204020203" pitchFamily="34" charset="0"/>
-                <a:cs typeface="Segoe UI" panose="020B0502040204020203" pitchFamily="34" charset="0"/>
-              </a:rPr>
-              <a:t>Opt1Id</a:t>
-            </a:r>
-          </a:p>
-          <a:p>
-            <a:pPr marL="88396" rtl="0">
-              <a:defRPr/>
-            </a:pPr>
-            <a:r>
-              <a:rPr lang="en-US" sz="833">
-                <a:solidFill>
-                  <a:schemeClr val="tx1"/>
-                </a:solidFill>
-                <a:latin typeface="Segoe UI" panose="020B0502040204020203" pitchFamily="34" charset="0"/>
-                <a:cs typeface="Segoe UI" panose="020B0502040204020203" pitchFamily="34" charset="0"/>
-              </a:rPr>
-              <a:t>Opt2Id</a:t>
-            </a:r>
-          </a:p>
-          <a:p>
-            <a:pPr marL="88396" rtl="0">
-              <a:defRPr/>
-            </a:pPr>
-            <a:r>
-              <a:rPr lang="en-US" sz="833">
-                <a:solidFill>
-                  <a:schemeClr val="tx1"/>
-                </a:solidFill>
-                <a:latin typeface="Segoe UI" panose="020B0502040204020203" pitchFamily="34" charset="0"/>
-                <a:cs typeface="Segoe UI" panose="020B0502040204020203" pitchFamily="34" charset="0"/>
-              </a:rPr>
-              <a:t>Opt3Id</a:t>
-            </a:r>
-          </a:p>
-          <a:p>
-            <a:pPr marL="88396" rtl="0">
-              <a:defRPr/>
-            </a:pPr>
-            <a:r>
-              <a:rPr lang="en-US" sz="833">
-                <a:solidFill>
-                  <a:schemeClr val="tx1"/>
-                </a:solidFill>
-                <a:latin typeface="Segoe UI" panose="020B0502040204020203" pitchFamily="34" charset="0"/>
-                <a:cs typeface="Segoe UI" panose="020B0502040204020203" pitchFamily="34" charset="0"/>
-              </a:rPr>
-              <a:t>Opt4Id</a:t>
-            </a:r>
-          </a:p>
-          <a:p>
-            <a:pPr marL="88396" rtl="0">
-              <a:defRPr/>
-            </a:pPr>
-            <a:r>
-              <a:rPr lang="en-US" sz="833">
-                <a:solidFill>
-                  <a:schemeClr val="tx1"/>
-                </a:solidFill>
-                <a:latin typeface="Segoe UI" panose="020B0502040204020203" pitchFamily="34" charset="0"/>
-                <a:cs typeface="Segoe UI" panose="020B0502040204020203" pitchFamily="34" charset="0"/>
-              </a:rPr>
-              <a:t>Opt5Id</a:t>
-            </a:r>
-          </a:p>
-          <a:p>
-            <a:pPr marL="88396" rtl="0">
-              <a:defRPr/>
-            </a:pPr>
-            <a:r>
-              <a:rPr lang="en-US" sz="833">
-                <a:solidFill>
-                  <a:schemeClr val="tx1"/>
-                </a:solidFill>
-                <a:latin typeface="Segoe UI" panose="020B0502040204020203" pitchFamily="34" charset="0"/>
-                <a:cs typeface="Segoe UI" panose="020B0502040204020203" pitchFamily="34" charset="0"/>
-              </a:rPr>
-              <a:t>StudentExamTestKey</a:t>
-            </a:r>
-          </a:p>
-          <a:p>
-            <a:pPr marL="88396" rtl="0">
-              <a:defRPr/>
-            </a:pPr>
-            <a:r>
-              <a:rPr lang="en-US" sz="833">
-                <a:solidFill>
-                  <a:schemeClr val="tx1"/>
-                </a:solidFill>
-                <a:latin typeface="Segoe UI" panose="020B0502040204020203" pitchFamily="34" charset="0"/>
-                <a:cs typeface="Segoe UI" panose="020B0502040204020203" pitchFamily="34" charset="0"/>
-              </a:rPr>
-              <a:t>StudentExamTestAns</a:t>
-            </a:r>
-          </a:p>
-          <a:p>
-            <a:pPr marL="88396" rtl="0">
-              <a:defRPr/>
-            </a:pPr>
-            <a:r>
-              <a:rPr lang="en-US" sz="833">
-                <a:solidFill>
-                  <a:schemeClr val="tx1"/>
-                </a:solidFill>
-                <a:latin typeface="Segoe UI" panose="020B0502040204020203" pitchFamily="34" charset="0"/>
-                <a:cs typeface="Segoe UI" panose="020B0502040204020203" pitchFamily="34" charset="0"/>
-              </a:rPr>
-              <a:t>StudentExamTestTags</a:t>
-            </a:r>
-          </a:p>
-          <a:p>
-            <a:pPr marL="88396" rtl="0"/>
-            <a:r>
-              <a:rPr lang="en-US" sz="489" kern="100">
-                <a:solidFill>
-                  <a:srgbClr val="C00000"/>
-                </a:solidFill>
-                <a:latin typeface="Consolas" panose="020B0609020204030204" pitchFamily="49" charset="0"/>
-                <a:ea typeface="Calibri" panose="020F0502020204030204" pitchFamily="34" charset="0"/>
-                <a:cs typeface="Calibri Light" panose="020F0302020204030204" pitchFamily="34" charset="0"/>
-              </a:rPr>
-              <a:t>1  visited</a:t>
-            </a:r>
-          </a:p>
-          <a:p>
-            <a:pPr marL="88396" rtl="0"/>
-            <a:r>
-              <a:rPr lang="en-US" sz="489" kern="100">
-                <a:solidFill>
-                  <a:srgbClr val="C00000"/>
-                </a:solidFill>
-                <a:latin typeface="Consolas" panose="020B0609020204030204" pitchFamily="49" charset="0"/>
-                <a:ea typeface="Calibri" panose="020F0502020204030204" pitchFamily="34" charset="0"/>
-                <a:cs typeface="Calibri Light" panose="020F0302020204030204" pitchFamily="34" charset="0"/>
-              </a:rPr>
-              <a:t>2  bookmarked</a:t>
-            </a:r>
-          </a:p>
-          <a:p>
-            <a:pPr marL="88396" rtl="0"/>
-            <a:r>
-              <a:rPr lang="en-US" sz="489" kern="100">
-                <a:solidFill>
-                  <a:srgbClr val="C00000"/>
-                </a:solidFill>
-                <a:latin typeface="Consolas" panose="020B0609020204030204" pitchFamily="49" charset="0"/>
-                <a:ea typeface="Calibri" panose="020F0502020204030204" pitchFamily="34" charset="0"/>
-                <a:cs typeface="Calibri Light" panose="020F0302020204030204" pitchFamily="34" charset="0"/>
-              </a:rPr>
-              <a:t>4  answered</a:t>
-            </a:r>
-          </a:p>
-          <a:p>
-            <a:pPr marL="88396" rtl="0"/>
-            <a:r>
-              <a:rPr lang="en-US" sz="489" kern="100">
-                <a:solidFill>
-                  <a:srgbClr val="C00000"/>
-                </a:solidFill>
-                <a:latin typeface="Consolas" panose="020B0609020204030204" pitchFamily="49" charset="0"/>
-                <a:ea typeface="Calibri" panose="020F0502020204030204" pitchFamily="34" charset="0"/>
-                <a:cs typeface="Calibri Light" panose="020F0302020204030204" pitchFamily="34" charset="0"/>
-              </a:rPr>
-              <a:t>8  helped</a:t>
-            </a:r>
-          </a:p>
-          <a:p>
-            <a:pPr marL="88396" rtl="0"/>
-            <a:r>
-              <a:rPr lang="en-US" sz="489" kern="100">
-                <a:solidFill>
-                  <a:srgbClr val="C00000"/>
-                </a:solidFill>
-                <a:latin typeface="Consolas" panose="020B0609020204030204" pitchFamily="49" charset="0"/>
-                <a:ea typeface="Calibri" panose="020F0502020204030204" pitchFamily="34" charset="0"/>
-                <a:cs typeface="Calibri Light" panose="020F0302020204030204" pitchFamily="34" charset="0"/>
-              </a:rPr>
-              <a:t>16 revised</a:t>
-            </a:r>
-          </a:p>
-          <a:p>
-            <a:pPr marL="88396" rtl="0"/>
-            <a:r>
-              <a:rPr lang="en-US" sz="489" kern="100">
-                <a:solidFill>
-                  <a:srgbClr val="C00000"/>
-                </a:solidFill>
-                <a:latin typeface="Consolas" panose="020B0609020204030204" pitchFamily="49" charset="0"/>
-                <a:ea typeface="Calibri" panose="020F0502020204030204" pitchFamily="34" charset="0"/>
-                <a:cs typeface="Calibri Light" panose="020F0302020204030204" pitchFamily="34" charset="0"/>
-              </a:rPr>
-              <a:t>32 probl. rep</a:t>
-            </a:r>
-          </a:p>
-          <a:p>
-            <a:pPr marL="88396" rtl="0"/>
-            <a:r>
-              <a:rPr lang="en-US" sz="489" kern="100">
-                <a:solidFill>
-                  <a:srgbClr val="C00000"/>
-                </a:solidFill>
-                <a:latin typeface="Consolas" panose="020B0609020204030204" pitchFamily="49" charset="0"/>
-                <a:ea typeface="Calibri" panose="020F0502020204030204" pitchFamily="34" charset="0"/>
-                <a:cs typeface="Calibri Light" panose="020F0302020204030204" pitchFamily="34" charset="0"/>
-              </a:rPr>
-              <a:t>64 IsSelected</a:t>
-            </a:r>
-          </a:p>
-          <a:p>
-            <a:pPr marL="88396" rtl="0"/>
-            <a:r>
-              <a:rPr lang="en-US" sz="489" kern="100">
-                <a:solidFill>
-                  <a:srgbClr val="C00000"/>
-                </a:solidFill>
-                <a:latin typeface="Consolas" panose="020B0609020204030204" pitchFamily="49" charset="0"/>
-                <a:ea typeface="Calibri" panose="020F0502020204030204" pitchFamily="34" charset="0"/>
-                <a:cs typeface="Calibri Light" panose="020F0302020204030204" pitchFamily="34" charset="0"/>
-              </a:rPr>
-              <a:t>128 AnswerTextAcceptedByTeacher</a:t>
-            </a:r>
-          </a:p>
-        </p:txBody>
-      </p:sp>
-      <p:sp>
-        <p:nvSpPr>
-          <p:cNvPr id="16" name="Rectangle: Rounded Corners 15">
-            <a:extLst>
-              <a:ext uri="{FF2B5EF4-FFF2-40B4-BE49-F238E27FC236}">
-                <a16:creationId xmlns:a16="http://schemas.microsoft.com/office/drawing/2014/main" id="{8A1334ED-3ECC-66C2-5C25-2F2EF327E9F0}"/>
-              </a:ext>
-            </a:extLst>
-          </p:cNvPr>
-          <p:cNvSpPr/>
-          <p:nvPr/>
-        </p:nvSpPr>
-        <p:spPr>
-          <a:xfrm>
-            <a:off x="-533524" y="2866279"/>
-            <a:ext cx="1079702" cy="1596750"/>
-          </a:xfrm>
-          <a:prstGeom prst="roundRect">
-            <a:avLst>
-              <a:gd name="adj" fmla="val 8313"/>
-            </a:avLst>
-          </a:prstGeom>
-          <a:solidFill>
-            <a:schemeClr val="bg1"/>
-          </a:solidFill>
-          <a:ln>
-            <a:solidFill>
-              <a:schemeClr val="tx1">
-                <a:lumMod val="65000"/>
-                <a:lumOff val="35000"/>
-              </a:schemeClr>
-            </a:solidFill>
-          </a:ln>
-        </p:spPr>
-        <p:style>
-          <a:lnRef idx="1">
-            <a:schemeClr val="accent4"/>
-          </a:lnRef>
-          <a:fillRef idx="2">
-            <a:schemeClr val="accent4"/>
-          </a:fillRef>
-          <a:effectRef idx="1">
-            <a:schemeClr val="accent4"/>
-          </a:effectRef>
-          <a:fontRef idx="minor">
-            <a:schemeClr val="dk1"/>
-          </a:fontRef>
-        </p:style>
-        <p:txBody>
-          <a:bodyPr rtlCol="1" anchor="t"/>
-          <a:lstStyle/>
-          <a:p>
-            <a:pPr rtl="0"/>
-            <a:r>
-              <a:rPr lang="en-US" sz="1668" b="1">
-                <a:solidFill>
-                  <a:schemeClr val="bg1"/>
-                </a:solidFill>
-                <a:highlight>
-                  <a:srgbClr val="800080"/>
-                </a:highlight>
-              </a:rPr>
-              <a:t>P</a:t>
-            </a:r>
-          </a:p>
-          <a:p>
-            <a:pPr rtl="0"/>
-            <a:r>
-              <a:rPr lang="en-US" sz="1250" b="1"/>
-              <a:t>Projects</a:t>
-            </a:r>
-            <a:endParaRPr lang="en-US" sz="833" b="1" dirty="0"/>
-          </a:p>
-          <a:p>
-            <a:pPr rtl="0"/>
-            <a:r>
-              <a:rPr lang="en-US" sz="833" i="1">
-                <a:solidFill>
-                  <a:schemeClr val="accent5"/>
-                </a:solidFill>
-                <a:latin typeface="Segoe UI" panose="020B0502040204020203" pitchFamily="34" charset="0"/>
-                <a:cs typeface="Segoe UI" panose="020B0502040204020203" pitchFamily="34" charset="0"/>
-              </a:rPr>
-              <a:t>ProjectId</a:t>
-            </a:r>
-          </a:p>
-          <a:p>
-            <a:pPr rtl="0"/>
-            <a:r>
-              <a:rPr lang="en-US" sz="833">
-                <a:solidFill>
-                  <a:schemeClr val="tx1"/>
-                </a:solidFill>
-              </a:rPr>
-              <a:t>UserId</a:t>
-            </a:r>
-          </a:p>
-          <a:p>
-            <a:pPr rtl="0"/>
-            <a:r>
-              <a:rPr lang="en-US" sz="833">
-                <a:solidFill>
-                  <a:schemeClr val="tx1"/>
-                </a:solidFill>
-              </a:rPr>
-              <a:t>UserType</a:t>
-            </a:r>
-          </a:p>
-          <a:p>
-            <a:pPr rtl="0">
-              <a:buNone/>
-            </a:pPr>
-            <a:r>
-              <a:rPr lang="en-US" sz="586" kern="100">
-                <a:solidFill>
-                  <a:schemeClr val="tx1"/>
-                </a:solidFill>
-                <a:latin typeface="Consolas" panose="020B0609020204030204" pitchFamily="49" charset="0"/>
-                <a:ea typeface="Calibri" panose="020F0502020204030204" pitchFamily="34" charset="0"/>
-                <a:cs typeface="Calibri Light" panose="020F0302020204030204" pitchFamily="34" charset="0"/>
-              </a:rPr>
-              <a:t> 1:Teacher</a:t>
-            </a:r>
-          </a:p>
-          <a:p>
-            <a:pPr rtl="0">
-              <a:buNone/>
-            </a:pPr>
-            <a:r>
-              <a:rPr lang="en-US" sz="586" kern="100">
-                <a:solidFill>
-                  <a:schemeClr val="tx1"/>
-                </a:solidFill>
-                <a:latin typeface="Consolas" panose="020B0609020204030204" pitchFamily="49" charset="0"/>
-                <a:ea typeface="Calibri" panose="020F0502020204030204" pitchFamily="34" charset="0"/>
-                <a:cs typeface="Calibri Light" panose="020F0302020204030204" pitchFamily="34" charset="0"/>
-              </a:rPr>
-              <a:t> 2:Student</a:t>
-            </a:r>
-            <a:endParaRPr lang="en-US" sz="833" dirty="0"/>
-          </a:p>
-          <a:p>
-            <a:pPr rtl="0"/>
-            <a:r>
-              <a:rPr lang="en-US" sz="833" dirty="0" err="1"/>
-              <a:t>ProjectName</a:t>
-            </a:r>
-            <a:endParaRPr lang="en-US" sz="833" dirty="0"/>
-          </a:p>
-          <a:p>
-            <a:pPr rtl="0"/>
-            <a:r>
-              <a:rPr lang="en-US" sz="833">
-                <a:solidFill>
-                  <a:schemeClr val="tx1"/>
-                </a:solidFill>
-              </a:rPr>
-              <a:t>ProjectTags</a:t>
-            </a:r>
-          </a:p>
-          <a:p>
-            <a:pPr rtl="0"/>
-            <a:r>
-              <a:rPr lang="en-US" sz="489" kern="100">
-                <a:solidFill>
-                  <a:srgbClr val="C00000"/>
-                </a:solidFill>
-                <a:latin typeface="Consolas" panose="020B0609020204030204" pitchFamily="49" charset="0"/>
-                <a:ea typeface="Calibri" panose="020F0502020204030204" pitchFamily="34" charset="0"/>
-                <a:cs typeface="Calibri Light" panose="020F0302020204030204" pitchFamily="34" charset="0"/>
-              </a:rPr>
-              <a:t> 1:active</a:t>
-            </a:r>
-          </a:p>
-          <a:p>
-            <a:pPr rtl="0"/>
-            <a:endParaRPr lang="en-US" sz="879" kern="100">
-              <a:solidFill>
-                <a:srgbClr val="C00000"/>
-              </a:solidFill>
-              <a:latin typeface="Consolas" panose="020B0609020204030204" pitchFamily="49" charset="0"/>
-              <a:ea typeface="Calibri" panose="020F0502020204030204" pitchFamily="34" charset="0"/>
-              <a:cs typeface="Calibri Light" panose="020F0302020204030204" pitchFamily="34" charset="0"/>
-            </a:endParaRPr>
-          </a:p>
-        </p:txBody>
-      </p:sp>
-      <p:sp>
-        <p:nvSpPr>
-          <p:cNvPr id="17" name="Callout: Bent Line 16">
-            <a:extLst>
-              <a:ext uri="{FF2B5EF4-FFF2-40B4-BE49-F238E27FC236}">
-                <a16:creationId xmlns:a16="http://schemas.microsoft.com/office/drawing/2014/main" id="{036DBABA-8098-3723-D1DF-338F3424E8F5}"/>
-              </a:ext>
-            </a:extLst>
-          </p:cNvPr>
-          <p:cNvSpPr/>
-          <p:nvPr/>
-        </p:nvSpPr>
-        <p:spPr bwMode="auto">
-          <a:xfrm>
-            <a:off x="607092" y="5817468"/>
-            <a:ext cx="1079473" cy="769600"/>
-          </a:xfrm>
-          <a:prstGeom prst="borderCallout2">
-            <a:avLst>
-              <a:gd name="adj1" fmla="val -1024"/>
-              <a:gd name="adj2" fmla="val 85567"/>
-              <a:gd name="adj3" fmla="val 366"/>
-              <a:gd name="adj4" fmla="val 82159"/>
-              <a:gd name="adj5" fmla="val 180"/>
-              <a:gd name="adj6" fmla="val 85711"/>
-            </a:avLst>
-          </a:prstGeom>
-          <a:noFill/>
-          <a:ln>
-            <a:prstDash val="dash"/>
-          </a:ln>
-        </p:spPr>
-        <p:style>
-          <a:lnRef idx="2">
-            <a:schemeClr val="accent1">
-              <a:shade val="15000"/>
-            </a:schemeClr>
-          </a:lnRef>
-          <a:fillRef idx="1">
-            <a:schemeClr val="accent1"/>
-          </a:fillRef>
-          <a:effectRef idx="0">
-            <a:schemeClr val="accent1"/>
-          </a:effectRef>
-          <a:fontRef idx="minor">
-            <a:schemeClr val="lt1"/>
-          </a:fontRef>
-        </p:style>
-        <p:txBody>
-          <a:bodyPr rtlCol="1" anchor="ctr"/>
-          <a:lstStyle/>
-          <a:p>
-            <a:pPr rtl="0">
-              <a:buNone/>
-            </a:pPr>
-            <a:r>
-              <a:rPr lang="en-US" sz="489" kern="100">
-                <a:solidFill>
-                  <a:schemeClr val="tx1"/>
-                </a:solidFill>
-                <a:latin typeface="Consolas" panose="020B0609020204030204" pitchFamily="49" charset="0"/>
-                <a:ea typeface="Calibri" panose="020F0502020204030204" pitchFamily="34" charset="0"/>
-                <a:cs typeface="Calibri Light" panose="020F0302020204030204" pitchFamily="34" charset="0"/>
-              </a:rPr>
-              <a:t>ReferenceTypes:</a:t>
-            </a:r>
-          </a:p>
-          <a:p>
-            <a:pPr rtl="0">
-              <a:buNone/>
-            </a:pPr>
-            <a:r>
-              <a:rPr lang="en-US" sz="489" kern="100">
-                <a:solidFill>
-                  <a:schemeClr val="tx1"/>
-                </a:solidFill>
-                <a:latin typeface="Consolas" panose="020B0609020204030204" pitchFamily="49" charset="0"/>
-                <a:ea typeface="Calibri" panose="020F0502020204030204" pitchFamily="34" charset="0"/>
-                <a:cs typeface="Calibri Light" panose="020F0302020204030204" pitchFamily="34" charset="0"/>
-              </a:rPr>
-              <a:t> 1: S: quickNote</a:t>
-            </a:r>
-          </a:p>
-          <a:p>
-            <a:pPr rtl="0">
-              <a:buNone/>
-            </a:pPr>
-            <a:r>
-              <a:rPr lang="en-US" sz="489" kern="100">
-                <a:solidFill>
-                  <a:schemeClr val="tx1"/>
-                </a:solidFill>
-                <a:latin typeface="Consolas" panose="020B0609020204030204" pitchFamily="49" charset="0"/>
-                <a:ea typeface="Calibri" panose="020F0502020204030204" pitchFamily="34" charset="0"/>
-                <a:cs typeface="Calibri Light" panose="020F0302020204030204" pitchFamily="34" charset="0"/>
-              </a:rPr>
-              <a:t> 2: S: sectionNote</a:t>
-            </a:r>
-          </a:p>
-          <a:p>
-            <a:pPr rtl="0">
-              <a:buNone/>
-            </a:pPr>
-            <a:r>
-              <a:rPr lang="en-US" sz="489" kern="100">
-                <a:solidFill>
-                  <a:schemeClr val="tx1"/>
-                </a:solidFill>
-                <a:latin typeface="Consolas" panose="020B0609020204030204" pitchFamily="49" charset="0"/>
-                <a:ea typeface="Calibri" panose="020F0502020204030204" pitchFamily="34" charset="0"/>
-                <a:cs typeface="Calibri Light" panose="020F0302020204030204" pitchFamily="34" charset="0"/>
-              </a:rPr>
-              <a:t>11: T: quickNote</a:t>
-            </a:r>
-          </a:p>
-          <a:p>
-            <a:pPr rtl="0">
-              <a:buNone/>
-            </a:pPr>
-            <a:r>
-              <a:rPr lang="en-US" sz="489" kern="100">
-                <a:solidFill>
-                  <a:schemeClr val="tx1"/>
-                </a:solidFill>
-                <a:latin typeface="Consolas" panose="020B0609020204030204" pitchFamily="49" charset="0"/>
-                <a:ea typeface="Calibri" panose="020F0502020204030204" pitchFamily="34" charset="0"/>
-                <a:cs typeface="Calibri Light" panose="020F0302020204030204" pitchFamily="34" charset="0"/>
-              </a:rPr>
-              <a:t>12: T: sectionNote</a:t>
-            </a:r>
-          </a:p>
-          <a:p>
-            <a:pPr rtl="0">
-              <a:buNone/>
-            </a:pPr>
-            <a:r>
-              <a:rPr lang="en-US" sz="489" kern="100">
-                <a:solidFill>
-                  <a:schemeClr val="tx1"/>
-                </a:solidFill>
-                <a:latin typeface="Consolas" panose="020B0609020204030204" pitchFamily="49" charset="0"/>
-                <a:ea typeface="Calibri" panose="020F0502020204030204" pitchFamily="34" charset="0"/>
-                <a:cs typeface="Calibri Light" panose="020F0302020204030204" pitchFamily="34" charset="0"/>
-              </a:rPr>
-              <a:t>13: T: note on Student</a:t>
-            </a:r>
-          </a:p>
-          <a:p>
-            <a:pPr rtl="0">
-              <a:buNone/>
-            </a:pPr>
-            <a:r>
-              <a:rPr lang="en-US" sz="489" kern="100">
-                <a:solidFill>
-                  <a:schemeClr val="tx1"/>
-                </a:solidFill>
-                <a:latin typeface="Consolas" panose="020B0609020204030204" pitchFamily="49" charset="0"/>
-                <a:ea typeface="Calibri" panose="020F0502020204030204" pitchFamily="34" charset="0"/>
-                <a:cs typeface="Calibri Light" panose="020F0302020204030204" pitchFamily="34" charset="0"/>
-              </a:rPr>
-              <a:t>14: T: note on Group</a:t>
-            </a:r>
-          </a:p>
-          <a:p>
-            <a:pPr rtl="0">
-              <a:buNone/>
-            </a:pPr>
-            <a:r>
-              <a:rPr lang="en-US" sz="489" kern="100">
-                <a:solidFill>
-                  <a:schemeClr val="tx1"/>
-                </a:solidFill>
-                <a:latin typeface="Consolas" panose="020B0609020204030204" pitchFamily="49" charset="0"/>
-                <a:ea typeface="Calibri" panose="020F0502020204030204" pitchFamily="34" charset="0"/>
-                <a:cs typeface="Calibri Light" panose="020F0302020204030204" pitchFamily="34" charset="0"/>
-              </a:rPr>
-              <a:t>15: T: note on Course</a:t>
-            </a:r>
-          </a:p>
-          <a:p>
-            <a:pPr rtl="0">
-              <a:buNone/>
-            </a:pPr>
-            <a:r>
-              <a:rPr lang="en-US" sz="489" kern="100">
-                <a:solidFill>
-                  <a:schemeClr val="tx1"/>
-                </a:solidFill>
-                <a:latin typeface="Consolas" panose="020B0609020204030204" pitchFamily="49" charset="0"/>
-                <a:ea typeface="Calibri" panose="020F0502020204030204" pitchFamily="34" charset="0"/>
-                <a:cs typeface="Calibri Light" panose="020F0302020204030204" pitchFamily="34" charset="0"/>
-              </a:rPr>
-              <a:t>16: T: note on Exam</a:t>
-            </a:r>
-          </a:p>
-          <a:p>
-            <a:pPr rtl="0">
-              <a:buNone/>
-            </a:pPr>
-            <a:r>
-              <a:rPr lang="en-US" sz="489" kern="100">
-                <a:solidFill>
-                  <a:schemeClr val="tx1"/>
-                </a:solidFill>
-                <a:latin typeface="Consolas" panose="020B0609020204030204" pitchFamily="49" charset="0"/>
-                <a:ea typeface="Calibri" panose="020F0502020204030204" pitchFamily="34" charset="0"/>
-                <a:cs typeface="Calibri Light" panose="020F0302020204030204" pitchFamily="34" charset="0"/>
-              </a:rPr>
-              <a:t>17: T: note on StudentExam</a:t>
-            </a:r>
-          </a:p>
-        </p:txBody>
-      </p:sp>
-      <p:sp>
-        <p:nvSpPr>
-          <p:cNvPr id="18" name="Rectangle: Rounded Corners 45">
-            <a:extLst>
-              <a:ext uri="{FF2B5EF4-FFF2-40B4-BE49-F238E27FC236}">
-                <a16:creationId xmlns:a16="http://schemas.microsoft.com/office/drawing/2014/main" id="{FF1496B2-A7C1-710C-2968-39CD589C844E}"/>
-              </a:ext>
-            </a:extLst>
-          </p:cNvPr>
-          <p:cNvSpPr/>
-          <p:nvPr/>
-        </p:nvSpPr>
-        <p:spPr bwMode="auto">
-          <a:xfrm>
-            <a:off x="-497265" y="1090592"/>
-            <a:ext cx="1079702" cy="1672986"/>
-          </a:xfrm>
-          <a:prstGeom prst="roundRect">
-            <a:avLst>
-              <a:gd name="adj" fmla="val 8076"/>
-            </a:avLst>
-          </a:prstGeom>
-          <a:solidFill>
-            <a:schemeClr val="bg1"/>
-          </a:solidFill>
-          <a:ln w="28575">
-            <a:solidFill>
-              <a:schemeClr val="tx1"/>
-            </a:solidFill>
-            <a:prstDash val="solid"/>
-          </a:ln>
-          <a:effectLst/>
-        </p:spPr>
-        <p:style>
-          <a:lnRef idx="0">
-            <a:schemeClr val="accent4"/>
-          </a:lnRef>
-          <a:fillRef idx="3">
-            <a:schemeClr val="accent4"/>
-          </a:fillRef>
-          <a:effectRef idx="3">
-            <a:schemeClr val="accent4"/>
-          </a:effectRef>
-          <a:fontRef idx="minor">
-            <a:schemeClr val="lt1"/>
-          </a:fontRef>
-        </p:style>
-        <p:txBody>
-          <a:bodyPr rtlCol="1" anchor="ctr"/>
-          <a:lstStyle/>
-          <a:p>
-            <a:pPr algn="l" rtl="0">
-              <a:defRPr/>
-            </a:pPr>
-            <a:r>
-              <a:rPr lang="en-US" sz="1668" b="1">
-                <a:solidFill>
-                  <a:schemeClr val="bg1"/>
-                </a:solidFill>
-                <a:highlight>
-                  <a:srgbClr val="800080"/>
-                </a:highlight>
-                <a:latin typeface="Segoe UI" panose="020B0502040204020203" pitchFamily="34" charset="0"/>
-                <a:cs typeface="Segoe UI" panose="020B0502040204020203" pitchFamily="34" charset="0"/>
-              </a:rPr>
-              <a:t>CH</a:t>
-            </a:r>
-          </a:p>
-          <a:p>
-            <a:pPr rtl="0">
-              <a:defRPr/>
-            </a:pPr>
-            <a:r>
-              <a:rPr lang="en-US" sz="1250" b="1">
-                <a:solidFill>
-                  <a:schemeClr val="tx1"/>
-                </a:solidFill>
-                <a:latin typeface="Segoe UI" panose="020B0502040204020203" pitchFamily="34" charset="0"/>
-                <a:cs typeface="Segoe UI" panose="020B0502040204020203" pitchFamily="34" charset="0"/>
-              </a:rPr>
-              <a:t>Chats</a:t>
-            </a:r>
-            <a:endParaRPr sz="1250">
-              <a:solidFill>
-                <a:schemeClr val="tx1"/>
-              </a:solidFill>
-              <a:latin typeface="Segoe UI" panose="020B0502040204020203" pitchFamily="34" charset="0"/>
-              <a:cs typeface="Segoe UI" panose="020B0502040204020203" pitchFamily="34" charset="0"/>
-            </a:endParaRPr>
-          </a:p>
-          <a:p>
-            <a:pPr rtl="0">
-              <a:defRPr/>
-            </a:pPr>
-            <a:r>
-              <a:rPr lang="en-US" sz="833" i="1">
-                <a:solidFill>
-                  <a:schemeClr val="accent5"/>
-                </a:solidFill>
-                <a:latin typeface="Segoe UI" panose="020B0502040204020203" pitchFamily="34" charset="0"/>
-                <a:cs typeface="Segoe UI" panose="020B0502040204020203" pitchFamily="34" charset="0"/>
-              </a:rPr>
-              <a:t>ChatId</a:t>
-            </a:r>
-          </a:p>
-          <a:p>
-            <a:pPr rtl="0">
-              <a:defRPr/>
-            </a:pPr>
-            <a:r>
-              <a:rPr lang="en-US" sz="833">
-                <a:solidFill>
-                  <a:schemeClr val="tx1"/>
-                </a:solidFill>
-                <a:latin typeface="Segoe UI" panose="020B0502040204020203" pitchFamily="34" charset="0"/>
-                <a:cs typeface="Segoe UI" panose="020B0502040204020203" pitchFamily="34" charset="0"/>
-              </a:rPr>
-              <a:t>FromId</a:t>
-            </a:r>
-          </a:p>
-          <a:p>
-            <a:pPr rtl="0">
-              <a:defRPr/>
-            </a:pPr>
-            <a:r>
-              <a:rPr lang="en-US" sz="833">
-                <a:solidFill>
-                  <a:schemeClr val="tx1"/>
-                </a:solidFill>
-                <a:latin typeface="Segoe UI" panose="020B0502040204020203" pitchFamily="34" charset="0"/>
-                <a:cs typeface="Segoe UI" panose="020B0502040204020203" pitchFamily="34" charset="0"/>
-              </a:rPr>
-              <a:t>ToId</a:t>
-            </a:r>
-          </a:p>
-          <a:p>
-            <a:pPr rtl="0">
-              <a:defRPr/>
-            </a:pPr>
-            <a:r>
-              <a:rPr lang="en-US" sz="833">
-                <a:solidFill>
-                  <a:schemeClr val="tx1"/>
-                </a:solidFill>
-                <a:latin typeface="Segoe UI" panose="020B0502040204020203" pitchFamily="34" charset="0"/>
-                <a:cs typeface="Segoe UI" panose="020B0502040204020203" pitchFamily="34" charset="0"/>
-              </a:rPr>
-              <a:t>DateTimeSent</a:t>
-            </a:r>
-          </a:p>
-          <a:p>
-            <a:pPr rtl="0">
-              <a:defRPr/>
-            </a:pPr>
-            <a:r>
-              <a:rPr lang="en-US" sz="833">
-                <a:solidFill>
-                  <a:schemeClr val="tx1"/>
-                </a:solidFill>
-                <a:latin typeface="Segoe UI" panose="020B0502040204020203" pitchFamily="34" charset="0"/>
-                <a:cs typeface="Segoe UI" panose="020B0502040204020203" pitchFamily="34" charset="0"/>
-              </a:rPr>
-              <a:t>ChatText</a:t>
-            </a:r>
-          </a:p>
-          <a:p>
-            <a:pPr rtl="0">
-              <a:defRPr/>
-            </a:pPr>
-            <a:r>
-              <a:rPr lang="en-US" sz="833">
-                <a:solidFill>
-                  <a:schemeClr val="tx1"/>
-                </a:solidFill>
-                <a:latin typeface="Segoe UI" panose="020B0502040204020203" pitchFamily="34" charset="0"/>
-                <a:cs typeface="Segoe UI" panose="020B0502040204020203" pitchFamily="34" charset="0"/>
-              </a:rPr>
-              <a:t>ChatTags</a:t>
-            </a:r>
-          </a:p>
-          <a:p>
-            <a:pPr rtl="0">
-              <a:defRPr/>
-            </a:pPr>
-            <a:r>
-              <a:rPr lang="en-US" sz="586" kern="100">
-                <a:solidFill>
-                  <a:schemeClr val="tx1"/>
-                </a:solidFill>
-                <a:latin typeface="Consolas" panose="020B0609020204030204" pitchFamily="49" charset="0"/>
-                <a:ea typeface="Calibri" panose="020F0502020204030204" pitchFamily="34" charset="0"/>
-                <a:cs typeface="Calibri Light" panose="020F0302020204030204" pitchFamily="34" charset="0"/>
-              </a:rPr>
-              <a:t>1:Read </a:t>
-            </a:r>
-          </a:p>
-          <a:p>
-            <a:pPr rtl="0">
-              <a:defRPr/>
-            </a:pPr>
-            <a:r>
-              <a:rPr lang="en-US" sz="586" kern="100">
-                <a:solidFill>
-                  <a:schemeClr val="tx1"/>
-                </a:solidFill>
-                <a:latin typeface="Consolas" panose="020B0609020204030204" pitchFamily="49" charset="0"/>
-                <a:ea typeface="Calibri" panose="020F0502020204030204" pitchFamily="34" charset="0"/>
-                <a:cs typeface="Calibri Light" panose="020F0302020204030204" pitchFamily="34" charset="0"/>
-              </a:rPr>
-              <a:t>2:Imp </a:t>
-            </a:r>
-          </a:p>
-          <a:p>
-            <a:pPr rtl="0">
-              <a:defRPr/>
-            </a:pPr>
-            <a:r>
-              <a:rPr lang="en-US" sz="586" kern="100">
-                <a:solidFill>
-                  <a:schemeClr val="tx1"/>
-                </a:solidFill>
-                <a:latin typeface="Consolas" panose="020B0609020204030204" pitchFamily="49" charset="0"/>
-                <a:ea typeface="Calibri" panose="020F0502020204030204" pitchFamily="34" charset="0"/>
-                <a:cs typeface="Calibri Light" panose="020F0302020204030204" pitchFamily="34" charset="0"/>
-              </a:rPr>
-              <a:t>3:Bookmark </a:t>
-            </a:r>
-          </a:p>
-          <a:p>
-            <a:pPr rtl="0">
-              <a:defRPr/>
-            </a:pPr>
-            <a:r>
-              <a:rPr lang="en-US" sz="586" kern="100">
-                <a:solidFill>
-                  <a:schemeClr val="tx1"/>
-                </a:solidFill>
-                <a:latin typeface="Consolas" panose="020B0609020204030204" pitchFamily="49" charset="0"/>
-                <a:ea typeface="Calibri" panose="020F0502020204030204" pitchFamily="34" charset="0"/>
-                <a:cs typeface="Calibri Light" panose="020F0302020204030204" pitchFamily="34" charset="0"/>
-              </a:rPr>
-              <a:t>4:Del</a:t>
-            </a:r>
-          </a:p>
-        </p:txBody>
-      </p:sp>
-      <p:sp>
-        <p:nvSpPr>
-          <p:cNvPr id="28" name="Rectangle: Rounded Corners 44">
-            <a:extLst>
-              <a:ext uri="{FF2B5EF4-FFF2-40B4-BE49-F238E27FC236}">
-                <a16:creationId xmlns:a16="http://schemas.microsoft.com/office/drawing/2014/main" id="{5CB68046-6471-616A-4602-D5045CAF1D61}"/>
-              </a:ext>
-            </a:extLst>
-          </p:cNvPr>
-          <p:cNvSpPr/>
-          <p:nvPr/>
-        </p:nvSpPr>
-        <p:spPr bwMode="auto">
-          <a:xfrm>
-            <a:off x="-533524" y="-650724"/>
-            <a:ext cx="1433087" cy="1604417"/>
-          </a:xfrm>
-          <a:prstGeom prst="roundRect">
-            <a:avLst>
-              <a:gd name="adj" fmla="val 6742"/>
-            </a:avLst>
-          </a:prstGeom>
-          <a:solidFill>
-            <a:schemeClr val="bg1"/>
-          </a:solidFill>
-          <a:ln>
-            <a:solidFill>
-              <a:schemeClr val="tx1"/>
-            </a:solidFill>
-          </a:ln>
-          <a:effectLst/>
-        </p:spPr>
-        <p:style>
-          <a:lnRef idx="0">
-            <a:schemeClr val="accent4"/>
-          </a:lnRef>
-          <a:fillRef idx="3">
-            <a:schemeClr val="accent4"/>
-          </a:fillRef>
-          <a:effectRef idx="3">
-            <a:schemeClr val="accent4"/>
-          </a:effectRef>
-          <a:fontRef idx="minor">
-            <a:schemeClr val="lt1"/>
-          </a:fontRef>
-        </p:style>
-        <p:txBody>
-          <a:bodyPr rtlCol="1" anchor="ctr"/>
-          <a:lstStyle/>
-          <a:p>
-            <a:pPr rtl="0">
-              <a:defRPr/>
-            </a:pPr>
-            <a:r>
-              <a:rPr lang="en-US" sz="1668" b="1">
-                <a:solidFill>
-                  <a:schemeClr val="bg1"/>
-                </a:solidFill>
-                <a:highlight>
-                  <a:srgbClr val="800080"/>
-                </a:highlight>
-                <a:latin typeface="Segoe UI" panose="020B0502040204020203" pitchFamily="34" charset="0"/>
-                <a:cs typeface="Segoe UI" panose="020B0502040204020203" pitchFamily="34" charset="0"/>
-              </a:rPr>
-              <a:t>CHRP</a:t>
-            </a:r>
-          </a:p>
-          <a:p>
-            <a:pPr rtl="0">
-              <a:defRPr/>
-            </a:pPr>
-            <a:r>
-              <a:rPr lang="en-US" sz="1250" b="1">
-                <a:solidFill>
-                  <a:schemeClr val="tx1"/>
-                </a:solidFill>
-                <a:latin typeface="Segoe UI" panose="020B0502040204020203" pitchFamily="34" charset="0"/>
-                <a:cs typeface="Segoe UI" panose="020B0502040204020203" pitchFamily="34" charset="0"/>
-              </a:rPr>
-              <a:t>ChatroomPosts</a:t>
-            </a:r>
-            <a:endParaRPr sz="1250">
-              <a:solidFill>
-                <a:schemeClr val="tx1"/>
-              </a:solidFill>
-              <a:latin typeface="Segoe UI" panose="020B0502040204020203" pitchFamily="34" charset="0"/>
-              <a:cs typeface="Segoe UI" panose="020B0502040204020203" pitchFamily="34" charset="0"/>
-            </a:endParaRPr>
-          </a:p>
-          <a:p>
-            <a:pPr rtl="0">
-              <a:defRPr/>
-            </a:pPr>
-            <a:r>
-              <a:rPr lang="en-US" sz="833" i="1">
-                <a:solidFill>
-                  <a:schemeClr val="accent5"/>
-                </a:solidFill>
-                <a:latin typeface="Segoe UI" panose="020B0502040204020203" pitchFamily="34" charset="0"/>
-                <a:cs typeface="Segoe UI" panose="020B0502040204020203" pitchFamily="34" charset="0"/>
-              </a:rPr>
-              <a:t>ChatroomPostId</a:t>
-            </a:r>
-          </a:p>
-          <a:p>
-            <a:pPr rtl="0">
-              <a:defRPr/>
-            </a:pPr>
-            <a:r>
-              <a:rPr lang="en-US" sz="833">
-                <a:solidFill>
-                  <a:schemeClr val="tx1"/>
-                </a:solidFill>
-                <a:latin typeface="Segoe UI" panose="020B0502040204020203" pitchFamily="34" charset="0"/>
-                <a:cs typeface="Segoe UI" panose="020B0502040204020203" pitchFamily="34" charset="0"/>
-              </a:rPr>
-              <a:t>ChatroomId</a:t>
-            </a:r>
-          </a:p>
-          <a:p>
-            <a:pPr rtl="0">
-              <a:defRPr/>
-            </a:pPr>
-            <a:r>
-              <a:rPr lang="en-US" sz="833">
-                <a:solidFill>
-                  <a:schemeClr val="tx1"/>
-                </a:solidFill>
-                <a:latin typeface="Segoe UI" panose="020B0502040204020203" pitchFamily="34" charset="0"/>
-                <a:cs typeface="Segoe UI" panose="020B0502040204020203" pitchFamily="34" charset="0"/>
-              </a:rPr>
-              <a:t>SenderId</a:t>
-            </a:r>
-          </a:p>
-          <a:p>
-            <a:pPr rtl="0">
-              <a:defRPr/>
-            </a:pPr>
-            <a:r>
-              <a:rPr lang="en-US" sz="833">
-                <a:solidFill>
-                  <a:schemeClr val="tx1"/>
-                </a:solidFill>
-                <a:latin typeface="Segoe UI" panose="020B0502040204020203" pitchFamily="34" charset="0"/>
-                <a:cs typeface="Segoe UI" panose="020B0502040204020203" pitchFamily="34" charset="0"/>
-              </a:rPr>
-              <a:t>PostDateTime</a:t>
-            </a:r>
-          </a:p>
-          <a:p>
-            <a:pPr rtl="0">
-              <a:defRPr/>
-            </a:pPr>
-            <a:r>
-              <a:rPr lang="en-US" sz="833">
-                <a:solidFill>
-                  <a:schemeClr val="tx1"/>
-                </a:solidFill>
-                <a:latin typeface="Segoe UI" panose="020B0502040204020203" pitchFamily="34" charset="0"/>
-                <a:cs typeface="Segoe UI" panose="020B0502040204020203" pitchFamily="34" charset="0"/>
-              </a:rPr>
-              <a:t>PostText</a:t>
-            </a:r>
-          </a:p>
-          <a:p>
-            <a:pPr rtl="0">
-              <a:defRPr/>
-            </a:pPr>
-            <a:r>
-              <a:rPr lang="en-US" sz="833">
-                <a:solidFill>
-                  <a:schemeClr val="tx1"/>
-                </a:solidFill>
-                <a:latin typeface="Segoe UI" panose="020B0502040204020203" pitchFamily="34" charset="0"/>
-                <a:cs typeface="Segoe UI" panose="020B0502040204020203" pitchFamily="34" charset="0"/>
-              </a:rPr>
-              <a:t>PostTags</a:t>
-            </a:r>
-          </a:p>
-          <a:p>
-            <a:pPr rtl="0">
-              <a:defRPr/>
-            </a:pPr>
-            <a:r>
-              <a:rPr lang="en-US" sz="489">
-                <a:solidFill>
-                  <a:srgbClr val="C00000"/>
-                </a:solidFill>
-                <a:latin typeface="Segoe UI" panose="020B0502040204020203" pitchFamily="34" charset="0"/>
-                <a:cs typeface="Segoe UI" panose="020B0502040204020203" pitchFamily="34" charset="0"/>
-              </a:rPr>
-              <a:t>  1:NeedReply</a:t>
-            </a:r>
-          </a:p>
-          <a:p>
-            <a:pPr rtl="0">
-              <a:defRPr/>
-            </a:pPr>
-            <a:r>
-              <a:rPr lang="en-US" sz="489">
-                <a:solidFill>
-                  <a:srgbClr val="C00000"/>
-                </a:solidFill>
-                <a:latin typeface="Segoe UI" panose="020B0502040204020203" pitchFamily="34" charset="0"/>
-                <a:cs typeface="Segoe UI" panose="020B0502040204020203" pitchFamily="34" charset="0"/>
-              </a:rPr>
-              <a:t>  2:IsEdited</a:t>
-            </a:r>
-          </a:p>
-          <a:p>
-            <a:pPr rtl="0">
-              <a:defRPr/>
-            </a:pPr>
-            <a:r>
-              <a:rPr lang="en-US" sz="489">
-                <a:solidFill>
-                  <a:srgbClr val="C00000"/>
-                </a:solidFill>
-                <a:latin typeface="Segoe UI" panose="020B0502040204020203" pitchFamily="34" charset="0"/>
-                <a:cs typeface="Segoe UI" panose="020B0502040204020203" pitchFamily="34" charset="0"/>
-              </a:rPr>
-              <a:t>  4:IsDeleted</a:t>
-            </a:r>
-          </a:p>
-        </p:txBody>
-      </p:sp>
-      <p:sp>
-        <p:nvSpPr>
-          <p:cNvPr id="2" name="Rectangle: Rounded Corners 1">
-            <a:extLst>
-              <a:ext uri="{FF2B5EF4-FFF2-40B4-BE49-F238E27FC236}">
-                <a16:creationId xmlns:a16="http://schemas.microsoft.com/office/drawing/2014/main" id="{3DB0D01E-A5B5-806E-1D05-08573C6E42D6}"/>
-              </a:ext>
-            </a:extLst>
-          </p:cNvPr>
-          <p:cNvSpPr/>
-          <p:nvPr/>
-        </p:nvSpPr>
-        <p:spPr>
-          <a:xfrm>
-            <a:off x="-537461" y="5539203"/>
-            <a:ext cx="1079473" cy="1930181"/>
-          </a:xfrm>
-          <a:prstGeom prst="roundRect">
-            <a:avLst>
-              <a:gd name="adj" fmla="val 1266"/>
-            </a:avLst>
-          </a:prstGeom>
-          <a:solidFill>
-            <a:schemeClr val="bg1"/>
-          </a:solidFill>
-          <a:ln>
-            <a:solidFill>
-              <a:schemeClr val="tx1">
-                <a:lumMod val="65000"/>
-                <a:lumOff val="35000"/>
-              </a:schemeClr>
-            </a:solidFill>
-          </a:ln>
-        </p:spPr>
-        <p:style>
-          <a:lnRef idx="1">
-            <a:schemeClr val="accent4"/>
-          </a:lnRef>
-          <a:fillRef idx="2">
-            <a:schemeClr val="accent4"/>
-          </a:fillRef>
-          <a:effectRef idx="1">
-            <a:schemeClr val="accent4"/>
-          </a:effectRef>
-          <a:fontRef idx="minor">
-            <a:schemeClr val="dk1"/>
-          </a:fontRef>
-        </p:style>
-        <p:txBody>
-          <a:bodyPr rtlCol="1" anchor="t"/>
-          <a:lstStyle/>
-          <a:p>
-            <a:pPr rtl="0"/>
-            <a:r>
-              <a:rPr lang="en-US" sz="1668" b="1">
-                <a:solidFill>
-                  <a:schemeClr val="bg1"/>
-                </a:solidFill>
-                <a:highlight>
-                  <a:srgbClr val="800080"/>
-                </a:highlight>
-              </a:rPr>
-              <a:t>N</a:t>
-            </a:r>
-          </a:p>
-          <a:p>
-            <a:pPr rtl="0"/>
-            <a:r>
-              <a:rPr lang="en-US" sz="1250" b="1"/>
-              <a:t>Notes</a:t>
-            </a:r>
-            <a:endParaRPr lang="en-US" sz="1250" b="1" dirty="0"/>
-          </a:p>
-          <a:p>
-            <a:pPr rtl="0"/>
-            <a:r>
-              <a:rPr lang="en-US" sz="833" i="1">
-                <a:solidFill>
-                  <a:schemeClr val="accent5"/>
-                </a:solidFill>
-                <a:latin typeface="Segoe UI" panose="020B0502040204020203" pitchFamily="34" charset="0"/>
-                <a:cs typeface="Segoe UI" panose="020B0502040204020203" pitchFamily="34" charset="0"/>
-              </a:rPr>
-              <a:t>NoteId</a:t>
-            </a:r>
-          </a:p>
-          <a:p>
-            <a:pPr rtl="0"/>
-            <a:r>
-              <a:rPr lang="en-US" sz="833"/>
-              <a:t>ReferenceId</a:t>
-            </a:r>
-          </a:p>
-          <a:p>
-            <a:pPr rtl="0"/>
-            <a:r>
-              <a:rPr lang="en-US" sz="833"/>
-              <a:t>ReferenceType</a:t>
-            </a:r>
-          </a:p>
-          <a:p>
-            <a:pPr rtl="0"/>
-            <a:r>
-              <a:rPr lang="en-US" sz="833"/>
-              <a:t>NoteDateTime</a:t>
-            </a:r>
-          </a:p>
-          <a:p>
-            <a:pPr rtl="0"/>
-            <a:r>
-              <a:rPr lang="en-US" sz="833"/>
-              <a:t>NoteDueDateTime</a:t>
-            </a:r>
-            <a:endParaRPr lang="en-US" sz="833" dirty="0"/>
-          </a:p>
-          <a:p>
-            <a:pPr rtl="0"/>
-            <a:r>
-              <a:rPr lang="en-US" sz="833"/>
-              <a:t>NoteText</a:t>
-            </a:r>
-            <a:endParaRPr lang="en-US" sz="833" dirty="0"/>
-          </a:p>
-          <a:p>
-            <a:pPr rtl="0"/>
-            <a:r>
-              <a:rPr lang="en-US" sz="833">
-                <a:solidFill>
-                  <a:schemeClr val="tx1"/>
-                </a:solidFill>
-              </a:rPr>
-              <a:t>CreatorId</a:t>
-            </a:r>
-            <a:endParaRPr lang="fa-IR" sz="833">
-              <a:solidFill>
-                <a:schemeClr val="tx1"/>
-              </a:solidFill>
-            </a:endParaRPr>
-          </a:p>
-          <a:p>
-            <a:pPr rtl="0"/>
-            <a:r>
-              <a:rPr lang="en-US" sz="833">
-                <a:solidFill>
-                  <a:schemeClr val="tx1"/>
-                </a:solidFill>
-              </a:rPr>
-              <a:t>NoteTags</a:t>
-            </a:r>
-          </a:p>
-          <a:p>
-            <a:pPr rtl="0">
-              <a:buNone/>
-            </a:pPr>
-            <a:r>
-              <a:rPr lang="en-US" sz="489" kern="100">
-                <a:solidFill>
-                  <a:srgbClr val="C00000"/>
-                </a:solidFill>
-                <a:latin typeface="Consolas" panose="020B0609020204030204" pitchFamily="49" charset="0"/>
-                <a:ea typeface="Calibri" panose="020F0502020204030204" pitchFamily="34" charset="0"/>
-                <a:cs typeface="Calibri Light" panose="020F0302020204030204" pitchFamily="34" charset="0"/>
-              </a:rPr>
-              <a:t> 1:IsRtl</a:t>
-            </a:r>
-          </a:p>
-          <a:p>
-            <a:pPr rtl="0"/>
-            <a:r>
-              <a:rPr lang="en-US" sz="489" kern="100">
-                <a:solidFill>
-                  <a:srgbClr val="C00000"/>
-                </a:solidFill>
-                <a:latin typeface="Consolas" panose="020B0609020204030204" pitchFamily="49" charset="0"/>
-                <a:ea typeface="Calibri" panose="020F0502020204030204" pitchFamily="34" charset="0"/>
-                <a:cs typeface="Calibri Light" panose="020F0302020204030204" pitchFamily="34" charset="0"/>
-              </a:rPr>
-              <a:t> 2:IsTodo</a:t>
-            </a:r>
-          </a:p>
-          <a:p>
-            <a:pPr rtl="0">
-              <a:buNone/>
-            </a:pPr>
-            <a:r>
-              <a:rPr lang="en-US" sz="489" kern="100">
-                <a:solidFill>
-                  <a:srgbClr val="C00000"/>
-                </a:solidFill>
-                <a:latin typeface="Consolas" panose="020B0609020204030204" pitchFamily="49" charset="0"/>
-                <a:ea typeface="Calibri" panose="020F0502020204030204" pitchFamily="34" charset="0"/>
-                <a:cs typeface="Calibri Light" panose="020F0302020204030204" pitchFamily="34" charset="0"/>
-              </a:rPr>
-              <a:t> 4:IsDone</a:t>
-            </a:r>
-          </a:p>
-          <a:p>
-            <a:pPr rtl="0">
-              <a:buNone/>
-            </a:pPr>
-            <a:r>
-              <a:rPr lang="en-US" sz="489" kern="100">
-                <a:solidFill>
-                  <a:srgbClr val="C00000"/>
-                </a:solidFill>
-                <a:latin typeface="Consolas" panose="020B0609020204030204" pitchFamily="49" charset="0"/>
-                <a:ea typeface="Calibri" panose="020F0502020204030204" pitchFamily="34" charset="0"/>
-                <a:cs typeface="Calibri Light" panose="020F0302020204030204" pitchFamily="34" charset="0"/>
-              </a:rPr>
-              <a:t> 8:IsShared</a:t>
-            </a:r>
-          </a:p>
-          <a:p>
-            <a:pPr rtl="0">
-              <a:buNone/>
-            </a:pPr>
-            <a:r>
-              <a:rPr lang="en-US" sz="489" kern="100">
-                <a:solidFill>
-                  <a:srgbClr val="C00000"/>
-                </a:solidFill>
-                <a:latin typeface="Consolas" panose="020B0609020204030204" pitchFamily="49" charset="0"/>
-                <a:ea typeface="Calibri" panose="020F0502020204030204" pitchFamily="34" charset="0"/>
-                <a:cs typeface="Calibri Light" panose="020F0302020204030204" pitchFamily="34" charset="0"/>
-              </a:rPr>
-              <a:t>16:IsReadonly</a:t>
-            </a:r>
-          </a:p>
-        </p:txBody>
-      </p:sp>
-      <p:sp>
-        <p:nvSpPr>
-          <p:cNvPr id="3" name="Rectangle: Rounded Corners 2">
-            <a:extLst>
-              <a:ext uri="{FF2B5EF4-FFF2-40B4-BE49-F238E27FC236}">
-                <a16:creationId xmlns:a16="http://schemas.microsoft.com/office/drawing/2014/main" id="{90E5F9E9-151A-3EA1-A2C5-2F6B34E06681}"/>
-              </a:ext>
-            </a:extLst>
-          </p:cNvPr>
-          <p:cNvSpPr/>
-          <p:nvPr/>
-        </p:nvSpPr>
-        <p:spPr>
-          <a:xfrm>
-            <a:off x="350016" y="6733297"/>
-            <a:ext cx="932614" cy="879690"/>
-          </a:xfrm>
-          <a:prstGeom prst="roundRect">
-            <a:avLst>
-              <a:gd name="adj" fmla="val 4805"/>
-            </a:avLst>
-          </a:prstGeom>
-          <a:solidFill>
-            <a:schemeClr val="bg1"/>
-          </a:solidFill>
-          <a:ln>
-            <a:solidFill>
-              <a:schemeClr val="tx1">
-                <a:lumMod val="65000"/>
-                <a:lumOff val="35000"/>
-              </a:schemeClr>
-            </a:solidFill>
-          </a:ln>
-        </p:spPr>
-        <p:style>
-          <a:lnRef idx="1">
-            <a:schemeClr val="accent4"/>
-          </a:lnRef>
-          <a:fillRef idx="2">
-            <a:schemeClr val="accent4"/>
-          </a:fillRef>
-          <a:effectRef idx="1">
-            <a:schemeClr val="accent4"/>
-          </a:effectRef>
-          <a:fontRef idx="minor">
-            <a:schemeClr val="dk1"/>
-          </a:fontRef>
-        </p:style>
-        <p:txBody>
-          <a:bodyPr rtlCol="1" anchor="t"/>
-          <a:lstStyle/>
-          <a:p>
-            <a:pPr rtl="0"/>
-            <a:r>
-              <a:rPr lang="en-US" sz="1668" b="1">
-                <a:solidFill>
-                  <a:schemeClr val="bg1"/>
-                </a:solidFill>
-                <a:highlight>
-                  <a:srgbClr val="800080"/>
-                </a:highlight>
-              </a:rPr>
-              <a:t>NN</a:t>
-            </a:r>
-          </a:p>
-          <a:p>
-            <a:pPr rtl="0"/>
-            <a:r>
-              <a:rPr lang="en-US" sz="1250" b="1"/>
-              <a:t>NoteNet</a:t>
-            </a:r>
-            <a:endParaRPr lang="en-US" sz="1250" b="1" dirty="0"/>
-          </a:p>
-          <a:p>
-            <a:pPr rtl="0"/>
-            <a:r>
-              <a:rPr lang="en-US" sz="833" i="1">
-                <a:solidFill>
-                  <a:schemeClr val="accent5"/>
-                </a:solidFill>
-                <a:latin typeface="Segoe UI" panose="020B0502040204020203" pitchFamily="34" charset="0"/>
-                <a:cs typeface="Segoe UI" panose="020B0502040204020203" pitchFamily="34" charset="0"/>
-              </a:rPr>
-              <a:t>NoteNetId</a:t>
-            </a:r>
-            <a:endParaRPr lang="en-US" sz="833" i="1" dirty="0">
-              <a:solidFill>
-                <a:schemeClr val="accent5"/>
-              </a:solidFill>
-              <a:latin typeface="Segoe UI" panose="020B0502040204020203" pitchFamily="34" charset="0"/>
-              <a:cs typeface="Segoe UI" panose="020B0502040204020203" pitchFamily="34" charset="0"/>
-            </a:endParaRPr>
-          </a:p>
-          <a:p>
-            <a:pPr rtl="0"/>
-            <a:r>
-              <a:rPr lang="en-US" sz="833"/>
-              <a:t>NoteAId</a:t>
-            </a:r>
-          </a:p>
-          <a:p>
-            <a:pPr rtl="0"/>
-            <a:r>
-              <a:rPr lang="en-US" sz="833"/>
-              <a:t>NoteBId</a:t>
-            </a:r>
-            <a:endParaRPr lang="en-US" sz="833" dirty="0"/>
-          </a:p>
-        </p:txBody>
-      </p:sp>
-      <p:sp>
-        <p:nvSpPr>
-          <p:cNvPr id="25" name="Rectangle: Rounded Corners 44">
-            <a:extLst>
-              <a:ext uri="{FF2B5EF4-FFF2-40B4-BE49-F238E27FC236}">
-                <a16:creationId xmlns:a16="http://schemas.microsoft.com/office/drawing/2014/main" id="{F0F47F4E-7844-9689-B754-349FD9760A4E}"/>
-              </a:ext>
-            </a:extLst>
-          </p:cNvPr>
-          <p:cNvSpPr/>
-          <p:nvPr/>
-        </p:nvSpPr>
-        <p:spPr bwMode="auto">
-          <a:xfrm>
-            <a:off x="778582" y="-337370"/>
-            <a:ext cx="1182784" cy="1168818"/>
-          </a:xfrm>
-          <a:prstGeom prst="roundRect">
-            <a:avLst>
-              <a:gd name="adj" fmla="val 9941"/>
-            </a:avLst>
-          </a:prstGeom>
-          <a:solidFill>
-            <a:schemeClr val="bg1"/>
-          </a:solidFill>
-          <a:ln w="28575">
-            <a:solidFill>
-              <a:schemeClr val="tx1"/>
-            </a:solidFill>
-          </a:ln>
-          <a:effectLst/>
-        </p:spPr>
-        <p:style>
-          <a:lnRef idx="0">
-            <a:schemeClr val="accent4"/>
-          </a:lnRef>
-          <a:fillRef idx="3">
-            <a:schemeClr val="accent4"/>
-          </a:fillRef>
-          <a:effectRef idx="3">
-            <a:schemeClr val="accent4"/>
-          </a:effectRef>
-          <a:fontRef idx="minor">
-            <a:schemeClr val="lt1"/>
-          </a:fontRef>
-        </p:style>
-        <p:txBody>
-          <a:bodyPr rtlCol="1" anchor="ctr"/>
-          <a:lstStyle/>
-          <a:p>
-            <a:pPr rtl="0">
-              <a:defRPr/>
-            </a:pPr>
-            <a:r>
-              <a:rPr lang="en-US" sz="1668" b="1">
-                <a:solidFill>
-                  <a:schemeClr val="bg1"/>
-                </a:solidFill>
-                <a:highlight>
-                  <a:srgbClr val="800080"/>
-                </a:highlight>
-                <a:latin typeface="Segoe UI" panose="020B0502040204020203" pitchFamily="34" charset="0"/>
-                <a:cs typeface="Segoe UI" panose="020B0502040204020203" pitchFamily="34" charset="0"/>
-              </a:rPr>
-              <a:t>CHR</a:t>
-            </a:r>
-          </a:p>
-          <a:p>
-            <a:pPr rtl="0">
-              <a:defRPr/>
-            </a:pPr>
-            <a:r>
-              <a:rPr lang="en-US" sz="1250" b="1">
-                <a:solidFill>
-                  <a:schemeClr val="tx1"/>
-                </a:solidFill>
-                <a:latin typeface="Segoe UI" panose="020B0502040204020203" pitchFamily="34" charset="0"/>
-                <a:cs typeface="Segoe UI" panose="020B0502040204020203" pitchFamily="34" charset="0"/>
-              </a:rPr>
-              <a:t>Chatrooms</a:t>
-            </a:r>
-            <a:endParaRPr sz="1250">
-              <a:solidFill>
-                <a:schemeClr val="tx1"/>
-              </a:solidFill>
-              <a:latin typeface="Segoe UI" panose="020B0502040204020203" pitchFamily="34" charset="0"/>
-              <a:cs typeface="Segoe UI" panose="020B0502040204020203" pitchFamily="34" charset="0"/>
-            </a:endParaRPr>
-          </a:p>
-          <a:p>
-            <a:pPr rtl="0">
-              <a:defRPr/>
-            </a:pPr>
-            <a:r>
-              <a:rPr lang="en-US" sz="833" i="1">
-                <a:solidFill>
-                  <a:schemeClr val="accent5"/>
-                </a:solidFill>
-                <a:latin typeface="Segoe UI" panose="020B0502040204020203" pitchFamily="34" charset="0"/>
-                <a:cs typeface="Segoe UI" panose="020B0502040204020203" pitchFamily="34" charset="0"/>
-              </a:rPr>
-              <a:t>ChatroomId</a:t>
-            </a:r>
-          </a:p>
-          <a:p>
-            <a:pPr rtl="0">
-              <a:defRPr/>
-            </a:pPr>
-            <a:r>
-              <a:rPr lang="en-US" sz="833">
-                <a:solidFill>
-                  <a:schemeClr val="tx1"/>
-                </a:solidFill>
-                <a:latin typeface="Segoe UI" panose="020B0502040204020203" pitchFamily="34" charset="0"/>
-                <a:cs typeface="Segoe UI" panose="020B0502040204020203" pitchFamily="34" charset="0"/>
-              </a:rPr>
-              <a:t>ChatroomUserId</a:t>
-            </a:r>
-          </a:p>
-          <a:p>
-            <a:pPr rtl="0">
-              <a:defRPr/>
-            </a:pPr>
-            <a:r>
-              <a:rPr lang="en-US" sz="833">
-                <a:solidFill>
-                  <a:schemeClr val="tx1"/>
-                </a:solidFill>
-                <a:latin typeface="Segoe UI" panose="020B0502040204020203" pitchFamily="34" charset="0"/>
-                <a:cs typeface="Segoe UI" panose="020B0502040204020203" pitchFamily="34" charset="0"/>
-              </a:rPr>
-              <a:t>ChatroomAdminId</a:t>
-            </a:r>
-          </a:p>
-          <a:p>
-            <a:pPr rtl="0">
-              <a:defRPr/>
-            </a:pPr>
-            <a:r>
-              <a:rPr lang="en-US" sz="833">
-                <a:solidFill>
-                  <a:schemeClr val="tx1"/>
-                </a:solidFill>
-                <a:latin typeface="Segoe UI" panose="020B0502040204020203" pitchFamily="34" charset="0"/>
-                <a:cs typeface="Segoe UI" panose="020B0502040204020203" pitchFamily="34" charset="0"/>
-              </a:rPr>
-              <a:t>ChatroomName</a:t>
-            </a:r>
-          </a:p>
-          <a:p>
-            <a:pPr rtl="0">
-              <a:defRPr/>
-            </a:pPr>
-            <a:r>
-              <a:rPr lang="en-US" sz="833">
-                <a:solidFill>
-                  <a:schemeClr val="tx1"/>
-                </a:solidFill>
-                <a:latin typeface="Segoe UI" panose="020B0502040204020203" pitchFamily="34" charset="0"/>
-                <a:cs typeface="Segoe UI" panose="020B0502040204020203" pitchFamily="34" charset="0"/>
-              </a:rPr>
-              <a:t>ChatroomTerms</a:t>
-            </a:r>
-          </a:p>
-        </p:txBody>
-      </p:sp>
-      <p:sp>
-        <p:nvSpPr>
-          <p:cNvPr id="23" name="Rectangle: Rounded Corners 44">
-            <a:extLst>
-              <a:ext uri="{FF2B5EF4-FFF2-40B4-BE49-F238E27FC236}">
-                <a16:creationId xmlns:a16="http://schemas.microsoft.com/office/drawing/2014/main" id="{846634EC-E522-0EE6-DAA0-648A9105931F}"/>
-              </a:ext>
-            </a:extLst>
-          </p:cNvPr>
-          <p:cNvSpPr/>
-          <p:nvPr/>
-        </p:nvSpPr>
-        <p:spPr bwMode="auto">
-          <a:xfrm>
-            <a:off x="3067168" y="-702573"/>
-            <a:ext cx="1391417" cy="1892101"/>
-          </a:xfrm>
-          <a:prstGeom prst="roundRect">
-            <a:avLst>
-              <a:gd name="adj" fmla="val 9941"/>
-            </a:avLst>
-          </a:prstGeom>
-          <a:solidFill>
-            <a:schemeClr val="bg1"/>
-          </a:solidFill>
-          <a:ln w="28575">
-            <a:solidFill>
-              <a:schemeClr val="tx1"/>
-            </a:solidFill>
-          </a:ln>
-          <a:effectLst/>
-        </p:spPr>
-        <p:style>
-          <a:lnRef idx="0">
-            <a:schemeClr val="accent4"/>
-          </a:lnRef>
-          <a:fillRef idx="3">
-            <a:schemeClr val="accent4"/>
-          </a:fillRef>
-          <a:effectRef idx="3">
-            <a:schemeClr val="accent4"/>
-          </a:effectRef>
-          <a:fontRef idx="minor">
-            <a:schemeClr val="lt1"/>
-          </a:fontRef>
-        </p:style>
-        <p:txBody>
-          <a:bodyPr rtlCol="1" anchor="ctr"/>
-          <a:lstStyle/>
-          <a:p>
-            <a:pPr rtl="0">
-              <a:defRPr/>
-            </a:pPr>
-            <a:r>
-              <a:rPr lang="en-US" sz="1668" b="1">
-                <a:solidFill>
-                  <a:schemeClr val="bg1"/>
-                </a:solidFill>
-                <a:highlight>
-                  <a:srgbClr val="000000"/>
-                </a:highlight>
-                <a:latin typeface="Segoe UI" panose="020B0502040204020203" pitchFamily="34" charset="0"/>
-                <a:cs typeface="Segoe UI" panose="020B0502040204020203" pitchFamily="34" charset="0"/>
-              </a:rPr>
-              <a:t>U</a:t>
-            </a:r>
-          </a:p>
-          <a:p>
-            <a:pPr rtl="0">
-              <a:defRPr/>
-            </a:pPr>
-            <a:r>
-              <a:rPr lang="en-US" sz="1250" b="1">
-                <a:solidFill>
-                  <a:schemeClr val="tx1"/>
-                </a:solidFill>
-                <a:latin typeface="Segoe UI" panose="020B0502040204020203" pitchFamily="34" charset="0"/>
-                <a:cs typeface="Segoe UI" panose="020B0502040204020203" pitchFamily="34" charset="0"/>
-              </a:rPr>
-              <a:t>usrs</a:t>
-            </a:r>
-            <a:endParaRPr sz="1250">
-              <a:solidFill>
-                <a:schemeClr val="tx1"/>
-              </a:solidFill>
-              <a:latin typeface="Segoe UI" panose="020B0502040204020203" pitchFamily="34" charset="0"/>
-              <a:cs typeface="Segoe UI" panose="020B0502040204020203" pitchFamily="34" charset="0"/>
-            </a:endParaRPr>
-          </a:p>
-          <a:p>
-            <a:pPr rtl="0">
-              <a:defRPr/>
-            </a:pPr>
-            <a:r>
-              <a:rPr lang="en-US" sz="833" i="1">
-                <a:solidFill>
-                  <a:schemeClr val="accent5"/>
-                </a:solidFill>
-                <a:latin typeface="Segoe UI" panose="020B0502040204020203" pitchFamily="34" charset="0"/>
-                <a:cs typeface="Segoe UI" panose="020B0502040204020203" pitchFamily="34" charset="0"/>
-              </a:rPr>
-              <a:t>UsrId</a:t>
-            </a:r>
-          </a:p>
-          <a:p>
-            <a:pPr rtl="0">
-              <a:defRPr/>
-            </a:pPr>
-            <a:r>
-              <a:rPr lang="en-US" sz="833">
-                <a:solidFill>
-                  <a:schemeClr val="tx1"/>
-                </a:solidFill>
-                <a:latin typeface="Segoe UI" panose="020B0502040204020203" pitchFamily="34" charset="0"/>
-                <a:cs typeface="Segoe UI" panose="020B0502040204020203" pitchFamily="34" charset="0"/>
-              </a:rPr>
-              <a:t>DepartmentId</a:t>
-            </a:r>
-            <a:endParaRPr lang="en-US" sz="833" i="1">
-              <a:solidFill>
-                <a:schemeClr val="accent5"/>
-              </a:solidFill>
-              <a:latin typeface="Segoe UI" panose="020B0502040204020203" pitchFamily="34" charset="0"/>
-              <a:cs typeface="Segoe UI" panose="020B0502040204020203" pitchFamily="34" charset="0"/>
-            </a:endParaRPr>
-          </a:p>
-          <a:p>
-            <a:pPr rtl="0">
-              <a:defRPr/>
-            </a:pPr>
-            <a:r>
-              <a:rPr lang="en-US" sz="833">
-                <a:solidFill>
-                  <a:schemeClr val="tx1"/>
-                </a:solidFill>
-                <a:latin typeface="Segoe UI" panose="020B0502040204020203" pitchFamily="34" charset="0"/>
-                <a:cs typeface="Segoe UI" panose="020B0502040204020203" pitchFamily="34" charset="0"/>
-              </a:rPr>
-              <a:t>UsrName</a:t>
-            </a:r>
-          </a:p>
-          <a:p>
-            <a:pPr rtl="0">
-              <a:defRPr/>
-            </a:pPr>
-            <a:r>
-              <a:rPr lang="en-US" sz="833">
-                <a:solidFill>
-                  <a:schemeClr val="tx1"/>
-                </a:solidFill>
-                <a:latin typeface="Segoe UI" panose="020B0502040204020203" pitchFamily="34" charset="0"/>
-                <a:cs typeface="Segoe UI" panose="020B0502040204020203" pitchFamily="34" charset="0"/>
-              </a:rPr>
-              <a:t>UsrPass</a:t>
-            </a:r>
-          </a:p>
-          <a:p>
-            <a:pPr rtl="0">
-              <a:defRPr/>
-            </a:pPr>
-            <a:r>
-              <a:rPr lang="en-US" sz="833">
-                <a:solidFill>
-                  <a:schemeClr val="tx1"/>
-                </a:solidFill>
-                <a:latin typeface="Segoe UI" panose="020B0502040204020203" pitchFamily="34" charset="0"/>
-                <a:cs typeface="Segoe UI" panose="020B0502040204020203" pitchFamily="34" charset="0"/>
-              </a:rPr>
-              <a:t>UsrNickname</a:t>
-            </a:r>
-          </a:p>
-          <a:p>
-            <a:pPr rtl="0">
-              <a:defRPr/>
-            </a:pPr>
-            <a:r>
-              <a:rPr lang="en-US" sz="833">
-                <a:solidFill>
-                  <a:schemeClr val="tx1"/>
-                </a:solidFill>
-                <a:latin typeface="Segoe UI" panose="020B0502040204020203" pitchFamily="34" charset="0"/>
-                <a:cs typeface="Segoe UI" panose="020B0502040204020203" pitchFamily="34" charset="0"/>
-              </a:rPr>
-              <a:t>UsrTags</a:t>
-            </a:r>
-            <a:r>
-              <a:rPr lang="en-US" sz="833">
-                <a:solidFill>
-                  <a:srgbClr val="C00000"/>
-                </a:solidFill>
-                <a:latin typeface="Segoe UI" panose="020B0502040204020203" pitchFamily="34" charset="0"/>
-                <a:cs typeface="Segoe UI" panose="020B0502040204020203" pitchFamily="34" charset="0"/>
-              </a:rPr>
-              <a:t> </a:t>
-            </a:r>
-          </a:p>
-          <a:p>
-            <a:pPr marL="88396" rtl="0">
-              <a:defRPr/>
-            </a:pPr>
-            <a:r>
-              <a:rPr lang="en-US" sz="489">
-                <a:solidFill>
-                  <a:srgbClr val="C00000"/>
-                </a:solidFill>
-                <a:latin typeface="Segoe UI" panose="020B0502040204020203" pitchFamily="34" charset="0"/>
-                <a:cs typeface="Segoe UI" panose="020B0502040204020203" pitchFamily="34" charset="0"/>
-              </a:rPr>
-              <a:t>1: IsActive</a:t>
-            </a:r>
-          </a:p>
-          <a:p>
-            <a:pPr marL="88396" rtl="0">
-              <a:defRPr/>
-            </a:pPr>
-            <a:r>
-              <a:rPr lang="en-US" sz="489">
-                <a:solidFill>
-                  <a:srgbClr val="C00000"/>
-                </a:solidFill>
-                <a:latin typeface="Segoe UI" panose="020B0502040204020203" pitchFamily="34" charset="0"/>
-                <a:cs typeface="Segoe UI" panose="020B0502040204020203" pitchFamily="34" charset="0"/>
-              </a:rPr>
-              <a:t>2: ChangePass</a:t>
-            </a:r>
-          </a:p>
-          <a:p>
-            <a:pPr marL="88396" rtl="0">
-              <a:defRPr/>
-            </a:pPr>
-            <a:r>
-              <a:rPr lang="en-US" sz="489">
-                <a:solidFill>
-                  <a:srgbClr val="C00000"/>
-                </a:solidFill>
-                <a:latin typeface="Segoe UI" panose="020B0502040204020203" pitchFamily="34" charset="0"/>
-                <a:cs typeface="Segoe UI" panose="020B0502040204020203" pitchFamily="34" charset="0"/>
-              </a:rPr>
-              <a:t>4    : -          8    : -</a:t>
-            </a:r>
-          </a:p>
-          <a:p>
-            <a:pPr marL="88396" rtl="0">
-              <a:defRPr/>
-            </a:pPr>
-            <a:r>
-              <a:rPr lang="en-US" sz="489">
-                <a:solidFill>
-                  <a:srgbClr val="C00000"/>
-                </a:solidFill>
-                <a:latin typeface="Segoe UI" panose="020B0502040204020203" pitchFamily="34" charset="0"/>
-                <a:cs typeface="Segoe UI" panose="020B0502040204020203" pitchFamily="34" charset="0"/>
-              </a:rPr>
-              <a:t>16  : ShowDueNotes</a:t>
-            </a:r>
-          </a:p>
-          <a:p>
-            <a:pPr marL="88396" rtl="0">
-              <a:defRPr/>
-            </a:pPr>
-            <a:r>
-              <a:rPr lang="en-US" sz="489">
-                <a:solidFill>
-                  <a:srgbClr val="C00000"/>
-                </a:solidFill>
-                <a:latin typeface="Segoe UI" panose="020B0502040204020203" pitchFamily="34" charset="0"/>
-                <a:cs typeface="Segoe UI" panose="020B0502040204020203" pitchFamily="34" charset="0"/>
-              </a:rPr>
-              <a:t>32  : DueNotesDays=14 (default=7)</a:t>
-            </a:r>
-          </a:p>
-          <a:p>
-            <a:pPr marL="88396" rtl="0">
-              <a:defRPr/>
-            </a:pPr>
-            <a:r>
-              <a:rPr lang="en-US" sz="489">
-                <a:solidFill>
-                  <a:srgbClr val="C00000"/>
-                </a:solidFill>
-                <a:latin typeface="Segoe UI" panose="020B0502040204020203" pitchFamily="34" charset="0"/>
-                <a:cs typeface="Segoe UI" panose="020B0502040204020203" pitchFamily="34" charset="0"/>
-              </a:rPr>
-              <a:t>64  : -  </a:t>
-            </a:r>
-          </a:p>
-          <a:p>
-            <a:pPr marL="88396" rtl="0">
-              <a:defRPr/>
-            </a:pPr>
-            <a:r>
-              <a:rPr lang="en-US" sz="489">
-                <a:solidFill>
-                  <a:srgbClr val="C00000"/>
-                </a:solidFill>
-                <a:latin typeface="Segoe UI" panose="020B0502040204020203" pitchFamily="34" charset="0"/>
-                <a:cs typeface="Segoe UI" panose="020B0502040204020203" pitchFamily="34" charset="0"/>
-              </a:rPr>
-              <a:t>128: SuperUser</a:t>
-            </a:r>
-          </a:p>
-          <a:p>
-            <a:pPr marL="88396" rtl="0">
-              <a:defRPr/>
-            </a:pPr>
-            <a:r>
-              <a:rPr lang="en-US" sz="489">
-                <a:solidFill>
-                  <a:srgbClr val="C00000"/>
-                </a:solidFill>
-                <a:latin typeface="Segoe UI" panose="020B0502040204020203" pitchFamily="34" charset="0"/>
-                <a:cs typeface="Segoe UI" panose="020B0502040204020203" pitchFamily="34" charset="0"/>
-              </a:rPr>
-              <a:t>256: CalendarFa</a:t>
-            </a:r>
-          </a:p>
-        </p:txBody>
-      </p:sp>
-      <p:sp>
-        <p:nvSpPr>
-          <p:cNvPr id="20" name="Rectangle: Rounded Corners 44">
-            <a:extLst>
-              <a:ext uri="{FF2B5EF4-FFF2-40B4-BE49-F238E27FC236}">
-                <a16:creationId xmlns:a16="http://schemas.microsoft.com/office/drawing/2014/main" id="{4C17BC8F-E8D8-AC54-BB6C-347B484648E6}"/>
-              </a:ext>
-            </a:extLst>
-          </p:cNvPr>
-          <p:cNvSpPr/>
-          <p:nvPr/>
-        </p:nvSpPr>
-        <p:spPr bwMode="auto">
-          <a:xfrm>
-            <a:off x="4179260" y="-580384"/>
-            <a:ext cx="1313184" cy="894607"/>
-          </a:xfrm>
-          <a:prstGeom prst="roundRect">
-            <a:avLst>
-              <a:gd name="adj" fmla="val 9941"/>
-            </a:avLst>
-          </a:prstGeom>
-          <a:solidFill>
-            <a:schemeClr val="bg1"/>
-          </a:solidFill>
-          <a:ln w="28575">
-            <a:solidFill>
-              <a:schemeClr val="tx1"/>
-            </a:solidFill>
-          </a:ln>
-          <a:effectLst/>
-        </p:spPr>
-        <p:style>
-          <a:lnRef idx="0">
-            <a:schemeClr val="accent4"/>
-          </a:lnRef>
-          <a:fillRef idx="3">
-            <a:schemeClr val="accent4"/>
-          </a:fillRef>
-          <a:effectRef idx="3">
-            <a:schemeClr val="accent4"/>
-          </a:effectRef>
-          <a:fontRef idx="minor">
-            <a:schemeClr val="lt1"/>
-          </a:fontRef>
-        </p:style>
-        <p:txBody>
-          <a:bodyPr rtlCol="1" anchor="ctr"/>
-          <a:lstStyle/>
-          <a:p>
-            <a:pPr rtl="0">
-              <a:defRPr/>
-            </a:pPr>
-            <a:r>
-              <a:rPr lang="en-US" sz="1668" b="1">
-                <a:solidFill>
-                  <a:schemeClr val="bg1"/>
-                </a:solidFill>
-                <a:highlight>
-                  <a:srgbClr val="000000"/>
-                </a:highlight>
-                <a:latin typeface="Segoe UI" panose="020B0502040204020203" pitchFamily="34" charset="0"/>
-                <a:cs typeface="Segoe UI" panose="020B0502040204020203" pitchFamily="34" charset="0"/>
-              </a:rPr>
-              <a:t>D</a:t>
-            </a:r>
-          </a:p>
-          <a:p>
-            <a:pPr rtl="0">
-              <a:defRPr/>
-            </a:pPr>
-            <a:r>
-              <a:rPr lang="en-US" sz="1250" b="1">
-                <a:solidFill>
-                  <a:schemeClr val="tx1"/>
-                </a:solidFill>
-                <a:latin typeface="Segoe UI" panose="020B0502040204020203" pitchFamily="34" charset="0"/>
-                <a:cs typeface="Segoe UI" panose="020B0502040204020203" pitchFamily="34" charset="0"/>
-              </a:rPr>
-              <a:t>Departments</a:t>
-            </a:r>
-            <a:endParaRPr sz="1250">
-              <a:solidFill>
-                <a:schemeClr val="tx1"/>
-              </a:solidFill>
-              <a:latin typeface="Segoe UI" panose="020B0502040204020203" pitchFamily="34" charset="0"/>
-              <a:cs typeface="Segoe UI" panose="020B0502040204020203" pitchFamily="34" charset="0"/>
-            </a:endParaRPr>
-          </a:p>
-          <a:p>
-            <a:pPr rtl="0">
-              <a:defRPr/>
-            </a:pPr>
-            <a:r>
-              <a:rPr lang="en-US" sz="833">
-                <a:solidFill>
-                  <a:schemeClr val="tx1"/>
-                </a:solidFill>
-                <a:latin typeface="Segoe UI" panose="020B0502040204020203" pitchFamily="34" charset="0"/>
-                <a:cs typeface="Segoe UI" panose="020B0502040204020203" pitchFamily="34" charset="0"/>
-              </a:rPr>
-              <a:t>DepartmentId</a:t>
-            </a:r>
-          </a:p>
-          <a:p>
-            <a:pPr rtl="0">
-              <a:defRPr/>
-            </a:pPr>
-            <a:r>
-              <a:rPr lang="en-US" sz="833">
-                <a:solidFill>
-                  <a:schemeClr val="tx1"/>
-                </a:solidFill>
-                <a:latin typeface="Segoe UI" panose="020B0502040204020203" pitchFamily="34" charset="0"/>
-                <a:cs typeface="Segoe UI" panose="020B0502040204020203" pitchFamily="34" charset="0"/>
-              </a:rPr>
-              <a:t>DepartmentName</a:t>
-            </a:r>
-          </a:p>
-          <a:p>
-            <a:pPr rtl="0">
-              <a:defRPr/>
-            </a:pPr>
-            <a:r>
-              <a:rPr lang="en-US" sz="833">
-                <a:solidFill>
-                  <a:schemeClr val="tx1"/>
-                </a:solidFill>
-                <a:latin typeface="Segoe UI" panose="020B0502040204020203" pitchFamily="34" charset="0"/>
-                <a:cs typeface="Segoe UI" panose="020B0502040204020203" pitchFamily="34" charset="0"/>
-              </a:rPr>
-              <a:t>DepartmentInfo</a:t>
-            </a:r>
-          </a:p>
-        </p:txBody>
-      </p:sp>
-      <p:sp>
-        <p:nvSpPr>
-          <p:cNvPr id="15" name="Rectangle: Rounded Corners 14">
-            <a:extLst>
-              <a:ext uri="{FF2B5EF4-FFF2-40B4-BE49-F238E27FC236}">
-                <a16:creationId xmlns:a16="http://schemas.microsoft.com/office/drawing/2014/main" id="{61B625CD-0486-6361-62A7-F77FA64A88A7}"/>
-              </a:ext>
-            </a:extLst>
-          </p:cNvPr>
-          <p:cNvSpPr/>
-          <p:nvPr/>
-        </p:nvSpPr>
-        <p:spPr>
-          <a:xfrm>
-            <a:off x="-418946" y="4306682"/>
-            <a:ext cx="1285206" cy="1034826"/>
-          </a:xfrm>
-          <a:prstGeom prst="roundRect">
-            <a:avLst>
-              <a:gd name="adj" fmla="val 4327"/>
-            </a:avLst>
-          </a:prstGeom>
-          <a:solidFill>
-            <a:schemeClr val="bg1"/>
-          </a:solidFill>
-          <a:ln>
-            <a:solidFill>
-              <a:schemeClr val="tx1">
-                <a:lumMod val="65000"/>
-                <a:lumOff val="35000"/>
-              </a:schemeClr>
-            </a:solidFill>
-          </a:ln>
-        </p:spPr>
-        <p:style>
-          <a:lnRef idx="1">
-            <a:schemeClr val="accent4"/>
-          </a:lnRef>
-          <a:fillRef idx="2">
-            <a:schemeClr val="accent4"/>
-          </a:fillRef>
-          <a:effectRef idx="1">
-            <a:schemeClr val="accent4"/>
-          </a:effectRef>
-          <a:fontRef idx="minor">
-            <a:schemeClr val="dk1"/>
-          </a:fontRef>
-        </p:style>
-        <p:txBody>
-          <a:bodyPr rtlCol="1" anchor="t"/>
-          <a:lstStyle/>
-          <a:p>
-            <a:pPr rtl="0"/>
-            <a:r>
-              <a:rPr lang="en-US" sz="1668" b="1">
-                <a:solidFill>
-                  <a:schemeClr val="bg1"/>
-                </a:solidFill>
-                <a:highlight>
-                  <a:srgbClr val="800080"/>
-                </a:highlight>
-              </a:rPr>
-              <a:t>SP</a:t>
-            </a:r>
-          </a:p>
-          <a:p>
-            <a:pPr rtl="0"/>
-            <a:r>
-              <a:rPr lang="en-US" sz="1250" b="1"/>
-              <a:t>SuubProjects</a:t>
-            </a:r>
-            <a:endParaRPr lang="en-US" sz="833" b="1" dirty="0"/>
-          </a:p>
-          <a:p>
-            <a:pPr rtl="0"/>
-            <a:r>
-              <a:rPr lang="en-US" sz="833" i="1">
-                <a:solidFill>
-                  <a:schemeClr val="accent5"/>
-                </a:solidFill>
-                <a:latin typeface="Segoe UI" panose="020B0502040204020203" pitchFamily="34" charset="0"/>
-                <a:cs typeface="Segoe UI" panose="020B0502040204020203" pitchFamily="34" charset="0"/>
-              </a:rPr>
-              <a:t>SubprojectId</a:t>
-            </a:r>
-            <a:endParaRPr lang="en-US" sz="833" i="1" dirty="0">
-              <a:solidFill>
-                <a:schemeClr val="accent5"/>
-              </a:solidFill>
-              <a:latin typeface="Segoe UI" panose="020B0502040204020203" pitchFamily="34" charset="0"/>
-              <a:cs typeface="Segoe UI" panose="020B0502040204020203" pitchFamily="34" charset="0"/>
-            </a:endParaRPr>
-          </a:p>
-          <a:p>
-            <a:pPr rtl="0"/>
-            <a:r>
-              <a:rPr lang="en-US" sz="833">
-                <a:solidFill>
-                  <a:schemeClr val="tx1"/>
-                </a:solidFill>
-              </a:rPr>
-              <a:t>ProjectId</a:t>
-            </a:r>
-            <a:endParaRPr lang="fa-IR" sz="833">
-              <a:solidFill>
-                <a:schemeClr val="tx1"/>
-              </a:solidFill>
-            </a:endParaRPr>
-          </a:p>
-          <a:p>
-            <a:pPr rtl="0"/>
-            <a:r>
-              <a:rPr lang="en-US" sz="833"/>
-              <a:t>SubprojectName</a:t>
-            </a:r>
-          </a:p>
-          <a:p>
-            <a:pPr rtl="0"/>
-            <a:r>
-              <a:rPr lang="en-US" sz="833"/>
-              <a:t>Subproject</a:t>
-            </a:r>
-            <a:r>
-              <a:rPr lang="en-US" sz="833">
-                <a:solidFill>
-                  <a:srgbClr val="C00000"/>
-                </a:solidFill>
-              </a:rPr>
-              <a:t>Tags</a:t>
-            </a:r>
-            <a:endParaRPr lang="en-US" sz="833" dirty="0">
-              <a:solidFill>
-                <a:srgbClr val="C00000"/>
-              </a:solidFill>
-            </a:endParaRPr>
-          </a:p>
-        </p:txBody>
-      </p:sp>
-      <p:sp>
-        <p:nvSpPr>
-          <p:cNvPr id="22" name="Rectangle: Rounded Corners 44">
-            <a:extLst>
-              <a:ext uri="{FF2B5EF4-FFF2-40B4-BE49-F238E27FC236}">
-                <a16:creationId xmlns:a16="http://schemas.microsoft.com/office/drawing/2014/main" id="{78A9C641-93AA-F338-73D0-51866796C4FD}"/>
-              </a:ext>
-            </a:extLst>
-          </p:cNvPr>
-          <p:cNvSpPr/>
-          <p:nvPr/>
-        </p:nvSpPr>
-        <p:spPr bwMode="auto">
-          <a:xfrm>
-            <a:off x="4319939" y="474718"/>
-            <a:ext cx="1052748" cy="894607"/>
-          </a:xfrm>
-          <a:prstGeom prst="roundRect">
-            <a:avLst>
-              <a:gd name="adj" fmla="val 9941"/>
-            </a:avLst>
-          </a:prstGeom>
-          <a:solidFill>
-            <a:schemeClr val="bg1"/>
-          </a:solidFill>
-          <a:ln w="28575">
-            <a:solidFill>
-              <a:schemeClr val="tx1"/>
-            </a:solidFill>
-          </a:ln>
-          <a:effectLst/>
-        </p:spPr>
-        <p:style>
-          <a:lnRef idx="0">
-            <a:schemeClr val="accent4"/>
-          </a:lnRef>
-          <a:fillRef idx="3">
-            <a:schemeClr val="accent4"/>
-          </a:fillRef>
-          <a:effectRef idx="3">
-            <a:schemeClr val="accent4"/>
-          </a:effectRef>
-          <a:fontRef idx="minor">
-            <a:schemeClr val="lt1"/>
-          </a:fontRef>
-        </p:style>
-        <p:txBody>
-          <a:bodyPr rtlCol="1" anchor="ctr"/>
-          <a:lstStyle/>
-          <a:p>
-            <a:pPr rtl="0">
-              <a:defRPr/>
-            </a:pPr>
-            <a:r>
-              <a:rPr lang="en-US" sz="1668" b="1">
-                <a:solidFill>
-                  <a:schemeClr val="bg1"/>
-                </a:solidFill>
-                <a:highlight>
-                  <a:srgbClr val="000000"/>
-                </a:highlight>
-                <a:latin typeface="Segoe UI" panose="020B0502040204020203" pitchFamily="34" charset="0"/>
-                <a:cs typeface="Segoe UI" panose="020B0502040204020203" pitchFamily="34" charset="0"/>
-              </a:rPr>
-              <a:t>UL</a:t>
-            </a:r>
-          </a:p>
-          <a:p>
-            <a:pPr rtl="0">
-              <a:defRPr/>
-            </a:pPr>
-            <a:r>
-              <a:rPr lang="en-US" sz="1250" b="1">
-                <a:solidFill>
-                  <a:schemeClr val="tx1"/>
-                </a:solidFill>
-                <a:latin typeface="Segoe UI" panose="020B0502040204020203" pitchFamily="34" charset="0"/>
-                <a:cs typeface="Segoe UI" panose="020B0502040204020203" pitchFamily="34" charset="0"/>
-              </a:rPr>
-              <a:t>usrsLogs</a:t>
-            </a:r>
-            <a:endParaRPr sz="1250">
-              <a:solidFill>
-                <a:schemeClr val="tx1"/>
-              </a:solidFill>
-              <a:latin typeface="Segoe UI" panose="020B0502040204020203" pitchFamily="34" charset="0"/>
-              <a:cs typeface="Segoe UI" panose="020B0502040204020203" pitchFamily="34" charset="0"/>
-            </a:endParaRPr>
-          </a:p>
-          <a:p>
-            <a:pPr rtl="0">
-              <a:defRPr/>
-            </a:pPr>
-            <a:r>
-              <a:rPr lang="en-US" sz="833">
-                <a:solidFill>
-                  <a:schemeClr val="tx1"/>
-                </a:solidFill>
-                <a:latin typeface="Segoe UI" panose="020B0502040204020203" pitchFamily="34" charset="0"/>
-                <a:cs typeface="Segoe UI" panose="020B0502040204020203" pitchFamily="34" charset="0"/>
-              </a:rPr>
-              <a:t>UserId</a:t>
-            </a:r>
-          </a:p>
-          <a:p>
-            <a:pPr rtl="0">
-              <a:defRPr/>
-            </a:pPr>
-            <a:r>
-              <a:rPr lang="en-US" sz="833">
-                <a:solidFill>
-                  <a:schemeClr val="tx1"/>
-                </a:solidFill>
-                <a:latin typeface="Segoe UI" panose="020B0502040204020203" pitchFamily="34" charset="0"/>
-                <a:cs typeface="Segoe UI" panose="020B0502040204020203" pitchFamily="34" charset="0"/>
-              </a:rPr>
-              <a:t>UserLogText</a:t>
-            </a:r>
-          </a:p>
-          <a:p>
-            <a:pPr rtl="0">
-              <a:defRPr/>
-            </a:pPr>
-            <a:r>
-              <a:rPr lang="en-US" sz="833">
-                <a:solidFill>
-                  <a:schemeClr val="tx1"/>
-                </a:solidFill>
-                <a:latin typeface="Segoe UI" panose="020B0502040204020203" pitchFamily="34" charset="0"/>
-                <a:cs typeface="Segoe UI" panose="020B0502040204020203" pitchFamily="34" charset="0"/>
-              </a:rPr>
-              <a:t>DateTime</a:t>
-            </a:r>
-          </a:p>
-        </p:txBody>
-      </p:sp>
-      <p:pic>
-        <p:nvPicPr>
-          <p:cNvPr id="24" name="Picture 23">
-            <a:extLst>
-              <a:ext uri="{FF2B5EF4-FFF2-40B4-BE49-F238E27FC236}">
-                <a16:creationId xmlns:a16="http://schemas.microsoft.com/office/drawing/2014/main" id="{2A68DA83-B11D-4204-5608-38BB8D96B879}"/>
-              </a:ext>
-            </a:extLst>
-          </p:cNvPr>
-          <p:cNvPicPr>
-            <a:picLocks noChangeAspect="1"/>
-          </p:cNvPicPr>
-          <p:nvPr/>
-        </p:nvPicPr>
-        <p:blipFill>
-          <a:blip r:embed="rId3"/>
-          <a:stretch>
-            <a:fillRect/>
-          </a:stretch>
-        </p:blipFill>
-        <p:spPr bwMode="auto">
-          <a:xfrm>
-            <a:off x="8399666" y="-768659"/>
-            <a:ext cx="2125807" cy="441755"/>
-          </a:xfrm>
-          <a:prstGeom prst="rect">
-            <a:avLst/>
-          </a:prstGeom>
-        </p:spPr>
-      </p:pic>
-      <p:sp>
-        <p:nvSpPr>
-          <p:cNvPr id="8" name="Rectangle: Rounded Corners 18">
-            <a:extLst>
-              <a:ext uri="{FF2B5EF4-FFF2-40B4-BE49-F238E27FC236}">
-                <a16:creationId xmlns:a16="http://schemas.microsoft.com/office/drawing/2014/main" id="{AD9EB92C-854B-83CA-C9E1-C1DAC30A2B5B}"/>
-              </a:ext>
-            </a:extLst>
-          </p:cNvPr>
-          <p:cNvSpPr/>
-          <p:nvPr/>
-        </p:nvSpPr>
-        <p:spPr bwMode="auto">
-          <a:xfrm>
-            <a:off x="7176916" y="-228683"/>
-            <a:ext cx="1334427" cy="1152321"/>
-          </a:xfrm>
-          <a:prstGeom prst="roundRect">
-            <a:avLst>
-              <a:gd name="adj" fmla="val 5397"/>
-            </a:avLst>
-          </a:prstGeom>
-          <a:solidFill>
-            <a:schemeClr val="bg1"/>
-          </a:solidFill>
-          <a:ln>
-            <a:solidFill>
-              <a:schemeClr val="accent6"/>
-            </a:solidFill>
-            <a:prstDash val="lgDash"/>
-          </a:ln>
-          <a:effectLst/>
-        </p:spPr>
-        <p:style>
-          <a:lnRef idx="0">
-            <a:schemeClr val="accent4"/>
-          </a:lnRef>
-          <a:fillRef idx="3">
-            <a:schemeClr val="accent4"/>
-          </a:fillRef>
-          <a:effectRef idx="3">
-            <a:schemeClr val="accent4"/>
-          </a:effectRef>
-          <a:fontRef idx="minor">
-            <a:schemeClr val="lt1"/>
-          </a:fontRef>
-        </p:style>
-        <p:txBody>
-          <a:bodyPr rtlCol="1" anchor="ctr"/>
-          <a:lstStyle/>
-          <a:p>
-            <a:pPr algn="l" rtl="0">
-              <a:defRPr/>
-            </a:pPr>
-            <a:r>
-              <a:rPr lang="en-US" sz="1668" b="1">
-                <a:solidFill>
-                  <a:schemeClr val="bg1"/>
-                </a:solidFill>
-                <a:highlight>
-                  <a:srgbClr val="008080"/>
-                </a:highlight>
-                <a:latin typeface="Segoe UI" panose="020B0502040204020203" pitchFamily="34" charset="0"/>
-                <a:cs typeface="Segoe UI" panose="020B0502040204020203" pitchFamily="34" charset="0"/>
-              </a:rPr>
-              <a:t>CT</a:t>
-            </a:r>
-          </a:p>
-          <a:p>
-            <a:pPr rtl="0">
-              <a:defRPr/>
-            </a:pPr>
-            <a:r>
-              <a:rPr lang="en-US" sz="1250" b="1">
-                <a:solidFill>
-                  <a:schemeClr val="tx1"/>
-                </a:solidFill>
-                <a:latin typeface="Segoe UI" panose="020B0502040204020203" pitchFamily="34" charset="0"/>
-                <a:cs typeface="Segoe UI" panose="020B0502040204020203" pitchFamily="34" charset="0"/>
-              </a:rPr>
-              <a:t>CourseTopics</a:t>
-            </a:r>
-            <a:endParaRPr sz="1250">
-              <a:solidFill>
-                <a:schemeClr val="tx1"/>
-              </a:solidFill>
-              <a:latin typeface="Segoe UI" panose="020B0502040204020203" pitchFamily="34" charset="0"/>
-              <a:cs typeface="Segoe UI" panose="020B0502040204020203" pitchFamily="34" charset="0"/>
-            </a:endParaRPr>
-          </a:p>
-          <a:p>
-            <a:pPr rtl="0">
-              <a:defRPr/>
-            </a:pPr>
-            <a:r>
-              <a:rPr lang="en-US" sz="833" i="1">
-                <a:solidFill>
-                  <a:schemeClr val="accent5"/>
-                </a:solidFill>
-                <a:latin typeface="Segoe UI" panose="020B0502040204020203" pitchFamily="34" charset="0"/>
-                <a:cs typeface="Segoe UI" panose="020B0502040204020203" pitchFamily="34" charset="0"/>
-              </a:rPr>
-              <a:t>CourseTopicId</a:t>
-            </a:r>
-          </a:p>
-          <a:p>
-            <a:pPr rtl="0">
-              <a:defRPr/>
-            </a:pPr>
-            <a:r>
-              <a:rPr lang="en-US" sz="833">
-                <a:solidFill>
-                  <a:schemeClr val="tx1"/>
-                </a:solidFill>
-                <a:latin typeface="Segoe UI" panose="020B0502040204020203" pitchFamily="34" charset="0"/>
-                <a:cs typeface="Segoe UI" panose="020B0502040204020203" pitchFamily="34" charset="0"/>
-              </a:rPr>
-              <a:t>CourseId</a:t>
-            </a:r>
-          </a:p>
-          <a:p>
-            <a:pPr rtl="0">
-              <a:defRPr/>
-            </a:pPr>
-            <a:r>
-              <a:rPr lang="en-US" sz="833">
-                <a:solidFill>
-                  <a:schemeClr val="tx1"/>
-                </a:solidFill>
-                <a:latin typeface="Segoe UI" panose="020B0502040204020203" pitchFamily="34" charset="0"/>
-                <a:cs typeface="Segoe UI" panose="020B0502040204020203" pitchFamily="34" charset="0"/>
-              </a:rPr>
-              <a:t>CourseTopicTitle</a:t>
-            </a:r>
-          </a:p>
-          <a:p>
-            <a:pPr rtl="0">
-              <a:defRPr/>
-            </a:pPr>
-            <a:endParaRPr lang="en-US" sz="833">
-              <a:solidFill>
-                <a:schemeClr val="tx1"/>
-              </a:solidFill>
-              <a:latin typeface="Segoe UI" panose="020B0502040204020203" pitchFamily="34" charset="0"/>
-              <a:cs typeface="Segoe UI" panose="020B0502040204020203" pitchFamily="34" charset="0"/>
-            </a:endParaRPr>
-          </a:p>
-          <a:p>
-            <a:pPr rtl="0">
-              <a:defRPr/>
-            </a:pPr>
-            <a:endParaRPr lang="en-US" sz="833">
-              <a:solidFill>
-                <a:schemeClr val="tx1"/>
-              </a:solidFill>
-              <a:latin typeface="Segoe UI" panose="020B0502040204020203" pitchFamily="34" charset="0"/>
-              <a:cs typeface="Segoe UI" panose="020B0502040204020203" pitchFamily="34" charset="0"/>
-            </a:endParaRPr>
-          </a:p>
-        </p:txBody>
-      </p:sp>
-      <p:sp>
-        <p:nvSpPr>
-          <p:cNvPr id="21" name="Rectangle: Rounded Corners 14">
-            <a:extLst>
-              <a:ext uri="{FF2B5EF4-FFF2-40B4-BE49-F238E27FC236}">
-                <a16:creationId xmlns:a16="http://schemas.microsoft.com/office/drawing/2014/main" id="{3CDFBD34-9CF5-D8C8-B295-F12F8F59E40D}"/>
-              </a:ext>
-            </a:extLst>
-          </p:cNvPr>
-          <p:cNvSpPr/>
-          <p:nvPr/>
-        </p:nvSpPr>
-        <p:spPr bwMode="auto">
-          <a:xfrm>
-            <a:off x="7581118" y="1084351"/>
-            <a:ext cx="1381266" cy="1125595"/>
-          </a:xfrm>
-          <a:prstGeom prst="roundRect">
-            <a:avLst>
-              <a:gd name="adj" fmla="val 8023"/>
-            </a:avLst>
-          </a:prstGeom>
-          <a:solidFill>
-            <a:schemeClr val="bg1"/>
-          </a:solidFill>
-          <a:ln>
-            <a:solidFill>
-              <a:schemeClr val="accent6"/>
-            </a:solidFill>
-            <a:prstDash val="lgDash"/>
-          </a:ln>
-          <a:effectLst/>
-        </p:spPr>
-        <p:style>
-          <a:lnRef idx="0">
-            <a:schemeClr val="accent4"/>
-          </a:lnRef>
-          <a:fillRef idx="3">
-            <a:schemeClr val="accent4"/>
-          </a:fillRef>
-          <a:effectRef idx="3">
-            <a:schemeClr val="accent4"/>
-          </a:effectRef>
-          <a:fontRef idx="minor">
-            <a:schemeClr val="lt1"/>
-          </a:fontRef>
-        </p:style>
-        <p:txBody>
-          <a:bodyPr rtlCol="1" anchor="ctr"/>
-          <a:lstStyle/>
-          <a:p>
-            <a:pPr rtl="0">
-              <a:defRPr/>
-            </a:pPr>
-            <a:r>
-              <a:rPr lang="en-US" sz="1668" b="1">
-                <a:solidFill>
-                  <a:schemeClr val="bg1"/>
-                </a:solidFill>
-                <a:highlight>
-                  <a:srgbClr val="008080"/>
-                </a:highlight>
-                <a:latin typeface="Segoe UI" panose="020B0502040204020203" pitchFamily="34" charset="0"/>
-                <a:cs typeface="Segoe UI" panose="020B0502040204020203" pitchFamily="34" charset="0"/>
-              </a:rPr>
-              <a:t>CF</a:t>
-            </a:r>
-          </a:p>
-          <a:p>
-            <a:pPr rtl="0">
-              <a:defRPr/>
-            </a:pPr>
-            <a:r>
-              <a:rPr lang="en-US" sz="1250" b="1">
-                <a:solidFill>
-                  <a:schemeClr val="tx1"/>
-                </a:solidFill>
-                <a:latin typeface="Segoe UI" panose="020B0502040204020203" pitchFamily="34" charset="0"/>
-                <a:cs typeface="Segoe UI" panose="020B0502040204020203" pitchFamily="34" charset="0"/>
-              </a:rPr>
-              <a:t>CourseFolders</a:t>
-            </a:r>
-            <a:endParaRPr sz="1250" b="1">
-              <a:solidFill>
-                <a:schemeClr val="tx1"/>
-              </a:solidFill>
-              <a:latin typeface="Segoe UI" panose="020B0502040204020203" pitchFamily="34" charset="0"/>
-              <a:cs typeface="Segoe UI" panose="020B0502040204020203" pitchFamily="34" charset="0"/>
-            </a:endParaRPr>
-          </a:p>
-          <a:p>
-            <a:pPr rtl="0">
-              <a:defRPr/>
-            </a:pPr>
-            <a:r>
-              <a:rPr lang="en-US" sz="833" i="1">
-                <a:solidFill>
-                  <a:schemeClr val="accent5"/>
-                </a:solidFill>
-                <a:latin typeface="Segoe UI" panose="020B0502040204020203" pitchFamily="34" charset="0"/>
-                <a:cs typeface="Segoe UI" panose="020B0502040204020203" pitchFamily="34" charset="0"/>
-              </a:rPr>
-              <a:t>CourseFolderId</a:t>
-            </a:r>
-          </a:p>
-          <a:p>
-            <a:pPr rtl="0">
-              <a:defRPr/>
-            </a:pPr>
-            <a:r>
-              <a:rPr lang="en-US" sz="833">
-                <a:solidFill>
-                  <a:schemeClr val="tx1"/>
-                </a:solidFill>
-                <a:latin typeface="Segoe UI" panose="020B0502040204020203" pitchFamily="34" charset="0"/>
-                <a:cs typeface="Segoe UI" panose="020B0502040204020203" pitchFamily="34" charset="0"/>
-              </a:rPr>
-              <a:t>CourseId</a:t>
-            </a:r>
-          </a:p>
-          <a:p>
-            <a:pPr rtl="0">
-              <a:defRPr/>
-            </a:pPr>
-            <a:r>
-              <a:rPr lang="en-US" sz="833">
-                <a:solidFill>
-                  <a:schemeClr val="tx1"/>
-                </a:solidFill>
-                <a:latin typeface="Segoe UI" panose="020B0502040204020203" pitchFamily="34" charset="0"/>
-                <a:cs typeface="Segoe UI" panose="020B0502040204020203" pitchFamily="34" charset="0"/>
-              </a:rPr>
-              <a:t>CourseFolderTitle</a:t>
-            </a:r>
-          </a:p>
-          <a:p>
-            <a:pPr rtl="0">
-              <a:defRPr/>
-            </a:pPr>
-            <a:r>
-              <a:rPr lang="en-US" sz="833">
-                <a:solidFill>
-                  <a:schemeClr val="tx1"/>
-                </a:solidFill>
-                <a:latin typeface="Segoe UI" panose="020B0502040204020203" pitchFamily="34" charset="0"/>
-                <a:ea typeface="Arial"/>
-                <a:cs typeface="Segoe UI" panose="020B0502040204020203" pitchFamily="34" charset="0"/>
-              </a:rPr>
-              <a:t>CourseFolderUrl</a:t>
-            </a:r>
-          </a:p>
-          <a:p>
-            <a:pPr rtl="0">
-              <a:defRPr/>
-            </a:pPr>
-            <a:r>
-              <a:rPr lang="en-US" sz="833">
-                <a:solidFill>
-                  <a:schemeClr val="tx1"/>
-                </a:solidFill>
-                <a:latin typeface="Segoe UI" panose="020B0502040204020203" pitchFamily="34" charset="0"/>
-                <a:cs typeface="Segoe UI" panose="020B0502040204020203" pitchFamily="34" charset="0"/>
-              </a:rPr>
-              <a:t>CourseFolderActive</a:t>
-            </a:r>
-          </a:p>
-        </p:txBody>
-      </p:sp>
-    </p:spTree>
-    <p:extLst>
-      <p:ext uri="{BB962C8B-B14F-4D97-AF65-F5344CB8AC3E}">
-        <p14:creationId xmlns:p14="http://schemas.microsoft.com/office/powerpoint/2010/main" val="1155343233"/>
-      </p:ext>
-    </p:extLst>
-  </p:cSld>
-  <p:clrMapOvr>
-    <a:masterClrMapping/>
-  </p:clrMapOvr>
-</p:sld>
-</file>
-
-<file path=ppt/slides/slide3.xml><?xml version="1.0" encoding="utf-8"?>
 <p:sld xmlns:a="http://schemas.openxmlformats.org/drawingml/2006/main" xmlns:r="http://schemas.openxmlformats.org/officeDocument/2006/relationships" xmlns:p="http://schemas.openxmlformats.org/presentationml/2006/main">
   <p:cSld>
     <p:spTree>
@@ -18005,7 +8774,7 @@
         </p:nvGrpSpPr>
         <p:grpSpPr>
           <a:xfrm>
-            <a:off x="5422003" y="-560635"/>
+            <a:off x="4687942" y="420583"/>
             <a:ext cx="5009538" cy="1266122"/>
             <a:chOff x="1193312" y="2814092"/>
             <a:chExt cx="4807496" cy="1839044"/>
@@ -18852,7 +9621,7 @@
         </p:nvGrpSpPr>
         <p:grpSpPr>
           <a:xfrm>
-            <a:off x="-518381" y="-614077"/>
+            <a:off x="432938" y="162118"/>
             <a:ext cx="4025514" cy="990588"/>
             <a:chOff x="3049665" y="977311"/>
             <a:chExt cx="4120968" cy="1014077"/>
@@ -19692,7 +10461,7 @@
         </p:nvGrpSpPr>
         <p:grpSpPr>
           <a:xfrm>
-            <a:off x="-604030" y="1288526"/>
+            <a:off x="628501" y="1384012"/>
             <a:ext cx="3583391" cy="650242"/>
             <a:chOff x="235732" y="4393940"/>
             <a:chExt cx="3668362" cy="665661"/>
@@ -20432,7 +11201,7 @@
         </p:nvSpPr>
         <p:spPr>
           <a:xfrm>
-            <a:off x="2294244" y="6353634"/>
+            <a:off x="848544" y="5445224"/>
             <a:ext cx="8476452" cy="849913"/>
           </a:xfrm>
           <a:prstGeom prst="rect">
@@ -20519,7 +11288,7 @@
         </p:nvSpPr>
         <p:spPr>
           <a:xfrm>
-            <a:off x="-604030" y="3881544"/>
+            <a:off x="380747" y="3786839"/>
             <a:ext cx="9144506" cy="1415324"/>
           </a:xfrm>
           <a:prstGeom prst="rect">
@@ -20605,7 +11374,7 @@
 </p:sld>
 </file>
 
-<file path=ppt/slides/slide4.xml><?xml version="1.0" encoding="utf-8"?>
+<file path=ppt/slides/slide3.xml><?xml version="1.0" encoding="utf-8"?>
 <p:sld xmlns:a="http://schemas.openxmlformats.org/drawingml/2006/main" xmlns:r="http://schemas.openxmlformats.org/officeDocument/2006/relationships" xmlns:p="http://schemas.openxmlformats.org/presentationml/2006/main">
   <p:cSld>
     <p:spTree>

--- a/ExaminerB/.appCatalog/ExaminerB notes 1404.pptx
+++ b/ExaminerB/.appCatalog/ExaminerB notes 1404.pptx
@@ -5,12 +5,13 @@
     <p:sldMasterId id="2147483648" r:id="rId1"/>
   </p:sldMasterIdLst>
   <p:notesMasterIdLst>
-    <p:notesMasterId r:id="rId5"/>
+    <p:notesMasterId r:id="rId6"/>
   </p:notesMasterIdLst>
   <p:sldIdLst>
     <p:sldId id="262" r:id="rId2"/>
     <p:sldId id="263" r:id="rId3"/>
-    <p:sldId id="264" r:id="rId4"/>
+    <p:sldId id="265" r:id="rId4"/>
+    <p:sldId id="264" r:id="rId5"/>
   </p:sldIdLst>
   <p:sldSz cx="9906000" cy="6858000" type="A4"/>
   <p:notesSz cx="6645275" cy="9777413"/>
@@ -280,7 +281,7 @@
             </a:pPr>
             <a:fld id="{BCC18F51-09EC-435C-A3BA-64A766E099C0}" type="datetimeFigureOut">
               <a:rPr lang="fa-IR"/>
-              <a:t>16/05/1448</a:t>
+              <a:t>17/05/1448</a:t>
             </a:fld>
             <a:endParaRPr/>
           </a:p>
@@ -459,7 +460,7 @@
             </a:pPr>
             <a:fld id="{BCC18F51-09EC-435C-A3BA-64A766E099C0}" type="datetimeFigureOut">
               <a:rPr lang="fa-IR"/>
-              <a:t>16/05/1448</a:t>
+              <a:t>17/05/1448</a:t>
             </a:fld>
             <a:endParaRPr/>
           </a:p>
@@ -648,7 +649,7 @@
             </a:pPr>
             <a:fld id="{BCC18F51-09EC-435C-A3BA-64A766E099C0}" type="datetimeFigureOut">
               <a:rPr lang="fa-IR"/>
-              <a:t>16/05/1448</a:t>
+              <a:t>17/05/1448</a:t>
             </a:fld>
             <a:endParaRPr/>
           </a:p>
@@ -827,7 +828,7 @@
             </a:pPr>
             <a:fld id="{BCC18F51-09EC-435C-A3BA-64A766E099C0}" type="datetimeFigureOut">
               <a:rPr lang="fa-IR"/>
-              <a:t>16/05/1448</a:t>
+              <a:t>17/05/1448</a:t>
             </a:fld>
             <a:endParaRPr/>
           </a:p>
@@ -1079,7 +1080,7 @@
             </a:pPr>
             <a:fld id="{BCC18F51-09EC-435C-A3BA-64A766E099C0}" type="datetimeFigureOut">
               <a:rPr lang="fa-IR"/>
-              <a:t>16/05/1448</a:t>
+              <a:t>17/05/1448</a:t>
             </a:fld>
             <a:endParaRPr/>
           </a:p>
@@ -1324,7 +1325,7 @@
             </a:pPr>
             <a:fld id="{BCC18F51-09EC-435C-A3BA-64A766E099C0}" type="datetimeFigureOut">
               <a:rPr lang="fa-IR"/>
-              <a:t>16/05/1448</a:t>
+              <a:t>17/05/1448</a:t>
             </a:fld>
             <a:endParaRPr/>
           </a:p>
@@ -1706,7 +1707,7 @@
             </a:pPr>
             <a:fld id="{BCC18F51-09EC-435C-A3BA-64A766E099C0}" type="datetimeFigureOut">
               <a:rPr lang="fa-IR"/>
-              <a:t>16/05/1448</a:t>
+              <a:t>17/05/1448</a:t>
             </a:fld>
             <a:endParaRPr/>
           </a:p>
@@ -1829,7 +1830,7 @@
             </a:pPr>
             <a:fld id="{BCC18F51-09EC-435C-A3BA-64A766E099C0}" type="datetimeFigureOut">
               <a:rPr lang="fa-IR"/>
-              <a:t>16/05/1448</a:t>
+              <a:t>17/05/1448</a:t>
             </a:fld>
             <a:endParaRPr/>
           </a:p>
@@ -1928,7 +1929,7 @@
             </a:pPr>
             <a:fld id="{BCC18F51-09EC-435C-A3BA-64A766E099C0}" type="datetimeFigureOut">
               <a:rPr lang="fa-IR"/>
-              <a:t>16/05/1448</a:t>
+              <a:t>17/05/1448</a:t>
             </a:fld>
             <a:endParaRPr/>
           </a:p>
@@ -2215,7 +2216,7 @@
             </a:pPr>
             <a:fld id="{BCC18F51-09EC-435C-A3BA-64A766E099C0}" type="datetimeFigureOut">
               <a:rPr lang="fa-IR"/>
-              <a:t>16/05/1448</a:t>
+              <a:t>17/05/1448</a:t>
             </a:fld>
             <a:endParaRPr/>
           </a:p>
@@ -2479,7 +2480,7 @@
             </a:pPr>
             <a:fld id="{BCC18F51-09EC-435C-A3BA-64A766E099C0}" type="datetimeFigureOut">
               <a:rPr lang="fa-IR"/>
-              <a:t>16/05/1448</a:t>
+              <a:t>17/05/1448</a:t>
             </a:fld>
             <a:endParaRPr/>
           </a:p>
@@ -2701,7 +2702,7 @@
             </a:pPr>
             <a:fld id="{BCC18F51-09EC-435C-A3BA-64A766E099C0}" type="datetimeFigureOut">
               <a:rPr lang="fa-IR"/>
-              <a:t>16/05/1448</a:t>
+              <a:t>17/05/1448</a:t>
             </a:fld>
             <a:endParaRPr/>
           </a:p>
@@ -11160,7 +11161,7 @@
                 <a:ea typeface="Dotum" panose="020B0600000101010101" pitchFamily="34" charset="-127"/>
                 <a:cs typeface="Biome Light" panose="020B0303030204020804" pitchFamily="34" charset="0"/>
               </a:rPr>
-              <a:t>aminer-Web / </a:t>
+              <a:t>aminer webapp / </a:t>
             </a:r>
             <a:r>
               <a:rPr lang="en-US" sz="8597">
@@ -11221,7 +11222,7 @@
                 <a:solidFill>
                   <a:schemeClr val="tx1"/>
                 </a:solidFill>
-                <a:latin typeface="Walbaum Display Light" panose="020F0502020204030204" pitchFamily="18" charset="0"/>
+                <a:latin typeface="Stormax Demo" pitchFamily="50" charset="0"/>
                 <a:ea typeface="Dotum" panose="020B0600000101010101" pitchFamily="34" charset="-127"/>
                 <a:cs typeface="Mj_Ebrahim" pitchFamily="2" charset="-78"/>
               </a:rPr>
@@ -11232,7 +11233,7 @@
                 <a:solidFill>
                   <a:srgbClr val="C00000"/>
                 </a:solidFill>
-                <a:latin typeface="Walbaum Display Light" panose="020F0502020204030204" pitchFamily="18" charset="0"/>
+                <a:latin typeface="Stormax Demo" pitchFamily="50" charset="0"/>
                 <a:ea typeface="Dotum" panose="020B0600000101010101" pitchFamily="34" charset="-127"/>
                 <a:cs typeface="Mj_Ebrahim" pitchFamily="2" charset="-78"/>
               </a:rPr>
@@ -11243,18 +11244,18 @@
                 <a:solidFill>
                   <a:schemeClr val="tx1"/>
                 </a:solidFill>
-                <a:latin typeface="Walbaum Display Light" panose="020F0502020204030204" pitchFamily="18" charset="0"/>
+                <a:latin typeface="Stormax Demo" pitchFamily="50" charset="0"/>
                 <a:ea typeface="Dotum" panose="020B0600000101010101" pitchFamily="34" charset="-127"/>
                 <a:cs typeface="Mj_Ebrahim" pitchFamily="2" charset="-78"/>
               </a:rPr>
-              <a:t>aminer - </a:t>
+              <a:t>aminer   </a:t>
             </a:r>
             <a:r>
               <a:rPr lang="en-US" sz="4923" i="1">
                 <a:solidFill>
                   <a:srgbClr val="C00000"/>
                 </a:solidFill>
-                <a:latin typeface="Walbaum Display Light" panose="020F0502020204030204" pitchFamily="18" charset="0"/>
+                <a:latin typeface="Stormax Demo" pitchFamily="50" charset="0"/>
                 <a:ea typeface="Dotum" panose="020B0600000101010101" pitchFamily="34" charset="-127"/>
                 <a:cs typeface="Mj_Ebrahim" pitchFamily="2" charset="-78"/>
               </a:rPr>
@@ -11265,7 +11266,7 @@
                 <a:solidFill>
                   <a:schemeClr val="tx1"/>
                 </a:solidFill>
-                <a:latin typeface="Walbaum Display Light" panose="020F0502020204030204" pitchFamily="18" charset="0"/>
+                <a:latin typeface="Stormax Demo" pitchFamily="50" charset="0"/>
                 <a:ea typeface="Dotum" panose="020B0600000101010101" pitchFamily="34" charset="-127"/>
                 <a:cs typeface="Mj_Ebrahim" pitchFamily="2" charset="-78"/>
               </a:rPr>
@@ -11375,6 +11376,281 @@
 </file>
 
 <file path=ppt/slides/slide3.xml><?xml version="1.0" encoding="utf-8"?>
+<p:sld xmlns:a="http://schemas.openxmlformats.org/drawingml/2006/main" xmlns:r="http://schemas.openxmlformats.org/officeDocument/2006/relationships" xmlns:p="http://schemas.openxmlformats.org/presentationml/2006/main">
+  <p:cSld>
+    <p:spTree>
+      <p:nvGrpSpPr>
+        <p:cNvPr id="1" name="">
+          <a:extLst>
+            <a:ext uri="{FF2B5EF4-FFF2-40B4-BE49-F238E27FC236}">
+              <a16:creationId xmlns:a16="http://schemas.microsoft.com/office/drawing/2014/main" id="{AB185D6D-CBF5-371E-4D03-1B60C8638E5B}"/>
+            </a:ext>
+          </a:extLst>
+        </p:cNvPr>
+        <p:cNvGrpSpPr/>
+        <p:nvPr/>
+      </p:nvGrpSpPr>
+      <p:grpSpPr>
+        <a:xfrm>
+          <a:off x="0" y="0"/>
+          <a:ext cx="0" cy="0"/>
+          <a:chOff x="0" y="0"/>
+          <a:chExt cx="0" cy="0"/>
+        </a:xfrm>
+      </p:grpSpPr>
+      <p:sp>
+        <p:nvSpPr>
+          <p:cNvPr id="20" name="TextBox 19">
+            <a:extLst>
+              <a:ext uri="{FF2B5EF4-FFF2-40B4-BE49-F238E27FC236}">
+                <a16:creationId xmlns:a16="http://schemas.microsoft.com/office/drawing/2014/main" id="{799EEBA2-CD4C-6B64-9D44-FA5656944A54}"/>
+              </a:ext>
+            </a:extLst>
+          </p:cNvPr>
+          <p:cNvSpPr txBox="1"/>
+          <p:nvPr/>
+        </p:nvSpPr>
+        <p:spPr>
+          <a:xfrm>
+            <a:off x="560512" y="5949280"/>
+            <a:ext cx="9144506" cy="584775"/>
+          </a:xfrm>
+          <a:prstGeom prst="rect">
+            <a:avLst/>
+          </a:prstGeom>
+          <a:noFill/>
+        </p:spPr>
+        <p:txBody>
+          <a:bodyPr wrap="square" rtlCol="0">
+            <a:spAutoFit/>
+          </a:bodyPr>
+          <a:lstStyle/>
+          <a:p>
+            <a:pPr algn="l" rtl="0"/>
+            <a:r>
+              <a:rPr lang="en-US" sz="3200">
+                <a:solidFill>
+                  <a:schemeClr val="tx1"/>
+                </a:solidFill>
+                <a:latin typeface="Takobe Demo" pitchFamily="2" charset="0"/>
+                <a:ea typeface="Dotum" panose="020B0600000101010101" pitchFamily="34" charset="-127"/>
+                <a:cs typeface="Biome Light" panose="020B0303030204020804" pitchFamily="34" charset="0"/>
+              </a:rPr>
+              <a:t>E</a:t>
+            </a:r>
+            <a:r>
+              <a:rPr lang="en-US" sz="3200">
+                <a:solidFill>
+                  <a:srgbClr val="C00000"/>
+                </a:solidFill>
+                <a:latin typeface="Takobe Demo" pitchFamily="2" charset="0"/>
+                <a:ea typeface="Dotum" panose="020B0600000101010101" pitchFamily="34" charset="-127"/>
+                <a:cs typeface="Biome Light" panose="020B0303030204020804" pitchFamily="34" charset="0"/>
+              </a:rPr>
+              <a:t>x</a:t>
+            </a:r>
+            <a:r>
+              <a:rPr lang="en-US" sz="3200">
+                <a:solidFill>
+                  <a:schemeClr val="tx1"/>
+                </a:solidFill>
+                <a:latin typeface="Takobe Demo" pitchFamily="2" charset="0"/>
+                <a:ea typeface="Dotum" panose="020B0600000101010101" pitchFamily="34" charset="-127"/>
+                <a:cs typeface="Biome Light" panose="020B0303030204020804" pitchFamily="34" charset="0"/>
+              </a:rPr>
+              <a:t>aminer webapp / </a:t>
+            </a:r>
+            <a:r>
+              <a:rPr lang="en-US" sz="3200">
+                <a:solidFill>
+                  <a:srgbClr val="C00000"/>
+                </a:solidFill>
+                <a:latin typeface="Takobe Demo" pitchFamily="2" charset="0"/>
+                <a:ea typeface="Dotum" panose="020B0600000101010101" pitchFamily="34" charset="-127"/>
+                <a:cs typeface="Biome Light" panose="020B0303030204020804" pitchFamily="34" charset="0"/>
+              </a:rPr>
+              <a:t>S</a:t>
+            </a:r>
+            <a:r>
+              <a:rPr lang="en-US" sz="3200">
+                <a:solidFill>
+                  <a:schemeClr val="tx1"/>
+                </a:solidFill>
+                <a:latin typeface="Takobe Demo" pitchFamily="2" charset="0"/>
+                <a:ea typeface="Dotum" panose="020B0600000101010101" pitchFamily="34" charset="-127"/>
+                <a:cs typeface="Biome Light" panose="020B0303030204020804" pitchFamily="34" charset="0"/>
+              </a:rPr>
+              <a:t>tudent</a:t>
+            </a:r>
+          </a:p>
+        </p:txBody>
+      </p:sp>
+      <p:sp>
+        <p:nvSpPr>
+          <p:cNvPr id="3" name="TextBox 2">
+            <a:extLst>
+              <a:ext uri="{FF2B5EF4-FFF2-40B4-BE49-F238E27FC236}">
+                <a16:creationId xmlns:a16="http://schemas.microsoft.com/office/drawing/2014/main" id="{BA542C89-B88B-B466-BB4E-C23D746331F0}"/>
+              </a:ext>
+            </a:extLst>
+          </p:cNvPr>
+          <p:cNvSpPr txBox="1"/>
+          <p:nvPr/>
+        </p:nvSpPr>
+        <p:spPr>
+          <a:xfrm>
+            <a:off x="380747" y="3136612"/>
+            <a:ext cx="8476452" cy="1200329"/>
+          </a:xfrm>
+          <a:prstGeom prst="rect">
+            <a:avLst/>
+          </a:prstGeom>
+          <a:noFill/>
+        </p:spPr>
+        <p:txBody>
+          <a:bodyPr wrap="square" rtlCol="0">
+            <a:spAutoFit/>
+          </a:bodyPr>
+          <a:lstStyle/>
+          <a:p>
+            <a:pPr algn="l" rtl="0"/>
+            <a:r>
+              <a:rPr lang="en-US" sz="7200" i="1">
+                <a:solidFill>
+                  <a:schemeClr val="tx1"/>
+                </a:solidFill>
+                <a:latin typeface="Brush Script MT" panose="03060802040406070304" pitchFamily="66" charset="0"/>
+                <a:ea typeface="Dotum" panose="020B0600000101010101" pitchFamily="34" charset="-127"/>
+                <a:cs typeface="Mj_Ebrahim" pitchFamily="2" charset="-78"/>
+              </a:rPr>
+              <a:t>e</a:t>
+            </a:r>
+            <a:r>
+              <a:rPr lang="en-US" sz="7200" i="1">
+                <a:solidFill>
+                  <a:srgbClr val="C00000"/>
+                </a:solidFill>
+                <a:latin typeface="Brush Script MT" panose="03060802040406070304" pitchFamily="66" charset="0"/>
+                <a:ea typeface="Dotum" panose="020B0600000101010101" pitchFamily="34" charset="-127"/>
+                <a:cs typeface="Mj_Ebrahim" pitchFamily="2" charset="-78"/>
+              </a:rPr>
+              <a:t>x</a:t>
+            </a:r>
+            <a:r>
+              <a:rPr lang="en-US" sz="7200" i="1">
+                <a:solidFill>
+                  <a:schemeClr val="tx1"/>
+                </a:solidFill>
+                <a:latin typeface="Brush Script MT" panose="03060802040406070304" pitchFamily="66" charset="0"/>
+                <a:ea typeface="Dotum" panose="020B0600000101010101" pitchFamily="34" charset="-127"/>
+                <a:cs typeface="Mj_Ebrahim" pitchFamily="2" charset="-78"/>
+              </a:rPr>
+              <a:t>aminer   </a:t>
+            </a:r>
+            <a:r>
+              <a:rPr lang="en-US" sz="7200" i="1">
+                <a:solidFill>
+                  <a:srgbClr val="C00000"/>
+                </a:solidFill>
+                <a:latin typeface="Brush Script MT" panose="03060802040406070304" pitchFamily="66" charset="0"/>
+                <a:ea typeface="Dotum" panose="020B0600000101010101" pitchFamily="34" charset="-127"/>
+                <a:cs typeface="Mj_Ebrahim" pitchFamily="2" charset="-78"/>
+              </a:rPr>
+              <a:t>s</a:t>
+            </a:r>
+            <a:r>
+              <a:rPr lang="en-US" sz="7200" i="1">
+                <a:solidFill>
+                  <a:schemeClr val="tx1"/>
+                </a:solidFill>
+                <a:latin typeface="Brush Script MT" panose="03060802040406070304" pitchFamily="66" charset="0"/>
+                <a:ea typeface="Dotum" panose="020B0600000101010101" pitchFamily="34" charset="-127"/>
+                <a:cs typeface="Mj_Ebrahim" pitchFamily="2" charset="-78"/>
+              </a:rPr>
+              <a:t>tudent</a:t>
+            </a:r>
+          </a:p>
+        </p:txBody>
+      </p:sp>
+      <p:sp>
+        <p:nvSpPr>
+          <p:cNvPr id="4" name="TextBox 3">
+            <a:extLst>
+              <a:ext uri="{FF2B5EF4-FFF2-40B4-BE49-F238E27FC236}">
+                <a16:creationId xmlns:a16="http://schemas.microsoft.com/office/drawing/2014/main" id="{BF7C7A78-3DCC-BCCD-976F-06B6E8D77426}"/>
+              </a:ext>
+            </a:extLst>
+          </p:cNvPr>
+          <p:cNvSpPr txBox="1"/>
+          <p:nvPr/>
+        </p:nvSpPr>
+        <p:spPr>
+          <a:xfrm>
+            <a:off x="391196" y="323945"/>
+            <a:ext cx="9144506" cy="584775"/>
+          </a:xfrm>
+          <a:prstGeom prst="rect">
+            <a:avLst/>
+          </a:prstGeom>
+          <a:noFill/>
+        </p:spPr>
+        <p:txBody>
+          <a:bodyPr wrap="square" rtlCol="0">
+            <a:spAutoFit/>
+          </a:bodyPr>
+          <a:lstStyle/>
+          <a:p>
+            <a:pPr algn="l" rtl="0"/>
+            <a:r>
+              <a:rPr lang="en-US" sz="3200">
+                <a:solidFill>
+                  <a:schemeClr val="tx1"/>
+                </a:solidFill>
+                <a:latin typeface="Sigokae Demo" panose="02000600000000000000" pitchFamily="2" charset="0"/>
+                <a:ea typeface="Dotum" panose="020B0600000101010101" pitchFamily="34" charset="-127"/>
+                <a:cs typeface="Biome Light" panose="020B0303030204020804" pitchFamily="34" charset="0"/>
+              </a:rPr>
+              <a:t>E</a:t>
+            </a:r>
+            <a:r>
+              <a:rPr lang="en-US" sz="3200">
+                <a:solidFill>
+                  <a:srgbClr val="C00000"/>
+                </a:solidFill>
+                <a:latin typeface="Sigokae Demo" panose="02000600000000000000" pitchFamily="2" charset="0"/>
+                <a:ea typeface="Dotum" panose="020B0600000101010101" pitchFamily="34" charset="-127"/>
+                <a:cs typeface="Biome Light" panose="020B0303030204020804" pitchFamily="34" charset="0"/>
+              </a:rPr>
+              <a:t>x</a:t>
+            </a:r>
+            <a:r>
+              <a:rPr lang="en-US" sz="3200">
+                <a:solidFill>
+                  <a:schemeClr val="tx1"/>
+                </a:solidFill>
+                <a:latin typeface="Sigokae Demo" panose="02000600000000000000" pitchFamily="2" charset="0"/>
+                <a:ea typeface="Dotum" panose="020B0600000101010101" pitchFamily="34" charset="-127"/>
+                <a:cs typeface="Biome Light" panose="020B0303030204020804" pitchFamily="34" charset="0"/>
+              </a:rPr>
+              <a:t>aminer</a:t>
+            </a:r>
+          </a:p>
+        </p:txBody>
+      </p:sp>
+    </p:spTree>
+    <p:extLst>
+      <p:ext uri="{BB962C8B-B14F-4D97-AF65-F5344CB8AC3E}">
+        <p14:creationId xmlns:p14="http://schemas.microsoft.com/office/powerpoint/2010/main" val="2765953567"/>
+      </p:ext>
+    </p:extLst>
+  </p:cSld>
+  <p:clrMapOvr>
+    <a:masterClrMapping/>
+  </p:clrMapOvr>
+</p:sld>
+</file>
+
+<file path=ppt/slides/slide4.xml><?xml version="1.0" encoding="utf-8"?>
 <p:sld xmlns:a="http://schemas.openxmlformats.org/drawingml/2006/main" xmlns:r="http://schemas.openxmlformats.org/officeDocument/2006/relationships" xmlns:p="http://schemas.openxmlformats.org/presentationml/2006/main">
   <p:cSld>
     <p:spTree>
